--- a/WRC_WAIC_2026_embodied_system012_onepage.pptx
+++ b/WRC_WAIC_2026_embodied_system012_onepage.pptx
@@ -3104,8 +3104,8 @@
         </p:nvSpPr>
         <p:spPr>
           <a:xfrm>
-            <a:off x="384048" y="164592"/>
-            <a:ext cx="9509760" cy="384048"/>
+            <a:off x="274320" y="100584"/>
+            <a:ext cx="8961120" cy="320040"/>
           </a:xfrm>
           <a:prstGeom prst="rect">
             <a:avLst/>
@@ -3118,15 +3118,19 @@
           </a:bodyPr>
           <a:lstStyle/>
           <a:p>
-            <a:pPr algn="l"/>
+            <a:pPr algn="l">
+              <a:spcAft>
+                <a:spcPts val="0"/>
+              </a:spcAft>
+            </a:pPr>
             <a:r>
-              <a:rPr sz="1950" b="1">
+              <a:rPr sz="1800" b="1">
                 <a:solidFill>
-                  <a:srgbClr val="14202C"/>
+                  <a:srgbClr val="121B26"/>
                 </a:solidFill>
                 <a:latin typeface="Microsoft YaHei UI"/>
               </a:rPr>
-              <a:t>WRC/WAIC 2026 具身智能大小脑：端侧算力与模型量化竞争</a:t>
+              <a:t>WRC/WAIC 2026 机器人“大脑模型”量化对比</a:t>
             </a:r>
           </a:p>
         </p:txBody>
@@ -3139,8 +3143,8 @@
         </p:nvSpPr>
         <p:spPr>
           <a:xfrm>
-            <a:off x="402336" y="566928"/>
-            <a:ext cx="8595360" cy="237744"/>
+            <a:off x="292608" y="429768"/>
+            <a:ext cx="9875520" cy="164592"/>
           </a:xfrm>
           <a:prstGeom prst="rect">
             <a:avLst/>
@@ -3153,15 +3157,19 @@
           </a:bodyPr>
           <a:lstStyle/>
           <a:p>
-            <a:pPr algn="l"/>
+            <a:pPr algn="l">
+              <a:spcAft>
+                <a:spcPts val="0"/>
+              </a:spcAft>
+            </a:pPr>
             <a:r>
-              <a:rPr sz="840" b="0">
+              <a:rPr sz="720" b="0">
                 <a:solidFill>
-                  <a:srgbClr val="536273"/>
+                  <a:srgbClr val="566372"/>
                 </a:solidFill>
                 <a:latin typeface="Microsoft YaHei UI"/>
               </a:rPr>
-              <a:t>System 0/1/2 视角，只保留公开披露了参数量、算力、延迟或频率的头部样本</a:t>
+              <a:t>仅保留 VLA、世界模型/WAM、具身基座模型与端侧部署数据；空白代表当前公开资料未给出</a:t>
             </a:r>
           </a:p>
         </p:txBody>
@@ -3174,20 +3182,20 @@
         </p:nvSpPr>
         <p:spPr>
           <a:xfrm>
-            <a:off x="9619488" y="192024"/>
-            <a:ext cx="2157984" cy="356616"/>
+            <a:off x="9985248" y="128016"/>
+            <a:ext cx="1874519" cy="283464"/>
           </a:xfrm>
           <a:prstGeom prst="roundRect">
             <a:avLst>
-              <a:gd name="adj" fmla="val 15000"/>
+              <a:gd name="adj" fmla="val 12000"/>
             </a:avLst>
           </a:prstGeom>
           <a:solidFill>
-            <a:srgbClr val="DFF1F4"/>
+            <a:srgbClr val="E1F1F4"/>
           </a:solidFill>
           <a:ln>
             <a:solidFill>
-              <a:srgbClr val="B2DCE2"/>
+              <a:srgbClr val="B4DBE1"/>
             </a:solidFill>
           </a:ln>
         </p:spPr>
@@ -3211,13 +3219,13 @@
           <a:p>
             <a:pPr algn="ctr"/>
             <a:r>
-              <a:rPr sz="720" b="1">
+              <a:rPr sz="640" b="1">
                 <a:solidFill>
-                  <a:srgbClr val="0D4B58"/>
+                  <a:srgbClr val="0F5766"/>
                 </a:solidFill>
                 <a:latin typeface="Microsoft YaHei UI"/>
               </a:rPr>
-              <a:t>公开数据优先 | 2026-08-29</a:t>
+              <a:t>一页版 | 2026-08-29</a:t>
             </a:r>
           </a:p>
         </p:txBody>
@@ -3231,8 +3239,8 @@
           <p:nvPr/>
         </p:nvGraphicFramePr>
         <p:xfrm>
-          <a:off x="310896" y="905256"/>
-          <a:ext cx="11576304" cy="4315968"/>
+          <a:off x="201168" y="667512"/>
+          <a:ext cx="11795759" cy="5230368"/>
         </p:xfrm>
         <a:graphic>
           <a:graphicData uri="http://schemas.openxmlformats.org/drawingml/2006/table">
@@ -3241,13 +3249,14 @@
                 <a:tableStyleId>{5C22544A-7EE6-4342-B048-85BDC9FD1C3A}</a:tableStyleId>
               </a:tblPr>
               <a:tblGrid>
-                <a:gridCol w="1133856"/>
-                <a:gridCol w="2029968"/>
-                <a:gridCol w="2359152"/>
-                <a:gridCol w="3401568"/>
-                <a:gridCol w="2651760"/>
+                <a:gridCol w="1060704"/>
+                <a:gridCol w="2103120"/>
+                <a:gridCol w="1965960"/>
+                <a:gridCol w="2084831"/>
+                <a:gridCol w="2404872"/>
+                <a:gridCol w="2176272"/>
               </a:tblGrid>
-              <a:tr h="347472">
+              <a:tr h="310896">
                 <a:tc>
                   <a:txBody>
                     <a:bodyPr wrap="square">
@@ -3257,53 +3266,49 @@
                     <a:p>
                       <a:pPr algn="ctr">
                         <a:lnSpc>
-                          <a:spcPct val="92000"/>
-                        </a:lnSpc>
-                        <a:spcBef>
-                          <a:spcPts val="0"/>
-                        </a:spcBef>
-                        <a:spcAft>
-                          <a:spcPts val="0"/>
-                        </a:spcAft>
-                      </a:pPr>
-                      <a:r>
-                        <a:rPr sz="770" b="1">
+                          <a:spcPct val="86000"/>
+                        </a:lnSpc>
+                        <a:spcBef>
+                          <a:spcPts val="0"/>
+                        </a:spcBef>
+                        <a:spcAft>
+                          <a:spcPts val="0"/>
+                        </a:spcAft>
+                      </a:pPr>
+                      <a:r>
+                        <a:rPr sz="640" b="1">
                           <a:solidFill>
                             <a:srgbClr val="FFFFFF"/>
                           </a:solidFill>
                           <a:latin typeface="Microsoft YaHei UI"/>
                         </a:rPr>
-                        <a:t>玩家</a:t>
+                        <a:t>玩家/项目</a:t>
                       </a:r>
                     </a:p>
                   </a:txBody>
-                  <a:tcPr anchor="ctr" marL="36576" marR="36576" marT="18288" marB="18288">
+                  <a:tcPr anchor="ctr" marL="32004" marR="32004" marT="10972" marB="10972">
                     <a:solidFill>
-                      <a:srgbClr val="0D4B58"/>
+                      <a:srgbClr val="0D4452"/>
                     </a:solidFill>
-                    <a:lnL w="6350">
-                      <a:solidFill>
-                        <a:srgbClr val="0D4B58"/>
-                      </a:solidFill>
-                      <a:prstDash val="solid"/>
+                    <a:lnL w="4200">
+                      <a:solidFill>
+                        <a:srgbClr val="0D4452"/>
+                      </a:solidFill>
                     </a:lnL>
-                    <a:lnR w="6350">
-                      <a:solidFill>
-                        <a:srgbClr val="0D4B58"/>
-                      </a:solidFill>
-                      <a:prstDash val="solid"/>
+                    <a:lnR w="4200">
+                      <a:solidFill>
+                        <a:srgbClr val="0D4452"/>
+                      </a:solidFill>
                     </a:lnR>
-                    <a:lnT w="6350">
-                      <a:solidFill>
-                        <a:srgbClr val="0D4B58"/>
-                      </a:solidFill>
-                      <a:prstDash val="solid"/>
+                    <a:lnT w="4200">
+                      <a:solidFill>
+                        <a:srgbClr val="0D4452"/>
+                      </a:solidFill>
                     </a:lnT>
-                    <a:lnB w="6350">
-                      <a:solidFill>
-                        <a:srgbClr val="0D4B58"/>
-                      </a:solidFill>
-                      <a:prstDash val="solid"/>
+                    <a:lnB w="4200">
+                      <a:solidFill>
+                        <a:srgbClr val="0D4452"/>
+                      </a:solidFill>
                     </a:lnB>
                   </a:tcPr>
                 </a:tc>
@@ -3316,53 +3321,49 @@
                     <a:p>
                       <a:pPr algn="ctr">
                         <a:lnSpc>
-                          <a:spcPct val="92000"/>
-                        </a:lnSpc>
-                        <a:spcBef>
-                          <a:spcPts val="0"/>
-                        </a:spcBef>
-                        <a:spcAft>
-                          <a:spcPts val="0"/>
-                        </a:spcAft>
-                      </a:pPr>
-                      <a:r>
-                        <a:rPr sz="770" b="1">
+                          <a:spcPct val="86000"/>
+                        </a:lnSpc>
+                        <a:spcBef>
+                          <a:spcPts val="0"/>
+                        </a:spcBef>
+                        <a:spcAft>
+                          <a:spcPts val="0"/>
+                        </a:spcAft>
+                      </a:pPr>
+                      <a:r>
+                        <a:rPr sz="640" b="1">
                           <a:solidFill>
                             <a:srgbClr val="FFFFFF"/>
                           </a:solidFill>
                           <a:latin typeface="Microsoft YaHei UI"/>
                         </a:rPr>
-                        <a:t>大小脑模型/路线</a:t>
+                        <a:t>大脑模型</a:t>
                       </a:r>
                     </a:p>
                   </a:txBody>
-                  <a:tcPr anchor="ctr" marL="36576" marR="36576" marT="18288" marB="18288">
+                  <a:tcPr anchor="ctr" marL="32004" marR="32004" marT="10972" marB="10972">
                     <a:solidFill>
-                      <a:srgbClr val="0D4B58"/>
+                      <a:srgbClr val="0D4452"/>
                     </a:solidFill>
-                    <a:lnL w="6350">
-                      <a:solidFill>
-                        <a:srgbClr val="0D4B58"/>
-                      </a:solidFill>
-                      <a:prstDash val="solid"/>
+                    <a:lnL w="4200">
+                      <a:solidFill>
+                        <a:srgbClr val="0D4452"/>
+                      </a:solidFill>
                     </a:lnL>
-                    <a:lnR w="6350">
-                      <a:solidFill>
-                        <a:srgbClr val="0D4B58"/>
-                      </a:solidFill>
-                      <a:prstDash val="solid"/>
+                    <a:lnR w="4200">
+                      <a:solidFill>
+                        <a:srgbClr val="0D4452"/>
+                      </a:solidFill>
                     </a:lnR>
-                    <a:lnT w="6350">
-                      <a:solidFill>
-                        <a:srgbClr val="0D4B58"/>
-                      </a:solidFill>
-                      <a:prstDash val="solid"/>
+                    <a:lnT w="4200">
+                      <a:solidFill>
+                        <a:srgbClr val="0D4452"/>
+                      </a:solidFill>
                     </a:lnT>
-                    <a:lnB w="6350">
-                      <a:solidFill>
-                        <a:srgbClr val="0D4B58"/>
-                      </a:solidFill>
-                      <a:prstDash val="solid"/>
+                    <a:lnB w="4200">
+                      <a:solidFill>
+                        <a:srgbClr val="0D4452"/>
+                      </a:solidFill>
                     </a:lnB>
                   </a:tcPr>
                 </a:tc>
@@ -3375,53 +3376,49 @@
                     <a:p>
                       <a:pPr algn="ctr">
                         <a:lnSpc>
-                          <a:spcPct val="92000"/>
-                        </a:lnSpc>
-                        <a:spcBef>
-                          <a:spcPts val="0"/>
-                        </a:spcBef>
-                        <a:spcAft>
-                          <a:spcPts val="0"/>
-                        </a:spcAft>
-                      </a:pPr>
-                      <a:r>
-                        <a:rPr sz="770" b="1">
+                          <a:spcPct val="86000"/>
+                        </a:lnSpc>
+                        <a:spcBef>
+                          <a:spcPts val="0"/>
+                        </a:spcBef>
+                        <a:spcAft>
+                          <a:spcPts val="0"/>
+                        </a:spcAft>
+                      </a:pPr>
+                      <a:r>
+                        <a:rPr sz="640" b="1">
                           <a:solidFill>
                             <a:srgbClr val="FFFFFF"/>
                           </a:solidFill>
                           <a:latin typeface="Microsoft YaHei UI"/>
                         </a:rPr>
-                        <a:t>参数量与数据</a:t>
+                        <a:t>模型架构</a:t>
                       </a:r>
                     </a:p>
                   </a:txBody>
-                  <a:tcPr anchor="ctr" marL="36576" marR="36576" marT="18288" marB="18288">
+                  <a:tcPr anchor="ctr" marL="32004" marR="32004" marT="10972" marB="10972">
                     <a:solidFill>
-                      <a:srgbClr val="0D4B58"/>
+                      <a:srgbClr val="0D4452"/>
                     </a:solidFill>
-                    <a:lnL w="6350">
-                      <a:solidFill>
-                        <a:srgbClr val="0D4B58"/>
-                      </a:solidFill>
-                      <a:prstDash val="solid"/>
+                    <a:lnL w="4200">
+                      <a:solidFill>
+                        <a:srgbClr val="0D4452"/>
+                      </a:solidFill>
                     </a:lnL>
-                    <a:lnR w="6350">
-                      <a:solidFill>
-                        <a:srgbClr val="0D4B58"/>
-                      </a:solidFill>
-                      <a:prstDash val="solid"/>
+                    <a:lnR w="4200">
+                      <a:solidFill>
+                        <a:srgbClr val="0D4452"/>
+                      </a:solidFill>
                     </a:lnR>
-                    <a:lnT w="6350">
-                      <a:solidFill>
-                        <a:srgbClr val="0D4B58"/>
-                      </a:solidFill>
-                      <a:prstDash val="solid"/>
+                    <a:lnT w="4200">
+                      <a:solidFill>
+                        <a:srgbClr val="0D4452"/>
+                      </a:solidFill>
                     </a:lnT>
-                    <a:lnB w="6350">
-                      <a:solidFill>
-                        <a:srgbClr val="0D4B58"/>
-                      </a:solidFill>
-                      <a:prstDash val="solid"/>
+                    <a:lnB w="4200">
+                      <a:solidFill>
+                        <a:srgbClr val="0D4452"/>
+                      </a:solidFill>
                     </a:lnB>
                   </a:tcPr>
                 </a:tc>
@@ -3434,53 +3431,49 @@
                     <a:p>
                       <a:pPr algn="ctr">
                         <a:lnSpc>
-                          <a:spcPct val="92000"/>
-                        </a:lnSpc>
-                        <a:spcBef>
-                          <a:spcPts val="0"/>
-                        </a:spcBef>
-                        <a:spcAft>
-                          <a:spcPts val="0"/>
-                        </a:spcAft>
-                      </a:pPr>
-                      <a:r>
-                        <a:rPr sz="770" b="1">
+                          <a:spcPct val="86000"/>
+                        </a:lnSpc>
+                        <a:spcBef>
+                          <a:spcPts val="0"/>
+                        </a:spcBef>
+                        <a:spcAft>
+                          <a:spcPts val="0"/>
+                        </a:spcAft>
+                      </a:pPr>
+                      <a:r>
+                        <a:rPr sz="640" b="1">
                           <a:solidFill>
                             <a:srgbClr val="FFFFFF"/>
                           </a:solidFill>
                           <a:latin typeface="Microsoft YaHei UI"/>
                         </a:rPr>
-                        <a:t>端侧算力 / 推理频率</a:t>
+                        <a:t>参数量 / 数据</a:t>
                       </a:r>
                     </a:p>
                   </a:txBody>
-                  <a:tcPr anchor="ctr" marL="36576" marR="36576" marT="18288" marB="18288">
+                  <a:tcPr anchor="ctr" marL="32004" marR="32004" marT="10972" marB="10972">
                     <a:solidFill>
-                      <a:srgbClr val="0D4B58"/>
+                      <a:srgbClr val="0D4452"/>
                     </a:solidFill>
-                    <a:lnL w="6350">
-                      <a:solidFill>
-                        <a:srgbClr val="0D4B58"/>
-                      </a:solidFill>
-                      <a:prstDash val="solid"/>
+                    <a:lnL w="4200">
+                      <a:solidFill>
+                        <a:srgbClr val="0D4452"/>
+                      </a:solidFill>
                     </a:lnL>
-                    <a:lnR w="6350">
-                      <a:solidFill>
-                        <a:srgbClr val="0D4B58"/>
-                      </a:solidFill>
-                      <a:prstDash val="solid"/>
+                    <a:lnR w="4200">
+                      <a:solidFill>
+                        <a:srgbClr val="0D4452"/>
+                      </a:solidFill>
                     </a:lnR>
-                    <a:lnT w="6350">
-                      <a:solidFill>
-                        <a:srgbClr val="0D4B58"/>
-                      </a:solidFill>
-                      <a:prstDash val="solid"/>
+                    <a:lnT w="4200">
+                      <a:solidFill>
+                        <a:srgbClr val="0D4452"/>
+                      </a:solidFill>
                     </a:lnT>
-                    <a:lnB w="6350">
-                      <a:solidFill>
-                        <a:srgbClr val="0D4B58"/>
-                      </a:solidFill>
-                      <a:prstDash val="solid"/>
+                    <a:lnB w="4200">
+                      <a:solidFill>
+                        <a:srgbClr val="0D4452"/>
+                      </a:solidFill>
                     </a:lnB>
                   </a:tcPr>
                 </a:tc>
@@ -3493,136 +3486,49 @@
                     <a:p>
                       <a:pPr algn="ctr">
                         <a:lnSpc>
-                          <a:spcPct val="92000"/>
-                        </a:lnSpc>
-                        <a:spcBef>
-                          <a:spcPts val="0"/>
-                        </a:spcBef>
-                        <a:spcAft>
-                          <a:spcPts val="0"/>
-                        </a:spcAft>
-                      </a:pPr>
-                      <a:r>
-                        <a:rPr sz="770" b="1">
+                          <a:spcPct val="86000"/>
+                        </a:lnSpc>
+                        <a:spcBef>
+                          <a:spcPts val="0"/>
+                        </a:spcBef>
+                        <a:spcAft>
+                          <a:spcPts val="0"/>
+                        </a:spcAft>
+                      </a:pPr>
+                      <a:r>
+                        <a:rPr sz="640" b="1">
                           <a:solidFill>
                             <a:srgbClr val="FFFFFF"/>
                           </a:solidFill>
                           <a:latin typeface="Microsoft YaHei UI"/>
                         </a:rPr>
-                        <a:t>一页判断</a:t>
+                        <a:t>算力与部署</a:t>
                       </a:r>
                     </a:p>
                   </a:txBody>
-                  <a:tcPr anchor="ctr" marL="36576" marR="36576" marT="18288" marB="18288">
+                  <a:tcPr anchor="ctr" marL="32004" marR="32004" marT="10972" marB="10972">
                     <a:solidFill>
-                      <a:srgbClr val="0D4B58"/>
-                    </a:solidFill>
-                    <a:lnL w="6350">
-                      <a:solidFill>
-                        <a:srgbClr val="0D4B58"/>
-                      </a:solidFill>
-                      <a:prstDash val="solid"/>
-                    </a:lnL>
-                    <a:lnR w="6350">
-                      <a:solidFill>
-                        <a:srgbClr val="0D4B58"/>
-                      </a:solidFill>
-                      <a:prstDash val="solid"/>
-                    </a:lnR>
-                    <a:lnT w="6350">
-                      <a:solidFill>
-                        <a:srgbClr val="0D4B58"/>
-                      </a:solidFill>
-                      <a:prstDash val="solid"/>
-                    </a:lnT>
-                    <a:lnB w="6350">
-                      <a:solidFill>
-                        <a:srgbClr val="0D4B58"/>
-                      </a:solidFill>
-                      <a:prstDash val="solid"/>
-                    </a:lnB>
-                  </a:tcPr>
-                </a:tc>
-              </a:tr>
-              <a:tr h="566928">
-                <a:tc>
-                  <a:txBody>
-                    <a:bodyPr wrap="square">
-                      <a:normAutofit/>
-                    </a:bodyPr>
-                    <a:lstStyle/>
-                    <a:p>
-                      <a:pPr algn="ctr">
-                        <a:lnSpc>
-                          <a:spcPct val="92000"/>
-                        </a:lnSpc>
-                        <a:spcBef>
-                          <a:spcPts val="0"/>
-                        </a:spcBef>
-                        <a:spcAft>
-                          <a:spcPts val="0"/>
-                        </a:spcAft>
-                      </a:pPr>
-                      <a:r>
-                        <a:rPr sz="675" b="1">
-                          <a:solidFill>
-                            <a:srgbClr val="14202C"/>
-                          </a:solidFill>
-                          <a:latin typeface="Microsoft YaHei UI"/>
-                        </a:rPr>
-                        <a:t>银河通用</a:t>
-                      </a:r>
-                    </a:p>
-                    <a:p>
-                      <a:pPr algn="ctr">
-                        <a:lnSpc>
-                          <a:spcPct val="92000"/>
-                        </a:lnSpc>
-                        <a:spcBef>
-                          <a:spcPts val="0"/>
-                        </a:spcBef>
-                        <a:spcAft>
-                          <a:spcPts val="0"/>
-                        </a:spcAft>
-                      </a:pPr>
-                      <a:r>
-                        <a:rPr sz="675" b="1">
-                          <a:solidFill>
-                            <a:srgbClr val="14202C"/>
-                          </a:solidFill>
-                          <a:latin typeface="Microsoft YaHei UI"/>
-                        </a:rPr>
-                        <a:t>Galbot</a:t>
-                      </a:r>
-                    </a:p>
-                  </a:txBody>
-                  <a:tcPr anchor="ctr" marL="36576" marR="36576" marT="18288" marB="18288">
-                    <a:solidFill>
-                      <a:srgbClr val="FFFFFF"/>
+                      <a:srgbClr val="0D4452"/>
                     </a:solidFill>
                     <a:lnL w="4200">
                       <a:solidFill>
-                        <a:srgbClr val="BFCBD6"/>
-                      </a:solidFill>
-                      <a:prstDash val="solid"/>
+                        <a:srgbClr val="0D4452"/>
+                      </a:solidFill>
                     </a:lnL>
                     <a:lnR w="4200">
                       <a:solidFill>
-                        <a:srgbClr val="BFCBD6"/>
-                      </a:solidFill>
-                      <a:prstDash val="solid"/>
+                        <a:srgbClr val="0D4452"/>
+                      </a:solidFill>
                     </a:lnR>
                     <a:lnT w="4200">
                       <a:solidFill>
-                        <a:srgbClr val="BFCBD6"/>
-                      </a:solidFill>
-                      <a:prstDash val="solid"/>
+                        <a:srgbClr val="0D4452"/>
+                      </a:solidFill>
                     </a:lnT>
                     <a:lnB w="4200">
                       <a:solidFill>
-                        <a:srgbClr val="BFCBD6"/>
-                      </a:solidFill>
-                      <a:prstDash val="solid"/>
+                        <a:srgbClr val="0D4452"/>
+                      </a:solidFill>
                     </a:lnB>
                   </a:tcPr>
                 </a:tc>
@@ -3633,77 +3539,130 @@
                     </a:bodyPr>
                     <a:lstStyle/>
                     <a:p>
-                      <a:pPr algn="l">
-                        <a:lnSpc>
-                          <a:spcPct val="92000"/>
-                        </a:lnSpc>
-                        <a:spcBef>
-                          <a:spcPts val="0"/>
-                        </a:spcBef>
-                        <a:spcAft>
-                          <a:spcPts val="0"/>
-                        </a:spcAft>
-                      </a:pPr>
-                      <a:r>
-                        <a:rPr sz="675" b="0">
-                          <a:solidFill>
-                            <a:srgbClr val="14202C"/>
-                          </a:solidFill>
-                          <a:latin typeface="Microsoft YaHei UI"/>
-                        </a:rPr>
-                        <a:t>AstraBrain-WBC 小脑</a:t>
-                      </a:r>
-                    </a:p>
-                    <a:p>
-                      <a:pPr algn="l">
-                        <a:lnSpc>
-                          <a:spcPct val="92000"/>
-                        </a:lnSpc>
-                        <a:spcBef>
-                          <a:spcPts val="0"/>
-                        </a:spcBef>
-                        <a:spcAft>
-                          <a:spcPts val="0"/>
-                        </a:spcAft>
-                      </a:pPr>
-                      <a:r>
-                        <a:rPr sz="675" b="0">
-                          <a:solidFill>
-                            <a:srgbClr val="14202C"/>
-                          </a:solidFill>
-                          <a:latin typeface="Microsoft YaHei UI"/>
-                        </a:rPr>
-                        <a:t>LDA-1B / WAM / VLA</a:t>
+                      <a:pPr algn="ctr">
+                        <a:lnSpc>
+                          <a:spcPct val="86000"/>
+                        </a:lnSpc>
+                        <a:spcBef>
+                          <a:spcPts val="0"/>
+                        </a:spcBef>
+                        <a:spcAft>
+                          <a:spcPts val="0"/>
+                        </a:spcAft>
+                      </a:pPr>
+                      <a:r>
+                        <a:rPr sz="640" b="1">
+                          <a:solidFill>
+                            <a:srgbClr val="FFFFFF"/>
+                          </a:solidFill>
+                          <a:latin typeface="Microsoft YaHei UI"/>
+                        </a:rPr>
+                        <a:t>推理频率 / 延迟</a:t>
                       </a:r>
                     </a:p>
                   </a:txBody>
-                  <a:tcPr anchor="ctr" marL="36576" marR="36576" marT="18288" marB="18288">
+                  <a:tcPr anchor="ctr" marL="32004" marR="32004" marT="10972" marB="10972">
+                    <a:solidFill>
+                      <a:srgbClr val="0D4452"/>
+                    </a:solidFill>
+                    <a:lnL w="4200">
+                      <a:solidFill>
+                        <a:srgbClr val="0D4452"/>
+                      </a:solidFill>
+                    </a:lnL>
+                    <a:lnR w="4200">
+                      <a:solidFill>
+                        <a:srgbClr val="0D4452"/>
+                      </a:solidFill>
+                    </a:lnR>
+                    <a:lnT w="4200">
+                      <a:solidFill>
+                        <a:srgbClr val="0D4452"/>
+                      </a:solidFill>
+                    </a:lnT>
+                    <a:lnB w="4200">
+                      <a:solidFill>
+                        <a:srgbClr val="0D4452"/>
+                      </a:solidFill>
+                    </a:lnB>
+                  </a:tcPr>
+                </a:tc>
+              </a:tr>
+              <a:tr h="409956">
+                <a:tc>
+                  <a:txBody>
+                    <a:bodyPr wrap="square">
+                      <a:normAutofit/>
+                    </a:bodyPr>
+                    <a:lstStyle/>
+                    <a:p>
+                      <a:pPr algn="ctr">
+                        <a:lnSpc>
+                          <a:spcPct val="86000"/>
+                        </a:lnSpc>
+                        <a:spcBef>
+                          <a:spcPts val="0"/>
+                        </a:spcBef>
+                        <a:spcAft>
+                          <a:spcPts val="0"/>
+                        </a:spcAft>
+                      </a:pPr>
+                      <a:r>
+                        <a:rPr sz="535" b="1">
+                          <a:solidFill>
+                            <a:srgbClr val="0F5766"/>
+                          </a:solidFill>
+                          <a:latin typeface="Microsoft YaHei UI"/>
+                        </a:rPr>
+                        <a:t>优必选</a:t>
+                      </a:r>
+                    </a:p>
+                    <a:p>
+                      <a:pPr algn="ctr">
+                        <a:lnSpc>
+                          <a:spcPct val="86000"/>
+                        </a:lnSpc>
+                        <a:spcBef>
+                          <a:spcPts val="0"/>
+                        </a:spcBef>
+                        <a:spcAft>
+                          <a:spcPts val="0"/>
+                        </a:spcAft>
+                      </a:pPr>
+                      <a:r>
+                        <a:rPr sz="535" b="1">
+                          <a:solidFill>
+                            <a:srgbClr val="0F5766"/>
+                          </a:solidFill>
+                          <a:latin typeface="Microsoft YaHei UI"/>
+                        </a:rPr>
+                        <a:t>UBTECH</a:t>
+                      </a:r>
+                    </a:p>
+                  </a:txBody>
+                  <a:tcPr anchor="ctr" marL="32004" marR="32004" marT="10972" marB="10972">
                     <a:solidFill>
                       <a:srgbClr val="FFFFFF"/>
                     </a:solidFill>
-                    <a:lnL w="4200">
-                      <a:solidFill>
-                        <a:srgbClr val="BFCBD6"/>
-                      </a:solidFill>
-                      <a:prstDash val="solid"/>
+                    <a:lnL w="3000">
+                      <a:solidFill>
+                        <a:srgbClr val="C1CDD9"/>
+                      </a:solidFill>
                     </a:lnL>
-                    <a:lnR w="4200">
-                      <a:solidFill>
-                        <a:srgbClr val="BFCBD6"/>
-                      </a:solidFill>
-                      <a:prstDash val="solid"/>
+                    <a:lnR w="3000">
+                      <a:solidFill>
+                        <a:srgbClr val="C1CDD9"/>
+                      </a:solidFill>
                     </a:lnR>
-                    <a:lnT w="4200">
-                      <a:solidFill>
-                        <a:srgbClr val="BFCBD6"/>
-                      </a:solidFill>
-                      <a:prstDash val="solid"/>
+                    <a:lnT w="3000">
+                      <a:solidFill>
+                        <a:srgbClr val="C1CDD9"/>
+                      </a:solidFill>
                     </a:lnT>
-                    <a:lnB w="4200">
-                      <a:solidFill>
-                        <a:srgbClr val="BFCBD6"/>
-                      </a:solidFill>
-                      <a:prstDash val="solid"/>
+                    <a:lnB w="3000">
+                      <a:solidFill>
+                        <a:srgbClr val="C1CDD9"/>
+                      </a:solidFill>
                     </a:lnB>
                   </a:tcPr>
                 </a:tc>
@@ -3716,75 +3675,93 @@
                     <a:p>
                       <a:pPr algn="l">
                         <a:lnSpc>
-                          <a:spcPct val="92000"/>
-                        </a:lnSpc>
-                        <a:spcBef>
-                          <a:spcPts val="0"/>
-                        </a:spcBef>
-                        <a:spcAft>
-                          <a:spcPts val="0"/>
-                        </a:spcAft>
-                      </a:pPr>
-                      <a:r>
-                        <a:rPr sz="635" b="0">
-                          <a:solidFill>
-                            <a:srgbClr val="14202C"/>
-                          </a:solidFill>
-                          <a:latin typeface="Microsoft YaHei UI"/>
-                        </a:rPr>
-                        <a:t>WBC 8040万</a:t>
-                      </a:r>
-                    </a:p>
-                    <a:p>
-                      <a:pPr algn="l">
-                        <a:lnSpc>
-                          <a:spcPct val="92000"/>
-                        </a:lnSpc>
-                        <a:spcBef>
-                          <a:spcPts val="0"/>
-                        </a:spcBef>
-                        <a:spcAft>
-                          <a:spcPts val="0"/>
-                        </a:spcAft>
-                      </a:pPr>
-                      <a:r>
-                        <a:rPr sz="635" b="0">
-                          <a:solidFill>
-                            <a:srgbClr val="14202C"/>
-                          </a:solidFill>
-                          <a:latin typeface="Microsoft YaHei UI"/>
-                        </a:rPr>
-                        <a:t>LDA-1B 1B</a:t>
+                          <a:spcPct val="86000"/>
+                        </a:lnSpc>
+                        <a:spcBef>
+                          <a:spcPts val="0"/>
+                        </a:spcBef>
+                        <a:spcAft>
+                          <a:spcPts val="0"/>
+                        </a:spcAft>
+                      </a:pPr>
+                      <a:r>
+                        <a:rPr sz="535" b="0">
+                          <a:solidFill>
+                            <a:srgbClr val="121B26"/>
+                          </a:solidFill>
+                          <a:latin typeface="Microsoft YaHei UI"/>
+                        </a:rPr>
+                        <a:t>Thinker</a:t>
+                      </a:r>
+                    </a:p>
+                    <a:p>
+                      <a:pPr algn="l">
+                        <a:lnSpc>
+                          <a:spcPct val="86000"/>
+                        </a:lnSpc>
+                        <a:spcBef>
+                          <a:spcPts val="0"/>
+                        </a:spcBef>
+                        <a:spcAft>
+                          <a:spcPts val="0"/>
+                        </a:spcAft>
+                      </a:pPr>
+                      <a:r>
+                        <a:rPr sz="535" b="0">
+                          <a:solidFill>
+                            <a:srgbClr val="121B26"/>
+                          </a:solidFill>
+                          <a:latin typeface="Microsoft YaHei UI"/>
+                        </a:rPr>
+                        <a:t>Thinker-VLA</a:t>
+                      </a:r>
+                    </a:p>
+                    <a:p>
+                      <a:pPr algn="l">
+                        <a:lnSpc>
+                          <a:spcPct val="86000"/>
+                        </a:lnSpc>
+                        <a:spcBef>
+                          <a:spcPts val="0"/>
+                        </a:spcBef>
+                        <a:spcAft>
+                          <a:spcPts val="0"/>
+                        </a:spcAft>
+                      </a:pPr>
+                      <a:r>
+                        <a:rPr sz="535" b="0">
+                          <a:solidFill>
+                            <a:srgbClr val="121B26"/>
+                          </a:solidFill>
+                          <a:latin typeface="Microsoft YaHei UI"/>
+                        </a:rPr>
+                        <a:t>Thinker-WM</a:t>
                       </a:r>
                     </a:p>
                   </a:txBody>
-                  <a:tcPr anchor="ctr" marL="36576" marR="36576" marT="18288" marB="18288">
+                  <a:tcPr anchor="ctr" marL="32004" marR="32004" marT="10972" marB="10972">
                     <a:solidFill>
                       <a:srgbClr val="FFFFFF"/>
                     </a:solidFill>
-                    <a:lnL w="4200">
-                      <a:solidFill>
-                        <a:srgbClr val="BFCBD6"/>
-                      </a:solidFill>
-                      <a:prstDash val="solid"/>
+                    <a:lnL w="3000">
+                      <a:solidFill>
+                        <a:srgbClr val="C1CDD9"/>
+                      </a:solidFill>
                     </a:lnL>
-                    <a:lnR w="4200">
-                      <a:solidFill>
-                        <a:srgbClr val="BFCBD6"/>
-                      </a:solidFill>
-                      <a:prstDash val="solid"/>
+                    <a:lnR w="3000">
+                      <a:solidFill>
+                        <a:srgbClr val="C1CDD9"/>
+                      </a:solidFill>
                     </a:lnR>
-                    <a:lnT w="4200">
-                      <a:solidFill>
-                        <a:srgbClr val="BFCBD6"/>
-                      </a:solidFill>
-                      <a:prstDash val="solid"/>
+                    <a:lnT w="3000">
+                      <a:solidFill>
+                        <a:srgbClr val="C1CDD9"/>
+                      </a:solidFill>
                     </a:lnT>
-                    <a:lnB w="4200">
-                      <a:solidFill>
-                        <a:srgbClr val="BFCBD6"/>
-                      </a:solidFill>
-                      <a:prstDash val="solid"/>
+                    <a:lnB w="3000">
+                      <a:solidFill>
+                        <a:srgbClr val="C1CDD9"/>
+                      </a:solidFill>
                     </a:lnB>
                   </a:tcPr>
                 </a:tc>
@@ -3797,75 +3774,93 @@
                     <a:p>
                       <a:pPr algn="l">
                         <a:lnSpc>
-                          <a:spcPct val="92000"/>
-                        </a:lnSpc>
-                        <a:spcBef>
-                          <a:spcPts val="0"/>
-                        </a:spcBef>
-                        <a:spcAft>
-                          <a:spcPts val="0"/>
-                        </a:spcAft>
-                      </a:pPr>
-                      <a:r>
-                        <a:rPr sz="635" b="0">
-                          <a:solidFill>
-                            <a:srgbClr val="14202C"/>
-                          </a:solidFill>
-                          <a:latin typeface="Microsoft YaHei UI"/>
-                        </a:rPr>
-                        <a:t>RTX 4090 &lt;1.5ms</a:t>
-                      </a:r>
-                    </a:p>
-                    <a:p>
-                      <a:pPr algn="l">
-                        <a:lnSpc>
-                          <a:spcPct val="92000"/>
-                        </a:lnSpc>
-                        <a:spcBef>
-                          <a:spcPts val="0"/>
-                        </a:spcBef>
-                        <a:spcAft>
-                          <a:spcPts val="0"/>
-                        </a:spcAft>
-                      </a:pPr>
-                      <a:r>
-                        <a:rPr sz="635" b="0">
-                          <a:solidFill>
-                            <a:srgbClr val="14202C"/>
-                          </a:solidFill>
-                          <a:latin typeface="Microsoft YaHei UI"/>
-                        </a:rPr>
-                        <a:t>50Hz闭环；Jetson Orin</a:t>
+                          <a:spcPct val="86000"/>
+                        </a:lnSpc>
+                        <a:spcBef>
+                          <a:spcPts val="0"/>
+                        </a:spcBef>
+                        <a:spcAft>
+                          <a:spcPts val="0"/>
+                        </a:spcAft>
+                      </a:pPr>
+                      <a:r>
+                        <a:rPr sz="535" b="0">
+                          <a:solidFill>
+                            <a:srgbClr val="121B26"/>
+                          </a:solidFill>
+                          <a:latin typeface="Microsoft YaHei UI"/>
+                        </a:rPr>
+                        <a:t>基座模型</a:t>
+                      </a:r>
+                    </a:p>
+                    <a:p>
+                      <a:pPr algn="l">
+                        <a:lnSpc>
+                          <a:spcPct val="86000"/>
+                        </a:lnSpc>
+                        <a:spcBef>
+                          <a:spcPts val="0"/>
+                        </a:spcBef>
+                        <a:spcAft>
+                          <a:spcPts val="0"/>
+                        </a:spcAft>
+                      </a:pPr>
+                      <a:r>
+                        <a:rPr sz="535" b="0">
+                          <a:solidFill>
+                            <a:srgbClr val="121B26"/>
+                          </a:solidFill>
+                          <a:latin typeface="Microsoft YaHei UI"/>
+                        </a:rPr>
+                        <a:t>VLA</a:t>
+                      </a:r>
+                    </a:p>
+                    <a:p>
+                      <a:pPr algn="l">
+                        <a:lnSpc>
+                          <a:spcPct val="86000"/>
+                        </a:lnSpc>
+                        <a:spcBef>
+                          <a:spcPts val="0"/>
+                        </a:spcBef>
+                        <a:spcAft>
+                          <a:spcPts val="0"/>
+                        </a:spcAft>
+                      </a:pPr>
+                      <a:r>
+                        <a:rPr sz="535" b="0">
+                          <a:solidFill>
+                            <a:srgbClr val="121B26"/>
+                          </a:solidFill>
+                          <a:latin typeface="Microsoft YaHei UI"/>
+                        </a:rPr>
+                        <a:t>世界模型</a:t>
                       </a:r>
                     </a:p>
                   </a:txBody>
-                  <a:tcPr anchor="ctr" marL="36576" marR="36576" marT="18288" marB="18288">
+                  <a:tcPr anchor="ctr" marL="32004" marR="32004" marT="10972" marB="10972">
                     <a:solidFill>
                       <a:srgbClr val="FFFFFF"/>
                     </a:solidFill>
-                    <a:lnL w="4200">
-                      <a:solidFill>
-                        <a:srgbClr val="BFCBD6"/>
-                      </a:solidFill>
-                      <a:prstDash val="solid"/>
+                    <a:lnL w="3000">
+                      <a:solidFill>
+                        <a:srgbClr val="C1CDD9"/>
+                      </a:solidFill>
                     </a:lnL>
-                    <a:lnR w="4200">
-                      <a:solidFill>
-                        <a:srgbClr val="BFCBD6"/>
-                      </a:solidFill>
-                      <a:prstDash val="solid"/>
+                    <a:lnR w="3000">
+                      <a:solidFill>
+                        <a:srgbClr val="C1CDD9"/>
+                      </a:solidFill>
                     </a:lnR>
-                    <a:lnT w="4200">
-                      <a:solidFill>
-                        <a:srgbClr val="BFCBD6"/>
-                      </a:solidFill>
-                      <a:prstDash val="solid"/>
+                    <a:lnT w="3000">
+                      <a:solidFill>
+                        <a:srgbClr val="C1CDD9"/>
+                      </a:solidFill>
                     </a:lnT>
-                    <a:lnB w="4200">
-                      <a:solidFill>
-                        <a:srgbClr val="BFCBD6"/>
-                      </a:solidFill>
-                      <a:prstDash val="solid"/>
+                    <a:lnB w="3000">
+                      <a:solidFill>
+                        <a:srgbClr val="C1CDD9"/>
+                      </a:solidFill>
                     </a:lnB>
                   </a:tcPr>
                 </a:tc>
@@ -3876,138 +3871,51 @@
                     </a:bodyPr>
                     <a:lstStyle/>
                     <a:p>
-                      <a:pPr algn="ctr">
-                        <a:lnSpc>
-                          <a:spcPct val="92000"/>
-                        </a:lnSpc>
-                        <a:spcBef>
-                          <a:spcPts val="0"/>
-                        </a:spcBef>
-                        <a:spcAft>
-                          <a:spcPts val="0"/>
-                        </a:spcAft>
-                      </a:pPr>
-                      <a:r>
-                        <a:rPr sz="675" b="1">
-                          <a:solidFill>
-                            <a:srgbClr val="0D4B58"/>
-                          </a:solidFill>
-                          <a:latin typeface="Microsoft YaHei UI"/>
-                        </a:rPr>
-                        <a:t>硬指标最完整</a:t>
+                      <a:pPr algn="l">
+                        <a:lnSpc>
+                          <a:spcPct val="86000"/>
+                        </a:lnSpc>
+                        <a:spcBef>
+                          <a:spcPts val="0"/>
+                        </a:spcBef>
+                        <a:spcAft>
+                          <a:spcPts val="0"/>
+                        </a:spcAft>
+                      </a:pPr>
+                      <a:r>
+                        <a:rPr sz="515" b="0">
+                          <a:solidFill>
+                            <a:srgbClr val="121B26"/>
+                          </a:solidFill>
+                          <a:latin typeface="Microsoft YaHei UI"/>
+                        </a:rPr>
+                        <a:t>Thinker 最大100B</a:t>
                       </a:r>
                     </a:p>
                   </a:txBody>
-                  <a:tcPr anchor="ctr" marL="36576" marR="36576" marT="18288" marB="18288">
+                  <a:tcPr anchor="ctr" marL="32004" marR="32004" marT="10972" marB="10972">
                     <a:solidFill>
                       <a:srgbClr val="FFFFFF"/>
                     </a:solidFill>
-                    <a:lnL w="4200">
-                      <a:solidFill>
-                        <a:srgbClr val="BFCBD6"/>
-                      </a:solidFill>
-                      <a:prstDash val="solid"/>
+                    <a:lnL w="3000">
+                      <a:solidFill>
+                        <a:srgbClr val="C1CDD9"/>
+                      </a:solidFill>
                     </a:lnL>
-                    <a:lnR w="4200">
-                      <a:solidFill>
-                        <a:srgbClr val="BFCBD6"/>
-                      </a:solidFill>
-                      <a:prstDash val="solid"/>
+                    <a:lnR w="3000">
+                      <a:solidFill>
+                        <a:srgbClr val="C1CDD9"/>
+                      </a:solidFill>
                     </a:lnR>
-                    <a:lnT w="4200">
-                      <a:solidFill>
-                        <a:srgbClr val="BFCBD6"/>
-                      </a:solidFill>
-                      <a:prstDash val="solid"/>
+                    <a:lnT w="3000">
+                      <a:solidFill>
+                        <a:srgbClr val="C1CDD9"/>
+                      </a:solidFill>
                     </a:lnT>
-                    <a:lnB w="4200">
-                      <a:solidFill>
-                        <a:srgbClr val="BFCBD6"/>
-                      </a:solidFill>
-                      <a:prstDash val="solid"/>
-                    </a:lnB>
-                  </a:tcPr>
-                </a:tc>
-              </a:tr>
-              <a:tr h="566928">
-                <a:tc>
-                  <a:txBody>
-                    <a:bodyPr wrap="square">
-                      <a:normAutofit/>
-                    </a:bodyPr>
-                    <a:lstStyle/>
-                    <a:p>
-                      <a:pPr algn="ctr">
-                        <a:lnSpc>
-                          <a:spcPct val="92000"/>
-                        </a:lnSpc>
-                        <a:spcBef>
-                          <a:spcPts val="0"/>
-                        </a:spcBef>
-                        <a:spcAft>
-                          <a:spcPts val="0"/>
-                        </a:spcAft>
-                      </a:pPr>
-                      <a:r>
-                        <a:rPr sz="675" b="1">
-                          <a:solidFill>
-                            <a:srgbClr val="14202C"/>
-                          </a:solidFill>
-                          <a:latin typeface="Microsoft YaHei UI"/>
-                        </a:rPr>
-                        <a:t>蚂蚁灵波</a:t>
-                      </a:r>
-                    </a:p>
-                    <a:p>
-                      <a:pPr algn="ctr">
-                        <a:lnSpc>
-                          <a:spcPct val="92000"/>
-                        </a:lnSpc>
-                        <a:spcBef>
-                          <a:spcPts val="0"/>
-                        </a:spcBef>
-                        <a:spcAft>
-                          <a:spcPts val="0"/>
-                        </a:spcAft>
-                      </a:pPr>
-                      <a:r>
-                        <a:rPr sz="675" b="1">
-                          <a:solidFill>
-                            <a:srgbClr val="14202C"/>
-                          </a:solidFill>
-                          <a:latin typeface="Microsoft YaHei UI"/>
-                        </a:rPr>
-                        <a:t>Robbyant</a:t>
-                      </a:r>
-                    </a:p>
-                  </a:txBody>
-                  <a:tcPr anchor="ctr" marL="36576" marR="36576" marT="18288" marB="18288">
-                    <a:solidFill>
-                      <a:srgbClr val="EFF3F7"/>
-                    </a:solidFill>
-                    <a:lnL w="4200">
-                      <a:solidFill>
-                        <a:srgbClr val="BFCBD6"/>
-                      </a:solidFill>
-                      <a:prstDash val="solid"/>
-                    </a:lnL>
-                    <a:lnR w="4200">
-                      <a:solidFill>
-                        <a:srgbClr val="BFCBD6"/>
-                      </a:solidFill>
-                      <a:prstDash val="solid"/>
-                    </a:lnR>
-                    <a:lnT w="4200">
-                      <a:solidFill>
-                        <a:srgbClr val="BFCBD6"/>
-                      </a:solidFill>
-                      <a:prstDash val="solid"/>
-                    </a:lnT>
-                    <a:lnB w="4200">
-                      <a:solidFill>
-                        <a:srgbClr val="BFCBD6"/>
-                      </a:solidFill>
-                      <a:prstDash val="solid"/>
+                    <a:lnB w="3000">
+                      <a:solidFill>
+                        <a:srgbClr val="C1CDD9"/>
+                      </a:solidFill>
                     </a:lnB>
                   </a:tcPr>
                 </a:tc>
@@ -4020,75 +3928,93 @@
                     <a:p>
                       <a:pPr algn="l">
                         <a:lnSpc>
-                          <a:spcPct val="92000"/>
-                        </a:lnSpc>
-                        <a:spcBef>
-                          <a:spcPts val="0"/>
-                        </a:spcBef>
-                        <a:spcAft>
-                          <a:spcPts val="0"/>
-                        </a:spcAft>
-                      </a:pPr>
-                      <a:r>
-                        <a:rPr sz="675" b="0">
-                          <a:solidFill>
-                            <a:srgbClr val="14202C"/>
-                          </a:solidFill>
-                          <a:latin typeface="Microsoft YaHei UI"/>
-                        </a:rPr>
-                        <a:t>LingBot-VLA / VA</a:t>
-                      </a:r>
-                    </a:p>
-                    <a:p>
-                      <a:pPr algn="l">
-                        <a:lnSpc>
-                          <a:spcPct val="92000"/>
-                        </a:lnSpc>
-                        <a:spcBef>
-                          <a:spcPts val="0"/>
-                        </a:spcBef>
-                        <a:spcAft>
-                          <a:spcPts val="0"/>
-                        </a:spcAft>
-                      </a:pPr>
-                      <a:r>
-                        <a:rPr sz="675" b="0">
-                          <a:solidFill>
-                            <a:srgbClr val="14202C"/>
-                          </a:solidFill>
-                          <a:latin typeface="Microsoft YaHei UI"/>
-                        </a:rPr>
-                        <a:t>World / Vision / Depth</a:t>
+                          <a:spcPct val="86000"/>
+                        </a:lnSpc>
+                        <a:spcBef>
+                          <a:spcPts val="0"/>
+                        </a:spcBef>
+                        <a:spcAft>
+                          <a:spcPts val="0"/>
+                        </a:spcAft>
+                      </a:pPr>
+                      <a:r>
+                        <a:rPr sz="515" b="0">
+                          <a:solidFill>
+                            <a:srgbClr val="121B26"/>
+                          </a:solidFill>
+                          <a:latin typeface="Microsoft YaHei UI"/>
+                        </a:rPr>
+                        <a:t>端侧GPU显存</a:t>
+                      </a:r>
+                    </a:p>
+                    <a:p>
+                      <a:pPr algn="l">
+                        <a:lnSpc>
+                          <a:spcPct val="86000"/>
+                        </a:lnSpc>
+                        <a:spcBef>
+                          <a:spcPts val="0"/>
+                        </a:spcBef>
+                        <a:spcAft>
+                          <a:spcPts val="0"/>
+                        </a:spcAft>
+                      </a:pPr>
+                      <a:r>
+                        <a:rPr sz="515" b="0">
+                          <a:solidFill>
+                            <a:srgbClr val="121B26"/>
+                          </a:solidFill>
+                          <a:latin typeface="Microsoft YaHei UI"/>
+                        </a:rPr>
+                        <a:t>64GB→32GB</a:t>
+                      </a:r>
+                    </a:p>
+                    <a:p>
+                      <a:pPr algn="l">
+                        <a:lnSpc>
+                          <a:spcPct val="86000"/>
+                        </a:lnSpc>
+                        <a:spcBef>
+                          <a:spcPts val="0"/>
+                        </a:spcBef>
+                        <a:spcAft>
+                          <a:spcPts val="0"/>
+                        </a:spcAft>
+                      </a:pPr>
+                      <a:r>
+                        <a:rPr sz="515" b="0">
+                          <a:solidFill>
+                            <a:srgbClr val="121B26"/>
+                          </a:solidFill>
+                          <a:latin typeface="Microsoft YaHei UI"/>
+                        </a:rPr>
+                        <a:t>Orin 64GB可迁移32GB</a:t>
                       </a:r>
                     </a:p>
                   </a:txBody>
-                  <a:tcPr anchor="ctr" marL="36576" marR="36576" marT="18288" marB="18288">
+                  <a:tcPr anchor="ctr" marL="32004" marR="32004" marT="10972" marB="10972">
                     <a:solidFill>
-                      <a:srgbClr val="EFF3F7"/>
+                      <a:srgbClr val="FFFFFF"/>
                     </a:solidFill>
-                    <a:lnL w="4200">
-                      <a:solidFill>
-                        <a:srgbClr val="BFCBD6"/>
-                      </a:solidFill>
-                      <a:prstDash val="solid"/>
+                    <a:lnL w="3000">
+                      <a:solidFill>
+                        <a:srgbClr val="C1CDD9"/>
+                      </a:solidFill>
                     </a:lnL>
-                    <a:lnR w="4200">
-                      <a:solidFill>
-                        <a:srgbClr val="BFCBD6"/>
-                      </a:solidFill>
-                      <a:prstDash val="solid"/>
+                    <a:lnR w="3000">
+                      <a:solidFill>
+                        <a:srgbClr val="C1CDD9"/>
+                      </a:solidFill>
                     </a:lnR>
-                    <a:lnT w="4200">
-                      <a:solidFill>
-                        <a:srgbClr val="BFCBD6"/>
-                      </a:solidFill>
-                      <a:prstDash val="solid"/>
+                    <a:lnT w="3000">
+                      <a:solidFill>
+                        <a:srgbClr val="C1CDD9"/>
+                      </a:solidFill>
                     </a:lnT>
-                    <a:lnB w="4200">
-                      <a:solidFill>
-                        <a:srgbClr val="BFCBD6"/>
-                      </a:solidFill>
-                      <a:prstDash val="solid"/>
+                    <a:lnB w="3000">
+                      <a:solidFill>
+                        <a:srgbClr val="C1CDD9"/>
+                      </a:solidFill>
                     </a:lnB>
                   </a:tcPr>
                 </a:tc>
@@ -4101,75 +4027,128 @@
                     <a:p>
                       <a:pPr algn="l">
                         <a:lnSpc>
-                          <a:spcPct val="92000"/>
-                        </a:lnSpc>
-                        <a:spcBef>
-                          <a:spcPts val="0"/>
-                        </a:spcBef>
-                        <a:spcAft>
-                          <a:spcPts val="0"/>
-                        </a:spcAft>
-                      </a:pPr>
-                      <a:r>
-                        <a:rPr sz="635" b="0">
-                          <a:solidFill>
-                            <a:srgbClr val="14202C"/>
-                          </a:solidFill>
-                          <a:latin typeface="Microsoft YaHei UI"/>
-                        </a:rPr>
-                        <a:t>VLA 6B；VA约5B</a:t>
-                      </a:r>
-                    </a:p>
-                    <a:p>
-                      <a:pPr algn="l">
-                        <a:lnSpc>
-                          <a:spcPct val="92000"/>
-                        </a:lnSpc>
-                        <a:spcBef>
-                          <a:spcPts val="0"/>
-                        </a:spcBef>
-                        <a:spcAft>
-                          <a:spcPts val="0"/>
-                        </a:spcAft>
-                      </a:pPr>
-                      <a:r>
-                        <a:rPr sz="635" b="0">
-                          <a:solidFill>
-                            <a:srgbClr val="14202C"/>
-                          </a:solidFill>
-                          <a:latin typeface="Microsoft YaHei UI"/>
-                        </a:rPr>
-                        <a:t>Vision 1B；6万h；20+本体</a:t>
+                          <a:spcPct val="86000"/>
+                        </a:lnSpc>
+                        <a:spcBef>
+                          <a:spcPts val="0"/>
+                        </a:spcBef>
+                        <a:spcAft>
+                          <a:spcPts val="0"/>
+                        </a:spcAft>
+                      </a:pPr>
+                      <a:r>
+                        <a:rPr sz="515" b="0">
+                          <a:solidFill>
+                            <a:srgbClr val="121B26"/>
+                          </a:solidFill>
+                          <a:latin typeface="Microsoft YaHei UI"/>
+                        </a:rPr>
+                        <a:t>推理效率+176%</a:t>
                       </a:r>
                     </a:p>
                   </a:txBody>
-                  <a:tcPr anchor="ctr" marL="36576" marR="36576" marT="18288" marB="18288">
+                  <a:tcPr anchor="ctr" marL="32004" marR="32004" marT="10972" marB="10972">
                     <a:solidFill>
-                      <a:srgbClr val="EFF3F7"/>
+                      <a:srgbClr val="FFFFFF"/>
                     </a:solidFill>
-                    <a:lnL w="4200">
-                      <a:solidFill>
-                        <a:srgbClr val="BFCBD6"/>
-                      </a:solidFill>
-                      <a:prstDash val="solid"/>
+                    <a:lnL w="3000">
+                      <a:solidFill>
+                        <a:srgbClr val="C1CDD9"/>
+                      </a:solidFill>
                     </a:lnL>
-                    <a:lnR w="4200">
-                      <a:solidFill>
-                        <a:srgbClr val="BFCBD6"/>
-                      </a:solidFill>
-                      <a:prstDash val="solid"/>
+                    <a:lnR w="3000">
+                      <a:solidFill>
+                        <a:srgbClr val="C1CDD9"/>
+                      </a:solidFill>
                     </a:lnR>
-                    <a:lnT w="4200">
-                      <a:solidFill>
-                        <a:srgbClr val="BFCBD6"/>
-                      </a:solidFill>
-                      <a:prstDash val="solid"/>
+                    <a:lnT w="3000">
+                      <a:solidFill>
+                        <a:srgbClr val="C1CDD9"/>
+                      </a:solidFill>
                     </a:lnT>
-                    <a:lnB w="4200">
-                      <a:solidFill>
-                        <a:srgbClr val="BFCBD6"/>
-                      </a:solidFill>
-                      <a:prstDash val="solid"/>
+                    <a:lnB w="3000">
+                      <a:solidFill>
+                        <a:srgbClr val="C1CDD9"/>
+                      </a:solidFill>
+                    </a:lnB>
+                  </a:tcPr>
+                </a:tc>
+              </a:tr>
+              <a:tr h="409956">
+                <a:tc>
+                  <a:txBody>
+                    <a:bodyPr wrap="square">
+                      <a:normAutofit/>
+                    </a:bodyPr>
+                    <a:lstStyle/>
+                    <a:p>
+                      <a:pPr algn="ctr">
+                        <a:lnSpc>
+                          <a:spcPct val="86000"/>
+                        </a:lnSpc>
+                        <a:spcBef>
+                          <a:spcPts val="0"/>
+                        </a:spcBef>
+                        <a:spcAft>
+                          <a:spcPts val="0"/>
+                        </a:spcAft>
+                      </a:pPr>
+                      <a:r>
+                        <a:rPr sz="535" b="1">
+                          <a:solidFill>
+                            <a:srgbClr val="0F5766"/>
+                          </a:solidFill>
+                          <a:latin typeface="Microsoft YaHei UI"/>
+                        </a:rPr>
+                        <a:t>银河通用</a:t>
+                      </a:r>
+                    </a:p>
+                    <a:p>
+                      <a:pPr algn="ctr">
+                        <a:lnSpc>
+                          <a:spcPct val="86000"/>
+                        </a:lnSpc>
+                        <a:spcBef>
+                          <a:spcPts val="0"/>
+                        </a:spcBef>
+                        <a:spcAft>
+                          <a:spcPts val="0"/>
+                        </a:spcAft>
+                      </a:pPr>
+                      <a:r>
+                        <a:rPr sz="535" b="1">
+                          <a:solidFill>
+                            <a:srgbClr val="0F5766"/>
+                          </a:solidFill>
+                          <a:latin typeface="Microsoft YaHei UI"/>
+                        </a:rPr>
+                        <a:t>Galbot</a:t>
+                      </a:r>
+                    </a:p>
+                  </a:txBody>
+                  <a:tcPr anchor="ctr" marL="32004" marR="32004" marT="10972" marB="10972">
+                    <a:solidFill>
+                      <a:srgbClr val="EEF3F7"/>
+                    </a:solidFill>
+                    <a:lnL w="3000">
+                      <a:solidFill>
+                        <a:srgbClr val="C1CDD9"/>
+                      </a:solidFill>
+                    </a:lnL>
+                    <a:lnR w="3000">
+                      <a:solidFill>
+                        <a:srgbClr val="C1CDD9"/>
+                      </a:solidFill>
+                    </a:lnR>
+                    <a:lnT w="3000">
+                      <a:solidFill>
+                        <a:srgbClr val="C1CDD9"/>
+                      </a:solidFill>
+                    </a:lnT>
+                    <a:lnB w="3000">
+                      <a:solidFill>
+                        <a:srgbClr val="C1CDD9"/>
+                      </a:solidFill>
                     </a:lnB>
                   </a:tcPr>
                 </a:tc>
@@ -4182,75 +4161,93 @@
                     <a:p>
                       <a:pPr algn="l">
                         <a:lnSpc>
-                          <a:spcPct val="92000"/>
-                        </a:lnSpc>
-                        <a:spcBef>
-                          <a:spcPts val="0"/>
-                        </a:spcBef>
-                        <a:spcAft>
-                          <a:spcPts val="0"/>
-                        </a:spcAft>
-                      </a:pPr>
-                      <a:r>
-                        <a:rPr sz="635" b="0">
-                          <a:solidFill>
-                            <a:srgbClr val="14202C"/>
-                          </a:solidFill>
-                          <a:latin typeface="Microsoft YaHei UI"/>
-                        </a:rPr>
-                        <a:t>4090D约130ms</a:t>
-                      </a:r>
-                    </a:p>
-                    <a:p>
-                      <a:pPr algn="l">
-                        <a:lnSpc>
-                          <a:spcPct val="92000"/>
-                        </a:lnSpc>
-                        <a:spcBef>
-                          <a:spcPts val="0"/>
-                        </a:spcBef>
-                        <a:spcAft>
-                          <a:spcPts val="0"/>
-                        </a:spcAft>
-                      </a:pPr>
-                      <a:r>
-                        <a:rPr sz="635" b="0">
-                          <a:solidFill>
-                            <a:srgbClr val="14202C"/>
-                          </a:solidFill>
-                          <a:latin typeface="Microsoft YaHei UI"/>
-                        </a:rPr>
-                        <a:t>VA 18-24GB；World 720p/60fps,&lt;1s</a:t>
+                          <a:spcPct val="86000"/>
+                        </a:lnSpc>
+                        <a:spcBef>
+                          <a:spcPts val="0"/>
+                        </a:spcBef>
+                        <a:spcAft>
+                          <a:spcPts val="0"/>
+                        </a:spcAft>
+                      </a:pPr>
+                      <a:r>
+                        <a:rPr sz="535" b="0">
+                          <a:solidFill>
+                            <a:srgbClr val="121B26"/>
+                          </a:solidFill>
+                          <a:latin typeface="Microsoft YaHei UI"/>
+                        </a:rPr>
+                        <a:t>LDA-1B</a:t>
+                      </a:r>
+                    </a:p>
+                    <a:p>
+                      <a:pPr algn="l">
+                        <a:lnSpc>
+                          <a:spcPct val="86000"/>
+                        </a:lnSpc>
+                        <a:spcBef>
+                          <a:spcPts val="0"/>
+                        </a:spcBef>
+                        <a:spcAft>
+                          <a:spcPts val="0"/>
+                        </a:spcAft>
+                      </a:pPr>
+                      <a:r>
+                        <a:rPr sz="535" b="0">
+                          <a:solidFill>
+                            <a:srgbClr val="121B26"/>
+                          </a:solidFill>
+                          <a:latin typeface="Microsoft YaHei UI"/>
+                        </a:rPr>
+                        <a:t>AstraBrain WAM</a:t>
+                      </a:r>
+                    </a:p>
+                    <a:p>
+                      <a:pPr algn="l">
+                        <a:lnSpc>
+                          <a:spcPct val="86000"/>
+                        </a:lnSpc>
+                        <a:spcBef>
+                          <a:spcPts val="0"/>
+                        </a:spcBef>
+                        <a:spcAft>
+                          <a:spcPts val="0"/>
+                        </a:spcAft>
+                      </a:pPr>
+                      <a:r>
+                        <a:rPr sz="535" b="0">
+                          <a:solidFill>
+                            <a:srgbClr val="121B26"/>
+                          </a:solidFill>
+                          <a:latin typeface="Microsoft YaHei UI"/>
+                        </a:rPr>
+                        <a:t>Grasp/Grocery/TrackVLA</a:t>
                       </a:r>
                     </a:p>
                   </a:txBody>
-                  <a:tcPr anchor="ctr" marL="36576" marR="36576" marT="18288" marB="18288">
+                  <a:tcPr anchor="ctr" marL="32004" marR="32004" marT="10972" marB="10972">
                     <a:solidFill>
-                      <a:srgbClr val="EFF3F7"/>
+                      <a:srgbClr val="EEF3F7"/>
                     </a:solidFill>
-                    <a:lnL w="4200">
-                      <a:solidFill>
-                        <a:srgbClr val="BFCBD6"/>
-                      </a:solidFill>
-                      <a:prstDash val="solid"/>
+                    <a:lnL w="3000">
+                      <a:solidFill>
+                        <a:srgbClr val="C1CDD9"/>
+                      </a:solidFill>
                     </a:lnL>
-                    <a:lnR w="4200">
-                      <a:solidFill>
-                        <a:srgbClr val="BFCBD6"/>
-                      </a:solidFill>
-                      <a:prstDash val="solid"/>
+                    <a:lnR w="3000">
+                      <a:solidFill>
+                        <a:srgbClr val="C1CDD9"/>
+                      </a:solidFill>
                     </a:lnR>
-                    <a:lnT w="4200">
-                      <a:solidFill>
-                        <a:srgbClr val="BFCBD6"/>
-                      </a:solidFill>
-                      <a:prstDash val="solid"/>
+                    <a:lnT w="3000">
+                      <a:solidFill>
+                        <a:srgbClr val="C1CDD9"/>
+                      </a:solidFill>
                     </a:lnT>
-                    <a:lnB w="4200">
-                      <a:solidFill>
-                        <a:srgbClr val="BFCBD6"/>
-                      </a:solidFill>
-                      <a:prstDash val="solid"/>
+                    <a:lnB w="3000">
+                      <a:solidFill>
+                        <a:srgbClr val="C1CDD9"/>
+                      </a:solidFill>
                     </a:lnB>
                   </a:tcPr>
                 </a:tc>
@@ -4261,160 +4258,95 @@
                     </a:bodyPr>
                     <a:lstStyle/>
                     <a:p>
-                      <a:pPr algn="ctr">
-                        <a:lnSpc>
-                          <a:spcPct val="92000"/>
-                        </a:lnSpc>
-                        <a:spcBef>
-                          <a:spcPts val="0"/>
-                        </a:spcBef>
-                        <a:spcAft>
-                          <a:spcPts val="0"/>
-                        </a:spcAft>
-                      </a:pPr>
-                      <a:r>
-                        <a:rPr sz="675" b="1">
-                          <a:solidFill>
-                            <a:srgbClr val="0D4B58"/>
-                          </a:solidFill>
-                          <a:latin typeface="Microsoft YaHei UI"/>
-                        </a:rPr>
-                        <a:t>一脑多机</a:t>
-                      </a:r>
-                    </a:p>
-                    <a:p>
-                      <a:pPr algn="ctr">
-                        <a:lnSpc>
-                          <a:spcPct val="92000"/>
-                        </a:lnSpc>
-                        <a:spcBef>
-                          <a:spcPts val="0"/>
-                        </a:spcBef>
-                        <a:spcAft>
-                          <a:spcPts val="0"/>
-                        </a:spcAft>
-                      </a:pPr>
-                      <a:r>
-                        <a:rPr sz="675" b="1">
-                          <a:solidFill>
-                            <a:srgbClr val="0D4B58"/>
-                          </a:solidFill>
-                          <a:latin typeface="Microsoft YaHei UI"/>
-                        </a:rPr>
-                        <a:t>大脑供应商样本</a:t>
+                      <a:pPr algn="l">
+                        <a:lnSpc>
+                          <a:spcPct val="86000"/>
+                        </a:lnSpc>
+                        <a:spcBef>
+                          <a:spcPts val="0"/>
+                        </a:spcBef>
+                        <a:spcAft>
+                          <a:spcPts val="0"/>
+                        </a:spcAft>
+                      </a:pPr>
+                      <a:r>
+                        <a:rPr sz="535" b="0">
+                          <a:solidFill>
+                            <a:srgbClr val="121B26"/>
+                          </a:solidFill>
+                          <a:latin typeface="Microsoft YaHei UI"/>
+                        </a:rPr>
+                        <a:t>隐式世界-动作模型</a:t>
+                      </a:r>
+                    </a:p>
+                    <a:p>
+                      <a:pPr algn="l">
+                        <a:lnSpc>
+                          <a:spcPct val="86000"/>
+                        </a:lnSpc>
+                        <a:spcBef>
+                          <a:spcPts val="0"/>
+                        </a:spcBef>
+                        <a:spcAft>
+                          <a:spcPts val="0"/>
+                        </a:spcAft>
+                      </a:pPr>
+                      <a:r>
+                        <a:rPr sz="535" b="0">
+                          <a:solidFill>
+                            <a:srgbClr val="121B26"/>
+                          </a:solidFill>
+                          <a:latin typeface="Microsoft YaHei UI"/>
+                        </a:rPr>
+                        <a:t>WAM</a:t>
+                      </a:r>
+                    </a:p>
+                    <a:p>
+                      <a:pPr algn="l">
+                        <a:lnSpc>
+                          <a:spcPct val="86000"/>
+                        </a:lnSpc>
+                        <a:spcBef>
+                          <a:spcPts val="0"/>
+                        </a:spcBef>
+                        <a:spcAft>
+                          <a:spcPts val="0"/>
+                        </a:spcAft>
+                      </a:pPr>
+                      <a:r>
+                        <a:rPr sz="535" b="0">
+                          <a:solidFill>
+                            <a:srgbClr val="121B26"/>
+                          </a:solidFill>
+                          <a:latin typeface="Microsoft YaHei UI"/>
+                        </a:rPr>
+                        <a:t>VLA</a:t>
                       </a:r>
                     </a:p>
                   </a:txBody>
-                  <a:tcPr anchor="ctr" marL="36576" marR="36576" marT="18288" marB="18288">
+                  <a:tcPr anchor="ctr" marL="32004" marR="32004" marT="10972" marB="10972">
                     <a:solidFill>
-                      <a:srgbClr val="EFF3F7"/>
+                      <a:srgbClr val="EEF3F7"/>
                     </a:solidFill>
-                    <a:lnL w="4200">
-                      <a:solidFill>
-                        <a:srgbClr val="BFCBD6"/>
-                      </a:solidFill>
-                      <a:prstDash val="solid"/>
+                    <a:lnL w="3000">
+                      <a:solidFill>
+                        <a:srgbClr val="C1CDD9"/>
+                      </a:solidFill>
                     </a:lnL>
-                    <a:lnR w="4200">
-                      <a:solidFill>
-                        <a:srgbClr val="BFCBD6"/>
-                      </a:solidFill>
-                      <a:prstDash val="solid"/>
+                    <a:lnR w="3000">
+                      <a:solidFill>
+                        <a:srgbClr val="C1CDD9"/>
+                      </a:solidFill>
                     </a:lnR>
-                    <a:lnT w="4200">
-                      <a:solidFill>
-                        <a:srgbClr val="BFCBD6"/>
-                      </a:solidFill>
-                      <a:prstDash val="solid"/>
+                    <a:lnT w="3000">
+                      <a:solidFill>
+                        <a:srgbClr val="C1CDD9"/>
+                      </a:solidFill>
                     </a:lnT>
-                    <a:lnB w="4200">
-                      <a:solidFill>
-                        <a:srgbClr val="BFCBD6"/>
-                      </a:solidFill>
-                      <a:prstDash val="solid"/>
-                    </a:lnB>
-                  </a:tcPr>
-                </a:tc>
-              </a:tr>
-              <a:tr h="566928">
-                <a:tc>
-                  <a:txBody>
-                    <a:bodyPr wrap="square">
-                      <a:normAutofit/>
-                    </a:bodyPr>
-                    <a:lstStyle/>
-                    <a:p>
-                      <a:pPr algn="ctr">
-                        <a:lnSpc>
-                          <a:spcPct val="92000"/>
-                        </a:lnSpc>
-                        <a:spcBef>
-                          <a:spcPts val="0"/>
-                        </a:spcBef>
-                        <a:spcAft>
-                          <a:spcPts val="0"/>
-                        </a:spcAft>
-                      </a:pPr>
-                      <a:r>
-                        <a:rPr sz="675" b="1">
-                          <a:solidFill>
-                            <a:srgbClr val="14202C"/>
-                          </a:solidFill>
-                          <a:latin typeface="Microsoft YaHei UI"/>
-                        </a:rPr>
-                        <a:t>优必选</a:t>
-                      </a:r>
-                    </a:p>
-                    <a:p>
-                      <a:pPr algn="ctr">
-                        <a:lnSpc>
-                          <a:spcPct val="92000"/>
-                        </a:lnSpc>
-                        <a:spcBef>
-                          <a:spcPts val="0"/>
-                        </a:spcBef>
-                        <a:spcAft>
-                          <a:spcPts val="0"/>
-                        </a:spcAft>
-                      </a:pPr>
-                      <a:r>
-                        <a:rPr sz="675" b="1">
-                          <a:solidFill>
-                            <a:srgbClr val="14202C"/>
-                          </a:solidFill>
-                          <a:latin typeface="Microsoft YaHei UI"/>
-                        </a:rPr>
-                        <a:t>UBTECH</a:t>
-                      </a:r>
-                    </a:p>
-                  </a:txBody>
-                  <a:tcPr anchor="ctr" marL="36576" marR="36576" marT="18288" marB="18288">
-                    <a:solidFill>
-                      <a:srgbClr val="FFFFFF"/>
-                    </a:solidFill>
-                    <a:lnL w="4200">
-                      <a:solidFill>
-                        <a:srgbClr val="BFCBD6"/>
-                      </a:solidFill>
-                      <a:prstDash val="solid"/>
-                    </a:lnL>
-                    <a:lnR w="4200">
-                      <a:solidFill>
-                        <a:srgbClr val="BFCBD6"/>
-                      </a:solidFill>
-                      <a:prstDash val="solid"/>
-                    </a:lnR>
-                    <a:lnT w="4200">
-                      <a:solidFill>
-                        <a:srgbClr val="BFCBD6"/>
-                      </a:solidFill>
-                      <a:prstDash val="solid"/>
-                    </a:lnT>
-                    <a:lnB w="4200">
-                      <a:solidFill>
-                        <a:srgbClr val="BFCBD6"/>
-                      </a:solidFill>
-                      <a:prstDash val="solid"/>
+                    <a:lnB w="3000">
+                      <a:solidFill>
+                        <a:srgbClr val="C1CDD9"/>
+                      </a:solidFill>
                     </a:lnB>
                   </a:tcPr>
                 </a:tc>
@@ -4427,75 +4359,49 @@
                     <a:p>
                       <a:pPr algn="l">
                         <a:lnSpc>
-                          <a:spcPct val="92000"/>
-                        </a:lnSpc>
-                        <a:spcBef>
-                          <a:spcPts val="0"/>
-                        </a:spcBef>
-                        <a:spcAft>
-                          <a:spcPts val="0"/>
-                        </a:spcAft>
-                      </a:pPr>
-                      <a:r>
-                        <a:rPr sz="675" b="0">
-                          <a:solidFill>
-                            <a:srgbClr val="14202C"/>
-                          </a:solidFill>
-                          <a:latin typeface="Microsoft YaHei UI"/>
-                        </a:rPr>
-                        <a:t>Thinker 基座</a:t>
-                      </a:r>
-                    </a:p>
-                    <a:p>
-                      <a:pPr algn="l">
-                        <a:lnSpc>
-                          <a:spcPct val="92000"/>
-                        </a:lnSpc>
-                        <a:spcBef>
-                          <a:spcPts val="0"/>
-                        </a:spcBef>
-                        <a:spcAft>
-                          <a:spcPts val="0"/>
-                        </a:spcAft>
-                      </a:pPr>
-                      <a:r>
-                        <a:rPr sz="675" b="0">
-                          <a:solidFill>
-                            <a:srgbClr val="14202C"/>
-                          </a:solidFill>
-                          <a:latin typeface="Microsoft YaHei UI"/>
-                        </a:rPr>
-                        <a:t>Thinker-VLA / WM</a:t>
+                          <a:spcPct val="86000"/>
+                        </a:lnSpc>
+                        <a:spcBef>
+                          <a:spcPts val="0"/>
+                        </a:spcBef>
+                        <a:spcAft>
+                          <a:spcPts val="0"/>
+                        </a:spcAft>
+                      </a:pPr>
+                      <a:r>
+                        <a:rPr sz="515" b="0">
+                          <a:solidFill>
+                            <a:srgbClr val="121B26"/>
+                          </a:solidFill>
+                          <a:latin typeface="Microsoft YaHei UI"/>
+                        </a:rPr>
+                        <a:t>LDA-1B：1B</a:t>
                       </a:r>
                     </a:p>
                   </a:txBody>
-                  <a:tcPr anchor="ctr" marL="36576" marR="36576" marT="18288" marB="18288">
+                  <a:tcPr anchor="ctr" marL="32004" marR="32004" marT="10972" marB="10972">
                     <a:solidFill>
-                      <a:srgbClr val="FFFFFF"/>
+                      <a:srgbClr val="EEF3F7"/>
                     </a:solidFill>
-                    <a:lnL w="4200">
-                      <a:solidFill>
-                        <a:srgbClr val="BFCBD6"/>
-                      </a:solidFill>
-                      <a:prstDash val="solid"/>
+                    <a:lnL w="3000">
+                      <a:solidFill>
+                        <a:srgbClr val="C1CDD9"/>
+                      </a:solidFill>
                     </a:lnL>
-                    <a:lnR w="4200">
-                      <a:solidFill>
-                        <a:srgbClr val="BFCBD6"/>
-                      </a:solidFill>
-                      <a:prstDash val="solid"/>
+                    <a:lnR w="3000">
+                      <a:solidFill>
+                        <a:srgbClr val="C1CDD9"/>
+                      </a:solidFill>
                     </a:lnR>
-                    <a:lnT w="4200">
-                      <a:solidFill>
-                        <a:srgbClr val="BFCBD6"/>
-                      </a:solidFill>
-                      <a:prstDash val="solid"/>
+                    <a:lnT w="3000">
+                      <a:solidFill>
+                        <a:srgbClr val="C1CDD9"/>
+                      </a:solidFill>
                     </a:lnT>
-                    <a:lnB w="4200">
-                      <a:solidFill>
-                        <a:srgbClr val="BFCBD6"/>
-                      </a:solidFill>
-                      <a:prstDash val="solid"/>
+                    <a:lnB w="3000">
+                      <a:solidFill>
+                        <a:srgbClr val="C1CDD9"/>
+                      </a:solidFill>
                     </a:lnB>
                   </a:tcPr>
                 </a:tc>
@@ -4508,75 +4414,71 @@
                     <a:p>
                       <a:pPr algn="l">
                         <a:lnSpc>
-                          <a:spcPct val="92000"/>
-                        </a:lnSpc>
-                        <a:spcBef>
-                          <a:spcPts val="0"/>
-                        </a:spcBef>
-                        <a:spcAft>
-                          <a:spcPts val="0"/>
-                        </a:spcAft>
-                      </a:pPr>
-                      <a:r>
-                        <a:rPr sz="635" b="0">
-                          <a:solidFill>
-                            <a:srgbClr val="14202C"/>
-                          </a:solidFill>
-                          <a:latin typeface="Microsoft YaHei UI"/>
-                        </a:rPr>
-                        <a:t>Thinker 最大100B</a:t>
-                      </a:r>
-                    </a:p>
-                    <a:p>
-                      <a:pPr algn="l">
-                        <a:lnSpc>
-                          <a:spcPct val="92000"/>
-                        </a:lnSpc>
-                        <a:spcBef>
-                          <a:spcPts val="0"/>
-                        </a:spcBef>
-                        <a:spcAft>
-                          <a:spcPts val="0"/>
-                        </a:spcAft>
-                      </a:pPr>
-                      <a:r>
-                        <a:rPr sz="635" b="0">
-                          <a:solidFill>
-                            <a:srgbClr val="14202C"/>
-                          </a:solidFill>
-                          <a:latin typeface="Microsoft YaHei UI"/>
-                        </a:rPr>
-                        <a:t>VLA参数未披露</a:t>
+                          <a:spcPct val="86000"/>
+                        </a:lnSpc>
+                        <a:spcBef>
+                          <a:spcPts val="0"/>
+                        </a:spcBef>
+                        <a:spcAft>
+                          <a:spcPts val="0"/>
+                        </a:spcAft>
+                      </a:pPr>
+                      <a:r>
+                        <a:rPr sz="515" b="0">
+                          <a:solidFill>
+                            <a:srgbClr val="121B26"/>
+                          </a:solidFill>
+                          <a:latin typeface="Microsoft YaHei UI"/>
+                        </a:rPr>
+                        <a:t>跨本体后训练；</a:t>
+                      </a:r>
+                    </a:p>
+                    <a:p>
+                      <a:pPr algn="l">
+                        <a:lnSpc>
+                          <a:spcPct val="86000"/>
+                        </a:lnSpc>
+                        <a:spcBef>
+                          <a:spcPts val="0"/>
+                        </a:spcBef>
+                        <a:spcAft>
+                          <a:spcPts val="0"/>
+                        </a:spcAft>
+                      </a:pPr>
+                      <a:r>
+                        <a:rPr sz="515" b="0">
+                          <a:solidFill>
+                            <a:srgbClr val="121B26"/>
+                          </a:solidFill>
+                          <a:latin typeface="Microsoft YaHei UI"/>
+                        </a:rPr>
+                        <a:t>生产部署算力未公开</a:t>
                       </a:r>
                     </a:p>
                   </a:txBody>
-                  <a:tcPr anchor="ctr" marL="36576" marR="36576" marT="18288" marB="18288">
+                  <a:tcPr anchor="ctr" marL="32004" marR="32004" marT="10972" marB="10972">
                     <a:solidFill>
-                      <a:srgbClr val="FFFFFF"/>
+                      <a:srgbClr val="EEF3F7"/>
                     </a:solidFill>
-                    <a:lnL w="4200">
-                      <a:solidFill>
-                        <a:srgbClr val="BFCBD6"/>
-                      </a:solidFill>
-                      <a:prstDash val="solid"/>
+                    <a:lnL w="3000">
+                      <a:solidFill>
+                        <a:srgbClr val="C1CDD9"/>
+                      </a:solidFill>
                     </a:lnL>
-                    <a:lnR w="4200">
-                      <a:solidFill>
-                        <a:srgbClr val="BFCBD6"/>
-                      </a:solidFill>
-                      <a:prstDash val="solid"/>
+                    <a:lnR w="3000">
+                      <a:solidFill>
+                        <a:srgbClr val="C1CDD9"/>
+                      </a:solidFill>
                     </a:lnR>
-                    <a:lnT w="4200">
-                      <a:solidFill>
-                        <a:srgbClr val="BFCBD6"/>
-                      </a:solidFill>
-                      <a:prstDash val="solid"/>
+                    <a:lnT w="3000">
+                      <a:solidFill>
+                        <a:srgbClr val="C1CDD9"/>
+                      </a:solidFill>
                     </a:lnT>
-                    <a:lnB w="4200">
-                      <a:solidFill>
-                        <a:srgbClr val="BFCBD6"/>
-                      </a:solidFill>
-                      <a:prstDash val="solid"/>
+                    <a:lnB w="3000">
+                      <a:solidFill>
+                        <a:srgbClr val="C1CDD9"/>
+                      </a:solidFill>
                     </a:lnB>
                   </a:tcPr>
                 </a:tc>
@@ -4589,75 +4491,128 @@
                     <a:p>
                       <a:pPr algn="l">
                         <a:lnSpc>
-                          <a:spcPct val="92000"/>
-                        </a:lnSpc>
-                        <a:spcBef>
-                          <a:spcPts val="0"/>
-                        </a:spcBef>
-                        <a:spcAft>
-                          <a:spcPts val="0"/>
-                        </a:spcAft>
-                      </a:pPr>
-                      <a:r>
-                        <a:rPr sz="635" b="0">
-                          <a:solidFill>
-                            <a:srgbClr val="14202C"/>
-                          </a:solidFill>
-                          <a:latin typeface="Microsoft YaHei UI"/>
-                        </a:rPr>
-                        <a:t>端侧显存 64GB→32GB</a:t>
-                      </a:r>
-                    </a:p>
-                    <a:p>
-                      <a:pPr algn="l">
-                        <a:lnSpc>
-                          <a:spcPct val="92000"/>
-                        </a:lnSpc>
-                        <a:spcBef>
-                          <a:spcPts val="0"/>
-                        </a:spcBef>
-                        <a:spcAft>
-                          <a:spcPts val="0"/>
-                        </a:spcAft>
-                      </a:pPr>
-                      <a:r>
-                        <a:rPr sz="635" b="0">
-                          <a:solidFill>
-                            <a:srgbClr val="14202C"/>
-                          </a:solidFill>
-                          <a:latin typeface="Microsoft YaHei UI"/>
-                        </a:rPr>
-                        <a:t>推理效率 +176%</a:t>
+                          <a:spcPct val="86000"/>
+                        </a:lnSpc>
+                        <a:spcBef>
+                          <a:spcPts val="0"/>
+                        </a:spcBef>
+                        <a:spcAft>
+                          <a:spcPts val="0"/>
+                        </a:spcAft>
+                      </a:pPr>
+                      <a:r>
+                        <a:rPr sz="515" b="0">
+                          <a:solidFill>
+                            <a:srgbClr val="121B26"/>
+                          </a:solidFill>
+                          <a:latin typeface="Microsoft YaHei UI"/>
+                        </a:rPr>
+                        <a:t/>
                       </a:r>
                     </a:p>
                   </a:txBody>
-                  <a:tcPr anchor="ctr" marL="36576" marR="36576" marT="18288" marB="18288">
+                  <a:tcPr anchor="ctr" marL="32004" marR="32004" marT="10972" marB="10972">
+                    <a:solidFill>
+                      <a:srgbClr val="EEF3F7"/>
+                    </a:solidFill>
+                    <a:lnL w="3000">
+                      <a:solidFill>
+                        <a:srgbClr val="C1CDD9"/>
+                      </a:solidFill>
+                    </a:lnL>
+                    <a:lnR w="3000">
+                      <a:solidFill>
+                        <a:srgbClr val="C1CDD9"/>
+                      </a:solidFill>
+                    </a:lnR>
+                    <a:lnT w="3000">
+                      <a:solidFill>
+                        <a:srgbClr val="C1CDD9"/>
+                      </a:solidFill>
+                    </a:lnT>
+                    <a:lnB w="3000">
+                      <a:solidFill>
+                        <a:srgbClr val="C1CDD9"/>
+                      </a:solidFill>
+                    </a:lnB>
+                  </a:tcPr>
+                </a:tc>
+              </a:tr>
+              <a:tr h="409956">
+                <a:tc>
+                  <a:txBody>
+                    <a:bodyPr wrap="square">
+                      <a:normAutofit/>
+                    </a:bodyPr>
+                    <a:lstStyle/>
+                    <a:p>
+                      <a:pPr algn="ctr">
+                        <a:lnSpc>
+                          <a:spcPct val="86000"/>
+                        </a:lnSpc>
+                        <a:spcBef>
+                          <a:spcPts val="0"/>
+                        </a:spcBef>
+                        <a:spcAft>
+                          <a:spcPts val="0"/>
+                        </a:spcAft>
+                      </a:pPr>
+                      <a:r>
+                        <a:rPr sz="535" b="1">
+                          <a:solidFill>
+                            <a:srgbClr val="0F5766"/>
+                          </a:solidFill>
+                          <a:latin typeface="Microsoft YaHei UI"/>
+                        </a:rPr>
+                        <a:t>蚂蚁灵波</a:t>
+                      </a:r>
+                    </a:p>
+                    <a:p>
+                      <a:pPr algn="ctr">
+                        <a:lnSpc>
+                          <a:spcPct val="86000"/>
+                        </a:lnSpc>
+                        <a:spcBef>
+                          <a:spcPts val="0"/>
+                        </a:spcBef>
+                        <a:spcAft>
+                          <a:spcPts val="0"/>
+                        </a:spcAft>
+                      </a:pPr>
+                      <a:r>
+                        <a:rPr sz="535" b="1">
+                          <a:solidFill>
+                            <a:srgbClr val="0F5766"/>
+                          </a:solidFill>
+                          <a:latin typeface="Microsoft YaHei UI"/>
+                        </a:rPr>
+                        <a:t>Robbyant</a:t>
+                      </a:r>
+                    </a:p>
+                  </a:txBody>
+                  <a:tcPr anchor="ctr" marL="32004" marR="32004" marT="10972" marB="10972">
                     <a:solidFill>
                       <a:srgbClr val="FFFFFF"/>
                     </a:solidFill>
-                    <a:lnL w="4200">
-                      <a:solidFill>
-                        <a:srgbClr val="BFCBD6"/>
-                      </a:solidFill>
-                      <a:prstDash val="solid"/>
+                    <a:lnL w="3000">
+                      <a:solidFill>
+                        <a:srgbClr val="C1CDD9"/>
+                      </a:solidFill>
                     </a:lnL>
-                    <a:lnR w="4200">
-                      <a:solidFill>
-                        <a:srgbClr val="BFCBD6"/>
-                      </a:solidFill>
-                      <a:prstDash val="solid"/>
+                    <a:lnR w="3000">
+                      <a:solidFill>
+                        <a:srgbClr val="C1CDD9"/>
+                      </a:solidFill>
                     </a:lnR>
-                    <a:lnT w="4200">
-                      <a:solidFill>
-                        <a:srgbClr val="BFCBD6"/>
-                      </a:solidFill>
-                      <a:prstDash val="solid"/>
+                    <a:lnT w="3000">
+                      <a:solidFill>
+                        <a:srgbClr val="C1CDD9"/>
+                      </a:solidFill>
                     </a:lnT>
-                    <a:lnB w="4200">
-                      <a:solidFill>
-                        <a:srgbClr val="BFCBD6"/>
-                      </a:solidFill>
-                      <a:prstDash val="solid"/>
+                    <a:lnB w="3000">
+                      <a:solidFill>
+                        <a:srgbClr val="C1CDD9"/>
+                      </a:solidFill>
                     </a:lnB>
                   </a:tcPr>
                 </a:tc>
@@ -4668,160 +4623,95 @@
                     </a:bodyPr>
                     <a:lstStyle/>
                     <a:p>
-                      <a:pPr algn="ctr">
-                        <a:lnSpc>
-                          <a:spcPct val="92000"/>
-                        </a:lnSpc>
-                        <a:spcBef>
-                          <a:spcPts val="0"/>
-                        </a:spcBef>
-                        <a:spcAft>
-                          <a:spcPts val="0"/>
-                        </a:spcAft>
-                      </a:pPr>
-                      <a:r>
-                        <a:rPr sz="675" b="1">
-                          <a:solidFill>
-                            <a:srgbClr val="0D4B58"/>
-                          </a:solidFill>
-                          <a:latin typeface="Microsoft YaHei UI"/>
-                        </a:rPr>
-                        <a:t>工业端侧</a:t>
-                      </a:r>
-                    </a:p>
-                    <a:p>
-                      <a:pPr algn="ctr">
-                        <a:lnSpc>
-                          <a:spcPct val="92000"/>
-                        </a:lnSpc>
-                        <a:spcBef>
-                          <a:spcPts val="0"/>
-                        </a:spcBef>
-                        <a:spcAft>
-                          <a:spcPts val="0"/>
-                        </a:spcAft>
-                      </a:pPr>
-                      <a:r>
-                        <a:rPr sz="675" b="1">
-                          <a:solidFill>
-                            <a:srgbClr val="0D4B58"/>
-                          </a:solidFill>
-                          <a:latin typeface="Microsoft YaHei UI"/>
-                        </a:rPr>
-                        <a:t>工程化领先</a:t>
+                      <a:pPr algn="l">
+                        <a:lnSpc>
+                          <a:spcPct val="86000"/>
+                        </a:lnSpc>
+                        <a:spcBef>
+                          <a:spcPts val="0"/>
+                        </a:spcBef>
+                        <a:spcAft>
+                          <a:spcPts val="0"/>
+                        </a:spcAft>
+                      </a:pPr>
+                      <a:r>
+                        <a:rPr sz="535" b="0">
+                          <a:solidFill>
+                            <a:srgbClr val="121B26"/>
+                          </a:solidFill>
+                          <a:latin typeface="Microsoft YaHei UI"/>
+                        </a:rPr>
+                        <a:t>LingBot-VLA 2.0</a:t>
+                      </a:r>
+                    </a:p>
+                    <a:p>
+                      <a:pPr algn="l">
+                        <a:lnSpc>
+                          <a:spcPct val="86000"/>
+                        </a:lnSpc>
+                        <a:spcBef>
+                          <a:spcPts val="0"/>
+                        </a:spcBef>
+                        <a:spcAft>
+                          <a:spcPts val="0"/>
+                        </a:spcAft>
+                      </a:pPr>
+                      <a:r>
+                        <a:rPr sz="535" b="0">
+                          <a:solidFill>
+                            <a:srgbClr val="121B26"/>
+                          </a:solidFill>
+                          <a:latin typeface="Microsoft YaHei UI"/>
+                        </a:rPr>
+                        <a:t>LingBot-VA 2.0</a:t>
+                      </a:r>
+                    </a:p>
+                    <a:p>
+                      <a:pPr algn="l">
+                        <a:lnSpc>
+                          <a:spcPct val="86000"/>
+                        </a:lnSpc>
+                        <a:spcBef>
+                          <a:spcPts val="0"/>
+                        </a:spcBef>
+                        <a:spcAft>
+                          <a:spcPts val="0"/>
+                        </a:spcAft>
+                      </a:pPr>
+                      <a:r>
+                        <a:rPr sz="535" b="0">
+                          <a:solidFill>
+                            <a:srgbClr val="121B26"/>
+                          </a:solidFill>
+                          <a:latin typeface="Microsoft YaHei UI"/>
+                        </a:rPr>
+                        <a:t>LingBot-World/Vision/Depth</a:t>
                       </a:r>
                     </a:p>
                   </a:txBody>
-                  <a:tcPr anchor="ctr" marL="36576" marR="36576" marT="18288" marB="18288">
+                  <a:tcPr anchor="ctr" marL="32004" marR="32004" marT="10972" marB="10972">
                     <a:solidFill>
                       <a:srgbClr val="FFFFFF"/>
                     </a:solidFill>
-                    <a:lnL w="4200">
-                      <a:solidFill>
-                        <a:srgbClr val="BFCBD6"/>
-                      </a:solidFill>
-                      <a:prstDash val="solid"/>
+                    <a:lnL w="3000">
+                      <a:solidFill>
+                        <a:srgbClr val="C1CDD9"/>
+                      </a:solidFill>
                     </a:lnL>
-                    <a:lnR w="4200">
-                      <a:solidFill>
-                        <a:srgbClr val="BFCBD6"/>
-                      </a:solidFill>
-                      <a:prstDash val="solid"/>
+                    <a:lnR w="3000">
+                      <a:solidFill>
+                        <a:srgbClr val="C1CDD9"/>
+                      </a:solidFill>
                     </a:lnR>
-                    <a:lnT w="4200">
-                      <a:solidFill>
-                        <a:srgbClr val="BFCBD6"/>
-                      </a:solidFill>
-                      <a:prstDash val="solid"/>
+                    <a:lnT w="3000">
+                      <a:solidFill>
+                        <a:srgbClr val="C1CDD9"/>
+                      </a:solidFill>
                     </a:lnT>
-                    <a:lnB w="4200">
-                      <a:solidFill>
-                        <a:srgbClr val="BFCBD6"/>
-                      </a:solidFill>
-                      <a:prstDash val="solid"/>
-                    </a:lnB>
-                  </a:tcPr>
-                </a:tc>
-              </a:tr>
-              <a:tr h="566928">
-                <a:tc>
-                  <a:txBody>
-                    <a:bodyPr wrap="square">
-                      <a:normAutofit/>
-                    </a:bodyPr>
-                    <a:lstStyle/>
-                    <a:p>
-                      <a:pPr algn="ctr">
-                        <a:lnSpc>
-                          <a:spcPct val="92000"/>
-                        </a:lnSpc>
-                        <a:spcBef>
-                          <a:spcPts val="0"/>
-                        </a:spcBef>
-                        <a:spcAft>
-                          <a:spcPts val="0"/>
-                        </a:spcAft>
-                      </a:pPr>
-                      <a:r>
-                        <a:rPr sz="675" b="1">
-                          <a:solidFill>
-                            <a:srgbClr val="14202C"/>
-                          </a:solidFill>
-                          <a:latin typeface="Microsoft YaHei UI"/>
-                        </a:rPr>
-                        <a:t>智元</a:t>
-                      </a:r>
-                    </a:p>
-                    <a:p>
-                      <a:pPr algn="ctr">
-                        <a:lnSpc>
-                          <a:spcPct val="92000"/>
-                        </a:lnSpc>
-                        <a:spcBef>
-                          <a:spcPts val="0"/>
-                        </a:spcBef>
-                        <a:spcAft>
-                          <a:spcPts val="0"/>
-                        </a:spcAft>
-                      </a:pPr>
-                      <a:r>
-                        <a:rPr sz="675" b="1">
-                          <a:solidFill>
-                            <a:srgbClr val="14202C"/>
-                          </a:solidFill>
-                          <a:latin typeface="Microsoft YaHei UI"/>
-                        </a:rPr>
-                        <a:t>AGIBOT</a:t>
-                      </a:r>
-                    </a:p>
-                  </a:txBody>
-                  <a:tcPr anchor="ctr" marL="36576" marR="36576" marT="18288" marB="18288">
-                    <a:solidFill>
-                      <a:srgbClr val="EFF3F7"/>
-                    </a:solidFill>
-                    <a:lnL w="4200">
-                      <a:solidFill>
-                        <a:srgbClr val="BFCBD6"/>
-                      </a:solidFill>
-                      <a:prstDash val="solid"/>
-                    </a:lnL>
-                    <a:lnR w="4200">
-                      <a:solidFill>
-                        <a:srgbClr val="BFCBD6"/>
-                      </a:solidFill>
-                      <a:prstDash val="solid"/>
-                    </a:lnR>
-                    <a:lnT w="4200">
-                      <a:solidFill>
-                        <a:srgbClr val="BFCBD6"/>
-                      </a:solidFill>
-                      <a:prstDash val="solid"/>
-                    </a:lnT>
-                    <a:lnB w="4200">
-                      <a:solidFill>
-                        <a:srgbClr val="BFCBD6"/>
-                      </a:solidFill>
-                      <a:prstDash val="solid"/>
+                    <a:lnB w="3000">
+                      <a:solidFill>
+                        <a:srgbClr val="C1CDD9"/>
+                      </a:solidFill>
                     </a:lnB>
                   </a:tcPr>
                 </a:tc>
@@ -4834,75 +4724,93 @@
                     <a:p>
                       <a:pPr algn="l">
                         <a:lnSpc>
-                          <a:spcPct val="92000"/>
-                        </a:lnSpc>
-                        <a:spcBef>
-                          <a:spcPts val="0"/>
-                        </a:spcBef>
-                        <a:spcAft>
-                          <a:spcPts val="0"/>
-                        </a:spcAft>
-                      </a:pPr>
-                      <a:r>
-                        <a:rPr sz="675" b="0">
-                          <a:solidFill>
-                            <a:srgbClr val="14202C"/>
-                          </a:solidFill>
-                          <a:latin typeface="Microsoft YaHei UI"/>
-                        </a:rPr>
-                        <a:t>GO-2 / GE-2</a:t>
-                      </a:r>
-                    </a:p>
-                    <a:p>
-                      <a:pPr algn="l">
-                        <a:lnSpc>
-                          <a:spcPct val="92000"/>
-                        </a:lnSpc>
-                        <a:spcBef>
-                          <a:spcPts val="0"/>
-                        </a:spcBef>
-                        <a:spcAft>
-                          <a:spcPts val="0"/>
-                        </a:spcAft>
-                      </a:pPr>
-                      <a:r>
-                        <a:rPr sz="675" b="0">
-                          <a:solidFill>
-                            <a:srgbClr val="14202C"/>
-                          </a:solidFill>
-                          <a:latin typeface="Microsoft YaHei UI"/>
-                        </a:rPr>
-                        <a:t>Genie Evolver</a:t>
+                          <a:spcPct val="86000"/>
+                        </a:lnSpc>
+                        <a:spcBef>
+                          <a:spcPts val="0"/>
+                        </a:spcBef>
+                        <a:spcAft>
+                          <a:spcPts val="0"/>
+                        </a:spcAft>
+                      </a:pPr>
+                      <a:r>
+                        <a:rPr sz="535" b="0">
+                          <a:solidFill>
+                            <a:srgbClr val="121B26"/>
+                          </a:solidFill>
+                          <a:latin typeface="Microsoft YaHei UI"/>
+                        </a:rPr>
+                        <a:t>VLA + MoE Action Expert</a:t>
+                      </a:r>
+                    </a:p>
+                    <a:p>
+                      <a:pPr algn="l">
+                        <a:lnSpc>
+                          <a:spcPct val="86000"/>
+                        </a:lnSpc>
+                        <a:spcBef>
+                          <a:spcPts val="0"/>
+                        </a:spcBef>
+                        <a:spcAft>
+                          <a:spcPts val="0"/>
+                        </a:spcAft>
+                      </a:pPr>
+                      <a:r>
+                        <a:rPr sz="535" b="0">
+                          <a:solidFill>
+                            <a:srgbClr val="121B26"/>
+                          </a:solidFill>
+                          <a:latin typeface="Microsoft YaHei UI"/>
+                        </a:rPr>
+                        <a:t>Video-Action</a:t>
+                      </a:r>
+                    </a:p>
+                    <a:p>
+                      <a:pPr algn="l">
+                        <a:lnSpc>
+                          <a:spcPct val="86000"/>
+                        </a:lnSpc>
+                        <a:spcBef>
+                          <a:spcPts val="0"/>
+                        </a:spcBef>
+                        <a:spcAft>
+                          <a:spcPts val="0"/>
+                        </a:spcAft>
+                      </a:pPr>
+                      <a:r>
+                        <a:rPr sz="535" b="0">
+                          <a:solidFill>
+                            <a:srgbClr val="121B26"/>
+                          </a:solidFill>
+                          <a:latin typeface="Microsoft YaHei UI"/>
+                        </a:rPr>
+                        <a:t>世界模型/视觉/深度</a:t>
                       </a:r>
                     </a:p>
                   </a:txBody>
-                  <a:tcPr anchor="ctr" marL="36576" marR="36576" marT="18288" marB="18288">
+                  <a:tcPr anchor="ctr" marL="32004" marR="32004" marT="10972" marB="10972">
                     <a:solidFill>
-                      <a:srgbClr val="EFF3F7"/>
+                      <a:srgbClr val="FFFFFF"/>
                     </a:solidFill>
-                    <a:lnL w="4200">
-                      <a:solidFill>
-                        <a:srgbClr val="BFCBD6"/>
-                      </a:solidFill>
-                      <a:prstDash val="solid"/>
+                    <a:lnL w="3000">
+                      <a:solidFill>
+                        <a:srgbClr val="C1CDD9"/>
+                      </a:solidFill>
                     </a:lnL>
-                    <a:lnR w="4200">
-                      <a:solidFill>
-                        <a:srgbClr val="BFCBD6"/>
-                      </a:solidFill>
-                      <a:prstDash val="solid"/>
+                    <a:lnR w="3000">
+                      <a:solidFill>
+                        <a:srgbClr val="C1CDD9"/>
+                      </a:solidFill>
                     </a:lnR>
-                    <a:lnT w="4200">
-                      <a:solidFill>
-                        <a:srgbClr val="BFCBD6"/>
-                      </a:solidFill>
-                      <a:prstDash val="solid"/>
+                    <a:lnT w="3000">
+                      <a:solidFill>
+                        <a:srgbClr val="C1CDD9"/>
+                      </a:solidFill>
                     </a:lnT>
-                    <a:lnB w="4200">
-                      <a:solidFill>
-                        <a:srgbClr val="BFCBD6"/>
-                      </a:solidFill>
-                      <a:prstDash val="solid"/>
+                    <a:lnB w="3000">
+                      <a:solidFill>
+                        <a:srgbClr val="C1CDD9"/>
+                      </a:solidFill>
                     </a:lnB>
                   </a:tcPr>
                 </a:tc>
@@ -4915,75 +4823,115 @@
                     <a:p>
                       <a:pPr algn="l">
                         <a:lnSpc>
-                          <a:spcPct val="92000"/>
-                        </a:lnSpc>
-                        <a:spcBef>
-                          <a:spcPts val="0"/>
-                        </a:spcBef>
-                        <a:spcAft>
-                          <a:spcPts val="0"/>
-                        </a:spcAft>
-                      </a:pPr>
-                      <a:r>
-                        <a:rPr sz="635" b="0">
-                          <a:solidFill>
-                            <a:srgbClr val="14202C"/>
-                          </a:solidFill>
-                          <a:latin typeface="Microsoft YaHei UI"/>
-                        </a:rPr>
-                        <a:t>模型参数未披露</a:t>
-                      </a:r>
-                    </a:p>
-                    <a:p>
-                      <a:pPr algn="l">
-                        <a:lnSpc>
-                          <a:spcPct val="92000"/>
-                        </a:lnSpc>
-                        <a:spcBef>
-                          <a:spcPts val="0"/>
-                        </a:spcBef>
-                        <a:spcAft>
-                          <a:spcPts val="0"/>
-                        </a:spcAft>
-                      </a:pPr>
-                      <a:r>
-                        <a:rPr sz="635" b="0">
-                          <a:solidFill>
-                            <a:srgbClr val="14202C"/>
-                          </a:solidFill>
-                          <a:latin typeface="Microsoft YaHei UI"/>
-                        </a:rPr>
-                        <a:t>G2 Max 38/50kg</a:t>
+                          <a:spcPct val="86000"/>
+                        </a:lnSpc>
+                        <a:spcBef>
+                          <a:spcPts val="0"/>
+                        </a:spcBef>
+                        <a:spcAft>
+                          <a:spcPts val="0"/>
+                        </a:spcAft>
+                      </a:pPr>
+                      <a:r>
+                        <a:rPr sz="484" b="0">
+                          <a:solidFill>
+                            <a:srgbClr val="121B26"/>
+                          </a:solidFill>
+                          <a:latin typeface="Microsoft YaHei UI"/>
+                        </a:rPr>
+                        <a:t>VLA 6B；VA约5B</a:t>
+                      </a:r>
+                    </a:p>
+                    <a:p>
+                      <a:pPr algn="l">
+                        <a:lnSpc>
+                          <a:spcPct val="86000"/>
+                        </a:lnSpc>
+                        <a:spcBef>
+                          <a:spcPts val="0"/>
+                        </a:spcBef>
+                        <a:spcAft>
+                          <a:spcPts val="0"/>
+                        </a:spcAft>
+                      </a:pPr>
+                      <a:r>
+                        <a:rPr sz="484" b="0">
+                          <a:solidFill>
+                            <a:srgbClr val="121B26"/>
+                          </a:solidFill>
+                          <a:latin typeface="Microsoft YaHei UI"/>
+                        </a:rPr>
+                        <a:t>Vision 1B</a:t>
+                      </a:r>
+                    </a:p>
+                    <a:p>
+                      <a:pPr algn="l">
+                        <a:lnSpc>
+                          <a:spcPct val="86000"/>
+                        </a:lnSpc>
+                        <a:spcBef>
+                          <a:spcPts val="0"/>
+                        </a:spcBef>
+                        <a:spcAft>
+                          <a:spcPts val="0"/>
+                        </a:spcAft>
+                      </a:pPr>
+                      <a:r>
+                        <a:rPr sz="484" b="0">
+                          <a:solidFill>
+                            <a:srgbClr val="121B26"/>
+                          </a:solidFill>
+                          <a:latin typeface="Microsoft YaHei UI"/>
+                        </a:rPr>
+                        <a:t>6万h；20+本体</a:t>
+                      </a:r>
+                    </a:p>
+                    <a:p>
+                      <a:pPr algn="l">
+                        <a:lnSpc>
+                          <a:spcPct val="86000"/>
+                        </a:lnSpc>
+                        <a:spcBef>
+                          <a:spcPts val="0"/>
+                        </a:spcBef>
+                        <a:spcAft>
+                          <a:spcPts val="0"/>
+                        </a:spcAft>
+                      </a:pPr>
+                      <a:r>
+                        <a:rPr sz="484" b="0">
+                          <a:solidFill>
+                            <a:srgbClr val="121B26"/>
+                          </a:solidFill>
+                          <a:latin typeface="Microsoft YaHei UI"/>
+                        </a:rPr>
+                        <a:t>Depth 1.5亿数据</a:t>
                       </a:r>
                     </a:p>
                   </a:txBody>
-                  <a:tcPr anchor="ctr" marL="36576" marR="36576" marT="18288" marB="18288">
+                  <a:tcPr anchor="ctr" marL="32004" marR="32004" marT="10972" marB="10972">
                     <a:solidFill>
-                      <a:srgbClr val="EFF3F7"/>
+                      <a:srgbClr val="FFFFFF"/>
                     </a:solidFill>
-                    <a:lnL w="4200">
-                      <a:solidFill>
-                        <a:srgbClr val="BFCBD6"/>
-                      </a:solidFill>
-                      <a:prstDash val="solid"/>
+                    <a:lnL w="3000">
+                      <a:solidFill>
+                        <a:srgbClr val="C1CDD9"/>
+                      </a:solidFill>
                     </a:lnL>
-                    <a:lnR w="4200">
-                      <a:solidFill>
-                        <a:srgbClr val="BFCBD6"/>
-                      </a:solidFill>
-                      <a:prstDash val="solid"/>
+                    <a:lnR w="3000">
+                      <a:solidFill>
+                        <a:srgbClr val="C1CDD9"/>
+                      </a:solidFill>
                     </a:lnR>
-                    <a:lnT w="4200">
-                      <a:solidFill>
-                        <a:srgbClr val="BFCBD6"/>
-                      </a:solidFill>
-                      <a:prstDash val="solid"/>
+                    <a:lnT w="3000">
+                      <a:solidFill>
+                        <a:srgbClr val="C1CDD9"/>
+                      </a:solidFill>
                     </a:lnT>
-                    <a:lnB w="4200">
-                      <a:solidFill>
-                        <a:srgbClr val="BFCBD6"/>
-                      </a:solidFill>
-                      <a:prstDash val="solid"/>
+                    <a:lnB w="3000">
+                      <a:solidFill>
+                        <a:srgbClr val="C1CDD9"/>
+                      </a:solidFill>
                     </a:lnB>
                   </a:tcPr>
                 </a:tc>
@@ -4996,75 +4944,93 @@
                     <a:p>
                       <a:pPr algn="l">
                         <a:lnSpc>
-                          <a:spcPct val="92000"/>
-                        </a:lnSpc>
-                        <a:spcBef>
-                          <a:spcPts val="0"/>
-                        </a:spcBef>
-                        <a:spcAft>
-                          <a:spcPts val="0"/>
-                        </a:spcAft>
-                      </a:pPr>
-                      <a:r>
-                        <a:rPr sz="635" b="0">
-                          <a:solidFill>
-                            <a:srgbClr val="14202C"/>
-                          </a:solidFill>
-                          <a:latin typeface="Microsoft YaHei UI"/>
-                        </a:rPr>
-                        <a:t>A3 Ultra 700TOPS</a:t>
-                      </a:r>
-                    </a:p>
-                    <a:p>
-                      <a:pPr algn="l">
-                        <a:lnSpc>
-                          <a:spcPct val="92000"/>
-                        </a:lnSpc>
-                        <a:spcBef>
-                          <a:spcPts val="0"/>
-                        </a:spcBef>
-                        <a:spcAft>
-                          <a:spcPts val="0"/>
-                        </a:spcAft>
-                      </a:pPr>
-                      <a:r>
-                        <a:rPr sz="635" b="0">
-                          <a:solidFill>
-                            <a:srgbClr val="14202C"/>
-                          </a:solidFill>
-                          <a:latin typeface="Microsoft YaHei UI"/>
-                        </a:rPr>
-                        <a:t>7x24h作业口径</a:t>
+                          <a:spcPct val="86000"/>
+                        </a:lnSpc>
+                        <a:spcBef>
+                          <a:spcPts val="0"/>
+                        </a:spcBef>
+                        <a:spcAft>
+                          <a:spcPts val="0"/>
+                        </a:spcAft>
+                      </a:pPr>
+                      <a:r>
+                        <a:rPr sz="484" b="0">
+                          <a:solidFill>
+                            <a:srgbClr val="121B26"/>
+                          </a:solidFill>
+                          <a:latin typeface="Microsoft YaHei UI"/>
+                        </a:rPr>
+                        <a:t>VLA：RTX 4090D</a:t>
+                      </a:r>
+                    </a:p>
+                    <a:p>
+                      <a:pPr algn="l">
+                        <a:lnSpc>
+                          <a:spcPct val="86000"/>
+                        </a:lnSpc>
+                        <a:spcBef>
+                          <a:spcPts val="0"/>
+                        </a:spcBef>
+                        <a:spcAft>
+                          <a:spcPts val="0"/>
+                        </a:spcAft>
+                      </a:pPr>
+                      <a:r>
+                        <a:rPr sz="484" b="0">
+                          <a:solidFill>
+                            <a:srgbClr val="121B26"/>
+                          </a:solidFill>
+                          <a:latin typeface="Microsoft YaHei UI"/>
+                        </a:rPr>
+                        <a:t>VA：18-24GB VRAM</a:t>
+                      </a:r>
+                    </a:p>
+                    <a:p>
+                      <a:pPr algn="l">
+                        <a:lnSpc>
+                          <a:spcPct val="86000"/>
+                        </a:lnSpc>
+                        <a:spcBef>
+                          <a:spcPts val="0"/>
+                        </a:spcBef>
+                        <a:spcAft>
+                          <a:spcPts val="0"/>
+                        </a:spcAft>
+                      </a:pPr>
+                      <a:r>
+                        <a:rPr sz="484" b="0">
+                          <a:solidFill>
+                            <a:srgbClr val="121B26"/>
+                          </a:solidFill>
+                          <a:latin typeface="Microsoft YaHei UI"/>
+                        </a:rPr>
+                        <a:t>Depth：edge SDK</a:t>
                       </a:r>
                     </a:p>
                   </a:txBody>
-                  <a:tcPr anchor="ctr" marL="36576" marR="36576" marT="18288" marB="18288">
+                  <a:tcPr anchor="ctr" marL="32004" marR="32004" marT="10972" marB="10972">
                     <a:solidFill>
-                      <a:srgbClr val="EFF3F7"/>
+                      <a:srgbClr val="FFFFFF"/>
                     </a:solidFill>
-                    <a:lnL w="4200">
-                      <a:solidFill>
-                        <a:srgbClr val="BFCBD6"/>
-                      </a:solidFill>
-                      <a:prstDash val="solid"/>
+                    <a:lnL w="3000">
+                      <a:solidFill>
+                        <a:srgbClr val="C1CDD9"/>
+                      </a:solidFill>
                     </a:lnL>
-                    <a:lnR w="4200">
-                      <a:solidFill>
-                        <a:srgbClr val="BFCBD6"/>
-                      </a:solidFill>
-                      <a:prstDash val="solid"/>
+                    <a:lnR w="3000">
+                      <a:solidFill>
+                        <a:srgbClr val="C1CDD9"/>
+                      </a:solidFill>
                     </a:lnR>
-                    <a:lnT w="4200">
-                      <a:solidFill>
-                        <a:srgbClr val="BFCBD6"/>
-                      </a:solidFill>
-                      <a:prstDash val="solid"/>
+                    <a:lnT w="3000">
+                      <a:solidFill>
+                        <a:srgbClr val="C1CDD9"/>
+                      </a:solidFill>
                     </a:lnT>
-                    <a:lnB w="4200">
-                      <a:solidFill>
-                        <a:srgbClr val="BFCBD6"/>
-                      </a:solidFill>
-                      <a:prstDash val="solid"/>
+                    <a:lnB w="3000">
+                      <a:solidFill>
+                        <a:srgbClr val="C1CDD9"/>
+                      </a:solidFill>
                     </a:lnB>
                   </a:tcPr>
                 </a:tc>
@@ -5075,82 +5041,100 @@
                     </a:bodyPr>
                     <a:lstStyle/>
                     <a:p>
-                      <a:pPr algn="ctr">
-                        <a:lnSpc>
-                          <a:spcPct val="92000"/>
-                        </a:lnSpc>
-                        <a:spcBef>
-                          <a:spcPts val="0"/>
-                        </a:spcBef>
-                        <a:spcAft>
-                          <a:spcPts val="0"/>
-                        </a:spcAft>
-                      </a:pPr>
-                      <a:r>
-                        <a:rPr sz="675" b="1">
-                          <a:solidFill>
-                            <a:srgbClr val="0D4B58"/>
-                          </a:solidFill>
-                          <a:latin typeface="Microsoft YaHei UI"/>
-                        </a:rPr>
-                        <a:t>算力明确</a:t>
-                      </a:r>
-                    </a:p>
-                    <a:p>
-                      <a:pPr algn="ctr">
-                        <a:lnSpc>
-                          <a:spcPct val="92000"/>
-                        </a:lnSpc>
-                        <a:spcBef>
-                          <a:spcPts val="0"/>
-                        </a:spcBef>
-                        <a:spcAft>
-                          <a:spcPts val="0"/>
-                        </a:spcAft>
-                      </a:pPr>
-                      <a:r>
-                        <a:rPr sz="675" b="1">
-                          <a:solidFill>
-                            <a:srgbClr val="0D4B58"/>
-                          </a:solidFill>
-                          <a:latin typeface="Microsoft YaHei UI"/>
-                        </a:rPr>
-                        <a:t>参数待补</a:t>
+                      <a:pPr algn="l">
+                        <a:lnSpc>
+                          <a:spcPct val="86000"/>
+                        </a:lnSpc>
+                        <a:spcBef>
+                          <a:spcPts val="0"/>
+                        </a:spcBef>
+                        <a:spcAft>
+                          <a:spcPts val="0"/>
+                        </a:spcAft>
+                      </a:pPr>
+                      <a:r>
+                        <a:rPr sz="484" b="0">
+                          <a:solidFill>
+                            <a:srgbClr val="121B26"/>
+                          </a:solidFill>
+                          <a:latin typeface="Microsoft YaHei UI"/>
+                        </a:rPr>
+                        <a:t>VLA约130ms</a:t>
+                      </a:r>
+                    </a:p>
+                    <a:p>
+                      <a:pPr algn="l">
+                        <a:lnSpc>
+                          <a:spcPct val="86000"/>
+                        </a:lnSpc>
+                        <a:spcBef>
+                          <a:spcPts val="0"/>
+                        </a:spcBef>
+                        <a:spcAft>
+                          <a:spcPts val="0"/>
+                        </a:spcAft>
+                      </a:pPr>
+                      <a:r>
+                        <a:rPr sz="484" b="0">
+                          <a:solidFill>
+                            <a:srgbClr val="121B26"/>
+                          </a:solidFill>
+                          <a:latin typeface="Microsoft YaHei UI"/>
+                        </a:rPr>
+                        <a:t>World 720p/60fps</a:t>
+                      </a:r>
+                    </a:p>
+                    <a:p>
+                      <a:pPr algn="l">
+                        <a:lnSpc>
+                          <a:spcPct val="86000"/>
+                        </a:lnSpc>
+                        <a:spcBef>
+                          <a:spcPts val="0"/>
+                        </a:spcBef>
+                        <a:spcAft>
+                          <a:spcPts val="0"/>
+                        </a:spcAft>
+                      </a:pPr>
+                      <a:r>
+                        <a:rPr sz="484" b="0">
+                          <a:solidFill>
+                            <a:srgbClr val="121B26"/>
+                          </a:solidFill>
+                          <a:latin typeface="Microsoft YaHei UI"/>
+                        </a:rPr>
+                        <a:t>控制延迟&lt;1s</a:t>
                       </a:r>
                     </a:p>
                   </a:txBody>
-                  <a:tcPr anchor="ctr" marL="36576" marR="36576" marT="18288" marB="18288">
+                  <a:tcPr anchor="ctr" marL="32004" marR="32004" marT="10972" marB="10972">
                     <a:solidFill>
-                      <a:srgbClr val="EFF3F7"/>
+                      <a:srgbClr val="FFFFFF"/>
                     </a:solidFill>
-                    <a:lnL w="4200">
-                      <a:solidFill>
-                        <a:srgbClr val="BFCBD6"/>
-                      </a:solidFill>
-                      <a:prstDash val="solid"/>
+                    <a:lnL w="3000">
+                      <a:solidFill>
+                        <a:srgbClr val="C1CDD9"/>
+                      </a:solidFill>
                     </a:lnL>
-                    <a:lnR w="4200">
-                      <a:solidFill>
-                        <a:srgbClr val="BFCBD6"/>
-                      </a:solidFill>
-                      <a:prstDash val="solid"/>
+                    <a:lnR w="3000">
+                      <a:solidFill>
+                        <a:srgbClr val="C1CDD9"/>
+                      </a:solidFill>
                     </a:lnR>
-                    <a:lnT w="4200">
-                      <a:solidFill>
-                        <a:srgbClr val="BFCBD6"/>
-                      </a:solidFill>
-                      <a:prstDash val="solid"/>
+                    <a:lnT w="3000">
+                      <a:solidFill>
+                        <a:srgbClr val="C1CDD9"/>
+                      </a:solidFill>
                     </a:lnT>
-                    <a:lnB w="4200">
-                      <a:solidFill>
-                        <a:srgbClr val="BFCBD6"/>
-                      </a:solidFill>
-                      <a:prstDash val="solid"/>
+                    <a:lnB w="3000">
+                      <a:solidFill>
+                        <a:srgbClr val="C1CDD9"/>
+                      </a:solidFill>
                     </a:lnB>
                   </a:tcPr>
                 </a:tc>
               </a:tr>
-              <a:tr h="566928">
+              <a:tr h="409956">
                 <a:tc>
                   <a:txBody>
                     <a:bodyPr wrap="square">
@@ -5160,53 +5144,71 @@
                     <a:p>
                       <a:pPr algn="ctr">
                         <a:lnSpc>
-                          <a:spcPct val="92000"/>
-                        </a:lnSpc>
-                        <a:spcBef>
-                          <a:spcPts val="0"/>
-                        </a:spcBef>
-                        <a:spcAft>
-                          <a:spcPts val="0"/>
-                        </a:spcAft>
-                      </a:pPr>
-                      <a:r>
-                        <a:rPr sz="675" b="1">
-                          <a:solidFill>
-                            <a:srgbClr val="14202C"/>
-                          </a:solidFill>
-                          <a:latin typeface="Microsoft YaHei UI"/>
-                        </a:rPr>
-                        <a:t>地瓜+它石</a:t>
+                          <a:spcPct val="86000"/>
+                        </a:lnSpc>
+                        <a:spcBef>
+                          <a:spcPts val="0"/>
+                        </a:spcBef>
+                        <a:spcAft>
+                          <a:spcPts val="0"/>
+                        </a:spcAft>
+                      </a:pPr>
+                      <a:r>
+                        <a:rPr sz="535" b="1">
+                          <a:solidFill>
+                            <a:srgbClr val="0F5766"/>
+                          </a:solidFill>
+                          <a:latin typeface="Microsoft YaHei UI"/>
+                        </a:rPr>
+                        <a:t>智元</a:t>
+                      </a:r>
+                    </a:p>
+                    <a:p>
+                      <a:pPr algn="ctr">
+                        <a:lnSpc>
+                          <a:spcPct val="86000"/>
+                        </a:lnSpc>
+                        <a:spcBef>
+                          <a:spcPts val="0"/>
+                        </a:spcBef>
+                        <a:spcAft>
+                          <a:spcPts val="0"/>
+                        </a:spcAft>
+                      </a:pPr>
+                      <a:r>
+                        <a:rPr sz="535" b="1">
+                          <a:solidFill>
+                            <a:srgbClr val="0F5766"/>
+                          </a:solidFill>
+                          <a:latin typeface="Microsoft YaHei UI"/>
+                        </a:rPr>
+                        <a:t>AGIBOT</a:t>
                       </a:r>
                     </a:p>
                   </a:txBody>
-                  <a:tcPr anchor="ctr" marL="36576" marR="36576" marT="18288" marB="18288">
+                  <a:tcPr anchor="ctr" marL="32004" marR="32004" marT="10972" marB="10972">
                     <a:solidFill>
-                      <a:srgbClr val="FFFFFF"/>
+                      <a:srgbClr val="EEF3F7"/>
                     </a:solidFill>
-                    <a:lnL w="4200">
-                      <a:solidFill>
-                        <a:srgbClr val="BFCBD6"/>
-                      </a:solidFill>
-                      <a:prstDash val="solid"/>
+                    <a:lnL w="3000">
+                      <a:solidFill>
+                        <a:srgbClr val="C1CDD9"/>
+                      </a:solidFill>
                     </a:lnL>
-                    <a:lnR w="4200">
-                      <a:solidFill>
-                        <a:srgbClr val="BFCBD6"/>
-                      </a:solidFill>
-                      <a:prstDash val="solid"/>
+                    <a:lnR w="3000">
+                      <a:solidFill>
+                        <a:srgbClr val="C1CDD9"/>
+                      </a:solidFill>
                     </a:lnR>
-                    <a:lnT w="4200">
-                      <a:solidFill>
-                        <a:srgbClr val="BFCBD6"/>
-                      </a:solidFill>
-                      <a:prstDash val="solid"/>
+                    <a:lnT w="3000">
+                      <a:solidFill>
+                        <a:srgbClr val="C1CDD9"/>
+                      </a:solidFill>
                     </a:lnT>
-                    <a:lnB w="4200">
-                      <a:solidFill>
-                        <a:srgbClr val="BFCBD6"/>
-                      </a:solidFill>
-                      <a:prstDash val="solid"/>
+                    <a:lnB w="3000">
+                      <a:solidFill>
+                        <a:srgbClr val="C1CDD9"/>
+                      </a:solidFill>
                     </a:lnB>
                   </a:tcPr>
                 </a:tc>
@@ -5219,75 +5221,93 @@
                     <a:p>
                       <a:pPr algn="l">
                         <a:lnSpc>
-                          <a:spcPct val="92000"/>
-                        </a:lnSpc>
-                        <a:spcBef>
-                          <a:spcPts val="0"/>
-                        </a:spcBef>
-                        <a:spcAft>
-                          <a:spcPts val="0"/>
-                        </a:spcAft>
-                      </a:pPr>
-                      <a:r>
-                        <a:rPr sz="675" b="0">
-                          <a:solidFill>
-                            <a:srgbClr val="14202C"/>
-                          </a:solidFill>
-                          <a:latin typeface="Microsoft YaHei UI"/>
-                        </a:rPr>
-                        <a:t>RDK S600</a:t>
-                      </a:r>
-                    </a:p>
-                    <a:p>
-                      <a:pPr algn="l">
-                        <a:lnSpc>
-                          <a:spcPct val="92000"/>
-                        </a:lnSpc>
-                        <a:spcBef>
-                          <a:spcPts val="0"/>
-                        </a:spcBef>
-                        <a:spcAft>
-                          <a:spcPts val="0"/>
-                        </a:spcAft>
-                      </a:pPr>
-                      <a:r>
-                        <a:rPr sz="675" b="0">
-                          <a:solidFill>
-                            <a:srgbClr val="14202C"/>
-                          </a:solidFill>
-                          <a:latin typeface="Microsoft YaHei UI"/>
-                        </a:rPr>
-                        <a:t>A3 具身模型适配</a:t>
+                          <a:spcPct val="86000"/>
+                        </a:lnSpc>
+                        <a:spcBef>
+                          <a:spcPts val="0"/>
+                        </a:spcBef>
+                        <a:spcAft>
+                          <a:spcPts val="0"/>
+                        </a:spcAft>
+                      </a:pPr>
+                      <a:r>
+                        <a:rPr sz="535" b="0">
+                          <a:solidFill>
+                            <a:srgbClr val="121B26"/>
+                          </a:solidFill>
+                          <a:latin typeface="Microsoft YaHei UI"/>
+                        </a:rPr>
+                        <a:t>GO-1 / GO-2</a:t>
+                      </a:r>
+                    </a:p>
+                    <a:p>
+                      <a:pPr algn="l">
+                        <a:lnSpc>
+                          <a:spcPct val="86000"/>
+                        </a:lnSpc>
+                        <a:spcBef>
+                          <a:spcPts val="0"/>
+                        </a:spcBef>
+                        <a:spcAft>
+                          <a:spcPts val="0"/>
+                        </a:spcAft>
+                      </a:pPr>
+                      <a:r>
+                        <a:rPr sz="535" b="0">
+                          <a:solidFill>
+                            <a:srgbClr val="121B26"/>
+                          </a:solidFill>
+                          <a:latin typeface="Microsoft YaHei UI"/>
+                        </a:rPr>
+                        <a:t>GE-2</a:t>
+                      </a:r>
+                    </a:p>
+                    <a:p>
+                      <a:pPr algn="l">
+                        <a:lnSpc>
+                          <a:spcPct val="86000"/>
+                        </a:lnSpc>
+                        <a:spcBef>
+                          <a:spcPts val="0"/>
+                        </a:spcBef>
+                        <a:spcAft>
+                          <a:spcPts val="0"/>
+                        </a:spcAft>
+                      </a:pPr>
+                      <a:r>
+                        <a:rPr sz="535" b="0">
+                          <a:solidFill>
+                            <a:srgbClr val="121B26"/>
+                          </a:solidFill>
+                          <a:latin typeface="Microsoft YaHei UI"/>
+                        </a:rPr>
+                        <a:t>Genie Evolver 1.0</a:t>
                       </a:r>
                     </a:p>
                   </a:txBody>
-                  <a:tcPr anchor="ctr" marL="36576" marR="36576" marT="18288" marB="18288">
+                  <a:tcPr anchor="ctr" marL="32004" marR="32004" marT="10972" marB="10972">
                     <a:solidFill>
-                      <a:srgbClr val="FFFFFF"/>
+                      <a:srgbClr val="EEF3F7"/>
                     </a:solidFill>
-                    <a:lnL w="4200">
-                      <a:solidFill>
-                        <a:srgbClr val="BFCBD6"/>
-                      </a:solidFill>
-                      <a:prstDash val="solid"/>
+                    <a:lnL w="3000">
+                      <a:solidFill>
+                        <a:srgbClr val="C1CDD9"/>
+                      </a:solidFill>
                     </a:lnL>
-                    <a:lnR w="4200">
-                      <a:solidFill>
-                        <a:srgbClr val="BFCBD6"/>
-                      </a:solidFill>
-                      <a:prstDash val="solid"/>
+                    <a:lnR w="3000">
+                      <a:solidFill>
+                        <a:srgbClr val="C1CDD9"/>
+                      </a:solidFill>
                     </a:lnR>
-                    <a:lnT w="4200">
-                      <a:solidFill>
-                        <a:srgbClr val="BFCBD6"/>
-                      </a:solidFill>
-                      <a:prstDash val="solid"/>
+                    <a:lnT w="3000">
+                      <a:solidFill>
+                        <a:srgbClr val="C1CDD9"/>
+                      </a:solidFill>
                     </a:lnT>
-                    <a:lnB w="4200">
-                      <a:solidFill>
-                        <a:srgbClr val="BFCBD6"/>
-                      </a:solidFill>
-                      <a:prstDash val="solid"/>
+                    <a:lnB w="3000">
+                      <a:solidFill>
+                        <a:srgbClr val="C1CDD9"/>
+                      </a:solidFill>
                     </a:lnB>
                   </a:tcPr>
                 </a:tc>
@@ -5300,75 +5320,93 @@
                     <a:p>
                       <a:pPr algn="l">
                         <a:lnSpc>
-                          <a:spcPct val="92000"/>
-                        </a:lnSpc>
-                        <a:spcBef>
-                          <a:spcPts val="0"/>
-                        </a:spcBef>
-                        <a:spcAft>
-                          <a:spcPts val="0"/>
-                        </a:spcAft>
-                      </a:pPr>
-                      <a:r>
-                        <a:rPr sz="635" b="0">
-                          <a:solidFill>
-                            <a:srgbClr val="14202C"/>
-                          </a:solidFill>
-                          <a:latin typeface="Microsoft YaHei UI"/>
-                        </a:rPr>
-                        <a:t>3B模型适配</a:t>
-                      </a:r>
-                    </a:p>
-                    <a:p>
-                      <a:pPr algn="l">
-                        <a:lnSpc>
-                          <a:spcPct val="92000"/>
-                        </a:lnSpc>
-                        <a:spcBef>
-                          <a:spcPts val="0"/>
-                        </a:spcBef>
-                        <a:spcAft>
-                          <a:spcPts val="0"/>
-                        </a:spcAft>
-                      </a:pPr>
-                      <a:r>
-                        <a:rPr sz="635" b="0">
-                          <a:solidFill>
-                            <a:srgbClr val="14202C"/>
-                          </a:solidFill>
-                          <a:latin typeface="Microsoft YaHei UI"/>
-                        </a:rPr>
-                        <a:t>5天真机部署</a:t>
+                          <a:spcPct val="86000"/>
+                        </a:lnSpc>
+                        <a:spcBef>
+                          <a:spcPts val="0"/>
+                        </a:spcBef>
+                        <a:spcAft>
+                          <a:spcPts val="0"/>
+                        </a:spcAft>
+                      </a:pPr>
+                      <a:r>
+                        <a:rPr sz="535" b="0">
+                          <a:solidFill>
+                            <a:srgbClr val="121B26"/>
+                          </a:solidFill>
+                          <a:latin typeface="Microsoft YaHei UI"/>
+                        </a:rPr>
+                        <a:t>具身基座模型</a:t>
+                      </a:r>
+                    </a:p>
+                    <a:p>
+                      <a:pPr algn="l">
+                        <a:lnSpc>
+                          <a:spcPct val="86000"/>
+                        </a:lnSpc>
+                        <a:spcBef>
+                          <a:spcPts val="0"/>
+                        </a:spcBef>
+                        <a:spcAft>
+                          <a:spcPts val="0"/>
+                        </a:spcAft>
+                      </a:pPr>
+                      <a:r>
+                        <a:rPr sz="535" b="0">
+                          <a:solidFill>
+                            <a:srgbClr val="121B26"/>
+                          </a:solidFill>
+                          <a:latin typeface="Microsoft YaHei UI"/>
+                        </a:rPr>
+                        <a:t>世界模型</a:t>
+                      </a:r>
+                    </a:p>
+                    <a:p>
+                      <a:pPr algn="l">
+                        <a:lnSpc>
+                          <a:spcPct val="86000"/>
+                        </a:lnSpc>
+                        <a:spcBef>
+                          <a:spcPts val="0"/>
+                        </a:spcBef>
+                        <a:spcAft>
+                          <a:spcPts val="0"/>
+                        </a:spcAft>
+                      </a:pPr>
+                      <a:r>
+                        <a:rPr sz="535" b="0">
+                          <a:solidFill>
+                            <a:srgbClr val="121B26"/>
+                          </a:solidFill>
+                          <a:latin typeface="Microsoft YaHei UI"/>
+                        </a:rPr>
+                        <a:t>闭环真机RL</a:t>
                       </a:r>
                     </a:p>
                   </a:txBody>
-                  <a:tcPr anchor="ctr" marL="36576" marR="36576" marT="18288" marB="18288">
+                  <a:tcPr anchor="ctr" marL="32004" marR="32004" marT="10972" marB="10972">
                     <a:solidFill>
-                      <a:srgbClr val="FFFFFF"/>
+                      <a:srgbClr val="EEF3F7"/>
                     </a:solidFill>
-                    <a:lnL w="4200">
-                      <a:solidFill>
-                        <a:srgbClr val="BFCBD6"/>
-                      </a:solidFill>
-                      <a:prstDash val="solid"/>
+                    <a:lnL w="3000">
+                      <a:solidFill>
+                        <a:srgbClr val="C1CDD9"/>
+                      </a:solidFill>
                     </a:lnL>
-                    <a:lnR w="4200">
-                      <a:solidFill>
-                        <a:srgbClr val="BFCBD6"/>
-                      </a:solidFill>
-                      <a:prstDash val="solid"/>
+                    <a:lnR w="3000">
+                      <a:solidFill>
+                        <a:srgbClr val="C1CDD9"/>
+                      </a:solidFill>
                     </a:lnR>
-                    <a:lnT w="4200">
-                      <a:solidFill>
-                        <a:srgbClr val="BFCBD6"/>
-                      </a:solidFill>
-                      <a:prstDash val="solid"/>
+                    <a:lnT w="3000">
+                      <a:solidFill>
+                        <a:srgbClr val="C1CDD9"/>
+                      </a:solidFill>
                     </a:lnT>
-                    <a:lnB w="4200">
-                      <a:solidFill>
-                        <a:srgbClr val="BFCBD6"/>
-                      </a:solidFill>
-                      <a:prstDash val="solid"/>
+                    <a:lnB w="3000">
+                      <a:solidFill>
+                        <a:srgbClr val="C1CDD9"/>
+                      </a:solidFill>
                     </a:lnB>
                   </a:tcPr>
                 </a:tc>
@@ -5381,75 +5419,49 @@
                     <a:p>
                       <a:pPr algn="l">
                         <a:lnSpc>
-                          <a:spcPct val="92000"/>
-                        </a:lnSpc>
-                        <a:spcBef>
-                          <a:spcPts val="0"/>
-                        </a:spcBef>
-                        <a:spcAft>
-                          <a:spcPts val="0"/>
-                        </a:spcAft>
-                      </a:pPr>
-                      <a:r>
-                        <a:rPr sz="635" b="0">
-                          <a:solidFill>
-                            <a:srgbClr val="14202C"/>
-                          </a:solidFill>
-                          <a:latin typeface="Microsoft YaHei UI"/>
-                        </a:rPr>
-                        <a:t>560TOPS INT8</a:t>
-                      </a:r>
-                    </a:p>
-                    <a:p>
-                      <a:pPr algn="l">
-                        <a:lnSpc>
-                          <a:spcPct val="92000"/>
-                        </a:lnSpc>
-                        <a:spcBef>
-                          <a:spcPts val="0"/>
-                        </a:spcBef>
-                        <a:spcAft>
-                          <a:spcPts val="0"/>
-                        </a:spcAft>
-                      </a:pPr>
-                      <a:r>
-                        <a:rPr sz="635" b="0">
-                          <a:solidFill>
-                            <a:srgbClr val="14202C"/>
-                          </a:solidFill>
-                          <a:latin typeface="Microsoft YaHei UI"/>
-                        </a:rPr>
-                        <a:t>32/64GB；204.8GB/s</a:t>
+                          <a:spcPct val="86000"/>
+                        </a:lnSpc>
+                        <a:spcBef>
+                          <a:spcPts val="0"/>
+                        </a:spcBef>
+                        <a:spcAft>
+                          <a:spcPts val="0"/>
+                        </a:spcAft>
+                      </a:pPr>
+                      <a:r>
+                        <a:rPr sz="515" b="0">
+                          <a:solidFill>
+                            <a:srgbClr val="121B26"/>
+                          </a:solidFill>
+                          <a:latin typeface="Microsoft YaHei UI"/>
+                        </a:rPr>
+                        <a:t/>
                       </a:r>
                     </a:p>
                   </a:txBody>
-                  <a:tcPr anchor="ctr" marL="36576" marR="36576" marT="18288" marB="18288">
+                  <a:tcPr anchor="ctr" marL="32004" marR="32004" marT="10972" marB="10972">
                     <a:solidFill>
-                      <a:srgbClr val="FFFFFF"/>
+                      <a:srgbClr val="EEF3F7"/>
                     </a:solidFill>
-                    <a:lnL w="4200">
-                      <a:solidFill>
-                        <a:srgbClr val="BFCBD6"/>
-                      </a:solidFill>
-                      <a:prstDash val="solid"/>
+                    <a:lnL w="3000">
+                      <a:solidFill>
+                        <a:srgbClr val="C1CDD9"/>
+                      </a:solidFill>
                     </a:lnL>
-                    <a:lnR w="4200">
-                      <a:solidFill>
-                        <a:srgbClr val="BFCBD6"/>
-                      </a:solidFill>
-                      <a:prstDash val="solid"/>
+                    <a:lnR w="3000">
+                      <a:solidFill>
+                        <a:srgbClr val="C1CDD9"/>
+                      </a:solidFill>
                     </a:lnR>
-                    <a:lnT w="4200">
-                      <a:solidFill>
-                        <a:srgbClr val="BFCBD6"/>
-                      </a:solidFill>
-                      <a:prstDash val="solid"/>
+                    <a:lnT w="3000">
+                      <a:solidFill>
+                        <a:srgbClr val="C1CDD9"/>
+                      </a:solidFill>
                     </a:lnT>
-                    <a:lnB w="4200">
-                      <a:solidFill>
-                        <a:srgbClr val="BFCBD6"/>
-                      </a:solidFill>
-                      <a:prstDash val="solid"/>
+                    <a:lnB w="3000">
+                      <a:solidFill>
+                        <a:srgbClr val="C1CDD9"/>
+                      </a:solidFill>
                     </a:lnB>
                   </a:tcPr>
                 </a:tc>
@@ -5460,160 +5472,95 @@
                     </a:bodyPr>
                     <a:lstStyle/>
                     <a:p>
-                      <a:pPr algn="ctr">
-                        <a:lnSpc>
-                          <a:spcPct val="92000"/>
-                        </a:lnSpc>
-                        <a:spcBef>
-                          <a:spcPts val="0"/>
-                        </a:spcBef>
-                        <a:spcAft>
-                          <a:spcPts val="0"/>
-                        </a:spcAft>
-                      </a:pPr>
-                      <a:r>
-                        <a:rPr sz="675" b="1">
-                          <a:solidFill>
-                            <a:srgbClr val="0D4B58"/>
-                          </a:solidFill>
-                          <a:latin typeface="Microsoft YaHei UI"/>
-                        </a:rPr>
-                        <a:t>国产端侧</a:t>
-                      </a:r>
-                    </a:p>
-                    <a:p>
-                      <a:pPr algn="ctr">
-                        <a:lnSpc>
-                          <a:spcPct val="92000"/>
-                        </a:lnSpc>
-                        <a:spcBef>
-                          <a:spcPts val="0"/>
-                        </a:spcBef>
-                        <a:spcAft>
-                          <a:spcPts val="0"/>
-                        </a:spcAft>
-                      </a:pPr>
-                      <a:r>
-                        <a:rPr sz="675" b="1">
-                          <a:solidFill>
-                            <a:srgbClr val="0D4B58"/>
-                          </a:solidFill>
-                          <a:latin typeface="Microsoft YaHei UI"/>
-                        </a:rPr>
-                        <a:t>算力底座</a:t>
+                      <a:pPr algn="l">
+                        <a:lnSpc>
+                          <a:spcPct val="86000"/>
+                        </a:lnSpc>
+                        <a:spcBef>
+                          <a:spcPts val="0"/>
+                        </a:spcBef>
+                        <a:spcAft>
+                          <a:spcPts val="0"/>
+                        </a:spcAft>
+                      </a:pPr>
+                      <a:r>
+                        <a:rPr sz="515" b="0">
+                          <a:solidFill>
+                            <a:srgbClr val="121B26"/>
+                          </a:solidFill>
+                          <a:latin typeface="Microsoft YaHei UI"/>
+                        </a:rPr>
+                        <a:t>A3 Ultra：700TOPS</a:t>
+                      </a:r>
+                    </a:p>
+                    <a:p>
+                      <a:pPr algn="l">
+                        <a:lnSpc>
+                          <a:spcPct val="86000"/>
+                        </a:lnSpc>
+                        <a:spcBef>
+                          <a:spcPts val="0"/>
+                        </a:spcBef>
+                        <a:spcAft>
+                          <a:spcPts val="0"/>
+                        </a:spcAft>
+                      </a:pPr>
+                      <a:r>
+                        <a:rPr sz="515" b="0">
+                          <a:solidFill>
+                            <a:srgbClr val="121B26"/>
+                          </a:solidFill>
+                          <a:latin typeface="Microsoft YaHei UI"/>
+                        </a:rPr>
+                        <a:t>端侧具身处理器</a:t>
+                      </a:r>
+                    </a:p>
+                    <a:p>
+                      <a:pPr algn="l">
+                        <a:lnSpc>
+                          <a:spcPct val="86000"/>
+                        </a:lnSpc>
+                        <a:spcBef>
+                          <a:spcPts val="0"/>
+                        </a:spcBef>
+                        <a:spcAft>
+                          <a:spcPts val="0"/>
+                        </a:spcAft>
+                      </a:pPr>
+                      <a:r>
+                        <a:rPr sz="515" b="0">
+                          <a:solidFill>
+                            <a:srgbClr val="121B26"/>
+                          </a:solidFill>
+                          <a:latin typeface="Microsoft YaHei UI"/>
+                        </a:rPr>
+                        <a:t>G2 Max 7x24h</a:t>
                       </a:r>
                     </a:p>
                   </a:txBody>
-                  <a:tcPr anchor="ctr" marL="36576" marR="36576" marT="18288" marB="18288">
+                  <a:tcPr anchor="ctr" marL="32004" marR="32004" marT="10972" marB="10972">
                     <a:solidFill>
-                      <a:srgbClr val="FFFFFF"/>
+                      <a:srgbClr val="EEF3F7"/>
                     </a:solidFill>
-                    <a:lnL w="4200">
-                      <a:solidFill>
-                        <a:srgbClr val="BFCBD6"/>
-                      </a:solidFill>
-                      <a:prstDash val="solid"/>
+                    <a:lnL w="3000">
+                      <a:solidFill>
+                        <a:srgbClr val="C1CDD9"/>
+                      </a:solidFill>
                     </a:lnL>
-                    <a:lnR w="4200">
-                      <a:solidFill>
-                        <a:srgbClr val="BFCBD6"/>
-                      </a:solidFill>
-                      <a:prstDash val="solid"/>
+                    <a:lnR w="3000">
+                      <a:solidFill>
+                        <a:srgbClr val="C1CDD9"/>
+                      </a:solidFill>
                     </a:lnR>
-                    <a:lnT w="4200">
-                      <a:solidFill>
-                        <a:srgbClr val="BFCBD6"/>
-                      </a:solidFill>
-                      <a:prstDash val="solid"/>
+                    <a:lnT w="3000">
+                      <a:solidFill>
+                        <a:srgbClr val="C1CDD9"/>
+                      </a:solidFill>
                     </a:lnT>
-                    <a:lnB w="4200">
-                      <a:solidFill>
-                        <a:srgbClr val="BFCBD6"/>
-                      </a:solidFill>
-                      <a:prstDash val="solid"/>
-                    </a:lnB>
-                  </a:tcPr>
-                </a:tc>
-              </a:tr>
-              <a:tr h="566928">
-                <a:tc>
-                  <a:txBody>
-                    <a:bodyPr wrap="square">
-                      <a:normAutofit/>
-                    </a:bodyPr>
-                    <a:lstStyle/>
-                    <a:p>
-                      <a:pPr algn="ctr">
-                        <a:lnSpc>
-                          <a:spcPct val="92000"/>
-                        </a:lnSpc>
-                        <a:spcBef>
-                          <a:spcPts val="0"/>
-                        </a:spcBef>
-                        <a:spcAft>
-                          <a:spcPts val="0"/>
-                        </a:spcAft>
-                      </a:pPr>
-                      <a:r>
-                        <a:rPr sz="675" b="1">
-                          <a:solidFill>
-                            <a:srgbClr val="14202C"/>
-                          </a:solidFill>
-                          <a:latin typeface="Microsoft YaHei UI"/>
-                        </a:rPr>
-                        <a:t>MiniCPM</a:t>
-                      </a:r>
-                    </a:p>
-                    <a:p>
-                      <a:pPr algn="ctr">
-                        <a:lnSpc>
-                          <a:spcPct val="92000"/>
-                        </a:lnSpc>
-                        <a:spcBef>
-                          <a:spcPts val="0"/>
-                        </a:spcBef>
-                        <a:spcAft>
-                          <a:spcPts val="0"/>
-                        </a:spcAft>
-                      </a:pPr>
-                      <a:r>
-                        <a:rPr sz="675" b="1">
-                          <a:solidFill>
-                            <a:srgbClr val="14202C"/>
-                          </a:solidFill>
-                          <a:latin typeface="Microsoft YaHei UI"/>
-                        </a:rPr>
-                        <a:t>Robot</a:t>
-                      </a:r>
-                    </a:p>
-                  </a:txBody>
-                  <a:tcPr anchor="ctr" marL="36576" marR="36576" marT="18288" marB="18288">
-                    <a:solidFill>
-                      <a:srgbClr val="EFF3F7"/>
-                    </a:solidFill>
-                    <a:lnL w="4200">
-                      <a:solidFill>
-                        <a:srgbClr val="BFCBD6"/>
-                      </a:solidFill>
-                      <a:prstDash val="solid"/>
-                    </a:lnL>
-                    <a:lnR w="4200">
-                      <a:solidFill>
-                        <a:srgbClr val="BFCBD6"/>
-                      </a:solidFill>
-                      <a:prstDash val="solid"/>
-                    </a:lnR>
-                    <a:lnT w="4200">
-                      <a:solidFill>
-                        <a:srgbClr val="BFCBD6"/>
-                      </a:solidFill>
-                      <a:prstDash val="solid"/>
-                    </a:lnT>
-                    <a:lnB w="4200">
-                      <a:solidFill>
-                        <a:srgbClr val="BFCBD6"/>
-                      </a:solidFill>
-                      <a:prstDash val="solid"/>
+                    <a:lnB w="3000">
+                      <a:solidFill>
+                        <a:srgbClr val="C1CDD9"/>
+                      </a:solidFill>
                     </a:lnB>
                   </a:tcPr>
                 </a:tc>
@@ -5626,75 +5573,150 @@
                     <a:p>
                       <a:pPr algn="l">
                         <a:lnSpc>
-                          <a:spcPct val="92000"/>
-                        </a:lnSpc>
-                        <a:spcBef>
-                          <a:spcPts val="0"/>
-                        </a:spcBef>
-                        <a:spcAft>
-                          <a:spcPts val="0"/>
-                        </a:spcAft>
-                      </a:pPr>
-                      <a:r>
-                        <a:rPr sz="675" b="0">
-                          <a:solidFill>
-                            <a:srgbClr val="14202C"/>
-                          </a:solidFill>
-                          <a:latin typeface="Microsoft YaHei UI"/>
-                        </a:rPr>
-                        <a:t>RobotManip</a:t>
-                      </a:r>
-                    </a:p>
-                    <a:p>
-                      <a:pPr algn="l">
-                        <a:lnSpc>
-                          <a:spcPct val="92000"/>
-                        </a:lnSpc>
-                        <a:spcBef>
-                          <a:spcPts val="0"/>
-                        </a:spcBef>
-                        <a:spcAft>
-                          <a:spcPts val="0"/>
-                        </a:spcAft>
-                      </a:pPr>
-                      <a:r>
-                        <a:rPr sz="675" b="0">
-                          <a:solidFill>
-                            <a:srgbClr val="14202C"/>
-                          </a:solidFill>
-                          <a:latin typeface="Microsoft YaHei UI"/>
-                        </a:rPr>
-                        <a:t>RobotTrack</a:t>
+                          <a:spcPct val="86000"/>
+                        </a:lnSpc>
+                        <a:spcBef>
+                          <a:spcPts val="0"/>
+                        </a:spcBef>
+                        <a:spcAft>
+                          <a:spcPts val="0"/>
+                        </a:spcAft>
+                      </a:pPr>
+                      <a:r>
+                        <a:rPr sz="515" b="0">
+                          <a:solidFill>
+                            <a:srgbClr val="121B26"/>
+                          </a:solidFill>
+                          <a:latin typeface="Microsoft YaHei UI"/>
+                        </a:rPr>
+                        <a:t>二手口径10-20Hz</a:t>
+                      </a:r>
+                    </a:p>
+                    <a:p>
+                      <a:pPr algn="l">
+                        <a:lnSpc>
+                          <a:spcPct val="86000"/>
+                        </a:lnSpc>
+                        <a:spcBef>
+                          <a:spcPts val="0"/>
+                        </a:spcBef>
+                        <a:spcAft>
+                          <a:spcPts val="0"/>
+                        </a:spcAft>
+                      </a:pPr>
+                      <a:r>
+                        <a:rPr sz="515" b="0">
+                          <a:solidFill>
+                            <a:srgbClr val="121B26"/>
+                          </a:solidFill>
+                          <a:latin typeface="Microsoft YaHei UI"/>
+                        </a:rPr>
+                        <a:t>官方Hz未给出</a:t>
                       </a:r>
                     </a:p>
                   </a:txBody>
-                  <a:tcPr anchor="ctr" marL="36576" marR="36576" marT="18288" marB="18288">
+                  <a:tcPr anchor="ctr" marL="32004" marR="32004" marT="10972" marB="10972">
                     <a:solidFill>
-                      <a:srgbClr val="EFF3F7"/>
+                      <a:srgbClr val="EEF3F7"/>
                     </a:solidFill>
-                    <a:lnL w="4200">
-                      <a:solidFill>
-                        <a:srgbClr val="BFCBD6"/>
-                      </a:solidFill>
-                      <a:prstDash val="solid"/>
+                    <a:lnL w="3000">
+                      <a:solidFill>
+                        <a:srgbClr val="C1CDD9"/>
+                      </a:solidFill>
                     </a:lnL>
-                    <a:lnR w="4200">
-                      <a:solidFill>
-                        <a:srgbClr val="BFCBD6"/>
-                      </a:solidFill>
-                      <a:prstDash val="solid"/>
+                    <a:lnR w="3000">
+                      <a:solidFill>
+                        <a:srgbClr val="C1CDD9"/>
+                      </a:solidFill>
                     </a:lnR>
-                    <a:lnT w="4200">
-                      <a:solidFill>
-                        <a:srgbClr val="BFCBD6"/>
-                      </a:solidFill>
-                      <a:prstDash val="solid"/>
+                    <a:lnT w="3000">
+                      <a:solidFill>
+                        <a:srgbClr val="C1CDD9"/>
+                      </a:solidFill>
                     </a:lnT>
-                    <a:lnB w="4200">
-                      <a:solidFill>
-                        <a:srgbClr val="BFCBD6"/>
-                      </a:solidFill>
-                      <a:prstDash val="solid"/>
+                    <a:lnB w="3000">
+                      <a:solidFill>
+                        <a:srgbClr val="C1CDD9"/>
+                      </a:solidFill>
+                    </a:lnB>
+                  </a:tcPr>
+                </a:tc>
+              </a:tr>
+              <a:tr h="409956">
+                <a:tc>
+                  <a:txBody>
+                    <a:bodyPr wrap="square">
+                      <a:normAutofit/>
+                    </a:bodyPr>
+                    <a:lstStyle/>
+                    <a:p>
+                      <a:pPr algn="ctr">
+                        <a:lnSpc>
+                          <a:spcPct val="86000"/>
+                        </a:lnSpc>
+                        <a:spcBef>
+                          <a:spcPts val="0"/>
+                        </a:spcBef>
+                        <a:spcAft>
+                          <a:spcPts val="0"/>
+                        </a:spcAft>
+                      </a:pPr>
+                      <a:r>
+                        <a:rPr sz="535" b="1">
+                          <a:solidFill>
+                            <a:srgbClr val="0F5766"/>
+                          </a:solidFill>
+                          <a:latin typeface="Microsoft YaHei UI"/>
+                        </a:rPr>
+                        <a:t>智平方</a:t>
+                      </a:r>
+                    </a:p>
+                    <a:p>
+                      <a:pPr algn="ctr">
+                        <a:lnSpc>
+                          <a:spcPct val="86000"/>
+                        </a:lnSpc>
+                        <a:spcBef>
+                          <a:spcPts val="0"/>
+                        </a:spcBef>
+                        <a:spcAft>
+                          <a:spcPts val="0"/>
+                        </a:spcAft>
+                      </a:pPr>
+                      <a:r>
+                        <a:rPr sz="535" b="1">
+                          <a:solidFill>
+                            <a:srgbClr val="0F5766"/>
+                          </a:solidFill>
+                          <a:latin typeface="Microsoft YaHei UI"/>
+                        </a:rPr>
+                        <a:t>AI2</a:t>
+                      </a:r>
+                    </a:p>
+                  </a:txBody>
+                  <a:tcPr anchor="ctr" marL="32004" marR="32004" marT="10972" marB="10972">
+                    <a:solidFill>
+                      <a:srgbClr val="FFFFFF"/>
+                    </a:solidFill>
+                    <a:lnL w="3000">
+                      <a:solidFill>
+                        <a:srgbClr val="C1CDD9"/>
+                      </a:solidFill>
+                    </a:lnL>
+                    <a:lnR w="3000">
+                      <a:solidFill>
+                        <a:srgbClr val="C1CDD9"/>
+                      </a:solidFill>
+                    </a:lnR>
+                    <a:lnT w="3000">
+                      <a:solidFill>
+                        <a:srgbClr val="C1CDD9"/>
+                      </a:solidFill>
+                    </a:lnT>
+                    <a:lnB w="3000">
+                      <a:solidFill>
+                        <a:srgbClr val="C1CDD9"/>
+                      </a:solidFill>
                     </a:lnB>
                   </a:tcPr>
                 </a:tc>
@@ -5707,75 +5729,71 @@
                     <a:p>
                       <a:pPr algn="l">
                         <a:lnSpc>
-                          <a:spcPct val="92000"/>
-                        </a:lnSpc>
-                        <a:spcBef>
-                          <a:spcPts val="0"/>
-                        </a:spcBef>
-                        <a:spcAft>
-                          <a:spcPts val="0"/>
-                        </a:spcAft>
-                      </a:pPr>
-                      <a:r>
-                        <a:rPr sz="635" b="0">
-                          <a:solidFill>
-                            <a:srgbClr val="14202C"/>
-                          </a:solidFill>
-                          <a:latin typeface="Microsoft YaHei UI"/>
-                        </a:rPr>
-                        <a:t>1.5B / 0.9B</a:t>
-                      </a:r>
-                    </a:p>
-                    <a:p>
-                      <a:pPr algn="l">
-                        <a:lnSpc>
-                          <a:spcPct val="92000"/>
-                        </a:lnSpc>
-                        <a:spcBef>
-                          <a:spcPts val="0"/>
-                        </a:spcBef>
-                        <a:spcAft>
-                          <a:spcPts val="0"/>
-                        </a:spcAft>
-                      </a:pPr>
-                      <a:r>
-                        <a:rPr sz="635" b="0">
-                          <a:solidFill>
-                            <a:srgbClr val="14202C"/>
-                          </a:solidFill>
-                          <a:latin typeface="Microsoft YaHei UI"/>
-                        </a:rPr>
-                        <a:t>60帧上下文125→3.3TFLOPs</a:t>
+                          <a:spcPct val="86000"/>
+                        </a:lnSpc>
+                        <a:spcBef>
+                          <a:spcPts val="0"/>
+                        </a:spcBef>
+                        <a:spcAft>
+                          <a:spcPts val="0"/>
+                        </a:spcAft>
+                      </a:pPr>
+                      <a:r>
+                        <a:rPr sz="535" b="0">
+                          <a:solidFill>
+                            <a:srgbClr val="121B26"/>
+                          </a:solidFill>
+                          <a:latin typeface="Microsoft YaHei UI"/>
+                        </a:rPr>
+                        <a:t>AlphaBrain</a:t>
+                      </a:r>
+                    </a:p>
+                    <a:p>
+                      <a:pPr algn="l">
+                        <a:lnSpc>
+                          <a:spcPct val="86000"/>
+                        </a:lnSpc>
+                        <a:spcBef>
+                          <a:spcPts val="0"/>
+                        </a:spcBef>
+                        <a:spcAft>
+                          <a:spcPts val="0"/>
+                        </a:spcAft>
+                      </a:pPr>
+                      <a:r>
+                        <a:rPr sz="535" b="0">
+                          <a:solidFill>
+                            <a:srgbClr val="121B26"/>
+                          </a:solidFill>
+                          <a:latin typeface="Microsoft YaHei UI"/>
+                        </a:rPr>
+                        <a:t>GOVLA / FiS-VLA</a:t>
                       </a:r>
                     </a:p>
                   </a:txBody>
-                  <a:tcPr anchor="ctr" marL="36576" marR="36576" marT="18288" marB="18288">
+                  <a:tcPr anchor="ctr" marL="32004" marR="32004" marT="10972" marB="10972">
                     <a:solidFill>
-                      <a:srgbClr val="EFF3F7"/>
+                      <a:srgbClr val="FFFFFF"/>
                     </a:solidFill>
-                    <a:lnL w="4200">
-                      <a:solidFill>
-                        <a:srgbClr val="BFCBD6"/>
-                      </a:solidFill>
-                      <a:prstDash val="solid"/>
+                    <a:lnL w="3000">
+                      <a:solidFill>
+                        <a:srgbClr val="C1CDD9"/>
+                      </a:solidFill>
                     </a:lnL>
-                    <a:lnR w="4200">
-                      <a:solidFill>
-                        <a:srgbClr val="BFCBD6"/>
-                      </a:solidFill>
-                      <a:prstDash val="solid"/>
+                    <a:lnR w="3000">
+                      <a:solidFill>
+                        <a:srgbClr val="C1CDD9"/>
+                      </a:solidFill>
                     </a:lnR>
-                    <a:lnT w="4200">
-                      <a:solidFill>
-                        <a:srgbClr val="BFCBD6"/>
-                      </a:solidFill>
-                      <a:prstDash val="solid"/>
+                    <a:lnT w="3000">
+                      <a:solidFill>
+                        <a:srgbClr val="C1CDD9"/>
+                      </a:solidFill>
                     </a:lnT>
-                    <a:lnB w="4200">
-                      <a:solidFill>
-                        <a:srgbClr val="BFCBD6"/>
-                      </a:solidFill>
-                      <a:prstDash val="solid"/>
+                    <a:lnB w="3000">
+                      <a:solidFill>
+                        <a:srgbClr val="C1CDD9"/>
+                      </a:solidFill>
                     </a:lnB>
                   </a:tcPr>
                 </a:tc>
@@ -5788,75 +5806,93 @@
                     <a:p>
                       <a:pPr algn="l">
                         <a:lnSpc>
-                          <a:spcPct val="92000"/>
-                        </a:lnSpc>
-                        <a:spcBef>
-                          <a:spcPts val="0"/>
-                        </a:spcBef>
-                        <a:spcAft>
-                          <a:spcPts val="0"/>
-                        </a:spcAft>
-                      </a:pPr>
-                      <a:r>
-                        <a:rPr sz="635" b="0">
-                          <a:solidFill>
-                            <a:srgbClr val="14202C"/>
-                          </a:solidFill>
-                          <a:latin typeface="Microsoft YaHei UI"/>
-                        </a:rPr>
-                        <a:t>H20 10→37Hz</a:t>
-                      </a:r>
-                    </a:p>
-                    <a:p>
-                      <a:pPr algn="l">
-                        <a:lnSpc>
-                          <a:spcPct val="92000"/>
-                        </a:lnSpc>
-                        <a:spcBef>
-                          <a:spcPts val="0"/>
-                        </a:spcBef>
-                        <a:spcAft>
-                          <a:spcPts val="0"/>
-                        </a:spcAft>
-                      </a:pPr>
-                      <a:r>
-                        <a:rPr sz="635" b="0">
-                          <a:solidFill>
-                            <a:srgbClr val="14202C"/>
-                          </a:solidFill>
-                          <a:latin typeface="Microsoft YaHei UI"/>
-                        </a:rPr>
-                        <a:t>Go2 5+FPS/180ms；Orin NX</a:t>
+                          <a:spcPct val="86000"/>
+                        </a:lnSpc>
+                        <a:spcBef>
+                          <a:spcPts val="0"/>
+                        </a:spcBef>
+                        <a:spcAft>
+                          <a:spcPts val="0"/>
+                        </a:spcAft>
+                      </a:pPr>
+                      <a:r>
+                        <a:rPr sz="535" b="0">
+                          <a:solidFill>
+                            <a:srgbClr val="121B26"/>
+                          </a:solidFill>
+                          <a:latin typeface="Microsoft YaHei UI"/>
+                        </a:rPr>
+                        <a:t>具身大模型</a:t>
+                      </a:r>
+                    </a:p>
+                    <a:p>
+                      <a:pPr algn="l">
+                        <a:lnSpc>
+                          <a:spcPct val="86000"/>
+                        </a:lnSpc>
+                        <a:spcBef>
+                          <a:spcPts val="0"/>
+                        </a:spcBef>
+                        <a:spcAft>
+                          <a:spcPts val="0"/>
+                        </a:spcAft>
+                      </a:pPr>
+                      <a:r>
+                        <a:rPr sz="535" b="0">
+                          <a:solidFill>
+                            <a:srgbClr val="121B26"/>
+                          </a:solidFill>
+                          <a:latin typeface="Microsoft YaHei UI"/>
+                        </a:rPr>
+                        <a:t>双系统VLA</a:t>
+                      </a:r>
+                    </a:p>
+                    <a:p>
+                      <a:pPr algn="l">
+                        <a:lnSpc>
+                          <a:spcPct val="86000"/>
+                        </a:lnSpc>
+                        <a:spcBef>
+                          <a:spcPts val="0"/>
+                        </a:spcBef>
+                        <a:spcAft>
+                          <a:spcPts val="0"/>
+                        </a:spcAft>
+                      </a:pPr>
+                      <a:r>
+                        <a:rPr sz="535" b="0">
+                          <a:solidFill>
+                            <a:srgbClr val="121B26"/>
+                          </a:solidFill>
+                          <a:latin typeface="Microsoft YaHei UI"/>
+                        </a:rPr>
+                        <a:t>异构输入+异步频率</a:t>
                       </a:r>
                     </a:p>
                   </a:txBody>
-                  <a:tcPr anchor="ctr" marL="36576" marR="36576" marT="18288" marB="18288">
+                  <a:tcPr anchor="ctr" marL="32004" marR="32004" marT="10972" marB="10972">
                     <a:solidFill>
-                      <a:srgbClr val="EFF3F7"/>
+                      <a:srgbClr val="FFFFFF"/>
                     </a:solidFill>
-                    <a:lnL w="4200">
-                      <a:solidFill>
-                        <a:srgbClr val="BFCBD6"/>
-                      </a:solidFill>
-                      <a:prstDash val="solid"/>
+                    <a:lnL w="3000">
+                      <a:solidFill>
+                        <a:srgbClr val="C1CDD9"/>
+                      </a:solidFill>
                     </a:lnL>
-                    <a:lnR w="4200">
-                      <a:solidFill>
-                        <a:srgbClr val="BFCBD6"/>
-                      </a:solidFill>
-                      <a:prstDash val="solid"/>
+                    <a:lnR w="3000">
+                      <a:solidFill>
+                        <a:srgbClr val="C1CDD9"/>
+                      </a:solidFill>
                     </a:lnR>
-                    <a:lnT w="4200">
-                      <a:solidFill>
-                        <a:srgbClr val="BFCBD6"/>
-                      </a:solidFill>
-                      <a:prstDash val="solid"/>
+                    <a:lnT w="3000">
+                      <a:solidFill>
+                        <a:srgbClr val="C1CDD9"/>
+                      </a:solidFill>
                     </a:lnT>
-                    <a:lnB w="4200">
-                      <a:solidFill>
-                        <a:srgbClr val="BFCBD6"/>
-                      </a:solidFill>
-                      <a:prstDash val="solid"/>
+                    <a:lnB w="3000">
+                      <a:solidFill>
+                        <a:srgbClr val="C1CDD9"/>
+                      </a:solidFill>
                     </a:lnB>
                   </a:tcPr>
                 </a:tc>
@@ -5867,160 +5903,51 @@
                     </a:bodyPr>
                     <a:lstStyle/>
                     <a:p>
-                      <a:pPr algn="ctr">
-                        <a:lnSpc>
-                          <a:spcPct val="92000"/>
-                        </a:lnSpc>
-                        <a:spcBef>
-                          <a:spcPts val="0"/>
-                        </a:spcBef>
-                        <a:spcAft>
-                          <a:spcPts val="0"/>
-                        </a:spcAft>
-                      </a:pPr>
-                      <a:r>
-                        <a:rPr sz="675" b="1">
-                          <a:solidFill>
-                            <a:srgbClr val="0D4B58"/>
-                          </a:solidFill>
-                          <a:latin typeface="Microsoft YaHei UI"/>
-                        </a:rPr>
-                        <a:t>小模型端侧化</a:t>
-                      </a:r>
-                    </a:p>
-                    <a:p>
-                      <a:pPr algn="ctr">
-                        <a:lnSpc>
-                          <a:spcPct val="92000"/>
-                        </a:lnSpc>
-                        <a:spcBef>
-                          <a:spcPts val="0"/>
-                        </a:spcBef>
-                        <a:spcAft>
-                          <a:spcPts val="0"/>
-                        </a:spcAft>
-                      </a:pPr>
-                      <a:r>
-                        <a:rPr sz="675" b="1">
-                          <a:solidFill>
-                            <a:srgbClr val="0D4B58"/>
-                          </a:solidFill>
-                          <a:latin typeface="Microsoft YaHei UI"/>
-                        </a:rPr>
-                        <a:t>开源标杆</a:t>
+                      <a:pPr algn="l">
+                        <a:lnSpc>
+                          <a:spcPct val="86000"/>
+                        </a:lnSpc>
+                        <a:spcBef>
+                          <a:spcPts val="0"/>
+                        </a:spcBef>
+                        <a:spcAft>
+                          <a:spcPts val="0"/>
+                        </a:spcAft>
+                      </a:pPr>
+                      <a:r>
+                        <a:rPr sz="515" b="0">
+                          <a:solidFill>
+                            <a:srgbClr val="121B26"/>
+                          </a:solidFill>
+                          <a:latin typeface="Microsoft YaHei UI"/>
+                        </a:rPr>
+                        <a:t/>
                       </a:r>
                     </a:p>
                   </a:txBody>
-                  <a:tcPr anchor="ctr" marL="36576" marR="36576" marT="18288" marB="18288">
-                    <a:solidFill>
-                      <a:srgbClr val="EFF3F7"/>
-                    </a:solidFill>
-                    <a:lnL w="4200">
-                      <a:solidFill>
-                        <a:srgbClr val="BFCBD6"/>
-                      </a:solidFill>
-                      <a:prstDash val="solid"/>
-                    </a:lnL>
-                    <a:lnR w="4200">
-                      <a:solidFill>
-                        <a:srgbClr val="BFCBD6"/>
-                      </a:solidFill>
-                      <a:prstDash val="solid"/>
-                    </a:lnR>
-                    <a:lnT w="4200">
-                      <a:solidFill>
-                        <a:srgbClr val="BFCBD6"/>
-                      </a:solidFill>
-                      <a:prstDash val="solid"/>
-                    </a:lnT>
-                    <a:lnB w="4200">
-                      <a:solidFill>
-                        <a:srgbClr val="BFCBD6"/>
-                      </a:solidFill>
-                      <a:prstDash val="solid"/>
-                    </a:lnB>
-                  </a:tcPr>
-                </a:tc>
-              </a:tr>
-              <a:tr h="566928">
-                <a:tc>
-                  <a:txBody>
-                    <a:bodyPr wrap="square">
-                      <a:normAutofit/>
-                    </a:bodyPr>
-                    <a:lstStyle/>
-                    <a:p>
-                      <a:pPr algn="ctr">
-                        <a:lnSpc>
-                          <a:spcPct val="92000"/>
-                        </a:lnSpc>
-                        <a:spcBef>
-                          <a:spcPts val="0"/>
-                        </a:spcBef>
-                        <a:spcAft>
-                          <a:spcPts val="0"/>
-                        </a:spcAft>
-                      </a:pPr>
-                      <a:r>
-                        <a:rPr sz="675" b="1">
-                          <a:solidFill>
-                            <a:srgbClr val="14202C"/>
-                          </a:solidFill>
-                          <a:latin typeface="Microsoft YaHei UI"/>
-                        </a:rPr>
-                        <a:t>星海图</a:t>
-                      </a:r>
-                    </a:p>
-                    <a:p>
-                      <a:pPr algn="ctr">
-                        <a:lnSpc>
-                          <a:spcPct val="92000"/>
-                        </a:lnSpc>
-                        <a:spcBef>
-                          <a:spcPts val="0"/>
-                        </a:spcBef>
-                        <a:spcAft>
-                          <a:spcPts val="0"/>
-                        </a:spcAft>
-                      </a:pPr>
-                      <a:r>
-                        <a:rPr sz="675" b="1">
-                          <a:solidFill>
-                            <a:srgbClr val="14202C"/>
-                          </a:solidFill>
-                          <a:latin typeface="Microsoft YaHei UI"/>
-                        </a:rPr>
-                        <a:t>Galaxea</a:t>
-                      </a:r>
-                    </a:p>
-                  </a:txBody>
-                  <a:tcPr anchor="ctr" marL="36576" marR="36576" marT="18288" marB="18288">
+                  <a:tcPr anchor="ctr" marL="32004" marR="32004" marT="10972" marB="10972">
                     <a:solidFill>
                       <a:srgbClr val="FFFFFF"/>
                     </a:solidFill>
-                    <a:lnL w="4200">
-                      <a:solidFill>
-                        <a:srgbClr val="BFCBD6"/>
-                      </a:solidFill>
-                      <a:prstDash val="solid"/>
+                    <a:lnL w="3000">
+                      <a:solidFill>
+                        <a:srgbClr val="C1CDD9"/>
+                      </a:solidFill>
                     </a:lnL>
-                    <a:lnR w="4200">
-                      <a:solidFill>
-                        <a:srgbClr val="BFCBD6"/>
-                      </a:solidFill>
-                      <a:prstDash val="solid"/>
+                    <a:lnR w="3000">
+                      <a:solidFill>
+                        <a:srgbClr val="C1CDD9"/>
+                      </a:solidFill>
                     </a:lnR>
-                    <a:lnT w="4200">
-                      <a:solidFill>
-                        <a:srgbClr val="BFCBD6"/>
-                      </a:solidFill>
-                      <a:prstDash val="solid"/>
+                    <a:lnT w="3000">
+                      <a:solidFill>
+                        <a:srgbClr val="C1CDD9"/>
+                      </a:solidFill>
                     </a:lnT>
-                    <a:lnB w="4200">
-                      <a:solidFill>
-                        <a:srgbClr val="BFCBD6"/>
-                      </a:solidFill>
-                      <a:prstDash val="solid"/>
+                    <a:lnB w="3000">
+                      <a:solidFill>
+                        <a:srgbClr val="C1CDD9"/>
+                      </a:solidFill>
                     </a:lnB>
                   </a:tcPr>
                 </a:tc>
@@ -6033,75 +5960,49 @@
                     <a:p>
                       <a:pPr algn="l">
                         <a:lnSpc>
-                          <a:spcPct val="92000"/>
-                        </a:lnSpc>
-                        <a:spcBef>
-                          <a:spcPts val="0"/>
-                        </a:spcBef>
-                        <a:spcAft>
-                          <a:spcPts val="0"/>
-                        </a:spcAft>
-                      </a:pPr>
-                      <a:r>
-                        <a:rPr sz="675" b="0">
-                          <a:solidFill>
-                            <a:srgbClr val="14202C"/>
-                          </a:solidFill>
-                          <a:latin typeface="Microsoft YaHei UI"/>
-                        </a:rPr>
-                        <a:t>G0.5 / Fast-WAM</a:t>
-                      </a:r>
-                    </a:p>
-                    <a:p>
-                      <a:pPr algn="l">
-                        <a:lnSpc>
-                          <a:spcPct val="92000"/>
-                        </a:lnSpc>
-                        <a:spcBef>
-                          <a:spcPts val="0"/>
-                        </a:spcBef>
-                        <a:spcAft>
-                          <a:spcPts val="0"/>
-                        </a:spcAft>
-                      </a:pPr>
-                      <a:r>
-                        <a:rPr sz="675" b="0">
-                          <a:solidFill>
-                            <a:srgbClr val="14202C"/>
-                          </a:solidFill>
-                          <a:latin typeface="Microsoft YaHei UI"/>
-                        </a:rPr>
-                        <a:t>Nexo</a:t>
+                          <a:spcPct val="86000"/>
+                        </a:lnSpc>
+                        <a:spcBef>
+                          <a:spcPts val="0"/>
+                        </a:spcBef>
+                        <a:spcAft>
+                          <a:spcPts val="0"/>
+                        </a:spcAft>
+                      </a:pPr>
+                      <a:r>
+                        <a:rPr sz="515" b="0">
+                          <a:solidFill>
+                            <a:srgbClr val="121B26"/>
+                          </a:solidFill>
+                          <a:latin typeface="Microsoft YaHei UI"/>
+                        </a:rPr>
+                        <a:t/>
                       </a:r>
                     </a:p>
                   </a:txBody>
-                  <a:tcPr anchor="ctr" marL="36576" marR="36576" marT="18288" marB="18288">
+                  <a:tcPr anchor="ctr" marL="32004" marR="32004" marT="10972" marB="10972">
                     <a:solidFill>
                       <a:srgbClr val="FFFFFF"/>
                     </a:solidFill>
-                    <a:lnL w="4200">
-                      <a:solidFill>
-                        <a:srgbClr val="BFCBD6"/>
-                      </a:solidFill>
-                      <a:prstDash val="solid"/>
+                    <a:lnL w="3000">
+                      <a:solidFill>
+                        <a:srgbClr val="C1CDD9"/>
+                      </a:solidFill>
                     </a:lnL>
-                    <a:lnR w="4200">
-                      <a:solidFill>
-                        <a:srgbClr val="BFCBD6"/>
-                      </a:solidFill>
-                      <a:prstDash val="solid"/>
+                    <a:lnR w="3000">
+                      <a:solidFill>
+                        <a:srgbClr val="C1CDD9"/>
+                      </a:solidFill>
                     </a:lnR>
-                    <a:lnT w="4200">
-                      <a:solidFill>
-                        <a:srgbClr val="BFCBD6"/>
-                      </a:solidFill>
-                      <a:prstDash val="solid"/>
+                    <a:lnT w="3000">
+                      <a:solidFill>
+                        <a:srgbClr val="C1CDD9"/>
+                      </a:solidFill>
                     </a:lnT>
-                    <a:lnB w="4200">
-                      <a:solidFill>
-                        <a:srgbClr val="BFCBD6"/>
-                      </a:solidFill>
-                      <a:prstDash val="solid"/>
+                    <a:lnB w="3000">
+                      <a:solidFill>
+                        <a:srgbClr val="C1CDD9"/>
+                      </a:solidFill>
                     </a:lnB>
                   </a:tcPr>
                 </a:tc>
@@ -6114,75 +6015,128 @@
                     <a:p>
                       <a:pPr algn="l">
                         <a:lnSpc>
-                          <a:spcPct val="92000"/>
-                        </a:lnSpc>
-                        <a:spcBef>
-                          <a:spcPts val="0"/>
-                        </a:spcBef>
-                        <a:spcAft>
-                          <a:spcPts val="0"/>
-                        </a:spcAft>
-                      </a:pPr>
-                      <a:r>
-                        <a:rPr sz="635" b="0">
-                          <a:solidFill>
-                            <a:srgbClr val="14202C"/>
-                          </a:solidFill>
-                          <a:latin typeface="Microsoft YaHei UI"/>
-                        </a:rPr>
-                        <a:t>G0.5基于Qwen3.5 2B</a:t>
-                      </a:r>
-                    </a:p>
-                    <a:p>
-                      <a:pPr algn="l">
-                        <a:lnSpc>
-                          <a:spcPct val="92000"/>
-                        </a:lnSpc>
-                        <a:spcBef>
-                          <a:spcPts val="0"/>
-                        </a:spcBef>
-                        <a:spcAft>
-                          <a:spcPts val="0"/>
-                        </a:spcAft>
-                      </a:pPr>
-                      <a:r>
-                        <a:rPr sz="635" b="0">
-                          <a:solidFill>
-                            <a:srgbClr val="14202C"/>
-                          </a:solidFill>
-                          <a:latin typeface="Microsoft YaHei UI"/>
-                        </a:rPr>
-                        <a:t>18本体；1亿VQA</a:t>
+                          <a:spcPct val="86000"/>
+                        </a:lnSpc>
+                        <a:spcBef>
+                          <a:spcPts val="0"/>
+                        </a:spcBef>
+                        <a:spcAft>
+                          <a:spcPts val="0"/>
+                        </a:spcAft>
+                      </a:pPr>
+                      <a:r>
+                        <a:rPr sz="515" b="0">
+                          <a:solidFill>
+                            <a:srgbClr val="121B26"/>
+                          </a:solidFill>
+                          <a:latin typeface="Microsoft YaHei UI"/>
+                        </a:rPr>
+                        <a:t/>
                       </a:r>
                     </a:p>
                   </a:txBody>
-                  <a:tcPr anchor="ctr" marL="36576" marR="36576" marT="18288" marB="18288">
+                  <a:tcPr anchor="ctr" marL="32004" marR="32004" marT="10972" marB="10972">
                     <a:solidFill>
                       <a:srgbClr val="FFFFFF"/>
                     </a:solidFill>
-                    <a:lnL w="4200">
-                      <a:solidFill>
-                        <a:srgbClr val="BFCBD6"/>
-                      </a:solidFill>
-                      <a:prstDash val="solid"/>
+                    <a:lnL w="3000">
+                      <a:solidFill>
+                        <a:srgbClr val="C1CDD9"/>
+                      </a:solidFill>
                     </a:lnL>
-                    <a:lnR w="4200">
-                      <a:solidFill>
-                        <a:srgbClr val="BFCBD6"/>
-                      </a:solidFill>
-                      <a:prstDash val="solid"/>
+                    <a:lnR w="3000">
+                      <a:solidFill>
+                        <a:srgbClr val="C1CDD9"/>
+                      </a:solidFill>
                     </a:lnR>
-                    <a:lnT w="4200">
-                      <a:solidFill>
-                        <a:srgbClr val="BFCBD6"/>
-                      </a:solidFill>
-                      <a:prstDash val="solid"/>
+                    <a:lnT w="3000">
+                      <a:solidFill>
+                        <a:srgbClr val="C1CDD9"/>
+                      </a:solidFill>
                     </a:lnT>
-                    <a:lnB w="4200">
-                      <a:solidFill>
-                        <a:srgbClr val="BFCBD6"/>
-                      </a:solidFill>
-                      <a:prstDash val="solid"/>
+                    <a:lnB w="3000">
+                      <a:solidFill>
+                        <a:srgbClr val="C1CDD9"/>
+                      </a:solidFill>
+                    </a:lnB>
+                  </a:tcPr>
+                </a:tc>
+              </a:tr>
+              <a:tr h="409956">
+                <a:tc>
+                  <a:txBody>
+                    <a:bodyPr wrap="square">
+                      <a:normAutofit/>
+                    </a:bodyPr>
+                    <a:lstStyle/>
+                    <a:p>
+                      <a:pPr algn="ctr">
+                        <a:lnSpc>
+                          <a:spcPct val="86000"/>
+                        </a:lnSpc>
+                        <a:spcBef>
+                          <a:spcPts val="0"/>
+                        </a:spcBef>
+                        <a:spcAft>
+                          <a:spcPts val="0"/>
+                        </a:spcAft>
+                      </a:pPr>
+                      <a:r>
+                        <a:rPr sz="535" b="1">
+                          <a:solidFill>
+                            <a:srgbClr val="0F5766"/>
+                          </a:solidFill>
+                          <a:latin typeface="Microsoft YaHei UI"/>
+                        </a:rPr>
+                        <a:t>星海图</a:t>
+                      </a:r>
+                    </a:p>
+                    <a:p>
+                      <a:pPr algn="ctr">
+                        <a:lnSpc>
+                          <a:spcPct val="86000"/>
+                        </a:lnSpc>
+                        <a:spcBef>
+                          <a:spcPts val="0"/>
+                        </a:spcBef>
+                        <a:spcAft>
+                          <a:spcPts val="0"/>
+                        </a:spcAft>
+                      </a:pPr>
+                      <a:r>
+                        <a:rPr sz="535" b="1">
+                          <a:solidFill>
+                            <a:srgbClr val="0F5766"/>
+                          </a:solidFill>
+                          <a:latin typeface="Microsoft YaHei UI"/>
+                        </a:rPr>
+                        <a:t>Galaxea</a:t>
+                      </a:r>
+                    </a:p>
+                  </a:txBody>
+                  <a:tcPr anchor="ctr" marL="32004" marR="32004" marT="10972" marB="10972">
+                    <a:solidFill>
+                      <a:srgbClr val="EEF3F7"/>
+                    </a:solidFill>
+                    <a:lnL w="3000">
+                      <a:solidFill>
+                        <a:srgbClr val="C1CDD9"/>
+                      </a:solidFill>
+                    </a:lnL>
+                    <a:lnR w="3000">
+                      <a:solidFill>
+                        <a:srgbClr val="C1CDD9"/>
+                      </a:solidFill>
+                    </a:lnR>
+                    <a:lnT w="3000">
+                      <a:solidFill>
+                        <a:srgbClr val="C1CDD9"/>
+                      </a:solidFill>
+                    </a:lnT>
+                    <a:lnB w="3000">
+                      <a:solidFill>
+                        <a:srgbClr val="C1CDD9"/>
+                      </a:solidFill>
                     </a:lnB>
                   </a:tcPr>
                 </a:tc>
@@ -6195,75 +6149,115 @@
                     <a:p>
                       <a:pPr algn="l">
                         <a:lnSpc>
-                          <a:spcPct val="92000"/>
-                        </a:lnSpc>
-                        <a:spcBef>
-                          <a:spcPts val="0"/>
-                        </a:spcBef>
-                        <a:spcAft>
-                          <a:spcPts val="0"/>
-                        </a:spcAft>
-                      </a:pPr>
-                      <a:r>
-                        <a:rPr sz="635" b="0">
-                          <a:solidFill>
-                            <a:srgbClr val="14202C"/>
-                          </a:solidFill>
-                          <a:latin typeface="Microsoft YaHei UI"/>
-                        </a:rPr>
-                        <a:t>Fast-WAM 190ms</a:t>
-                      </a:r>
-                    </a:p>
-                    <a:p>
-                      <a:pPr algn="l">
-                        <a:lnSpc>
-                          <a:spcPct val="92000"/>
-                        </a:lnSpc>
-                        <a:spcBef>
-                          <a:spcPts val="0"/>
-                        </a:spcBef>
-                        <a:spcAft>
-                          <a:spcPts val="0"/>
-                        </a:spcAft>
-                      </a:pPr>
-                      <a:r>
-                        <a:rPr sz="635" b="0">
-                          <a:solidFill>
-                            <a:srgbClr val="14202C"/>
-                          </a:solidFill>
-                          <a:latin typeface="Microsoft YaHei UI"/>
-                        </a:rPr>
-                        <a:t>4090 110ms/C++85ms；Nexo 700TOPS*</a:t>
+                          <a:spcPct val="86000"/>
+                        </a:lnSpc>
+                        <a:spcBef>
+                          <a:spcPts val="0"/>
+                        </a:spcBef>
+                        <a:spcAft>
+                          <a:spcPts val="0"/>
+                        </a:spcAft>
+                      </a:pPr>
+                      <a:r>
+                        <a:rPr sz="535" b="0">
+                          <a:solidFill>
+                            <a:srgbClr val="121B26"/>
+                          </a:solidFill>
+                          <a:latin typeface="Microsoft YaHei UI"/>
+                        </a:rPr>
+                        <a:t>G0.5</a:t>
+                      </a:r>
+                    </a:p>
+                    <a:p>
+                      <a:pPr algn="l">
+                        <a:lnSpc>
+                          <a:spcPct val="86000"/>
+                        </a:lnSpc>
+                        <a:spcBef>
+                          <a:spcPts val="0"/>
+                        </a:spcBef>
+                        <a:spcAft>
+                          <a:spcPts val="0"/>
+                        </a:spcAft>
+                      </a:pPr>
+                      <a:r>
+                        <a:rPr sz="535" b="0">
+                          <a:solidFill>
+                            <a:srgbClr val="121B26"/>
+                          </a:solidFill>
+                          <a:latin typeface="Microsoft YaHei UI"/>
+                        </a:rPr>
+                        <a:t>Fast-WAM</a:t>
+                      </a:r>
+                    </a:p>
+                    <a:p>
+                      <a:pPr algn="l">
+                        <a:lnSpc>
+                          <a:spcPct val="86000"/>
+                        </a:lnSpc>
+                        <a:spcBef>
+                          <a:spcPts val="0"/>
+                        </a:spcBef>
+                        <a:spcAft>
+                          <a:spcPts val="0"/>
+                        </a:spcAft>
+                      </a:pPr>
+                      <a:r>
+                        <a:rPr sz="535" b="0">
+                          <a:solidFill>
+                            <a:srgbClr val="121B26"/>
+                          </a:solidFill>
+                          <a:latin typeface="Microsoft YaHei UI"/>
+                        </a:rPr>
+                        <a:t>GigaWorld-Policy-0.5</a:t>
+                      </a:r>
+                    </a:p>
+                    <a:p>
+                      <a:pPr algn="l">
+                        <a:lnSpc>
+                          <a:spcPct val="86000"/>
+                        </a:lnSpc>
+                        <a:spcBef>
+                          <a:spcPts val="0"/>
+                        </a:spcBef>
+                        <a:spcAft>
+                          <a:spcPts val="0"/>
+                        </a:spcAft>
+                      </a:pPr>
+                      <a:r>
+                        <a:rPr sz="535" b="0">
+                          <a:solidFill>
+                            <a:srgbClr val="121B26"/>
+                          </a:solidFill>
+                          <a:latin typeface="Microsoft YaHei UI"/>
+                        </a:rPr>
+                        <a:t>Nexo</a:t>
                       </a:r>
                     </a:p>
                   </a:txBody>
-                  <a:tcPr anchor="ctr" marL="36576" marR="36576" marT="18288" marB="18288">
+                  <a:tcPr anchor="ctr" marL="32004" marR="32004" marT="10972" marB="10972">
                     <a:solidFill>
-                      <a:srgbClr val="FFFFFF"/>
+                      <a:srgbClr val="EEF3F7"/>
                     </a:solidFill>
-                    <a:lnL w="4200">
-                      <a:solidFill>
-                        <a:srgbClr val="BFCBD6"/>
-                      </a:solidFill>
-                      <a:prstDash val="solid"/>
+                    <a:lnL w="3000">
+                      <a:solidFill>
+                        <a:srgbClr val="C1CDD9"/>
+                      </a:solidFill>
                     </a:lnL>
-                    <a:lnR w="4200">
-                      <a:solidFill>
-                        <a:srgbClr val="BFCBD6"/>
-                      </a:solidFill>
-                      <a:prstDash val="solid"/>
+                    <a:lnR w="3000">
+                      <a:solidFill>
+                        <a:srgbClr val="C1CDD9"/>
+                      </a:solidFill>
                     </a:lnR>
-                    <a:lnT w="4200">
-                      <a:solidFill>
-                        <a:srgbClr val="BFCBD6"/>
-                      </a:solidFill>
-                      <a:prstDash val="solid"/>
+                    <a:lnT w="3000">
+                      <a:solidFill>
+                        <a:srgbClr val="C1CDD9"/>
+                      </a:solidFill>
                     </a:lnT>
-                    <a:lnB w="4200">
-                      <a:solidFill>
-                        <a:srgbClr val="BFCBD6"/>
-                      </a:solidFill>
-                      <a:prstDash val="solid"/>
+                    <a:lnB w="3000">
+                      <a:solidFill>
+                        <a:srgbClr val="C1CDD9"/>
+                      </a:solidFill>
                     </a:lnB>
                   </a:tcPr>
                 </a:tc>
@@ -6274,77 +6268,3154 @@
                     </a:bodyPr>
                     <a:lstStyle/>
                     <a:p>
+                      <a:pPr algn="l">
+                        <a:lnSpc>
+                          <a:spcPct val="86000"/>
+                        </a:lnSpc>
+                        <a:spcBef>
+                          <a:spcPts val="0"/>
+                        </a:spcBef>
+                        <a:spcAft>
+                          <a:spcPts val="0"/>
+                        </a:spcAft>
+                      </a:pPr>
+                      <a:r>
+                        <a:rPr sz="535" b="0">
+                          <a:solidFill>
+                            <a:srgbClr val="121B26"/>
+                          </a:solidFill>
+                          <a:latin typeface="Microsoft YaHei UI"/>
+                        </a:rPr>
+                        <a:t>自回归VLA</a:t>
+                      </a:r>
+                    </a:p>
+                    <a:p>
+                      <a:pPr algn="l">
+                        <a:lnSpc>
+                          <a:spcPct val="86000"/>
+                        </a:lnSpc>
+                        <a:spcBef>
+                          <a:spcPts val="0"/>
+                        </a:spcBef>
+                        <a:spcAft>
+                          <a:spcPts val="0"/>
+                        </a:spcAft>
+                      </a:pPr>
+                      <a:r>
+                        <a:rPr sz="535" b="0">
+                          <a:solidFill>
+                            <a:srgbClr val="121B26"/>
+                          </a:solidFill>
+                          <a:latin typeface="Microsoft YaHei UI"/>
+                        </a:rPr>
+                        <a:t>世界动作模型</a:t>
+                      </a:r>
+                    </a:p>
+                    <a:p>
+                      <a:pPr algn="l">
+                        <a:lnSpc>
+                          <a:spcPct val="86000"/>
+                        </a:lnSpc>
+                        <a:spcBef>
+                          <a:spcPts val="0"/>
+                        </a:spcBef>
+                        <a:spcAft>
+                          <a:spcPts val="0"/>
+                        </a:spcAft>
+                      </a:pPr>
+                      <a:r>
+                        <a:rPr sz="535" b="0">
+                          <a:solidFill>
+                            <a:srgbClr val="121B26"/>
+                          </a:solidFill>
+                          <a:latin typeface="Microsoft YaHei UI"/>
+                        </a:rPr>
+                        <a:t>长时序作业智能</a:t>
+                      </a:r>
+                    </a:p>
+                  </a:txBody>
+                  <a:tcPr anchor="ctr" marL="32004" marR="32004" marT="10972" marB="10972">
+                    <a:solidFill>
+                      <a:srgbClr val="EEF3F7"/>
+                    </a:solidFill>
+                    <a:lnL w="3000">
+                      <a:solidFill>
+                        <a:srgbClr val="C1CDD9"/>
+                      </a:solidFill>
+                    </a:lnL>
+                    <a:lnR w="3000">
+                      <a:solidFill>
+                        <a:srgbClr val="C1CDD9"/>
+                      </a:solidFill>
+                    </a:lnR>
+                    <a:lnT w="3000">
+                      <a:solidFill>
+                        <a:srgbClr val="C1CDD9"/>
+                      </a:solidFill>
+                    </a:lnT>
+                    <a:lnB w="3000">
+                      <a:solidFill>
+                        <a:srgbClr val="C1CDD9"/>
+                      </a:solidFill>
+                    </a:lnB>
+                  </a:tcPr>
+                </a:tc>
+                <a:tc>
+                  <a:txBody>
+                    <a:bodyPr wrap="square">
+                      <a:normAutofit/>
+                    </a:bodyPr>
+                    <a:lstStyle/>
+                    <a:p>
+                      <a:pPr algn="l">
+                        <a:lnSpc>
+                          <a:spcPct val="86000"/>
+                        </a:lnSpc>
+                        <a:spcBef>
+                          <a:spcPts val="0"/>
+                        </a:spcBef>
+                        <a:spcAft>
+                          <a:spcPts val="0"/>
+                        </a:spcAft>
+                      </a:pPr>
+                      <a:r>
+                        <a:rPr sz="484" b="0">
+                          <a:solidFill>
+                            <a:srgbClr val="121B26"/>
+                          </a:solidFill>
+                          <a:latin typeface="Microsoft YaHei UI"/>
+                        </a:rPr>
+                        <a:t>G0.5基于Qwen3.5 2B</a:t>
+                      </a:r>
+                    </a:p>
+                    <a:p>
+                      <a:pPr algn="l">
+                        <a:lnSpc>
+                          <a:spcPct val="86000"/>
+                        </a:lnSpc>
+                        <a:spcBef>
+                          <a:spcPts val="0"/>
+                        </a:spcBef>
+                        <a:spcAft>
+                          <a:spcPts val="0"/>
+                        </a:spcAft>
+                      </a:pPr>
+                      <a:r>
+                        <a:rPr sz="484" b="0">
+                          <a:solidFill>
+                            <a:srgbClr val="121B26"/>
+                          </a:solidFill>
+                          <a:latin typeface="Microsoft YaHei UI"/>
+                        </a:rPr>
+                        <a:t>18本体；1亿VQA</a:t>
+                      </a:r>
+                    </a:p>
+                    <a:p>
+                      <a:pPr algn="l">
+                        <a:lnSpc>
+                          <a:spcPct val="86000"/>
+                        </a:lnSpc>
+                        <a:spcBef>
+                          <a:spcPts val="0"/>
+                        </a:spcBef>
+                        <a:spcAft>
+                          <a:spcPts val="0"/>
+                        </a:spcAft>
+                      </a:pPr>
+                      <a:r>
+                        <a:rPr sz="484" b="0">
+                          <a:solidFill>
+                            <a:srgbClr val="121B26"/>
+                          </a:solidFill>
+                          <a:latin typeface="Microsoft YaHei UI"/>
+                        </a:rPr>
+                        <a:t>预训练约12万步</a:t>
+                      </a:r>
+                    </a:p>
+                  </a:txBody>
+                  <a:tcPr anchor="ctr" marL="32004" marR="32004" marT="10972" marB="10972">
+                    <a:solidFill>
+                      <a:srgbClr val="EEF3F7"/>
+                    </a:solidFill>
+                    <a:lnL w="3000">
+                      <a:solidFill>
+                        <a:srgbClr val="C1CDD9"/>
+                      </a:solidFill>
+                    </a:lnL>
+                    <a:lnR w="3000">
+                      <a:solidFill>
+                        <a:srgbClr val="C1CDD9"/>
+                      </a:solidFill>
+                    </a:lnR>
+                    <a:lnT w="3000">
+                      <a:solidFill>
+                        <a:srgbClr val="C1CDD9"/>
+                      </a:solidFill>
+                    </a:lnT>
+                    <a:lnB w="3000">
+                      <a:solidFill>
+                        <a:srgbClr val="C1CDD9"/>
+                      </a:solidFill>
+                    </a:lnB>
+                  </a:tcPr>
+                </a:tc>
+                <a:tc>
+                  <a:txBody>
+                    <a:bodyPr wrap="square">
+                      <a:normAutofit/>
+                    </a:bodyPr>
+                    <a:lstStyle/>
+                    <a:p>
+                      <a:pPr algn="l">
+                        <a:lnSpc>
+                          <a:spcPct val="86000"/>
+                        </a:lnSpc>
+                        <a:spcBef>
+                          <a:spcPts val="0"/>
+                        </a:spcBef>
+                        <a:spcAft>
+                          <a:spcPts val="0"/>
+                        </a:spcAft>
+                      </a:pPr>
+                      <a:r>
+                        <a:rPr sz="484" b="0">
+                          <a:solidFill>
+                            <a:srgbClr val="121B26"/>
+                          </a:solidFill>
+                          <a:latin typeface="Microsoft YaHei UI"/>
+                        </a:rPr>
+                        <a:t>Nexo 700TOPS*</a:t>
+                      </a:r>
+                    </a:p>
+                    <a:p>
+                      <a:pPr algn="l">
+                        <a:lnSpc>
+                          <a:spcPct val="86000"/>
+                        </a:lnSpc>
+                        <a:spcBef>
+                          <a:spcPts val="0"/>
+                        </a:spcBef>
+                        <a:spcAft>
+                          <a:spcPts val="0"/>
+                        </a:spcAft>
+                      </a:pPr>
+                      <a:r>
+                        <a:rPr sz="484" b="0">
+                          <a:solidFill>
+                            <a:srgbClr val="121B26"/>
+                          </a:solidFill>
+                          <a:latin typeface="Microsoft YaHei UI"/>
+                        </a:rPr>
+                        <a:t>R1 Lite端侧模型部署</a:t>
+                      </a:r>
+                    </a:p>
+                  </a:txBody>
+                  <a:tcPr anchor="ctr" marL="32004" marR="32004" marT="10972" marB="10972">
+                    <a:solidFill>
+                      <a:srgbClr val="EEF3F7"/>
+                    </a:solidFill>
+                    <a:lnL w="3000">
+                      <a:solidFill>
+                        <a:srgbClr val="C1CDD9"/>
+                      </a:solidFill>
+                    </a:lnL>
+                    <a:lnR w="3000">
+                      <a:solidFill>
+                        <a:srgbClr val="C1CDD9"/>
+                      </a:solidFill>
+                    </a:lnR>
+                    <a:lnT w="3000">
+                      <a:solidFill>
+                        <a:srgbClr val="C1CDD9"/>
+                      </a:solidFill>
+                    </a:lnT>
+                    <a:lnB w="3000">
+                      <a:solidFill>
+                        <a:srgbClr val="C1CDD9"/>
+                      </a:solidFill>
+                    </a:lnB>
+                  </a:tcPr>
+                </a:tc>
+                <a:tc>
+                  <a:txBody>
+                    <a:bodyPr wrap="square">
+                      <a:normAutofit/>
+                    </a:bodyPr>
+                    <a:lstStyle/>
+                    <a:p>
+                      <a:pPr algn="l">
+                        <a:lnSpc>
+                          <a:spcPct val="86000"/>
+                        </a:lnSpc>
+                        <a:spcBef>
+                          <a:spcPts val="0"/>
+                        </a:spcBef>
+                        <a:spcAft>
+                          <a:spcPts val="0"/>
+                        </a:spcAft>
+                      </a:pPr>
+                      <a:r>
+                        <a:rPr sz="484" b="0">
+                          <a:solidFill>
+                            <a:srgbClr val="121B26"/>
+                          </a:solidFill>
+                          <a:latin typeface="Microsoft YaHei UI"/>
+                        </a:rPr>
+                        <a:t>Fast-WAM约190ms</a:t>
+                      </a:r>
+                    </a:p>
+                    <a:p>
+                      <a:pPr algn="l">
+                        <a:lnSpc>
+                          <a:spcPct val="86000"/>
+                        </a:lnSpc>
+                        <a:spcBef>
+                          <a:spcPts val="0"/>
+                        </a:spcBef>
+                        <a:spcAft>
+                          <a:spcPts val="0"/>
+                        </a:spcAft>
+                      </a:pPr>
+                      <a:r>
+                        <a:rPr sz="484" b="0">
+                          <a:solidFill>
+                            <a:srgbClr val="121B26"/>
+                          </a:solidFill>
+                          <a:latin typeface="Microsoft YaHei UI"/>
+                        </a:rPr>
+                        <a:t>A100 189ms</a:t>
+                      </a:r>
+                    </a:p>
+                    <a:p>
+                      <a:pPr algn="l">
+                        <a:lnSpc>
+                          <a:spcPct val="86000"/>
+                        </a:lnSpc>
+                        <a:spcBef>
+                          <a:spcPts val="0"/>
+                        </a:spcBef>
+                        <a:spcAft>
+                          <a:spcPts val="0"/>
+                        </a:spcAft>
+                      </a:pPr>
+                      <a:r>
+                        <a:rPr sz="484" b="0">
+                          <a:solidFill>
+                            <a:srgbClr val="121B26"/>
+                          </a:solidFill>
+                          <a:latin typeface="Microsoft YaHei UI"/>
+                        </a:rPr>
+                        <a:t>RTX4090 110ms</a:t>
+                      </a:r>
+                    </a:p>
+                    <a:p>
+                      <a:pPr algn="l">
+                        <a:lnSpc>
+                          <a:spcPct val="86000"/>
+                        </a:lnSpc>
+                        <a:spcBef>
+                          <a:spcPts val="0"/>
+                        </a:spcBef>
+                        <a:spcAft>
+                          <a:spcPts val="0"/>
+                        </a:spcAft>
+                      </a:pPr>
+                      <a:r>
+                        <a:rPr sz="484" b="0">
+                          <a:solidFill>
+                            <a:srgbClr val="121B26"/>
+                          </a:solidFill>
+                          <a:latin typeface="Microsoft YaHei UI"/>
+                        </a:rPr>
+                        <a:t>C++ 85ms</a:t>
+                      </a:r>
+                    </a:p>
+                  </a:txBody>
+                  <a:tcPr anchor="ctr" marL="32004" marR="32004" marT="10972" marB="10972">
+                    <a:solidFill>
+                      <a:srgbClr val="EEF3F7"/>
+                    </a:solidFill>
+                    <a:lnL w="3000">
+                      <a:solidFill>
+                        <a:srgbClr val="C1CDD9"/>
+                      </a:solidFill>
+                    </a:lnL>
+                    <a:lnR w="3000">
+                      <a:solidFill>
+                        <a:srgbClr val="C1CDD9"/>
+                      </a:solidFill>
+                    </a:lnR>
+                    <a:lnT w="3000">
+                      <a:solidFill>
+                        <a:srgbClr val="C1CDD9"/>
+                      </a:solidFill>
+                    </a:lnT>
+                    <a:lnB w="3000">
+                      <a:solidFill>
+                        <a:srgbClr val="C1CDD9"/>
+                      </a:solidFill>
+                    </a:lnB>
+                  </a:tcPr>
+                </a:tc>
+              </a:tr>
+              <a:tr h="409956">
+                <a:tc>
+                  <a:txBody>
+                    <a:bodyPr wrap="square">
+                      <a:normAutofit/>
+                    </a:bodyPr>
+                    <a:lstStyle/>
+                    <a:p>
                       <a:pPr algn="ctr">
                         <a:lnSpc>
-                          <a:spcPct val="92000"/>
-                        </a:lnSpc>
-                        <a:spcBef>
-                          <a:spcPts val="0"/>
-                        </a:spcBef>
-                        <a:spcAft>
-                          <a:spcPts val="0"/>
-                        </a:spcAft>
-                      </a:pPr>
-                      <a:r>
-                        <a:rPr sz="675" b="1">
-                          <a:solidFill>
-                            <a:srgbClr val="0D4B58"/>
-                          </a:solidFill>
-                          <a:latin typeface="Microsoft YaHei UI"/>
-                        </a:rPr>
-                        <a:t>世界模型</a:t>
+                          <a:spcPct val="86000"/>
+                        </a:lnSpc>
+                        <a:spcBef>
+                          <a:spcPts val="0"/>
+                        </a:spcBef>
+                        <a:spcAft>
+                          <a:spcPts val="0"/>
+                        </a:spcAft>
+                      </a:pPr>
+                      <a:r>
+                        <a:rPr sz="535" b="1">
+                          <a:solidFill>
+                            <a:srgbClr val="0F5766"/>
+                          </a:solidFill>
+                          <a:latin typeface="Microsoft YaHei UI"/>
+                        </a:rPr>
+                        <a:t>自变量</a:t>
                       </a:r>
                     </a:p>
                     <a:p>
                       <a:pPr algn="ctr">
                         <a:lnSpc>
-                          <a:spcPct val="92000"/>
-                        </a:lnSpc>
-                        <a:spcBef>
-                          <a:spcPts val="0"/>
-                        </a:spcBef>
-                        <a:spcAft>
-                          <a:spcPts val="0"/>
-                        </a:spcAft>
-                      </a:pPr>
-                      <a:r>
-                        <a:rPr sz="675" b="1">
-                          <a:solidFill>
-                            <a:srgbClr val="0D4B58"/>
-                          </a:solidFill>
-                          <a:latin typeface="Microsoft YaHei UI"/>
-                        </a:rPr>
-                        <a:t>延迟清晰</a:t>
+                          <a:spcPct val="86000"/>
+                        </a:lnSpc>
+                        <a:spcBef>
+                          <a:spcPts val="0"/>
+                        </a:spcBef>
+                        <a:spcAft>
+                          <a:spcPts val="0"/>
+                        </a:spcAft>
+                      </a:pPr>
+                      <a:r>
+                        <a:rPr sz="535" b="1">
+                          <a:solidFill>
+                            <a:srgbClr val="0F5766"/>
+                          </a:solidFill>
+                          <a:latin typeface="Microsoft YaHei UI"/>
+                        </a:rPr>
+                        <a:t>X Square</a:t>
                       </a:r>
                     </a:p>
                   </a:txBody>
-                  <a:tcPr anchor="ctr" marL="36576" marR="36576" marT="18288" marB="18288">
+                  <a:tcPr anchor="ctr" marL="32004" marR="32004" marT="10972" marB="10972">
                     <a:solidFill>
                       <a:srgbClr val="FFFFFF"/>
                     </a:solidFill>
-                    <a:lnL w="4200">
-                      <a:solidFill>
-                        <a:srgbClr val="BFCBD6"/>
-                      </a:solidFill>
-                      <a:prstDash val="solid"/>
+                    <a:lnL w="3000">
+                      <a:solidFill>
+                        <a:srgbClr val="C1CDD9"/>
+                      </a:solidFill>
                     </a:lnL>
-                    <a:lnR w="4200">
-                      <a:solidFill>
-                        <a:srgbClr val="BFCBD6"/>
-                      </a:solidFill>
-                      <a:prstDash val="solid"/>
+                    <a:lnR w="3000">
+                      <a:solidFill>
+                        <a:srgbClr val="C1CDD9"/>
+                      </a:solidFill>
                     </a:lnR>
-                    <a:lnT w="4200">
-                      <a:solidFill>
-                        <a:srgbClr val="BFCBD6"/>
-                      </a:solidFill>
-                      <a:prstDash val="solid"/>
+                    <a:lnT w="3000">
+                      <a:solidFill>
+                        <a:srgbClr val="C1CDD9"/>
+                      </a:solidFill>
                     </a:lnT>
-                    <a:lnB w="4200">
-                      <a:solidFill>
-                        <a:srgbClr val="BFCBD6"/>
-                      </a:solidFill>
-                      <a:prstDash val="solid"/>
+                    <a:lnB w="3000">
+                      <a:solidFill>
+                        <a:srgbClr val="C1CDD9"/>
+                      </a:solidFill>
+                    </a:lnB>
+                  </a:tcPr>
+                </a:tc>
+                <a:tc>
+                  <a:txBody>
+                    <a:bodyPr wrap="square">
+                      <a:normAutofit/>
+                    </a:bodyPr>
+                    <a:lstStyle/>
+                    <a:p>
+                      <a:pPr algn="l">
+                        <a:lnSpc>
+                          <a:spcPct val="86000"/>
+                        </a:lnSpc>
+                        <a:spcBef>
+                          <a:spcPts val="0"/>
+                        </a:spcBef>
+                        <a:spcAft>
+                          <a:spcPts val="0"/>
+                        </a:spcAft>
+                      </a:pPr>
+                      <a:r>
+                        <a:rPr sz="535" b="0">
+                          <a:solidFill>
+                            <a:srgbClr val="121B26"/>
+                          </a:solidFill>
+                          <a:latin typeface="Microsoft YaHei UI"/>
+                        </a:rPr>
+                        <a:t>WALL-B</a:t>
+                      </a:r>
+                    </a:p>
+                    <a:p>
+                      <a:pPr algn="l">
+                        <a:lnSpc>
+                          <a:spcPct val="86000"/>
+                        </a:lnSpc>
+                        <a:spcBef>
+                          <a:spcPts val="0"/>
+                        </a:spcBef>
+                        <a:spcAft>
+                          <a:spcPts val="0"/>
+                        </a:spcAft>
+                      </a:pPr>
+                      <a:r>
+                        <a:rPr sz="535" b="0">
+                          <a:solidFill>
+                            <a:srgbClr val="121B26"/>
+                          </a:solidFill>
+                          <a:latin typeface="Microsoft YaHei UI"/>
+                        </a:rPr>
+                        <a:t>Wall-OSS-0.5</a:t>
+                      </a:r>
+                    </a:p>
+                  </a:txBody>
+                  <a:tcPr anchor="ctr" marL="32004" marR="32004" marT="10972" marB="10972">
+                    <a:solidFill>
+                      <a:srgbClr val="FFFFFF"/>
+                    </a:solidFill>
+                    <a:lnL w="3000">
+                      <a:solidFill>
+                        <a:srgbClr val="C1CDD9"/>
+                      </a:solidFill>
+                    </a:lnL>
+                    <a:lnR w="3000">
+                      <a:solidFill>
+                        <a:srgbClr val="C1CDD9"/>
+                      </a:solidFill>
+                    </a:lnR>
+                    <a:lnT w="3000">
+                      <a:solidFill>
+                        <a:srgbClr val="C1CDD9"/>
+                      </a:solidFill>
+                    </a:lnT>
+                    <a:lnB w="3000">
+                      <a:solidFill>
+                        <a:srgbClr val="C1CDD9"/>
+                      </a:solidFill>
+                    </a:lnB>
+                  </a:tcPr>
+                </a:tc>
+                <a:tc>
+                  <a:txBody>
+                    <a:bodyPr wrap="square">
+                      <a:normAutofit/>
+                    </a:bodyPr>
+                    <a:lstStyle/>
+                    <a:p>
+                      <a:pPr algn="l">
+                        <a:lnSpc>
+                          <a:spcPct val="86000"/>
+                        </a:lnSpc>
+                        <a:spcBef>
+                          <a:spcPts val="0"/>
+                        </a:spcBef>
+                        <a:spcAft>
+                          <a:spcPts val="0"/>
+                        </a:spcAft>
+                      </a:pPr>
+                      <a:r>
+                        <a:rPr sz="535" b="0">
+                          <a:solidFill>
+                            <a:srgbClr val="121B26"/>
+                          </a:solidFill>
+                          <a:latin typeface="Microsoft YaHei UI"/>
+                        </a:rPr>
+                        <a:t>世界统一模型</a:t>
+                      </a:r>
+                    </a:p>
+                    <a:p>
+                      <a:pPr algn="l">
+                        <a:lnSpc>
+                          <a:spcPct val="86000"/>
+                        </a:lnSpc>
+                        <a:spcBef>
+                          <a:spcPts val="0"/>
+                        </a:spcBef>
+                        <a:spcAft>
+                          <a:spcPts val="0"/>
+                        </a:spcAft>
+                      </a:pPr>
+                      <a:r>
+                        <a:rPr sz="535" b="0">
+                          <a:solidFill>
+                            <a:srgbClr val="121B26"/>
+                          </a:solidFill>
+                          <a:latin typeface="Microsoft YaHei UI"/>
+                        </a:rPr>
+                        <a:t>端到端模型</a:t>
+                      </a:r>
+                    </a:p>
+                    <a:p>
+                      <a:pPr algn="l">
+                        <a:lnSpc>
+                          <a:spcPct val="86000"/>
+                        </a:lnSpc>
+                        <a:spcBef>
+                          <a:spcPts val="0"/>
+                        </a:spcBef>
+                        <a:spcAft>
+                          <a:spcPts val="0"/>
+                        </a:spcAft>
+                      </a:pPr>
+                      <a:r>
+                        <a:rPr sz="535" b="0">
+                          <a:solidFill>
+                            <a:srgbClr val="121B26"/>
+                          </a:solidFill>
+                          <a:latin typeface="Microsoft YaHei UI"/>
+                        </a:rPr>
+                        <a:t>视觉/语言/动作统一</a:t>
+                      </a:r>
+                    </a:p>
+                  </a:txBody>
+                  <a:tcPr anchor="ctr" marL="32004" marR="32004" marT="10972" marB="10972">
+                    <a:solidFill>
+                      <a:srgbClr val="FFFFFF"/>
+                    </a:solidFill>
+                    <a:lnL w="3000">
+                      <a:solidFill>
+                        <a:srgbClr val="C1CDD9"/>
+                      </a:solidFill>
+                    </a:lnL>
+                    <a:lnR w="3000">
+                      <a:solidFill>
+                        <a:srgbClr val="C1CDD9"/>
+                      </a:solidFill>
+                    </a:lnR>
+                    <a:lnT w="3000">
+                      <a:solidFill>
+                        <a:srgbClr val="C1CDD9"/>
+                      </a:solidFill>
+                    </a:lnT>
+                    <a:lnB w="3000">
+                      <a:solidFill>
+                        <a:srgbClr val="C1CDD9"/>
+                      </a:solidFill>
+                    </a:lnB>
+                  </a:tcPr>
+                </a:tc>
+                <a:tc>
+                  <a:txBody>
+                    <a:bodyPr wrap="square">
+                      <a:normAutofit/>
+                    </a:bodyPr>
+                    <a:lstStyle/>
+                    <a:p>
+                      <a:pPr algn="l">
+                        <a:lnSpc>
+                          <a:spcPct val="86000"/>
+                        </a:lnSpc>
+                        <a:spcBef>
+                          <a:spcPts val="0"/>
+                        </a:spcBef>
+                        <a:spcAft>
+                          <a:spcPts val="0"/>
+                        </a:spcAft>
+                      </a:pPr>
+                      <a:r>
+                        <a:rPr sz="515" b="0">
+                          <a:solidFill>
+                            <a:srgbClr val="121B26"/>
+                          </a:solidFill>
+                          <a:latin typeface="Microsoft YaHei UI"/>
+                        </a:rPr>
+                        <a:t>真机测试17个任务</a:t>
+                      </a:r>
+                    </a:p>
+                  </a:txBody>
+                  <a:tcPr anchor="ctr" marL="32004" marR="32004" marT="10972" marB="10972">
+                    <a:solidFill>
+                      <a:srgbClr val="FFFFFF"/>
+                    </a:solidFill>
+                    <a:lnL w="3000">
+                      <a:solidFill>
+                        <a:srgbClr val="C1CDD9"/>
+                      </a:solidFill>
+                    </a:lnL>
+                    <a:lnR w="3000">
+                      <a:solidFill>
+                        <a:srgbClr val="C1CDD9"/>
+                      </a:solidFill>
+                    </a:lnR>
+                    <a:lnT w="3000">
+                      <a:solidFill>
+                        <a:srgbClr val="C1CDD9"/>
+                      </a:solidFill>
+                    </a:lnT>
+                    <a:lnB w="3000">
+                      <a:solidFill>
+                        <a:srgbClr val="C1CDD9"/>
+                      </a:solidFill>
+                    </a:lnB>
+                  </a:tcPr>
+                </a:tc>
+                <a:tc>
+                  <a:txBody>
+                    <a:bodyPr wrap="square">
+                      <a:normAutofit/>
+                    </a:bodyPr>
+                    <a:lstStyle/>
+                    <a:p>
+                      <a:pPr algn="l">
+                        <a:lnSpc>
+                          <a:spcPct val="86000"/>
+                        </a:lnSpc>
+                        <a:spcBef>
+                          <a:spcPts val="0"/>
+                        </a:spcBef>
+                        <a:spcAft>
+                          <a:spcPts val="0"/>
+                        </a:spcAft>
+                      </a:pPr>
+                      <a:r>
+                        <a:rPr sz="515" b="0">
+                          <a:solidFill>
+                            <a:srgbClr val="121B26"/>
+                          </a:solidFill>
+                          <a:latin typeface="Microsoft YaHei UI"/>
+                        </a:rPr>
+                        <a:t>模型上真机；</a:t>
+                      </a:r>
+                    </a:p>
+                    <a:p>
+                      <a:pPr algn="l">
+                        <a:lnSpc>
+                          <a:spcPct val="86000"/>
+                        </a:lnSpc>
+                        <a:spcBef>
+                          <a:spcPts val="0"/>
+                        </a:spcBef>
+                        <a:spcAft>
+                          <a:spcPts val="0"/>
+                        </a:spcAft>
+                      </a:pPr>
+                      <a:r>
+                        <a:rPr sz="515" b="0">
+                          <a:solidFill>
+                            <a:srgbClr val="121B26"/>
+                          </a:solidFill>
+                          <a:latin typeface="Microsoft YaHei UI"/>
+                        </a:rPr>
+                        <a:t>端云分工未公开</a:t>
+                      </a:r>
+                    </a:p>
+                  </a:txBody>
+                  <a:tcPr anchor="ctr" marL="32004" marR="32004" marT="10972" marB="10972">
+                    <a:solidFill>
+                      <a:srgbClr val="FFFFFF"/>
+                    </a:solidFill>
+                    <a:lnL w="3000">
+                      <a:solidFill>
+                        <a:srgbClr val="C1CDD9"/>
+                      </a:solidFill>
+                    </a:lnL>
+                    <a:lnR w="3000">
+                      <a:solidFill>
+                        <a:srgbClr val="C1CDD9"/>
+                      </a:solidFill>
+                    </a:lnR>
+                    <a:lnT w="3000">
+                      <a:solidFill>
+                        <a:srgbClr val="C1CDD9"/>
+                      </a:solidFill>
+                    </a:lnT>
+                    <a:lnB w="3000">
+                      <a:solidFill>
+                        <a:srgbClr val="C1CDD9"/>
+                      </a:solidFill>
+                    </a:lnB>
+                  </a:tcPr>
+                </a:tc>
+                <a:tc>
+                  <a:txBody>
+                    <a:bodyPr wrap="square">
+                      <a:normAutofit/>
+                    </a:bodyPr>
+                    <a:lstStyle/>
+                    <a:p>
+                      <a:pPr algn="l">
+                        <a:lnSpc>
+                          <a:spcPct val="86000"/>
+                        </a:lnSpc>
+                        <a:spcBef>
+                          <a:spcPts val="0"/>
+                        </a:spcBef>
+                        <a:spcAft>
+                          <a:spcPts val="0"/>
+                        </a:spcAft>
+                      </a:pPr>
+                      <a:r>
+                        <a:rPr sz="515" b="0">
+                          <a:solidFill>
+                            <a:srgbClr val="121B26"/>
+                          </a:solidFill>
+                          <a:latin typeface="Microsoft YaHei UI"/>
+                        </a:rPr>
+                        <a:t/>
+                      </a:r>
+                    </a:p>
+                  </a:txBody>
+                  <a:tcPr anchor="ctr" marL="32004" marR="32004" marT="10972" marB="10972">
+                    <a:solidFill>
+                      <a:srgbClr val="FFFFFF"/>
+                    </a:solidFill>
+                    <a:lnL w="3000">
+                      <a:solidFill>
+                        <a:srgbClr val="C1CDD9"/>
+                      </a:solidFill>
+                    </a:lnL>
+                    <a:lnR w="3000">
+                      <a:solidFill>
+                        <a:srgbClr val="C1CDD9"/>
+                      </a:solidFill>
+                    </a:lnR>
+                    <a:lnT w="3000">
+                      <a:solidFill>
+                        <a:srgbClr val="C1CDD9"/>
+                      </a:solidFill>
+                    </a:lnT>
+                    <a:lnB w="3000">
+                      <a:solidFill>
+                        <a:srgbClr val="C1CDD9"/>
+                      </a:solidFill>
+                    </a:lnB>
+                  </a:tcPr>
+                </a:tc>
+              </a:tr>
+              <a:tr h="409956">
+                <a:tc>
+                  <a:txBody>
+                    <a:bodyPr wrap="square">
+                      <a:normAutofit/>
+                    </a:bodyPr>
+                    <a:lstStyle/>
+                    <a:p>
+                      <a:pPr algn="ctr">
+                        <a:lnSpc>
+                          <a:spcPct val="86000"/>
+                        </a:lnSpc>
+                        <a:spcBef>
+                          <a:spcPts val="0"/>
+                        </a:spcBef>
+                        <a:spcAft>
+                          <a:spcPts val="0"/>
+                        </a:spcAft>
+                      </a:pPr>
+                      <a:r>
+                        <a:rPr sz="535" b="1">
+                          <a:solidFill>
+                            <a:srgbClr val="0F5766"/>
+                          </a:solidFill>
+                          <a:latin typeface="Microsoft YaHei UI"/>
+                        </a:rPr>
+                        <a:t>普渡</a:t>
+                      </a:r>
+                    </a:p>
+                    <a:p>
+                      <a:pPr algn="ctr">
+                        <a:lnSpc>
+                          <a:spcPct val="86000"/>
+                        </a:lnSpc>
+                        <a:spcBef>
+                          <a:spcPts val="0"/>
+                        </a:spcBef>
+                        <a:spcAft>
+                          <a:spcPts val="0"/>
+                        </a:spcAft>
+                      </a:pPr>
+                      <a:r>
+                        <a:rPr sz="535" b="1">
+                          <a:solidFill>
+                            <a:srgbClr val="0F5766"/>
+                          </a:solidFill>
+                          <a:latin typeface="Microsoft YaHei UI"/>
+                        </a:rPr>
+                        <a:t>Pudu</a:t>
+                      </a:r>
+                    </a:p>
+                  </a:txBody>
+                  <a:tcPr anchor="ctr" marL="32004" marR="32004" marT="10972" marB="10972">
+                    <a:solidFill>
+                      <a:srgbClr val="EEF3F7"/>
+                    </a:solidFill>
+                    <a:lnL w="3000">
+                      <a:solidFill>
+                        <a:srgbClr val="C1CDD9"/>
+                      </a:solidFill>
+                    </a:lnL>
+                    <a:lnR w="3000">
+                      <a:solidFill>
+                        <a:srgbClr val="C1CDD9"/>
+                      </a:solidFill>
+                    </a:lnR>
+                    <a:lnT w="3000">
+                      <a:solidFill>
+                        <a:srgbClr val="C1CDD9"/>
+                      </a:solidFill>
+                    </a:lnT>
+                    <a:lnB w="3000">
+                      <a:solidFill>
+                        <a:srgbClr val="C1CDD9"/>
+                      </a:solidFill>
+                    </a:lnB>
+                  </a:tcPr>
+                </a:tc>
+                <a:tc>
+                  <a:txBody>
+                    <a:bodyPr wrap="square">
+                      <a:normAutofit/>
+                    </a:bodyPr>
+                    <a:lstStyle/>
+                    <a:p>
+                      <a:pPr algn="l">
+                        <a:lnSpc>
+                          <a:spcPct val="86000"/>
+                        </a:lnSpc>
+                        <a:spcBef>
+                          <a:spcPts val="0"/>
+                        </a:spcBef>
+                        <a:spcAft>
+                          <a:spcPts val="0"/>
+                        </a:spcAft>
+                      </a:pPr>
+                      <a:r>
+                        <a:rPr sz="535" b="0">
+                          <a:solidFill>
+                            <a:srgbClr val="121B26"/>
+                          </a:solidFill>
+                          <a:latin typeface="Microsoft YaHei UI"/>
+                        </a:rPr>
+                        <a:t>PuduFM 1.0</a:t>
+                      </a:r>
+                    </a:p>
+                    <a:p>
+                      <a:pPr algn="l">
+                        <a:lnSpc>
+                          <a:spcPct val="86000"/>
+                        </a:lnSpc>
+                        <a:spcBef>
+                          <a:spcPts val="0"/>
+                        </a:spcBef>
+                        <a:spcAft>
+                          <a:spcPts val="0"/>
+                        </a:spcAft>
+                      </a:pPr>
+                      <a:r>
+                        <a:rPr sz="535" b="0">
+                          <a:solidFill>
+                            <a:srgbClr val="121B26"/>
+                          </a:solidFill>
+                          <a:latin typeface="Microsoft YaHei UI"/>
+                        </a:rPr>
+                        <a:t>Pudu Agent OS</a:t>
+                      </a:r>
+                    </a:p>
+                  </a:txBody>
+                  <a:tcPr anchor="ctr" marL="32004" marR="32004" marT="10972" marB="10972">
+                    <a:solidFill>
+                      <a:srgbClr val="EEF3F7"/>
+                    </a:solidFill>
+                    <a:lnL w="3000">
+                      <a:solidFill>
+                        <a:srgbClr val="C1CDD9"/>
+                      </a:solidFill>
+                    </a:lnL>
+                    <a:lnR w="3000">
+                      <a:solidFill>
+                        <a:srgbClr val="C1CDD9"/>
+                      </a:solidFill>
+                    </a:lnR>
+                    <a:lnT w="3000">
+                      <a:solidFill>
+                        <a:srgbClr val="C1CDD9"/>
+                      </a:solidFill>
+                    </a:lnT>
+                    <a:lnB w="3000">
+                      <a:solidFill>
+                        <a:srgbClr val="C1CDD9"/>
+                      </a:solidFill>
+                    </a:lnB>
+                  </a:tcPr>
+                </a:tc>
+                <a:tc>
+                  <a:txBody>
+                    <a:bodyPr wrap="square">
+                      <a:normAutofit/>
+                    </a:bodyPr>
+                    <a:lstStyle/>
+                    <a:p>
+                      <a:pPr algn="l">
+                        <a:lnSpc>
+                          <a:spcPct val="86000"/>
+                        </a:lnSpc>
+                        <a:spcBef>
+                          <a:spcPts val="0"/>
+                        </a:spcBef>
+                        <a:spcAft>
+                          <a:spcPts val="0"/>
+                        </a:spcAft>
+                      </a:pPr>
+                      <a:r>
+                        <a:rPr sz="535" b="0">
+                          <a:solidFill>
+                            <a:srgbClr val="121B26"/>
+                          </a:solidFill>
+                          <a:latin typeface="Microsoft YaHei UI"/>
+                        </a:rPr>
+                        <a:t>Physical Agent</a:t>
+                      </a:r>
+                    </a:p>
+                    <a:p>
+                      <a:pPr algn="l">
+                        <a:lnSpc>
+                          <a:spcPct val="86000"/>
+                        </a:lnSpc>
+                        <a:spcBef>
+                          <a:spcPts val="0"/>
+                        </a:spcBef>
+                        <a:spcAft>
+                          <a:spcPts val="0"/>
+                        </a:spcAft>
+                      </a:pPr>
+                      <a:r>
+                        <a:rPr sz="535" b="0">
+                          <a:solidFill>
+                            <a:srgbClr val="121B26"/>
+                          </a:solidFill>
+                          <a:latin typeface="Microsoft YaHei UI"/>
+                        </a:rPr>
+                        <a:t>具身基座模型</a:t>
+                      </a:r>
+                    </a:p>
+                    <a:p>
+                      <a:pPr algn="l">
+                        <a:lnSpc>
+                          <a:spcPct val="86000"/>
+                        </a:lnSpc>
+                        <a:spcBef>
+                          <a:spcPts val="0"/>
+                        </a:spcBef>
+                        <a:spcAft>
+                          <a:spcPts val="0"/>
+                        </a:spcAft>
+                      </a:pPr>
+                      <a:r>
+                        <a:rPr sz="535" b="0">
+                          <a:solidFill>
+                            <a:srgbClr val="121B26"/>
+                          </a:solidFill>
+                          <a:latin typeface="Microsoft YaHei UI"/>
+                        </a:rPr>
+                        <a:t>一脑多形</a:t>
+                      </a:r>
+                    </a:p>
+                  </a:txBody>
+                  <a:tcPr anchor="ctr" marL="32004" marR="32004" marT="10972" marB="10972">
+                    <a:solidFill>
+                      <a:srgbClr val="EEF3F7"/>
+                    </a:solidFill>
+                    <a:lnL w="3000">
+                      <a:solidFill>
+                        <a:srgbClr val="C1CDD9"/>
+                      </a:solidFill>
+                    </a:lnL>
+                    <a:lnR w="3000">
+                      <a:solidFill>
+                        <a:srgbClr val="C1CDD9"/>
+                      </a:solidFill>
+                    </a:lnR>
+                    <a:lnT w="3000">
+                      <a:solidFill>
+                        <a:srgbClr val="C1CDD9"/>
+                      </a:solidFill>
+                    </a:lnT>
+                    <a:lnB w="3000">
+                      <a:solidFill>
+                        <a:srgbClr val="C1CDD9"/>
+                      </a:solidFill>
+                    </a:lnB>
+                  </a:tcPr>
+                </a:tc>
+                <a:tc>
+                  <a:txBody>
+                    <a:bodyPr wrap="square">
+                      <a:normAutofit/>
+                    </a:bodyPr>
+                    <a:lstStyle/>
+                    <a:p>
+                      <a:pPr algn="l">
+                        <a:lnSpc>
+                          <a:spcPct val="86000"/>
+                        </a:lnSpc>
+                        <a:spcBef>
+                          <a:spcPts val="0"/>
+                        </a:spcBef>
+                        <a:spcAft>
+                          <a:spcPts val="0"/>
+                        </a:spcAft>
+                      </a:pPr>
+                      <a:r>
+                        <a:rPr sz="515" b="0">
+                          <a:solidFill>
+                            <a:srgbClr val="121B26"/>
+                          </a:solidFill>
+                          <a:latin typeface="Microsoft YaHei UI"/>
+                        </a:rPr>
+                        <a:t>5000万小时/年</a:t>
+                      </a:r>
+                    </a:p>
+                    <a:p>
+                      <a:pPr algn="l">
+                        <a:lnSpc>
+                          <a:spcPct val="86000"/>
+                        </a:lnSpc>
+                        <a:spcBef>
+                          <a:spcPts val="0"/>
+                        </a:spcBef>
+                        <a:spcAft>
+                          <a:spcPts val="0"/>
+                        </a:spcAft>
+                      </a:pPr>
+                      <a:r>
+                        <a:rPr sz="515" b="0">
+                          <a:solidFill>
+                            <a:srgbClr val="121B26"/>
+                          </a:solidFill>
+                          <a:latin typeface="Microsoft YaHei UI"/>
+                        </a:rPr>
+                        <a:t>实景运行数据回流</a:t>
+                      </a:r>
+                    </a:p>
+                  </a:txBody>
+                  <a:tcPr anchor="ctr" marL="32004" marR="32004" marT="10972" marB="10972">
+                    <a:solidFill>
+                      <a:srgbClr val="EEF3F7"/>
+                    </a:solidFill>
+                    <a:lnL w="3000">
+                      <a:solidFill>
+                        <a:srgbClr val="C1CDD9"/>
+                      </a:solidFill>
+                    </a:lnL>
+                    <a:lnR w="3000">
+                      <a:solidFill>
+                        <a:srgbClr val="C1CDD9"/>
+                      </a:solidFill>
+                    </a:lnR>
+                    <a:lnT w="3000">
+                      <a:solidFill>
+                        <a:srgbClr val="C1CDD9"/>
+                      </a:solidFill>
+                    </a:lnT>
+                    <a:lnB w="3000">
+                      <a:solidFill>
+                        <a:srgbClr val="C1CDD9"/>
+                      </a:solidFill>
+                    </a:lnB>
+                  </a:tcPr>
+                </a:tc>
+                <a:tc>
+                  <a:txBody>
+                    <a:bodyPr wrap="square">
+                      <a:normAutofit/>
+                    </a:bodyPr>
+                    <a:lstStyle/>
+                    <a:p>
+                      <a:pPr algn="l">
+                        <a:lnSpc>
+                          <a:spcPct val="86000"/>
+                        </a:lnSpc>
+                        <a:spcBef>
+                          <a:spcPts val="0"/>
+                        </a:spcBef>
+                        <a:spcAft>
+                          <a:spcPts val="0"/>
+                        </a:spcAft>
+                      </a:pPr>
+                      <a:r>
+                        <a:rPr sz="515" b="0">
+                          <a:solidFill>
+                            <a:srgbClr val="121B26"/>
+                          </a:solidFill>
+                          <a:latin typeface="Microsoft YaHei UI"/>
+                        </a:rPr>
+                        <a:t>D7自主换电；</a:t>
+                      </a:r>
+                    </a:p>
+                    <a:p>
+                      <a:pPr algn="l">
+                        <a:lnSpc>
+                          <a:spcPct val="86000"/>
+                        </a:lnSpc>
+                        <a:spcBef>
+                          <a:spcPts val="0"/>
+                        </a:spcBef>
+                        <a:spcAft>
+                          <a:spcPts val="0"/>
+                        </a:spcAft>
+                      </a:pPr>
+                      <a:r>
+                        <a:rPr sz="515" b="0">
+                          <a:solidFill>
+                            <a:srgbClr val="121B26"/>
+                          </a:solidFill>
+                          <a:latin typeface="Microsoft YaHei UI"/>
+                        </a:rPr>
+                        <a:t>模型端侧算力未公开</a:t>
+                      </a:r>
+                    </a:p>
+                  </a:txBody>
+                  <a:tcPr anchor="ctr" marL="32004" marR="32004" marT="10972" marB="10972">
+                    <a:solidFill>
+                      <a:srgbClr val="EEF3F7"/>
+                    </a:solidFill>
+                    <a:lnL w="3000">
+                      <a:solidFill>
+                        <a:srgbClr val="C1CDD9"/>
+                      </a:solidFill>
+                    </a:lnL>
+                    <a:lnR w="3000">
+                      <a:solidFill>
+                        <a:srgbClr val="C1CDD9"/>
+                      </a:solidFill>
+                    </a:lnR>
+                    <a:lnT w="3000">
+                      <a:solidFill>
+                        <a:srgbClr val="C1CDD9"/>
+                      </a:solidFill>
+                    </a:lnT>
+                    <a:lnB w="3000">
+                      <a:solidFill>
+                        <a:srgbClr val="C1CDD9"/>
+                      </a:solidFill>
+                    </a:lnB>
+                  </a:tcPr>
+                </a:tc>
+                <a:tc>
+                  <a:txBody>
+                    <a:bodyPr wrap="square">
+                      <a:normAutofit/>
+                    </a:bodyPr>
+                    <a:lstStyle/>
+                    <a:p>
+                      <a:pPr algn="l">
+                        <a:lnSpc>
+                          <a:spcPct val="86000"/>
+                        </a:lnSpc>
+                        <a:spcBef>
+                          <a:spcPts val="0"/>
+                        </a:spcBef>
+                        <a:spcAft>
+                          <a:spcPts val="0"/>
+                        </a:spcAft>
+                      </a:pPr>
+                      <a:r>
+                        <a:rPr sz="515" b="0">
+                          <a:solidFill>
+                            <a:srgbClr val="121B26"/>
+                          </a:solidFill>
+                          <a:latin typeface="Microsoft YaHei UI"/>
+                        </a:rPr>
+                        <a:t/>
+                      </a:r>
+                    </a:p>
+                  </a:txBody>
+                  <a:tcPr anchor="ctr" marL="32004" marR="32004" marT="10972" marB="10972">
+                    <a:solidFill>
+                      <a:srgbClr val="EEF3F7"/>
+                    </a:solidFill>
+                    <a:lnL w="3000">
+                      <a:solidFill>
+                        <a:srgbClr val="C1CDD9"/>
+                      </a:solidFill>
+                    </a:lnL>
+                    <a:lnR w="3000">
+                      <a:solidFill>
+                        <a:srgbClr val="C1CDD9"/>
+                      </a:solidFill>
+                    </a:lnR>
+                    <a:lnT w="3000">
+                      <a:solidFill>
+                        <a:srgbClr val="C1CDD9"/>
+                      </a:solidFill>
+                    </a:lnT>
+                    <a:lnB w="3000">
+                      <a:solidFill>
+                        <a:srgbClr val="C1CDD9"/>
+                      </a:solidFill>
+                    </a:lnB>
+                  </a:tcPr>
+                </a:tc>
+              </a:tr>
+              <a:tr h="409956">
+                <a:tc>
+                  <a:txBody>
+                    <a:bodyPr wrap="square">
+                      <a:normAutofit/>
+                    </a:bodyPr>
+                    <a:lstStyle/>
+                    <a:p>
+                      <a:pPr algn="ctr">
+                        <a:lnSpc>
+                          <a:spcPct val="86000"/>
+                        </a:lnSpc>
+                        <a:spcBef>
+                          <a:spcPts val="0"/>
+                        </a:spcBef>
+                        <a:spcAft>
+                          <a:spcPts val="0"/>
+                        </a:spcAft>
+                      </a:pPr>
+                      <a:r>
+                        <a:rPr sz="535" b="1">
+                          <a:solidFill>
+                            <a:srgbClr val="0F5766"/>
+                          </a:solidFill>
+                          <a:latin typeface="Microsoft YaHei UI"/>
+                        </a:rPr>
+                        <a:t>傅利叶</a:t>
+                      </a:r>
+                    </a:p>
+                    <a:p>
+                      <a:pPr algn="ctr">
+                        <a:lnSpc>
+                          <a:spcPct val="86000"/>
+                        </a:lnSpc>
+                        <a:spcBef>
+                          <a:spcPts val="0"/>
+                        </a:spcBef>
+                        <a:spcAft>
+                          <a:spcPts val="0"/>
+                        </a:spcAft>
+                      </a:pPr>
+                      <a:r>
+                        <a:rPr sz="535" b="1">
+                          <a:solidFill>
+                            <a:srgbClr val="0F5766"/>
+                          </a:solidFill>
+                          <a:latin typeface="Microsoft YaHei UI"/>
+                        </a:rPr>
+                        <a:t>Fourier</a:t>
+                      </a:r>
+                    </a:p>
+                  </a:txBody>
+                  <a:tcPr anchor="ctr" marL="32004" marR="32004" marT="10972" marB="10972">
+                    <a:solidFill>
+                      <a:srgbClr val="FFFFFF"/>
+                    </a:solidFill>
+                    <a:lnL w="3000">
+                      <a:solidFill>
+                        <a:srgbClr val="C1CDD9"/>
+                      </a:solidFill>
+                    </a:lnL>
+                    <a:lnR w="3000">
+                      <a:solidFill>
+                        <a:srgbClr val="C1CDD9"/>
+                      </a:solidFill>
+                    </a:lnR>
+                    <a:lnT w="3000">
+                      <a:solidFill>
+                        <a:srgbClr val="C1CDD9"/>
+                      </a:solidFill>
+                    </a:lnT>
+                    <a:lnB w="3000">
+                      <a:solidFill>
+                        <a:srgbClr val="C1CDD9"/>
+                      </a:solidFill>
+                    </a:lnB>
+                  </a:tcPr>
+                </a:tc>
+                <a:tc>
+                  <a:txBody>
+                    <a:bodyPr wrap="square">
+                      <a:normAutofit/>
+                    </a:bodyPr>
+                    <a:lstStyle/>
+                    <a:p>
+                      <a:pPr algn="l">
+                        <a:lnSpc>
+                          <a:spcPct val="86000"/>
+                        </a:lnSpc>
+                        <a:spcBef>
+                          <a:spcPts val="0"/>
+                        </a:spcBef>
+                        <a:spcAft>
+                          <a:spcPts val="0"/>
+                        </a:spcAft>
+                      </a:pPr>
+                      <a:r>
+                        <a:rPr sz="535" b="0">
+                          <a:solidFill>
+                            <a:srgbClr val="121B26"/>
+                          </a:solidFill>
+                          <a:latin typeface="Microsoft YaHei UI"/>
+                        </a:rPr>
+                        <a:t>LLM + embodied models</a:t>
+                      </a:r>
+                    </a:p>
+                    <a:p>
+                      <a:pPr algn="l">
+                        <a:lnSpc>
+                          <a:spcPct val="86000"/>
+                        </a:lnSpc>
+                        <a:spcBef>
+                          <a:spcPts val="0"/>
+                        </a:spcBef>
+                        <a:spcAft>
+                          <a:spcPts val="0"/>
+                        </a:spcAft>
+                      </a:pPr>
+                      <a:r>
+                        <a:rPr sz="535" b="0">
+                          <a:solidFill>
+                            <a:srgbClr val="121B26"/>
+                          </a:solidFill>
+                          <a:latin typeface="Microsoft YaHei UI"/>
+                        </a:rPr>
+                        <a:t>+ planning框架</a:t>
+                      </a:r>
+                    </a:p>
+                  </a:txBody>
+                  <a:tcPr anchor="ctr" marL="32004" marR="32004" marT="10972" marB="10972">
+                    <a:solidFill>
+                      <a:srgbClr val="FFFFFF"/>
+                    </a:solidFill>
+                    <a:lnL w="3000">
+                      <a:solidFill>
+                        <a:srgbClr val="C1CDD9"/>
+                      </a:solidFill>
+                    </a:lnL>
+                    <a:lnR w="3000">
+                      <a:solidFill>
+                        <a:srgbClr val="C1CDD9"/>
+                      </a:solidFill>
+                    </a:lnR>
+                    <a:lnT w="3000">
+                      <a:solidFill>
+                        <a:srgbClr val="C1CDD9"/>
+                      </a:solidFill>
+                    </a:lnT>
+                    <a:lnB w="3000">
+                      <a:solidFill>
+                        <a:srgbClr val="C1CDD9"/>
+                      </a:solidFill>
+                    </a:lnB>
+                  </a:tcPr>
+                </a:tc>
+                <a:tc>
+                  <a:txBody>
+                    <a:bodyPr wrap="square">
+                      <a:normAutofit/>
+                    </a:bodyPr>
+                    <a:lstStyle/>
+                    <a:p>
+                      <a:pPr algn="l">
+                        <a:lnSpc>
+                          <a:spcPct val="86000"/>
+                        </a:lnSpc>
+                        <a:spcBef>
+                          <a:spcPts val="0"/>
+                        </a:spcBef>
+                        <a:spcAft>
+                          <a:spcPts val="0"/>
+                        </a:spcAft>
+                      </a:pPr>
+                      <a:r>
+                        <a:rPr sz="535" b="0">
+                          <a:solidFill>
+                            <a:srgbClr val="121B26"/>
+                          </a:solidFill>
+                          <a:latin typeface="Microsoft YaHei UI"/>
+                        </a:rPr>
+                        <a:t>LLM</a:t>
+                      </a:r>
+                    </a:p>
+                    <a:p>
+                      <a:pPr algn="l">
+                        <a:lnSpc>
+                          <a:spcPct val="86000"/>
+                        </a:lnSpc>
+                        <a:spcBef>
+                          <a:spcPts val="0"/>
+                        </a:spcBef>
+                        <a:spcAft>
+                          <a:spcPts val="0"/>
+                        </a:spcAft>
+                      </a:pPr>
+                      <a:r>
+                        <a:rPr sz="535" b="0">
+                          <a:solidFill>
+                            <a:srgbClr val="121B26"/>
+                          </a:solidFill>
+                          <a:latin typeface="Microsoft YaHei UI"/>
+                        </a:rPr>
+                        <a:t>具身模型</a:t>
+                      </a:r>
+                    </a:p>
+                    <a:p>
+                      <a:pPr algn="l">
+                        <a:lnSpc>
+                          <a:spcPct val="86000"/>
+                        </a:lnSpc>
+                        <a:spcBef>
+                          <a:spcPts val="0"/>
+                        </a:spcBef>
+                        <a:spcAft>
+                          <a:spcPts val="0"/>
+                        </a:spcAft>
+                      </a:pPr>
+                      <a:r>
+                        <a:rPr sz="535" b="0">
+                          <a:solidFill>
+                            <a:srgbClr val="121B26"/>
+                          </a:solidFill>
+                          <a:latin typeface="Microsoft YaHei UI"/>
+                        </a:rPr>
+                        <a:t>导航规划</a:t>
+                      </a:r>
+                    </a:p>
+                  </a:txBody>
+                  <a:tcPr anchor="ctr" marL="32004" marR="32004" marT="10972" marB="10972">
+                    <a:solidFill>
+                      <a:srgbClr val="FFFFFF"/>
+                    </a:solidFill>
+                    <a:lnL w="3000">
+                      <a:solidFill>
+                        <a:srgbClr val="C1CDD9"/>
+                      </a:solidFill>
+                    </a:lnL>
+                    <a:lnR w="3000">
+                      <a:solidFill>
+                        <a:srgbClr val="C1CDD9"/>
+                      </a:solidFill>
+                    </a:lnR>
+                    <a:lnT w="3000">
+                      <a:solidFill>
+                        <a:srgbClr val="C1CDD9"/>
+                      </a:solidFill>
+                    </a:lnT>
+                    <a:lnB w="3000">
+                      <a:solidFill>
+                        <a:srgbClr val="C1CDD9"/>
+                      </a:solidFill>
+                    </a:lnB>
+                  </a:tcPr>
+                </a:tc>
+                <a:tc>
+                  <a:txBody>
+                    <a:bodyPr wrap="square">
+                      <a:normAutofit/>
+                    </a:bodyPr>
+                    <a:lstStyle/>
+                    <a:p>
+                      <a:pPr algn="l">
+                        <a:lnSpc>
+                          <a:spcPct val="86000"/>
+                        </a:lnSpc>
+                        <a:spcBef>
+                          <a:spcPts val="0"/>
+                        </a:spcBef>
+                        <a:spcAft>
+                          <a:spcPts val="0"/>
+                        </a:spcAft>
+                      </a:pPr>
+                      <a:r>
+                        <a:rPr sz="515" b="0">
+                          <a:solidFill>
+                            <a:srgbClr val="121B26"/>
+                          </a:solidFill>
+                          <a:latin typeface="Microsoft YaHei UI"/>
+                        </a:rPr>
+                        <a:t/>
+                      </a:r>
+                    </a:p>
+                  </a:txBody>
+                  <a:tcPr anchor="ctr" marL="32004" marR="32004" marT="10972" marB="10972">
+                    <a:solidFill>
+                      <a:srgbClr val="FFFFFF"/>
+                    </a:solidFill>
+                    <a:lnL w="3000">
+                      <a:solidFill>
+                        <a:srgbClr val="C1CDD9"/>
+                      </a:solidFill>
+                    </a:lnL>
+                    <a:lnR w="3000">
+                      <a:solidFill>
+                        <a:srgbClr val="C1CDD9"/>
+                      </a:solidFill>
+                    </a:lnR>
+                    <a:lnT w="3000">
+                      <a:solidFill>
+                        <a:srgbClr val="C1CDD9"/>
+                      </a:solidFill>
+                    </a:lnT>
+                    <a:lnB w="3000">
+                      <a:solidFill>
+                        <a:srgbClr val="C1CDD9"/>
+                      </a:solidFill>
+                    </a:lnB>
+                  </a:tcPr>
+                </a:tc>
+                <a:tc>
+                  <a:txBody>
+                    <a:bodyPr wrap="square">
+                      <a:normAutofit/>
+                    </a:bodyPr>
+                    <a:lstStyle/>
+                    <a:p>
+                      <a:pPr algn="l">
+                        <a:lnSpc>
+                          <a:spcPct val="86000"/>
+                        </a:lnSpc>
+                        <a:spcBef>
+                          <a:spcPts val="0"/>
+                        </a:spcBef>
+                        <a:spcAft>
+                          <a:spcPts val="0"/>
+                        </a:spcAft>
+                      </a:pPr>
+                      <a:r>
+                        <a:rPr sz="515" b="0">
+                          <a:solidFill>
+                            <a:srgbClr val="121B26"/>
+                          </a:solidFill>
+                          <a:latin typeface="Microsoft YaHei UI"/>
+                        </a:rPr>
+                        <a:t>框架连接大模型、</a:t>
+                      </a:r>
+                    </a:p>
+                    <a:p>
+                      <a:pPr algn="l">
+                        <a:lnSpc>
+                          <a:spcPct val="86000"/>
+                        </a:lnSpc>
+                        <a:spcBef>
+                          <a:spcPts val="0"/>
+                        </a:spcBef>
+                        <a:spcAft>
+                          <a:spcPts val="0"/>
+                        </a:spcAft>
+                      </a:pPr>
+                      <a:r>
+                        <a:rPr sz="515" b="0">
+                          <a:solidFill>
+                            <a:srgbClr val="121B26"/>
+                          </a:solidFill>
+                          <a:latin typeface="Microsoft YaHei UI"/>
+                        </a:rPr>
+                        <a:t>具身模型与低级运控</a:t>
+                      </a:r>
+                    </a:p>
+                  </a:txBody>
+                  <a:tcPr anchor="ctr" marL="32004" marR="32004" marT="10972" marB="10972">
+                    <a:solidFill>
+                      <a:srgbClr val="FFFFFF"/>
+                    </a:solidFill>
+                    <a:lnL w="3000">
+                      <a:solidFill>
+                        <a:srgbClr val="C1CDD9"/>
+                      </a:solidFill>
+                    </a:lnL>
+                    <a:lnR w="3000">
+                      <a:solidFill>
+                        <a:srgbClr val="C1CDD9"/>
+                      </a:solidFill>
+                    </a:lnR>
+                    <a:lnT w="3000">
+                      <a:solidFill>
+                        <a:srgbClr val="C1CDD9"/>
+                      </a:solidFill>
+                    </a:lnT>
+                    <a:lnB w="3000">
+                      <a:solidFill>
+                        <a:srgbClr val="C1CDD9"/>
+                      </a:solidFill>
+                    </a:lnB>
+                  </a:tcPr>
+                </a:tc>
+                <a:tc>
+                  <a:txBody>
+                    <a:bodyPr wrap="square">
+                      <a:normAutofit/>
+                    </a:bodyPr>
+                    <a:lstStyle/>
+                    <a:p>
+                      <a:pPr algn="l">
+                        <a:lnSpc>
+                          <a:spcPct val="86000"/>
+                        </a:lnSpc>
+                        <a:spcBef>
+                          <a:spcPts val="0"/>
+                        </a:spcBef>
+                        <a:spcAft>
+                          <a:spcPts val="0"/>
+                        </a:spcAft>
+                      </a:pPr>
+                      <a:r>
+                        <a:rPr sz="515" b="0">
+                          <a:solidFill>
+                            <a:srgbClr val="121B26"/>
+                          </a:solidFill>
+                          <a:latin typeface="Microsoft YaHei UI"/>
+                        </a:rPr>
+                        <a:t/>
+                      </a:r>
+                    </a:p>
+                  </a:txBody>
+                  <a:tcPr anchor="ctr" marL="32004" marR="32004" marT="10972" marB="10972">
+                    <a:solidFill>
+                      <a:srgbClr val="FFFFFF"/>
+                    </a:solidFill>
+                    <a:lnL w="3000">
+                      <a:solidFill>
+                        <a:srgbClr val="C1CDD9"/>
+                      </a:solidFill>
+                    </a:lnL>
+                    <a:lnR w="3000">
+                      <a:solidFill>
+                        <a:srgbClr val="C1CDD9"/>
+                      </a:solidFill>
+                    </a:lnR>
+                    <a:lnT w="3000">
+                      <a:solidFill>
+                        <a:srgbClr val="C1CDD9"/>
+                      </a:solidFill>
+                    </a:lnT>
+                    <a:lnB w="3000">
+                      <a:solidFill>
+                        <a:srgbClr val="C1CDD9"/>
+                      </a:solidFill>
+                    </a:lnB>
+                  </a:tcPr>
+                </a:tc>
+              </a:tr>
+              <a:tr h="409956">
+                <a:tc>
+                  <a:txBody>
+                    <a:bodyPr wrap="square">
+                      <a:normAutofit/>
+                    </a:bodyPr>
+                    <a:lstStyle/>
+                    <a:p>
+                      <a:pPr algn="ctr">
+                        <a:lnSpc>
+                          <a:spcPct val="86000"/>
+                        </a:lnSpc>
+                        <a:spcBef>
+                          <a:spcPts val="0"/>
+                        </a:spcBef>
+                        <a:spcAft>
+                          <a:spcPts val="0"/>
+                        </a:spcAft>
+                      </a:pPr>
+                      <a:r>
+                        <a:rPr sz="535" b="1">
+                          <a:solidFill>
+                            <a:srgbClr val="0F5766"/>
+                          </a:solidFill>
+                          <a:latin typeface="Microsoft YaHei UI"/>
+                        </a:rPr>
+                        <a:t>蔚蓝智能</a:t>
+                      </a:r>
+                    </a:p>
+                    <a:p>
+                      <a:pPr algn="ctr">
+                        <a:lnSpc>
+                          <a:spcPct val="86000"/>
+                        </a:lnSpc>
+                        <a:spcBef>
+                          <a:spcPts val="0"/>
+                        </a:spcBef>
+                        <a:spcAft>
+                          <a:spcPts val="0"/>
+                        </a:spcAft>
+                      </a:pPr>
+                      <a:r>
+                        <a:rPr sz="535" b="1">
+                          <a:solidFill>
+                            <a:srgbClr val="0F5766"/>
+                          </a:solidFill>
+                          <a:latin typeface="Microsoft YaHei UI"/>
+                        </a:rPr>
+                        <a:t>BabyAlpha</a:t>
+                      </a:r>
+                    </a:p>
+                  </a:txBody>
+                  <a:tcPr anchor="ctr" marL="32004" marR="32004" marT="10972" marB="10972">
+                    <a:solidFill>
+                      <a:srgbClr val="EEF3F7"/>
+                    </a:solidFill>
+                    <a:lnL w="3000">
+                      <a:solidFill>
+                        <a:srgbClr val="C1CDD9"/>
+                      </a:solidFill>
+                    </a:lnL>
+                    <a:lnR w="3000">
+                      <a:solidFill>
+                        <a:srgbClr val="C1CDD9"/>
+                      </a:solidFill>
+                    </a:lnR>
+                    <a:lnT w="3000">
+                      <a:solidFill>
+                        <a:srgbClr val="C1CDD9"/>
+                      </a:solidFill>
+                    </a:lnT>
+                    <a:lnB w="3000">
+                      <a:solidFill>
+                        <a:srgbClr val="C1CDD9"/>
+                      </a:solidFill>
+                    </a:lnB>
+                  </a:tcPr>
+                </a:tc>
+                <a:tc>
+                  <a:txBody>
+                    <a:bodyPr wrap="square">
+                      <a:normAutofit/>
+                    </a:bodyPr>
+                    <a:lstStyle/>
+                    <a:p>
+                      <a:pPr algn="l">
+                        <a:lnSpc>
+                          <a:spcPct val="86000"/>
+                        </a:lnSpc>
+                        <a:spcBef>
+                          <a:spcPts val="0"/>
+                        </a:spcBef>
+                        <a:spcAft>
+                          <a:spcPts val="0"/>
+                        </a:spcAft>
+                      </a:pPr>
+                      <a:r>
+                        <a:rPr sz="535" b="0">
+                          <a:solidFill>
+                            <a:srgbClr val="121B26"/>
+                          </a:solidFill>
+                          <a:latin typeface="Microsoft YaHei UI"/>
+                        </a:rPr>
+                        <a:t>A3本地交互大模型</a:t>
+                      </a:r>
+                    </a:p>
+                  </a:txBody>
+                  <a:tcPr anchor="ctr" marL="32004" marR="32004" marT="10972" marB="10972">
+                    <a:solidFill>
+                      <a:srgbClr val="EEF3F7"/>
+                    </a:solidFill>
+                    <a:lnL w="3000">
+                      <a:solidFill>
+                        <a:srgbClr val="C1CDD9"/>
+                      </a:solidFill>
+                    </a:lnL>
+                    <a:lnR w="3000">
+                      <a:solidFill>
+                        <a:srgbClr val="C1CDD9"/>
+                      </a:solidFill>
+                    </a:lnR>
+                    <a:lnT w="3000">
+                      <a:solidFill>
+                        <a:srgbClr val="C1CDD9"/>
+                      </a:solidFill>
+                    </a:lnT>
+                    <a:lnB w="3000">
+                      <a:solidFill>
+                        <a:srgbClr val="C1CDD9"/>
+                      </a:solidFill>
+                    </a:lnB>
+                  </a:tcPr>
+                </a:tc>
+                <a:tc>
+                  <a:txBody>
+                    <a:bodyPr wrap="square">
+                      <a:normAutofit/>
+                    </a:bodyPr>
+                    <a:lstStyle/>
+                    <a:p>
+                      <a:pPr algn="l">
+                        <a:lnSpc>
+                          <a:spcPct val="86000"/>
+                        </a:lnSpc>
+                        <a:spcBef>
+                          <a:spcPts val="0"/>
+                        </a:spcBef>
+                        <a:spcAft>
+                          <a:spcPts val="0"/>
+                        </a:spcAft>
+                      </a:pPr>
+                      <a:r>
+                        <a:rPr sz="535" b="0">
+                          <a:solidFill>
+                            <a:srgbClr val="121B26"/>
+                          </a:solidFill>
+                          <a:latin typeface="Microsoft YaHei UI"/>
+                        </a:rPr>
+                        <a:t>本地LLM</a:t>
+                      </a:r>
+                    </a:p>
+                    <a:p>
+                      <a:pPr algn="l">
+                        <a:lnSpc>
+                          <a:spcPct val="86000"/>
+                        </a:lnSpc>
+                        <a:spcBef>
+                          <a:spcPts val="0"/>
+                        </a:spcBef>
+                        <a:spcAft>
+                          <a:spcPts val="0"/>
+                        </a:spcAft>
+                      </a:pPr>
+                      <a:r>
+                        <a:rPr sz="535" b="0">
+                          <a:solidFill>
+                            <a:srgbClr val="121B26"/>
+                          </a:solidFill>
+                          <a:latin typeface="Microsoft YaHei UI"/>
+                        </a:rPr>
+                        <a:t>环境识别/对话</a:t>
+                      </a:r>
+                    </a:p>
+                  </a:txBody>
+                  <a:tcPr anchor="ctr" marL="32004" marR="32004" marT="10972" marB="10972">
+                    <a:solidFill>
+                      <a:srgbClr val="EEF3F7"/>
+                    </a:solidFill>
+                    <a:lnL w="3000">
+                      <a:solidFill>
+                        <a:srgbClr val="C1CDD9"/>
+                      </a:solidFill>
+                    </a:lnL>
+                    <a:lnR w="3000">
+                      <a:solidFill>
+                        <a:srgbClr val="C1CDD9"/>
+                      </a:solidFill>
+                    </a:lnR>
+                    <a:lnT w="3000">
+                      <a:solidFill>
+                        <a:srgbClr val="C1CDD9"/>
+                      </a:solidFill>
+                    </a:lnT>
+                    <a:lnB w="3000">
+                      <a:solidFill>
+                        <a:srgbClr val="C1CDD9"/>
+                      </a:solidFill>
+                    </a:lnB>
+                  </a:tcPr>
+                </a:tc>
+                <a:tc>
+                  <a:txBody>
+                    <a:bodyPr wrap="square">
+                      <a:normAutofit/>
+                    </a:bodyPr>
+                    <a:lstStyle/>
+                    <a:p>
+                      <a:pPr algn="l">
+                        <a:lnSpc>
+                          <a:spcPct val="86000"/>
+                        </a:lnSpc>
+                        <a:spcBef>
+                          <a:spcPts val="0"/>
+                        </a:spcBef>
+                        <a:spcAft>
+                          <a:spcPts val="0"/>
+                        </a:spcAft>
+                      </a:pPr>
+                      <a:r>
+                        <a:rPr sz="515" b="0">
+                          <a:solidFill>
+                            <a:srgbClr val="121B26"/>
+                          </a:solidFill>
+                          <a:latin typeface="Microsoft YaHei UI"/>
+                        </a:rPr>
+                        <a:t>7B</a:t>
+                      </a:r>
+                    </a:p>
+                  </a:txBody>
+                  <a:tcPr anchor="ctr" marL="32004" marR="32004" marT="10972" marB="10972">
+                    <a:solidFill>
+                      <a:srgbClr val="EEF3F7"/>
+                    </a:solidFill>
+                    <a:lnL w="3000">
+                      <a:solidFill>
+                        <a:srgbClr val="C1CDD9"/>
+                      </a:solidFill>
+                    </a:lnL>
+                    <a:lnR w="3000">
+                      <a:solidFill>
+                        <a:srgbClr val="C1CDD9"/>
+                      </a:solidFill>
+                    </a:lnR>
+                    <a:lnT w="3000">
+                      <a:solidFill>
+                        <a:srgbClr val="C1CDD9"/>
+                      </a:solidFill>
+                    </a:lnT>
+                    <a:lnB w="3000">
+                      <a:solidFill>
+                        <a:srgbClr val="C1CDD9"/>
+                      </a:solidFill>
+                    </a:lnB>
+                  </a:tcPr>
+                </a:tc>
+                <a:tc>
+                  <a:txBody>
+                    <a:bodyPr wrap="square">
+                      <a:normAutofit/>
+                    </a:bodyPr>
+                    <a:lstStyle/>
+                    <a:p>
+                      <a:pPr algn="l">
+                        <a:lnSpc>
+                          <a:spcPct val="86000"/>
+                        </a:lnSpc>
+                        <a:spcBef>
+                          <a:spcPts val="0"/>
+                        </a:spcBef>
+                        <a:spcAft>
+                          <a:spcPts val="0"/>
+                        </a:spcAft>
+                      </a:pPr>
+                      <a:r>
+                        <a:rPr sz="515" b="0">
+                          <a:solidFill>
+                            <a:srgbClr val="121B26"/>
+                          </a:solidFill>
+                          <a:latin typeface="Microsoft YaHei UI"/>
+                        </a:rPr>
+                        <a:t>本地端侧运行；</a:t>
+                      </a:r>
+                    </a:p>
+                    <a:p>
+                      <a:pPr algn="l">
+                        <a:lnSpc>
+                          <a:spcPct val="86000"/>
+                        </a:lnSpc>
+                        <a:spcBef>
+                          <a:spcPts val="0"/>
+                        </a:spcBef>
+                        <a:spcAft>
+                          <a:spcPts val="0"/>
+                        </a:spcAft>
+                      </a:pPr>
+                      <a:r>
+                        <a:rPr sz="515" b="0">
+                          <a:solidFill>
+                            <a:srgbClr val="121B26"/>
+                          </a:solidFill>
+                          <a:latin typeface="Microsoft YaHei UI"/>
+                        </a:rPr>
+                        <a:t>芯片未公开</a:t>
+                      </a:r>
+                    </a:p>
+                  </a:txBody>
+                  <a:tcPr anchor="ctr" marL="32004" marR="32004" marT="10972" marB="10972">
+                    <a:solidFill>
+                      <a:srgbClr val="EEF3F7"/>
+                    </a:solidFill>
+                    <a:lnL w="3000">
+                      <a:solidFill>
+                        <a:srgbClr val="C1CDD9"/>
+                      </a:solidFill>
+                    </a:lnL>
+                    <a:lnR w="3000">
+                      <a:solidFill>
+                        <a:srgbClr val="C1CDD9"/>
+                      </a:solidFill>
+                    </a:lnR>
+                    <a:lnT w="3000">
+                      <a:solidFill>
+                        <a:srgbClr val="C1CDD9"/>
+                      </a:solidFill>
+                    </a:lnT>
+                    <a:lnB w="3000">
+                      <a:solidFill>
+                        <a:srgbClr val="C1CDD9"/>
+                      </a:solidFill>
+                    </a:lnB>
+                  </a:tcPr>
+                </a:tc>
+                <a:tc>
+                  <a:txBody>
+                    <a:bodyPr wrap="square">
+                      <a:normAutofit/>
+                    </a:bodyPr>
+                    <a:lstStyle/>
+                    <a:p>
+                      <a:pPr algn="l">
+                        <a:lnSpc>
+                          <a:spcPct val="86000"/>
+                        </a:lnSpc>
+                        <a:spcBef>
+                          <a:spcPts val="0"/>
+                        </a:spcBef>
+                        <a:spcAft>
+                          <a:spcPts val="0"/>
+                        </a:spcAft>
+                      </a:pPr>
+                      <a:r>
+                        <a:rPr sz="515" b="0">
+                          <a:solidFill>
+                            <a:srgbClr val="121B26"/>
+                          </a:solidFill>
+                          <a:latin typeface="Microsoft YaHei UI"/>
+                        </a:rPr>
+                        <a:t/>
+                      </a:r>
+                    </a:p>
+                  </a:txBody>
+                  <a:tcPr anchor="ctr" marL="32004" marR="32004" marT="10972" marB="10972">
+                    <a:solidFill>
+                      <a:srgbClr val="EEF3F7"/>
+                    </a:solidFill>
+                    <a:lnL w="3000">
+                      <a:solidFill>
+                        <a:srgbClr val="C1CDD9"/>
+                      </a:solidFill>
+                    </a:lnL>
+                    <a:lnR w="3000">
+                      <a:solidFill>
+                        <a:srgbClr val="C1CDD9"/>
+                      </a:solidFill>
+                    </a:lnR>
+                    <a:lnT w="3000">
+                      <a:solidFill>
+                        <a:srgbClr val="C1CDD9"/>
+                      </a:solidFill>
+                    </a:lnT>
+                    <a:lnB w="3000">
+                      <a:solidFill>
+                        <a:srgbClr val="C1CDD9"/>
+                      </a:solidFill>
+                    </a:lnB>
+                  </a:tcPr>
+                </a:tc>
+              </a:tr>
+              <a:tr h="409956">
+                <a:tc>
+                  <a:txBody>
+                    <a:bodyPr wrap="square">
+                      <a:normAutofit/>
+                    </a:bodyPr>
+                    <a:lstStyle/>
+                    <a:p>
+                      <a:pPr algn="ctr">
+                        <a:lnSpc>
+                          <a:spcPct val="86000"/>
+                        </a:lnSpc>
+                        <a:spcBef>
+                          <a:spcPts val="0"/>
+                        </a:spcBef>
+                        <a:spcAft>
+                          <a:spcPts val="0"/>
+                        </a:spcAft>
+                      </a:pPr>
+                      <a:r>
+                        <a:rPr sz="535" b="1">
+                          <a:solidFill>
+                            <a:srgbClr val="0F5766"/>
+                          </a:solidFill>
+                          <a:latin typeface="Microsoft YaHei UI"/>
+                        </a:rPr>
+                        <a:t>地瓜+它石</a:t>
+                      </a:r>
+                    </a:p>
+                    <a:p>
+                      <a:pPr algn="ctr">
+                        <a:lnSpc>
+                          <a:spcPct val="86000"/>
+                        </a:lnSpc>
+                        <a:spcBef>
+                          <a:spcPts val="0"/>
+                        </a:spcBef>
+                        <a:spcAft>
+                          <a:spcPts val="0"/>
+                        </a:spcAft>
+                      </a:pPr>
+                      <a:r>
+                        <a:rPr sz="535" b="1">
+                          <a:solidFill>
+                            <a:srgbClr val="0F5766"/>
+                          </a:solidFill>
+                          <a:latin typeface="Microsoft YaHei UI"/>
+                        </a:rPr>
+                        <a:t>D-Robotics</a:t>
+                      </a:r>
+                    </a:p>
+                  </a:txBody>
+                  <a:tcPr anchor="ctr" marL="32004" marR="32004" marT="10972" marB="10972">
+                    <a:solidFill>
+                      <a:srgbClr val="FFFFFF"/>
+                    </a:solidFill>
+                    <a:lnL w="3000">
+                      <a:solidFill>
+                        <a:srgbClr val="C1CDD9"/>
+                      </a:solidFill>
+                    </a:lnL>
+                    <a:lnR w="3000">
+                      <a:solidFill>
+                        <a:srgbClr val="C1CDD9"/>
+                      </a:solidFill>
+                    </a:lnR>
+                    <a:lnT w="3000">
+                      <a:solidFill>
+                        <a:srgbClr val="C1CDD9"/>
+                      </a:solidFill>
+                    </a:lnT>
+                    <a:lnB w="3000">
+                      <a:solidFill>
+                        <a:srgbClr val="C1CDD9"/>
+                      </a:solidFill>
+                    </a:lnB>
+                  </a:tcPr>
+                </a:tc>
+                <a:tc>
+                  <a:txBody>
+                    <a:bodyPr wrap="square">
+                      <a:normAutofit/>
+                    </a:bodyPr>
+                    <a:lstStyle/>
+                    <a:p>
+                      <a:pPr algn="l">
+                        <a:lnSpc>
+                          <a:spcPct val="86000"/>
+                        </a:lnSpc>
+                        <a:spcBef>
+                          <a:spcPts val="0"/>
+                        </a:spcBef>
+                        <a:spcAft>
+                          <a:spcPts val="0"/>
+                        </a:spcAft>
+                      </a:pPr>
+                      <a:r>
+                        <a:rPr sz="535" b="0">
+                          <a:solidFill>
+                            <a:srgbClr val="121B26"/>
+                          </a:solidFill>
+                          <a:latin typeface="Microsoft YaHei UI"/>
+                        </a:rPr>
+                        <a:t>S600适配3B</a:t>
+                      </a:r>
+                    </a:p>
+                    <a:p>
+                      <a:pPr algn="l">
+                        <a:lnSpc>
+                          <a:spcPct val="86000"/>
+                        </a:lnSpc>
+                        <a:spcBef>
+                          <a:spcPts val="0"/>
+                        </a:spcBef>
+                        <a:spcAft>
+                          <a:spcPts val="0"/>
+                        </a:spcAft>
+                      </a:pPr>
+                      <a:r>
+                        <a:rPr sz="535" b="0">
+                          <a:solidFill>
+                            <a:srgbClr val="121B26"/>
+                          </a:solidFill>
+                          <a:latin typeface="Microsoft YaHei UI"/>
+                        </a:rPr>
+                        <a:t>具身大模型</a:t>
+                      </a:r>
+                    </a:p>
+                  </a:txBody>
+                  <a:tcPr anchor="ctr" marL="32004" marR="32004" marT="10972" marB="10972">
+                    <a:solidFill>
+                      <a:srgbClr val="FFFFFF"/>
+                    </a:solidFill>
+                    <a:lnL w="3000">
+                      <a:solidFill>
+                        <a:srgbClr val="C1CDD9"/>
+                      </a:solidFill>
+                    </a:lnL>
+                    <a:lnR w="3000">
+                      <a:solidFill>
+                        <a:srgbClr val="C1CDD9"/>
+                      </a:solidFill>
+                    </a:lnR>
+                    <a:lnT w="3000">
+                      <a:solidFill>
+                        <a:srgbClr val="C1CDD9"/>
+                      </a:solidFill>
+                    </a:lnT>
+                    <a:lnB w="3000">
+                      <a:solidFill>
+                        <a:srgbClr val="C1CDD9"/>
+                      </a:solidFill>
+                    </a:lnB>
+                  </a:tcPr>
+                </a:tc>
+                <a:tc>
+                  <a:txBody>
+                    <a:bodyPr wrap="square">
+                      <a:normAutofit/>
+                    </a:bodyPr>
+                    <a:lstStyle/>
+                    <a:p>
+                      <a:pPr algn="l">
+                        <a:lnSpc>
+                          <a:spcPct val="86000"/>
+                        </a:lnSpc>
+                        <a:spcBef>
+                          <a:spcPts val="0"/>
+                        </a:spcBef>
+                        <a:spcAft>
+                          <a:spcPts val="0"/>
+                        </a:spcAft>
+                      </a:pPr>
+                      <a:r>
+                        <a:rPr sz="535" b="0">
+                          <a:solidFill>
+                            <a:srgbClr val="121B26"/>
+                          </a:solidFill>
+                          <a:latin typeface="Microsoft YaHei UI"/>
+                        </a:rPr>
+                        <a:t>端侧具身模型适配</a:t>
+                      </a:r>
+                    </a:p>
+                    <a:p>
+                      <a:pPr algn="l">
+                        <a:lnSpc>
+                          <a:spcPct val="86000"/>
+                        </a:lnSpc>
+                        <a:spcBef>
+                          <a:spcPts val="0"/>
+                        </a:spcBef>
+                        <a:spcAft>
+                          <a:spcPts val="0"/>
+                        </a:spcAft>
+                      </a:pPr>
+                      <a:r>
+                        <a:rPr sz="535" b="0">
+                          <a:solidFill>
+                            <a:srgbClr val="121B26"/>
+                          </a:solidFill>
+                          <a:latin typeface="Microsoft YaHei UI"/>
+                        </a:rPr>
+                        <a:t>算力平台</a:t>
+                      </a:r>
+                    </a:p>
+                  </a:txBody>
+                  <a:tcPr anchor="ctr" marL="32004" marR="32004" marT="10972" marB="10972">
+                    <a:solidFill>
+                      <a:srgbClr val="FFFFFF"/>
+                    </a:solidFill>
+                    <a:lnL w="3000">
+                      <a:solidFill>
+                        <a:srgbClr val="C1CDD9"/>
+                      </a:solidFill>
+                    </a:lnL>
+                    <a:lnR w="3000">
+                      <a:solidFill>
+                        <a:srgbClr val="C1CDD9"/>
+                      </a:solidFill>
+                    </a:lnR>
+                    <a:lnT w="3000">
+                      <a:solidFill>
+                        <a:srgbClr val="C1CDD9"/>
+                      </a:solidFill>
+                    </a:lnT>
+                    <a:lnB w="3000">
+                      <a:solidFill>
+                        <a:srgbClr val="C1CDD9"/>
+                      </a:solidFill>
+                    </a:lnB>
+                  </a:tcPr>
+                </a:tc>
+                <a:tc>
+                  <a:txBody>
+                    <a:bodyPr wrap="square">
+                      <a:normAutofit/>
+                    </a:bodyPr>
+                    <a:lstStyle/>
+                    <a:p>
+                      <a:pPr algn="l">
+                        <a:lnSpc>
+                          <a:spcPct val="86000"/>
+                        </a:lnSpc>
+                        <a:spcBef>
+                          <a:spcPts val="0"/>
+                        </a:spcBef>
+                        <a:spcAft>
+                          <a:spcPts val="0"/>
+                        </a:spcAft>
+                      </a:pPr>
+                      <a:r>
+                        <a:rPr sz="515" b="0">
+                          <a:solidFill>
+                            <a:srgbClr val="121B26"/>
+                          </a:solidFill>
+                          <a:latin typeface="Microsoft YaHei UI"/>
+                        </a:rPr>
+                        <a:t>3B模型</a:t>
+                      </a:r>
+                    </a:p>
+                    <a:p>
+                      <a:pPr algn="l">
+                        <a:lnSpc>
+                          <a:spcPct val="86000"/>
+                        </a:lnSpc>
+                        <a:spcBef>
+                          <a:spcPts val="0"/>
+                        </a:spcBef>
+                        <a:spcAft>
+                          <a:spcPts val="0"/>
+                        </a:spcAft>
+                      </a:pPr>
+                      <a:r>
+                        <a:rPr sz="515" b="0">
+                          <a:solidFill>
+                            <a:srgbClr val="121B26"/>
+                          </a:solidFill>
+                          <a:latin typeface="Microsoft YaHei UI"/>
+                        </a:rPr>
+                        <a:t>5天真机部署</a:t>
+                      </a:r>
+                    </a:p>
+                  </a:txBody>
+                  <a:tcPr anchor="ctr" marL="32004" marR="32004" marT="10972" marB="10972">
+                    <a:solidFill>
+                      <a:srgbClr val="FFFFFF"/>
+                    </a:solidFill>
+                    <a:lnL w="3000">
+                      <a:solidFill>
+                        <a:srgbClr val="C1CDD9"/>
+                      </a:solidFill>
+                    </a:lnL>
+                    <a:lnR w="3000">
+                      <a:solidFill>
+                        <a:srgbClr val="C1CDD9"/>
+                      </a:solidFill>
+                    </a:lnR>
+                    <a:lnT w="3000">
+                      <a:solidFill>
+                        <a:srgbClr val="C1CDD9"/>
+                      </a:solidFill>
+                    </a:lnT>
+                    <a:lnB w="3000">
+                      <a:solidFill>
+                        <a:srgbClr val="C1CDD9"/>
+                      </a:solidFill>
+                    </a:lnB>
+                  </a:tcPr>
+                </a:tc>
+                <a:tc>
+                  <a:txBody>
+                    <a:bodyPr wrap="square">
+                      <a:normAutofit/>
+                    </a:bodyPr>
+                    <a:lstStyle/>
+                    <a:p>
+                      <a:pPr algn="l">
+                        <a:lnSpc>
+                          <a:spcPct val="86000"/>
+                        </a:lnSpc>
+                        <a:spcBef>
+                          <a:spcPts val="0"/>
+                        </a:spcBef>
+                        <a:spcAft>
+                          <a:spcPts val="0"/>
+                        </a:spcAft>
+                      </a:pPr>
+                      <a:r>
+                        <a:rPr sz="515" b="0">
+                          <a:solidFill>
+                            <a:srgbClr val="121B26"/>
+                          </a:solidFill>
+                          <a:latin typeface="Microsoft YaHei UI"/>
+                        </a:rPr>
+                        <a:t>560TOPS INT8</a:t>
+                      </a:r>
+                    </a:p>
+                    <a:p>
+                      <a:pPr algn="l">
+                        <a:lnSpc>
+                          <a:spcPct val="86000"/>
+                        </a:lnSpc>
+                        <a:spcBef>
+                          <a:spcPts val="0"/>
+                        </a:spcBef>
+                        <a:spcAft>
+                          <a:spcPts val="0"/>
+                        </a:spcAft>
+                      </a:pPr>
+                      <a:r>
+                        <a:rPr sz="515" b="0">
+                          <a:solidFill>
+                            <a:srgbClr val="121B26"/>
+                          </a:solidFill>
+                          <a:latin typeface="Microsoft YaHei UI"/>
+                        </a:rPr>
+                        <a:t>32/64GB LPDDR5</a:t>
+                      </a:r>
+                    </a:p>
+                    <a:p>
+                      <a:pPr algn="l">
+                        <a:lnSpc>
+                          <a:spcPct val="86000"/>
+                        </a:lnSpc>
+                        <a:spcBef>
+                          <a:spcPts val="0"/>
+                        </a:spcBef>
+                        <a:spcAft>
+                          <a:spcPts val="0"/>
+                        </a:spcAft>
+                      </a:pPr>
+                      <a:r>
+                        <a:rPr sz="515" b="0">
+                          <a:solidFill>
+                            <a:srgbClr val="121B26"/>
+                          </a:solidFill>
+                          <a:latin typeface="Microsoft YaHei UI"/>
+                        </a:rPr>
+                        <a:t>204.8GB/s</a:t>
+                      </a:r>
+                    </a:p>
+                  </a:txBody>
+                  <a:tcPr anchor="ctr" marL="32004" marR="32004" marT="10972" marB="10972">
+                    <a:solidFill>
+                      <a:srgbClr val="FFFFFF"/>
+                    </a:solidFill>
+                    <a:lnL w="3000">
+                      <a:solidFill>
+                        <a:srgbClr val="C1CDD9"/>
+                      </a:solidFill>
+                    </a:lnL>
+                    <a:lnR w="3000">
+                      <a:solidFill>
+                        <a:srgbClr val="C1CDD9"/>
+                      </a:solidFill>
+                    </a:lnR>
+                    <a:lnT w="3000">
+                      <a:solidFill>
+                        <a:srgbClr val="C1CDD9"/>
+                      </a:solidFill>
+                    </a:lnT>
+                    <a:lnB w="3000">
+                      <a:solidFill>
+                        <a:srgbClr val="C1CDD9"/>
+                      </a:solidFill>
+                    </a:lnB>
+                  </a:tcPr>
+                </a:tc>
+                <a:tc>
+                  <a:txBody>
+                    <a:bodyPr wrap="square">
+                      <a:normAutofit/>
+                    </a:bodyPr>
+                    <a:lstStyle/>
+                    <a:p>
+                      <a:pPr algn="l">
+                        <a:lnSpc>
+                          <a:spcPct val="86000"/>
+                        </a:lnSpc>
+                        <a:spcBef>
+                          <a:spcPts val="0"/>
+                        </a:spcBef>
+                        <a:spcAft>
+                          <a:spcPts val="0"/>
+                        </a:spcAft>
+                      </a:pPr>
+                      <a:r>
+                        <a:rPr sz="515" b="0">
+                          <a:solidFill>
+                            <a:srgbClr val="121B26"/>
+                          </a:solidFill>
+                          <a:latin typeface="Microsoft YaHei UI"/>
+                        </a:rPr>
+                        <a:t>端侧稳定运行</a:t>
+                      </a:r>
+                    </a:p>
+                    <a:p>
+                      <a:pPr algn="l">
+                        <a:lnSpc>
+                          <a:spcPct val="86000"/>
+                        </a:lnSpc>
+                        <a:spcBef>
+                          <a:spcPts val="0"/>
+                        </a:spcBef>
+                        <a:spcAft>
+                          <a:spcPts val="0"/>
+                        </a:spcAft>
+                      </a:pPr>
+                      <a:r>
+                        <a:rPr sz="515" b="0">
+                          <a:solidFill>
+                            <a:srgbClr val="121B26"/>
+                          </a:solidFill>
+                          <a:latin typeface="Microsoft YaHei UI"/>
+                        </a:rPr>
+                        <a:t>Hz未给出</a:t>
+                      </a:r>
+                    </a:p>
+                  </a:txBody>
+                  <a:tcPr anchor="ctr" marL="32004" marR="32004" marT="10972" marB="10972">
+                    <a:solidFill>
+                      <a:srgbClr val="FFFFFF"/>
+                    </a:solidFill>
+                    <a:lnL w="3000">
+                      <a:solidFill>
+                        <a:srgbClr val="C1CDD9"/>
+                      </a:solidFill>
+                    </a:lnL>
+                    <a:lnR w="3000">
+                      <a:solidFill>
+                        <a:srgbClr val="C1CDD9"/>
+                      </a:solidFill>
+                    </a:lnR>
+                    <a:lnT w="3000">
+                      <a:solidFill>
+                        <a:srgbClr val="C1CDD9"/>
+                      </a:solidFill>
+                    </a:lnT>
+                    <a:lnB w="3000">
+                      <a:solidFill>
+                        <a:srgbClr val="C1CDD9"/>
+                      </a:solidFill>
+                    </a:lnB>
+                  </a:tcPr>
+                </a:tc>
+              </a:tr>
+              <a:tr h="409956">
+                <a:tc>
+                  <a:txBody>
+                    <a:bodyPr wrap="square">
+                      <a:normAutofit/>
+                    </a:bodyPr>
+                    <a:lstStyle/>
+                    <a:p>
+                      <a:pPr algn="ctr">
+                        <a:lnSpc>
+                          <a:spcPct val="86000"/>
+                        </a:lnSpc>
+                        <a:spcBef>
+                          <a:spcPts val="0"/>
+                        </a:spcBef>
+                        <a:spcAft>
+                          <a:spcPts val="0"/>
+                        </a:spcAft>
+                      </a:pPr>
+                      <a:r>
+                        <a:rPr sz="535" b="1">
+                          <a:solidFill>
+                            <a:srgbClr val="0F5766"/>
+                          </a:solidFill>
+                          <a:latin typeface="Microsoft YaHei UI"/>
+                        </a:rPr>
+                        <a:t>MiniCPM</a:t>
+                      </a:r>
+                    </a:p>
+                    <a:p>
+                      <a:pPr algn="ctr">
+                        <a:lnSpc>
+                          <a:spcPct val="86000"/>
+                        </a:lnSpc>
+                        <a:spcBef>
+                          <a:spcPts val="0"/>
+                        </a:spcBef>
+                        <a:spcAft>
+                          <a:spcPts val="0"/>
+                        </a:spcAft>
+                      </a:pPr>
+                      <a:r>
+                        <a:rPr sz="535" b="1">
+                          <a:solidFill>
+                            <a:srgbClr val="0F5766"/>
+                          </a:solidFill>
+                          <a:latin typeface="Microsoft YaHei UI"/>
+                        </a:rPr>
+                        <a:t>Robot</a:t>
+                      </a:r>
+                    </a:p>
+                  </a:txBody>
+                  <a:tcPr anchor="ctr" marL="32004" marR="32004" marT="10972" marB="10972">
+                    <a:solidFill>
+                      <a:srgbClr val="EEF3F7"/>
+                    </a:solidFill>
+                    <a:lnL w="3000">
+                      <a:solidFill>
+                        <a:srgbClr val="C1CDD9"/>
+                      </a:solidFill>
+                    </a:lnL>
+                    <a:lnR w="3000">
+                      <a:solidFill>
+                        <a:srgbClr val="C1CDD9"/>
+                      </a:solidFill>
+                    </a:lnR>
+                    <a:lnT w="3000">
+                      <a:solidFill>
+                        <a:srgbClr val="C1CDD9"/>
+                      </a:solidFill>
+                    </a:lnT>
+                    <a:lnB w="3000">
+                      <a:solidFill>
+                        <a:srgbClr val="C1CDD9"/>
+                      </a:solidFill>
+                    </a:lnB>
+                  </a:tcPr>
+                </a:tc>
+                <a:tc>
+                  <a:txBody>
+                    <a:bodyPr wrap="square">
+                      <a:normAutofit/>
+                    </a:bodyPr>
+                    <a:lstStyle/>
+                    <a:p>
+                      <a:pPr algn="l">
+                        <a:lnSpc>
+                          <a:spcPct val="86000"/>
+                        </a:lnSpc>
+                        <a:spcBef>
+                          <a:spcPts val="0"/>
+                        </a:spcBef>
+                        <a:spcAft>
+                          <a:spcPts val="0"/>
+                        </a:spcAft>
+                      </a:pPr>
+                      <a:r>
+                        <a:rPr sz="535" b="0">
+                          <a:solidFill>
+                            <a:srgbClr val="121B26"/>
+                          </a:solidFill>
+                          <a:latin typeface="Microsoft YaHei UI"/>
+                        </a:rPr>
+                        <a:t>RobotManip</a:t>
+                      </a:r>
+                    </a:p>
+                    <a:p>
+                      <a:pPr algn="l">
+                        <a:lnSpc>
+                          <a:spcPct val="86000"/>
+                        </a:lnSpc>
+                        <a:spcBef>
+                          <a:spcPts val="0"/>
+                        </a:spcBef>
+                        <a:spcAft>
+                          <a:spcPts val="0"/>
+                        </a:spcAft>
+                      </a:pPr>
+                      <a:r>
+                        <a:rPr sz="535" b="0">
+                          <a:solidFill>
+                            <a:srgbClr val="121B26"/>
+                          </a:solidFill>
+                          <a:latin typeface="Microsoft YaHei UI"/>
+                        </a:rPr>
+                        <a:t>RobotTrack</a:t>
+                      </a:r>
+                    </a:p>
+                  </a:txBody>
+                  <a:tcPr anchor="ctr" marL="32004" marR="32004" marT="10972" marB="10972">
+                    <a:solidFill>
+                      <a:srgbClr val="EEF3F7"/>
+                    </a:solidFill>
+                    <a:lnL w="3000">
+                      <a:solidFill>
+                        <a:srgbClr val="C1CDD9"/>
+                      </a:solidFill>
+                    </a:lnL>
+                    <a:lnR w="3000">
+                      <a:solidFill>
+                        <a:srgbClr val="C1CDD9"/>
+                      </a:solidFill>
+                    </a:lnR>
+                    <a:lnT w="3000">
+                      <a:solidFill>
+                        <a:srgbClr val="C1CDD9"/>
+                      </a:solidFill>
+                    </a:lnT>
+                    <a:lnB w="3000">
+                      <a:solidFill>
+                        <a:srgbClr val="C1CDD9"/>
+                      </a:solidFill>
+                    </a:lnB>
+                  </a:tcPr>
+                </a:tc>
+                <a:tc>
+                  <a:txBody>
+                    <a:bodyPr wrap="square">
+                      <a:normAutofit/>
+                    </a:bodyPr>
+                    <a:lstStyle/>
+                    <a:p>
+                      <a:pPr algn="l">
+                        <a:lnSpc>
+                          <a:spcPct val="86000"/>
+                        </a:lnSpc>
+                        <a:spcBef>
+                          <a:spcPts val="0"/>
+                        </a:spcBef>
+                        <a:spcAft>
+                          <a:spcPts val="0"/>
+                        </a:spcAft>
+                      </a:pPr>
+                      <a:r>
+                        <a:rPr sz="535" b="0">
+                          <a:solidFill>
+                            <a:srgbClr val="121B26"/>
+                          </a:solidFill>
+                          <a:latin typeface="Microsoft YaHei UI"/>
+                        </a:rPr>
+                        <a:t>操作VLA</a:t>
+                      </a:r>
+                    </a:p>
+                    <a:p>
+                      <a:pPr algn="l">
+                        <a:lnSpc>
+                          <a:spcPct val="86000"/>
+                        </a:lnSpc>
+                        <a:spcBef>
+                          <a:spcPts val="0"/>
+                        </a:spcBef>
+                        <a:spcAft>
+                          <a:spcPts val="0"/>
+                        </a:spcAft>
+                      </a:pPr>
+                      <a:r>
+                        <a:rPr sz="535" b="0">
+                          <a:solidFill>
+                            <a:srgbClr val="121B26"/>
+                          </a:solidFill>
+                          <a:latin typeface="Microsoft YaHei UI"/>
+                        </a:rPr>
+                        <a:t>目标跟踪VLA</a:t>
+                      </a:r>
+                    </a:p>
+                  </a:txBody>
+                  <a:tcPr anchor="ctr" marL="32004" marR="32004" marT="10972" marB="10972">
+                    <a:solidFill>
+                      <a:srgbClr val="EEF3F7"/>
+                    </a:solidFill>
+                    <a:lnL w="3000">
+                      <a:solidFill>
+                        <a:srgbClr val="C1CDD9"/>
+                      </a:solidFill>
+                    </a:lnL>
+                    <a:lnR w="3000">
+                      <a:solidFill>
+                        <a:srgbClr val="C1CDD9"/>
+                      </a:solidFill>
+                    </a:lnR>
+                    <a:lnT w="3000">
+                      <a:solidFill>
+                        <a:srgbClr val="C1CDD9"/>
+                      </a:solidFill>
+                    </a:lnT>
+                    <a:lnB w="3000">
+                      <a:solidFill>
+                        <a:srgbClr val="C1CDD9"/>
+                      </a:solidFill>
+                    </a:lnB>
+                  </a:tcPr>
+                </a:tc>
+                <a:tc>
+                  <a:txBody>
+                    <a:bodyPr wrap="square">
+                      <a:normAutofit/>
+                    </a:bodyPr>
+                    <a:lstStyle/>
+                    <a:p>
+                      <a:pPr algn="l">
+                        <a:lnSpc>
+                          <a:spcPct val="86000"/>
+                        </a:lnSpc>
+                        <a:spcBef>
+                          <a:spcPts val="0"/>
+                        </a:spcBef>
+                        <a:spcAft>
+                          <a:spcPts val="0"/>
+                        </a:spcAft>
+                      </a:pPr>
+                      <a:r>
+                        <a:rPr sz="484" b="0">
+                          <a:solidFill>
+                            <a:srgbClr val="121B26"/>
+                          </a:solidFill>
+                          <a:latin typeface="Microsoft YaHei UI"/>
+                        </a:rPr>
+                        <a:t>Manip 1.5B</a:t>
+                      </a:r>
+                    </a:p>
+                    <a:p>
+                      <a:pPr algn="l">
+                        <a:lnSpc>
+                          <a:spcPct val="86000"/>
+                        </a:lnSpc>
+                        <a:spcBef>
+                          <a:spcPts val="0"/>
+                        </a:spcBef>
+                        <a:spcAft>
+                          <a:spcPts val="0"/>
+                        </a:spcAft>
+                      </a:pPr>
+                      <a:r>
+                        <a:rPr sz="484" b="0">
+                          <a:solidFill>
+                            <a:srgbClr val="121B26"/>
+                          </a:solidFill>
+                          <a:latin typeface="Microsoft YaHei UI"/>
+                        </a:rPr>
+                        <a:t>Track 0.9B</a:t>
+                      </a:r>
+                    </a:p>
+                    <a:p>
+                      <a:pPr algn="l">
+                        <a:lnSpc>
+                          <a:spcPct val="86000"/>
+                        </a:lnSpc>
+                        <a:spcBef>
+                          <a:spcPts val="0"/>
+                        </a:spcBef>
+                        <a:spcAft>
+                          <a:spcPts val="0"/>
+                        </a:spcAft>
+                      </a:pPr>
+                      <a:r>
+                        <a:rPr sz="484" b="0">
+                          <a:solidFill>
+                            <a:srgbClr val="121B26"/>
+                          </a:solidFill>
+                          <a:latin typeface="Microsoft YaHei UI"/>
+                        </a:rPr>
+                        <a:t>125→3.3 TFLOPs/步</a:t>
+                      </a:r>
+                    </a:p>
+                  </a:txBody>
+                  <a:tcPr anchor="ctr" marL="32004" marR="32004" marT="10972" marB="10972">
+                    <a:solidFill>
+                      <a:srgbClr val="EEF3F7"/>
+                    </a:solidFill>
+                    <a:lnL w="3000">
+                      <a:solidFill>
+                        <a:srgbClr val="C1CDD9"/>
+                      </a:solidFill>
+                    </a:lnL>
+                    <a:lnR w="3000">
+                      <a:solidFill>
+                        <a:srgbClr val="C1CDD9"/>
+                      </a:solidFill>
+                    </a:lnR>
+                    <a:lnT w="3000">
+                      <a:solidFill>
+                        <a:srgbClr val="C1CDD9"/>
+                      </a:solidFill>
+                    </a:lnT>
+                    <a:lnB w="3000">
+                      <a:solidFill>
+                        <a:srgbClr val="C1CDD9"/>
+                      </a:solidFill>
+                    </a:lnB>
+                  </a:tcPr>
+                </a:tc>
+                <a:tc>
+                  <a:txBody>
+                    <a:bodyPr wrap="square">
+                      <a:normAutofit/>
+                    </a:bodyPr>
+                    <a:lstStyle/>
+                    <a:p>
+                      <a:pPr algn="l">
+                        <a:lnSpc>
+                          <a:spcPct val="86000"/>
+                        </a:lnSpc>
+                        <a:spcBef>
+                          <a:spcPts val="0"/>
+                        </a:spcBef>
+                        <a:spcAft>
+                          <a:spcPts val="0"/>
+                        </a:spcAft>
+                      </a:pPr>
+                      <a:r>
+                        <a:rPr sz="484" b="0">
+                          <a:solidFill>
+                            <a:srgbClr val="121B26"/>
+                          </a:solidFill>
+                          <a:latin typeface="Microsoft YaHei UI"/>
+                        </a:rPr>
+                        <a:t>H100 BF16</a:t>
+                      </a:r>
+                    </a:p>
+                    <a:p>
+                      <a:pPr algn="l">
+                        <a:lnSpc>
+                          <a:spcPct val="86000"/>
+                        </a:lnSpc>
+                        <a:spcBef>
+                          <a:spcPts val="0"/>
+                        </a:spcBef>
+                        <a:spcAft>
+                          <a:spcPts val="0"/>
+                        </a:spcAft>
+                      </a:pPr>
+                      <a:r>
+                        <a:rPr sz="484" b="0">
+                          <a:solidFill>
+                            <a:srgbClr val="121B26"/>
+                          </a:solidFill>
+                          <a:latin typeface="Microsoft YaHei UI"/>
+                        </a:rPr>
+                        <a:t>H20优化</a:t>
+                      </a:r>
+                    </a:p>
+                    <a:p>
+                      <a:pPr algn="l">
+                        <a:lnSpc>
+                          <a:spcPct val="86000"/>
+                        </a:lnSpc>
+                        <a:spcBef>
+                          <a:spcPts val="0"/>
+                        </a:spcBef>
+                        <a:spcAft>
+                          <a:spcPts val="0"/>
+                        </a:spcAft>
+                      </a:pPr>
+                      <a:r>
+                        <a:rPr sz="484" b="0">
+                          <a:solidFill>
+                            <a:srgbClr val="121B26"/>
+                          </a:solidFill>
+                          <a:latin typeface="Microsoft YaHei UI"/>
+                        </a:rPr>
+                        <a:t>Jetson Orin NX 16GB</a:t>
+                      </a:r>
+                    </a:p>
+                  </a:txBody>
+                  <a:tcPr anchor="ctr" marL="32004" marR="32004" marT="10972" marB="10972">
+                    <a:solidFill>
+                      <a:srgbClr val="EEF3F7"/>
+                    </a:solidFill>
+                    <a:lnL w="3000">
+                      <a:solidFill>
+                        <a:srgbClr val="C1CDD9"/>
+                      </a:solidFill>
+                    </a:lnL>
+                    <a:lnR w="3000">
+                      <a:solidFill>
+                        <a:srgbClr val="C1CDD9"/>
+                      </a:solidFill>
+                    </a:lnR>
+                    <a:lnT w="3000">
+                      <a:solidFill>
+                        <a:srgbClr val="C1CDD9"/>
+                      </a:solidFill>
+                    </a:lnT>
+                    <a:lnB w="3000">
+                      <a:solidFill>
+                        <a:srgbClr val="C1CDD9"/>
+                      </a:solidFill>
+                    </a:lnB>
+                  </a:tcPr>
+                </a:tc>
+                <a:tc>
+                  <a:txBody>
+                    <a:bodyPr wrap="square">
+                      <a:normAutofit/>
+                    </a:bodyPr>
+                    <a:lstStyle/>
+                    <a:p>
+                      <a:pPr algn="l">
+                        <a:lnSpc>
+                          <a:spcPct val="86000"/>
+                        </a:lnSpc>
+                        <a:spcBef>
+                          <a:spcPts val="0"/>
+                        </a:spcBef>
+                        <a:spcAft>
+                          <a:spcPts val="0"/>
+                        </a:spcAft>
+                      </a:pPr>
+                      <a:r>
+                        <a:rPr sz="484" b="0">
+                          <a:solidFill>
+                            <a:srgbClr val="121B26"/>
+                          </a:solidFill>
+                          <a:latin typeface="Microsoft YaHei UI"/>
+                        </a:rPr>
+                        <a:t>H100 120ms</a:t>
+                      </a:r>
+                    </a:p>
+                    <a:p>
+                      <a:pPr algn="l">
+                        <a:lnSpc>
+                          <a:spcPct val="86000"/>
+                        </a:lnSpc>
+                        <a:spcBef>
+                          <a:spcPts val="0"/>
+                        </a:spcBef>
+                        <a:spcAft>
+                          <a:spcPts val="0"/>
+                        </a:spcAft>
+                      </a:pPr>
+                      <a:r>
+                        <a:rPr sz="484" b="0">
+                          <a:solidFill>
+                            <a:srgbClr val="121B26"/>
+                          </a:solidFill>
+                          <a:latin typeface="Microsoft YaHei UI"/>
+                        </a:rPr>
+                        <a:t>H20 10→37Hz</a:t>
+                      </a:r>
+                    </a:p>
+                    <a:p>
+                      <a:pPr algn="l">
+                        <a:lnSpc>
+                          <a:spcPct val="86000"/>
+                        </a:lnSpc>
+                        <a:spcBef>
+                          <a:spcPts val="0"/>
+                        </a:spcBef>
+                        <a:spcAft>
+                          <a:spcPts val="0"/>
+                        </a:spcAft>
+                      </a:pPr>
+                      <a:r>
+                        <a:rPr sz="484" b="0">
+                          <a:solidFill>
+                            <a:srgbClr val="121B26"/>
+                          </a:solidFill>
+                          <a:latin typeface="Microsoft YaHei UI"/>
+                        </a:rPr>
+                        <a:t>Go2 5+FPS/180ms</a:t>
+                      </a:r>
+                    </a:p>
+                  </a:txBody>
+                  <a:tcPr anchor="ctr" marL="32004" marR="32004" marT="10972" marB="10972">
+                    <a:solidFill>
+                      <a:srgbClr val="EEF3F7"/>
+                    </a:solidFill>
+                    <a:lnL w="3000">
+                      <a:solidFill>
+                        <a:srgbClr val="C1CDD9"/>
+                      </a:solidFill>
+                    </a:lnL>
+                    <a:lnR w="3000">
+                      <a:solidFill>
+                        <a:srgbClr val="C1CDD9"/>
+                      </a:solidFill>
+                    </a:lnR>
+                    <a:lnT w="3000">
+                      <a:solidFill>
+                        <a:srgbClr val="C1CDD9"/>
+                      </a:solidFill>
+                    </a:lnT>
+                    <a:lnB w="3000">
+                      <a:solidFill>
+                        <a:srgbClr val="C1CDD9"/>
+                      </a:solidFill>
                     </a:lnB>
                   </a:tcPr>
                 </a:tc>
@@ -6361,18 +9432,18 @@
         </p:nvSpPr>
         <p:spPr>
           <a:xfrm>
-            <a:off x="310896" y="5422392"/>
-            <a:ext cx="11576304" cy="1152144"/>
+            <a:off x="201168" y="5989320"/>
+            <a:ext cx="11795760" cy="640080"/>
           </a:xfrm>
           <a:prstGeom prst="rect">
             <a:avLst/>
           </a:prstGeom>
           <a:solidFill>
-            <a:srgbClr val="E8EEF3"/>
+            <a:srgbClr val="E7EEF3"/>
           </a:solidFill>
           <a:ln>
             <a:solidFill>
-              <a:srgbClr val="D3DCE4"/>
+              <a:srgbClr val="CDD8E1"/>
             </a:solidFill>
           </a:ln>
         </p:spPr>
@@ -6400,59 +9471,24 @@
       </p:sp>
       <p:sp>
         <p:nvSpPr>
-          <p:cNvPr id="7" name="TextBox 6"/>
-          <p:cNvSpPr txBox="1"/>
-          <p:nvPr/>
-        </p:nvSpPr>
-        <p:spPr>
-          <a:xfrm>
-            <a:off x="493776" y="5532120"/>
-            <a:ext cx="1143000" cy="219456"/>
-          </a:xfrm>
-          <a:prstGeom prst="rect">
-            <a:avLst/>
-          </a:prstGeom>
-          <a:noFill/>
-        </p:spPr>
-        <p:txBody>
-          <a:bodyPr wrap="square">
-            <a:noAutofit/>
-          </a:bodyPr>
-          <a:lstStyle/>
-          <a:p>
-            <a:pPr algn="l"/>
-            <a:r>
-              <a:rPr sz="900" b="1">
-                <a:solidFill>
-                  <a:srgbClr val="0D4B58"/>
-                </a:solidFill>
-                <a:latin typeface="Microsoft YaHei UI"/>
-              </a:rPr>
-              <a:t>核心观点</a:t>
-            </a:r>
-          </a:p>
-        </p:txBody>
-      </p:sp>
-      <p:sp>
-        <p:nvSpPr>
-          <p:cNvPr id="8" name="Oval 7"/>
+          <p:cNvPr id="7" name="Oval 6"/>
           <p:cNvSpPr/>
           <p:nvPr/>
         </p:nvSpPr>
         <p:spPr>
           <a:xfrm>
-            <a:off x="1481328" y="5532120"/>
-            <a:ext cx="256032" cy="256032"/>
+            <a:off x="384048" y="6144768"/>
+            <a:ext cx="228600" cy="228600"/>
           </a:xfrm>
           <a:prstGeom prst="ellipse">
             <a:avLst/>
           </a:prstGeom>
           <a:solidFill>
-            <a:srgbClr val="12697A"/>
+            <a:srgbClr val="0F5766"/>
           </a:solidFill>
           <a:ln>
             <a:solidFill>
-              <a:srgbClr val="12697A"/>
+              <a:srgbClr val="0F5766"/>
             </a:solidFill>
           </a:ln>
         </p:spPr>
@@ -6476,27 +9512,27 @@
           <a:p>
             <a:pPr algn="ctr"/>
             <a:r>
-              <a:rPr sz="520" b="1">
+              <a:rPr sz="610" b="1">
                 <a:solidFill>
                   <a:srgbClr val="FFFFFF"/>
                 </a:solidFill>
                 <a:latin typeface="Arial"/>
               </a:rPr>
-              <a:t>01</a:t>
+              <a:t>1</a:t>
             </a:r>
           </a:p>
         </p:txBody>
       </p:sp>
       <p:sp>
         <p:nvSpPr>
-          <p:cNvPr id="9" name="TextBox 8"/>
+          <p:cNvPr id="8" name="TextBox 7"/>
           <p:cNvSpPr txBox="1"/>
           <p:nvPr/>
         </p:nvSpPr>
         <p:spPr>
           <a:xfrm>
-            <a:off x="1810512" y="5504688"/>
-            <a:ext cx="2212848" cy="658368"/>
+            <a:off x="694944" y="6080760"/>
+            <a:ext cx="5257800" cy="384048"/>
           </a:xfrm>
           <a:prstGeom prst="rect">
             <a:avLst/>
@@ -6509,39 +9545,43 @@
           </a:bodyPr>
           <a:lstStyle/>
           <a:p>
-            <a:pPr algn="l"/>
+            <a:pPr algn="l">
+              <a:spcAft>
+                <a:spcPts val="0"/>
+              </a:spcAft>
+            </a:pPr>
             <a:r>
-              <a:rPr sz="665" b="0">
+              <a:rPr sz="625" b="1">
                 <a:solidFill>
-                  <a:srgbClr val="14202C"/>
+                  <a:srgbClr val="121B26"/>
                 </a:solidFill>
                 <a:latin typeface="Microsoft YaHei UI"/>
               </a:rPr>
-              <a:t>竞争焦点从“模型发布”转向“本体端侧可跑”：700TOPS、32GB显存、50Hz闭环成为关键锚点。</a:t>
+              <a:t>有硬数据的“大脑”样本仍很少：蚂蚁灵波、MiniCPM、优必选、智元/星海图端侧算力、地瓜S600最适合上台讲量化对比。</a:t>
             </a:r>
           </a:p>
         </p:txBody>
       </p:sp>
       <p:sp>
         <p:nvSpPr>
-          <p:cNvPr id="10" name="Oval 9"/>
+          <p:cNvPr id="9" name="Oval 8"/>
           <p:cNvSpPr/>
           <p:nvPr/>
         </p:nvSpPr>
         <p:spPr>
           <a:xfrm>
-            <a:off x="4096512" y="5532120"/>
-            <a:ext cx="256032" cy="256032"/>
+            <a:off x="6190488" y="6144768"/>
+            <a:ext cx="228600" cy="228600"/>
           </a:xfrm>
           <a:prstGeom prst="ellipse">
             <a:avLst/>
           </a:prstGeom>
           <a:solidFill>
-            <a:srgbClr val="12697A"/>
+            <a:srgbClr val="C75B26"/>
           </a:solidFill>
           <a:ln>
             <a:solidFill>
-              <a:srgbClr val="12697A"/>
+              <a:srgbClr val="C75B26"/>
             </a:solidFill>
           </a:ln>
         </p:spPr>
@@ -6565,27 +9605,27 @@
           <a:p>
             <a:pPr algn="ctr"/>
             <a:r>
-              <a:rPr sz="520" b="1">
+              <a:rPr sz="610" b="1">
                 <a:solidFill>
                   <a:srgbClr val="FFFFFF"/>
                 </a:solidFill>
                 <a:latin typeface="Arial"/>
               </a:rPr>
-              <a:t>02</a:t>
+              <a:t>2</a:t>
             </a:r>
           </a:p>
         </p:txBody>
       </p:sp>
       <p:sp>
         <p:nvSpPr>
-          <p:cNvPr id="11" name="TextBox 10"/>
+          <p:cNvPr id="10" name="TextBox 9"/>
           <p:cNvSpPr txBox="1"/>
           <p:nvPr/>
         </p:nvSpPr>
         <p:spPr>
           <a:xfrm>
-            <a:off x="4425696" y="5504688"/>
-            <a:ext cx="2212848" cy="658368"/>
+            <a:off x="6501383" y="6080760"/>
+            <a:ext cx="5257800" cy="384048"/>
           </a:xfrm>
           <a:prstGeom prst="rect">
             <a:avLst/>
@@ -6598,83 +9638,33 @@
           </a:bodyPr>
           <a:lstStyle/>
           <a:p>
-            <a:pPr algn="l"/>
+            <a:pPr algn="l">
+              <a:spcAft>
+                <a:spcPts val="0"/>
+              </a:spcAft>
+            </a:pPr>
             <a:r>
-              <a:rPr sz="665" b="0">
+              <a:rPr sz="625" b="1">
                 <a:solidFill>
-                  <a:srgbClr val="14202C"/>
+                  <a:srgbClr val="121B26"/>
                 </a:solidFill>
                 <a:latin typeface="Microsoft YaHei UI"/>
               </a:rPr>
-              <a:t>数据最完整样本集中在银河通用、蚂蚁灵波；端侧工程化明确样本是优必选、地瓜S600/它石。</a:t>
+              <a:t>路线正在分化：VLA负责感知到动作，世界模型/WAM负责物理预测与长时序规划；真正门槛是端侧显存、TOPS与Hz。</a:t>
             </a:r>
           </a:p>
         </p:txBody>
       </p:sp>
       <p:sp>
         <p:nvSpPr>
-          <p:cNvPr id="12" name="Oval 11"/>
-          <p:cNvSpPr/>
-          <p:nvPr/>
-        </p:nvSpPr>
-        <p:spPr>
-          <a:xfrm>
-            <a:off x="6711696" y="5532120"/>
-            <a:ext cx="256032" cy="256032"/>
-          </a:xfrm>
-          <a:prstGeom prst="ellipse">
-            <a:avLst/>
-          </a:prstGeom>
-          <a:solidFill>
-            <a:srgbClr val="12697A"/>
-          </a:solidFill>
-          <a:ln>
-            <a:solidFill>
-              <a:srgbClr val="12697A"/>
-            </a:solidFill>
-          </a:ln>
-        </p:spPr>
-        <p:style>
-          <a:lnRef idx="1">
-            <a:schemeClr val="accent1"/>
-          </a:lnRef>
-          <a:fillRef idx="3">
-            <a:schemeClr val="accent1"/>
-          </a:fillRef>
-          <a:effectRef idx="2">
-            <a:schemeClr val="accent1"/>
-          </a:effectRef>
-          <a:fontRef idx="minor">
-            <a:schemeClr val="lt1"/>
-          </a:fontRef>
-        </p:style>
-        <p:txBody>
-          <a:bodyPr rtlCol="0" anchor="ctr"/>
-          <a:lstStyle/>
-          <a:p>
-            <a:pPr algn="ctr"/>
-            <a:r>
-              <a:rPr sz="520" b="1">
-                <a:solidFill>
-                  <a:srgbClr val="FFFFFF"/>
-                </a:solidFill>
-                <a:latin typeface="Arial"/>
-              </a:rPr>
-              <a:t>03</a:t>
-            </a:r>
-          </a:p>
-        </p:txBody>
-      </p:sp>
-      <p:sp>
-        <p:nvSpPr>
-          <p:cNvPr id="13" name="TextBox 12"/>
+          <p:cNvPr id="11" name="TextBox 10"/>
           <p:cNvSpPr txBox="1"/>
           <p:nvPr/>
         </p:nvSpPr>
         <p:spPr>
           <a:xfrm>
-            <a:off x="7040880" y="5504688"/>
-            <a:ext cx="2212848" cy="658368"/>
+            <a:off x="219456" y="6647688"/>
+            <a:ext cx="11338560" cy="109728"/>
           </a:xfrm>
           <a:prstGeom prst="rect">
             <a:avLst/>
@@ -6687,139 +9677,19 @@
           </a:bodyPr>
           <a:lstStyle/>
           <a:p>
-            <a:pPr algn="l"/>
+            <a:pPr algn="l">
+              <a:spcAft>
+                <a:spcPts val="0"/>
+              </a:spcAft>
+            </a:pPr>
             <a:r>
-              <a:rPr sz="665" b="0">
+              <a:rPr sz="470" b="0">
                 <a:solidFill>
-                  <a:srgbClr val="14202C"/>
+                  <a:srgbClr val="566372"/>
                 </a:solidFill>
                 <a:latin typeface="Microsoft YaHei UI"/>
               </a:rPr>
-              <a:t>大脑路线分化为 VLA、世界模型/WAM、端到端技能模型；小脑开始从传统控制器升级为运动基础模型。</a:t>
-            </a:r>
-          </a:p>
-        </p:txBody>
-      </p:sp>
-      <p:sp>
-        <p:nvSpPr>
-          <p:cNvPr id="14" name="Oval 13"/>
-          <p:cNvSpPr/>
-          <p:nvPr/>
-        </p:nvSpPr>
-        <p:spPr>
-          <a:xfrm>
-            <a:off x="9326880" y="5532120"/>
-            <a:ext cx="256032" cy="256032"/>
-          </a:xfrm>
-          <a:prstGeom prst="ellipse">
-            <a:avLst/>
-          </a:prstGeom>
-          <a:solidFill>
-            <a:srgbClr val="D36823"/>
-          </a:solidFill>
-          <a:ln>
-            <a:solidFill>
-              <a:srgbClr val="D36823"/>
-            </a:solidFill>
-          </a:ln>
-        </p:spPr>
-        <p:style>
-          <a:lnRef idx="1">
-            <a:schemeClr val="accent1"/>
-          </a:lnRef>
-          <a:fillRef idx="3">
-            <a:schemeClr val="accent1"/>
-          </a:fillRef>
-          <a:effectRef idx="2">
-            <a:schemeClr val="accent1"/>
-          </a:effectRef>
-          <a:fontRef idx="minor">
-            <a:schemeClr val="lt1"/>
-          </a:fontRef>
-        </p:style>
-        <p:txBody>
-          <a:bodyPr rtlCol="0" anchor="ctr"/>
-          <a:lstStyle/>
-          <a:p>
-            <a:pPr algn="ctr"/>
-            <a:r>
-              <a:rPr sz="520" b="1">
-                <a:solidFill>
-                  <a:srgbClr val="FFFFFF"/>
-                </a:solidFill>
-                <a:latin typeface="Arial"/>
-              </a:rPr>
-              <a:t>04</a:t>
-            </a:r>
-          </a:p>
-        </p:txBody>
-      </p:sp>
-      <p:sp>
-        <p:nvSpPr>
-          <p:cNvPr id="15" name="TextBox 14"/>
-          <p:cNvSpPr txBox="1"/>
-          <p:nvPr/>
-        </p:nvSpPr>
-        <p:spPr>
-          <a:xfrm>
-            <a:off x="9656063" y="5504688"/>
-            <a:ext cx="2212848" cy="658368"/>
-          </a:xfrm>
-          <a:prstGeom prst="rect">
-            <a:avLst/>
-          </a:prstGeom>
-          <a:noFill/>
-        </p:spPr>
-        <p:txBody>
-          <a:bodyPr wrap="square">
-            <a:noAutofit/>
-          </a:bodyPr>
-          <a:lstStyle/>
-          <a:p>
-            <a:pPr algn="l"/>
-            <a:r>
-              <a:rPr sz="665" b="0">
-                <a:solidFill>
-                  <a:srgbClr val="14202C"/>
-                </a:solidFill>
-                <a:latin typeface="Microsoft YaHei UI"/>
-              </a:rPr>
-              <a:t>多数厂商仍未公开参数、芯片、Hz与真实接管率；后续应优先追踪“端侧板卡 + 频率 + 连续作业小时”。</a:t>
-            </a:r>
-          </a:p>
-        </p:txBody>
-      </p:sp>
-      <p:sp>
-        <p:nvSpPr>
-          <p:cNvPr id="16" name="TextBox 15"/>
-          <p:cNvSpPr txBox="1"/>
-          <p:nvPr/>
-        </p:nvSpPr>
-        <p:spPr>
-          <a:xfrm>
-            <a:off x="411480" y="6583680"/>
-            <a:ext cx="10424160" cy="146304"/>
-          </a:xfrm>
-          <a:prstGeom prst="rect">
-            <a:avLst/>
-          </a:prstGeom>
-          <a:noFill/>
-        </p:spPr>
-        <p:txBody>
-          <a:bodyPr wrap="square">
-            <a:noAutofit/>
-          </a:bodyPr>
-          <a:lstStyle/>
-          <a:p>
-            <a:pPr algn="l"/>
-            <a:r>
-              <a:rPr sz="520" b="0">
-                <a:solidFill>
-                  <a:srgbClr val="536273"/>
-                </a:solidFill>
-                <a:latin typeface="Microsoft YaHei UI"/>
-              </a:rPr>
-              <a:t>* Nexo 700TOPS 为用户补充的会场口径，需等待星海图官方公开页面/材料交叉验证。PPT 基于仓库 README 当前版本浓缩。</a:t>
+              <a:t>* 星海图 Nexo 700TOPS 为WRC会场口径，当前报告标注为待公开链接交叉验证。</a:t>
             </a:r>
           </a:p>
         </p:txBody>

--- a/WRC_WAIC_2026_embodied_system012_onepage.pptx
+++ b/WRC_WAIC_2026_embodied_system012_onepage.pptx
@@ -3105,7 +3105,7 @@
         <p:spPr>
           <a:xfrm>
             <a:off x="201168" y="73152"/>
-            <a:ext cx="8869680" cy="292608"/>
+            <a:ext cx="8961120" cy="292608"/>
           </a:xfrm>
           <a:prstGeom prst="rect">
             <a:avLst/>
@@ -3144,7 +3144,7 @@
         <p:spPr>
           <a:xfrm>
             <a:off x="219456" y="384048"/>
-            <a:ext cx="9326880" cy="146304"/>
+            <a:ext cx="9601200" cy="146304"/>
           </a:xfrm>
           <a:prstGeom prst="rect">
             <a:avLst/>
@@ -3169,7 +3169,7 @@
                 </a:solidFill>
                 <a:latin typeface="Microsoft YaHei UI"/>
               </a:rPr>
-              <a:t>按部署方式合并分类；大脑模型、架构与参数合并呈现；只保留模型、算力、部署与频率信息。</a:t>
+              <a:t>按 13 家/项目统计部署方式占比；第一列合并显示定义、优缺点和采用比例。</a:t>
             </a:r>
           </a:p>
         </p:txBody>
@@ -3184,7 +3184,7 @@
         </p:nvGraphicFramePr>
         <p:xfrm>
           <a:off x="164592" y="621792"/>
-          <a:ext cx="11868911" cy="5248647"/>
+          <a:ext cx="11868912" cy="5248647"/>
         </p:xfrm>
         <a:graphic>
           <a:graphicData uri="http://schemas.openxmlformats.org/drawingml/2006/table">
@@ -3193,12 +3193,12 @@
                 <a:tableStyleId>{5C22544A-7EE6-4342-B048-85BDC9FD1C3A}</a:tableStyleId>
               </a:tblPr>
               <a:tblGrid>
-                <a:gridCol w="841248"/>
-                <a:gridCol w="1115568"/>
-                <a:gridCol w="3493008"/>
-                <a:gridCol w="1874519"/>
-                <a:gridCol w="2880360"/>
-                <a:gridCol w="1664208"/>
+                <a:gridCol w="1572768"/>
+                <a:gridCol w="1060704"/>
+                <a:gridCol w="3017520"/>
+                <a:gridCol w="1691640"/>
+                <a:gridCol w="2761488"/>
+                <a:gridCol w="1764792"/>
               </a:tblGrid>
               <a:tr h="310896">
                 <a:tc>
@@ -3220,7 +3220,7 @@
                         </a:spcAft>
                       </a:pPr>
                       <a:r>
-                        <a:rPr sz="600" b="1">
+                        <a:rPr sz="590" b="1">
                           <a:solidFill>
                             <a:srgbClr val="000000"/>
                           </a:solidFill>
@@ -3275,7 +3275,7 @@
                         </a:spcAft>
                       </a:pPr>
                       <a:r>
-                        <a:rPr sz="600" b="1">
+                        <a:rPr sz="590" b="1">
                           <a:solidFill>
                             <a:srgbClr val="000000"/>
                           </a:solidFill>
@@ -3330,7 +3330,7 @@
                         </a:spcAft>
                       </a:pPr>
                       <a:r>
-                        <a:rPr sz="600" b="1">
+                        <a:rPr sz="590" b="1">
                           <a:solidFill>
                             <a:srgbClr val="000000"/>
                           </a:solidFill>
@@ -3385,7 +3385,7 @@
                         </a:spcAft>
                       </a:pPr>
                       <a:r>
-                        <a:rPr sz="600" b="1">
+                        <a:rPr sz="590" b="1">
                           <a:solidFill>
                             <a:srgbClr val="000000"/>
                           </a:solidFill>
@@ -3440,7 +3440,7 @@
                         </a:spcAft>
                       </a:pPr>
                       <a:r>
-                        <a:rPr sz="600" b="1">
+                        <a:rPr sz="590" b="1">
                           <a:solidFill>
                             <a:srgbClr val="000000"/>
                           </a:solidFill>
@@ -3495,7 +3495,7 @@
                         </a:spcAft>
                       </a:pPr>
                       <a:r>
-                        <a:rPr sz="600" b="1">
+                        <a:rPr sz="590" b="1">
                           <a:solidFill>
                             <a:srgbClr val="000000"/>
                           </a:solidFill>
@@ -3540,7 +3540,7 @@
                     </a:bodyPr>
                     <a:lstStyle/>
                     <a:p>
-                      <a:pPr algn="ctr">
+                      <a:pPr algn="l">
                         <a:lnSpc>
                           <a:spcPct val="88000"/>
                         </a:lnSpc>
@@ -3552,13 +3552,13 @@
                         </a:spcAft>
                       </a:pPr>
                       <a:r>
-                        <a:rPr sz="700" b="1">
+                        <a:rPr sz="475" b="0">
                           <a:solidFill>
                             <a:srgbClr val="000000"/>
                           </a:solidFill>
                           <a:latin typeface="Microsoft YaHei UI"/>
                         </a:rPr>
-                        <a:t>纯端侧/本体端侧</a:t>
+                        <a:t>纯端侧/本体端侧：模型或智脑设备主要在机器人本体运行。优点是离线可用、低时延和数据不出端；缺点是受功耗、显存和散热约束。当前 7/13 家，占 53.8%。</a:t>
                       </a:r>
                     </a:p>
                   </a:txBody>
@@ -3607,7 +3607,7 @@
                         </a:spcAft>
                       </a:pPr>
                       <a:r>
-                        <a:rPr sz="475" b="1">
+                        <a:rPr sz="455" b="1">
                           <a:solidFill>
                             <a:srgbClr val="000000"/>
                           </a:solidFill>
@@ -3662,7 +3662,7 @@
                         </a:spcAft>
                       </a:pPr>
                       <a:r>
-                        <a:rPr sz="415" b="0">
+                        <a:rPr sz="401" b="0">
                           <a:solidFill>
                             <a:srgbClr val="000000"/>
                           </a:solidFill>
@@ -3717,7 +3717,7 @@
                         </a:spcAft>
                       </a:pPr>
                       <a:r>
-                        <a:rPr sz="475" b="0">
+                        <a:rPr sz="455" b="0">
                           <a:solidFill>
                             <a:srgbClr val="000000"/>
                           </a:solidFill>
@@ -3772,7 +3772,7 @@
                         </a:spcAft>
                       </a:pPr>
                       <a:r>
-                        <a:rPr sz="415" b="0">
+                        <a:rPr sz="401" b="0">
                           <a:solidFill>
                             <a:srgbClr val="000000"/>
                           </a:solidFill>
@@ -3827,7 +3827,7 @@
                         </a:spcAft>
                       </a:pPr>
                       <a:r>
-                        <a:rPr sz="415" b="0">
+                        <a:rPr sz="401" b="0">
                           <a:solidFill>
                             <a:srgbClr val="000000"/>
                           </a:solidFill>
@@ -3872,7 +3872,7 @@
                     </a:bodyPr>
                     <a:lstStyle/>
                     <a:p>
-                      <a:pPr algn="ctr">
+                      <a:pPr algn="l">
                         <a:lnSpc>
                           <a:spcPct val="88000"/>
                         </a:lnSpc>
@@ -3884,7 +3884,7 @@
                         </a:spcAft>
                       </a:pPr>
                       <a:r>
-                        <a:rPr sz="475" b="1">
+                        <a:rPr sz="455" b="0">
                           <a:solidFill>
                             <a:srgbClr val="000000"/>
                           </a:solidFill>
@@ -3939,7 +3939,7 @@
                         </a:spcAft>
                       </a:pPr>
                       <a:r>
-                        <a:rPr sz="475" b="1">
+                        <a:rPr sz="455" b="1">
                           <a:solidFill>
                             <a:srgbClr val="000000"/>
                           </a:solidFill>
@@ -3994,7 +3994,7 @@
                         </a:spcAft>
                       </a:pPr>
                       <a:r>
-                        <a:rPr sz="445" b="0">
+                        <a:rPr sz="432" b="0">
                           <a:solidFill>
                             <a:srgbClr val="000000"/>
                           </a:solidFill>
@@ -4049,7 +4049,7 @@
                         </a:spcAft>
                       </a:pPr>
                       <a:r>
-                        <a:rPr sz="475" b="0">
+                        <a:rPr sz="455" b="0">
                           <a:solidFill>
                             <a:srgbClr val="000000"/>
                           </a:solidFill>
@@ -4104,7 +4104,7 @@
                         </a:spcAft>
                       </a:pPr>
                       <a:r>
-                        <a:rPr sz="445" b="0">
+                        <a:rPr sz="432" b="0">
                           <a:solidFill>
                             <a:srgbClr val="000000"/>
                           </a:solidFill>
@@ -4159,7 +4159,7 @@
                         </a:spcAft>
                       </a:pPr>
                       <a:r>
-                        <a:rPr sz="445" b="0">
+                        <a:rPr sz="432" b="0">
                           <a:solidFill>
                             <a:srgbClr val="000000"/>
                           </a:solidFill>
@@ -4204,7 +4204,7 @@
                     </a:bodyPr>
                     <a:lstStyle/>
                     <a:p>
-                      <a:pPr algn="ctr">
+                      <a:pPr algn="l">
                         <a:lnSpc>
                           <a:spcPct val="88000"/>
                         </a:lnSpc>
@@ -4216,7 +4216,7 @@
                         </a:spcAft>
                       </a:pPr>
                       <a:r>
-                        <a:rPr sz="475" b="1">
+                        <a:rPr sz="455" b="0">
                           <a:solidFill>
                             <a:srgbClr val="000000"/>
                           </a:solidFill>
@@ -4271,7 +4271,7 @@
                         </a:spcAft>
                       </a:pPr>
                       <a:r>
-                        <a:rPr sz="475" b="1">
+                        <a:rPr sz="455" b="1">
                           <a:solidFill>
                             <a:srgbClr val="000000"/>
                           </a:solidFill>
@@ -4326,7 +4326,7 @@
                         </a:spcAft>
                       </a:pPr>
                       <a:r>
-                        <a:rPr sz="415" b="0">
+                        <a:rPr sz="401" b="0">
                           <a:solidFill>
                             <a:srgbClr val="000000"/>
                           </a:solidFill>
@@ -4381,7 +4381,7 @@
                         </a:spcAft>
                       </a:pPr>
                       <a:r>
-                        <a:rPr sz="475" b="0">
+                        <a:rPr sz="455" b="0">
                           <a:solidFill>
                             <a:srgbClr val="000000"/>
                           </a:solidFill>
@@ -4436,7 +4436,7 @@
                         </a:spcAft>
                       </a:pPr>
                       <a:r>
-                        <a:rPr sz="415" b="0">
+                        <a:rPr sz="401" b="0">
                           <a:solidFill>
                             <a:srgbClr val="000000"/>
                           </a:solidFill>
@@ -4491,7 +4491,7 @@
                         </a:spcAft>
                       </a:pPr>
                       <a:r>
-                        <a:rPr sz="415" b="0">
+                        <a:rPr sz="401" b="0">
                           <a:solidFill>
                             <a:srgbClr val="000000"/>
                           </a:solidFill>
@@ -4536,7 +4536,7 @@
                     </a:bodyPr>
                     <a:lstStyle/>
                     <a:p>
-                      <a:pPr algn="ctr">
+                      <a:pPr algn="l">
                         <a:lnSpc>
                           <a:spcPct val="88000"/>
                         </a:lnSpc>
@@ -4548,7 +4548,7 @@
                         </a:spcAft>
                       </a:pPr>
                       <a:r>
-                        <a:rPr sz="475" b="1">
+                        <a:rPr sz="455" b="0">
                           <a:solidFill>
                             <a:srgbClr val="000000"/>
                           </a:solidFill>
@@ -4603,7 +4603,7 @@
                         </a:spcAft>
                       </a:pPr>
                       <a:r>
-                        <a:rPr sz="475" b="1">
+                        <a:rPr sz="455" b="1">
                           <a:solidFill>
                             <a:srgbClr val="000000"/>
                           </a:solidFill>
@@ -4658,7 +4658,7 @@
                         </a:spcAft>
                       </a:pPr>
                       <a:r>
-                        <a:rPr sz="445" b="0">
+                        <a:rPr sz="432" b="0">
                           <a:solidFill>
                             <a:srgbClr val="000000"/>
                           </a:solidFill>
@@ -4713,7 +4713,7 @@
                         </a:spcAft>
                       </a:pPr>
                       <a:r>
-                        <a:rPr sz="475" b="0">
+                        <a:rPr sz="455" b="0">
                           <a:solidFill>
                             <a:srgbClr val="000000"/>
                           </a:solidFill>
@@ -4768,7 +4768,7 @@
                         </a:spcAft>
                       </a:pPr>
                       <a:r>
-                        <a:rPr sz="445" b="0">
+                        <a:rPr sz="432" b="0">
                           <a:solidFill>
                             <a:srgbClr val="000000"/>
                           </a:solidFill>
@@ -4823,7 +4823,7 @@
                         </a:spcAft>
                       </a:pPr>
                       <a:r>
-                        <a:rPr sz="445" b="0">
+                        <a:rPr sz="432" b="0">
                           <a:solidFill>
                             <a:srgbClr val="000000"/>
                           </a:solidFill>
@@ -4868,7 +4868,7 @@
                     </a:bodyPr>
                     <a:lstStyle/>
                     <a:p>
-                      <a:pPr algn="ctr">
+                      <a:pPr algn="l">
                         <a:lnSpc>
                           <a:spcPct val="88000"/>
                         </a:lnSpc>
@@ -4880,7 +4880,7 @@
                         </a:spcAft>
                       </a:pPr>
                       <a:r>
-                        <a:rPr sz="475" b="1">
+                        <a:rPr sz="455" b="0">
                           <a:solidFill>
                             <a:srgbClr val="000000"/>
                           </a:solidFill>
@@ -4935,7 +4935,7 @@
                         </a:spcAft>
                       </a:pPr>
                       <a:r>
-                        <a:rPr sz="475" b="1">
+                        <a:rPr sz="455" b="1">
                           <a:solidFill>
                             <a:srgbClr val="000000"/>
                           </a:solidFill>
@@ -4990,7 +4990,7 @@
                         </a:spcAft>
                       </a:pPr>
                       <a:r>
-                        <a:rPr sz="445" b="0">
+                        <a:rPr sz="432" b="0">
                           <a:solidFill>
                             <a:srgbClr val="000000"/>
                           </a:solidFill>
@@ -5045,7 +5045,7 @@
                         </a:spcAft>
                       </a:pPr>
                       <a:r>
-                        <a:rPr sz="475" b="0">
+                        <a:rPr sz="455" b="0">
                           <a:solidFill>
                             <a:srgbClr val="000000"/>
                           </a:solidFill>
@@ -5100,7 +5100,7 @@
                         </a:spcAft>
                       </a:pPr>
                       <a:r>
-                        <a:rPr sz="445" b="0">
+                        <a:rPr sz="432" b="0">
                           <a:solidFill>
                             <a:srgbClr val="000000"/>
                           </a:solidFill>
@@ -5155,7 +5155,7 @@
                         </a:spcAft>
                       </a:pPr>
                       <a:r>
-                        <a:rPr sz="445" b="0">
+                        <a:rPr sz="432" b="0">
                           <a:solidFill>
                             <a:srgbClr val="000000"/>
                           </a:solidFill>
@@ -5200,7 +5200,7 @@
                     </a:bodyPr>
                     <a:lstStyle/>
                     <a:p>
-                      <a:pPr algn="ctr">
+                      <a:pPr algn="l">
                         <a:lnSpc>
                           <a:spcPct val="88000"/>
                         </a:lnSpc>
@@ -5212,7 +5212,7 @@
                         </a:spcAft>
                       </a:pPr>
                       <a:r>
-                        <a:rPr sz="475" b="1">
+                        <a:rPr sz="455" b="0">
                           <a:solidFill>
                             <a:srgbClr val="000000"/>
                           </a:solidFill>
@@ -5267,7 +5267,7 @@
                         </a:spcAft>
                       </a:pPr>
                       <a:r>
-                        <a:rPr sz="475" b="1">
+                        <a:rPr sz="455" b="1">
                           <a:solidFill>
                             <a:srgbClr val="000000"/>
                           </a:solidFill>
@@ -5322,7 +5322,7 @@
                         </a:spcAft>
                       </a:pPr>
                       <a:r>
-                        <a:rPr sz="415" b="0">
+                        <a:rPr sz="401" b="0">
                           <a:solidFill>
                             <a:srgbClr val="000000"/>
                           </a:solidFill>
@@ -5377,7 +5377,7 @@
                         </a:spcAft>
                       </a:pPr>
                       <a:r>
-                        <a:rPr sz="475" b="0">
+                        <a:rPr sz="455" b="0">
                           <a:solidFill>
                             <a:srgbClr val="000000"/>
                           </a:solidFill>
@@ -5432,7 +5432,7 @@
                         </a:spcAft>
                       </a:pPr>
                       <a:r>
-                        <a:rPr sz="415" b="0">
+                        <a:rPr sz="401" b="0">
                           <a:solidFill>
                             <a:srgbClr val="000000"/>
                           </a:solidFill>
@@ -5487,7 +5487,7 @@
                         </a:spcAft>
                       </a:pPr>
                       <a:r>
-                        <a:rPr sz="415" b="0">
+                        <a:rPr sz="401" b="0">
                           <a:solidFill>
                             <a:srgbClr val="000000"/>
                           </a:solidFill>
@@ -5532,7 +5532,7 @@
                     </a:bodyPr>
                     <a:lstStyle/>
                     <a:p>
-                      <a:pPr algn="ctr">
+                      <a:pPr algn="l">
                         <a:lnSpc>
                           <a:spcPct val="88000"/>
                         </a:lnSpc>
@@ -5544,7 +5544,7 @@
                         </a:spcAft>
                       </a:pPr>
                       <a:r>
-                        <a:rPr sz="475" b="1">
+                        <a:rPr sz="455" b="0">
                           <a:solidFill>
                             <a:srgbClr val="000000"/>
                           </a:solidFill>
@@ -5599,7 +5599,7 @@
                         </a:spcAft>
                       </a:pPr>
                       <a:r>
-                        <a:rPr sz="475" b="1">
+                        <a:rPr sz="455" b="1">
                           <a:solidFill>
                             <a:srgbClr val="000000"/>
                           </a:solidFill>
@@ -5654,7 +5654,7 @@
                         </a:spcAft>
                       </a:pPr>
                       <a:r>
-                        <a:rPr sz="445" b="0">
+                        <a:rPr sz="432" b="0">
                           <a:solidFill>
                             <a:srgbClr val="000000"/>
                           </a:solidFill>
@@ -5709,7 +5709,7 @@
                         </a:spcAft>
                       </a:pPr>
                       <a:r>
-                        <a:rPr sz="475" b="0">
+                        <a:rPr sz="455" b="0">
                           <a:solidFill>
                             <a:srgbClr val="000000"/>
                           </a:solidFill>
@@ -5764,7 +5764,7 @@
                         </a:spcAft>
                       </a:pPr>
                       <a:r>
-                        <a:rPr sz="445" b="0">
+                        <a:rPr sz="432" b="0">
                           <a:solidFill>
                             <a:srgbClr val="000000"/>
                           </a:solidFill>
@@ -5819,7 +5819,7 @@
                         </a:spcAft>
                       </a:pPr>
                       <a:r>
-                        <a:rPr sz="445" b="0">
+                        <a:rPr sz="432" b="0">
                           <a:solidFill>
                             <a:srgbClr val="000000"/>
                           </a:solidFill>
@@ -5864,7 +5864,7 @@
                     </a:bodyPr>
                     <a:lstStyle/>
                     <a:p>
-                      <a:pPr algn="ctr">
+                      <a:pPr algn="l">
                         <a:lnSpc>
                           <a:spcPct val="88000"/>
                         </a:lnSpc>
@@ -5876,13 +5876,13 @@
                         </a:spcAft>
                       </a:pPr>
                       <a:r>
-                        <a:rPr sz="700" b="1">
+                        <a:rPr sz="475" b="0">
                           <a:solidFill>
                             <a:srgbClr val="000000"/>
                           </a:solidFill>
                           <a:latin typeface="Microsoft YaHei UI"/>
                         </a:rPr>
-                        <a:t>端云协同</a:t>
+                        <a:t>端云协同：端侧处理高实时能力，云侧处理慢推理和多机调度。优点是兼顾低延迟和更强模型；缺点是依赖网络与系统编排。当前 3/13 家，占 23.1%。</a:t>
                       </a:r>
                     </a:p>
                   </a:txBody>
@@ -5931,7 +5931,7 @@
                         </a:spcAft>
                       </a:pPr>
                       <a:r>
-                        <a:rPr sz="475" b="1">
+                        <a:rPr sz="455" b="1">
                           <a:solidFill>
                             <a:srgbClr val="000000"/>
                           </a:solidFill>
@@ -5986,7 +5986,7 @@
                         </a:spcAft>
                       </a:pPr>
                       <a:r>
-                        <a:rPr sz="445" b="0">
+                        <a:rPr sz="432" b="0">
                           <a:solidFill>
                             <a:srgbClr val="000000"/>
                           </a:solidFill>
@@ -6041,7 +6041,7 @@
                         </a:spcAft>
                       </a:pPr>
                       <a:r>
-                        <a:rPr sz="475" b="0">
+                        <a:rPr sz="455" b="0">
                           <a:solidFill>
                             <a:srgbClr val="000000"/>
                           </a:solidFill>
@@ -6096,7 +6096,7 @@
                         </a:spcAft>
                       </a:pPr>
                       <a:r>
-                        <a:rPr sz="445" b="0">
+                        <a:rPr sz="432" b="0">
                           <a:solidFill>
                             <a:srgbClr val="000000"/>
                           </a:solidFill>
@@ -6151,7 +6151,7 @@
                         </a:spcAft>
                       </a:pPr>
                       <a:r>
-                        <a:rPr sz="445" b="0">
+                        <a:rPr sz="432" b="0">
                           <a:solidFill>
                             <a:srgbClr val="000000"/>
                           </a:solidFill>
@@ -6196,7 +6196,7 @@
                     </a:bodyPr>
                     <a:lstStyle/>
                     <a:p>
-                      <a:pPr algn="ctr">
+                      <a:pPr algn="l">
                         <a:lnSpc>
                           <a:spcPct val="88000"/>
                         </a:lnSpc>
@@ -6208,7 +6208,7 @@
                         </a:spcAft>
                       </a:pPr>
                       <a:r>
-                        <a:rPr sz="475" b="1">
+                        <a:rPr sz="455" b="0">
                           <a:solidFill>
                             <a:srgbClr val="000000"/>
                           </a:solidFill>
@@ -6263,7 +6263,7 @@
                         </a:spcAft>
                       </a:pPr>
                       <a:r>
-                        <a:rPr sz="475" b="1">
+                        <a:rPr sz="455" b="1">
                           <a:solidFill>
                             <a:srgbClr val="000000"/>
                           </a:solidFill>
@@ -6318,7 +6318,7 @@
                         </a:spcAft>
                       </a:pPr>
                       <a:r>
-                        <a:rPr sz="445" b="0">
+                        <a:rPr sz="432" b="0">
                           <a:solidFill>
                             <a:srgbClr val="000000"/>
                           </a:solidFill>
@@ -6373,7 +6373,7 @@
                         </a:spcAft>
                       </a:pPr>
                       <a:r>
-                        <a:rPr sz="475" b="0">
+                        <a:rPr sz="455" b="0">
                           <a:solidFill>
                             <a:srgbClr val="000000"/>
                           </a:solidFill>
@@ -6428,7 +6428,7 @@
                         </a:spcAft>
                       </a:pPr>
                       <a:r>
-                        <a:rPr sz="445" b="0">
+                        <a:rPr sz="432" b="0">
                           <a:solidFill>
                             <a:srgbClr val="000000"/>
                           </a:solidFill>
@@ -6483,7 +6483,7 @@
                         </a:spcAft>
                       </a:pPr>
                       <a:r>
-                        <a:rPr sz="445" b="0">
+                        <a:rPr sz="432" b="0">
                           <a:solidFill>
                             <a:srgbClr val="000000"/>
                           </a:solidFill>
@@ -6528,7 +6528,7 @@
                     </a:bodyPr>
                     <a:lstStyle/>
                     <a:p>
-                      <a:pPr algn="ctr">
+                      <a:pPr algn="l">
                         <a:lnSpc>
                           <a:spcPct val="88000"/>
                         </a:lnSpc>
@@ -6540,7 +6540,7 @@
                         </a:spcAft>
                       </a:pPr>
                       <a:r>
-                        <a:rPr sz="475" b="1">
+                        <a:rPr sz="455" b="0">
                           <a:solidFill>
                             <a:srgbClr val="000000"/>
                           </a:solidFill>
@@ -6595,7 +6595,7 @@
                         </a:spcAft>
                       </a:pPr>
                       <a:r>
-                        <a:rPr sz="475" b="1">
+                        <a:rPr sz="455" b="1">
                           <a:solidFill>
                             <a:srgbClr val="000000"/>
                           </a:solidFill>
@@ -6650,7 +6650,7 @@
                         </a:spcAft>
                       </a:pPr>
                       <a:r>
-                        <a:rPr sz="415" b="0">
+                        <a:rPr sz="401" b="0">
                           <a:solidFill>
                             <a:srgbClr val="000000"/>
                           </a:solidFill>
@@ -6705,7 +6705,7 @@
                         </a:spcAft>
                       </a:pPr>
                       <a:r>
-                        <a:rPr sz="475" b="0">
+                        <a:rPr sz="455" b="0">
                           <a:solidFill>
                             <a:srgbClr val="000000"/>
                           </a:solidFill>
@@ -6760,7 +6760,7 @@
                         </a:spcAft>
                       </a:pPr>
                       <a:r>
-                        <a:rPr sz="415" b="0">
+                        <a:rPr sz="401" b="0">
                           <a:solidFill>
                             <a:srgbClr val="000000"/>
                           </a:solidFill>
@@ -6815,7 +6815,7 @@
                         </a:spcAft>
                       </a:pPr>
                       <a:r>
-                        <a:rPr sz="415" b="0">
+                        <a:rPr sz="401" b="0">
                           <a:solidFill>
                             <a:srgbClr val="000000"/>
                           </a:solidFill>
@@ -6860,7 +6860,7 @@
                     </a:bodyPr>
                     <a:lstStyle/>
                     <a:p>
-                      <a:pPr algn="ctr">
+                      <a:pPr algn="l">
                         <a:lnSpc>
                           <a:spcPct val="88000"/>
                         </a:lnSpc>
@@ -6872,13 +6872,13 @@
                         </a:spcAft>
                       </a:pPr>
                       <a:r>
-                        <a:rPr sz="700" b="1">
+                        <a:rPr sz="475" b="0">
                           <a:solidFill>
                             <a:srgbClr val="000000"/>
                           </a:solidFill>
                           <a:latin typeface="Microsoft YaHei UI"/>
                         </a:rPr>
-                        <a:t>云侧/平台未明</a:t>
+                        <a:t>云侧/平台未明：公开资料未说明生产部署方式，或大脑更像平台/研究模型。优点是模型尺度和训练迭代空间更大；缺点是离线能力与实时性不确定。当前 3/13 家，占 23.1%。</a:t>
                       </a:r>
                     </a:p>
                   </a:txBody>
@@ -6927,7 +6927,7 @@
                         </a:spcAft>
                       </a:pPr>
                       <a:r>
-                        <a:rPr sz="475" b="1">
+                        <a:rPr sz="455" b="1">
                           <a:solidFill>
                             <a:srgbClr val="000000"/>
                           </a:solidFill>
@@ -6982,7 +6982,7 @@
                         </a:spcAft>
                       </a:pPr>
                       <a:r>
-                        <a:rPr sz="415" b="0">
+                        <a:rPr sz="401" b="0">
                           <a:solidFill>
                             <a:srgbClr val="000000"/>
                           </a:solidFill>
@@ -7037,7 +7037,7 @@
                         </a:spcAft>
                       </a:pPr>
                       <a:r>
-                        <a:rPr sz="475" b="0">
+                        <a:rPr sz="455" b="0">
                           <a:solidFill>
                             <a:srgbClr val="000000"/>
                           </a:solidFill>
@@ -7092,7 +7092,7 @@
                         </a:spcAft>
                       </a:pPr>
                       <a:r>
-                        <a:rPr sz="415" b="0">
+                        <a:rPr sz="401" b="0">
                           <a:solidFill>
                             <a:srgbClr val="000000"/>
                           </a:solidFill>
@@ -7147,7 +7147,7 @@
                         </a:spcAft>
                       </a:pPr>
                       <a:r>
-                        <a:rPr sz="415" b="0">
+                        <a:rPr sz="401" b="0">
                           <a:solidFill>
                             <a:srgbClr val="000000"/>
                           </a:solidFill>
@@ -7192,7 +7192,7 @@
                     </a:bodyPr>
                     <a:lstStyle/>
                     <a:p>
-                      <a:pPr algn="ctr">
+                      <a:pPr algn="l">
                         <a:lnSpc>
                           <a:spcPct val="88000"/>
                         </a:lnSpc>
@@ -7204,7 +7204,7 @@
                         </a:spcAft>
                       </a:pPr>
                       <a:r>
-                        <a:rPr sz="475" b="1">
+                        <a:rPr sz="455" b="0">
                           <a:solidFill>
                             <a:srgbClr val="000000"/>
                           </a:solidFill>
@@ -7259,7 +7259,7 @@
                         </a:spcAft>
                       </a:pPr>
                       <a:r>
-                        <a:rPr sz="475" b="1">
+                        <a:rPr sz="455" b="1">
                           <a:solidFill>
                             <a:srgbClr val="000000"/>
                           </a:solidFill>
@@ -7314,7 +7314,7 @@
                         </a:spcAft>
                       </a:pPr>
                       <a:r>
-                        <a:rPr sz="445" b="0">
+                        <a:rPr sz="432" b="0">
                           <a:solidFill>
                             <a:srgbClr val="000000"/>
                           </a:solidFill>
@@ -7369,7 +7369,7 @@
                         </a:spcAft>
                       </a:pPr>
                       <a:r>
-                        <a:rPr sz="475" b="0">
+                        <a:rPr sz="455" b="0">
                           <a:solidFill>
                             <a:srgbClr val="000000"/>
                           </a:solidFill>
@@ -7424,7 +7424,7 @@
                         </a:spcAft>
                       </a:pPr>
                       <a:r>
-                        <a:rPr sz="445" b="0">
+                        <a:rPr sz="432" b="0">
                           <a:solidFill>
                             <a:srgbClr val="000000"/>
                           </a:solidFill>
@@ -7479,7 +7479,7 @@
                         </a:spcAft>
                       </a:pPr>
                       <a:r>
-                        <a:rPr sz="445" b="0">
+                        <a:rPr sz="432" b="0">
                           <a:solidFill>
                             <a:srgbClr val="000000"/>
                           </a:solidFill>
@@ -7524,7 +7524,7 @@
                     </a:bodyPr>
                     <a:lstStyle/>
                     <a:p>
-                      <a:pPr algn="ctr">
+                      <a:pPr algn="l">
                         <a:lnSpc>
                           <a:spcPct val="88000"/>
                         </a:lnSpc>
@@ -7536,7 +7536,7 @@
                         </a:spcAft>
                       </a:pPr>
                       <a:r>
-                        <a:rPr sz="475" b="1">
+                        <a:rPr sz="455" b="0">
                           <a:solidFill>
                             <a:srgbClr val="000000"/>
                           </a:solidFill>
@@ -7591,7 +7591,7 @@
                         </a:spcAft>
                       </a:pPr>
                       <a:r>
-                        <a:rPr sz="475" b="1">
+                        <a:rPr sz="455" b="1">
                           <a:solidFill>
                             <a:srgbClr val="000000"/>
                           </a:solidFill>
@@ -7646,7 +7646,7 @@
                         </a:spcAft>
                       </a:pPr>
                       <a:r>
-                        <a:rPr sz="445" b="0">
+                        <a:rPr sz="432" b="0">
                           <a:solidFill>
                             <a:srgbClr val="000000"/>
                           </a:solidFill>
@@ -7701,7 +7701,7 @@
                         </a:spcAft>
                       </a:pPr>
                       <a:r>
-                        <a:rPr sz="475" b="0">
+                        <a:rPr sz="455" b="0">
                           <a:solidFill>
                             <a:srgbClr val="000000"/>
                           </a:solidFill>
@@ -7756,7 +7756,7 @@
                         </a:spcAft>
                       </a:pPr>
                       <a:r>
-                        <a:rPr sz="445" b="0">
+                        <a:rPr sz="432" b="0">
                           <a:solidFill>
                             <a:srgbClr val="000000"/>
                           </a:solidFill>
@@ -7811,7 +7811,7 @@
                         </a:spcAft>
                       </a:pPr>
                       <a:r>
-                        <a:rPr sz="445" b="0">
+                        <a:rPr sz="432" b="0">
                           <a:solidFill>
                             <a:srgbClr val="000000"/>
                           </a:solidFill>

--- a/WRC_WAIC_2026_embodied_system012_onepage.pptx
+++ b/WRC_WAIC_2026_embodied_system012_onepage.pptx
@@ -3144,7 +3144,7 @@
         <p:spPr>
           <a:xfrm>
             <a:off x="219456" y="384048"/>
-            <a:ext cx="9601200" cy="146304"/>
+            <a:ext cx="9966960" cy="146304"/>
           </a:xfrm>
           <a:prstGeom prst="rect">
             <a:avLst/>
@@ -3163,13 +3163,13 @@
               </a:spcAft>
             </a:pPr>
             <a:r>
-              <a:rPr sz="660" b="0">
+              <a:rPr sz="640" b="0">
                 <a:solidFill>
                   <a:srgbClr val="000000"/>
                 </a:solidFill>
                 <a:latin typeface="Microsoft YaHei UI"/>
               </a:rPr>
-              <a:t>按 13 家/项目统计部署方式占比；第一列合并显示定义、优缺点和采用比例。</a:t>
+              <a:t>表内为代表样本；部署占比按报告末尾 22 家/项目扩展样本统计，算力趋势参考 NVIDIA Thor/Jetson 等平台。</a:t>
             </a:r>
           </a:p>
         </p:txBody>
@@ -3193,12 +3193,12 @@
                 <a:tableStyleId>{5C22544A-7EE6-4342-B048-85BDC9FD1C3A}</a:tableStyleId>
               </a:tblPr>
               <a:tblGrid>
-                <a:gridCol w="1572768"/>
+                <a:gridCol w="1609344"/>
                 <a:gridCol w="1060704"/>
-                <a:gridCol w="3017520"/>
-                <a:gridCol w="1691640"/>
-                <a:gridCol w="2761488"/>
-                <a:gridCol w="1764792"/>
+                <a:gridCol w="2980944"/>
+                <a:gridCol w="1664208"/>
+                <a:gridCol w="2779776"/>
+                <a:gridCol w="1773936"/>
               </a:tblGrid>
               <a:tr h="310896">
                 <a:tc>
@@ -3220,7 +3220,7 @@
                         </a:spcAft>
                       </a:pPr>
                       <a:r>
-                        <a:rPr sz="590" b="1">
+                        <a:rPr sz="585" b="1">
                           <a:solidFill>
                             <a:srgbClr val="000000"/>
                           </a:solidFill>
@@ -3275,7 +3275,7 @@
                         </a:spcAft>
                       </a:pPr>
                       <a:r>
-                        <a:rPr sz="590" b="1">
+                        <a:rPr sz="585" b="1">
                           <a:solidFill>
                             <a:srgbClr val="000000"/>
                           </a:solidFill>
@@ -3330,7 +3330,7 @@
                         </a:spcAft>
                       </a:pPr>
                       <a:r>
-                        <a:rPr sz="590" b="1">
+                        <a:rPr sz="585" b="1">
                           <a:solidFill>
                             <a:srgbClr val="000000"/>
                           </a:solidFill>
@@ -3385,7 +3385,7 @@
                         </a:spcAft>
                       </a:pPr>
                       <a:r>
-                        <a:rPr sz="590" b="1">
+                        <a:rPr sz="585" b="1">
                           <a:solidFill>
                             <a:srgbClr val="000000"/>
                           </a:solidFill>
@@ -3440,7 +3440,7 @@
                         </a:spcAft>
                       </a:pPr>
                       <a:r>
-                        <a:rPr sz="590" b="1">
+                        <a:rPr sz="585" b="1">
                           <a:solidFill>
                             <a:srgbClr val="000000"/>
                           </a:solidFill>
@@ -3495,7 +3495,7 @@
                         </a:spcAft>
                       </a:pPr>
                       <a:r>
-                        <a:rPr sz="590" b="1">
+                        <a:rPr sz="585" b="1">
                           <a:solidFill>
                             <a:srgbClr val="000000"/>
                           </a:solidFill>
@@ -3533,7 +3533,7 @@
                 </a:tc>
               </a:tr>
               <a:tr h="379827">
-                <a:tc rowSpan="7">
+                <a:tc rowSpan="5">
                   <a:txBody>
                     <a:bodyPr wrap="square">
                       <a:normAutofit/>
@@ -3552,13 +3552,13 @@
                         </a:spcAft>
                       </a:pPr>
                       <a:r>
-                        <a:rPr sz="475" b="0">
+                        <a:rPr sz="465" b="0">
                           <a:solidFill>
                             <a:srgbClr val="000000"/>
                           </a:solidFill>
                           <a:latin typeface="Microsoft YaHei UI"/>
                         </a:rPr>
-                        <a:t>纯端侧/本体端侧：模型或智脑设备主要在机器人本体运行。优点是离线可用、低时延和数据不出端；缺点是受功耗、显存和散热约束。当前 7/13 家，占 53.8%。</a:t>
+                        <a:t>纯端侧/本体端侧：模型或智脑设备主要在本体运行。优点是离线可用、低时延和数据不出端；缺点是受功耗、显存和散热约束。扩展样本 5/22，占 22.7%。</a:t>
                       </a:r>
                     </a:p>
                   </a:txBody>
@@ -3613,7 +3613,7 @@
                           </a:solidFill>
                           <a:latin typeface="Microsoft YaHei UI"/>
                         </a:rPr>
-                        <a:t>科大讯飞/灵境智源</a:t>
+                        <a:t>蚂蚁灵波 Robbyant</a:t>
                       </a:r>
                     </a:p>
                   </a:txBody>
@@ -3662,13 +3662,13 @@
                         </a:spcAft>
                       </a:pPr>
                       <a:r>
-                        <a:rPr sz="401" b="0">
+                        <a:rPr sz="400" b="0">
                           <a:solidFill>
                             <a:srgbClr val="000000"/>
                           </a:solidFill>
                           <a:latin typeface="Microsoft YaHei UI"/>
                         </a:rPr>
-                        <a:t>讯飞机器人大脑采用 MScape N1100/MS-N1100 端侧具身智脑设备，具体大脑模型未公开。</a:t>
+                        <a:t>LingBot-VLA 2.0 是 6B VLA，采用 Sparse MoE Action Expert；LingBot-VA 2.0 是约 5B DiT 世界动作模型，LingBot-Vision 为 1B，LingBot-World 参数未公开。</a:t>
                       </a:r>
                     </a:p>
                   </a:txBody>
@@ -3723,7 +3723,7 @@
                           </a:solidFill>
                           <a:latin typeface="Microsoft YaHei UI"/>
                         </a:rPr>
-                        <a:t>N1100 以 Xenomai 硬实时和 EtherCAT 接口支撑控制，但未公开独立小脑模型。</a:t>
+                        <a:t/>
                       </a:r>
                     </a:p>
                   </a:txBody>
@@ -3772,13 +3772,13 @@
                         </a:spcAft>
                       </a:pPr>
                       <a:r>
-                        <a:rPr sz="401" b="0">
+                        <a:rPr sz="400" b="0">
                           <a:solidFill>
                             <a:srgbClr val="000000"/>
                           </a:solidFill>
                           <a:latin typeface="Microsoft YaHei UI"/>
                         </a:rPr>
-                        <a:t>N1100 官方披露 1000 TOPS；会场口径为可按网络切换云+端或纯端侧，核心为 Jetson T5000、可选 T4000，其中 T5000 官方规格为 2070 FP4 TFLOPS、128GB、40-130W。</a:t>
+                        <a:t>LingBot-VLA 2.0 在 RTX 4090D 本地推理；LingBot-VA 需要约 18-24GB VRAM；LingBot-Depth 提供 edge-side SDK。</a:t>
                       </a:r>
                     </a:p>
                   </a:txBody>
@@ -3827,13 +3827,13 @@
                         </a:spcAft>
                       </a:pPr>
                       <a:r>
-                        <a:rPr sz="401" b="0">
+                        <a:rPr sz="400" b="0">
                           <a:solidFill>
                             <a:srgbClr val="000000"/>
                           </a:solidFill>
                           <a:latin typeface="Microsoft YaHei UI"/>
                         </a:rPr>
-                        <a:t/>
+                        <a:t>LingBot-VLA 2.0 单次推理约 130ms；LingBot-World 2.0 标称 720p/60fps，控制延迟低于 1s。</a:t>
                       </a:r>
                     </a:p>
                   </a:txBody>
@@ -3945,7 +3945,7 @@
                           </a:solidFill>
                           <a:latin typeface="Microsoft YaHei UI"/>
                         </a:rPr>
-                        <a:t>中国兵器/杭州智元</a:t>
+                        <a:t>MiniCPM-Robot</a:t>
                       </a:r>
                     </a:p>
                   </a:txBody>
@@ -3994,13 +3994,13 @@
                         </a:spcAft>
                       </a:pPr>
                       <a:r>
-                        <a:rPr sz="432" b="0">
+                        <a:rPr sz="430" b="0">
                           <a:solidFill>
                             <a:srgbClr val="000000"/>
                           </a:solidFill>
                           <a:latin typeface="Microsoft YaHei UI"/>
                         </a:rPr>
-                        <a:t>具身大脑通用套件基于多模态大模型构建“感知-记忆-规划-执行-反思”自主决策闭环，模型参数未公开。</a:t>
+                        <a:t>MiniCPM-RobotManip 是 1.5B 通用操作 VLA，MiniCPM-RobotTrack 是 0.9B 目标跟踪 VLA。</a:t>
                       </a:r>
                     </a:p>
                   </a:txBody>
@@ -4104,13 +4104,13 @@
                         </a:spcAft>
                       </a:pPr>
                       <a:r>
-                        <a:rPr sz="432" b="0">
+                        <a:rPr sz="430" b="0">
                           <a:solidFill>
                             <a:srgbClr val="000000"/>
                           </a:solidFill>
                           <a:latin typeface="Microsoft YaHei UI"/>
                         </a:rPr>
-                        <a:t>公开稿披露具身大脑通用套件和机动抗毁边缘云；会场观察为端侧大脑设备无网可用，但智能弱于云侧大脑。</a:t>
+                        <a:t>RobotManip 可在 H100/H20 推理，RobotTrack 可部署在 Jetson Orin NX 16GB。</a:t>
                       </a:r>
                     </a:p>
                   </a:txBody>
@@ -4159,13 +4159,13 @@
                         </a:spcAft>
                       </a:pPr>
                       <a:r>
-                        <a:rPr sz="432" b="0">
+                        <a:rPr sz="430" b="0">
                           <a:solidFill>
                             <a:srgbClr val="000000"/>
                           </a:solidFill>
                           <a:latin typeface="Microsoft YaHei UI"/>
                         </a:rPr>
-                        <a:t/>
+                        <a:t>H100 BF16 单帧前向 120ms；H20 推理从 10Hz 提升至 37Hz；Go2 本地跟踪 5+FPS、约 180ms。</a:t>
                       </a:r>
                     </a:p>
                   </a:txBody>
@@ -4277,7 +4277,7 @@
                           </a:solidFill>
                           <a:latin typeface="Microsoft YaHei UI"/>
                         </a:rPr>
-                        <a:t>蚂蚁灵波 Robbyant</a:t>
+                        <a:t>地瓜机器人/它石智航</a:t>
                       </a:r>
                     </a:p>
                   </a:txBody>
@@ -4326,13 +4326,13 @@
                         </a:spcAft>
                       </a:pPr>
                       <a:r>
-                        <a:rPr sz="401" b="0">
+                        <a:rPr sz="430" b="0">
                           <a:solidFill>
                             <a:srgbClr val="000000"/>
                           </a:solidFill>
                           <a:latin typeface="Microsoft YaHei UI"/>
                         </a:rPr>
-                        <a:t>LingBot-VLA 2.0 是 6B VLA，采用 Sparse MoE Action Expert；LingBot-VA 2.0 是约 5B DiT 世界动作模型，LingBot-Vision 为 1B，LingBot-World 参数未公开。</a:t>
+                        <a:t>RDK S600 已适配 3B 参数级具身大模型，模型名称未公开。</a:t>
                       </a:r>
                     </a:p>
                   </a:txBody>
@@ -4436,13 +4436,13 @@
                         </a:spcAft>
                       </a:pPr>
                       <a:r>
-                        <a:rPr sz="401" b="0">
+                        <a:rPr sz="430" b="0">
                           <a:solidFill>
                             <a:srgbClr val="000000"/>
                           </a:solidFill>
                           <a:latin typeface="Microsoft YaHei UI"/>
                         </a:rPr>
-                        <a:t>LingBot-VLA 2.0 在 RTX 4090D 本地推理；LingBot-VA 需要约 18-24GB VRAM；LingBot-Depth 提供 edge-side SDK。</a:t>
+                        <a:t>RDK S600 提供 560 TOPS INT8、32/64GB LPDDR5 和 204.8GB/s 内存带宽。</a:t>
                       </a:r>
                     </a:p>
                   </a:txBody>
@@ -4491,13 +4491,13 @@
                         </a:spcAft>
                       </a:pPr>
                       <a:r>
-                        <a:rPr sz="401" b="0">
+                        <a:rPr sz="430" b="0">
                           <a:solidFill>
                             <a:srgbClr val="000000"/>
                           </a:solidFill>
                           <a:latin typeface="Microsoft YaHei UI"/>
                         </a:rPr>
-                        <a:t>LingBot-VLA 2.0 单次推理约 130ms；LingBot-World 2.0 标称 720p/60fps，控制延迟低于 1s。</a:t>
+                        <a:t/>
                       </a:r>
                     </a:p>
                   </a:txBody>
@@ -4609,7 +4609,7 @@
                           </a:solidFill>
                           <a:latin typeface="Microsoft YaHei UI"/>
                         </a:rPr>
-                        <a:t>MiniCPM-Robot</a:t>
+                        <a:t>星海图 Galaxea</a:t>
                       </a:r>
                     </a:p>
                   </a:txBody>
@@ -4658,13 +4658,13 @@
                         </a:spcAft>
                       </a:pPr>
                       <a:r>
-                        <a:rPr sz="432" b="0">
+                        <a:rPr sz="400" b="0">
                           <a:solidFill>
                             <a:srgbClr val="000000"/>
                           </a:solidFill>
                           <a:latin typeface="Microsoft YaHei UI"/>
                         </a:rPr>
-                        <a:t>MiniCPM-RobotManip 是 1.5B 通用操作 VLA，MiniCPM-RobotTrack 是 0.9B 目标跟踪 VLA。</a:t>
+                        <a:t>G0.5 是自回归 VLA，基于 Qwen3.5 2B 初始化；Fast-WAM/GigaWorld-Policy-0.5 是世界动作模型，模型总参数未公开。</a:t>
                       </a:r>
                     </a:p>
                   </a:txBody>
@@ -4695,6 +4695,1169 @@
                   </a:tcPr>
                 </a:tc>
                 <a:tc>
+                  <a:txBody>
+                    <a:bodyPr wrap="square">
+                      <a:normAutofit/>
+                    </a:bodyPr>
+                    <a:lstStyle/>
+                    <a:p>
+                      <a:pPr algn="l">
+                        <a:lnSpc>
+                          <a:spcPct val="88000"/>
+                        </a:lnSpc>
+                        <a:spcBef>
+                          <a:spcPts val="0"/>
+                        </a:spcBef>
+                        <a:spcAft>
+                          <a:spcPts val="0"/>
+                        </a:spcAft>
+                      </a:pPr>
+                      <a:r>
+                        <a:rPr sz="455" b="0">
+                          <a:solidFill>
+                            <a:srgbClr val="000000"/>
+                          </a:solidFill>
+                          <a:latin typeface="Microsoft YaHei UI"/>
+                        </a:rPr>
+                        <a:t>星海图披露高性能运动小脑和全身控制基础模型，但未公开参数。</a:t>
+                      </a:r>
+                    </a:p>
+                  </a:txBody>
+                  <a:tcPr anchor="ctr" marL="32004" marR="32004" marT="10972" marB="10972">
+                    <a:solidFill>
+                      <a:srgbClr val="F4F7FA"/>
+                    </a:solidFill>
+                    <a:lnL w="2400">
+                      <a:solidFill>
+                        <a:srgbClr val="B4C0CD"/>
+                      </a:solidFill>
+                    </a:lnL>
+                    <a:lnR w="2400">
+                      <a:solidFill>
+                        <a:srgbClr val="B4C0CD"/>
+                      </a:solidFill>
+                    </a:lnR>
+                    <a:lnT w="2400">
+                      <a:solidFill>
+                        <a:srgbClr val="B4C0CD"/>
+                      </a:solidFill>
+                    </a:lnT>
+                    <a:lnB w="2400">
+                      <a:solidFill>
+                        <a:srgbClr val="B4C0CD"/>
+                      </a:solidFill>
+                    </a:lnB>
+                  </a:tcPr>
+                </a:tc>
+                <a:tc>
+                  <a:txBody>
+                    <a:bodyPr wrap="square">
+                      <a:normAutofit/>
+                    </a:bodyPr>
+                    <a:lstStyle/>
+                    <a:p>
+                      <a:pPr algn="l">
+                        <a:lnSpc>
+                          <a:spcPct val="88000"/>
+                        </a:lnSpc>
+                        <a:spcBef>
+                          <a:spcPts val="0"/>
+                        </a:spcBef>
+                        <a:spcAft>
+                          <a:spcPts val="0"/>
+                        </a:spcAft>
+                      </a:pPr>
+                      <a:r>
+                        <a:rPr sz="400" b="0">
+                          <a:solidFill>
+                            <a:srgbClr val="000000"/>
+                          </a:solidFill>
+                          <a:latin typeface="Microsoft YaHei UI"/>
+                        </a:rPr>
+                        <a:t>R1 Lite 原生支持端侧模型部署；Nexo 700 TOPS 为 WRC 会场口径，待公开链接。</a:t>
+                      </a:r>
+                    </a:p>
+                  </a:txBody>
+                  <a:tcPr anchor="ctr" marL="32004" marR="32004" marT="10972" marB="10972">
+                    <a:solidFill>
+                      <a:srgbClr val="F4F7FA"/>
+                    </a:solidFill>
+                    <a:lnL w="2400">
+                      <a:solidFill>
+                        <a:srgbClr val="B4C0CD"/>
+                      </a:solidFill>
+                    </a:lnL>
+                    <a:lnR w="2400">
+                      <a:solidFill>
+                        <a:srgbClr val="B4C0CD"/>
+                      </a:solidFill>
+                    </a:lnR>
+                    <a:lnT w="2400">
+                      <a:solidFill>
+                        <a:srgbClr val="B4C0CD"/>
+                      </a:solidFill>
+                    </a:lnT>
+                    <a:lnB w="2400">
+                      <a:solidFill>
+                        <a:srgbClr val="B4C0CD"/>
+                      </a:solidFill>
+                    </a:lnB>
+                  </a:tcPr>
+                </a:tc>
+                <a:tc>
+                  <a:txBody>
+                    <a:bodyPr wrap="square">
+                      <a:normAutofit/>
+                    </a:bodyPr>
+                    <a:lstStyle/>
+                    <a:p>
+                      <a:pPr algn="l">
+                        <a:lnSpc>
+                          <a:spcPct val="88000"/>
+                        </a:lnSpc>
+                        <a:spcBef>
+                          <a:spcPts val="0"/>
+                        </a:spcBef>
+                        <a:spcAft>
+                          <a:spcPts val="0"/>
+                        </a:spcAft>
+                      </a:pPr>
+                      <a:r>
+                        <a:rPr sz="400" b="0">
+                          <a:solidFill>
+                            <a:srgbClr val="000000"/>
+                          </a:solidFill>
+                          <a:latin typeface="Microsoft YaHei UI"/>
+                        </a:rPr>
+                        <a:t>Fast-WAM 单步约 190ms；GigaWorld-Policy-0.5 在 A100 为 189ms、RTX 4090 为 110ms、C++ 部署为 85ms。</a:t>
+                      </a:r>
+                    </a:p>
+                  </a:txBody>
+                  <a:tcPr anchor="ctr" marL="32004" marR="32004" marT="10972" marB="10972">
+                    <a:solidFill>
+                      <a:srgbClr val="F4F7FA"/>
+                    </a:solidFill>
+                    <a:lnL w="2400">
+                      <a:solidFill>
+                        <a:srgbClr val="B4C0CD"/>
+                      </a:solidFill>
+                    </a:lnL>
+                    <a:lnR w="2400">
+                      <a:solidFill>
+                        <a:srgbClr val="B4C0CD"/>
+                      </a:solidFill>
+                    </a:lnR>
+                    <a:lnT w="2400">
+                      <a:solidFill>
+                        <a:srgbClr val="B4C0CD"/>
+                      </a:solidFill>
+                    </a:lnT>
+                    <a:lnB w="2400">
+                      <a:solidFill>
+                        <a:srgbClr val="B4C0CD"/>
+                      </a:solidFill>
+                    </a:lnB>
+                  </a:tcPr>
+                </a:tc>
+              </a:tr>
+              <a:tr h="379827">
+                <a:tc vMerge="1">
+                  <a:txBody>
+                    <a:bodyPr wrap="square">
+                      <a:normAutofit/>
+                    </a:bodyPr>
+                    <a:lstStyle/>
+                    <a:p>
+                      <a:pPr algn="l">
+                        <a:lnSpc>
+                          <a:spcPct val="88000"/>
+                        </a:lnSpc>
+                        <a:spcBef>
+                          <a:spcPts val="0"/>
+                        </a:spcBef>
+                        <a:spcAft>
+                          <a:spcPts val="0"/>
+                        </a:spcAft>
+                      </a:pPr>
+                      <a:r>
+                        <a:rPr sz="455" b="0">
+                          <a:solidFill>
+                            <a:srgbClr val="000000"/>
+                          </a:solidFill>
+                          <a:latin typeface="Microsoft YaHei UI"/>
+                        </a:rPr>
+                        <a:t/>
+                      </a:r>
+                    </a:p>
+                  </a:txBody>
+                  <a:tcPr anchor="ctr" marL="32004" marR="32004" marT="10972" marB="10972">
+                    <a:solidFill>
+                      <a:srgbClr val="FFFFFF"/>
+                    </a:solidFill>
+                    <a:lnL w="2400">
+                      <a:solidFill>
+                        <a:srgbClr val="B4C0CD"/>
+                      </a:solidFill>
+                    </a:lnL>
+                    <a:lnR w="2400">
+                      <a:solidFill>
+                        <a:srgbClr val="B4C0CD"/>
+                      </a:solidFill>
+                    </a:lnR>
+                    <a:lnT w="2400">
+                      <a:solidFill>
+                        <a:srgbClr val="B4C0CD"/>
+                      </a:solidFill>
+                    </a:lnT>
+                    <a:lnB w="2400">
+                      <a:solidFill>
+                        <a:srgbClr val="B4C0CD"/>
+                      </a:solidFill>
+                    </a:lnB>
+                  </a:tcPr>
+                </a:tc>
+                <a:tc>
+                  <a:txBody>
+                    <a:bodyPr wrap="square">
+                      <a:normAutofit/>
+                    </a:bodyPr>
+                    <a:lstStyle/>
+                    <a:p>
+                      <a:pPr algn="ctr">
+                        <a:lnSpc>
+                          <a:spcPct val="88000"/>
+                        </a:lnSpc>
+                        <a:spcBef>
+                          <a:spcPts val="0"/>
+                        </a:spcBef>
+                        <a:spcAft>
+                          <a:spcPts val="0"/>
+                        </a:spcAft>
+                      </a:pPr>
+                      <a:r>
+                        <a:rPr sz="455" b="1">
+                          <a:solidFill>
+                            <a:srgbClr val="000000"/>
+                          </a:solidFill>
+                          <a:latin typeface="Microsoft YaHei UI"/>
+                        </a:rPr>
+                        <a:t>蔚蓝智能 BabyAlpha</a:t>
+                      </a:r>
+                    </a:p>
+                  </a:txBody>
+                  <a:tcPr anchor="ctr" marL="32004" marR="32004" marT="10972" marB="10972">
+                    <a:solidFill>
+                      <a:srgbClr val="FFFFFF"/>
+                    </a:solidFill>
+                    <a:lnL w="2400">
+                      <a:solidFill>
+                        <a:srgbClr val="B4C0CD"/>
+                      </a:solidFill>
+                    </a:lnL>
+                    <a:lnR w="2400">
+                      <a:solidFill>
+                        <a:srgbClr val="B4C0CD"/>
+                      </a:solidFill>
+                    </a:lnR>
+                    <a:lnT w="2400">
+                      <a:solidFill>
+                        <a:srgbClr val="B4C0CD"/>
+                      </a:solidFill>
+                    </a:lnT>
+                    <a:lnB w="2400">
+                      <a:solidFill>
+                        <a:srgbClr val="B4C0CD"/>
+                      </a:solidFill>
+                    </a:lnB>
+                  </a:tcPr>
+                </a:tc>
+                <a:tc>
+                  <a:txBody>
+                    <a:bodyPr wrap="square">
+                      <a:normAutofit/>
+                    </a:bodyPr>
+                    <a:lstStyle/>
+                    <a:p>
+                      <a:pPr algn="l">
+                        <a:lnSpc>
+                          <a:spcPct val="88000"/>
+                        </a:lnSpc>
+                        <a:spcBef>
+                          <a:spcPts val="0"/>
+                        </a:spcBef>
+                        <a:spcAft>
+                          <a:spcPts val="0"/>
+                        </a:spcAft>
+                      </a:pPr>
+                      <a:r>
+                        <a:rPr sz="430" b="0">
+                          <a:solidFill>
+                            <a:srgbClr val="000000"/>
+                          </a:solidFill>
+                          <a:latin typeface="Microsoft YaHei UI"/>
+                        </a:rPr>
+                        <a:t>BabyAlpha A3 本地运行 7B 交互大模型，用于对话和环境识别。</a:t>
+                      </a:r>
+                    </a:p>
+                  </a:txBody>
+                  <a:tcPr anchor="ctr" marL="32004" marR="32004" marT="10972" marB="10972">
+                    <a:solidFill>
+                      <a:srgbClr val="FFFFFF"/>
+                    </a:solidFill>
+                    <a:lnL w="2400">
+                      <a:solidFill>
+                        <a:srgbClr val="B4C0CD"/>
+                      </a:solidFill>
+                    </a:lnL>
+                    <a:lnR w="2400">
+                      <a:solidFill>
+                        <a:srgbClr val="B4C0CD"/>
+                      </a:solidFill>
+                    </a:lnR>
+                    <a:lnT w="2400">
+                      <a:solidFill>
+                        <a:srgbClr val="B4C0CD"/>
+                      </a:solidFill>
+                    </a:lnT>
+                    <a:lnB w="2400">
+                      <a:solidFill>
+                        <a:srgbClr val="B4C0CD"/>
+                      </a:solidFill>
+                    </a:lnB>
+                  </a:tcPr>
+                </a:tc>
+                <a:tc>
+                  <a:txBody>
+                    <a:bodyPr wrap="square">
+                      <a:normAutofit/>
+                    </a:bodyPr>
+                    <a:lstStyle/>
+                    <a:p>
+                      <a:pPr algn="l">
+                        <a:lnSpc>
+                          <a:spcPct val="88000"/>
+                        </a:lnSpc>
+                        <a:spcBef>
+                          <a:spcPts val="0"/>
+                        </a:spcBef>
+                        <a:spcAft>
+                          <a:spcPts val="0"/>
+                        </a:spcAft>
+                      </a:pPr>
+                      <a:r>
+                        <a:rPr sz="455" b="0">
+                          <a:solidFill>
+                            <a:srgbClr val="000000"/>
+                          </a:solidFill>
+                          <a:latin typeface="Microsoft YaHei UI"/>
+                        </a:rPr>
+                        <a:t/>
+                      </a:r>
+                    </a:p>
+                  </a:txBody>
+                  <a:tcPr anchor="ctr" marL="32004" marR="32004" marT="10972" marB="10972">
+                    <a:solidFill>
+                      <a:srgbClr val="FFFFFF"/>
+                    </a:solidFill>
+                    <a:lnL w="2400">
+                      <a:solidFill>
+                        <a:srgbClr val="B4C0CD"/>
+                      </a:solidFill>
+                    </a:lnL>
+                    <a:lnR w="2400">
+                      <a:solidFill>
+                        <a:srgbClr val="B4C0CD"/>
+                      </a:solidFill>
+                    </a:lnR>
+                    <a:lnT w="2400">
+                      <a:solidFill>
+                        <a:srgbClr val="B4C0CD"/>
+                      </a:solidFill>
+                    </a:lnT>
+                    <a:lnB w="2400">
+                      <a:solidFill>
+                        <a:srgbClr val="B4C0CD"/>
+                      </a:solidFill>
+                    </a:lnB>
+                  </a:tcPr>
+                </a:tc>
+                <a:tc>
+                  <a:txBody>
+                    <a:bodyPr wrap="square">
+                      <a:normAutofit/>
+                    </a:bodyPr>
+                    <a:lstStyle/>
+                    <a:p>
+                      <a:pPr algn="l">
+                        <a:lnSpc>
+                          <a:spcPct val="88000"/>
+                        </a:lnSpc>
+                        <a:spcBef>
+                          <a:spcPts val="0"/>
+                        </a:spcBef>
+                        <a:spcAft>
+                          <a:spcPts val="0"/>
+                        </a:spcAft>
+                      </a:pPr>
+                      <a:r>
+                        <a:rPr sz="430" b="0">
+                          <a:solidFill>
+                            <a:srgbClr val="000000"/>
+                          </a:solidFill>
+                          <a:latin typeface="Microsoft YaHei UI"/>
+                        </a:rPr>
+                        <a:t>BabyAlpha A3 本地端侧运行，芯片型号未公开。</a:t>
+                      </a:r>
+                    </a:p>
+                  </a:txBody>
+                  <a:tcPr anchor="ctr" marL="32004" marR="32004" marT="10972" marB="10972">
+                    <a:solidFill>
+                      <a:srgbClr val="FFFFFF"/>
+                    </a:solidFill>
+                    <a:lnL w="2400">
+                      <a:solidFill>
+                        <a:srgbClr val="B4C0CD"/>
+                      </a:solidFill>
+                    </a:lnL>
+                    <a:lnR w="2400">
+                      <a:solidFill>
+                        <a:srgbClr val="B4C0CD"/>
+                      </a:solidFill>
+                    </a:lnR>
+                    <a:lnT w="2400">
+                      <a:solidFill>
+                        <a:srgbClr val="B4C0CD"/>
+                      </a:solidFill>
+                    </a:lnT>
+                    <a:lnB w="2400">
+                      <a:solidFill>
+                        <a:srgbClr val="B4C0CD"/>
+                      </a:solidFill>
+                    </a:lnB>
+                  </a:tcPr>
+                </a:tc>
+                <a:tc>
+                  <a:txBody>
+                    <a:bodyPr wrap="square">
+                      <a:normAutofit/>
+                    </a:bodyPr>
+                    <a:lstStyle/>
+                    <a:p>
+                      <a:pPr algn="l">
+                        <a:lnSpc>
+                          <a:spcPct val="88000"/>
+                        </a:lnSpc>
+                        <a:spcBef>
+                          <a:spcPts val="0"/>
+                        </a:spcBef>
+                        <a:spcAft>
+                          <a:spcPts val="0"/>
+                        </a:spcAft>
+                      </a:pPr>
+                      <a:r>
+                        <a:rPr sz="430" b="0">
+                          <a:solidFill>
+                            <a:srgbClr val="000000"/>
+                          </a:solidFill>
+                          <a:latin typeface="Microsoft YaHei UI"/>
+                        </a:rPr>
+                        <a:t/>
+                      </a:r>
+                    </a:p>
+                  </a:txBody>
+                  <a:tcPr anchor="ctr" marL="32004" marR="32004" marT="10972" marB="10972">
+                    <a:solidFill>
+                      <a:srgbClr val="FFFFFF"/>
+                    </a:solidFill>
+                    <a:lnL w="2400">
+                      <a:solidFill>
+                        <a:srgbClr val="B4C0CD"/>
+                      </a:solidFill>
+                    </a:lnL>
+                    <a:lnR w="2400">
+                      <a:solidFill>
+                        <a:srgbClr val="B4C0CD"/>
+                      </a:solidFill>
+                    </a:lnR>
+                    <a:lnT w="2400">
+                      <a:solidFill>
+                        <a:srgbClr val="B4C0CD"/>
+                      </a:solidFill>
+                    </a:lnT>
+                    <a:lnB w="2400">
+                      <a:solidFill>
+                        <a:srgbClr val="B4C0CD"/>
+                      </a:solidFill>
+                    </a:lnB>
+                  </a:tcPr>
+                </a:tc>
+              </a:tr>
+              <a:tr h="379827">
+                <a:tc rowSpan="5">
+                  <a:txBody>
+                    <a:bodyPr wrap="square">
+                      <a:normAutofit/>
+                    </a:bodyPr>
+                    <a:lstStyle/>
+                    <a:p>
+                      <a:pPr algn="l">
+                        <a:lnSpc>
+                          <a:spcPct val="88000"/>
+                        </a:lnSpc>
+                        <a:spcBef>
+                          <a:spcPts val="0"/>
+                        </a:spcBef>
+                        <a:spcAft>
+                          <a:spcPts val="0"/>
+                        </a:spcAft>
+                      </a:pPr>
+                      <a:r>
+                        <a:rPr sz="465" b="0">
+                          <a:solidFill>
+                            <a:srgbClr val="000000"/>
+                          </a:solidFill>
+                          <a:latin typeface="Microsoft YaHei UI"/>
+                        </a:rPr>
+                        <a:t>端云协同/可切换：端侧处理快反应或离线兜底，云侧处理慢推理和调度。优点是兼顾低时延与强模型；缺点是依赖网络和系统编排。扩展样本 6/22，占 27.3%。</a:t>
+                      </a:r>
+                    </a:p>
+                  </a:txBody>
+                  <a:tcPr anchor="ctr" marL="32004" marR="32004" marT="10972" marB="10972">
+                    <a:solidFill>
+                      <a:srgbClr val="ECF2F7"/>
+                    </a:solidFill>
+                    <a:lnL w="3200">
+                      <a:solidFill>
+                        <a:srgbClr val="AAB8C6"/>
+                      </a:solidFill>
+                    </a:lnL>
+                    <a:lnR w="3200">
+                      <a:solidFill>
+                        <a:srgbClr val="AAB8C6"/>
+                      </a:solidFill>
+                    </a:lnR>
+                    <a:lnT w="3200">
+                      <a:solidFill>
+                        <a:srgbClr val="AAB8C6"/>
+                      </a:solidFill>
+                    </a:lnT>
+                    <a:lnB w="3200">
+                      <a:solidFill>
+                        <a:srgbClr val="AAB8C6"/>
+                      </a:solidFill>
+                    </a:lnB>
+                  </a:tcPr>
+                </a:tc>
+                <a:tc>
+                  <a:txBody>
+                    <a:bodyPr wrap="square">
+                      <a:normAutofit/>
+                    </a:bodyPr>
+                    <a:lstStyle/>
+                    <a:p>
+                      <a:pPr algn="ctr">
+                        <a:lnSpc>
+                          <a:spcPct val="88000"/>
+                        </a:lnSpc>
+                        <a:spcBef>
+                          <a:spcPts val="0"/>
+                        </a:spcBef>
+                        <a:spcAft>
+                          <a:spcPts val="0"/>
+                        </a:spcAft>
+                      </a:pPr>
+                      <a:r>
+                        <a:rPr sz="455" b="1">
+                          <a:solidFill>
+                            <a:srgbClr val="000000"/>
+                          </a:solidFill>
+                          <a:latin typeface="Microsoft YaHei UI"/>
+                        </a:rPr>
+                        <a:t>科大讯飞/灵境智源</a:t>
+                      </a:r>
+                    </a:p>
+                  </a:txBody>
+                  <a:tcPr anchor="ctr" marL="32004" marR="32004" marT="10972" marB="10972">
+                    <a:solidFill>
+                      <a:srgbClr val="F4F7FA"/>
+                    </a:solidFill>
+                    <a:lnL w="2400">
+                      <a:solidFill>
+                        <a:srgbClr val="B4C0CD"/>
+                      </a:solidFill>
+                    </a:lnL>
+                    <a:lnR w="2400">
+                      <a:solidFill>
+                        <a:srgbClr val="B4C0CD"/>
+                      </a:solidFill>
+                    </a:lnR>
+                    <a:lnT w="2400">
+                      <a:solidFill>
+                        <a:srgbClr val="B4C0CD"/>
+                      </a:solidFill>
+                    </a:lnT>
+                    <a:lnB w="2400">
+                      <a:solidFill>
+                        <a:srgbClr val="B4C0CD"/>
+                      </a:solidFill>
+                    </a:lnB>
+                  </a:tcPr>
+                </a:tc>
+                <a:tc>
+                  <a:txBody>
+                    <a:bodyPr wrap="square">
+                      <a:normAutofit/>
+                    </a:bodyPr>
+                    <a:lstStyle/>
+                    <a:p>
+                      <a:pPr algn="l">
+                        <a:lnSpc>
+                          <a:spcPct val="88000"/>
+                        </a:lnSpc>
+                        <a:spcBef>
+                          <a:spcPts val="0"/>
+                        </a:spcBef>
+                        <a:spcAft>
+                          <a:spcPts val="0"/>
+                        </a:spcAft>
+                      </a:pPr>
+                      <a:r>
+                        <a:rPr sz="400" b="0">
+                          <a:solidFill>
+                            <a:srgbClr val="000000"/>
+                          </a:solidFill>
+                          <a:latin typeface="Microsoft YaHei UI"/>
+                        </a:rPr>
+                        <a:t>讯飞机器人大脑采用 MScape N1100/MS-N1100 端侧具身智脑设备，具体大脑模型未公开。</a:t>
+                      </a:r>
+                    </a:p>
+                  </a:txBody>
+                  <a:tcPr anchor="ctr" marL="32004" marR="32004" marT="10972" marB="10972">
+                    <a:solidFill>
+                      <a:srgbClr val="F4F7FA"/>
+                    </a:solidFill>
+                    <a:lnL w="2400">
+                      <a:solidFill>
+                        <a:srgbClr val="B4C0CD"/>
+                      </a:solidFill>
+                    </a:lnL>
+                    <a:lnR w="2400">
+                      <a:solidFill>
+                        <a:srgbClr val="B4C0CD"/>
+                      </a:solidFill>
+                    </a:lnR>
+                    <a:lnT w="2400">
+                      <a:solidFill>
+                        <a:srgbClr val="B4C0CD"/>
+                      </a:solidFill>
+                    </a:lnT>
+                    <a:lnB w="2400">
+                      <a:solidFill>
+                        <a:srgbClr val="B4C0CD"/>
+                      </a:solidFill>
+                    </a:lnB>
+                  </a:tcPr>
+                </a:tc>
+                <a:tc>
+                  <a:txBody>
+                    <a:bodyPr wrap="square">
+                      <a:normAutofit/>
+                    </a:bodyPr>
+                    <a:lstStyle/>
+                    <a:p>
+                      <a:pPr algn="l">
+                        <a:lnSpc>
+                          <a:spcPct val="88000"/>
+                        </a:lnSpc>
+                        <a:spcBef>
+                          <a:spcPts val="0"/>
+                        </a:spcBef>
+                        <a:spcAft>
+                          <a:spcPts val="0"/>
+                        </a:spcAft>
+                      </a:pPr>
+                      <a:r>
+                        <a:rPr sz="455" b="0">
+                          <a:solidFill>
+                            <a:srgbClr val="000000"/>
+                          </a:solidFill>
+                          <a:latin typeface="Microsoft YaHei UI"/>
+                        </a:rPr>
+                        <a:t>N1100 以 Xenomai 硬实时和 EtherCAT 接口支撑控制，但未公开独立小脑模型。</a:t>
+                      </a:r>
+                    </a:p>
+                  </a:txBody>
+                  <a:tcPr anchor="ctr" marL="32004" marR="32004" marT="10972" marB="10972">
+                    <a:solidFill>
+                      <a:srgbClr val="F4F7FA"/>
+                    </a:solidFill>
+                    <a:lnL w="2400">
+                      <a:solidFill>
+                        <a:srgbClr val="B4C0CD"/>
+                      </a:solidFill>
+                    </a:lnL>
+                    <a:lnR w="2400">
+                      <a:solidFill>
+                        <a:srgbClr val="B4C0CD"/>
+                      </a:solidFill>
+                    </a:lnR>
+                    <a:lnT w="2400">
+                      <a:solidFill>
+                        <a:srgbClr val="B4C0CD"/>
+                      </a:solidFill>
+                    </a:lnT>
+                    <a:lnB w="2400">
+                      <a:solidFill>
+                        <a:srgbClr val="B4C0CD"/>
+                      </a:solidFill>
+                    </a:lnB>
+                  </a:tcPr>
+                </a:tc>
+                <a:tc>
+                  <a:txBody>
+                    <a:bodyPr wrap="square">
+                      <a:normAutofit/>
+                    </a:bodyPr>
+                    <a:lstStyle/>
+                    <a:p>
+                      <a:pPr algn="l">
+                        <a:lnSpc>
+                          <a:spcPct val="88000"/>
+                        </a:lnSpc>
+                        <a:spcBef>
+                          <a:spcPts val="0"/>
+                        </a:spcBef>
+                        <a:spcAft>
+                          <a:spcPts val="0"/>
+                        </a:spcAft>
+                      </a:pPr>
+                      <a:r>
+                        <a:rPr sz="400" b="0">
+                          <a:solidFill>
+                            <a:srgbClr val="000000"/>
+                          </a:solidFill>
+                          <a:latin typeface="Microsoft YaHei UI"/>
+                        </a:rPr>
+                        <a:t>N1100 官方披露 1000 TOPS；会场口径为可按网络切换云+端或纯端侧，核心为 Jetson T5000、可选 T4000，其中 T5000 官方规格为 2070 FP4 TFLOPS、128GB、40-130W。</a:t>
+                      </a:r>
+                    </a:p>
+                  </a:txBody>
+                  <a:tcPr anchor="ctr" marL="32004" marR="32004" marT="10972" marB="10972">
+                    <a:solidFill>
+                      <a:srgbClr val="F4F7FA"/>
+                    </a:solidFill>
+                    <a:lnL w="2400">
+                      <a:solidFill>
+                        <a:srgbClr val="B4C0CD"/>
+                      </a:solidFill>
+                    </a:lnL>
+                    <a:lnR w="2400">
+                      <a:solidFill>
+                        <a:srgbClr val="B4C0CD"/>
+                      </a:solidFill>
+                    </a:lnR>
+                    <a:lnT w="2400">
+                      <a:solidFill>
+                        <a:srgbClr val="B4C0CD"/>
+                      </a:solidFill>
+                    </a:lnT>
+                    <a:lnB w="2400">
+                      <a:solidFill>
+                        <a:srgbClr val="B4C0CD"/>
+                      </a:solidFill>
+                    </a:lnB>
+                  </a:tcPr>
+                </a:tc>
+                <a:tc>
+                  <a:txBody>
+                    <a:bodyPr wrap="square">
+                      <a:normAutofit/>
+                    </a:bodyPr>
+                    <a:lstStyle/>
+                    <a:p>
+                      <a:pPr algn="l">
+                        <a:lnSpc>
+                          <a:spcPct val="88000"/>
+                        </a:lnSpc>
+                        <a:spcBef>
+                          <a:spcPts val="0"/>
+                        </a:spcBef>
+                        <a:spcAft>
+                          <a:spcPts val="0"/>
+                        </a:spcAft>
+                      </a:pPr>
+                      <a:r>
+                        <a:rPr sz="400" b="0">
+                          <a:solidFill>
+                            <a:srgbClr val="000000"/>
+                          </a:solidFill>
+                          <a:latin typeface="Microsoft YaHei UI"/>
+                        </a:rPr>
+                        <a:t/>
+                      </a:r>
+                    </a:p>
+                  </a:txBody>
+                  <a:tcPr anchor="ctr" marL="32004" marR="32004" marT="10972" marB="10972">
+                    <a:solidFill>
+                      <a:srgbClr val="F4F7FA"/>
+                    </a:solidFill>
+                    <a:lnL w="2400">
+                      <a:solidFill>
+                        <a:srgbClr val="B4C0CD"/>
+                      </a:solidFill>
+                    </a:lnL>
+                    <a:lnR w="2400">
+                      <a:solidFill>
+                        <a:srgbClr val="B4C0CD"/>
+                      </a:solidFill>
+                    </a:lnR>
+                    <a:lnT w="2400">
+                      <a:solidFill>
+                        <a:srgbClr val="B4C0CD"/>
+                      </a:solidFill>
+                    </a:lnT>
+                    <a:lnB w="2400">
+                      <a:solidFill>
+                        <a:srgbClr val="B4C0CD"/>
+                      </a:solidFill>
+                    </a:lnB>
+                  </a:tcPr>
+                </a:tc>
+              </a:tr>
+              <a:tr h="379827">
+                <a:tc vMerge="1">
+                  <a:txBody>
+                    <a:bodyPr wrap="square">
+                      <a:normAutofit/>
+                    </a:bodyPr>
+                    <a:lstStyle/>
+                    <a:p>
+                      <a:pPr algn="l">
+                        <a:lnSpc>
+                          <a:spcPct val="88000"/>
+                        </a:lnSpc>
+                        <a:spcBef>
+                          <a:spcPts val="0"/>
+                        </a:spcBef>
+                        <a:spcAft>
+                          <a:spcPts val="0"/>
+                        </a:spcAft>
+                      </a:pPr>
+                      <a:r>
+                        <a:rPr sz="455" b="0">
+                          <a:solidFill>
+                            <a:srgbClr val="000000"/>
+                          </a:solidFill>
+                          <a:latin typeface="Microsoft YaHei UI"/>
+                        </a:rPr>
+                        <a:t/>
+                      </a:r>
+                    </a:p>
+                  </a:txBody>
+                  <a:tcPr anchor="ctr" marL="32004" marR="32004" marT="10972" marB="10972">
+                    <a:solidFill>
+                      <a:srgbClr val="FFFFFF"/>
+                    </a:solidFill>
+                    <a:lnL w="2400">
+                      <a:solidFill>
+                        <a:srgbClr val="B4C0CD"/>
+                      </a:solidFill>
+                    </a:lnL>
+                    <a:lnR w="2400">
+                      <a:solidFill>
+                        <a:srgbClr val="B4C0CD"/>
+                      </a:solidFill>
+                    </a:lnR>
+                    <a:lnT w="2400">
+                      <a:solidFill>
+                        <a:srgbClr val="B4C0CD"/>
+                      </a:solidFill>
+                    </a:lnT>
+                    <a:lnB w="2400">
+                      <a:solidFill>
+                        <a:srgbClr val="B4C0CD"/>
+                      </a:solidFill>
+                    </a:lnB>
+                  </a:tcPr>
+                </a:tc>
+                <a:tc>
+                  <a:txBody>
+                    <a:bodyPr wrap="square">
+                      <a:normAutofit/>
+                    </a:bodyPr>
+                    <a:lstStyle/>
+                    <a:p>
+                      <a:pPr algn="ctr">
+                        <a:lnSpc>
+                          <a:spcPct val="88000"/>
+                        </a:lnSpc>
+                        <a:spcBef>
+                          <a:spcPts val="0"/>
+                        </a:spcBef>
+                        <a:spcAft>
+                          <a:spcPts val="0"/>
+                        </a:spcAft>
+                      </a:pPr>
+                      <a:r>
+                        <a:rPr sz="455" b="1">
+                          <a:solidFill>
+                            <a:srgbClr val="000000"/>
+                          </a:solidFill>
+                          <a:latin typeface="Microsoft YaHei UI"/>
+                        </a:rPr>
+                        <a:t>中国兵器/杭州智元</a:t>
+                      </a:r>
+                    </a:p>
+                  </a:txBody>
+                  <a:tcPr anchor="ctr" marL="32004" marR="32004" marT="10972" marB="10972">
+                    <a:solidFill>
+                      <a:srgbClr val="FFFFFF"/>
+                    </a:solidFill>
+                    <a:lnL w="2400">
+                      <a:solidFill>
+                        <a:srgbClr val="B4C0CD"/>
+                      </a:solidFill>
+                    </a:lnL>
+                    <a:lnR w="2400">
+                      <a:solidFill>
+                        <a:srgbClr val="B4C0CD"/>
+                      </a:solidFill>
+                    </a:lnR>
+                    <a:lnT w="2400">
+                      <a:solidFill>
+                        <a:srgbClr val="B4C0CD"/>
+                      </a:solidFill>
+                    </a:lnT>
+                    <a:lnB w="2400">
+                      <a:solidFill>
+                        <a:srgbClr val="B4C0CD"/>
+                      </a:solidFill>
+                    </a:lnB>
+                  </a:tcPr>
+                </a:tc>
+                <a:tc>
+                  <a:txBody>
+                    <a:bodyPr wrap="square">
+                      <a:normAutofit/>
+                    </a:bodyPr>
+                    <a:lstStyle/>
+                    <a:p>
+                      <a:pPr algn="l">
+                        <a:lnSpc>
+                          <a:spcPct val="88000"/>
+                        </a:lnSpc>
+                        <a:spcBef>
+                          <a:spcPts val="0"/>
+                        </a:spcBef>
+                        <a:spcAft>
+                          <a:spcPts val="0"/>
+                        </a:spcAft>
+                      </a:pPr>
+                      <a:r>
+                        <a:rPr sz="430" b="0">
+                          <a:solidFill>
+                            <a:srgbClr val="000000"/>
+                          </a:solidFill>
+                          <a:latin typeface="Microsoft YaHei UI"/>
+                        </a:rPr>
+                        <a:t>具身大脑通用套件基于多模态大模型构建“感知-记忆-规划-执行-反思”自主决策闭环，模型参数未公开。</a:t>
+                      </a:r>
+                    </a:p>
+                  </a:txBody>
+                  <a:tcPr anchor="ctr" marL="32004" marR="32004" marT="10972" marB="10972">
+                    <a:solidFill>
+                      <a:srgbClr val="FFFFFF"/>
+                    </a:solidFill>
+                    <a:lnL w="2400">
+                      <a:solidFill>
+                        <a:srgbClr val="B4C0CD"/>
+                      </a:solidFill>
+                    </a:lnL>
+                    <a:lnR w="2400">
+                      <a:solidFill>
+                        <a:srgbClr val="B4C0CD"/>
+                      </a:solidFill>
+                    </a:lnR>
+                    <a:lnT w="2400">
+                      <a:solidFill>
+                        <a:srgbClr val="B4C0CD"/>
+                      </a:solidFill>
+                    </a:lnT>
+                    <a:lnB w="2400">
+                      <a:solidFill>
+                        <a:srgbClr val="B4C0CD"/>
+                      </a:solidFill>
+                    </a:lnB>
+                  </a:tcPr>
+                </a:tc>
+                <a:tc>
+                  <a:txBody>
+                    <a:bodyPr wrap="square">
+                      <a:normAutofit/>
+                    </a:bodyPr>
+                    <a:lstStyle/>
+                    <a:p>
+                      <a:pPr algn="l">
+                        <a:lnSpc>
+                          <a:spcPct val="88000"/>
+                        </a:lnSpc>
+                        <a:spcBef>
+                          <a:spcPts val="0"/>
+                        </a:spcBef>
+                        <a:spcAft>
+                          <a:spcPts val="0"/>
+                        </a:spcAft>
+                      </a:pPr>
+                      <a:r>
+                        <a:rPr sz="455" b="0">
+                          <a:solidFill>
+                            <a:srgbClr val="000000"/>
+                          </a:solidFill>
+                          <a:latin typeface="Microsoft YaHei UI"/>
+                        </a:rPr>
+                        <a:t/>
+                      </a:r>
+                    </a:p>
+                  </a:txBody>
+                  <a:tcPr anchor="ctr" marL="32004" marR="32004" marT="10972" marB="10972">
+                    <a:solidFill>
+                      <a:srgbClr val="FFFFFF"/>
+                    </a:solidFill>
+                    <a:lnL w="2400">
+                      <a:solidFill>
+                        <a:srgbClr val="B4C0CD"/>
+                      </a:solidFill>
+                    </a:lnL>
+                    <a:lnR w="2400">
+                      <a:solidFill>
+                        <a:srgbClr val="B4C0CD"/>
+                      </a:solidFill>
+                    </a:lnR>
+                    <a:lnT w="2400">
+                      <a:solidFill>
+                        <a:srgbClr val="B4C0CD"/>
+                      </a:solidFill>
+                    </a:lnT>
+                    <a:lnB w="2400">
+                      <a:solidFill>
+                        <a:srgbClr val="B4C0CD"/>
+                      </a:solidFill>
+                    </a:lnB>
+                  </a:tcPr>
+                </a:tc>
+                <a:tc>
+                  <a:txBody>
+                    <a:bodyPr wrap="square">
+                      <a:normAutofit/>
+                    </a:bodyPr>
+                    <a:lstStyle/>
+                    <a:p>
+                      <a:pPr algn="l">
+                        <a:lnSpc>
+                          <a:spcPct val="88000"/>
+                        </a:lnSpc>
+                        <a:spcBef>
+                          <a:spcPts val="0"/>
+                        </a:spcBef>
+                        <a:spcAft>
+                          <a:spcPts val="0"/>
+                        </a:spcAft>
+                      </a:pPr>
+                      <a:r>
+                        <a:rPr sz="430" b="0">
+                          <a:solidFill>
+                            <a:srgbClr val="000000"/>
+                          </a:solidFill>
+                          <a:latin typeface="Microsoft YaHei UI"/>
+                        </a:rPr>
+                        <a:t>公开稿披露具身大脑通用套件和机动抗毁边缘云；会场观察为端侧大脑设备无网可用，但智能弱于云侧大脑。</a:t>
+                      </a:r>
+                    </a:p>
+                  </a:txBody>
+                  <a:tcPr anchor="ctr" marL="32004" marR="32004" marT="10972" marB="10972">
+                    <a:solidFill>
+                      <a:srgbClr val="FFFFFF"/>
+                    </a:solidFill>
+                    <a:lnL w="2400">
+                      <a:solidFill>
+                        <a:srgbClr val="B4C0CD"/>
+                      </a:solidFill>
+                    </a:lnL>
+                    <a:lnR w="2400">
+                      <a:solidFill>
+                        <a:srgbClr val="B4C0CD"/>
+                      </a:solidFill>
+                    </a:lnR>
+                    <a:lnT w="2400">
+                      <a:solidFill>
+                        <a:srgbClr val="B4C0CD"/>
+                      </a:solidFill>
+                    </a:lnT>
+                    <a:lnB w="2400">
+                      <a:solidFill>
+                        <a:srgbClr val="B4C0CD"/>
+                      </a:solidFill>
+                    </a:lnB>
+                  </a:tcPr>
+                </a:tc>
+                <a:tc>
+                  <a:txBody>
+                    <a:bodyPr wrap="square">
+                      <a:normAutofit/>
+                    </a:bodyPr>
+                    <a:lstStyle/>
+                    <a:p>
+                      <a:pPr algn="l">
+                        <a:lnSpc>
+                          <a:spcPct val="88000"/>
+                        </a:lnSpc>
+                        <a:spcBef>
+                          <a:spcPts val="0"/>
+                        </a:spcBef>
+                        <a:spcAft>
+                          <a:spcPts val="0"/>
+                        </a:spcAft>
+                      </a:pPr>
+                      <a:r>
+                        <a:rPr sz="430" b="0">
+                          <a:solidFill>
+                            <a:srgbClr val="000000"/>
+                          </a:solidFill>
+                          <a:latin typeface="Microsoft YaHei UI"/>
+                        </a:rPr>
+                        <a:t/>
+                      </a:r>
+                    </a:p>
+                  </a:txBody>
+                  <a:tcPr anchor="ctr" marL="32004" marR="32004" marT="10972" marB="10972">
+                    <a:solidFill>
+                      <a:srgbClr val="FFFFFF"/>
+                    </a:solidFill>
+                    <a:lnL w="2400">
+                      <a:solidFill>
+                        <a:srgbClr val="B4C0CD"/>
+                      </a:solidFill>
+                    </a:lnL>
+                    <a:lnR w="2400">
+                      <a:solidFill>
+                        <a:srgbClr val="B4C0CD"/>
+                      </a:solidFill>
+                    </a:lnR>
+                    <a:lnT w="2400">
+                      <a:solidFill>
+                        <a:srgbClr val="B4C0CD"/>
+                      </a:solidFill>
+                    </a:lnT>
+                    <a:lnB w="2400">
+                      <a:solidFill>
+                        <a:srgbClr val="B4C0CD"/>
+                      </a:solidFill>
+                    </a:lnB>
+                  </a:tcPr>
+                </a:tc>
+              </a:tr>
+              <a:tr h="379827">
+                <a:tc vMerge="1">
                   <a:txBody>
                     <a:bodyPr wrap="square">
                       <a:normAutofit/>
@@ -4756,7 +5919,7 @@
                     </a:bodyPr>
                     <a:lstStyle/>
                     <a:p>
-                      <a:pPr algn="l">
+                      <a:pPr algn="ctr">
                         <a:lnSpc>
                           <a:spcPct val="88000"/>
                         </a:lnSpc>
@@ -4768,13 +5931,13 @@
                         </a:spcAft>
                       </a:pPr>
                       <a:r>
-                        <a:rPr sz="432" b="0">
+                        <a:rPr sz="455" b="1">
                           <a:solidFill>
                             <a:srgbClr val="000000"/>
                           </a:solidFill>
                           <a:latin typeface="Microsoft YaHei UI"/>
                         </a:rPr>
-                        <a:t>RobotManip 可在 H100/H20 推理，RobotTrack 可部署在 Jetson Orin NX 16GB。</a:t>
+                        <a:t>优必选 UBTECH</a:t>
                       </a:r>
                     </a:p>
                   </a:txBody>
@@ -4823,13 +5986,178 @@
                         </a:spcAft>
                       </a:pPr>
                       <a:r>
-                        <a:rPr sz="432" b="0">
+                        <a:rPr sz="430" b="0">
                           <a:solidFill>
                             <a:srgbClr val="000000"/>
                           </a:solidFill>
                           <a:latin typeface="Microsoft YaHei UI"/>
                         </a:rPr>
-                        <a:t>H100 BF16 单帧前向 120ms；H20 推理从 10Hz 提升至 37Hz；Go2 本地跟踪 5+FPS、约 180ms。</a:t>
+                        <a:t>Thinker 是最大 100B 的具身基座模型，Thinker-VLA 负责动作执行，Thinker-WM 是世界模型。</a:t>
+                      </a:r>
+                    </a:p>
+                  </a:txBody>
+                  <a:tcPr anchor="ctr" marL="32004" marR="32004" marT="10972" marB="10972">
+                    <a:solidFill>
+                      <a:srgbClr val="F4F7FA"/>
+                    </a:solidFill>
+                    <a:lnL w="2400">
+                      <a:solidFill>
+                        <a:srgbClr val="B4C0CD"/>
+                      </a:solidFill>
+                    </a:lnL>
+                    <a:lnR w="2400">
+                      <a:solidFill>
+                        <a:srgbClr val="B4C0CD"/>
+                      </a:solidFill>
+                    </a:lnR>
+                    <a:lnT w="2400">
+                      <a:solidFill>
+                        <a:srgbClr val="B4C0CD"/>
+                      </a:solidFill>
+                    </a:lnT>
+                    <a:lnB w="2400">
+                      <a:solidFill>
+                        <a:srgbClr val="B4C0CD"/>
+                      </a:solidFill>
+                    </a:lnB>
+                  </a:tcPr>
+                </a:tc>
+                <a:tc>
+                  <a:txBody>
+                    <a:bodyPr wrap="square">
+                      <a:normAutofit/>
+                    </a:bodyPr>
+                    <a:lstStyle/>
+                    <a:p>
+                      <a:pPr algn="l">
+                        <a:lnSpc>
+                          <a:spcPct val="88000"/>
+                        </a:lnSpc>
+                        <a:spcBef>
+                          <a:spcPts val="0"/>
+                        </a:spcBef>
+                        <a:spcAft>
+                          <a:spcPts val="0"/>
+                        </a:spcAft>
+                      </a:pPr>
+                      <a:r>
+                        <a:rPr sz="455" b="0">
+                          <a:solidFill>
+                            <a:srgbClr val="000000"/>
+                          </a:solidFill>
+                          <a:latin typeface="Microsoft YaHei UI"/>
+                        </a:rPr>
+                        <a:t/>
+                      </a:r>
+                    </a:p>
+                  </a:txBody>
+                  <a:tcPr anchor="ctr" marL="32004" marR="32004" marT="10972" marB="10972">
+                    <a:solidFill>
+                      <a:srgbClr val="F4F7FA"/>
+                    </a:solidFill>
+                    <a:lnL w="2400">
+                      <a:solidFill>
+                        <a:srgbClr val="B4C0CD"/>
+                      </a:solidFill>
+                    </a:lnL>
+                    <a:lnR w="2400">
+                      <a:solidFill>
+                        <a:srgbClr val="B4C0CD"/>
+                      </a:solidFill>
+                    </a:lnR>
+                    <a:lnT w="2400">
+                      <a:solidFill>
+                        <a:srgbClr val="B4C0CD"/>
+                      </a:solidFill>
+                    </a:lnT>
+                    <a:lnB w="2400">
+                      <a:solidFill>
+                        <a:srgbClr val="B4C0CD"/>
+                      </a:solidFill>
+                    </a:lnB>
+                  </a:tcPr>
+                </a:tc>
+                <a:tc>
+                  <a:txBody>
+                    <a:bodyPr wrap="square">
+                      <a:normAutofit/>
+                    </a:bodyPr>
+                    <a:lstStyle/>
+                    <a:p>
+                      <a:pPr algn="l">
+                        <a:lnSpc>
+                          <a:spcPct val="88000"/>
+                        </a:lnSpc>
+                        <a:spcBef>
+                          <a:spcPts val="0"/>
+                        </a:spcBef>
+                        <a:spcAft>
+                          <a:spcPts val="0"/>
+                        </a:spcAft>
+                      </a:pPr>
+                      <a:r>
+                        <a:rPr sz="430" b="0">
+                          <a:solidFill>
+                            <a:srgbClr val="000000"/>
+                          </a:solidFill>
+                          <a:latin typeface="Microsoft YaHei UI"/>
+                        </a:rPr>
+                        <a:t>优必选将高实时能力放在端侧，云端承担慢推理、多机调度和模型管理；VLA 端侧显存需求从 64GB 优化至 32GB。</a:t>
+                      </a:r>
+                    </a:p>
+                  </a:txBody>
+                  <a:tcPr anchor="ctr" marL="32004" marR="32004" marT="10972" marB="10972">
+                    <a:solidFill>
+                      <a:srgbClr val="F4F7FA"/>
+                    </a:solidFill>
+                    <a:lnL w="2400">
+                      <a:solidFill>
+                        <a:srgbClr val="B4C0CD"/>
+                      </a:solidFill>
+                    </a:lnL>
+                    <a:lnR w="2400">
+                      <a:solidFill>
+                        <a:srgbClr val="B4C0CD"/>
+                      </a:solidFill>
+                    </a:lnR>
+                    <a:lnT w="2400">
+                      <a:solidFill>
+                        <a:srgbClr val="B4C0CD"/>
+                      </a:solidFill>
+                    </a:lnT>
+                    <a:lnB w="2400">
+                      <a:solidFill>
+                        <a:srgbClr val="B4C0CD"/>
+                      </a:solidFill>
+                    </a:lnB>
+                  </a:tcPr>
+                </a:tc>
+                <a:tc>
+                  <a:txBody>
+                    <a:bodyPr wrap="square">
+                      <a:normAutofit/>
+                    </a:bodyPr>
+                    <a:lstStyle/>
+                    <a:p>
+                      <a:pPr algn="l">
+                        <a:lnSpc>
+                          <a:spcPct val="88000"/>
+                        </a:lnSpc>
+                        <a:spcBef>
+                          <a:spcPts val="0"/>
+                        </a:spcBef>
+                        <a:spcAft>
+                          <a:spcPts val="0"/>
+                        </a:spcAft>
+                      </a:pPr>
+                      <a:r>
+                        <a:rPr sz="430" b="0">
+                          <a:solidFill>
+                            <a:srgbClr val="000000"/>
+                          </a:solidFill>
+                          <a:latin typeface="Microsoft YaHei UI"/>
+                        </a:rPr>
+                        <a:t>VLA 推理效率提升 176%。</a:t>
                       </a:r>
                     </a:p>
                   </a:txBody>
@@ -4941,7 +6269,7 @@
                           </a:solidFill>
                           <a:latin typeface="Microsoft YaHei UI"/>
                         </a:rPr>
-                        <a:t>地瓜机器人/它石智航</a:t>
+                        <a:t>智元机器人 AGIBOT</a:t>
                       </a:r>
                     </a:p>
                   </a:txBody>
@@ -4990,13 +6318,13 @@
                         </a:spcAft>
                       </a:pPr>
                       <a:r>
-                        <a:rPr sz="432" b="0">
+                        <a:rPr sz="430" b="0">
                           <a:solidFill>
                             <a:srgbClr val="000000"/>
                           </a:solidFill>
                           <a:latin typeface="Microsoft YaHei UI"/>
                         </a:rPr>
-                        <a:t>RDK S600 已适配 3B 参数级具身大模型，模型名称未公开。</a:t>
+                        <a:t>GO-1/GO-2 是具身基座模型，GE-2 是世界模型，Genie Evolver 1.0 是闭环真机强化学习系统，参数未公开。</a:t>
                       </a:r>
                     </a:p>
                   </a:txBody>
@@ -5027,6 +6355,1169 @@
                   </a:tcPr>
                 </a:tc>
                 <a:tc>
+                  <a:txBody>
+                    <a:bodyPr wrap="square">
+                      <a:normAutofit/>
+                    </a:bodyPr>
+                    <a:lstStyle/>
+                    <a:p>
+                      <a:pPr algn="l">
+                        <a:lnSpc>
+                          <a:spcPct val="88000"/>
+                        </a:lnSpc>
+                        <a:spcBef>
+                          <a:spcPts val="0"/>
+                        </a:spcBef>
+                        <a:spcAft>
+                          <a:spcPts val="0"/>
+                        </a:spcAft>
+                      </a:pPr>
+                      <a:r>
+                        <a:rPr sz="455" b="0">
+                          <a:solidFill>
+                            <a:srgbClr val="000000"/>
+                          </a:solidFill>
+                          <a:latin typeface="Microsoft YaHei UI"/>
+                        </a:rPr>
+                        <a:t>Action Expert 负责精细动作执行，参数未公开。</a:t>
+                      </a:r>
+                    </a:p>
+                  </a:txBody>
+                  <a:tcPr anchor="ctr" marL="32004" marR="32004" marT="10972" marB="10972">
+                    <a:solidFill>
+                      <a:srgbClr val="FFFFFF"/>
+                    </a:solidFill>
+                    <a:lnL w="2400">
+                      <a:solidFill>
+                        <a:srgbClr val="B4C0CD"/>
+                      </a:solidFill>
+                    </a:lnL>
+                    <a:lnR w="2400">
+                      <a:solidFill>
+                        <a:srgbClr val="B4C0CD"/>
+                      </a:solidFill>
+                    </a:lnR>
+                    <a:lnT w="2400">
+                      <a:solidFill>
+                        <a:srgbClr val="B4C0CD"/>
+                      </a:solidFill>
+                    </a:lnT>
+                    <a:lnB w="2400">
+                      <a:solidFill>
+                        <a:srgbClr val="B4C0CD"/>
+                      </a:solidFill>
+                    </a:lnB>
+                  </a:tcPr>
+                </a:tc>
+                <a:tc>
+                  <a:txBody>
+                    <a:bodyPr wrap="square">
+                      <a:normAutofit/>
+                    </a:bodyPr>
+                    <a:lstStyle/>
+                    <a:p>
+                      <a:pPr algn="l">
+                        <a:lnSpc>
+                          <a:spcPct val="88000"/>
+                        </a:lnSpc>
+                        <a:spcBef>
+                          <a:spcPts val="0"/>
+                        </a:spcBef>
+                        <a:spcAft>
+                          <a:spcPts val="0"/>
+                        </a:spcAft>
+                      </a:pPr>
+                      <a:r>
+                        <a:rPr sz="430" b="0">
+                          <a:solidFill>
+                            <a:srgbClr val="000000"/>
+                          </a:solidFill>
+                          <a:latin typeface="Microsoft YaHei UI"/>
+                        </a:rPr>
+                        <a:t>A3 Ultra 公开披露 700 TOPS 端侧具身处理器。</a:t>
+                      </a:r>
+                    </a:p>
+                  </a:txBody>
+                  <a:tcPr anchor="ctr" marL="32004" marR="32004" marT="10972" marB="10972">
+                    <a:solidFill>
+                      <a:srgbClr val="FFFFFF"/>
+                    </a:solidFill>
+                    <a:lnL w="2400">
+                      <a:solidFill>
+                        <a:srgbClr val="B4C0CD"/>
+                      </a:solidFill>
+                    </a:lnL>
+                    <a:lnR w="2400">
+                      <a:solidFill>
+                        <a:srgbClr val="B4C0CD"/>
+                      </a:solidFill>
+                    </a:lnR>
+                    <a:lnT w="2400">
+                      <a:solidFill>
+                        <a:srgbClr val="B4C0CD"/>
+                      </a:solidFill>
+                    </a:lnT>
+                    <a:lnB w="2400">
+                      <a:solidFill>
+                        <a:srgbClr val="B4C0CD"/>
+                      </a:solidFill>
+                    </a:lnB>
+                  </a:tcPr>
+                </a:tc>
+                <a:tc>
+                  <a:txBody>
+                    <a:bodyPr wrap="square">
+                      <a:normAutofit/>
+                    </a:bodyPr>
+                    <a:lstStyle/>
+                    <a:p>
+                      <a:pPr algn="l">
+                        <a:lnSpc>
+                          <a:spcPct val="88000"/>
+                        </a:lnSpc>
+                        <a:spcBef>
+                          <a:spcPts val="0"/>
+                        </a:spcBef>
+                        <a:spcAft>
+                          <a:spcPts val="0"/>
+                        </a:spcAft>
+                      </a:pPr>
+                      <a:r>
+                        <a:rPr sz="430" b="0">
+                          <a:solidFill>
+                            <a:srgbClr val="000000"/>
+                          </a:solidFill>
+                          <a:latin typeface="Microsoft YaHei UI"/>
+                        </a:rPr>
+                        <a:t>二手口径称 GO-1/GO-2 可在边缘端 10Hz-20Hz 推理，官方 Hz 未公开。</a:t>
+                      </a:r>
+                    </a:p>
+                  </a:txBody>
+                  <a:tcPr anchor="ctr" marL="32004" marR="32004" marT="10972" marB="10972">
+                    <a:solidFill>
+                      <a:srgbClr val="FFFFFF"/>
+                    </a:solidFill>
+                    <a:lnL w="2400">
+                      <a:solidFill>
+                        <a:srgbClr val="B4C0CD"/>
+                      </a:solidFill>
+                    </a:lnL>
+                    <a:lnR w="2400">
+                      <a:solidFill>
+                        <a:srgbClr val="B4C0CD"/>
+                      </a:solidFill>
+                    </a:lnR>
+                    <a:lnT w="2400">
+                      <a:solidFill>
+                        <a:srgbClr val="B4C0CD"/>
+                      </a:solidFill>
+                    </a:lnT>
+                    <a:lnB w="2400">
+                      <a:solidFill>
+                        <a:srgbClr val="B4C0CD"/>
+                      </a:solidFill>
+                    </a:lnB>
+                  </a:tcPr>
+                </a:tc>
+              </a:tr>
+              <a:tr h="379827">
+                <a:tc vMerge="1">
+                  <a:txBody>
+                    <a:bodyPr wrap="square">
+                      <a:normAutofit/>
+                    </a:bodyPr>
+                    <a:lstStyle/>
+                    <a:p>
+                      <a:pPr algn="l">
+                        <a:lnSpc>
+                          <a:spcPct val="88000"/>
+                        </a:lnSpc>
+                        <a:spcBef>
+                          <a:spcPts val="0"/>
+                        </a:spcBef>
+                        <a:spcAft>
+                          <a:spcPts val="0"/>
+                        </a:spcAft>
+                      </a:pPr>
+                      <a:r>
+                        <a:rPr sz="455" b="0">
+                          <a:solidFill>
+                            <a:srgbClr val="000000"/>
+                          </a:solidFill>
+                          <a:latin typeface="Microsoft YaHei UI"/>
+                        </a:rPr>
+                        <a:t/>
+                      </a:r>
+                    </a:p>
+                  </a:txBody>
+                  <a:tcPr anchor="ctr" marL="32004" marR="32004" marT="10972" marB="10972">
+                    <a:solidFill>
+                      <a:srgbClr val="F4F7FA"/>
+                    </a:solidFill>
+                    <a:lnL w="2400">
+                      <a:solidFill>
+                        <a:srgbClr val="B4C0CD"/>
+                      </a:solidFill>
+                    </a:lnL>
+                    <a:lnR w="2400">
+                      <a:solidFill>
+                        <a:srgbClr val="B4C0CD"/>
+                      </a:solidFill>
+                    </a:lnR>
+                    <a:lnT w="2400">
+                      <a:solidFill>
+                        <a:srgbClr val="B4C0CD"/>
+                      </a:solidFill>
+                    </a:lnT>
+                    <a:lnB w="2400">
+                      <a:solidFill>
+                        <a:srgbClr val="B4C0CD"/>
+                      </a:solidFill>
+                    </a:lnB>
+                  </a:tcPr>
+                </a:tc>
+                <a:tc>
+                  <a:txBody>
+                    <a:bodyPr wrap="square">
+                      <a:normAutofit/>
+                    </a:bodyPr>
+                    <a:lstStyle/>
+                    <a:p>
+                      <a:pPr algn="ctr">
+                        <a:lnSpc>
+                          <a:spcPct val="88000"/>
+                        </a:lnSpc>
+                        <a:spcBef>
+                          <a:spcPts val="0"/>
+                        </a:spcBef>
+                        <a:spcAft>
+                          <a:spcPts val="0"/>
+                        </a:spcAft>
+                      </a:pPr>
+                      <a:r>
+                        <a:rPr sz="455" b="1">
+                          <a:solidFill>
+                            <a:srgbClr val="000000"/>
+                          </a:solidFill>
+                          <a:latin typeface="Microsoft YaHei UI"/>
+                        </a:rPr>
+                        <a:t>北京人形/天工</a:t>
+                      </a:r>
+                    </a:p>
+                  </a:txBody>
+                  <a:tcPr anchor="ctr" marL="32004" marR="32004" marT="10972" marB="10972">
+                    <a:solidFill>
+                      <a:srgbClr val="F4F7FA"/>
+                    </a:solidFill>
+                    <a:lnL w="2400">
+                      <a:solidFill>
+                        <a:srgbClr val="B4C0CD"/>
+                      </a:solidFill>
+                    </a:lnL>
+                    <a:lnR w="2400">
+                      <a:solidFill>
+                        <a:srgbClr val="B4C0CD"/>
+                      </a:solidFill>
+                    </a:lnR>
+                    <a:lnT w="2400">
+                      <a:solidFill>
+                        <a:srgbClr val="B4C0CD"/>
+                      </a:solidFill>
+                    </a:lnT>
+                    <a:lnB w="2400">
+                      <a:solidFill>
+                        <a:srgbClr val="B4C0CD"/>
+                      </a:solidFill>
+                    </a:lnB>
+                  </a:tcPr>
+                </a:tc>
+                <a:tc>
+                  <a:txBody>
+                    <a:bodyPr wrap="square">
+                      <a:normAutofit/>
+                    </a:bodyPr>
+                    <a:lstStyle/>
+                    <a:p>
+                      <a:pPr algn="l">
+                        <a:lnSpc>
+                          <a:spcPct val="88000"/>
+                        </a:lnSpc>
+                        <a:spcBef>
+                          <a:spcPts val="0"/>
+                        </a:spcBef>
+                        <a:spcAft>
+                          <a:spcPts val="0"/>
+                        </a:spcAft>
+                      </a:pPr>
+                      <a:r>
+                        <a:rPr sz="400" b="0">
+                          <a:solidFill>
+                            <a:srgbClr val="000000"/>
+                          </a:solidFill>
+                          <a:latin typeface="Microsoft YaHei UI"/>
+                        </a:rPr>
+                        <a:t>Pelican-Unify 是统一表征具身世界模型，集成 VLM、action model 和 WFM；PelicanVLM 是 72B 视觉语言大模型，XR-1 是跨本体 VLA。</a:t>
+                      </a:r>
+                    </a:p>
+                  </a:txBody>
+                  <a:tcPr anchor="ctr" marL="32004" marR="32004" marT="10972" marB="10972">
+                    <a:solidFill>
+                      <a:srgbClr val="F4F7FA"/>
+                    </a:solidFill>
+                    <a:lnL w="2400">
+                      <a:solidFill>
+                        <a:srgbClr val="B4C0CD"/>
+                      </a:solidFill>
+                    </a:lnL>
+                    <a:lnR w="2400">
+                      <a:solidFill>
+                        <a:srgbClr val="B4C0CD"/>
+                      </a:solidFill>
+                    </a:lnR>
+                    <a:lnT w="2400">
+                      <a:solidFill>
+                        <a:srgbClr val="B4C0CD"/>
+                      </a:solidFill>
+                    </a:lnT>
+                    <a:lnB w="2400">
+                      <a:solidFill>
+                        <a:srgbClr val="B4C0CD"/>
+                      </a:solidFill>
+                    </a:lnB>
+                  </a:tcPr>
+                </a:tc>
+                <a:tc>
+                  <a:txBody>
+                    <a:bodyPr wrap="square">
+                      <a:normAutofit/>
+                    </a:bodyPr>
+                    <a:lstStyle/>
+                    <a:p>
+                      <a:pPr algn="l">
+                        <a:lnSpc>
+                          <a:spcPct val="88000"/>
+                        </a:lnSpc>
+                        <a:spcBef>
+                          <a:spcPts val="0"/>
+                        </a:spcBef>
+                        <a:spcAft>
+                          <a:spcPts val="0"/>
+                        </a:spcAft>
+                      </a:pPr>
+                      <a:r>
+                        <a:rPr sz="455" b="0">
+                          <a:solidFill>
+                            <a:srgbClr val="000000"/>
+                          </a:solidFill>
+                          <a:latin typeface="Microsoft YaHei UI"/>
+                        </a:rPr>
+                        <a:t>北京人形披露全身控制自主导航系统，但未公开参数。</a:t>
+                      </a:r>
+                    </a:p>
+                  </a:txBody>
+                  <a:tcPr anchor="ctr" marL="32004" marR="32004" marT="10972" marB="10972">
+                    <a:solidFill>
+                      <a:srgbClr val="F4F7FA"/>
+                    </a:solidFill>
+                    <a:lnL w="2400">
+                      <a:solidFill>
+                        <a:srgbClr val="B4C0CD"/>
+                      </a:solidFill>
+                    </a:lnL>
+                    <a:lnR w="2400">
+                      <a:solidFill>
+                        <a:srgbClr val="B4C0CD"/>
+                      </a:solidFill>
+                    </a:lnR>
+                    <a:lnT w="2400">
+                      <a:solidFill>
+                        <a:srgbClr val="B4C0CD"/>
+                      </a:solidFill>
+                    </a:lnT>
+                    <a:lnB w="2400">
+                      <a:solidFill>
+                        <a:srgbClr val="B4C0CD"/>
+                      </a:solidFill>
+                    </a:lnB>
+                  </a:tcPr>
+                </a:tc>
+                <a:tc>
+                  <a:txBody>
+                    <a:bodyPr wrap="square">
+                      <a:normAutofit/>
+                    </a:bodyPr>
+                    <a:lstStyle/>
+                    <a:p>
+                      <a:pPr algn="l">
+                        <a:lnSpc>
+                          <a:spcPct val="88000"/>
+                        </a:lnSpc>
+                        <a:spcBef>
+                          <a:spcPts val="0"/>
+                        </a:spcBef>
+                        <a:spcAft>
+                          <a:spcPts val="0"/>
+                        </a:spcAft>
+                      </a:pPr>
+                      <a:r>
+                        <a:rPr sz="400" b="0">
+                          <a:solidFill>
+                            <a:srgbClr val="000000"/>
+                          </a:solidFill>
+                          <a:latin typeface="Microsoft YaHei UI"/>
+                        </a:rPr>
+                        <a:t>Pelican-Unify 已在天轶真机部署跑通；天工 Omni 采用端侧原生智能架构并支持大模型边缘部署。</a:t>
+                      </a:r>
+                    </a:p>
+                  </a:txBody>
+                  <a:tcPr anchor="ctr" marL="32004" marR="32004" marT="10972" marB="10972">
+                    <a:solidFill>
+                      <a:srgbClr val="F4F7FA"/>
+                    </a:solidFill>
+                    <a:lnL w="2400">
+                      <a:solidFill>
+                        <a:srgbClr val="B4C0CD"/>
+                      </a:solidFill>
+                    </a:lnL>
+                    <a:lnR w="2400">
+                      <a:solidFill>
+                        <a:srgbClr val="B4C0CD"/>
+                      </a:solidFill>
+                    </a:lnR>
+                    <a:lnT w="2400">
+                      <a:solidFill>
+                        <a:srgbClr val="B4C0CD"/>
+                      </a:solidFill>
+                    </a:lnT>
+                    <a:lnB w="2400">
+                      <a:solidFill>
+                        <a:srgbClr val="B4C0CD"/>
+                      </a:solidFill>
+                    </a:lnB>
+                  </a:tcPr>
+                </a:tc>
+                <a:tc>
+                  <a:txBody>
+                    <a:bodyPr wrap="square">
+                      <a:normAutofit/>
+                    </a:bodyPr>
+                    <a:lstStyle/>
+                    <a:p>
+                      <a:pPr algn="l">
+                        <a:lnSpc>
+                          <a:spcPct val="88000"/>
+                        </a:lnSpc>
+                        <a:spcBef>
+                          <a:spcPts val="0"/>
+                        </a:spcBef>
+                        <a:spcAft>
+                          <a:spcPts val="0"/>
+                        </a:spcAft>
+                      </a:pPr>
+                      <a:r>
+                        <a:rPr sz="400" b="0">
+                          <a:solidFill>
+                            <a:srgbClr val="000000"/>
+                          </a:solidFill>
+                          <a:latin typeface="Microsoft YaHei UI"/>
+                        </a:rPr>
+                        <a:t/>
+                      </a:r>
+                    </a:p>
+                  </a:txBody>
+                  <a:tcPr anchor="ctr" marL="32004" marR="32004" marT="10972" marB="10972">
+                    <a:solidFill>
+                      <a:srgbClr val="F4F7FA"/>
+                    </a:solidFill>
+                    <a:lnL w="2400">
+                      <a:solidFill>
+                        <a:srgbClr val="B4C0CD"/>
+                      </a:solidFill>
+                    </a:lnL>
+                    <a:lnR w="2400">
+                      <a:solidFill>
+                        <a:srgbClr val="B4C0CD"/>
+                      </a:solidFill>
+                    </a:lnR>
+                    <a:lnT w="2400">
+                      <a:solidFill>
+                        <a:srgbClr val="B4C0CD"/>
+                      </a:solidFill>
+                    </a:lnT>
+                    <a:lnB w="2400">
+                      <a:solidFill>
+                        <a:srgbClr val="B4C0CD"/>
+                      </a:solidFill>
+                    </a:lnB>
+                  </a:tcPr>
+                </a:tc>
+              </a:tr>
+              <a:tr h="379827">
+                <a:tc rowSpan="3">
+                  <a:txBody>
+                    <a:bodyPr wrap="square">
+                      <a:normAutofit/>
+                    </a:bodyPr>
+                    <a:lstStyle/>
+                    <a:p>
+                      <a:pPr algn="l">
+                        <a:lnSpc>
+                          <a:spcPct val="88000"/>
+                        </a:lnSpc>
+                        <a:spcBef>
+                          <a:spcPts val="0"/>
+                        </a:spcBef>
+                        <a:spcAft>
+                          <a:spcPts val="0"/>
+                        </a:spcAft>
+                      </a:pPr>
+                      <a:r>
+                        <a:rPr sz="465" b="0">
+                          <a:solidFill>
+                            <a:srgbClr val="000000"/>
+                          </a:solidFill>
+                          <a:latin typeface="Microsoft YaHei UI"/>
+                        </a:rPr>
+                        <a:t>云侧/平台未明：公开资料未说明生产部署方式，或大脑更像平台/研究模型。优点是模型尺度和迭代空间更大；缺点是离线和实时性不确定。扩展样本 11/22，占 50.0%。</a:t>
+                      </a:r>
+                    </a:p>
+                  </a:txBody>
+                  <a:tcPr anchor="ctr" marL="32004" marR="32004" marT="10972" marB="10972">
+                    <a:solidFill>
+                      <a:srgbClr val="ECF2F7"/>
+                    </a:solidFill>
+                    <a:lnL w="3200">
+                      <a:solidFill>
+                        <a:srgbClr val="AAB8C6"/>
+                      </a:solidFill>
+                    </a:lnL>
+                    <a:lnR w="3200">
+                      <a:solidFill>
+                        <a:srgbClr val="AAB8C6"/>
+                      </a:solidFill>
+                    </a:lnR>
+                    <a:lnT w="3200">
+                      <a:solidFill>
+                        <a:srgbClr val="AAB8C6"/>
+                      </a:solidFill>
+                    </a:lnT>
+                    <a:lnB w="3200">
+                      <a:solidFill>
+                        <a:srgbClr val="AAB8C6"/>
+                      </a:solidFill>
+                    </a:lnB>
+                  </a:tcPr>
+                </a:tc>
+                <a:tc>
+                  <a:txBody>
+                    <a:bodyPr wrap="square">
+                      <a:normAutofit/>
+                    </a:bodyPr>
+                    <a:lstStyle/>
+                    <a:p>
+                      <a:pPr algn="ctr">
+                        <a:lnSpc>
+                          <a:spcPct val="88000"/>
+                        </a:lnSpc>
+                        <a:spcBef>
+                          <a:spcPts val="0"/>
+                        </a:spcBef>
+                        <a:spcAft>
+                          <a:spcPts val="0"/>
+                        </a:spcAft>
+                      </a:pPr>
+                      <a:r>
+                        <a:rPr sz="455" b="1">
+                          <a:solidFill>
+                            <a:srgbClr val="000000"/>
+                          </a:solidFill>
+                          <a:latin typeface="Microsoft YaHei UI"/>
+                        </a:rPr>
+                        <a:t>银河通用 Galbot</a:t>
+                      </a:r>
+                    </a:p>
+                  </a:txBody>
+                  <a:tcPr anchor="ctr" marL="32004" marR="32004" marT="10972" marB="10972">
+                    <a:solidFill>
+                      <a:srgbClr val="FFFFFF"/>
+                    </a:solidFill>
+                    <a:lnL w="2400">
+                      <a:solidFill>
+                        <a:srgbClr val="B4C0CD"/>
+                      </a:solidFill>
+                    </a:lnL>
+                    <a:lnR w="2400">
+                      <a:solidFill>
+                        <a:srgbClr val="B4C0CD"/>
+                      </a:solidFill>
+                    </a:lnR>
+                    <a:lnT w="2400">
+                      <a:solidFill>
+                        <a:srgbClr val="B4C0CD"/>
+                      </a:solidFill>
+                    </a:lnT>
+                    <a:lnB w="2400">
+                      <a:solidFill>
+                        <a:srgbClr val="B4C0CD"/>
+                      </a:solidFill>
+                    </a:lnB>
+                  </a:tcPr>
+                </a:tc>
+                <a:tc>
+                  <a:txBody>
+                    <a:bodyPr wrap="square">
+                      <a:normAutofit/>
+                    </a:bodyPr>
+                    <a:lstStyle/>
+                    <a:p>
+                      <a:pPr algn="l">
+                        <a:lnSpc>
+                          <a:spcPct val="88000"/>
+                        </a:lnSpc>
+                        <a:spcBef>
+                          <a:spcPts val="0"/>
+                        </a:spcBef>
+                        <a:spcAft>
+                          <a:spcPts val="0"/>
+                        </a:spcAft>
+                      </a:pPr>
+                      <a:r>
+                        <a:rPr sz="400" b="0">
+                          <a:solidFill>
+                            <a:srgbClr val="000000"/>
+                          </a:solidFill>
+                          <a:latin typeface="Microsoft YaHei UI"/>
+                        </a:rPr>
+                        <a:t>LDA-1B 是 1B 隐式世界-动作基础模型，AstraBrain WAM 是世界动作模型，GraspVLA/GroceryVLA/TrackVLA 是技能 VLA。</a:t>
+                      </a:r>
+                    </a:p>
+                  </a:txBody>
+                  <a:tcPr anchor="ctr" marL="32004" marR="32004" marT="10972" marB="10972">
+                    <a:solidFill>
+                      <a:srgbClr val="FFFFFF"/>
+                    </a:solidFill>
+                    <a:lnL w="2400">
+                      <a:solidFill>
+                        <a:srgbClr val="B4C0CD"/>
+                      </a:solidFill>
+                    </a:lnL>
+                    <a:lnR w="2400">
+                      <a:solidFill>
+                        <a:srgbClr val="B4C0CD"/>
+                      </a:solidFill>
+                    </a:lnR>
+                    <a:lnT w="2400">
+                      <a:solidFill>
+                        <a:srgbClr val="B4C0CD"/>
+                      </a:solidFill>
+                    </a:lnT>
+                    <a:lnB w="2400">
+                      <a:solidFill>
+                        <a:srgbClr val="B4C0CD"/>
+                      </a:solidFill>
+                    </a:lnB>
+                  </a:tcPr>
+                </a:tc>
+                <a:tc>
+                  <a:txBody>
+                    <a:bodyPr wrap="square">
+                      <a:normAutofit/>
+                    </a:bodyPr>
+                    <a:lstStyle/>
+                    <a:p>
+                      <a:pPr algn="l">
+                        <a:lnSpc>
+                          <a:spcPct val="88000"/>
+                        </a:lnSpc>
+                        <a:spcBef>
+                          <a:spcPts val="0"/>
+                        </a:spcBef>
+                        <a:spcAft>
+                          <a:spcPts val="0"/>
+                        </a:spcAft>
+                      </a:pPr>
+                      <a:r>
+                        <a:rPr sz="455" b="0">
+                          <a:solidFill>
+                            <a:srgbClr val="000000"/>
+                          </a:solidFill>
+                          <a:latin typeface="Microsoft YaHei UI"/>
+                        </a:rPr>
+                        <a:t>AstraBrain-WBC 0.5 是 8040 万参数全身实时运控小脑。</a:t>
+                      </a:r>
+                    </a:p>
+                  </a:txBody>
+                  <a:tcPr anchor="ctr" marL="32004" marR="32004" marT="10972" marB="10972">
+                    <a:solidFill>
+                      <a:srgbClr val="FFFFFF"/>
+                    </a:solidFill>
+                    <a:lnL w="2400">
+                      <a:solidFill>
+                        <a:srgbClr val="B4C0CD"/>
+                      </a:solidFill>
+                    </a:lnL>
+                    <a:lnR w="2400">
+                      <a:solidFill>
+                        <a:srgbClr val="B4C0CD"/>
+                      </a:solidFill>
+                    </a:lnR>
+                    <a:lnT w="2400">
+                      <a:solidFill>
+                        <a:srgbClr val="B4C0CD"/>
+                      </a:solidFill>
+                    </a:lnT>
+                    <a:lnB w="2400">
+                      <a:solidFill>
+                        <a:srgbClr val="B4C0CD"/>
+                      </a:solidFill>
+                    </a:lnB>
+                  </a:tcPr>
+                </a:tc>
+                <a:tc>
+                  <a:txBody>
+                    <a:bodyPr wrap="square">
+                      <a:normAutofit/>
+                    </a:bodyPr>
+                    <a:lstStyle/>
+                    <a:p>
+                      <a:pPr algn="l">
+                        <a:lnSpc>
+                          <a:spcPct val="88000"/>
+                        </a:lnSpc>
+                        <a:spcBef>
+                          <a:spcPts val="0"/>
+                        </a:spcBef>
+                        <a:spcAft>
+                          <a:spcPts val="0"/>
+                        </a:spcAft>
+                      </a:pPr>
+                      <a:r>
+                        <a:rPr sz="400" b="0">
+                          <a:solidFill>
+                            <a:srgbClr val="000000"/>
+                          </a:solidFill>
+                          <a:latin typeface="Microsoft YaHei UI"/>
+                        </a:rPr>
+                        <a:t>AstraBrain-WBC 0.5 公开测试使用单张 RTX 4090，并支持 Jetson Orin onboard deployment；LDA-1B 生产部署算力未公开。</a:t>
+                      </a:r>
+                    </a:p>
+                  </a:txBody>
+                  <a:tcPr anchor="ctr" marL="32004" marR="32004" marT="10972" marB="10972">
+                    <a:solidFill>
+                      <a:srgbClr val="FFFFFF"/>
+                    </a:solidFill>
+                    <a:lnL w="2400">
+                      <a:solidFill>
+                        <a:srgbClr val="B4C0CD"/>
+                      </a:solidFill>
+                    </a:lnL>
+                    <a:lnR w="2400">
+                      <a:solidFill>
+                        <a:srgbClr val="B4C0CD"/>
+                      </a:solidFill>
+                    </a:lnR>
+                    <a:lnT w="2400">
+                      <a:solidFill>
+                        <a:srgbClr val="B4C0CD"/>
+                      </a:solidFill>
+                    </a:lnT>
+                    <a:lnB w="2400">
+                      <a:solidFill>
+                        <a:srgbClr val="B4C0CD"/>
+                      </a:solidFill>
+                    </a:lnB>
+                  </a:tcPr>
+                </a:tc>
+                <a:tc>
+                  <a:txBody>
+                    <a:bodyPr wrap="square">
+                      <a:normAutofit/>
+                    </a:bodyPr>
+                    <a:lstStyle/>
+                    <a:p>
+                      <a:pPr algn="l">
+                        <a:lnSpc>
+                          <a:spcPct val="88000"/>
+                        </a:lnSpc>
+                        <a:spcBef>
+                          <a:spcPts val="0"/>
+                        </a:spcBef>
+                        <a:spcAft>
+                          <a:spcPts val="0"/>
+                        </a:spcAft>
+                      </a:pPr>
+                      <a:r>
+                        <a:rPr sz="400" b="0">
+                          <a:solidFill>
+                            <a:srgbClr val="000000"/>
+                          </a:solidFill>
+                          <a:latin typeface="Microsoft YaHei UI"/>
+                        </a:rPr>
+                        <a:t>AstraBrain-WBC 0.5 在 RTX 4090 上推理低于 1.5ms，可满足 50Hz 闭环。</a:t>
+                      </a:r>
+                    </a:p>
+                  </a:txBody>
+                  <a:tcPr anchor="ctr" marL="32004" marR="32004" marT="10972" marB="10972">
+                    <a:solidFill>
+                      <a:srgbClr val="FFFFFF"/>
+                    </a:solidFill>
+                    <a:lnL w="2400">
+                      <a:solidFill>
+                        <a:srgbClr val="B4C0CD"/>
+                      </a:solidFill>
+                    </a:lnL>
+                    <a:lnR w="2400">
+                      <a:solidFill>
+                        <a:srgbClr val="B4C0CD"/>
+                      </a:solidFill>
+                    </a:lnR>
+                    <a:lnT w="2400">
+                      <a:solidFill>
+                        <a:srgbClr val="B4C0CD"/>
+                      </a:solidFill>
+                    </a:lnT>
+                    <a:lnB w="2400">
+                      <a:solidFill>
+                        <a:srgbClr val="B4C0CD"/>
+                      </a:solidFill>
+                    </a:lnB>
+                  </a:tcPr>
+                </a:tc>
+              </a:tr>
+              <a:tr h="379827">
+                <a:tc vMerge="1">
+                  <a:txBody>
+                    <a:bodyPr wrap="square">
+                      <a:normAutofit/>
+                    </a:bodyPr>
+                    <a:lstStyle/>
+                    <a:p>
+                      <a:pPr algn="l">
+                        <a:lnSpc>
+                          <a:spcPct val="88000"/>
+                        </a:lnSpc>
+                        <a:spcBef>
+                          <a:spcPts val="0"/>
+                        </a:spcBef>
+                        <a:spcAft>
+                          <a:spcPts val="0"/>
+                        </a:spcAft>
+                      </a:pPr>
+                      <a:r>
+                        <a:rPr sz="455" b="0">
+                          <a:solidFill>
+                            <a:srgbClr val="000000"/>
+                          </a:solidFill>
+                          <a:latin typeface="Microsoft YaHei UI"/>
+                        </a:rPr>
+                        <a:t/>
+                      </a:r>
+                    </a:p>
+                  </a:txBody>
+                  <a:tcPr anchor="ctr" marL="32004" marR="32004" marT="10972" marB="10972">
+                    <a:solidFill>
+                      <a:srgbClr val="F4F7FA"/>
+                    </a:solidFill>
+                    <a:lnL w="2400">
+                      <a:solidFill>
+                        <a:srgbClr val="B4C0CD"/>
+                      </a:solidFill>
+                    </a:lnL>
+                    <a:lnR w="2400">
+                      <a:solidFill>
+                        <a:srgbClr val="B4C0CD"/>
+                      </a:solidFill>
+                    </a:lnR>
+                    <a:lnT w="2400">
+                      <a:solidFill>
+                        <a:srgbClr val="B4C0CD"/>
+                      </a:solidFill>
+                    </a:lnT>
+                    <a:lnB w="2400">
+                      <a:solidFill>
+                        <a:srgbClr val="B4C0CD"/>
+                      </a:solidFill>
+                    </a:lnB>
+                  </a:tcPr>
+                </a:tc>
+                <a:tc>
+                  <a:txBody>
+                    <a:bodyPr wrap="square">
+                      <a:normAutofit/>
+                    </a:bodyPr>
+                    <a:lstStyle/>
+                    <a:p>
+                      <a:pPr algn="ctr">
+                        <a:lnSpc>
+                          <a:spcPct val="88000"/>
+                        </a:lnSpc>
+                        <a:spcBef>
+                          <a:spcPts val="0"/>
+                        </a:spcBef>
+                        <a:spcAft>
+                          <a:spcPts val="0"/>
+                        </a:spcAft>
+                      </a:pPr>
+                      <a:r>
+                        <a:rPr sz="455" b="1">
+                          <a:solidFill>
+                            <a:srgbClr val="000000"/>
+                          </a:solidFill>
+                          <a:latin typeface="Microsoft YaHei UI"/>
+                        </a:rPr>
+                        <a:t>智平方 AI2</a:t>
+                      </a:r>
+                    </a:p>
+                  </a:txBody>
+                  <a:tcPr anchor="ctr" marL="32004" marR="32004" marT="10972" marB="10972">
+                    <a:solidFill>
+                      <a:srgbClr val="F4F7FA"/>
+                    </a:solidFill>
+                    <a:lnL w="2400">
+                      <a:solidFill>
+                        <a:srgbClr val="B4C0CD"/>
+                      </a:solidFill>
+                    </a:lnL>
+                    <a:lnR w="2400">
+                      <a:solidFill>
+                        <a:srgbClr val="B4C0CD"/>
+                      </a:solidFill>
+                    </a:lnR>
+                    <a:lnT w="2400">
+                      <a:solidFill>
+                        <a:srgbClr val="B4C0CD"/>
+                      </a:solidFill>
+                    </a:lnT>
+                    <a:lnB w="2400">
+                      <a:solidFill>
+                        <a:srgbClr val="B4C0CD"/>
+                      </a:solidFill>
+                    </a:lnB>
+                  </a:tcPr>
+                </a:tc>
+                <a:tc>
+                  <a:txBody>
+                    <a:bodyPr wrap="square">
+                      <a:normAutofit/>
+                    </a:bodyPr>
+                    <a:lstStyle/>
+                    <a:p>
+                      <a:pPr algn="l">
+                        <a:lnSpc>
+                          <a:spcPct val="88000"/>
+                        </a:lnSpc>
+                        <a:spcBef>
+                          <a:spcPts val="0"/>
+                        </a:spcBef>
+                        <a:spcAft>
+                          <a:spcPts val="0"/>
+                        </a:spcAft>
+                      </a:pPr>
+                      <a:r>
+                        <a:rPr sz="430" b="0">
+                          <a:solidFill>
+                            <a:srgbClr val="000000"/>
+                          </a:solidFill>
+                          <a:latin typeface="Microsoft YaHei UI"/>
+                        </a:rPr>
+                        <a:t>AlphaBrain 是具身大模型，GOVLA/FiS-VLA 是采用异构输入和异步频率的双系统 VLA，参数未公开。</a:t>
+                      </a:r>
+                    </a:p>
+                  </a:txBody>
+                  <a:tcPr anchor="ctr" marL="32004" marR="32004" marT="10972" marB="10972">
+                    <a:solidFill>
+                      <a:srgbClr val="F4F7FA"/>
+                    </a:solidFill>
+                    <a:lnL w="2400">
+                      <a:solidFill>
+                        <a:srgbClr val="B4C0CD"/>
+                      </a:solidFill>
+                    </a:lnL>
+                    <a:lnR w="2400">
+                      <a:solidFill>
+                        <a:srgbClr val="B4C0CD"/>
+                      </a:solidFill>
+                    </a:lnR>
+                    <a:lnT w="2400">
+                      <a:solidFill>
+                        <a:srgbClr val="B4C0CD"/>
+                      </a:solidFill>
+                    </a:lnT>
+                    <a:lnB w="2400">
+                      <a:solidFill>
+                        <a:srgbClr val="B4C0CD"/>
+                      </a:solidFill>
+                    </a:lnB>
+                  </a:tcPr>
+                </a:tc>
+                <a:tc>
+                  <a:txBody>
+                    <a:bodyPr wrap="square">
+                      <a:normAutofit/>
+                    </a:bodyPr>
+                    <a:lstStyle/>
+                    <a:p>
+                      <a:pPr algn="l">
+                        <a:lnSpc>
+                          <a:spcPct val="88000"/>
+                        </a:lnSpc>
+                        <a:spcBef>
+                          <a:spcPts val="0"/>
+                        </a:spcBef>
+                        <a:spcAft>
+                          <a:spcPts val="0"/>
+                        </a:spcAft>
+                      </a:pPr>
+                      <a:r>
+                        <a:rPr sz="455" b="0">
+                          <a:solidFill>
+                            <a:srgbClr val="000000"/>
+                          </a:solidFill>
+                          <a:latin typeface="Microsoft YaHei UI"/>
+                        </a:rPr>
+                        <a:t/>
+                      </a:r>
+                    </a:p>
+                  </a:txBody>
+                  <a:tcPr anchor="ctr" marL="32004" marR="32004" marT="10972" marB="10972">
+                    <a:solidFill>
+                      <a:srgbClr val="F4F7FA"/>
+                    </a:solidFill>
+                    <a:lnL w="2400">
+                      <a:solidFill>
+                        <a:srgbClr val="B4C0CD"/>
+                      </a:solidFill>
+                    </a:lnL>
+                    <a:lnR w="2400">
+                      <a:solidFill>
+                        <a:srgbClr val="B4C0CD"/>
+                      </a:solidFill>
+                    </a:lnR>
+                    <a:lnT w="2400">
+                      <a:solidFill>
+                        <a:srgbClr val="B4C0CD"/>
+                      </a:solidFill>
+                    </a:lnT>
+                    <a:lnB w="2400">
+                      <a:solidFill>
+                        <a:srgbClr val="B4C0CD"/>
+                      </a:solidFill>
+                    </a:lnB>
+                  </a:tcPr>
+                </a:tc>
+                <a:tc>
+                  <a:txBody>
+                    <a:bodyPr wrap="square">
+                      <a:normAutofit/>
+                    </a:bodyPr>
+                    <a:lstStyle/>
+                    <a:p>
+                      <a:pPr algn="l">
+                        <a:lnSpc>
+                          <a:spcPct val="88000"/>
+                        </a:lnSpc>
+                        <a:spcBef>
+                          <a:spcPts val="0"/>
+                        </a:spcBef>
+                        <a:spcAft>
+                          <a:spcPts val="0"/>
+                        </a:spcAft>
+                      </a:pPr>
+                      <a:r>
+                        <a:rPr sz="430" b="0">
+                          <a:solidFill>
+                            <a:srgbClr val="000000"/>
+                          </a:solidFill>
+                          <a:latin typeface="Microsoft YaHei UI"/>
+                        </a:rPr>
+                        <a:t/>
+                      </a:r>
+                    </a:p>
+                  </a:txBody>
+                  <a:tcPr anchor="ctr" marL="32004" marR="32004" marT="10972" marB="10972">
+                    <a:solidFill>
+                      <a:srgbClr val="F4F7FA"/>
+                    </a:solidFill>
+                    <a:lnL w="2400">
+                      <a:solidFill>
+                        <a:srgbClr val="B4C0CD"/>
+                      </a:solidFill>
+                    </a:lnL>
+                    <a:lnR w="2400">
+                      <a:solidFill>
+                        <a:srgbClr val="B4C0CD"/>
+                      </a:solidFill>
+                    </a:lnR>
+                    <a:lnT w="2400">
+                      <a:solidFill>
+                        <a:srgbClr val="B4C0CD"/>
+                      </a:solidFill>
+                    </a:lnT>
+                    <a:lnB w="2400">
+                      <a:solidFill>
+                        <a:srgbClr val="B4C0CD"/>
+                      </a:solidFill>
+                    </a:lnB>
+                  </a:tcPr>
+                </a:tc>
+                <a:tc>
+                  <a:txBody>
+                    <a:bodyPr wrap="square">
+                      <a:normAutofit/>
+                    </a:bodyPr>
+                    <a:lstStyle/>
+                    <a:p>
+                      <a:pPr algn="l">
+                        <a:lnSpc>
+                          <a:spcPct val="88000"/>
+                        </a:lnSpc>
+                        <a:spcBef>
+                          <a:spcPts val="0"/>
+                        </a:spcBef>
+                        <a:spcAft>
+                          <a:spcPts val="0"/>
+                        </a:spcAft>
+                      </a:pPr>
+                      <a:r>
+                        <a:rPr sz="430" b="0">
+                          <a:solidFill>
+                            <a:srgbClr val="000000"/>
+                          </a:solidFill>
+                          <a:latin typeface="Microsoft YaHei UI"/>
+                        </a:rPr>
+                        <a:t/>
+                      </a:r>
+                    </a:p>
+                  </a:txBody>
+                  <a:tcPr anchor="ctr" marL="32004" marR="32004" marT="10972" marB="10972">
+                    <a:solidFill>
+                      <a:srgbClr val="F4F7FA"/>
+                    </a:solidFill>
+                    <a:lnL w="2400">
+                      <a:solidFill>
+                        <a:srgbClr val="B4C0CD"/>
+                      </a:solidFill>
+                    </a:lnL>
+                    <a:lnR w="2400">
+                      <a:solidFill>
+                        <a:srgbClr val="B4C0CD"/>
+                      </a:solidFill>
+                    </a:lnR>
+                    <a:lnT w="2400">
+                      <a:solidFill>
+                        <a:srgbClr val="B4C0CD"/>
+                      </a:solidFill>
+                    </a:lnT>
+                    <a:lnB w="2400">
+                      <a:solidFill>
+                        <a:srgbClr val="B4C0CD"/>
+                      </a:solidFill>
+                    </a:lnB>
+                  </a:tcPr>
+                </a:tc>
+              </a:tr>
+              <a:tr h="379827">
+                <a:tc vMerge="1">
                   <a:txBody>
                     <a:bodyPr wrap="square">
                       <a:normAutofit/>
@@ -5088,7 +7579,7 @@
                     </a:bodyPr>
                     <a:lstStyle/>
                     <a:p>
-                      <a:pPr algn="l">
+                      <a:pPr algn="ctr">
                         <a:lnSpc>
                           <a:spcPct val="88000"/>
                         </a:lnSpc>
@@ -5100,13 +7591,13 @@
                         </a:spcAft>
                       </a:pPr>
                       <a:r>
-                        <a:rPr sz="432" b="0">
+                        <a:rPr sz="455" b="1">
                           <a:solidFill>
                             <a:srgbClr val="000000"/>
                           </a:solidFill>
                           <a:latin typeface="Microsoft YaHei UI"/>
                         </a:rPr>
-                        <a:t>RDK S600 提供 560 TOPS INT8、32/64GB LPDDR5 和 204.8GB/s 内存带宽。</a:t>
+                        <a:t>自变量 X Square</a:t>
                       </a:r>
                     </a:p>
                   </a:txBody>
@@ -5155,13 +7646,13 @@
                         </a:spcAft>
                       </a:pPr>
                       <a:r>
-                        <a:rPr sz="432" b="0">
+                        <a:rPr sz="430" b="0">
                           <a:solidFill>
                             <a:srgbClr val="000000"/>
                           </a:solidFill>
                           <a:latin typeface="Microsoft YaHei UI"/>
                         </a:rPr>
-                        <a:t/>
+                        <a:t>WALL-B 是世界统一模型，Wall-OSS-0.5 是端到端预训练模型，参数未公开。</a:t>
                       </a:r>
                     </a:p>
                   </a:txBody>
@@ -5191,341 +7682,7 @@
                     </a:lnB>
                   </a:tcPr>
                 </a:tc>
-              </a:tr>
-              <a:tr h="379827">
-                <a:tc vMerge="1">
-                  <a:txBody>
-                    <a:bodyPr wrap="square">
-                      <a:normAutofit/>
-                    </a:bodyPr>
-                    <a:lstStyle/>
-                    <a:p>
-                      <a:pPr algn="l">
-                        <a:lnSpc>
-                          <a:spcPct val="88000"/>
-                        </a:lnSpc>
-                        <a:spcBef>
-                          <a:spcPts val="0"/>
-                        </a:spcBef>
-                        <a:spcAft>
-                          <a:spcPts val="0"/>
-                        </a:spcAft>
-                      </a:pPr>
-                      <a:r>
-                        <a:rPr sz="455" b="0">
-                          <a:solidFill>
-                            <a:srgbClr val="000000"/>
-                          </a:solidFill>
-                          <a:latin typeface="Microsoft YaHei UI"/>
-                        </a:rPr>
-                        <a:t/>
-                      </a:r>
-                    </a:p>
-                  </a:txBody>
-                  <a:tcPr anchor="ctr" marL="32004" marR="32004" marT="10972" marB="10972">
-                    <a:solidFill>
-                      <a:srgbClr val="F4F7FA"/>
-                    </a:solidFill>
-                    <a:lnL w="2400">
-                      <a:solidFill>
-                        <a:srgbClr val="B4C0CD"/>
-                      </a:solidFill>
-                    </a:lnL>
-                    <a:lnR w="2400">
-                      <a:solidFill>
-                        <a:srgbClr val="B4C0CD"/>
-                      </a:solidFill>
-                    </a:lnR>
-                    <a:lnT w="2400">
-                      <a:solidFill>
-                        <a:srgbClr val="B4C0CD"/>
-                      </a:solidFill>
-                    </a:lnT>
-                    <a:lnB w="2400">
-                      <a:solidFill>
-                        <a:srgbClr val="B4C0CD"/>
-                      </a:solidFill>
-                    </a:lnB>
-                  </a:tcPr>
-                </a:tc>
                 <a:tc>
-                  <a:txBody>
-                    <a:bodyPr wrap="square">
-                      <a:normAutofit/>
-                    </a:bodyPr>
-                    <a:lstStyle/>
-                    <a:p>
-                      <a:pPr algn="ctr">
-                        <a:lnSpc>
-                          <a:spcPct val="88000"/>
-                        </a:lnSpc>
-                        <a:spcBef>
-                          <a:spcPts val="0"/>
-                        </a:spcBef>
-                        <a:spcAft>
-                          <a:spcPts val="0"/>
-                        </a:spcAft>
-                      </a:pPr>
-                      <a:r>
-                        <a:rPr sz="455" b="1">
-                          <a:solidFill>
-                            <a:srgbClr val="000000"/>
-                          </a:solidFill>
-                          <a:latin typeface="Microsoft YaHei UI"/>
-                        </a:rPr>
-                        <a:t>星海图 Galaxea</a:t>
-                      </a:r>
-                    </a:p>
-                  </a:txBody>
-                  <a:tcPr anchor="ctr" marL="32004" marR="32004" marT="10972" marB="10972">
-                    <a:solidFill>
-                      <a:srgbClr val="F4F7FA"/>
-                    </a:solidFill>
-                    <a:lnL w="2400">
-                      <a:solidFill>
-                        <a:srgbClr val="B4C0CD"/>
-                      </a:solidFill>
-                    </a:lnL>
-                    <a:lnR w="2400">
-                      <a:solidFill>
-                        <a:srgbClr val="B4C0CD"/>
-                      </a:solidFill>
-                    </a:lnR>
-                    <a:lnT w="2400">
-                      <a:solidFill>
-                        <a:srgbClr val="B4C0CD"/>
-                      </a:solidFill>
-                    </a:lnT>
-                    <a:lnB w="2400">
-                      <a:solidFill>
-                        <a:srgbClr val="B4C0CD"/>
-                      </a:solidFill>
-                    </a:lnB>
-                  </a:tcPr>
-                </a:tc>
-                <a:tc>
-                  <a:txBody>
-                    <a:bodyPr wrap="square">
-                      <a:normAutofit/>
-                    </a:bodyPr>
-                    <a:lstStyle/>
-                    <a:p>
-                      <a:pPr algn="l">
-                        <a:lnSpc>
-                          <a:spcPct val="88000"/>
-                        </a:lnSpc>
-                        <a:spcBef>
-                          <a:spcPts val="0"/>
-                        </a:spcBef>
-                        <a:spcAft>
-                          <a:spcPts val="0"/>
-                        </a:spcAft>
-                      </a:pPr>
-                      <a:r>
-                        <a:rPr sz="401" b="0">
-                          <a:solidFill>
-                            <a:srgbClr val="000000"/>
-                          </a:solidFill>
-                          <a:latin typeface="Microsoft YaHei UI"/>
-                        </a:rPr>
-                        <a:t>G0.5 是自回归 VLA，基于 Qwen3.5 2B 初始化；Fast-WAM/GigaWorld-Policy-0.5 是世界动作模型，模型总参数未公开。</a:t>
-                      </a:r>
-                    </a:p>
-                  </a:txBody>
-                  <a:tcPr anchor="ctr" marL="32004" marR="32004" marT="10972" marB="10972">
-                    <a:solidFill>
-                      <a:srgbClr val="F4F7FA"/>
-                    </a:solidFill>
-                    <a:lnL w="2400">
-                      <a:solidFill>
-                        <a:srgbClr val="B4C0CD"/>
-                      </a:solidFill>
-                    </a:lnL>
-                    <a:lnR w="2400">
-                      <a:solidFill>
-                        <a:srgbClr val="B4C0CD"/>
-                      </a:solidFill>
-                    </a:lnR>
-                    <a:lnT w="2400">
-                      <a:solidFill>
-                        <a:srgbClr val="B4C0CD"/>
-                      </a:solidFill>
-                    </a:lnT>
-                    <a:lnB w="2400">
-                      <a:solidFill>
-                        <a:srgbClr val="B4C0CD"/>
-                      </a:solidFill>
-                    </a:lnB>
-                  </a:tcPr>
-                </a:tc>
-                <a:tc>
-                  <a:txBody>
-                    <a:bodyPr wrap="square">
-                      <a:normAutofit/>
-                    </a:bodyPr>
-                    <a:lstStyle/>
-                    <a:p>
-                      <a:pPr algn="l">
-                        <a:lnSpc>
-                          <a:spcPct val="88000"/>
-                        </a:lnSpc>
-                        <a:spcBef>
-                          <a:spcPts val="0"/>
-                        </a:spcBef>
-                        <a:spcAft>
-                          <a:spcPts val="0"/>
-                        </a:spcAft>
-                      </a:pPr>
-                      <a:r>
-                        <a:rPr sz="455" b="0">
-                          <a:solidFill>
-                            <a:srgbClr val="000000"/>
-                          </a:solidFill>
-                          <a:latin typeface="Microsoft YaHei UI"/>
-                        </a:rPr>
-                        <a:t>星海图披露高性能运动小脑和全身控制基础模型，但未公开参数。</a:t>
-                      </a:r>
-                    </a:p>
-                  </a:txBody>
-                  <a:tcPr anchor="ctr" marL="32004" marR="32004" marT="10972" marB="10972">
-                    <a:solidFill>
-                      <a:srgbClr val="F4F7FA"/>
-                    </a:solidFill>
-                    <a:lnL w="2400">
-                      <a:solidFill>
-                        <a:srgbClr val="B4C0CD"/>
-                      </a:solidFill>
-                    </a:lnL>
-                    <a:lnR w="2400">
-                      <a:solidFill>
-                        <a:srgbClr val="B4C0CD"/>
-                      </a:solidFill>
-                    </a:lnR>
-                    <a:lnT w="2400">
-                      <a:solidFill>
-                        <a:srgbClr val="B4C0CD"/>
-                      </a:solidFill>
-                    </a:lnT>
-                    <a:lnB w="2400">
-                      <a:solidFill>
-                        <a:srgbClr val="B4C0CD"/>
-                      </a:solidFill>
-                    </a:lnB>
-                  </a:tcPr>
-                </a:tc>
-                <a:tc>
-                  <a:txBody>
-                    <a:bodyPr wrap="square">
-                      <a:normAutofit/>
-                    </a:bodyPr>
-                    <a:lstStyle/>
-                    <a:p>
-                      <a:pPr algn="l">
-                        <a:lnSpc>
-                          <a:spcPct val="88000"/>
-                        </a:lnSpc>
-                        <a:spcBef>
-                          <a:spcPts val="0"/>
-                        </a:spcBef>
-                        <a:spcAft>
-                          <a:spcPts val="0"/>
-                        </a:spcAft>
-                      </a:pPr>
-                      <a:r>
-                        <a:rPr sz="401" b="0">
-                          <a:solidFill>
-                            <a:srgbClr val="000000"/>
-                          </a:solidFill>
-                          <a:latin typeface="Microsoft YaHei UI"/>
-                        </a:rPr>
-                        <a:t>R1 Lite 原生支持端侧模型部署；Nexo 700 TOPS 为 WRC 会场口径，待公开链接。</a:t>
-                      </a:r>
-                    </a:p>
-                  </a:txBody>
-                  <a:tcPr anchor="ctr" marL="32004" marR="32004" marT="10972" marB="10972">
-                    <a:solidFill>
-                      <a:srgbClr val="F4F7FA"/>
-                    </a:solidFill>
-                    <a:lnL w="2400">
-                      <a:solidFill>
-                        <a:srgbClr val="B4C0CD"/>
-                      </a:solidFill>
-                    </a:lnL>
-                    <a:lnR w="2400">
-                      <a:solidFill>
-                        <a:srgbClr val="B4C0CD"/>
-                      </a:solidFill>
-                    </a:lnR>
-                    <a:lnT w="2400">
-                      <a:solidFill>
-                        <a:srgbClr val="B4C0CD"/>
-                      </a:solidFill>
-                    </a:lnT>
-                    <a:lnB w="2400">
-                      <a:solidFill>
-                        <a:srgbClr val="B4C0CD"/>
-                      </a:solidFill>
-                    </a:lnB>
-                  </a:tcPr>
-                </a:tc>
-                <a:tc>
-                  <a:txBody>
-                    <a:bodyPr wrap="square">
-                      <a:normAutofit/>
-                    </a:bodyPr>
-                    <a:lstStyle/>
-                    <a:p>
-                      <a:pPr algn="l">
-                        <a:lnSpc>
-                          <a:spcPct val="88000"/>
-                        </a:lnSpc>
-                        <a:spcBef>
-                          <a:spcPts val="0"/>
-                        </a:spcBef>
-                        <a:spcAft>
-                          <a:spcPts val="0"/>
-                        </a:spcAft>
-                      </a:pPr>
-                      <a:r>
-                        <a:rPr sz="401" b="0">
-                          <a:solidFill>
-                            <a:srgbClr val="000000"/>
-                          </a:solidFill>
-                          <a:latin typeface="Microsoft YaHei UI"/>
-                        </a:rPr>
-                        <a:t>Fast-WAM 单步约 190ms；GigaWorld-Policy-0.5 在 A100 为 189ms、RTX 4090 为 110ms、C++ 部署为 85ms。</a:t>
-                      </a:r>
-                    </a:p>
-                  </a:txBody>
-                  <a:tcPr anchor="ctr" marL="32004" marR="32004" marT="10972" marB="10972">
-                    <a:solidFill>
-                      <a:srgbClr val="F4F7FA"/>
-                    </a:solidFill>
-                    <a:lnL w="2400">
-                      <a:solidFill>
-                        <a:srgbClr val="B4C0CD"/>
-                      </a:solidFill>
-                    </a:lnL>
-                    <a:lnR w="2400">
-                      <a:solidFill>
-                        <a:srgbClr val="B4C0CD"/>
-                      </a:solidFill>
-                    </a:lnR>
-                    <a:lnT w="2400">
-                      <a:solidFill>
-                        <a:srgbClr val="B4C0CD"/>
-                      </a:solidFill>
-                    </a:lnT>
-                    <a:lnB w="2400">
-                      <a:solidFill>
-                        <a:srgbClr val="B4C0CD"/>
-                      </a:solidFill>
-                    </a:lnB>
-                  </a:tcPr>
-                </a:tc>
-              </a:tr>
-              <a:tr h="379827">
-                <a:tc vMerge="1">
                   <a:txBody>
                     <a:bodyPr wrap="square">
                       <a:normAutofit/>
@@ -5587,7 +7744,7 @@
                     </a:bodyPr>
                     <a:lstStyle/>
                     <a:p>
-                      <a:pPr algn="ctr">
+                      <a:pPr algn="l">
                         <a:lnSpc>
                           <a:spcPct val="88000"/>
                         </a:lnSpc>
@@ -5599,13 +7756,13 @@
                         </a:spcAft>
                       </a:pPr>
                       <a:r>
-                        <a:rPr sz="455" b="1">
+                        <a:rPr sz="430" b="0">
                           <a:solidFill>
                             <a:srgbClr val="000000"/>
                           </a:solidFill>
                           <a:latin typeface="Microsoft YaHei UI"/>
                         </a:rPr>
-                        <a:t>蔚蓝智能 BabyAlpha</a:t>
+                        <a:t>模型已上真机，端云分工未公开。</a:t>
                       </a:r>
                     </a:p>
                   </a:txBody>
@@ -5654,2164 +7811,7 @@
                         </a:spcAft>
                       </a:pPr>
                       <a:r>
-                        <a:rPr sz="432" b="0">
-                          <a:solidFill>
-                            <a:srgbClr val="000000"/>
-                          </a:solidFill>
-                          <a:latin typeface="Microsoft YaHei UI"/>
-                        </a:rPr>
-                        <a:t>BabyAlpha A3 本地运行 7B 交互大模型，用于对话和环境识别。</a:t>
-                      </a:r>
-                    </a:p>
-                  </a:txBody>
-                  <a:tcPr anchor="ctr" marL="32004" marR="32004" marT="10972" marB="10972">
-                    <a:solidFill>
-                      <a:srgbClr val="FFFFFF"/>
-                    </a:solidFill>
-                    <a:lnL w="2400">
-                      <a:solidFill>
-                        <a:srgbClr val="B4C0CD"/>
-                      </a:solidFill>
-                    </a:lnL>
-                    <a:lnR w="2400">
-                      <a:solidFill>
-                        <a:srgbClr val="B4C0CD"/>
-                      </a:solidFill>
-                    </a:lnR>
-                    <a:lnT w="2400">
-                      <a:solidFill>
-                        <a:srgbClr val="B4C0CD"/>
-                      </a:solidFill>
-                    </a:lnT>
-                    <a:lnB w="2400">
-                      <a:solidFill>
-                        <a:srgbClr val="B4C0CD"/>
-                      </a:solidFill>
-                    </a:lnB>
-                  </a:tcPr>
-                </a:tc>
-                <a:tc>
-                  <a:txBody>
-                    <a:bodyPr wrap="square">
-                      <a:normAutofit/>
-                    </a:bodyPr>
-                    <a:lstStyle/>
-                    <a:p>
-                      <a:pPr algn="l">
-                        <a:lnSpc>
-                          <a:spcPct val="88000"/>
-                        </a:lnSpc>
-                        <a:spcBef>
-                          <a:spcPts val="0"/>
-                        </a:spcBef>
-                        <a:spcAft>
-                          <a:spcPts val="0"/>
-                        </a:spcAft>
-                      </a:pPr>
-                      <a:r>
-                        <a:rPr sz="455" b="0">
-                          <a:solidFill>
-                            <a:srgbClr val="000000"/>
-                          </a:solidFill>
-                          <a:latin typeface="Microsoft YaHei UI"/>
-                        </a:rPr>
-                        <a:t/>
-                      </a:r>
-                    </a:p>
-                  </a:txBody>
-                  <a:tcPr anchor="ctr" marL="32004" marR="32004" marT="10972" marB="10972">
-                    <a:solidFill>
-                      <a:srgbClr val="FFFFFF"/>
-                    </a:solidFill>
-                    <a:lnL w="2400">
-                      <a:solidFill>
-                        <a:srgbClr val="B4C0CD"/>
-                      </a:solidFill>
-                    </a:lnL>
-                    <a:lnR w="2400">
-                      <a:solidFill>
-                        <a:srgbClr val="B4C0CD"/>
-                      </a:solidFill>
-                    </a:lnR>
-                    <a:lnT w="2400">
-                      <a:solidFill>
-                        <a:srgbClr val="B4C0CD"/>
-                      </a:solidFill>
-                    </a:lnT>
-                    <a:lnB w="2400">
-                      <a:solidFill>
-                        <a:srgbClr val="B4C0CD"/>
-                      </a:solidFill>
-                    </a:lnB>
-                  </a:tcPr>
-                </a:tc>
-                <a:tc>
-                  <a:txBody>
-                    <a:bodyPr wrap="square">
-                      <a:normAutofit/>
-                    </a:bodyPr>
-                    <a:lstStyle/>
-                    <a:p>
-                      <a:pPr algn="l">
-                        <a:lnSpc>
-                          <a:spcPct val="88000"/>
-                        </a:lnSpc>
-                        <a:spcBef>
-                          <a:spcPts val="0"/>
-                        </a:spcBef>
-                        <a:spcAft>
-                          <a:spcPts val="0"/>
-                        </a:spcAft>
-                      </a:pPr>
-                      <a:r>
-                        <a:rPr sz="432" b="0">
-                          <a:solidFill>
-                            <a:srgbClr val="000000"/>
-                          </a:solidFill>
-                          <a:latin typeface="Microsoft YaHei UI"/>
-                        </a:rPr>
-                        <a:t>BabyAlpha A3 本地端侧运行，芯片型号未公开。</a:t>
-                      </a:r>
-                    </a:p>
-                  </a:txBody>
-                  <a:tcPr anchor="ctr" marL="32004" marR="32004" marT="10972" marB="10972">
-                    <a:solidFill>
-                      <a:srgbClr val="FFFFFF"/>
-                    </a:solidFill>
-                    <a:lnL w="2400">
-                      <a:solidFill>
-                        <a:srgbClr val="B4C0CD"/>
-                      </a:solidFill>
-                    </a:lnL>
-                    <a:lnR w="2400">
-                      <a:solidFill>
-                        <a:srgbClr val="B4C0CD"/>
-                      </a:solidFill>
-                    </a:lnR>
-                    <a:lnT w="2400">
-                      <a:solidFill>
-                        <a:srgbClr val="B4C0CD"/>
-                      </a:solidFill>
-                    </a:lnT>
-                    <a:lnB w="2400">
-                      <a:solidFill>
-                        <a:srgbClr val="B4C0CD"/>
-                      </a:solidFill>
-                    </a:lnB>
-                  </a:tcPr>
-                </a:tc>
-                <a:tc>
-                  <a:txBody>
-                    <a:bodyPr wrap="square">
-                      <a:normAutofit/>
-                    </a:bodyPr>
-                    <a:lstStyle/>
-                    <a:p>
-                      <a:pPr algn="l">
-                        <a:lnSpc>
-                          <a:spcPct val="88000"/>
-                        </a:lnSpc>
-                        <a:spcBef>
-                          <a:spcPts val="0"/>
-                        </a:spcBef>
-                        <a:spcAft>
-                          <a:spcPts val="0"/>
-                        </a:spcAft>
-                      </a:pPr>
-                      <a:r>
-                        <a:rPr sz="432" b="0">
-                          <a:solidFill>
-                            <a:srgbClr val="000000"/>
-                          </a:solidFill>
-                          <a:latin typeface="Microsoft YaHei UI"/>
-                        </a:rPr>
-                        <a:t/>
-                      </a:r>
-                    </a:p>
-                  </a:txBody>
-                  <a:tcPr anchor="ctr" marL="32004" marR="32004" marT="10972" marB="10972">
-                    <a:solidFill>
-                      <a:srgbClr val="FFFFFF"/>
-                    </a:solidFill>
-                    <a:lnL w="2400">
-                      <a:solidFill>
-                        <a:srgbClr val="B4C0CD"/>
-                      </a:solidFill>
-                    </a:lnL>
-                    <a:lnR w="2400">
-                      <a:solidFill>
-                        <a:srgbClr val="B4C0CD"/>
-                      </a:solidFill>
-                    </a:lnR>
-                    <a:lnT w="2400">
-                      <a:solidFill>
-                        <a:srgbClr val="B4C0CD"/>
-                      </a:solidFill>
-                    </a:lnT>
-                    <a:lnB w="2400">
-                      <a:solidFill>
-                        <a:srgbClr val="B4C0CD"/>
-                      </a:solidFill>
-                    </a:lnB>
-                  </a:tcPr>
-                </a:tc>
-              </a:tr>
-              <a:tr h="379827">
-                <a:tc rowSpan="3">
-                  <a:txBody>
-                    <a:bodyPr wrap="square">
-                      <a:normAutofit/>
-                    </a:bodyPr>
-                    <a:lstStyle/>
-                    <a:p>
-                      <a:pPr algn="l">
-                        <a:lnSpc>
-                          <a:spcPct val="88000"/>
-                        </a:lnSpc>
-                        <a:spcBef>
-                          <a:spcPts val="0"/>
-                        </a:spcBef>
-                        <a:spcAft>
-                          <a:spcPts val="0"/>
-                        </a:spcAft>
-                      </a:pPr>
-                      <a:r>
-                        <a:rPr sz="475" b="0">
-                          <a:solidFill>
-                            <a:srgbClr val="000000"/>
-                          </a:solidFill>
-                          <a:latin typeface="Microsoft YaHei UI"/>
-                        </a:rPr>
-                        <a:t>端云协同：端侧处理高实时能力，云侧处理慢推理和多机调度。优点是兼顾低延迟和更强模型；缺点是依赖网络与系统编排。当前 3/13 家，占 23.1%。</a:t>
-                      </a:r>
-                    </a:p>
-                  </a:txBody>
-                  <a:tcPr anchor="ctr" marL="32004" marR="32004" marT="10972" marB="10972">
-                    <a:solidFill>
-                      <a:srgbClr val="ECF2F7"/>
-                    </a:solidFill>
-                    <a:lnL w="3200">
-                      <a:solidFill>
-                        <a:srgbClr val="AAB8C6"/>
-                      </a:solidFill>
-                    </a:lnL>
-                    <a:lnR w="3200">
-                      <a:solidFill>
-                        <a:srgbClr val="AAB8C6"/>
-                      </a:solidFill>
-                    </a:lnR>
-                    <a:lnT w="3200">
-                      <a:solidFill>
-                        <a:srgbClr val="AAB8C6"/>
-                      </a:solidFill>
-                    </a:lnT>
-                    <a:lnB w="3200">
-                      <a:solidFill>
-                        <a:srgbClr val="AAB8C6"/>
-                      </a:solidFill>
-                    </a:lnB>
-                  </a:tcPr>
-                </a:tc>
-                <a:tc>
-                  <a:txBody>
-                    <a:bodyPr wrap="square">
-                      <a:normAutofit/>
-                    </a:bodyPr>
-                    <a:lstStyle/>
-                    <a:p>
-                      <a:pPr algn="ctr">
-                        <a:lnSpc>
-                          <a:spcPct val="88000"/>
-                        </a:lnSpc>
-                        <a:spcBef>
-                          <a:spcPts val="0"/>
-                        </a:spcBef>
-                        <a:spcAft>
-                          <a:spcPts val="0"/>
-                        </a:spcAft>
-                      </a:pPr>
-                      <a:r>
-                        <a:rPr sz="455" b="1">
-                          <a:solidFill>
-                            <a:srgbClr val="000000"/>
-                          </a:solidFill>
-                          <a:latin typeface="Microsoft YaHei UI"/>
-                        </a:rPr>
-                        <a:t>优必选 UBTECH</a:t>
-                      </a:r>
-                    </a:p>
-                  </a:txBody>
-                  <a:tcPr anchor="ctr" marL="32004" marR="32004" marT="10972" marB="10972">
-                    <a:solidFill>
-                      <a:srgbClr val="F4F7FA"/>
-                    </a:solidFill>
-                    <a:lnL w="2400">
-                      <a:solidFill>
-                        <a:srgbClr val="B4C0CD"/>
-                      </a:solidFill>
-                    </a:lnL>
-                    <a:lnR w="2400">
-                      <a:solidFill>
-                        <a:srgbClr val="B4C0CD"/>
-                      </a:solidFill>
-                    </a:lnR>
-                    <a:lnT w="2400">
-                      <a:solidFill>
-                        <a:srgbClr val="B4C0CD"/>
-                      </a:solidFill>
-                    </a:lnT>
-                    <a:lnB w="2400">
-                      <a:solidFill>
-                        <a:srgbClr val="B4C0CD"/>
-                      </a:solidFill>
-                    </a:lnB>
-                  </a:tcPr>
-                </a:tc>
-                <a:tc>
-                  <a:txBody>
-                    <a:bodyPr wrap="square">
-                      <a:normAutofit/>
-                    </a:bodyPr>
-                    <a:lstStyle/>
-                    <a:p>
-                      <a:pPr algn="l">
-                        <a:lnSpc>
-                          <a:spcPct val="88000"/>
-                        </a:lnSpc>
-                        <a:spcBef>
-                          <a:spcPts val="0"/>
-                        </a:spcBef>
-                        <a:spcAft>
-                          <a:spcPts val="0"/>
-                        </a:spcAft>
-                      </a:pPr>
-                      <a:r>
-                        <a:rPr sz="432" b="0">
-                          <a:solidFill>
-                            <a:srgbClr val="000000"/>
-                          </a:solidFill>
-                          <a:latin typeface="Microsoft YaHei UI"/>
-                        </a:rPr>
-                        <a:t>Thinker 是最大 100B 的具身基座模型，Thinker-VLA 负责动作执行，Thinker-WM 是世界模型。</a:t>
-                      </a:r>
-                    </a:p>
-                  </a:txBody>
-                  <a:tcPr anchor="ctr" marL="32004" marR="32004" marT="10972" marB="10972">
-                    <a:solidFill>
-                      <a:srgbClr val="F4F7FA"/>
-                    </a:solidFill>
-                    <a:lnL w="2400">
-                      <a:solidFill>
-                        <a:srgbClr val="B4C0CD"/>
-                      </a:solidFill>
-                    </a:lnL>
-                    <a:lnR w="2400">
-                      <a:solidFill>
-                        <a:srgbClr val="B4C0CD"/>
-                      </a:solidFill>
-                    </a:lnR>
-                    <a:lnT w="2400">
-                      <a:solidFill>
-                        <a:srgbClr val="B4C0CD"/>
-                      </a:solidFill>
-                    </a:lnT>
-                    <a:lnB w="2400">
-                      <a:solidFill>
-                        <a:srgbClr val="B4C0CD"/>
-                      </a:solidFill>
-                    </a:lnB>
-                  </a:tcPr>
-                </a:tc>
-                <a:tc>
-                  <a:txBody>
-                    <a:bodyPr wrap="square">
-                      <a:normAutofit/>
-                    </a:bodyPr>
-                    <a:lstStyle/>
-                    <a:p>
-                      <a:pPr algn="l">
-                        <a:lnSpc>
-                          <a:spcPct val="88000"/>
-                        </a:lnSpc>
-                        <a:spcBef>
-                          <a:spcPts val="0"/>
-                        </a:spcBef>
-                        <a:spcAft>
-                          <a:spcPts val="0"/>
-                        </a:spcAft>
-                      </a:pPr>
-                      <a:r>
-                        <a:rPr sz="455" b="0">
-                          <a:solidFill>
-                            <a:srgbClr val="000000"/>
-                          </a:solidFill>
-                          <a:latin typeface="Microsoft YaHei UI"/>
-                        </a:rPr>
-                        <a:t/>
-                      </a:r>
-                    </a:p>
-                  </a:txBody>
-                  <a:tcPr anchor="ctr" marL="32004" marR="32004" marT="10972" marB="10972">
-                    <a:solidFill>
-                      <a:srgbClr val="F4F7FA"/>
-                    </a:solidFill>
-                    <a:lnL w="2400">
-                      <a:solidFill>
-                        <a:srgbClr val="B4C0CD"/>
-                      </a:solidFill>
-                    </a:lnL>
-                    <a:lnR w="2400">
-                      <a:solidFill>
-                        <a:srgbClr val="B4C0CD"/>
-                      </a:solidFill>
-                    </a:lnR>
-                    <a:lnT w="2400">
-                      <a:solidFill>
-                        <a:srgbClr val="B4C0CD"/>
-                      </a:solidFill>
-                    </a:lnT>
-                    <a:lnB w="2400">
-                      <a:solidFill>
-                        <a:srgbClr val="B4C0CD"/>
-                      </a:solidFill>
-                    </a:lnB>
-                  </a:tcPr>
-                </a:tc>
-                <a:tc>
-                  <a:txBody>
-                    <a:bodyPr wrap="square">
-                      <a:normAutofit/>
-                    </a:bodyPr>
-                    <a:lstStyle/>
-                    <a:p>
-                      <a:pPr algn="l">
-                        <a:lnSpc>
-                          <a:spcPct val="88000"/>
-                        </a:lnSpc>
-                        <a:spcBef>
-                          <a:spcPts val="0"/>
-                        </a:spcBef>
-                        <a:spcAft>
-                          <a:spcPts val="0"/>
-                        </a:spcAft>
-                      </a:pPr>
-                      <a:r>
-                        <a:rPr sz="432" b="0">
-                          <a:solidFill>
-                            <a:srgbClr val="000000"/>
-                          </a:solidFill>
-                          <a:latin typeface="Microsoft YaHei UI"/>
-                        </a:rPr>
-                        <a:t>优必选将高实时能力放在端侧，云端承担慢推理、多机调度和模型管理；VLA 端侧显存需求从 64GB 优化至 32GB。</a:t>
-                      </a:r>
-                    </a:p>
-                  </a:txBody>
-                  <a:tcPr anchor="ctr" marL="32004" marR="32004" marT="10972" marB="10972">
-                    <a:solidFill>
-                      <a:srgbClr val="F4F7FA"/>
-                    </a:solidFill>
-                    <a:lnL w="2400">
-                      <a:solidFill>
-                        <a:srgbClr val="B4C0CD"/>
-                      </a:solidFill>
-                    </a:lnL>
-                    <a:lnR w="2400">
-                      <a:solidFill>
-                        <a:srgbClr val="B4C0CD"/>
-                      </a:solidFill>
-                    </a:lnR>
-                    <a:lnT w="2400">
-                      <a:solidFill>
-                        <a:srgbClr val="B4C0CD"/>
-                      </a:solidFill>
-                    </a:lnT>
-                    <a:lnB w="2400">
-                      <a:solidFill>
-                        <a:srgbClr val="B4C0CD"/>
-                      </a:solidFill>
-                    </a:lnB>
-                  </a:tcPr>
-                </a:tc>
-                <a:tc>
-                  <a:txBody>
-                    <a:bodyPr wrap="square">
-                      <a:normAutofit/>
-                    </a:bodyPr>
-                    <a:lstStyle/>
-                    <a:p>
-                      <a:pPr algn="l">
-                        <a:lnSpc>
-                          <a:spcPct val="88000"/>
-                        </a:lnSpc>
-                        <a:spcBef>
-                          <a:spcPts val="0"/>
-                        </a:spcBef>
-                        <a:spcAft>
-                          <a:spcPts val="0"/>
-                        </a:spcAft>
-                      </a:pPr>
-                      <a:r>
-                        <a:rPr sz="432" b="0">
-                          <a:solidFill>
-                            <a:srgbClr val="000000"/>
-                          </a:solidFill>
-                          <a:latin typeface="Microsoft YaHei UI"/>
-                        </a:rPr>
-                        <a:t>VLA 推理效率提升 176%。</a:t>
-                      </a:r>
-                    </a:p>
-                  </a:txBody>
-                  <a:tcPr anchor="ctr" marL="32004" marR="32004" marT="10972" marB="10972">
-                    <a:solidFill>
-                      <a:srgbClr val="F4F7FA"/>
-                    </a:solidFill>
-                    <a:lnL w="2400">
-                      <a:solidFill>
-                        <a:srgbClr val="B4C0CD"/>
-                      </a:solidFill>
-                    </a:lnL>
-                    <a:lnR w="2400">
-                      <a:solidFill>
-                        <a:srgbClr val="B4C0CD"/>
-                      </a:solidFill>
-                    </a:lnR>
-                    <a:lnT w="2400">
-                      <a:solidFill>
-                        <a:srgbClr val="B4C0CD"/>
-                      </a:solidFill>
-                    </a:lnT>
-                    <a:lnB w="2400">
-                      <a:solidFill>
-                        <a:srgbClr val="B4C0CD"/>
-                      </a:solidFill>
-                    </a:lnB>
-                  </a:tcPr>
-                </a:tc>
-              </a:tr>
-              <a:tr h="379827">
-                <a:tc vMerge="1">
-                  <a:txBody>
-                    <a:bodyPr wrap="square">
-                      <a:normAutofit/>
-                    </a:bodyPr>
-                    <a:lstStyle/>
-                    <a:p>
-                      <a:pPr algn="l">
-                        <a:lnSpc>
-                          <a:spcPct val="88000"/>
-                        </a:lnSpc>
-                        <a:spcBef>
-                          <a:spcPts val="0"/>
-                        </a:spcBef>
-                        <a:spcAft>
-                          <a:spcPts val="0"/>
-                        </a:spcAft>
-                      </a:pPr>
-                      <a:r>
-                        <a:rPr sz="455" b="0">
-                          <a:solidFill>
-                            <a:srgbClr val="000000"/>
-                          </a:solidFill>
-                          <a:latin typeface="Microsoft YaHei UI"/>
-                        </a:rPr>
-                        <a:t/>
-                      </a:r>
-                    </a:p>
-                  </a:txBody>
-                  <a:tcPr anchor="ctr" marL="32004" marR="32004" marT="10972" marB="10972">
-                    <a:solidFill>
-                      <a:srgbClr val="FFFFFF"/>
-                    </a:solidFill>
-                    <a:lnL w="2400">
-                      <a:solidFill>
-                        <a:srgbClr val="B4C0CD"/>
-                      </a:solidFill>
-                    </a:lnL>
-                    <a:lnR w="2400">
-                      <a:solidFill>
-                        <a:srgbClr val="B4C0CD"/>
-                      </a:solidFill>
-                    </a:lnR>
-                    <a:lnT w="2400">
-                      <a:solidFill>
-                        <a:srgbClr val="B4C0CD"/>
-                      </a:solidFill>
-                    </a:lnT>
-                    <a:lnB w="2400">
-                      <a:solidFill>
-                        <a:srgbClr val="B4C0CD"/>
-                      </a:solidFill>
-                    </a:lnB>
-                  </a:tcPr>
-                </a:tc>
-                <a:tc>
-                  <a:txBody>
-                    <a:bodyPr wrap="square">
-                      <a:normAutofit/>
-                    </a:bodyPr>
-                    <a:lstStyle/>
-                    <a:p>
-                      <a:pPr algn="ctr">
-                        <a:lnSpc>
-                          <a:spcPct val="88000"/>
-                        </a:lnSpc>
-                        <a:spcBef>
-                          <a:spcPts val="0"/>
-                        </a:spcBef>
-                        <a:spcAft>
-                          <a:spcPts val="0"/>
-                        </a:spcAft>
-                      </a:pPr>
-                      <a:r>
-                        <a:rPr sz="455" b="1">
-                          <a:solidFill>
-                            <a:srgbClr val="000000"/>
-                          </a:solidFill>
-                          <a:latin typeface="Microsoft YaHei UI"/>
-                        </a:rPr>
-                        <a:t>智元机器人 AGIBOT</a:t>
-                      </a:r>
-                    </a:p>
-                  </a:txBody>
-                  <a:tcPr anchor="ctr" marL="32004" marR="32004" marT="10972" marB="10972">
-                    <a:solidFill>
-                      <a:srgbClr val="FFFFFF"/>
-                    </a:solidFill>
-                    <a:lnL w="2400">
-                      <a:solidFill>
-                        <a:srgbClr val="B4C0CD"/>
-                      </a:solidFill>
-                    </a:lnL>
-                    <a:lnR w="2400">
-                      <a:solidFill>
-                        <a:srgbClr val="B4C0CD"/>
-                      </a:solidFill>
-                    </a:lnR>
-                    <a:lnT w="2400">
-                      <a:solidFill>
-                        <a:srgbClr val="B4C0CD"/>
-                      </a:solidFill>
-                    </a:lnT>
-                    <a:lnB w="2400">
-                      <a:solidFill>
-                        <a:srgbClr val="B4C0CD"/>
-                      </a:solidFill>
-                    </a:lnB>
-                  </a:tcPr>
-                </a:tc>
-                <a:tc>
-                  <a:txBody>
-                    <a:bodyPr wrap="square">
-                      <a:normAutofit/>
-                    </a:bodyPr>
-                    <a:lstStyle/>
-                    <a:p>
-                      <a:pPr algn="l">
-                        <a:lnSpc>
-                          <a:spcPct val="88000"/>
-                        </a:lnSpc>
-                        <a:spcBef>
-                          <a:spcPts val="0"/>
-                        </a:spcBef>
-                        <a:spcAft>
-                          <a:spcPts val="0"/>
-                        </a:spcAft>
-                      </a:pPr>
-                      <a:r>
-                        <a:rPr sz="432" b="0">
-                          <a:solidFill>
-                            <a:srgbClr val="000000"/>
-                          </a:solidFill>
-                          <a:latin typeface="Microsoft YaHei UI"/>
-                        </a:rPr>
-                        <a:t>GO-1/GO-2 是具身基座模型，GE-2 是世界模型，Genie Evolver 1.0 是闭环真机强化学习系统，参数未公开。</a:t>
-                      </a:r>
-                    </a:p>
-                  </a:txBody>
-                  <a:tcPr anchor="ctr" marL="32004" marR="32004" marT="10972" marB="10972">
-                    <a:solidFill>
-                      <a:srgbClr val="FFFFFF"/>
-                    </a:solidFill>
-                    <a:lnL w="2400">
-                      <a:solidFill>
-                        <a:srgbClr val="B4C0CD"/>
-                      </a:solidFill>
-                    </a:lnL>
-                    <a:lnR w="2400">
-                      <a:solidFill>
-                        <a:srgbClr val="B4C0CD"/>
-                      </a:solidFill>
-                    </a:lnR>
-                    <a:lnT w="2400">
-                      <a:solidFill>
-                        <a:srgbClr val="B4C0CD"/>
-                      </a:solidFill>
-                    </a:lnT>
-                    <a:lnB w="2400">
-                      <a:solidFill>
-                        <a:srgbClr val="B4C0CD"/>
-                      </a:solidFill>
-                    </a:lnB>
-                  </a:tcPr>
-                </a:tc>
-                <a:tc>
-                  <a:txBody>
-                    <a:bodyPr wrap="square">
-                      <a:normAutofit/>
-                    </a:bodyPr>
-                    <a:lstStyle/>
-                    <a:p>
-                      <a:pPr algn="l">
-                        <a:lnSpc>
-                          <a:spcPct val="88000"/>
-                        </a:lnSpc>
-                        <a:spcBef>
-                          <a:spcPts val="0"/>
-                        </a:spcBef>
-                        <a:spcAft>
-                          <a:spcPts val="0"/>
-                        </a:spcAft>
-                      </a:pPr>
-                      <a:r>
-                        <a:rPr sz="455" b="0">
-                          <a:solidFill>
-                            <a:srgbClr val="000000"/>
-                          </a:solidFill>
-                          <a:latin typeface="Microsoft YaHei UI"/>
-                        </a:rPr>
-                        <a:t>Action Expert 负责精细动作执行，参数未公开。</a:t>
-                      </a:r>
-                    </a:p>
-                  </a:txBody>
-                  <a:tcPr anchor="ctr" marL="32004" marR="32004" marT="10972" marB="10972">
-                    <a:solidFill>
-                      <a:srgbClr val="FFFFFF"/>
-                    </a:solidFill>
-                    <a:lnL w="2400">
-                      <a:solidFill>
-                        <a:srgbClr val="B4C0CD"/>
-                      </a:solidFill>
-                    </a:lnL>
-                    <a:lnR w="2400">
-                      <a:solidFill>
-                        <a:srgbClr val="B4C0CD"/>
-                      </a:solidFill>
-                    </a:lnR>
-                    <a:lnT w="2400">
-                      <a:solidFill>
-                        <a:srgbClr val="B4C0CD"/>
-                      </a:solidFill>
-                    </a:lnT>
-                    <a:lnB w="2400">
-                      <a:solidFill>
-                        <a:srgbClr val="B4C0CD"/>
-                      </a:solidFill>
-                    </a:lnB>
-                  </a:tcPr>
-                </a:tc>
-                <a:tc>
-                  <a:txBody>
-                    <a:bodyPr wrap="square">
-                      <a:normAutofit/>
-                    </a:bodyPr>
-                    <a:lstStyle/>
-                    <a:p>
-                      <a:pPr algn="l">
-                        <a:lnSpc>
-                          <a:spcPct val="88000"/>
-                        </a:lnSpc>
-                        <a:spcBef>
-                          <a:spcPts val="0"/>
-                        </a:spcBef>
-                        <a:spcAft>
-                          <a:spcPts val="0"/>
-                        </a:spcAft>
-                      </a:pPr>
-                      <a:r>
-                        <a:rPr sz="432" b="0">
-                          <a:solidFill>
-                            <a:srgbClr val="000000"/>
-                          </a:solidFill>
-                          <a:latin typeface="Microsoft YaHei UI"/>
-                        </a:rPr>
-                        <a:t>A3 Ultra 公开披露 700 TOPS 端侧具身处理器。</a:t>
-                      </a:r>
-                    </a:p>
-                  </a:txBody>
-                  <a:tcPr anchor="ctr" marL="32004" marR="32004" marT="10972" marB="10972">
-                    <a:solidFill>
-                      <a:srgbClr val="FFFFFF"/>
-                    </a:solidFill>
-                    <a:lnL w="2400">
-                      <a:solidFill>
-                        <a:srgbClr val="B4C0CD"/>
-                      </a:solidFill>
-                    </a:lnL>
-                    <a:lnR w="2400">
-                      <a:solidFill>
-                        <a:srgbClr val="B4C0CD"/>
-                      </a:solidFill>
-                    </a:lnR>
-                    <a:lnT w="2400">
-                      <a:solidFill>
-                        <a:srgbClr val="B4C0CD"/>
-                      </a:solidFill>
-                    </a:lnT>
-                    <a:lnB w="2400">
-                      <a:solidFill>
-                        <a:srgbClr val="B4C0CD"/>
-                      </a:solidFill>
-                    </a:lnB>
-                  </a:tcPr>
-                </a:tc>
-                <a:tc>
-                  <a:txBody>
-                    <a:bodyPr wrap="square">
-                      <a:normAutofit/>
-                    </a:bodyPr>
-                    <a:lstStyle/>
-                    <a:p>
-                      <a:pPr algn="l">
-                        <a:lnSpc>
-                          <a:spcPct val="88000"/>
-                        </a:lnSpc>
-                        <a:spcBef>
-                          <a:spcPts val="0"/>
-                        </a:spcBef>
-                        <a:spcAft>
-                          <a:spcPts val="0"/>
-                        </a:spcAft>
-                      </a:pPr>
-                      <a:r>
-                        <a:rPr sz="432" b="0">
-                          <a:solidFill>
-                            <a:srgbClr val="000000"/>
-                          </a:solidFill>
-                          <a:latin typeface="Microsoft YaHei UI"/>
-                        </a:rPr>
-                        <a:t>二手口径称 GO-1/GO-2 可在边缘端 10Hz-20Hz 推理，官方 Hz 未公开。</a:t>
-                      </a:r>
-                    </a:p>
-                  </a:txBody>
-                  <a:tcPr anchor="ctr" marL="32004" marR="32004" marT="10972" marB="10972">
-                    <a:solidFill>
-                      <a:srgbClr val="FFFFFF"/>
-                    </a:solidFill>
-                    <a:lnL w="2400">
-                      <a:solidFill>
-                        <a:srgbClr val="B4C0CD"/>
-                      </a:solidFill>
-                    </a:lnL>
-                    <a:lnR w="2400">
-                      <a:solidFill>
-                        <a:srgbClr val="B4C0CD"/>
-                      </a:solidFill>
-                    </a:lnR>
-                    <a:lnT w="2400">
-                      <a:solidFill>
-                        <a:srgbClr val="B4C0CD"/>
-                      </a:solidFill>
-                    </a:lnT>
-                    <a:lnB w="2400">
-                      <a:solidFill>
-                        <a:srgbClr val="B4C0CD"/>
-                      </a:solidFill>
-                    </a:lnB>
-                  </a:tcPr>
-                </a:tc>
-              </a:tr>
-              <a:tr h="379827">
-                <a:tc vMerge="1">
-                  <a:txBody>
-                    <a:bodyPr wrap="square">
-                      <a:normAutofit/>
-                    </a:bodyPr>
-                    <a:lstStyle/>
-                    <a:p>
-                      <a:pPr algn="l">
-                        <a:lnSpc>
-                          <a:spcPct val="88000"/>
-                        </a:lnSpc>
-                        <a:spcBef>
-                          <a:spcPts val="0"/>
-                        </a:spcBef>
-                        <a:spcAft>
-                          <a:spcPts val="0"/>
-                        </a:spcAft>
-                      </a:pPr>
-                      <a:r>
-                        <a:rPr sz="455" b="0">
-                          <a:solidFill>
-                            <a:srgbClr val="000000"/>
-                          </a:solidFill>
-                          <a:latin typeface="Microsoft YaHei UI"/>
-                        </a:rPr>
-                        <a:t/>
-                      </a:r>
-                    </a:p>
-                  </a:txBody>
-                  <a:tcPr anchor="ctr" marL="32004" marR="32004" marT="10972" marB="10972">
-                    <a:solidFill>
-                      <a:srgbClr val="F4F7FA"/>
-                    </a:solidFill>
-                    <a:lnL w="2400">
-                      <a:solidFill>
-                        <a:srgbClr val="B4C0CD"/>
-                      </a:solidFill>
-                    </a:lnL>
-                    <a:lnR w="2400">
-                      <a:solidFill>
-                        <a:srgbClr val="B4C0CD"/>
-                      </a:solidFill>
-                    </a:lnR>
-                    <a:lnT w="2400">
-                      <a:solidFill>
-                        <a:srgbClr val="B4C0CD"/>
-                      </a:solidFill>
-                    </a:lnT>
-                    <a:lnB w="2400">
-                      <a:solidFill>
-                        <a:srgbClr val="B4C0CD"/>
-                      </a:solidFill>
-                    </a:lnB>
-                  </a:tcPr>
-                </a:tc>
-                <a:tc>
-                  <a:txBody>
-                    <a:bodyPr wrap="square">
-                      <a:normAutofit/>
-                    </a:bodyPr>
-                    <a:lstStyle/>
-                    <a:p>
-                      <a:pPr algn="ctr">
-                        <a:lnSpc>
-                          <a:spcPct val="88000"/>
-                        </a:lnSpc>
-                        <a:spcBef>
-                          <a:spcPts val="0"/>
-                        </a:spcBef>
-                        <a:spcAft>
-                          <a:spcPts val="0"/>
-                        </a:spcAft>
-                      </a:pPr>
-                      <a:r>
-                        <a:rPr sz="455" b="1">
-                          <a:solidFill>
-                            <a:srgbClr val="000000"/>
-                          </a:solidFill>
-                          <a:latin typeface="Microsoft YaHei UI"/>
-                        </a:rPr>
-                        <a:t>北京人形/天工</a:t>
-                      </a:r>
-                    </a:p>
-                  </a:txBody>
-                  <a:tcPr anchor="ctr" marL="32004" marR="32004" marT="10972" marB="10972">
-                    <a:solidFill>
-                      <a:srgbClr val="F4F7FA"/>
-                    </a:solidFill>
-                    <a:lnL w="2400">
-                      <a:solidFill>
-                        <a:srgbClr val="B4C0CD"/>
-                      </a:solidFill>
-                    </a:lnL>
-                    <a:lnR w="2400">
-                      <a:solidFill>
-                        <a:srgbClr val="B4C0CD"/>
-                      </a:solidFill>
-                    </a:lnR>
-                    <a:lnT w="2400">
-                      <a:solidFill>
-                        <a:srgbClr val="B4C0CD"/>
-                      </a:solidFill>
-                    </a:lnT>
-                    <a:lnB w="2400">
-                      <a:solidFill>
-                        <a:srgbClr val="B4C0CD"/>
-                      </a:solidFill>
-                    </a:lnB>
-                  </a:tcPr>
-                </a:tc>
-                <a:tc>
-                  <a:txBody>
-                    <a:bodyPr wrap="square">
-                      <a:normAutofit/>
-                    </a:bodyPr>
-                    <a:lstStyle/>
-                    <a:p>
-                      <a:pPr algn="l">
-                        <a:lnSpc>
-                          <a:spcPct val="88000"/>
-                        </a:lnSpc>
-                        <a:spcBef>
-                          <a:spcPts val="0"/>
-                        </a:spcBef>
-                        <a:spcAft>
-                          <a:spcPts val="0"/>
-                        </a:spcAft>
-                      </a:pPr>
-                      <a:r>
-                        <a:rPr sz="401" b="0">
-                          <a:solidFill>
-                            <a:srgbClr val="000000"/>
-                          </a:solidFill>
-                          <a:latin typeface="Microsoft YaHei UI"/>
-                        </a:rPr>
-                        <a:t>Pelican-Unify 是统一表征具身世界模型，集成 VLM、action model 和 WFM；PelicanVLM 是 72B 视觉语言大模型，XR-1 是跨本体 VLA。</a:t>
-                      </a:r>
-                    </a:p>
-                  </a:txBody>
-                  <a:tcPr anchor="ctr" marL="32004" marR="32004" marT="10972" marB="10972">
-                    <a:solidFill>
-                      <a:srgbClr val="F4F7FA"/>
-                    </a:solidFill>
-                    <a:lnL w="2400">
-                      <a:solidFill>
-                        <a:srgbClr val="B4C0CD"/>
-                      </a:solidFill>
-                    </a:lnL>
-                    <a:lnR w="2400">
-                      <a:solidFill>
-                        <a:srgbClr val="B4C0CD"/>
-                      </a:solidFill>
-                    </a:lnR>
-                    <a:lnT w="2400">
-                      <a:solidFill>
-                        <a:srgbClr val="B4C0CD"/>
-                      </a:solidFill>
-                    </a:lnT>
-                    <a:lnB w="2400">
-                      <a:solidFill>
-                        <a:srgbClr val="B4C0CD"/>
-                      </a:solidFill>
-                    </a:lnB>
-                  </a:tcPr>
-                </a:tc>
-                <a:tc>
-                  <a:txBody>
-                    <a:bodyPr wrap="square">
-                      <a:normAutofit/>
-                    </a:bodyPr>
-                    <a:lstStyle/>
-                    <a:p>
-                      <a:pPr algn="l">
-                        <a:lnSpc>
-                          <a:spcPct val="88000"/>
-                        </a:lnSpc>
-                        <a:spcBef>
-                          <a:spcPts val="0"/>
-                        </a:spcBef>
-                        <a:spcAft>
-                          <a:spcPts val="0"/>
-                        </a:spcAft>
-                      </a:pPr>
-                      <a:r>
-                        <a:rPr sz="455" b="0">
-                          <a:solidFill>
-                            <a:srgbClr val="000000"/>
-                          </a:solidFill>
-                          <a:latin typeface="Microsoft YaHei UI"/>
-                        </a:rPr>
-                        <a:t>北京人形披露全身控制自主导航系统，但未公开参数。</a:t>
-                      </a:r>
-                    </a:p>
-                  </a:txBody>
-                  <a:tcPr anchor="ctr" marL="32004" marR="32004" marT="10972" marB="10972">
-                    <a:solidFill>
-                      <a:srgbClr val="F4F7FA"/>
-                    </a:solidFill>
-                    <a:lnL w="2400">
-                      <a:solidFill>
-                        <a:srgbClr val="B4C0CD"/>
-                      </a:solidFill>
-                    </a:lnL>
-                    <a:lnR w="2400">
-                      <a:solidFill>
-                        <a:srgbClr val="B4C0CD"/>
-                      </a:solidFill>
-                    </a:lnR>
-                    <a:lnT w="2400">
-                      <a:solidFill>
-                        <a:srgbClr val="B4C0CD"/>
-                      </a:solidFill>
-                    </a:lnT>
-                    <a:lnB w="2400">
-                      <a:solidFill>
-                        <a:srgbClr val="B4C0CD"/>
-                      </a:solidFill>
-                    </a:lnB>
-                  </a:tcPr>
-                </a:tc>
-                <a:tc>
-                  <a:txBody>
-                    <a:bodyPr wrap="square">
-                      <a:normAutofit/>
-                    </a:bodyPr>
-                    <a:lstStyle/>
-                    <a:p>
-                      <a:pPr algn="l">
-                        <a:lnSpc>
-                          <a:spcPct val="88000"/>
-                        </a:lnSpc>
-                        <a:spcBef>
-                          <a:spcPts val="0"/>
-                        </a:spcBef>
-                        <a:spcAft>
-                          <a:spcPts val="0"/>
-                        </a:spcAft>
-                      </a:pPr>
-                      <a:r>
-                        <a:rPr sz="401" b="0">
-                          <a:solidFill>
-                            <a:srgbClr val="000000"/>
-                          </a:solidFill>
-                          <a:latin typeface="Microsoft YaHei UI"/>
-                        </a:rPr>
-                        <a:t>Pelican-Unify 已在天轶真机部署跑通；天工 Omni 采用端侧原生智能架构并支持大模型边缘部署。</a:t>
-                      </a:r>
-                    </a:p>
-                  </a:txBody>
-                  <a:tcPr anchor="ctr" marL="32004" marR="32004" marT="10972" marB="10972">
-                    <a:solidFill>
-                      <a:srgbClr val="F4F7FA"/>
-                    </a:solidFill>
-                    <a:lnL w="2400">
-                      <a:solidFill>
-                        <a:srgbClr val="B4C0CD"/>
-                      </a:solidFill>
-                    </a:lnL>
-                    <a:lnR w="2400">
-                      <a:solidFill>
-                        <a:srgbClr val="B4C0CD"/>
-                      </a:solidFill>
-                    </a:lnR>
-                    <a:lnT w="2400">
-                      <a:solidFill>
-                        <a:srgbClr val="B4C0CD"/>
-                      </a:solidFill>
-                    </a:lnT>
-                    <a:lnB w="2400">
-                      <a:solidFill>
-                        <a:srgbClr val="B4C0CD"/>
-                      </a:solidFill>
-                    </a:lnB>
-                  </a:tcPr>
-                </a:tc>
-                <a:tc>
-                  <a:txBody>
-                    <a:bodyPr wrap="square">
-                      <a:normAutofit/>
-                    </a:bodyPr>
-                    <a:lstStyle/>
-                    <a:p>
-                      <a:pPr algn="l">
-                        <a:lnSpc>
-                          <a:spcPct val="88000"/>
-                        </a:lnSpc>
-                        <a:spcBef>
-                          <a:spcPts val="0"/>
-                        </a:spcBef>
-                        <a:spcAft>
-                          <a:spcPts val="0"/>
-                        </a:spcAft>
-                      </a:pPr>
-                      <a:r>
-                        <a:rPr sz="401" b="0">
-                          <a:solidFill>
-                            <a:srgbClr val="000000"/>
-                          </a:solidFill>
-                          <a:latin typeface="Microsoft YaHei UI"/>
-                        </a:rPr>
-                        <a:t/>
-                      </a:r>
-                    </a:p>
-                  </a:txBody>
-                  <a:tcPr anchor="ctr" marL="32004" marR="32004" marT="10972" marB="10972">
-                    <a:solidFill>
-                      <a:srgbClr val="F4F7FA"/>
-                    </a:solidFill>
-                    <a:lnL w="2400">
-                      <a:solidFill>
-                        <a:srgbClr val="B4C0CD"/>
-                      </a:solidFill>
-                    </a:lnL>
-                    <a:lnR w="2400">
-                      <a:solidFill>
-                        <a:srgbClr val="B4C0CD"/>
-                      </a:solidFill>
-                    </a:lnR>
-                    <a:lnT w="2400">
-                      <a:solidFill>
-                        <a:srgbClr val="B4C0CD"/>
-                      </a:solidFill>
-                    </a:lnT>
-                    <a:lnB w="2400">
-                      <a:solidFill>
-                        <a:srgbClr val="B4C0CD"/>
-                      </a:solidFill>
-                    </a:lnB>
-                  </a:tcPr>
-                </a:tc>
-              </a:tr>
-              <a:tr h="379827">
-                <a:tc rowSpan="3">
-                  <a:txBody>
-                    <a:bodyPr wrap="square">
-                      <a:normAutofit/>
-                    </a:bodyPr>
-                    <a:lstStyle/>
-                    <a:p>
-                      <a:pPr algn="l">
-                        <a:lnSpc>
-                          <a:spcPct val="88000"/>
-                        </a:lnSpc>
-                        <a:spcBef>
-                          <a:spcPts val="0"/>
-                        </a:spcBef>
-                        <a:spcAft>
-                          <a:spcPts val="0"/>
-                        </a:spcAft>
-                      </a:pPr>
-                      <a:r>
-                        <a:rPr sz="475" b="0">
-                          <a:solidFill>
-                            <a:srgbClr val="000000"/>
-                          </a:solidFill>
-                          <a:latin typeface="Microsoft YaHei UI"/>
-                        </a:rPr>
-                        <a:t>云侧/平台未明：公开资料未说明生产部署方式，或大脑更像平台/研究模型。优点是模型尺度和训练迭代空间更大；缺点是离线能力与实时性不确定。当前 3/13 家，占 23.1%。</a:t>
-                      </a:r>
-                    </a:p>
-                  </a:txBody>
-                  <a:tcPr anchor="ctr" marL="32004" marR="32004" marT="10972" marB="10972">
-                    <a:solidFill>
-                      <a:srgbClr val="ECF2F7"/>
-                    </a:solidFill>
-                    <a:lnL w="3200">
-                      <a:solidFill>
-                        <a:srgbClr val="AAB8C6"/>
-                      </a:solidFill>
-                    </a:lnL>
-                    <a:lnR w="3200">
-                      <a:solidFill>
-                        <a:srgbClr val="AAB8C6"/>
-                      </a:solidFill>
-                    </a:lnR>
-                    <a:lnT w="3200">
-                      <a:solidFill>
-                        <a:srgbClr val="AAB8C6"/>
-                      </a:solidFill>
-                    </a:lnT>
-                    <a:lnB w="3200">
-                      <a:solidFill>
-                        <a:srgbClr val="AAB8C6"/>
-                      </a:solidFill>
-                    </a:lnB>
-                  </a:tcPr>
-                </a:tc>
-                <a:tc>
-                  <a:txBody>
-                    <a:bodyPr wrap="square">
-                      <a:normAutofit/>
-                    </a:bodyPr>
-                    <a:lstStyle/>
-                    <a:p>
-                      <a:pPr algn="ctr">
-                        <a:lnSpc>
-                          <a:spcPct val="88000"/>
-                        </a:lnSpc>
-                        <a:spcBef>
-                          <a:spcPts val="0"/>
-                        </a:spcBef>
-                        <a:spcAft>
-                          <a:spcPts val="0"/>
-                        </a:spcAft>
-                      </a:pPr>
-                      <a:r>
-                        <a:rPr sz="455" b="1">
-                          <a:solidFill>
-                            <a:srgbClr val="000000"/>
-                          </a:solidFill>
-                          <a:latin typeface="Microsoft YaHei UI"/>
-                        </a:rPr>
-                        <a:t>银河通用 Galbot</a:t>
-                      </a:r>
-                    </a:p>
-                  </a:txBody>
-                  <a:tcPr anchor="ctr" marL="32004" marR="32004" marT="10972" marB="10972">
-                    <a:solidFill>
-                      <a:srgbClr val="FFFFFF"/>
-                    </a:solidFill>
-                    <a:lnL w="2400">
-                      <a:solidFill>
-                        <a:srgbClr val="B4C0CD"/>
-                      </a:solidFill>
-                    </a:lnL>
-                    <a:lnR w="2400">
-                      <a:solidFill>
-                        <a:srgbClr val="B4C0CD"/>
-                      </a:solidFill>
-                    </a:lnR>
-                    <a:lnT w="2400">
-                      <a:solidFill>
-                        <a:srgbClr val="B4C0CD"/>
-                      </a:solidFill>
-                    </a:lnT>
-                    <a:lnB w="2400">
-                      <a:solidFill>
-                        <a:srgbClr val="B4C0CD"/>
-                      </a:solidFill>
-                    </a:lnB>
-                  </a:tcPr>
-                </a:tc>
-                <a:tc>
-                  <a:txBody>
-                    <a:bodyPr wrap="square">
-                      <a:normAutofit/>
-                    </a:bodyPr>
-                    <a:lstStyle/>
-                    <a:p>
-                      <a:pPr algn="l">
-                        <a:lnSpc>
-                          <a:spcPct val="88000"/>
-                        </a:lnSpc>
-                        <a:spcBef>
-                          <a:spcPts val="0"/>
-                        </a:spcBef>
-                        <a:spcAft>
-                          <a:spcPts val="0"/>
-                        </a:spcAft>
-                      </a:pPr>
-                      <a:r>
-                        <a:rPr sz="401" b="0">
-                          <a:solidFill>
-                            <a:srgbClr val="000000"/>
-                          </a:solidFill>
-                          <a:latin typeface="Microsoft YaHei UI"/>
-                        </a:rPr>
-                        <a:t>LDA-1B 是 1B 隐式世界-动作基础模型，AstraBrain WAM 是世界动作模型，GraspVLA/GroceryVLA/TrackVLA 是技能 VLA。</a:t>
-                      </a:r>
-                    </a:p>
-                  </a:txBody>
-                  <a:tcPr anchor="ctr" marL="32004" marR="32004" marT="10972" marB="10972">
-                    <a:solidFill>
-                      <a:srgbClr val="FFFFFF"/>
-                    </a:solidFill>
-                    <a:lnL w="2400">
-                      <a:solidFill>
-                        <a:srgbClr val="B4C0CD"/>
-                      </a:solidFill>
-                    </a:lnL>
-                    <a:lnR w="2400">
-                      <a:solidFill>
-                        <a:srgbClr val="B4C0CD"/>
-                      </a:solidFill>
-                    </a:lnR>
-                    <a:lnT w="2400">
-                      <a:solidFill>
-                        <a:srgbClr val="B4C0CD"/>
-                      </a:solidFill>
-                    </a:lnT>
-                    <a:lnB w="2400">
-                      <a:solidFill>
-                        <a:srgbClr val="B4C0CD"/>
-                      </a:solidFill>
-                    </a:lnB>
-                  </a:tcPr>
-                </a:tc>
-                <a:tc>
-                  <a:txBody>
-                    <a:bodyPr wrap="square">
-                      <a:normAutofit/>
-                    </a:bodyPr>
-                    <a:lstStyle/>
-                    <a:p>
-                      <a:pPr algn="l">
-                        <a:lnSpc>
-                          <a:spcPct val="88000"/>
-                        </a:lnSpc>
-                        <a:spcBef>
-                          <a:spcPts val="0"/>
-                        </a:spcBef>
-                        <a:spcAft>
-                          <a:spcPts val="0"/>
-                        </a:spcAft>
-                      </a:pPr>
-                      <a:r>
-                        <a:rPr sz="455" b="0">
-                          <a:solidFill>
-                            <a:srgbClr val="000000"/>
-                          </a:solidFill>
-                          <a:latin typeface="Microsoft YaHei UI"/>
-                        </a:rPr>
-                        <a:t>AstraBrain-WBC 0.5 是 8040 万参数全身实时运控小脑。</a:t>
-                      </a:r>
-                    </a:p>
-                  </a:txBody>
-                  <a:tcPr anchor="ctr" marL="32004" marR="32004" marT="10972" marB="10972">
-                    <a:solidFill>
-                      <a:srgbClr val="FFFFFF"/>
-                    </a:solidFill>
-                    <a:lnL w="2400">
-                      <a:solidFill>
-                        <a:srgbClr val="B4C0CD"/>
-                      </a:solidFill>
-                    </a:lnL>
-                    <a:lnR w="2400">
-                      <a:solidFill>
-                        <a:srgbClr val="B4C0CD"/>
-                      </a:solidFill>
-                    </a:lnR>
-                    <a:lnT w="2400">
-                      <a:solidFill>
-                        <a:srgbClr val="B4C0CD"/>
-                      </a:solidFill>
-                    </a:lnT>
-                    <a:lnB w="2400">
-                      <a:solidFill>
-                        <a:srgbClr val="B4C0CD"/>
-                      </a:solidFill>
-                    </a:lnB>
-                  </a:tcPr>
-                </a:tc>
-                <a:tc>
-                  <a:txBody>
-                    <a:bodyPr wrap="square">
-                      <a:normAutofit/>
-                    </a:bodyPr>
-                    <a:lstStyle/>
-                    <a:p>
-                      <a:pPr algn="l">
-                        <a:lnSpc>
-                          <a:spcPct val="88000"/>
-                        </a:lnSpc>
-                        <a:spcBef>
-                          <a:spcPts val="0"/>
-                        </a:spcBef>
-                        <a:spcAft>
-                          <a:spcPts val="0"/>
-                        </a:spcAft>
-                      </a:pPr>
-                      <a:r>
-                        <a:rPr sz="401" b="0">
-                          <a:solidFill>
-                            <a:srgbClr val="000000"/>
-                          </a:solidFill>
-                          <a:latin typeface="Microsoft YaHei UI"/>
-                        </a:rPr>
-                        <a:t>AstraBrain-WBC 0.5 公开测试使用单张 RTX 4090，并支持 Jetson Orin onboard deployment；LDA-1B 生产部署算力未公开。</a:t>
-                      </a:r>
-                    </a:p>
-                  </a:txBody>
-                  <a:tcPr anchor="ctr" marL="32004" marR="32004" marT="10972" marB="10972">
-                    <a:solidFill>
-                      <a:srgbClr val="FFFFFF"/>
-                    </a:solidFill>
-                    <a:lnL w="2400">
-                      <a:solidFill>
-                        <a:srgbClr val="B4C0CD"/>
-                      </a:solidFill>
-                    </a:lnL>
-                    <a:lnR w="2400">
-                      <a:solidFill>
-                        <a:srgbClr val="B4C0CD"/>
-                      </a:solidFill>
-                    </a:lnR>
-                    <a:lnT w="2400">
-                      <a:solidFill>
-                        <a:srgbClr val="B4C0CD"/>
-                      </a:solidFill>
-                    </a:lnT>
-                    <a:lnB w="2400">
-                      <a:solidFill>
-                        <a:srgbClr val="B4C0CD"/>
-                      </a:solidFill>
-                    </a:lnB>
-                  </a:tcPr>
-                </a:tc>
-                <a:tc>
-                  <a:txBody>
-                    <a:bodyPr wrap="square">
-                      <a:normAutofit/>
-                    </a:bodyPr>
-                    <a:lstStyle/>
-                    <a:p>
-                      <a:pPr algn="l">
-                        <a:lnSpc>
-                          <a:spcPct val="88000"/>
-                        </a:lnSpc>
-                        <a:spcBef>
-                          <a:spcPts val="0"/>
-                        </a:spcBef>
-                        <a:spcAft>
-                          <a:spcPts val="0"/>
-                        </a:spcAft>
-                      </a:pPr>
-                      <a:r>
-                        <a:rPr sz="401" b="0">
-                          <a:solidFill>
-                            <a:srgbClr val="000000"/>
-                          </a:solidFill>
-                          <a:latin typeface="Microsoft YaHei UI"/>
-                        </a:rPr>
-                        <a:t>AstraBrain-WBC 0.5 在 RTX 4090 上推理低于 1.5ms，可满足 50Hz 闭环。</a:t>
-                      </a:r>
-                    </a:p>
-                  </a:txBody>
-                  <a:tcPr anchor="ctr" marL="32004" marR="32004" marT="10972" marB="10972">
-                    <a:solidFill>
-                      <a:srgbClr val="FFFFFF"/>
-                    </a:solidFill>
-                    <a:lnL w="2400">
-                      <a:solidFill>
-                        <a:srgbClr val="B4C0CD"/>
-                      </a:solidFill>
-                    </a:lnL>
-                    <a:lnR w="2400">
-                      <a:solidFill>
-                        <a:srgbClr val="B4C0CD"/>
-                      </a:solidFill>
-                    </a:lnR>
-                    <a:lnT w="2400">
-                      <a:solidFill>
-                        <a:srgbClr val="B4C0CD"/>
-                      </a:solidFill>
-                    </a:lnT>
-                    <a:lnB w="2400">
-                      <a:solidFill>
-                        <a:srgbClr val="B4C0CD"/>
-                      </a:solidFill>
-                    </a:lnB>
-                  </a:tcPr>
-                </a:tc>
-              </a:tr>
-              <a:tr h="379827">
-                <a:tc vMerge="1">
-                  <a:txBody>
-                    <a:bodyPr wrap="square">
-                      <a:normAutofit/>
-                    </a:bodyPr>
-                    <a:lstStyle/>
-                    <a:p>
-                      <a:pPr algn="l">
-                        <a:lnSpc>
-                          <a:spcPct val="88000"/>
-                        </a:lnSpc>
-                        <a:spcBef>
-                          <a:spcPts val="0"/>
-                        </a:spcBef>
-                        <a:spcAft>
-                          <a:spcPts val="0"/>
-                        </a:spcAft>
-                      </a:pPr>
-                      <a:r>
-                        <a:rPr sz="455" b="0">
-                          <a:solidFill>
-                            <a:srgbClr val="000000"/>
-                          </a:solidFill>
-                          <a:latin typeface="Microsoft YaHei UI"/>
-                        </a:rPr>
-                        <a:t/>
-                      </a:r>
-                    </a:p>
-                  </a:txBody>
-                  <a:tcPr anchor="ctr" marL="32004" marR="32004" marT="10972" marB="10972">
-                    <a:solidFill>
-                      <a:srgbClr val="F4F7FA"/>
-                    </a:solidFill>
-                    <a:lnL w="2400">
-                      <a:solidFill>
-                        <a:srgbClr val="B4C0CD"/>
-                      </a:solidFill>
-                    </a:lnL>
-                    <a:lnR w="2400">
-                      <a:solidFill>
-                        <a:srgbClr val="B4C0CD"/>
-                      </a:solidFill>
-                    </a:lnR>
-                    <a:lnT w="2400">
-                      <a:solidFill>
-                        <a:srgbClr val="B4C0CD"/>
-                      </a:solidFill>
-                    </a:lnT>
-                    <a:lnB w="2400">
-                      <a:solidFill>
-                        <a:srgbClr val="B4C0CD"/>
-                      </a:solidFill>
-                    </a:lnB>
-                  </a:tcPr>
-                </a:tc>
-                <a:tc>
-                  <a:txBody>
-                    <a:bodyPr wrap="square">
-                      <a:normAutofit/>
-                    </a:bodyPr>
-                    <a:lstStyle/>
-                    <a:p>
-                      <a:pPr algn="ctr">
-                        <a:lnSpc>
-                          <a:spcPct val="88000"/>
-                        </a:lnSpc>
-                        <a:spcBef>
-                          <a:spcPts val="0"/>
-                        </a:spcBef>
-                        <a:spcAft>
-                          <a:spcPts val="0"/>
-                        </a:spcAft>
-                      </a:pPr>
-                      <a:r>
-                        <a:rPr sz="455" b="1">
-                          <a:solidFill>
-                            <a:srgbClr val="000000"/>
-                          </a:solidFill>
-                          <a:latin typeface="Microsoft YaHei UI"/>
-                        </a:rPr>
-                        <a:t>智平方 AI2</a:t>
-                      </a:r>
-                    </a:p>
-                  </a:txBody>
-                  <a:tcPr anchor="ctr" marL="32004" marR="32004" marT="10972" marB="10972">
-                    <a:solidFill>
-                      <a:srgbClr val="F4F7FA"/>
-                    </a:solidFill>
-                    <a:lnL w="2400">
-                      <a:solidFill>
-                        <a:srgbClr val="B4C0CD"/>
-                      </a:solidFill>
-                    </a:lnL>
-                    <a:lnR w="2400">
-                      <a:solidFill>
-                        <a:srgbClr val="B4C0CD"/>
-                      </a:solidFill>
-                    </a:lnR>
-                    <a:lnT w="2400">
-                      <a:solidFill>
-                        <a:srgbClr val="B4C0CD"/>
-                      </a:solidFill>
-                    </a:lnT>
-                    <a:lnB w="2400">
-                      <a:solidFill>
-                        <a:srgbClr val="B4C0CD"/>
-                      </a:solidFill>
-                    </a:lnB>
-                  </a:tcPr>
-                </a:tc>
-                <a:tc>
-                  <a:txBody>
-                    <a:bodyPr wrap="square">
-                      <a:normAutofit/>
-                    </a:bodyPr>
-                    <a:lstStyle/>
-                    <a:p>
-                      <a:pPr algn="l">
-                        <a:lnSpc>
-                          <a:spcPct val="88000"/>
-                        </a:lnSpc>
-                        <a:spcBef>
-                          <a:spcPts val="0"/>
-                        </a:spcBef>
-                        <a:spcAft>
-                          <a:spcPts val="0"/>
-                        </a:spcAft>
-                      </a:pPr>
-                      <a:r>
-                        <a:rPr sz="432" b="0">
-                          <a:solidFill>
-                            <a:srgbClr val="000000"/>
-                          </a:solidFill>
-                          <a:latin typeface="Microsoft YaHei UI"/>
-                        </a:rPr>
-                        <a:t>AlphaBrain 是具身大模型，GOVLA/FiS-VLA 是采用异构输入和异步频率的双系统 VLA，参数未公开。</a:t>
-                      </a:r>
-                    </a:p>
-                  </a:txBody>
-                  <a:tcPr anchor="ctr" marL="32004" marR="32004" marT="10972" marB="10972">
-                    <a:solidFill>
-                      <a:srgbClr val="F4F7FA"/>
-                    </a:solidFill>
-                    <a:lnL w="2400">
-                      <a:solidFill>
-                        <a:srgbClr val="B4C0CD"/>
-                      </a:solidFill>
-                    </a:lnL>
-                    <a:lnR w="2400">
-                      <a:solidFill>
-                        <a:srgbClr val="B4C0CD"/>
-                      </a:solidFill>
-                    </a:lnR>
-                    <a:lnT w="2400">
-                      <a:solidFill>
-                        <a:srgbClr val="B4C0CD"/>
-                      </a:solidFill>
-                    </a:lnT>
-                    <a:lnB w="2400">
-                      <a:solidFill>
-                        <a:srgbClr val="B4C0CD"/>
-                      </a:solidFill>
-                    </a:lnB>
-                  </a:tcPr>
-                </a:tc>
-                <a:tc>
-                  <a:txBody>
-                    <a:bodyPr wrap="square">
-                      <a:normAutofit/>
-                    </a:bodyPr>
-                    <a:lstStyle/>
-                    <a:p>
-                      <a:pPr algn="l">
-                        <a:lnSpc>
-                          <a:spcPct val="88000"/>
-                        </a:lnSpc>
-                        <a:spcBef>
-                          <a:spcPts val="0"/>
-                        </a:spcBef>
-                        <a:spcAft>
-                          <a:spcPts val="0"/>
-                        </a:spcAft>
-                      </a:pPr>
-                      <a:r>
-                        <a:rPr sz="455" b="0">
-                          <a:solidFill>
-                            <a:srgbClr val="000000"/>
-                          </a:solidFill>
-                          <a:latin typeface="Microsoft YaHei UI"/>
-                        </a:rPr>
-                        <a:t/>
-                      </a:r>
-                    </a:p>
-                  </a:txBody>
-                  <a:tcPr anchor="ctr" marL="32004" marR="32004" marT="10972" marB="10972">
-                    <a:solidFill>
-                      <a:srgbClr val="F4F7FA"/>
-                    </a:solidFill>
-                    <a:lnL w="2400">
-                      <a:solidFill>
-                        <a:srgbClr val="B4C0CD"/>
-                      </a:solidFill>
-                    </a:lnL>
-                    <a:lnR w="2400">
-                      <a:solidFill>
-                        <a:srgbClr val="B4C0CD"/>
-                      </a:solidFill>
-                    </a:lnR>
-                    <a:lnT w="2400">
-                      <a:solidFill>
-                        <a:srgbClr val="B4C0CD"/>
-                      </a:solidFill>
-                    </a:lnT>
-                    <a:lnB w="2400">
-                      <a:solidFill>
-                        <a:srgbClr val="B4C0CD"/>
-                      </a:solidFill>
-                    </a:lnB>
-                  </a:tcPr>
-                </a:tc>
-                <a:tc>
-                  <a:txBody>
-                    <a:bodyPr wrap="square">
-                      <a:normAutofit/>
-                    </a:bodyPr>
-                    <a:lstStyle/>
-                    <a:p>
-                      <a:pPr algn="l">
-                        <a:lnSpc>
-                          <a:spcPct val="88000"/>
-                        </a:lnSpc>
-                        <a:spcBef>
-                          <a:spcPts val="0"/>
-                        </a:spcBef>
-                        <a:spcAft>
-                          <a:spcPts val="0"/>
-                        </a:spcAft>
-                      </a:pPr>
-                      <a:r>
-                        <a:rPr sz="432" b="0">
-                          <a:solidFill>
-                            <a:srgbClr val="000000"/>
-                          </a:solidFill>
-                          <a:latin typeface="Microsoft YaHei UI"/>
-                        </a:rPr>
-                        <a:t/>
-                      </a:r>
-                    </a:p>
-                  </a:txBody>
-                  <a:tcPr anchor="ctr" marL="32004" marR="32004" marT="10972" marB="10972">
-                    <a:solidFill>
-                      <a:srgbClr val="F4F7FA"/>
-                    </a:solidFill>
-                    <a:lnL w="2400">
-                      <a:solidFill>
-                        <a:srgbClr val="B4C0CD"/>
-                      </a:solidFill>
-                    </a:lnL>
-                    <a:lnR w="2400">
-                      <a:solidFill>
-                        <a:srgbClr val="B4C0CD"/>
-                      </a:solidFill>
-                    </a:lnR>
-                    <a:lnT w="2400">
-                      <a:solidFill>
-                        <a:srgbClr val="B4C0CD"/>
-                      </a:solidFill>
-                    </a:lnT>
-                    <a:lnB w="2400">
-                      <a:solidFill>
-                        <a:srgbClr val="B4C0CD"/>
-                      </a:solidFill>
-                    </a:lnB>
-                  </a:tcPr>
-                </a:tc>
-                <a:tc>
-                  <a:txBody>
-                    <a:bodyPr wrap="square">
-                      <a:normAutofit/>
-                    </a:bodyPr>
-                    <a:lstStyle/>
-                    <a:p>
-                      <a:pPr algn="l">
-                        <a:lnSpc>
-                          <a:spcPct val="88000"/>
-                        </a:lnSpc>
-                        <a:spcBef>
-                          <a:spcPts val="0"/>
-                        </a:spcBef>
-                        <a:spcAft>
-                          <a:spcPts val="0"/>
-                        </a:spcAft>
-                      </a:pPr>
-                      <a:r>
-                        <a:rPr sz="432" b="0">
-                          <a:solidFill>
-                            <a:srgbClr val="000000"/>
-                          </a:solidFill>
-                          <a:latin typeface="Microsoft YaHei UI"/>
-                        </a:rPr>
-                        <a:t/>
-                      </a:r>
-                    </a:p>
-                  </a:txBody>
-                  <a:tcPr anchor="ctr" marL="32004" marR="32004" marT="10972" marB="10972">
-                    <a:solidFill>
-                      <a:srgbClr val="F4F7FA"/>
-                    </a:solidFill>
-                    <a:lnL w="2400">
-                      <a:solidFill>
-                        <a:srgbClr val="B4C0CD"/>
-                      </a:solidFill>
-                    </a:lnL>
-                    <a:lnR w="2400">
-                      <a:solidFill>
-                        <a:srgbClr val="B4C0CD"/>
-                      </a:solidFill>
-                    </a:lnR>
-                    <a:lnT w="2400">
-                      <a:solidFill>
-                        <a:srgbClr val="B4C0CD"/>
-                      </a:solidFill>
-                    </a:lnT>
-                    <a:lnB w="2400">
-                      <a:solidFill>
-                        <a:srgbClr val="B4C0CD"/>
-                      </a:solidFill>
-                    </a:lnB>
-                  </a:tcPr>
-                </a:tc>
-              </a:tr>
-              <a:tr h="379827">
-                <a:tc vMerge="1">
-                  <a:txBody>
-                    <a:bodyPr wrap="square">
-                      <a:normAutofit/>
-                    </a:bodyPr>
-                    <a:lstStyle/>
-                    <a:p>
-                      <a:pPr algn="l">
-                        <a:lnSpc>
-                          <a:spcPct val="88000"/>
-                        </a:lnSpc>
-                        <a:spcBef>
-                          <a:spcPts val="0"/>
-                        </a:spcBef>
-                        <a:spcAft>
-                          <a:spcPts val="0"/>
-                        </a:spcAft>
-                      </a:pPr>
-                      <a:r>
-                        <a:rPr sz="455" b="0">
-                          <a:solidFill>
-                            <a:srgbClr val="000000"/>
-                          </a:solidFill>
-                          <a:latin typeface="Microsoft YaHei UI"/>
-                        </a:rPr>
-                        <a:t/>
-                      </a:r>
-                    </a:p>
-                  </a:txBody>
-                  <a:tcPr anchor="ctr" marL="32004" marR="32004" marT="10972" marB="10972">
-                    <a:solidFill>
-                      <a:srgbClr val="FFFFFF"/>
-                    </a:solidFill>
-                    <a:lnL w="2400">
-                      <a:solidFill>
-                        <a:srgbClr val="B4C0CD"/>
-                      </a:solidFill>
-                    </a:lnL>
-                    <a:lnR w="2400">
-                      <a:solidFill>
-                        <a:srgbClr val="B4C0CD"/>
-                      </a:solidFill>
-                    </a:lnR>
-                    <a:lnT w="2400">
-                      <a:solidFill>
-                        <a:srgbClr val="B4C0CD"/>
-                      </a:solidFill>
-                    </a:lnT>
-                    <a:lnB w="2400">
-                      <a:solidFill>
-                        <a:srgbClr val="B4C0CD"/>
-                      </a:solidFill>
-                    </a:lnB>
-                  </a:tcPr>
-                </a:tc>
-                <a:tc>
-                  <a:txBody>
-                    <a:bodyPr wrap="square">
-                      <a:normAutofit/>
-                    </a:bodyPr>
-                    <a:lstStyle/>
-                    <a:p>
-                      <a:pPr algn="ctr">
-                        <a:lnSpc>
-                          <a:spcPct val="88000"/>
-                        </a:lnSpc>
-                        <a:spcBef>
-                          <a:spcPts val="0"/>
-                        </a:spcBef>
-                        <a:spcAft>
-                          <a:spcPts val="0"/>
-                        </a:spcAft>
-                      </a:pPr>
-                      <a:r>
-                        <a:rPr sz="455" b="1">
-                          <a:solidFill>
-                            <a:srgbClr val="000000"/>
-                          </a:solidFill>
-                          <a:latin typeface="Microsoft YaHei UI"/>
-                        </a:rPr>
-                        <a:t>自变量 X Square</a:t>
-                      </a:r>
-                    </a:p>
-                  </a:txBody>
-                  <a:tcPr anchor="ctr" marL="32004" marR="32004" marT="10972" marB="10972">
-                    <a:solidFill>
-                      <a:srgbClr val="FFFFFF"/>
-                    </a:solidFill>
-                    <a:lnL w="2400">
-                      <a:solidFill>
-                        <a:srgbClr val="B4C0CD"/>
-                      </a:solidFill>
-                    </a:lnL>
-                    <a:lnR w="2400">
-                      <a:solidFill>
-                        <a:srgbClr val="B4C0CD"/>
-                      </a:solidFill>
-                    </a:lnR>
-                    <a:lnT w="2400">
-                      <a:solidFill>
-                        <a:srgbClr val="B4C0CD"/>
-                      </a:solidFill>
-                    </a:lnT>
-                    <a:lnB w="2400">
-                      <a:solidFill>
-                        <a:srgbClr val="B4C0CD"/>
-                      </a:solidFill>
-                    </a:lnB>
-                  </a:tcPr>
-                </a:tc>
-                <a:tc>
-                  <a:txBody>
-                    <a:bodyPr wrap="square">
-                      <a:normAutofit/>
-                    </a:bodyPr>
-                    <a:lstStyle/>
-                    <a:p>
-                      <a:pPr algn="l">
-                        <a:lnSpc>
-                          <a:spcPct val="88000"/>
-                        </a:lnSpc>
-                        <a:spcBef>
-                          <a:spcPts val="0"/>
-                        </a:spcBef>
-                        <a:spcAft>
-                          <a:spcPts val="0"/>
-                        </a:spcAft>
-                      </a:pPr>
-                      <a:r>
-                        <a:rPr sz="432" b="0">
-                          <a:solidFill>
-                            <a:srgbClr val="000000"/>
-                          </a:solidFill>
-                          <a:latin typeface="Microsoft YaHei UI"/>
-                        </a:rPr>
-                        <a:t>WALL-B 是世界统一模型，Wall-OSS-0.5 是端到端预训练模型，参数未公开。</a:t>
-                      </a:r>
-                    </a:p>
-                  </a:txBody>
-                  <a:tcPr anchor="ctr" marL="32004" marR="32004" marT="10972" marB="10972">
-                    <a:solidFill>
-                      <a:srgbClr val="FFFFFF"/>
-                    </a:solidFill>
-                    <a:lnL w="2400">
-                      <a:solidFill>
-                        <a:srgbClr val="B4C0CD"/>
-                      </a:solidFill>
-                    </a:lnL>
-                    <a:lnR w="2400">
-                      <a:solidFill>
-                        <a:srgbClr val="B4C0CD"/>
-                      </a:solidFill>
-                    </a:lnR>
-                    <a:lnT w="2400">
-                      <a:solidFill>
-                        <a:srgbClr val="B4C0CD"/>
-                      </a:solidFill>
-                    </a:lnT>
-                    <a:lnB w="2400">
-                      <a:solidFill>
-                        <a:srgbClr val="B4C0CD"/>
-                      </a:solidFill>
-                    </a:lnB>
-                  </a:tcPr>
-                </a:tc>
-                <a:tc>
-                  <a:txBody>
-                    <a:bodyPr wrap="square">
-                      <a:normAutofit/>
-                    </a:bodyPr>
-                    <a:lstStyle/>
-                    <a:p>
-                      <a:pPr algn="l">
-                        <a:lnSpc>
-                          <a:spcPct val="88000"/>
-                        </a:lnSpc>
-                        <a:spcBef>
-                          <a:spcPts val="0"/>
-                        </a:spcBef>
-                        <a:spcAft>
-                          <a:spcPts val="0"/>
-                        </a:spcAft>
-                      </a:pPr>
-                      <a:r>
-                        <a:rPr sz="455" b="0">
-                          <a:solidFill>
-                            <a:srgbClr val="000000"/>
-                          </a:solidFill>
-                          <a:latin typeface="Microsoft YaHei UI"/>
-                        </a:rPr>
-                        <a:t/>
-                      </a:r>
-                    </a:p>
-                  </a:txBody>
-                  <a:tcPr anchor="ctr" marL="32004" marR="32004" marT="10972" marB="10972">
-                    <a:solidFill>
-                      <a:srgbClr val="FFFFFF"/>
-                    </a:solidFill>
-                    <a:lnL w="2400">
-                      <a:solidFill>
-                        <a:srgbClr val="B4C0CD"/>
-                      </a:solidFill>
-                    </a:lnL>
-                    <a:lnR w="2400">
-                      <a:solidFill>
-                        <a:srgbClr val="B4C0CD"/>
-                      </a:solidFill>
-                    </a:lnR>
-                    <a:lnT w="2400">
-                      <a:solidFill>
-                        <a:srgbClr val="B4C0CD"/>
-                      </a:solidFill>
-                    </a:lnT>
-                    <a:lnB w="2400">
-                      <a:solidFill>
-                        <a:srgbClr val="B4C0CD"/>
-                      </a:solidFill>
-                    </a:lnB>
-                  </a:tcPr>
-                </a:tc>
-                <a:tc>
-                  <a:txBody>
-                    <a:bodyPr wrap="square">
-                      <a:normAutofit/>
-                    </a:bodyPr>
-                    <a:lstStyle/>
-                    <a:p>
-                      <a:pPr algn="l">
-                        <a:lnSpc>
-                          <a:spcPct val="88000"/>
-                        </a:lnSpc>
-                        <a:spcBef>
-                          <a:spcPts val="0"/>
-                        </a:spcBef>
-                        <a:spcAft>
-                          <a:spcPts val="0"/>
-                        </a:spcAft>
-                      </a:pPr>
-                      <a:r>
-                        <a:rPr sz="432" b="0">
-                          <a:solidFill>
-                            <a:srgbClr val="000000"/>
-                          </a:solidFill>
-                          <a:latin typeface="Microsoft YaHei UI"/>
-                        </a:rPr>
-                        <a:t>模型已上真机，端云分工未公开。</a:t>
-                      </a:r>
-                    </a:p>
-                  </a:txBody>
-                  <a:tcPr anchor="ctr" marL="32004" marR="32004" marT="10972" marB="10972">
-                    <a:solidFill>
-                      <a:srgbClr val="FFFFFF"/>
-                    </a:solidFill>
-                    <a:lnL w="2400">
-                      <a:solidFill>
-                        <a:srgbClr val="B4C0CD"/>
-                      </a:solidFill>
-                    </a:lnL>
-                    <a:lnR w="2400">
-                      <a:solidFill>
-                        <a:srgbClr val="B4C0CD"/>
-                      </a:solidFill>
-                    </a:lnR>
-                    <a:lnT w="2400">
-                      <a:solidFill>
-                        <a:srgbClr val="B4C0CD"/>
-                      </a:solidFill>
-                    </a:lnT>
-                    <a:lnB w="2400">
-                      <a:solidFill>
-                        <a:srgbClr val="B4C0CD"/>
-                      </a:solidFill>
-                    </a:lnB>
-                  </a:tcPr>
-                </a:tc>
-                <a:tc>
-                  <a:txBody>
-                    <a:bodyPr wrap="square">
-                      <a:normAutofit/>
-                    </a:bodyPr>
-                    <a:lstStyle/>
-                    <a:p>
-                      <a:pPr algn="l">
-                        <a:lnSpc>
-                          <a:spcPct val="88000"/>
-                        </a:lnSpc>
-                        <a:spcBef>
-                          <a:spcPts val="0"/>
-                        </a:spcBef>
-                        <a:spcAft>
-                          <a:spcPts val="0"/>
-                        </a:spcAft>
-                      </a:pPr>
-                      <a:r>
-                        <a:rPr sz="432" b="0">
+                        <a:rPr sz="430" b="0">
                           <a:solidFill>
                             <a:srgbClr val="000000"/>
                           </a:solidFill>
@@ -7905,8 +7905,8 @@
         </p:nvSpPr>
         <p:spPr>
           <a:xfrm>
-            <a:off x="329184" y="6099048"/>
-            <a:ext cx="1508760" cy="164592"/>
+            <a:off x="310896" y="6089904"/>
+            <a:ext cx="1417320" cy="164592"/>
           </a:xfrm>
           <a:prstGeom prst="rect">
             <a:avLst/>
@@ -7925,13 +7925,13 @@
               </a:spcAft>
             </a:pPr>
             <a:r>
-              <a:rPr sz="610" b="1">
+              <a:rPr sz="600" b="1">
                 <a:solidFill>
                   <a:srgbClr val="000000"/>
                 </a:solidFill>
                 <a:latin typeface="Microsoft YaHei UI"/>
               </a:rPr>
-              <a:t>端侧算力与模型能力</a:t>
+              <a:t>现状：端侧算力上台阶</a:t>
             </a:r>
           </a:p>
         </p:txBody>
@@ -7944,8 +7944,8 @@
         </p:nvSpPr>
         <p:spPr>
           <a:xfrm>
-            <a:off x="1901952" y="6071616"/>
-            <a:ext cx="3977639" cy="347472"/>
+            <a:off x="1755648" y="6044184"/>
+            <a:ext cx="4315968" cy="420624"/>
           </a:xfrm>
           <a:prstGeom prst="rect">
             <a:avLst/>
@@ -7964,13 +7964,13 @@
               </a:spcAft>
             </a:pPr>
             <a:r>
-              <a:rPr sz="545" b="0">
+              <a:rPr sz="512" b="0">
                 <a:solidFill>
                   <a:srgbClr val="000000"/>
                 </a:solidFill>
                 <a:latin typeface="Microsoft YaHei UI"/>
               </a:rPr>
-              <a:t>端侧大脑已进入 700-1000 TOPS 和 1200-2070 FP4 TFLOPS 档；1.5B/0.9B VLA 可到 H20 37Hz，6B VLA 本地约 130ms。</a:t>
+              <a:t>NVIDIA 从 Orin 级走向 Thor 级：T4000 为 1200 FP4 TFLOPS，T5000/AGX Thor 为 2070 FP4 TFLOPS、128GB；整机侧已有 560/700/1000 TOPS 样本。</a:t>
             </a:r>
           </a:p>
         </p:txBody>
@@ -7983,8 +7983,8 @@
         </p:nvSpPr>
         <p:spPr>
           <a:xfrm>
-            <a:off x="6144768" y="6099048"/>
-            <a:ext cx="1508760" cy="164592"/>
+            <a:off x="6181344" y="6089904"/>
+            <a:ext cx="1417320" cy="164592"/>
           </a:xfrm>
           <a:prstGeom prst="rect">
             <a:avLst/>
@@ -8003,13 +8003,13 @@
               </a:spcAft>
             </a:pPr>
             <a:r>
-              <a:rPr sz="610" b="1">
+              <a:rPr sz="600" b="1">
                 <a:solidFill>
                   <a:srgbClr val="000000"/>
                 </a:solidFill>
                 <a:latin typeface="Microsoft YaHei UI"/>
               </a:rPr>
-              <a:t>端侧化与端云协同</a:t>
+              <a:t>前景：端云协同仍主流</a:t>
             </a:r>
           </a:p>
         </p:txBody>
@@ -8022,8 +8022,8 @@
         </p:nvSpPr>
         <p:spPr>
           <a:xfrm>
-            <a:off x="7717536" y="6071616"/>
-            <a:ext cx="3977639" cy="347472"/>
+            <a:off x="7626096" y="6044184"/>
+            <a:ext cx="4315968" cy="420624"/>
           </a:xfrm>
           <a:prstGeom prst="rect">
             <a:avLst/>
@@ -8042,13 +8042,13 @@
               </a:spcAft>
             </a:pPr>
             <a:r>
-              <a:rPr sz="545" b="0">
+              <a:rPr sz="512" b="0">
                 <a:solidFill>
                   <a:srgbClr val="000000"/>
                 </a:solidFill>
                 <a:latin typeface="Microsoft YaHei UI"/>
               </a:rPr>
-              <a:t>端侧负责断网可用、低时延和隐私，云侧负责更大模型、慢推理和多机调度；典型参照是 100B Thinker 与 72B PelicanVLM。</a:t>
+              <a:t>1-7B VLA/LLM 更易纯端侧，72B/100B 大脑更适合端云协同；端侧跑安全、离线和快反应，云侧跑规划、调度和持续迭代。</a:t>
             </a:r>
           </a:p>
         </p:txBody>
@@ -8081,13 +8081,13 @@
               </a:spcAft>
             </a:pPr>
             <a:r>
-              <a:rPr sz="440" b="0">
+              <a:rPr sz="430" b="0">
                 <a:solidFill>
                   <a:srgbClr val="000000"/>
                 </a:solidFill>
                 <a:latin typeface="Microsoft YaHei UI"/>
               </a:rPr>
-              <a:t>* Nexo 700TOPS、中国兵器无网端侧大脑、讯飞 MS-N1100 云端/纯端切换为会场口径；公开网页未完整披露具体模型。</a:t>
+              <a:t>* 部署占比按报告末尾 22 家/项目扩展样本统计；Nexo 700TOPS、中国兵器无网端侧大脑、讯飞 MS-N1100 云端/纯端切换为会场口径。</a:t>
             </a:r>
           </a:p>
         </p:txBody>

--- a/WRC_WAIC_2026_embodied_system012_onepage.pptx
+++ b/WRC_WAIC_2026_embodied_system012_onepage.pptx
@@ -7,7 +7,7 @@
   <p:sldIdLst>
     <p:sldId id="256" r:id="rId7"/>
   </p:sldIdLst>
-  <p:sldSz cx="12191695" cy="6858000" type="screen4x3"/>
+  <p:sldSz cx="12191999" cy="6858000" type="screen4x3"/>
   <p:notesSz cx="6858000" cy="9144000"/>
   <p:defaultTextStyle>
     <a:defPPr>
@@ -3081,14 +3081,6 @@
 <file path=ppt/slides/slide1.xml><?xml version="1.0" encoding="utf-8"?>
 <p:sld xmlns:a="http://schemas.openxmlformats.org/drawingml/2006/main" xmlns:p="http://schemas.openxmlformats.org/presentationml/2006/main" xmlns:r="http://schemas.openxmlformats.org/officeDocument/2006/relationships">
   <p:cSld>
-    <p:bg>
-      <p:bgPr>
-        <a:solidFill>
-          <a:srgbClr val="F8FAFC"/>
-        </a:solidFill>
-        <a:effectLst/>
-      </p:bgPr>
-    </p:bg>
     <p:spTree>
       <p:nvGrpSpPr>
         <p:cNvPr id="1" name=""/>
@@ -3104,8 +3096,8 @@
         </p:nvSpPr>
         <p:spPr>
           <a:xfrm>
-            <a:off x="201168" y="73152"/>
-            <a:ext cx="8961120" cy="292608"/>
+            <a:off x="256032" y="54864"/>
+            <a:ext cx="11704320" cy="292608"/>
           </a:xfrm>
           <a:prstGeom prst="rect">
             <a:avLst/>
@@ -3113,78 +3105,35 @@
           <a:noFill/>
         </p:spPr>
         <p:txBody>
-          <a:bodyPr wrap="square">
-            <a:noAutofit/>
+          <a:bodyPr wrap="none">
+            <a:spAutoFit/>
           </a:bodyPr>
           <a:lstStyle/>
           <a:p>
-            <a:pPr algn="l">
-              <a:spcAft>
-                <a:spcPts val="0"/>
-              </a:spcAft>
-            </a:pPr>
+            <a:pPr algn="l"/>
             <a:r>
               <a:rPr sz="1700" b="1">
                 <a:solidFill>
                   <a:srgbClr val="000000"/>
                 </a:solidFill>
-                <a:latin typeface="Microsoft YaHei UI"/>
+                <a:latin typeface="Noto Sans CJK SC"/>
               </a:rPr>
-              <a:t>WRC/WAIC 2026 机器人“大脑”部署方式与模型硬数据</a:t>
-            </a:r>
-          </a:p>
-        </p:txBody>
-      </p:sp>
-      <p:sp>
-        <p:nvSpPr>
-          <p:cNvPr id="3" name="TextBox 2"/>
-          <p:cNvSpPr txBox="1"/>
-          <p:nvPr/>
-        </p:nvSpPr>
-        <p:spPr>
-          <a:xfrm>
-            <a:off x="219456" y="384048"/>
-            <a:ext cx="9966960" cy="146304"/>
-          </a:xfrm>
-          <a:prstGeom prst="rect">
-            <a:avLst/>
-          </a:prstGeom>
-          <a:noFill/>
-        </p:spPr>
-        <p:txBody>
-          <a:bodyPr wrap="square">
-            <a:noAutofit/>
-          </a:bodyPr>
-          <a:lstStyle/>
-          <a:p>
-            <a:pPr algn="l">
-              <a:spcAft>
-                <a:spcPts val="0"/>
-              </a:spcAft>
-            </a:pPr>
-            <a:r>
-              <a:rPr sz="640" b="0">
-                <a:solidFill>
-                  <a:srgbClr val="000000"/>
-                </a:solidFill>
-                <a:latin typeface="Microsoft YaHei UI"/>
-              </a:rPr>
-              <a:t>表内为代表样本；部署占比按报告末尾 22 家/项目扩展样本统计，算力趋势参考 NVIDIA Thor/Jetson 等平台。</a:t>
+              <a:t>WRC/WAIC 2026 机器人“大脑”模型与部署量化图谱</a:t>
             </a:r>
           </a:p>
         </p:txBody>
       </p:sp>
       <p:graphicFrame>
         <p:nvGraphicFramePr>
-          <p:cNvPr id="4" name="Table 3"/>
+          <p:cNvPr id="3" name="Table 2"/>
           <p:cNvGraphicFramePr>
             <a:graphicFrameLocks noGrp="1"/>
           </p:cNvGraphicFramePr>
           <p:nvPr/>
         </p:nvGraphicFramePr>
         <p:xfrm>
-          <a:off x="164592" y="621792"/>
-          <a:ext cx="11868912" cy="5248647"/>
+          <a:off x="201168" y="438912"/>
+          <a:ext cx="11795760" cy="5440680"/>
         </p:xfrm>
         <a:graphic>
           <a:graphicData uri="http://schemas.openxmlformats.org/drawingml/2006/table">
@@ -3193,4656 +3142,5202 @@
                 <a:tableStyleId>{5C22544A-7EE6-4342-B048-85BDC9FD1C3A}</a:tableStyleId>
               </a:tblPr>
               <a:tblGrid>
-                <a:gridCol w="1609344"/>
-                <a:gridCol w="1060704"/>
-                <a:gridCol w="2980944"/>
-                <a:gridCol w="1664208"/>
-                <a:gridCol w="2779776"/>
-                <a:gridCol w="1773936"/>
+                <a:gridCol w="1399032"/>
+                <a:gridCol w="859536"/>
+                <a:gridCol w="2926080"/>
+                <a:gridCol w="1828800"/>
+                <a:gridCol w="2834640"/>
+                <a:gridCol w="1947672"/>
               </a:tblGrid>
-              <a:tr h="310896">
-                <a:tc>
-                  <a:txBody>
-                    <a:bodyPr wrap="square">
-                      <a:normAutofit/>
-                    </a:bodyPr>
+              <a:tr h="272034">
+                <a:tc>
+                  <a:txBody>
+                    <a:bodyPr wrap="square" lIns="13716" rIns="13716" tIns="9144" bIns="5486"/>
                     <a:lstStyle/>
                     <a:p>
                       <a:pPr algn="ctr">
                         <a:lnSpc>
                           <a:spcPct val="88000"/>
                         </a:lnSpc>
-                        <a:spcBef>
-                          <a:spcPts val="0"/>
-                        </a:spcBef>
-                        <a:spcAft>
-                          <a:spcPts val="0"/>
-                        </a:spcAft>
                       </a:pPr>
                       <a:r>
-                        <a:rPr sz="585" b="1">
+                        <a:rPr sz="480" b="1">
                           <a:solidFill>
                             <a:srgbClr val="000000"/>
                           </a:solidFill>
-                          <a:latin typeface="Microsoft YaHei UI"/>
+                          <a:latin typeface="Noto Sans CJK SC"/>
                         </a:rPr>
                         <a:t>部署方式</a:t>
                       </a:r>
                     </a:p>
                   </a:txBody>
-                  <a:tcPr anchor="ctr" marL="32004" marR="32004" marT="10972" marB="10972">
-                    <a:solidFill>
-                      <a:srgbClr val="E0E7EE"/>
-                    </a:solidFill>
-                    <a:lnL w="3600">
-                      <a:solidFill>
-                        <a:srgbClr val="AEBBC8"/>
-                      </a:solidFill>
-                    </a:lnL>
-                    <a:lnR w="3600">
-                      <a:solidFill>
-                        <a:srgbClr val="AEBBC8"/>
-                      </a:solidFill>
-                    </a:lnR>
-                    <a:lnT w="3600">
-                      <a:solidFill>
-                        <a:srgbClr val="AEBBC8"/>
-                      </a:solidFill>
-                    </a:lnT>
-                    <a:lnB w="3600">
-                      <a:solidFill>
-                        <a:srgbClr val="AEBBC8"/>
-                      </a:solidFill>
-                    </a:lnB>
-                  </a:tcPr>
-                </a:tc>
-                <a:tc>
-                  <a:txBody>
-                    <a:bodyPr wrap="square">
-                      <a:normAutofit/>
-                    </a:bodyPr>
+                  <a:tcPr anchor="ctr">
+                    <a:solidFill>
+                      <a:srgbClr val="E8EBEE"/>
+                    </a:solidFill>
+                    <a:lnL w="3600">
+                      <a:solidFill>
+                        <a:srgbClr val="B2B2B2"/>
+                      </a:solidFill>
+                    </a:lnL>
+                    <a:lnR w="3600">
+                      <a:solidFill>
+                        <a:srgbClr val="B2B2B2"/>
+                      </a:solidFill>
+                    </a:lnR>
+                    <a:lnT w="3600">
+                      <a:solidFill>
+                        <a:srgbClr val="B2B2B2"/>
+                      </a:solidFill>
+                    </a:lnT>
+                    <a:lnB w="3600">
+                      <a:solidFill>
+                        <a:srgbClr val="B2B2B2"/>
+                      </a:solidFill>
+                    </a:lnB>
+                  </a:tcPr>
+                </a:tc>
+                <a:tc>
+                  <a:txBody>
+                    <a:bodyPr wrap="square" lIns="13716" rIns="13716" tIns="9144" bIns="5486"/>
                     <a:lstStyle/>
                     <a:p>
                       <a:pPr algn="ctr">
                         <a:lnSpc>
                           <a:spcPct val="88000"/>
                         </a:lnSpc>
-                        <a:spcBef>
-                          <a:spcPts val="0"/>
-                        </a:spcBef>
-                        <a:spcAft>
-                          <a:spcPts val="0"/>
-                        </a:spcAft>
                       </a:pPr>
                       <a:r>
-                        <a:rPr sz="585" b="1">
+                        <a:rPr sz="480" b="1">
                           <a:solidFill>
                             <a:srgbClr val="000000"/>
                           </a:solidFill>
-                          <a:latin typeface="Microsoft YaHei UI"/>
+                          <a:latin typeface="Noto Sans CJK SC"/>
                         </a:rPr>
-                        <a:t>玩家/项目</a:t>
+                        <a:t>厂商/项目</a:t>
                       </a:r>
                     </a:p>
                   </a:txBody>
-                  <a:tcPr anchor="ctr" marL="32004" marR="32004" marT="10972" marB="10972">
-                    <a:solidFill>
-                      <a:srgbClr val="E0E7EE"/>
-                    </a:solidFill>
-                    <a:lnL w="3600">
-                      <a:solidFill>
-                        <a:srgbClr val="AEBBC8"/>
-                      </a:solidFill>
-                    </a:lnL>
-                    <a:lnR w="3600">
-                      <a:solidFill>
-                        <a:srgbClr val="AEBBC8"/>
-                      </a:solidFill>
-                    </a:lnR>
-                    <a:lnT w="3600">
-                      <a:solidFill>
-                        <a:srgbClr val="AEBBC8"/>
-                      </a:solidFill>
-                    </a:lnT>
-                    <a:lnB w="3600">
-                      <a:solidFill>
-                        <a:srgbClr val="AEBBC8"/>
-                      </a:solidFill>
-                    </a:lnB>
-                  </a:tcPr>
-                </a:tc>
-                <a:tc>
-                  <a:txBody>
-                    <a:bodyPr wrap="square">
-                      <a:normAutofit/>
-                    </a:bodyPr>
+                  <a:tcPr anchor="ctr">
+                    <a:solidFill>
+                      <a:srgbClr val="E8EBEE"/>
+                    </a:solidFill>
+                    <a:lnL w="3600">
+                      <a:solidFill>
+                        <a:srgbClr val="B2B2B2"/>
+                      </a:solidFill>
+                    </a:lnL>
+                    <a:lnR w="3600">
+                      <a:solidFill>
+                        <a:srgbClr val="B2B2B2"/>
+                      </a:solidFill>
+                    </a:lnR>
+                    <a:lnT w="3600">
+                      <a:solidFill>
+                        <a:srgbClr val="B2B2B2"/>
+                      </a:solidFill>
+                    </a:lnT>
+                    <a:lnB w="3600">
+                      <a:solidFill>
+                        <a:srgbClr val="B2B2B2"/>
+                      </a:solidFill>
+                    </a:lnB>
+                  </a:tcPr>
+                </a:tc>
+                <a:tc>
+                  <a:txBody>
+                    <a:bodyPr wrap="square" lIns="13716" rIns="13716" tIns="9144" bIns="5486"/>
                     <a:lstStyle/>
                     <a:p>
                       <a:pPr algn="ctr">
                         <a:lnSpc>
                           <a:spcPct val="88000"/>
                         </a:lnSpc>
-                        <a:spcBef>
-                          <a:spcPts val="0"/>
-                        </a:spcBef>
-                        <a:spcAft>
-                          <a:spcPts val="0"/>
-                        </a:spcAft>
                       </a:pPr>
                       <a:r>
-                        <a:rPr sz="585" b="1">
+                        <a:rPr sz="480" b="1">
                           <a:solidFill>
                             <a:srgbClr val="000000"/>
                           </a:solidFill>
-                          <a:latin typeface="Microsoft YaHei UI"/>
+                          <a:latin typeface="Noto Sans CJK SC"/>
                         </a:rPr>
                         <a:t>大脑模型、架构和参数</a:t>
                       </a:r>
                     </a:p>
                   </a:txBody>
-                  <a:tcPr anchor="ctr" marL="32004" marR="32004" marT="10972" marB="10972">
-                    <a:solidFill>
-                      <a:srgbClr val="E0E7EE"/>
-                    </a:solidFill>
-                    <a:lnL w="3600">
-                      <a:solidFill>
-                        <a:srgbClr val="AEBBC8"/>
-                      </a:solidFill>
-                    </a:lnL>
-                    <a:lnR w="3600">
-                      <a:solidFill>
-                        <a:srgbClr val="AEBBC8"/>
-                      </a:solidFill>
-                    </a:lnR>
-                    <a:lnT w="3600">
-                      <a:solidFill>
-                        <a:srgbClr val="AEBBC8"/>
-                      </a:solidFill>
-                    </a:lnT>
-                    <a:lnB w="3600">
-                      <a:solidFill>
-                        <a:srgbClr val="AEBBC8"/>
-                      </a:solidFill>
-                    </a:lnB>
-                  </a:tcPr>
-                </a:tc>
-                <a:tc>
-                  <a:txBody>
-                    <a:bodyPr wrap="square">
-                      <a:normAutofit/>
-                    </a:bodyPr>
+                  <a:tcPr anchor="ctr">
+                    <a:solidFill>
+                      <a:srgbClr val="E8EBEE"/>
+                    </a:solidFill>
+                    <a:lnL w="3600">
+                      <a:solidFill>
+                        <a:srgbClr val="B2B2B2"/>
+                      </a:solidFill>
+                    </a:lnL>
+                    <a:lnR w="3600">
+                      <a:solidFill>
+                        <a:srgbClr val="B2B2B2"/>
+                      </a:solidFill>
+                    </a:lnR>
+                    <a:lnT w="3600">
+                      <a:solidFill>
+                        <a:srgbClr val="B2B2B2"/>
+                      </a:solidFill>
+                    </a:lnT>
+                    <a:lnB w="3600">
+                      <a:solidFill>
+                        <a:srgbClr val="B2B2B2"/>
+                      </a:solidFill>
+                    </a:lnB>
+                  </a:tcPr>
+                </a:tc>
+                <a:tc>
+                  <a:txBody>
+                    <a:bodyPr wrap="square" lIns="13716" rIns="13716" tIns="9144" bIns="5486"/>
                     <a:lstStyle/>
                     <a:p>
                       <a:pPr algn="ctr">
                         <a:lnSpc>
                           <a:spcPct val="88000"/>
                         </a:lnSpc>
-                        <a:spcBef>
-                          <a:spcPts val="0"/>
-                        </a:spcBef>
-                        <a:spcAft>
-                          <a:spcPts val="0"/>
-                        </a:spcAft>
                       </a:pPr>
                       <a:r>
-                        <a:rPr sz="585" b="1">
+                        <a:rPr sz="480" b="1">
                           <a:solidFill>
                             <a:srgbClr val="000000"/>
                           </a:solidFill>
-                          <a:latin typeface="Microsoft YaHei UI"/>
+                          <a:latin typeface="Noto Sans CJK SC"/>
                         </a:rPr>
                         <a:t>小脑模型</a:t>
                       </a:r>
                     </a:p>
                   </a:txBody>
-                  <a:tcPr anchor="ctr" marL="32004" marR="32004" marT="10972" marB="10972">
-                    <a:solidFill>
-                      <a:srgbClr val="E0E7EE"/>
-                    </a:solidFill>
-                    <a:lnL w="3600">
-                      <a:solidFill>
-                        <a:srgbClr val="AEBBC8"/>
-                      </a:solidFill>
-                    </a:lnL>
-                    <a:lnR w="3600">
-                      <a:solidFill>
-                        <a:srgbClr val="AEBBC8"/>
-                      </a:solidFill>
-                    </a:lnR>
-                    <a:lnT w="3600">
-                      <a:solidFill>
-                        <a:srgbClr val="AEBBC8"/>
-                      </a:solidFill>
-                    </a:lnT>
-                    <a:lnB w="3600">
-                      <a:solidFill>
-                        <a:srgbClr val="AEBBC8"/>
-                      </a:solidFill>
-                    </a:lnB>
-                  </a:tcPr>
-                </a:tc>
-                <a:tc>
-                  <a:txBody>
-                    <a:bodyPr wrap="square">
-                      <a:normAutofit/>
-                    </a:bodyPr>
+                  <a:tcPr anchor="ctr">
+                    <a:solidFill>
+                      <a:srgbClr val="E8EBEE"/>
+                    </a:solidFill>
+                    <a:lnL w="3600">
+                      <a:solidFill>
+                        <a:srgbClr val="B2B2B2"/>
+                      </a:solidFill>
+                    </a:lnL>
+                    <a:lnR w="3600">
+                      <a:solidFill>
+                        <a:srgbClr val="B2B2B2"/>
+                      </a:solidFill>
+                    </a:lnR>
+                    <a:lnT w="3600">
+                      <a:solidFill>
+                        <a:srgbClr val="B2B2B2"/>
+                      </a:solidFill>
+                    </a:lnT>
+                    <a:lnB w="3600">
+                      <a:solidFill>
+                        <a:srgbClr val="B2B2B2"/>
+                      </a:solidFill>
+                    </a:lnB>
+                  </a:tcPr>
+                </a:tc>
+                <a:tc>
+                  <a:txBody>
+                    <a:bodyPr wrap="square" lIns="13716" rIns="13716" tIns="9144" bIns="5486"/>
                     <a:lstStyle/>
                     <a:p>
                       <a:pPr algn="ctr">
                         <a:lnSpc>
                           <a:spcPct val="88000"/>
                         </a:lnSpc>
-                        <a:spcBef>
-                          <a:spcPts val="0"/>
-                        </a:spcBef>
-                        <a:spcAft>
-                          <a:spcPts val="0"/>
-                        </a:spcAft>
                       </a:pPr>
                       <a:r>
-                        <a:rPr sz="585" b="1">
+                        <a:rPr sz="480" b="1">
                           <a:solidFill>
                             <a:srgbClr val="000000"/>
                           </a:solidFill>
-                          <a:latin typeface="Microsoft YaHei UI"/>
+                          <a:latin typeface="Noto Sans CJK SC"/>
                         </a:rPr>
-                        <a:t>算力与部署</a:t>
+                        <a:t>算力/部署</a:t>
                       </a:r>
                     </a:p>
                   </a:txBody>
-                  <a:tcPr anchor="ctr" marL="32004" marR="32004" marT="10972" marB="10972">
-                    <a:solidFill>
-                      <a:srgbClr val="E0E7EE"/>
-                    </a:solidFill>
-                    <a:lnL w="3600">
-                      <a:solidFill>
-                        <a:srgbClr val="AEBBC8"/>
-                      </a:solidFill>
-                    </a:lnL>
-                    <a:lnR w="3600">
-                      <a:solidFill>
-                        <a:srgbClr val="AEBBC8"/>
-                      </a:solidFill>
-                    </a:lnR>
-                    <a:lnT w="3600">
-                      <a:solidFill>
-                        <a:srgbClr val="AEBBC8"/>
-                      </a:solidFill>
-                    </a:lnT>
-                    <a:lnB w="3600">
-                      <a:solidFill>
-                        <a:srgbClr val="AEBBC8"/>
-                      </a:solidFill>
-                    </a:lnB>
-                  </a:tcPr>
-                </a:tc>
-                <a:tc>
-                  <a:txBody>
-                    <a:bodyPr wrap="square">
-                      <a:normAutofit/>
-                    </a:bodyPr>
+                  <a:tcPr anchor="ctr">
+                    <a:solidFill>
+                      <a:srgbClr val="E8EBEE"/>
+                    </a:solidFill>
+                    <a:lnL w="3600">
+                      <a:solidFill>
+                        <a:srgbClr val="B2B2B2"/>
+                      </a:solidFill>
+                    </a:lnL>
+                    <a:lnR w="3600">
+                      <a:solidFill>
+                        <a:srgbClr val="B2B2B2"/>
+                      </a:solidFill>
+                    </a:lnR>
+                    <a:lnT w="3600">
+                      <a:solidFill>
+                        <a:srgbClr val="B2B2B2"/>
+                      </a:solidFill>
+                    </a:lnT>
+                    <a:lnB w="3600">
+                      <a:solidFill>
+                        <a:srgbClr val="B2B2B2"/>
+                      </a:solidFill>
+                    </a:lnB>
+                  </a:tcPr>
+                </a:tc>
+                <a:tc>
+                  <a:txBody>
+                    <a:bodyPr wrap="square" lIns="13716" rIns="13716" tIns="9144" bIns="5486"/>
                     <a:lstStyle/>
                     <a:p>
                       <a:pPr algn="ctr">
                         <a:lnSpc>
                           <a:spcPct val="88000"/>
                         </a:lnSpc>
-                        <a:spcBef>
-                          <a:spcPts val="0"/>
-                        </a:spcBef>
-                        <a:spcAft>
-                          <a:spcPts val="0"/>
-                        </a:spcAft>
                       </a:pPr>
                       <a:r>
-                        <a:rPr sz="585" b="1">
+                        <a:rPr sz="480" b="1">
                           <a:solidFill>
                             <a:srgbClr val="000000"/>
                           </a:solidFill>
-                          <a:latin typeface="Microsoft YaHei UI"/>
+                          <a:latin typeface="Noto Sans CJK SC"/>
                         </a:rPr>
                         <a:t>推理频率/延迟</a:t>
                       </a:r>
                     </a:p>
                   </a:txBody>
-                  <a:tcPr anchor="ctr" marL="32004" marR="32004" marT="10972" marB="10972">
-                    <a:solidFill>
-                      <a:srgbClr val="E0E7EE"/>
-                    </a:solidFill>
-                    <a:lnL w="3600">
-                      <a:solidFill>
-                        <a:srgbClr val="AEBBC8"/>
-                      </a:solidFill>
-                    </a:lnL>
-                    <a:lnR w="3600">
-                      <a:solidFill>
-                        <a:srgbClr val="AEBBC8"/>
-                      </a:solidFill>
-                    </a:lnR>
-                    <a:lnT w="3600">
-                      <a:solidFill>
-                        <a:srgbClr val="AEBBC8"/>
-                      </a:solidFill>
-                    </a:lnT>
-                    <a:lnB w="3600">
-                      <a:solidFill>
-                        <a:srgbClr val="AEBBC8"/>
+                  <a:tcPr anchor="ctr">
+                    <a:solidFill>
+                      <a:srgbClr val="E8EBEE"/>
+                    </a:solidFill>
+                    <a:lnL w="3600">
+                      <a:solidFill>
+                        <a:srgbClr val="B2B2B2"/>
+                      </a:solidFill>
+                    </a:lnL>
+                    <a:lnR w="3600">
+                      <a:solidFill>
+                        <a:srgbClr val="B2B2B2"/>
+                      </a:solidFill>
+                    </a:lnR>
+                    <a:lnT w="3600">
+                      <a:solidFill>
+                        <a:srgbClr val="B2B2B2"/>
+                      </a:solidFill>
+                    </a:lnT>
+                    <a:lnB w="3600">
+                      <a:solidFill>
+                        <a:srgbClr val="B2B2B2"/>
                       </a:solidFill>
                     </a:lnB>
                   </a:tcPr>
                 </a:tc>
               </a:tr>
-              <a:tr h="379827">
-                <a:tc rowSpan="5">
-                  <a:txBody>
-                    <a:bodyPr wrap="square">
-                      <a:normAutofit/>
-                    </a:bodyPr>
-                    <a:lstStyle/>
-                    <a:p>
-                      <a:pPr algn="l">
-                        <a:lnSpc>
-                          <a:spcPct val="88000"/>
-                        </a:lnSpc>
-                        <a:spcBef>
-                          <a:spcPts val="0"/>
-                        </a:spcBef>
-                        <a:spcAft>
-                          <a:spcPts val="0"/>
-                        </a:spcAft>
+              <a:tr h="272034">
+                <a:tc rowSpan="8">
+                  <a:txBody>
+                    <a:bodyPr wrap="square" lIns="13716" rIns="13716" tIns="9144" bIns="5486"/>
+                    <a:lstStyle/>
+                    <a:p>
+                      <a:pPr algn="ctr">
+                        <a:lnSpc>
+                          <a:spcPct val="88000"/>
+                        </a:lnSpc>
                       </a:pPr>
                       <a:r>
-                        <a:rPr sz="465" b="0">
+                        <a:rPr sz="390" b="1">
                           <a:solidFill>
                             <a:srgbClr val="000000"/>
                           </a:solidFill>
-                          <a:latin typeface="Microsoft YaHei UI"/>
+                          <a:latin typeface="Noto Sans CJK SC"/>
                         </a:rPr>
-                        <a:t>纯端侧/本体端侧：模型或智脑设备主要在本体运行。优点是离线可用、低时延和数据不出端；缺点是受功耗、显存和散热约束。扩展样本 5/22，占 22.7%。</a:t>
+                        <a:t>纯端侧/本体端侧：本体运行模型或智脑，离线、低延迟、数据不出端，但受功耗、显存和散热限制；8/25，占 32.0%。</a:t>
                       </a:r>
                     </a:p>
                   </a:txBody>
-                  <a:tcPr anchor="ctr" marL="32004" marR="32004" marT="10972" marB="10972">
-                    <a:solidFill>
-                      <a:srgbClr val="ECF2F7"/>
-                    </a:solidFill>
-                    <a:lnL w="3200">
-                      <a:solidFill>
-                        <a:srgbClr val="AAB8C6"/>
-                      </a:solidFill>
-                    </a:lnL>
-                    <a:lnR w="3200">
-                      <a:solidFill>
-                        <a:srgbClr val="AAB8C6"/>
-                      </a:solidFill>
-                    </a:lnR>
-                    <a:lnT w="3200">
-                      <a:solidFill>
-                        <a:srgbClr val="AAB8C6"/>
-                      </a:solidFill>
-                    </a:lnT>
-                    <a:lnB w="3200">
-                      <a:solidFill>
-                        <a:srgbClr val="AAB8C6"/>
-                      </a:solidFill>
-                    </a:lnB>
-                  </a:tcPr>
-                </a:tc>
-                <a:tc>
-                  <a:txBody>
-                    <a:bodyPr wrap="square">
-                      <a:normAutofit/>
-                    </a:bodyPr>
+                  <a:tcPr anchor="ctr">
+                    <a:solidFill>
+                      <a:srgbClr val="F2F4F6"/>
+                    </a:solidFill>
+                    <a:lnL w="3600">
+                      <a:solidFill>
+                        <a:srgbClr val="B2B2B2"/>
+                      </a:solidFill>
+                    </a:lnL>
+                    <a:lnR w="3600">
+                      <a:solidFill>
+                        <a:srgbClr val="B2B2B2"/>
+                      </a:solidFill>
+                    </a:lnR>
+                    <a:lnT w="3600">
+                      <a:solidFill>
+                        <a:srgbClr val="B2B2B2"/>
+                      </a:solidFill>
+                    </a:lnT>
+                    <a:lnB w="3600">
+                      <a:solidFill>
+                        <a:srgbClr val="B2B2B2"/>
+                      </a:solidFill>
+                    </a:lnB>
+                  </a:tcPr>
+                </a:tc>
+                <a:tc>
+                  <a:txBody>
+                    <a:bodyPr wrap="square" lIns="13716" rIns="13716" tIns="9144" bIns="5486"/>
                     <a:lstStyle/>
                     <a:p>
                       <a:pPr algn="ctr">
                         <a:lnSpc>
                           <a:spcPct val="88000"/>
                         </a:lnSpc>
-                        <a:spcBef>
-                          <a:spcPts val="0"/>
-                        </a:spcBef>
-                        <a:spcAft>
-                          <a:spcPts val="0"/>
-                        </a:spcAft>
                       </a:pPr>
                       <a:r>
-                        <a:rPr sz="455" b="1">
+                        <a:rPr sz="365" b="0">
                           <a:solidFill>
                             <a:srgbClr val="000000"/>
                           </a:solidFill>
-                          <a:latin typeface="Microsoft YaHei UI"/>
+                          <a:latin typeface="Noto Sans CJK SC"/>
                         </a:rPr>
                         <a:t>蚂蚁灵波 Robbyant</a:t>
                       </a:r>
                     </a:p>
                   </a:txBody>
-                  <a:tcPr anchor="ctr" marL="32004" marR="32004" marT="10972" marB="10972">
-                    <a:solidFill>
-                      <a:srgbClr val="FFFFFF"/>
-                    </a:solidFill>
-                    <a:lnL w="2400">
-                      <a:solidFill>
-                        <a:srgbClr val="B4C0CD"/>
-                      </a:solidFill>
-                    </a:lnL>
-                    <a:lnR w="2400">
-                      <a:solidFill>
-                        <a:srgbClr val="B4C0CD"/>
-                      </a:solidFill>
-                    </a:lnR>
-                    <a:lnT w="2400">
-                      <a:solidFill>
-                        <a:srgbClr val="B4C0CD"/>
-                      </a:solidFill>
-                    </a:lnT>
-                    <a:lnB w="2400">
-                      <a:solidFill>
-                        <a:srgbClr val="B4C0CD"/>
-                      </a:solidFill>
-                    </a:lnB>
-                  </a:tcPr>
-                </a:tc>
-                <a:tc>
-                  <a:txBody>
-                    <a:bodyPr wrap="square">
-                      <a:normAutofit/>
-                    </a:bodyPr>
+                  <a:tcPr anchor="t">
+                    <a:solidFill>
+                      <a:srgbClr val="FFFFFF"/>
+                    </a:solidFill>
+                    <a:lnL w="3600">
+                      <a:solidFill>
+                        <a:srgbClr val="B2B2B2"/>
+                      </a:solidFill>
+                    </a:lnL>
+                    <a:lnR w="3600">
+                      <a:solidFill>
+                        <a:srgbClr val="B2B2B2"/>
+                      </a:solidFill>
+                    </a:lnR>
+                    <a:lnT w="3600">
+                      <a:solidFill>
+                        <a:srgbClr val="B2B2B2"/>
+                      </a:solidFill>
+                    </a:lnT>
+                    <a:lnB w="3600">
+                      <a:solidFill>
+                        <a:srgbClr val="B2B2B2"/>
+                      </a:solidFill>
+                    </a:lnB>
+                  </a:tcPr>
+                </a:tc>
+                <a:tc>
+                  <a:txBody>
+                    <a:bodyPr wrap="square" lIns="13716" rIns="13716" tIns="9144" bIns="5486"/>
                     <a:lstStyle/>
                     <a:p>
                       <a:pPr algn="l">
                         <a:lnSpc>
                           <a:spcPct val="88000"/>
                         </a:lnSpc>
-                        <a:spcBef>
-                          <a:spcPts val="0"/>
-                        </a:spcBef>
-                        <a:spcAft>
-                          <a:spcPts val="0"/>
-                        </a:spcAft>
                       </a:pPr>
                       <a:r>
-                        <a:rPr sz="400" b="0">
+                        <a:rPr sz="345" b="0">
                           <a:solidFill>
                             <a:srgbClr val="000000"/>
                           </a:solidFill>
-                          <a:latin typeface="Microsoft YaHei UI"/>
+                          <a:latin typeface="Noto Sans CJK SC"/>
                         </a:rPr>
-                        <a:t>LingBot-VLA 2.0 是 6B VLA，采用 Sparse MoE Action Expert；LingBot-VA 2.0 是约 5B DiT 世界动作模型，LingBot-Vision 为 1B，LingBot-World 参数未公开。</a:t>
+                        <a:t>LingBot-VLA 2.0 是 6B VLA，LingBot-VA 2.0 是约 5B DiT 世界动作模型，LingBot-Vision 是 1B。</a:t>
                       </a:r>
                     </a:p>
                   </a:txBody>
-                  <a:tcPr anchor="ctr" marL="32004" marR="32004" marT="10972" marB="10972">
-                    <a:solidFill>
-                      <a:srgbClr val="FFFFFF"/>
-                    </a:solidFill>
-                    <a:lnL w="2400">
-                      <a:solidFill>
-                        <a:srgbClr val="B4C0CD"/>
-                      </a:solidFill>
-                    </a:lnL>
-                    <a:lnR w="2400">
-                      <a:solidFill>
-                        <a:srgbClr val="B4C0CD"/>
-                      </a:solidFill>
-                    </a:lnR>
-                    <a:lnT w="2400">
-                      <a:solidFill>
-                        <a:srgbClr val="B4C0CD"/>
-                      </a:solidFill>
-                    </a:lnT>
-                    <a:lnB w="2400">
-                      <a:solidFill>
-                        <a:srgbClr val="B4C0CD"/>
-                      </a:solidFill>
-                    </a:lnB>
-                  </a:tcPr>
-                </a:tc>
-                <a:tc>
-                  <a:txBody>
-                    <a:bodyPr wrap="square">
-                      <a:normAutofit/>
-                    </a:bodyPr>
+                  <a:tcPr anchor="t">
+                    <a:solidFill>
+                      <a:srgbClr val="FFFFFF"/>
+                    </a:solidFill>
+                    <a:lnL w="3600">
+                      <a:solidFill>
+                        <a:srgbClr val="B2B2B2"/>
+                      </a:solidFill>
+                    </a:lnL>
+                    <a:lnR w="3600">
+                      <a:solidFill>
+                        <a:srgbClr val="B2B2B2"/>
+                      </a:solidFill>
+                    </a:lnR>
+                    <a:lnT w="3600">
+                      <a:solidFill>
+                        <a:srgbClr val="B2B2B2"/>
+                      </a:solidFill>
+                    </a:lnT>
+                    <a:lnB w="3600">
+                      <a:solidFill>
+                        <a:srgbClr val="B2B2B2"/>
+                      </a:solidFill>
+                    </a:lnB>
+                  </a:tcPr>
+                </a:tc>
+                <a:tc>
+                  <a:txBody>
+                    <a:bodyPr wrap="square" lIns="13716" rIns="13716" tIns="9144" bIns="5486"/>
                     <a:lstStyle/>
                     <a:p>
                       <a:pPr algn="l">
                         <a:lnSpc>
                           <a:spcPct val="88000"/>
                         </a:lnSpc>
-                        <a:spcBef>
-                          <a:spcPts val="0"/>
-                        </a:spcBef>
-                        <a:spcAft>
-                          <a:spcPts val="0"/>
-                        </a:spcAft>
+                      </a:pPr>
+                    </a:p>
+                  </a:txBody>
+                  <a:tcPr anchor="t">
+                    <a:solidFill>
+                      <a:srgbClr val="FFFFFF"/>
+                    </a:solidFill>
+                    <a:lnL w="3600">
+                      <a:solidFill>
+                        <a:srgbClr val="B2B2B2"/>
+                      </a:solidFill>
+                    </a:lnL>
+                    <a:lnR w="3600">
+                      <a:solidFill>
+                        <a:srgbClr val="B2B2B2"/>
+                      </a:solidFill>
+                    </a:lnR>
+                    <a:lnT w="3600">
+                      <a:solidFill>
+                        <a:srgbClr val="B2B2B2"/>
+                      </a:solidFill>
+                    </a:lnT>
+                    <a:lnB w="3600">
+                      <a:solidFill>
+                        <a:srgbClr val="B2B2B2"/>
+                      </a:solidFill>
+                    </a:lnB>
+                  </a:tcPr>
+                </a:tc>
+                <a:tc>
+                  <a:txBody>
+                    <a:bodyPr wrap="square" lIns="13716" rIns="13716" tIns="9144" bIns="5486"/>
+                    <a:lstStyle/>
+                    <a:p>
+                      <a:pPr algn="l">
+                        <a:lnSpc>
+                          <a:spcPct val="88000"/>
+                        </a:lnSpc>
                       </a:pPr>
                       <a:r>
-                        <a:rPr sz="455" b="0">
+                        <a:rPr sz="345" b="0">
                           <a:solidFill>
                             <a:srgbClr val="000000"/>
                           </a:solidFill>
-                          <a:latin typeface="Microsoft YaHei UI"/>
+                          <a:latin typeface="Noto Sans CJK SC"/>
                         </a:rPr>
-                        <a:t/>
+                        <a:t>RTX 4090D 本地推理，LingBot-VA 约需 18-24GB VRAM。</a:t>
                       </a:r>
                     </a:p>
                   </a:txBody>
-                  <a:tcPr anchor="ctr" marL="32004" marR="32004" marT="10972" marB="10972">
-                    <a:solidFill>
-                      <a:srgbClr val="FFFFFF"/>
-                    </a:solidFill>
-                    <a:lnL w="2400">
-                      <a:solidFill>
-                        <a:srgbClr val="B4C0CD"/>
-                      </a:solidFill>
-                    </a:lnL>
-                    <a:lnR w="2400">
-                      <a:solidFill>
-                        <a:srgbClr val="B4C0CD"/>
-                      </a:solidFill>
-                    </a:lnR>
-                    <a:lnT w="2400">
-                      <a:solidFill>
-                        <a:srgbClr val="B4C0CD"/>
-                      </a:solidFill>
-                    </a:lnT>
-                    <a:lnB w="2400">
-                      <a:solidFill>
-                        <a:srgbClr val="B4C0CD"/>
-                      </a:solidFill>
-                    </a:lnB>
-                  </a:tcPr>
-                </a:tc>
-                <a:tc>
-                  <a:txBody>
-                    <a:bodyPr wrap="square">
-                      <a:normAutofit/>
-                    </a:bodyPr>
+                  <a:tcPr anchor="t">
+                    <a:solidFill>
+                      <a:srgbClr val="FFFFFF"/>
+                    </a:solidFill>
+                    <a:lnL w="3600">
+                      <a:solidFill>
+                        <a:srgbClr val="B2B2B2"/>
+                      </a:solidFill>
+                    </a:lnL>
+                    <a:lnR w="3600">
+                      <a:solidFill>
+                        <a:srgbClr val="B2B2B2"/>
+                      </a:solidFill>
+                    </a:lnR>
+                    <a:lnT w="3600">
+                      <a:solidFill>
+                        <a:srgbClr val="B2B2B2"/>
+                      </a:solidFill>
+                    </a:lnT>
+                    <a:lnB w="3600">
+                      <a:solidFill>
+                        <a:srgbClr val="B2B2B2"/>
+                      </a:solidFill>
+                    </a:lnB>
+                  </a:tcPr>
+                </a:tc>
+                <a:tc>
+                  <a:txBody>
+                    <a:bodyPr wrap="square" lIns="13716" rIns="13716" tIns="9144" bIns="5486"/>
                     <a:lstStyle/>
                     <a:p>
                       <a:pPr algn="l">
                         <a:lnSpc>
                           <a:spcPct val="88000"/>
                         </a:lnSpc>
-                        <a:spcBef>
-                          <a:spcPts val="0"/>
-                        </a:spcBef>
-                        <a:spcAft>
-                          <a:spcPts val="0"/>
-                        </a:spcAft>
                       </a:pPr>
                       <a:r>
-                        <a:rPr sz="400" b="0">
+                        <a:rPr sz="365" b="0">
                           <a:solidFill>
                             <a:srgbClr val="000000"/>
                           </a:solidFill>
-                          <a:latin typeface="Microsoft YaHei UI"/>
+                          <a:latin typeface="Noto Sans CJK SC"/>
                         </a:rPr>
-                        <a:t>LingBot-VLA 2.0 在 RTX 4090D 本地推理；LingBot-VA 需要约 18-24GB VRAM；LingBot-Depth 提供 edge-side SDK。</a:t>
+                        <a:t>VLA 约 130ms，World 2.0 为 720p/60fps。</a:t>
                       </a:r>
                     </a:p>
                   </a:txBody>
-                  <a:tcPr anchor="ctr" marL="32004" marR="32004" marT="10972" marB="10972">
-                    <a:solidFill>
-                      <a:srgbClr val="FFFFFF"/>
-                    </a:solidFill>
-                    <a:lnL w="2400">
-                      <a:solidFill>
-                        <a:srgbClr val="B4C0CD"/>
-                      </a:solidFill>
-                    </a:lnL>
-                    <a:lnR w="2400">
-                      <a:solidFill>
-                        <a:srgbClr val="B4C0CD"/>
-                      </a:solidFill>
-                    </a:lnR>
-                    <a:lnT w="2400">
-                      <a:solidFill>
-                        <a:srgbClr val="B4C0CD"/>
-                      </a:solidFill>
-                    </a:lnT>
-                    <a:lnB w="2400">
-                      <a:solidFill>
-                        <a:srgbClr val="B4C0CD"/>
-                      </a:solidFill>
-                    </a:lnB>
-                  </a:tcPr>
-                </a:tc>
-                <a:tc>
-                  <a:txBody>
-                    <a:bodyPr wrap="square">
-                      <a:normAutofit/>
-                    </a:bodyPr>
-                    <a:lstStyle/>
-                    <a:p>
-                      <a:pPr algn="l">
-                        <a:lnSpc>
-                          <a:spcPct val="88000"/>
-                        </a:lnSpc>
-                        <a:spcBef>
-                          <a:spcPts val="0"/>
-                        </a:spcBef>
-                        <a:spcAft>
-                          <a:spcPts val="0"/>
-                        </a:spcAft>
+                  <a:tcPr anchor="t">
+                    <a:solidFill>
+                      <a:srgbClr val="FFFFFF"/>
+                    </a:solidFill>
+                    <a:lnL w="3600">
+                      <a:solidFill>
+                        <a:srgbClr val="B2B2B2"/>
+                      </a:solidFill>
+                    </a:lnL>
+                    <a:lnR w="3600">
+                      <a:solidFill>
+                        <a:srgbClr val="B2B2B2"/>
+                      </a:solidFill>
+                    </a:lnR>
+                    <a:lnT w="3600">
+                      <a:solidFill>
+                        <a:srgbClr val="B2B2B2"/>
+                      </a:solidFill>
+                    </a:lnT>
+                    <a:lnB w="3600">
+                      <a:solidFill>
+                        <a:srgbClr val="B2B2B2"/>
+                      </a:solidFill>
+                    </a:lnB>
+                  </a:tcPr>
+                </a:tc>
+              </a:tr>
+              <a:tr h="272034">
+                <a:tc vMerge="1">
+                  <a:txBody>
+                    <a:bodyPr/>
+                    <a:lstStyle/>
+                    <a:p/>
+                  </a:txBody>
+                  <a:tcPr>
+                    <a:lnL w="3600">
+                      <a:solidFill>
+                        <a:srgbClr val="B2B2B2"/>
+                      </a:solidFill>
+                    </a:lnL>
+                    <a:lnR w="3600">
+                      <a:solidFill>
+                        <a:srgbClr val="B2B2B2"/>
+                      </a:solidFill>
+                    </a:lnR>
+                    <a:lnT w="3600">
+                      <a:solidFill>
+                        <a:srgbClr val="B2B2B2"/>
+                      </a:solidFill>
+                    </a:lnT>
+                    <a:lnB w="3600">
+                      <a:solidFill>
+                        <a:srgbClr val="B2B2B2"/>
+                      </a:solidFill>
+                    </a:lnB>
+                  </a:tcPr>
+                </a:tc>
+                <a:tc>
+                  <a:txBody>
+                    <a:bodyPr wrap="square" lIns="13716" rIns="13716" tIns="9144" bIns="5486"/>
+                    <a:lstStyle/>
+                    <a:p>
+                      <a:pPr algn="ctr">
+                        <a:lnSpc>
+                          <a:spcPct val="88000"/>
+                        </a:lnSpc>
                       </a:pPr>
                       <a:r>
-                        <a:rPr sz="400" b="0">
+                        <a:rPr sz="365" b="0">
                           <a:solidFill>
                             <a:srgbClr val="000000"/>
                           </a:solidFill>
-                          <a:latin typeface="Microsoft YaHei UI"/>
+                          <a:latin typeface="Noto Sans CJK SC"/>
                         </a:rPr>
-                        <a:t>LingBot-VLA 2.0 单次推理约 130ms；LingBot-World 2.0 标称 720p/60fps，控制延迟低于 1s。</a:t>
+                        <a:t>MiniCPM-Robot</a:t>
                       </a:r>
                     </a:p>
                   </a:txBody>
-                  <a:tcPr anchor="ctr" marL="32004" marR="32004" marT="10972" marB="10972">
-                    <a:solidFill>
-                      <a:srgbClr val="FFFFFF"/>
-                    </a:solidFill>
-                    <a:lnL w="2400">
-                      <a:solidFill>
-                        <a:srgbClr val="B4C0CD"/>
-                      </a:solidFill>
-                    </a:lnL>
-                    <a:lnR w="2400">
-                      <a:solidFill>
-                        <a:srgbClr val="B4C0CD"/>
-                      </a:solidFill>
-                    </a:lnR>
-                    <a:lnT w="2400">
-                      <a:solidFill>
-                        <a:srgbClr val="B4C0CD"/>
-                      </a:solidFill>
-                    </a:lnT>
-                    <a:lnB w="2400">
-                      <a:solidFill>
-                        <a:srgbClr val="B4C0CD"/>
-                      </a:solidFill>
-                    </a:lnB>
-                  </a:tcPr>
-                </a:tc>
-              </a:tr>
-              <a:tr h="379827">
-                <a:tc vMerge="1">
-                  <a:txBody>
-                    <a:bodyPr wrap="square">
-                      <a:normAutofit/>
-                    </a:bodyPr>
+                  <a:tcPr anchor="t">
+                    <a:solidFill>
+                      <a:srgbClr val="FFFFFF"/>
+                    </a:solidFill>
+                    <a:lnL w="3600">
+                      <a:solidFill>
+                        <a:srgbClr val="B2B2B2"/>
+                      </a:solidFill>
+                    </a:lnL>
+                    <a:lnR w="3600">
+                      <a:solidFill>
+                        <a:srgbClr val="B2B2B2"/>
+                      </a:solidFill>
+                    </a:lnR>
+                    <a:lnT w="3600">
+                      <a:solidFill>
+                        <a:srgbClr val="B2B2B2"/>
+                      </a:solidFill>
+                    </a:lnT>
+                    <a:lnB w="3600">
+                      <a:solidFill>
+                        <a:srgbClr val="B2B2B2"/>
+                      </a:solidFill>
+                    </a:lnB>
+                  </a:tcPr>
+                </a:tc>
+                <a:tc>
+                  <a:txBody>
+                    <a:bodyPr wrap="square" lIns="13716" rIns="13716" tIns="9144" bIns="5486"/>
                     <a:lstStyle/>
                     <a:p>
                       <a:pPr algn="l">
                         <a:lnSpc>
                           <a:spcPct val="88000"/>
                         </a:lnSpc>
-                        <a:spcBef>
-                          <a:spcPts val="0"/>
-                        </a:spcBef>
-                        <a:spcAft>
-                          <a:spcPts val="0"/>
-                        </a:spcAft>
                       </a:pPr>
                       <a:r>
-                        <a:rPr sz="455" b="0">
+                        <a:rPr sz="345" b="0">
                           <a:solidFill>
                             <a:srgbClr val="000000"/>
                           </a:solidFill>
-                          <a:latin typeface="Microsoft YaHei UI"/>
+                          <a:latin typeface="Noto Sans CJK SC"/>
                         </a:rPr>
-                        <a:t/>
+                        <a:t>RobotManip 是 1.5B 通用操作 VLA，RobotTrack 是 0.9B 目标跟踪 VLA。</a:t>
                       </a:r>
                     </a:p>
                   </a:txBody>
-                  <a:tcPr anchor="ctr" marL="32004" marR="32004" marT="10972" marB="10972">
-                    <a:solidFill>
-                      <a:srgbClr val="F4F7FA"/>
-                    </a:solidFill>
-                    <a:lnL w="2400">
-                      <a:solidFill>
-                        <a:srgbClr val="B4C0CD"/>
-                      </a:solidFill>
-                    </a:lnL>
-                    <a:lnR w="2400">
-                      <a:solidFill>
-                        <a:srgbClr val="B4C0CD"/>
-                      </a:solidFill>
-                    </a:lnR>
-                    <a:lnT w="2400">
-                      <a:solidFill>
-                        <a:srgbClr val="B4C0CD"/>
-                      </a:solidFill>
-                    </a:lnT>
-                    <a:lnB w="2400">
-                      <a:solidFill>
-                        <a:srgbClr val="B4C0CD"/>
-                      </a:solidFill>
-                    </a:lnB>
-                  </a:tcPr>
-                </a:tc>
-                <a:tc>
-                  <a:txBody>
-                    <a:bodyPr wrap="square">
-                      <a:normAutofit/>
-                    </a:bodyPr>
-                    <a:lstStyle/>
-                    <a:p>
-                      <a:pPr algn="ctr">
-                        <a:lnSpc>
-                          <a:spcPct val="88000"/>
-                        </a:lnSpc>
-                        <a:spcBef>
-                          <a:spcPts val="0"/>
-                        </a:spcBef>
-                        <a:spcAft>
-                          <a:spcPts val="0"/>
-                        </a:spcAft>
+                  <a:tcPr anchor="t">
+                    <a:solidFill>
+                      <a:srgbClr val="FFFFFF"/>
+                    </a:solidFill>
+                    <a:lnL w="3600">
+                      <a:solidFill>
+                        <a:srgbClr val="B2B2B2"/>
+                      </a:solidFill>
+                    </a:lnL>
+                    <a:lnR w="3600">
+                      <a:solidFill>
+                        <a:srgbClr val="B2B2B2"/>
+                      </a:solidFill>
+                    </a:lnR>
+                    <a:lnT w="3600">
+                      <a:solidFill>
+                        <a:srgbClr val="B2B2B2"/>
+                      </a:solidFill>
+                    </a:lnT>
+                    <a:lnB w="3600">
+                      <a:solidFill>
+                        <a:srgbClr val="B2B2B2"/>
+                      </a:solidFill>
+                    </a:lnB>
+                  </a:tcPr>
+                </a:tc>
+                <a:tc>
+                  <a:txBody>
+                    <a:bodyPr wrap="square" lIns="13716" rIns="13716" tIns="9144" bIns="5486"/>
+                    <a:lstStyle/>
+                    <a:p>
+                      <a:pPr algn="l">
+                        <a:lnSpc>
+                          <a:spcPct val="88000"/>
+                        </a:lnSpc>
+                      </a:pPr>
+                    </a:p>
+                  </a:txBody>
+                  <a:tcPr anchor="t">
+                    <a:solidFill>
+                      <a:srgbClr val="FFFFFF"/>
+                    </a:solidFill>
+                    <a:lnL w="3600">
+                      <a:solidFill>
+                        <a:srgbClr val="B2B2B2"/>
+                      </a:solidFill>
+                    </a:lnL>
+                    <a:lnR w="3600">
+                      <a:solidFill>
+                        <a:srgbClr val="B2B2B2"/>
+                      </a:solidFill>
+                    </a:lnR>
+                    <a:lnT w="3600">
+                      <a:solidFill>
+                        <a:srgbClr val="B2B2B2"/>
+                      </a:solidFill>
+                    </a:lnT>
+                    <a:lnB w="3600">
+                      <a:solidFill>
+                        <a:srgbClr val="B2B2B2"/>
+                      </a:solidFill>
+                    </a:lnB>
+                  </a:tcPr>
+                </a:tc>
+                <a:tc>
+                  <a:txBody>
+                    <a:bodyPr wrap="square" lIns="13716" rIns="13716" tIns="9144" bIns="5486"/>
+                    <a:lstStyle/>
+                    <a:p>
+                      <a:pPr algn="l">
+                        <a:lnSpc>
+                          <a:spcPct val="88000"/>
+                        </a:lnSpc>
                       </a:pPr>
                       <a:r>
-                        <a:rPr sz="455" b="1">
+                        <a:rPr sz="345" b="0">
                           <a:solidFill>
                             <a:srgbClr val="000000"/>
                           </a:solidFill>
-                          <a:latin typeface="Microsoft YaHei UI"/>
+                          <a:latin typeface="Noto Sans CJK SC"/>
                         </a:rPr>
-                        <a:t>MiniCPM-Robot</a:t>
+                        <a:t>RobotManip 可在 H100/H20 推理，RobotTrack 可部署 Jetson Orin NX 16GB。</a:t>
                       </a:r>
                     </a:p>
                   </a:txBody>
-                  <a:tcPr anchor="ctr" marL="32004" marR="32004" marT="10972" marB="10972">
-                    <a:solidFill>
-                      <a:srgbClr val="F4F7FA"/>
-                    </a:solidFill>
-                    <a:lnL w="2400">
-                      <a:solidFill>
-                        <a:srgbClr val="B4C0CD"/>
-                      </a:solidFill>
-                    </a:lnL>
-                    <a:lnR w="2400">
-                      <a:solidFill>
-                        <a:srgbClr val="B4C0CD"/>
-                      </a:solidFill>
-                    </a:lnR>
-                    <a:lnT w="2400">
-                      <a:solidFill>
-                        <a:srgbClr val="B4C0CD"/>
-                      </a:solidFill>
-                    </a:lnT>
-                    <a:lnB w="2400">
-                      <a:solidFill>
-                        <a:srgbClr val="B4C0CD"/>
-                      </a:solidFill>
-                    </a:lnB>
-                  </a:tcPr>
-                </a:tc>
-                <a:tc>
-                  <a:txBody>
-                    <a:bodyPr wrap="square">
-                      <a:normAutofit/>
-                    </a:bodyPr>
+                  <a:tcPr anchor="t">
+                    <a:solidFill>
+                      <a:srgbClr val="FFFFFF"/>
+                    </a:solidFill>
+                    <a:lnL w="3600">
+                      <a:solidFill>
+                        <a:srgbClr val="B2B2B2"/>
+                      </a:solidFill>
+                    </a:lnL>
+                    <a:lnR w="3600">
+                      <a:solidFill>
+                        <a:srgbClr val="B2B2B2"/>
+                      </a:solidFill>
+                    </a:lnR>
+                    <a:lnT w="3600">
+                      <a:solidFill>
+                        <a:srgbClr val="B2B2B2"/>
+                      </a:solidFill>
+                    </a:lnT>
+                    <a:lnB w="3600">
+                      <a:solidFill>
+                        <a:srgbClr val="B2B2B2"/>
+                      </a:solidFill>
+                    </a:lnB>
+                  </a:tcPr>
+                </a:tc>
+                <a:tc>
+                  <a:txBody>
+                    <a:bodyPr wrap="square" lIns="13716" rIns="13716" tIns="9144" bIns="5486"/>
                     <a:lstStyle/>
                     <a:p>
                       <a:pPr algn="l">
                         <a:lnSpc>
                           <a:spcPct val="88000"/>
                         </a:lnSpc>
-                        <a:spcBef>
-                          <a:spcPts val="0"/>
-                        </a:spcBef>
-                        <a:spcAft>
-                          <a:spcPts val="0"/>
-                        </a:spcAft>
                       </a:pPr>
                       <a:r>
-                        <a:rPr sz="430" b="0">
+                        <a:rPr sz="365" b="0">
                           <a:solidFill>
                             <a:srgbClr val="000000"/>
                           </a:solidFill>
-                          <a:latin typeface="Microsoft YaHei UI"/>
+                          <a:latin typeface="Noto Sans CJK SC"/>
                         </a:rPr>
-                        <a:t>MiniCPM-RobotManip 是 1.5B 通用操作 VLA，MiniCPM-RobotTrack 是 0.9B 目标跟踪 VLA。</a:t>
+                        <a:t>H100 为 120ms，H20 从 10Hz 提升至 37Hz，Go2 本地约 180ms。</a:t>
                       </a:r>
                     </a:p>
                   </a:txBody>
-                  <a:tcPr anchor="ctr" marL="32004" marR="32004" marT="10972" marB="10972">
-                    <a:solidFill>
-                      <a:srgbClr val="F4F7FA"/>
-                    </a:solidFill>
-                    <a:lnL w="2400">
-                      <a:solidFill>
-                        <a:srgbClr val="B4C0CD"/>
-                      </a:solidFill>
-                    </a:lnL>
-                    <a:lnR w="2400">
-                      <a:solidFill>
-                        <a:srgbClr val="B4C0CD"/>
-                      </a:solidFill>
-                    </a:lnR>
-                    <a:lnT w="2400">
-                      <a:solidFill>
-                        <a:srgbClr val="B4C0CD"/>
-                      </a:solidFill>
-                    </a:lnT>
-                    <a:lnB w="2400">
-                      <a:solidFill>
-                        <a:srgbClr val="B4C0CD"/>
-                      </a:solidFill>
-                    </a:lnB>
-                  </a:tcPr>
-                </a:tc>
-                <a:tc>
-                  <a:txBody>
-                    <a:bodyPr wrap="square">
-                      <a:normAutofit/>
-                    </a:bodyPr>
-                    <a:lstStyle/>
-                    <a:p>
-                      <a:pPr algn="l">
-                        <a:lnSpc>
-                          <a:spcPct val="88000"/>
-                        </a:lnSpc>
-                        <a:spcBef>
-                          <a:spcPts val="0"/>
-                        </a:spcBef>
-                        <a:spcAft>
-                          <a:spcPts val="0"/>
-                        </a:spcAft>
+                  <a:tcPr anchor="t">
+                    <a:solidFill>
+                      <a:srgbClr val="FFFFFF"/>
+                    </a:solidFill>
+                    <a:lnL w="3600">
+                      <a:solidFill>
+                        <a:srgbClr val="B2B2B2"/>
+                      </a:solidFill>
+                    </a:lnL>
+                    <a:lnR w="3600">
+                      <a:solidFill>
+                        <a:srgbClr val="B2B2B2"/>
+                      </a:solidFill>
+                    </a:lnR>
+                    <a:lnT w="3600">
+                      <a:solidFill>
+                        <a:srgbClr val="B2B2B2"/>
+                      </a:solidFill>
+                    </a:lnT>
+                    <a:lnB w="3600">
+                      <a:solidFill>
+                        <a:srgbClr val="B2B2B2"/>
+                      </a:solidFill>
+                    </a:lnB>
+                  </a:tcPr>
+                </a:tc>
+              </a:tr>
+              <a:tr h="272034">
+                <a:tc vMerge="1">
+                  <a:txBody>
+                    <a:bodyPr/>
+                    <a:lstStyle/>
+                    <a:p/>
+                  </a:txBody>
+                  <a:tcPr>
+                    <a:lnL w="3600">
+                      <a:solidFill>
+                        <a:srgbClr val="B2B2B2"/>
+                      </a:solidFill>
+                    </a:lnL>
+                    <a:lnR w="3600">
+                      <a:solidFill>
+                        <a:srgbClr val="B2B2B2"/>
+                      </a:solidFill>
+                    </a:lnR>
+                    <a:lnT w="3600">
+                      <a:solidFill>
+                        <a:srgbClr val="B2B2B2"/>
+                      </a:solidFill>
+                    </a:lnT>
+                    <a:lnB w="3600">
+                      <a:solidFill>
+                        <a:srgbClr val="B2B2B2"/>
+                      </a:solidFill>
+                    </a:lnB>
+                  </a:tcPr>
+                </a:tc>
+                <a:tc>
+                  <a:txBody>
+                    <a:bodyPr wrap="square" lIns="13716" rIns="13716" tIns="9144" bIns="5486"/>
+                    <a:lstStyle/>
+                    <a:p>
+                      <a:pPr algn="ctr">
+                        <a:lnSpc>
+                          <a:spcPct val="88000"/>
+                        </a:lnSpc>
                       </a:pPr>
                       <a:r>
-                        <a:rPr sz="455" b="0">
+                        <a:rPr sz="365" b="0">
                           <a:solidFill>
                             <a:srgbClr val="000000"/>
                           </a:solidFill>
-                          <a:latin typeface="Microsoft YaHei UI"/>
+                          <a:latin typeface="Noto Sans CJK SC"/>
                         </a:rPr>
-                        <a:t/>
+                        <a:t>地瓜/它石智航</a:t>
                       </a:r>
                     </a:p>
                   </a:txBody>
-                  <a:tcPr anchor="ctr" marL="32004" marR="32004" marT="10972" marB="10972">
-                    <a:solidFill>
-                      <a:srgbClr val="F4F7FA"/>
-                    </a:solidFill>
-                    <a:lnL w="2400">
-                      <a:solidFill>
-                        <a:srgbClr val="B4C0CD"/>
-                      </a:solidFill>
-                    </a:lnL>
-                    <a:lnR w="2400">
-                      <a:solidFill>
-                        <a:srgbClr val="B4C0CD"/>
-                      </a:solidFill>
-                    </a:lnR>
-                    <a:lnT w="2400">
-                      <a:solidFill>
-                        <a:srgbClr val="B4C0CD"/>
-                      </a:solidFill>
-                    </a:lnT>
-                    <a:lnB w="2400">
-                      <a:solidFill>
-                        <a:srgbClr val="B4C0CD"/>
-                      </a:solidFill>
-                    </a:lnB>
-                  </a:tcPr>
-                </a:tc>
-                <a:tc>
-                  <a:txBody>
-                    <a:bodyPr wrap="square">
-                      <a:normAutofit/>
-                    </a:bodyPr>
+                  <a:tcPr anchor="t">
+                    <a:solidFill>
+                      <a:srgbClr val="FFFFFF"/>
+                    </a:solidFill>
+                    <a:lnL w="3600">
+                      <a:solidFill>
+                        <a:srgbClr val="B2B2B2"/>
+                      </a:solidFill>
+                    </a:lnL>
+                    <a:lnR w="3600">
+                      <a:solidFill>
+                        <a:srgbClr val="B2B2B2"/>
+                      </a:solidFill>
+                    </a:lnR>
+                    <a:lnT w="3600">
+                      <a:solidFill>
+                        <a:srgbClr val="B2B2B2"/>
+                      </a:solidFill>
+                    </a:lnT>
+                    <a:lnB w="3600">
+                      <a:solidFill>
+                        <a:srgbClr val="B2B2B2"/>
+                      </a:solidFill>
+                    </a:lnB>
+                  </a:tcPr>
+                </a:tc>
+                <a:tc>
+                  <a:txBody>
+                    <a:bodyPr wrap="square" lIns="13716" rIns="13716" tIns="9144" bIns="5486"/>
                     <a:lstStyle/>
                     <a:p>
                       <a:pPr algn="l">
                         <a:lnSpc>
                           <a:spcPct val="88000"/>
                         </a:lnSpc>
-                        <a:spcBef>
-                          <a:spcPts val="0"/>
-                        </a:spcBef>
-                        <a:spcAft>
-                          <a:spcPts val="0"/>
-                        </a:spcAft>
                       </a:pPr>
                       <a:r>
-                        <a:rPr sz="430" b="0">
+                        <a:rPr sz="345" b="0">
                           <a:solidFill>
                             <a:srgbClr val="000000"/>
                           </a:solidFill>
-                          <a:latin typeface="Microsoft YaHei UI"/>
+                          <a:latin typeface="Noto Sans CJK SC"/>
                         </a:rPr>
-                        <a:t>RobotManip 可在 H100/H20 推理，RobotTrack 可部署在 Jetson Orin NX 16GB。</a:t>
+                        <a:t>RDK S600 已适配 3B 参数级具身大模型，模型名称未公开。</a:t>
                       </a:r>
                     </a:p>
                   </a:txBody>
-                  <a:tcPr anchor="ctr" marL="32004" marR="32004" marT="10972" marB="10972">
-                    <a:solidFill>
-                      <a:srgbClr val="F4F7FA"/>
-                    </a:solidFill>
-                    <a:lnL w="2400">
-                      <a:solidFill>
-                        <a:srgbClr val="B4C0CD"/>
-                      </a:solidFill>
-                    </a:lnL>
-                    <a:lnR w="2400">
-                      <a:solidFill>
-                        <a:srgbClr val="B4C0CD"/>
-                      </a:solidFill>
-                    </a:lnR>
-                    <a:lnT w="2400">
-                      <a:solidFill>
-                        <a:srgbClr val="B4C0CD"/>
-                      </a:solidFill>
-                    </a:lnT>
-                    <a:lnB w="2400">
-                      <a:solidFill>
-                        <a:srgbClr val="B4C0CD"/>
-                      </a:solidFill>
-                    </a:lnB>
-                  </a:tcPr>
-                </a:tc>
-                <a:tc>
-                  <a:txBody>
-                    <a:bodyPr wrap="square">
-                      <a:normAutofit/>
-                    </a:bodyPr>
+                  <a:tcPr anchor="t">
+                    <a:solidFill>
+                      <a:srgbClr val="FFFFFF"/>
+                    </a:solidFill>
+                    <a:lnL w="3600">
+                      <a:solidFill>
+                        <a:srgbClr val="B2B2B2"/>
+                      </a:solidFill>
+                    </a:lnL>
+                    <a:lnR w="3600">
+                      <a:solidFill>
+                        <a:srgbClr val="B2B2B2"/>
+                      </a:solidFill>
+                    </a:lnR>
+                    <a:lnT w="3600">
+                      <a:solidFill>
+                        <a:srgbClr val="B2B2B2"/>
+                      </a:solidFill>
+                    </a:lnT>
+                    <a:lnB w="3600">
+                      <a:solidFill>
+                        <a:srgbClr val="B2B2B2"/>
+                      </a:solidFill>
+                    </a:lnB>
+                  </a:tcPr>
+                </a:tc>
+                <a:tc>
+                  <a:txBody>
+                    <a:bodyPr wrap="square" lIns="13716" rIns="13716" tIns="9144" bIns="5486"/>
                     <a:lstStyle/>
                     <a:p>
                       <a:pPr algn="l">
                         <a:lnSpc>
                           <a:spcPct val="88000"/>
                         </a:lnSpc>
-                        <a:spcBef>
-                          <a:spcPts val="0"/>
-                        </a:spcBef>
-                        <a:spcAft>
-                          <a:spcPts val="0"/>
-                        </a:spcAft>
+                      </a:pPr>
+                    </a:p>
+                  </a:txBody>
+                  <a:tcPr anchor="t">
+                    <a:solidFill>
+                      <a:srgbClr val="FFFFFF"/>
+                    </a:solidFill>
+                    <a:lnL w="3600">
+                      <a:solidFill>
+                        <a:srgbClr val="B2B2B2"/>
+                      </a:solidFill>
+                    </a:lnL>
+                    <a:lnR w="3600">
+                      <a:solidFill>
+                        <a:srgbClr val="B2B2B2"/>
+                      </a:solidFill>
+                    </a:lnR>
+                    <a:lnT w="3600">
+                      <a:solidFill>
+                        <a:srgbClr val="B2B2B2"/>
+                      </a:solidFill>
+                    </a:lnT>
+                    <a:lnB w="3600">
+                      <a:solidFill>
+                        <a:srgbClr val="B2B2B2"/>
+                      </a:solidFill>
+                    </a:lnB>
+                  </a:tcPr>
+                </a:tc>
+                <a:tc>
+                  <a:txBody>
+                    <a:bodyPr wrap="square" lIns="13716" rIns="13716" tIns="9144" bIns="5486"/>
+                    <a:lstStyle/>
+                    <a:p>
+                      <a:pPr algn="l">
+                        <a:lnSpc>
+                          <a:spcPct val="88000"/>
+                        </a:lnSpc>
                       </a:pPr>
                       <a:r>
-                        <a:rPr sz="430" b="0">
+                        <a:rPr sz="345" b="0">
                           <a:solidFill>
                             <a:srgbClr val="000000"/>
                           </a:solidFill>
-                          <a:latin typeface="Microsoft YaHei UI"/>
+                          <a:latin typeface="Noto Sans CJK SC"/>
                         </a:rPr>
-                        <a:t>H100 BF16 单帧前向 120ms；H20 推理从 10Hz 提升至 37Hz；Go2 本地跟踪 5+FPS、约 180ms。</a:t>
+                        <a:t>RDK S600 为 560 TOPS INT8、32/64GB LPDDR5 和 204.8GB/s。</a:t>
                       </a:r>
                     </a:p>
                   </a:txBody>
-                  <a:tcPr anchor="ctr" marL="32004" marR="32004" marT="10972" marB="10972">
-                    <a:solidFill>
-                      <a:srgbClr val="F4F7FA"/>
-                    </a:solidFill>
-                    <a:lnL w="2400">
-                      <a:solidFill>
-                        <a:srgbClr val="B4C0CD"/>
-                      </a:solidFill>
-                    </a:lnL>
-                    <a:lnR w="2400">
-                      <a:solidFill>
-                        <a:srgbClr val="B4C0CD"/>
-                      </a:solidFill>
-                    </a:lnR>
-                    <a:lnT w="2400">
-                      <a:solidFill>
-                        <a:srgbClr val="B4C0CD"/>
-                      </a:solidFill>
-                    </a:lnT>
-                    <a:lnB w="2400">
-                      <a:solidFill>
-                        <a:srgbClr val="B4C0CD"/>
+                  <a:tcPr anchor="t">
+                    <a:solidFill>
+                      <a:srgbClr val="FFFFFF"/>
+                    </a:solidFill>
+                    <a:lnL w="3600">
+                      <a:solidFill>
+                        <a:srgbClr val="B2B2B2"/>
+                      </a:solidFill>
+                    </a:lnL>
+                    <a:lnR w="3600">
+                      <a:solidFill>
+                        <a:srgbClr val="B2B2B2"/>
+                      </a:solidFill>
+                    </a:lnR>
+                    <a:lnT w="3600">
+                      <a:solidFill>
+                        <a:srgbClr val="B2B2B2"/>
+                      </a:solidFill>
+                    </a:lnT>
+                    <a:lnB w="3600">
+                      <a:solidFill>
+                        <a:srgbClr val="B2B2B2"/>
+                      </a:solidFill>
+                    </a:lnB>
+                  </a:tcPr>
+                </a:tc>
+                <a:tc>
+                  <a:txBody>
+                    <a:bodyPr wrap="square" lIns="13716" rIns="13716" tIns="9144" bIns="5486"/>
+                    <a:lstStyle/>
+                    <a:p>
+                      <a:pPr algn="l">
+                        <a:lnSpc>
+                          <a:spcPct val="88000"/>
+                        </a:lnSpc>
+                      </a:pPr>
+                    </a:p>
+                  </a:txBody>
+                  <a:tcPr anchor="t">
+                    <a:solidFill>
+                      <a:srgbClr val="FFFFFF"/>
+                    </a:solidFill>
+                    <a:lnL w="3600">
+                      <a:solidFill>
+                        <a:srgbClr val="B2B2B2"/>
+                      </a:solidFill>
+                    </a:lnL>
+                    <a:lnR w="3600">
+                      <a:solidFill>
+                        <a:srgbClr val="B2B2B2"/>
+                      </a:solidFill>
+                    </a:lnR>
+                    <a:lnT w="3600">
+                      <a:solidFill>
+                        <a:srgbClr val="B2B2B2"/>
+                      </a:solidFill>
+                    </a:lnT>
+                    <a:lnB w="3600">
+                      <a:solidFill>
+                        <a:srgbClr val="B2B2B2"/>
                       </a:solidFill>
                     </a:lnB>
                   </a:tcPr>
                 </a:tc>
               </a:tr>
-              <a:tr h="379827">
+              <a:tr h="272034">
                 <a:tc vMerge="1">
                   <a:txBody>
-                    <a:bodyPr wrap="square">
-                      <a:normAutofit/>
-                    </a:bodyPr>
-                    <a:lstStyle/>
-                    <a:p>
-                      <a:pPr algn="l">
-                        <a:lnSpc>
-                          <a:spcPct val="88000"/>
-                        </a:lnSpc>
-                        <a:spcBef>
-                          <a:spcPts val="0"/>
-                        </a:spcBef>
-                        <a:spcAft>
-                          <a:spcPts val="0"/>
-                        </a:spcAft>
+                    <a:bodyPr/>
+                    <a:lstStyle/>
+                    <a:p/>
+                  </a:txBody>
+                  <a:tcPr>
+                    <a:lnL w="3600">
+                      <a:solidFill>
+                        <a:srgbClr val="B2B2B2"/>
+                      </a:solidFill>
+                    </a:lnL>
+                    <a:lnR w="3600">
+                      <a:solidFill>
+                        <a:srgbClr val="B2B2B2"/>
+                      </a:solidFill>
+                    </a:lnR>
+                    <a:lnT w="3600">
+                      <a:solidFill>
+                        <a:srgbClr val="B2B2B2"/>
+                      </a:solidFill>
+                    </a:lnT>
+                    <a:lnB w="3600">
+                      <a:solidFill>
+                        <a:srgbClr val="B2B2B2"/>
+                      </a:solidFill>
+                    </a:lnB>
+                  </a:tcPr>
+                </a:tc>
+                <a:tc>
+                  <a:txBody>
+                    <a:bodyPr wrap="square" lIns="13716" rIns="13716" tIns="9144" bIns="5486"/>
+                    <a:lstStyle/>
+                    <a:p>
+                      <a:pPr algn="ctr">
+                        <a:lnSpc>
+                          <a:spcPct val="88000"/>
+                        </a:lnSpc>
                       </a:pPr>
                       <a:r>
-                        <a:rPr sz="455" b="0">
+                        <a:rPr sz="365" b="0">
                           <a:solidFill>
                             <a:srgbClr val="000000"/>
                           </a:solidFill>
-                          <a:latin typeface="Microsoft YaHei UI"/>
+                          <a:latin typeface="Noto Sans CJK SC"/>
                         </a:rPr>
-                        <a:t/>
+                        <a:t>星海图 Galaxea</a:t>
                       </a:r>
                     </a:p>
                   </a:txBody>
-                  <a:tcPr anchor="ctr" marL="32004" marR="32004" marT="10972" marB="10972">
-                    <a:solidFill>
-                      <a:srgbClr val="FFFFFF"/>
-                    </a:solidFill>
-                    <a:lnL w="2400">
-                      <a:solidFill>
-                        <a:srgbClr val="B4C0CD"/>
-                      </a:solidFill>
-                    </a:lnL>
-                    <a:lnR w="2400">
-                      <a:solidFill>
-                        <a:srgbClr val="B4C0CD"/>
-                      </a:solidFill>
-                    </a:lnR>
-                    <a:lnT w="2400">
-                      <a:solidFill>
-                        <a:srgbClr val="B4C0CD"/>
-                      </a:solidFill>
-                    </a:lnT>
-                    <a:lnB w="2400">
-                      <a:solidFill>
-                        <a:srgbClr val="B4C0CD"/>
-                      </a:solidFill>
-                    </a:lnB>
-                  </a:tcPr>
-                </a:tc>
-                <a:tc>
-                  <a:txBody>
-                    <a:bodyPr wrap="square">
-                      <a:normAutofit/>
-                    </a:bodyPr>
-                    <a:lstStyle/>
-                    <a:p>
-                      <a:pPr algn="ctr">
-                        <a:lnSpc>
-                          <a:spcPct val="88000"/>
-                        </a:lnSpc>
-                        <a:spcBef>
-                          <a:spcPts val="0"/>
-                        </a:spcBef>
-                        <a:spcAft>
-                          <a:spcPts val="0"/>
-                        </a:spcAft>
+                  <a:tcPr anchor="t">
+                    <a:solidFill>
+                      <a:srgbClr val="FFFFFF"/>
+                    </a:solidFill>
+                    <a:lnL w="3600">
+                      <a:solidFill>
+                        <a:srgbClr val="B2B2B2"/>
+                      </a:solidFill>
+                    </a:lnL>
+                    <a:lnR w="3600">
+                      <a:solidFill>
+                        <a:srgbClr val="B2B2B2"/>
+                      </a:solidFill>
+                    </a:lnR>
+                    <a:lnT w="3600">
+                      <a:solidFill>
+                        <a:srgbClr val="B2B2B2"/>
+                      </a:solidFill>
+                    </a:lnT>
+                    <a:lnB w="3600">
+                      <a:solidFill>
+                        <a:srgbClr val="B2B2B2"/>
+                      </a:solidFill>
+                    </a:lnB>
+                  </a:tcPr>
+                </a:tc>
+                <a:tc>
+                  <a:txBody>
+                    <a:bodyPr wrap="square" lIns="13716" rIns="13716" tIns="9144" bIns="5486"/>
+                    <a:lstStyle/>
+                    <a:p>
+                      <a:pPr algn="l">
+                        <a:lnSpc>
+                          <a:spcPct val="88000"/>
+                        </a:lnSpc>
                       </a:pPr>
                       <a:r>
-                        <a:rPr sz="455" b="1">
+                        <a:rPr sz="345" b="0">
                           <a:solidFill>
                             <a:srgbClr val="000000"/>
                           </a:solidFill>
-                          <a:latin typeface="Microsoft YaHei UI"/>
+                          <a:latin typeface="Noto Sans CJK SC"/>
                         </a:rPr>
-                        <a:t>地瓜机器人/它石智航</a:t>
+                        <a:t>G0.5 是 Qwen3.5 2B 初始化的自回归 VLA，Fast-WAM/GigaWorld-Policy-0.5 是世界动作模型。</a:t>
                       </a:r>
                     </a:p>
                   </a:txBody>
-                  <a:tcPr anchor="ctr" marL="32004" marR="32004" marT="10972" marB="10972">
-                    <a:solidFill>
-                      <a:srgbClr val="FFFFFF"/>
-                    </a:solidFill>
-                    <a:lnL w="2400">
-                      <a:solidFill>
-                        <a:srgbClr val="B4C0CD"/>
-                      </a:solidFill>
-                    </a:lnL>
-                    <a:lnR w="2400">
-                      <a:solidFill>
-                        <a:srgbClr val="B4C0CD"/>
-                      </a:solidFill>
-                    </a:lnR>
-                    <a:lnT w="2400">
-                      <a:solidFill>
-                        <a:srgbClr val="B4C0CD"/>
-                      </a:solidFill>
-                    </a:lnT>
-                    <a:lnB w="2400">
-                      <a:solidFill>
-                        <a:srgbClr val="B4C0CD"/>
-                      </a:solidFill>
-                    </a:lnB>
-                  </a:tcPr>
-                </a:tc>
-                <a:tc>
-                  <a:txBody>
-                    <a:bodyPr wrap="square">
-                      <a:normAutofit/>
-                    </a:bodyPr>
+                  <a:tcPr anchor="t">
+                    <a:solidFill>
+                      <a:srgbClr val="FFFFFF"/>
+                    </a:solidFill>
+                    <a:lnL w="3600">
+                      <a:solidFill>
+                        <a:srgbClr val="B2B2B2"/>
+                      </a:solidFill>
+                    </a:lnL>
+                    <a:lnR w="3600">
+                      <a:solidFill>
+                        <a:srgbClr val="B2B2B2"/>
+                      </a:solidFill>
+                    </a:lnR>
+                    <a:lnT w="3600">
+                      <a:solidFill>
+                        <a:srgbClr val="B2B2B2"/>
+                      </a:solidFill>
+                    </a:lnT>
+                    <a:lnB w="3600">
+                      <a:solidFill>
+                        <a:srgbClr val="B2B2B2"/>
+                      </a:solidFill>
+                    </a:lnB>
+                  </a:tcPr>
+                </a:tc>
+                <a:tc>
+                  <a:txBody>
+                    <a:bodyPr wrap="square" lIns="13716" rIns="13716" tIns="9144" bIns="5486"/>
                     <a:lstStyle/>
                     <a:p>
                       <a:pPr algn="l">
                         <a:lnSpc>
                           <a:spcPct val="88000"/>
                         </a:lnSpc>
-                        <a:spcBef>
-                          <a:spcPts val="0"/>
-                        </a:spcBef>
-                        <a:spcAft>
-                          <a:spcPts val="0"/>
-                        </a:spcAft>
                       </a:pPr>
                       <a:r>
-                        <a:rPr sz="430" b="0">
+                        <a:rPr sz="345" b="0">
                           <a:solidFill>
                             <a:srgbClr val="000000"/>
                           </a:solidFill>
-                          <a:latin typeface="Microsoft YaHei UI"/>
+                          <a:latin typeface="Noto Sans CJK SC"/>
                         </a:rPr>
-                        <a:t>RDK S600 已适配 3B 参数级具身大模型，模型名称未公开。</a:t>
+                        <a:t>披露高性能运动小脑和全身控制基础模型，但参数未公开。</a:t>
                       </a:r>
                     </a:p>
                   </a:txBody>
-                  <a:tcPr anchor="ctr" marL="32004" marR="32004" marT="10972" marB="10972">
-                    <a:solidFill>
-                      <a:srgbClr val="FFFFFF"/>
-                    </a:solidFill>
-                    <a:lnL w="2400">
-                      <a:solidFill>
-                        <a:srgbClr val="B4C0CD"/>
-                      </a:solidFill>
-                    </a:lnL>
-                    <a:lnR w="2400">
-                      <a:solidFill>
-                        <a:srgbClr val="B4C0CD"/>
-                      </a:solidFill>
-                    </a:lnR>
-                    <a:lnT w="2400">
-                      <a:solidFill>
-                        <a:srgbClr val="B4C0CD"/>
-                      </a:solidFill>
-                    </a:lnT>
-                    <a:lnB w="2400">
-                      <a:solidFill>
-                        <a:srgbClr val="B4C0CD"/>
-                      </a:solidFill>
-                    </a:lnB>
-                  </a:tcPr>
-                </a:tc>
-                <a:tc>
-                  <a:txBody>
-                    <a:bodyPr wrap="square">
-                      <a:normAutofit/>
-                    </a:bodyPr>
+                  <a:tcPr anchor="t">
+                    <a:solidFill>
+                      <a:srgbClr val="FFFFFF"/>
+                    </a:solidFill>
+                    <a:lnL w="3600">
+                      <a:solidFill>
+                        <a:srgbClr val="B2B2B2"/>
+                      </a:solidFill>
+                    </a:lnL>
+                    <a:lnR w="3600">
+                      <a:solidFill>
+                        <a:srgbClr val="B2B2B2"/>
+                      </a:solidFill>
+                    </a:lnR>
+                    <a:lnT w="3600">
+                      <a:solidFill>
+                        <a:srgbClr val="B2B2B2"/>
+                      </a:solidFill>
+                    </a:lnT>
+                    <a:lnB w="3600">
+                      <a:solidFill>
+                        <a:srgbClr val="B2B2B2"/>
+                      </a:solidFill>
+                    </a:lnB>
+                  </a:tcPr>
+                </a:tc>
+                <a:tc>
+                  <a:txBody>
+                    <a:bodyPr wrap="square" lIns="13716" rIns="13716" tIns="9144" bIns="5486"/>
                     <a:lstStyle/>
                     <a:p>
                       <a:pPr algn="l">
                         <a:lnSpc>
                           <a:spcPct val="88000"/>
                         </a:lnSpc>
-                        <a:spcBef>
-                          <a:spcPts val="0"/>
-                        </a:spcBef>
-                        <a:spcAft>
-                          <a:spcPts val="0"/>
-                        </a:spcAft>
                       </a:pPr>
                       <a:r>
-                        <a:rPr sz="455" b="0">
+                        <a:rPr sz="345" b="0">
                           <a:solidFill>
                             <a:srgbClr val="000000"/>
                           </a:solidFill>
-                          <a:latin typeface="Microsoft YaHei UI"/>
+                          <a:latin typeface="Noto Sans CJK SC"/>
                         </a:rPr>
-                        <a:t/>
+                        <a:t>R1 Lite 原生支持端侧模型部署，Nexo 700 TOPS 为 WRC 会场口径。</a:t>
                       </a:r>
                     </a:p>
                   </a:txBody>
-                  <a:tcPr anchor="ctr" marL="32004" marR="32004" marT="10972" marB="10972">
-                    <a:solidFill>
-                      <a:srgbClr val="FFFFFF"/>
-                    </a:solidFill>
-                    <a:lnL w="2400">
-                      <a:solidFill>
-                        <a:srgbClr val="B4C0CD"/>
-                      </a:solidFill>
-                    </a:lnL>
-                    <a:lnR w="2400">
-                      <a:solidFill>
-                        <a:srgbClr val="B4C0CD"/>
-                      </a:solidFill>
-                    </a:lnR>
-                    <a:lnT w="2400">
-                      <a:solidFill>
-                        <a:srgbClr val="B4C0CD"/>
-                      </a:solidFill>
-                    </a:lnT>
-                    <a:lnB w="2400">
-                      <a:solidFill>
-                        <a:srgbClr val="B4C0CD"/>
-                      </a:solidFill>
-                    </a:lnB>
-                  </a:tcPr>
-                </a:tc>
-                <a:tc>
-                  <a:txBody>
-                    <a:bodyPr wrap="square">
-                      <a:normAutofit/>
-                    </a:bodyPr>
+                  <a:tcPr anchor="t">
+                    <a:solidFill>
+                      <a:srgbClr val="FFFFFF"/>
+                    </a:solidFill>
+                    <a:lnL w="3600">
+                      <a:solidFill>
+                        <a:srgbClr val="B2B2B2"/>
+                      </a:solidFill>
+                    </a:lnL>
+                    <a:lnR w="3600">
+                      <a:solidFill>
+                        <a:srgbClr val="B2B2B2"/>
+                      </a:solidFill>
+                    </a:lnR>
+                    <a:lnT w="3600">
+                      <a:solidFill>
+                        <a:srgbClr val="B2B2B2"/>
+                      </a:solidFill>
+                    </a:lnT>
+                    <a:lnB w="3600">
+                      <a:solidFill>
+                        <a:srgbClr val="B2B2B2"/>
+                      </a:solidFill>
+                    </a:lnB>
+                  </a:tcPr>
+                </a:tc>
+                <a:tc>
+                  <a:txBody>
+                    <a:bodyPr wrap="square" lIns="13716" rIns="13716" tIns="9144" bIns="5486"/>
                     <a:lstStyle/>
                     <a:p>
                       <a:pPr algn="l">
                         <a:lnSpc>
                           <a:spcPct val="88000"/>
                         </a:lnSpc>
-                        <a:spcBef>
-                          <a:spcPts val="0"/>
-                        </a:spcBef>
-                        <a:spcAft>
-                          <a:spcPts val="0"/>
-                        </a:spcAft>
                       </a:pPr>
                       <a:r>
-                        <a:rPr sz="430" b="0">
+                        <a:rPr sz="365" b="0">
                           <a:solidFill>
                             <a:srgbClr val="000000"/>
                           </a:solidFill>
-                          <a:latin typeface="Microsoft YaHei UI"/>
+                          <a:latin typeface="Noto Sans CJK SC"/>
                         </a:rPr>
-                        <a:t>RDK S600 提供 560 TOPS INT8、32/64GB LPDDR5 和 204.8GB/s 内存带宽。</a:t>
+                        <a:t>Fast-WAM 约 190ms，GigaWorld 在 RTX 4090 为 110ms、C++ 为 85ms。</a:t>
                       </a:r>
                     </a:p>
                   </a:txBody>
-                  <a:tcPr anchor="ctr" marL="32004" marR="32004" marT="10972" marB="10972">
-                    <a:solidFill>
-                      <a:srgbClr val="FFFFFF"/>
-                    </a:solidFill>
-                    <a:lnL w="2400">
-                      <a:solidFill>
-                        <a:srgbClr val="B4C0CD"/>
-                      </a:solidFill>
-                    </a:lnL>
-                    <a:lnR w="2400">
-                      <a:solidFill>
-                        <a:srgbClr val="B4C0CD"/>
-                      </a:solidFill>
-                    </a:lnR>
-                    <a:lnT w="2400">
-                      <a:solidFill>
-                        <a:srgbClr val="B4C0CD"/>
-                      </a:solidFill>
-                    </a:lnT>
-                    <a:lnB w="2400">
-                      <a:solidFill>
-                        <a:srgbClr val="B4C0CD"/>
-                      </a:solidFill>
-                    </a:lnB>
-                  </a:tcPr>
-                </a:tc>
-                <a:tc>
-                  <a:txBody>
-                    <a:bodyPr wrap="square">
-                      <a:normAutofit/>
-                    </a:bodyPr>
-                    <a:lstStyle/>
-                    <a:p>
-                      <a:pPr algn="l">
-                        <a:lnSpc>
-                          <a:spcPct val="88000"/>
-                        </a:lnSpc>
-                        <a:spcBef>
-                          <a:spcPts val="0"/>
-                        </a:spcBef>
-                        <a:spcAft>
-                          <a:spcPts val="0"/>
-                        </a:spcAft>
+                  <a:tcPr anchor="t">
+                    <a:solidFill>
+                      <a:srgbClr val="FFFFFF"/>
+                    </a:solidFill>
+                    <a:lnL w="3600">
+                      <a:solidFill>
+                        <a:srgbClr val="B2B2B2"/>
+                      </a:solidFill>
+                    </a:lnL>
+                    <a:lnR w="3600">
+                      <a:solidFill>
+                        <a:srgbClr val="B2B2B2"/>
+                      </a:solidFill>
+                    </a:lnR>
+                    <a:lnT w="3600">
+                      <a:solidFill>
+                        <a:srgbClr val="B2B2B2"/>
+                      </a:solidFill>
+                    </a:lnT>
+                    <a:lnB w="3600">
+                      <a:solidFill>
+                        <a:srgbClr val="B2B2B2"/>
+                      </a:solidFill>
+                    </a:lnB>
+                  </a:tcPr>
+                </a:tc>
+              </a:tr>
+              <a:tr h="272034">
+                <a:tc vMerge="1">
+                  <a:txBody>
+                    <a:bodyPr/>
+                    <a:lstStyle/>
+                    <a:p/>
+                  </a:txBody>
+                  <a:tcPr>
+                    <a:lnL w="3600">
+                      <a:solidFill>
+                        <a:srgbClr val="B2B2B2"/>
+                      </a:solidFill>
+                    </a:lnL>
+                    <a:lnR w="3600">
+                      <a:solidFill>
+                        <a:srgbClr val="B2B2B2"/>
+                      </a:solidFill>
+                    </a:lnR>
+                    <a:lnT w="3600">
+                      <a:solidFill>
+                        <a:srgbClr val="B2B2B2"/>
+                      </a:solidFill>
+                    </a:lnT>
+                    <a:lnB w="3600">
+                      <a:solidFill>
+                        <a:srgbClr val="B2B2B2"/>
+                      </a:solidFill>
+                    </a:lnB>
+                  </a:tcPr>
+                </a:tc>
+                <a:tc>
+                  <a:txBody>
+                    <a:bodyPr wrap="square" lIns="13716" rIns="13716" tIns="9144" bIns="5486"/>
+                    <a:lstStyle/>
+                    <a:p>
+                      <a:pPr algn="ctr">
+                        <a:lnSpc>
+                          <a:spcPct val="88000"/>
+                        </a:lnSpc>
                       </a:pPr>
                       <a:r>
-                        <a:rPr sz="430" b="0">
+                        <a:rPr sz="365" b="0">
                           <a:solidFill>
                             <a:srgbClr val="000000"/>
                           </a:solidFill>
-                          <a:latin typeface="Microsoft YaHei UI"/>
+                          <a:latin typeface="Noto Sans CJK SC"/>
                         </a:rPr>
-                        <a:t/>
+                        <a:t>蔚蓝 BabyAlpha</a:t>
                       </a:r>
                     </a:p>
                   </a:txBody>
-                  <a:tcPr anchor="ctr" marL="32004" marR="32004" marT="10972" marB="10972">
-                    <a:solidFill>
-                      <a:srgbClr val="FFFFFF"/>
-                    </a:solidFill>
-                    <a:lnL w="2400">
-                      <a:solidFill>
-                        <a:srgbClr val="B4C0CD"/>
-                      </a:solidFill>
-                    </a:lnL>
-                    <a:lnR w="2400">
-                      <a:solidFill>
-                        <a:srgbClr val="B4C0CD"/>
-                      </a:solidFill>
-                    </a:lnR>
-                    <a:lnT w="2400">
-                      <a:solidFill>
-                        <a:srgbClr val="B4C0CD"/>
-                      </a:solidFill>
-                    </a:lnT>
-                    <a:lnB w="2400">
-                      <a:solidFill>
-                        <a:srgbClr val="B4C0CD"/>
-                      </a:solidFill>
-                    </a:lnB>
-                  </a:tcPr>
-                </a:tc>
-              </a:tr>
-              <a:tr h="379827">
-                <a:tc vMerge="1">
-                  <a:txBody>
-                    <a:bodyPr wrap="square">
-                      <a:normAutofit/>
-                    </a:bodyPr>
+                  <a:tcPr anchor="t">
+                    <a:solidFill>
+                      <a:srgbClr val="FFFFFF"/>
+                    </a:solidFill>
+                    <a:lnL w="3600">
+                      <a:solidFill>
+                        <a:srgbClr val="B2B2B2"/>
+                      </a:solidFill>
+                    </a:lnL>
+                    <a:lnR w="3600">
+                      <a:solidFill>
+                        <a:srgbClr val="B2B2B2"/>
+                      </a:solidFill>
+                    </a:lnR>
+                    <a:lnT w="3600">
+                      <a:solidFill>
+                        <a:srgbClr val="B2B2B2"/>
+                      </a:solidFill>
+                    </a:lnT>
+                    <a:lnB w="3600">
+                      <a:solidFill>
+                        <a:srgbClr val="B2B2B2"/>
+                      </a:solidFill>
+                    </a:lnB>
+                  </a:tcPr>
+                </a:tc>
+                <a:tc>
+                  <a:txBody>
+                    <a:bodyPr wrap="square" lIns="13716" rIns="13716" tIns="9144" bIns="5486"/>
                     <a:lstStyle/>
                     <a:p>
                       <a:pPr algn="l">
                         <a:lnSpc>
                           <a:spcPct val="88000"/>
                         </a:lnSpc>
-                        <a:spcBef>
-                          <a:spcPts val="0"/>
-                        </a:spcBef>
-                        <a:spcAft>
-                          <a:spcPts val="0"/>
-                        </a:spcAft>
                       </a:pPr>
                       <a:r>
-                        <a:rPr sz="455" b="0">
+                        <a:rPr sz="345" b="0">
                           <a:solidFill>
                             <a:srgbClr val="000000"/>
                           </a:solidFill>
-                          <a:latin typeface="Microsoft YaHei UI"/>
+                          <a:latin typeface="Noto Sans CJK SC"/>
                         </a:rPr>
-                        <a:t/>
+                        <a:t>BabyAlpha A3 本地运行 7B 交互大模型，用于对话和环境识别。</a:t>
                       </a:r>
                     </a:p>
                   </a:txBody>
-                  <a:tcPr anchor="ctr" marL="32004" marR="32004" marT="10972" marB="10972">
-                    <a:solidFill>
-                      <a:srgbClr val="F4F7FA"/>
-                    </a:solidFill>
-                    <a:lnL w="2400">
-                      <a:solidFill>
-                        <a:srgbClr val="B4C0CD"/>
-                      </a:solidFill>
-                    </a:lnL>
-                    <a:lnR w="2400">
-                      <a:solidFill>
-                        <a:srgbClr val="B4C0CD"/>
-                      </a:solidFill>
-                    </a:lnR>
-                    <a:lnT w="2400">
-                      <a:solidFill>
-                        <a:srgbClr val="B4C0CD"/>
-                      </a:solidFill>
-                    </a:lnT>
-                    <a:lnB w="2400">
-                      <a:solidFill>
-                        <a:srgbClr val="B4C0CD"/>
-                      </a:solidFill>
-                    </a:lnB>
-                  </a:tcPr>
-                </a:tc>
-                <a:tc>
-                  <a:txBody>
-                    <a:bodyPr wrap="square">
-                      <a:normAutofit/>
-                    </a:bodyPr>
-                    <a:lstStyle/>
-                    <a:p>
-                      <a:pPr algn="ctr">
-                        <a:lnSpc>
-                          <a:spcPct val="88000"/>
-                        </a:lnSpc>
-                        <a:spcBef>
-                          <a:spcPts val="0"/>
-                        </a:spcBef>
-                        <a:spcAft>
-                          <a:spcPts val="0"/>
-                        </a:spcAft>
+                  <a:tcPr anchor="t">
+                    <a:solidFill>
+                      <a:srgbClr val="FFFFFF"/>
+                    </a:solidFill>
+                    <a:lnL w="3600">
+                      <a:solidFill>
+                        <a:srgbClr val="B2B2B2"/>
+                      </a:solidFill>
+                    </a:lnL>
+                    <a:lnR w="3600">
+                      <a:solidFill>
+                        <a:srgbClr val="B2B2B2"/>
+                      </a:solidFill>
+                    </a:lnR>
+                    <a:lnT w="3600">
+                      <a:solidFill>
+                        <a:srgbClr val="B2B2B2"/>
+                      </a:solidFill>
+                    </a:lnT>
+                    <a:lnB w="3600">
+                      <a:solidFill>
+                        <a:srgbClr val="B2B2B2"/>
+                      </a:solidFill>
+                    </a:lnB>
+                  </a:tcPr>
+                </a:tc>
+                <a:tc>
+                  <a:txBody>
+                    <a:bodyPr wrap="square" lIns="13716" rIns="13716" tIns="9144" bIns="5486"/>
+                    <a:lstStyle/>
+                    <a:p>
+                      <a:pPr algn="l">
+                        <a:lnSpc>
+                          <a:spcPct val="88000"/>
+                        </a:lnSpc>
+                      </a:pPr>
+                    </a:p>
+                  </a:txBody>
+                  <a:tcPr anchor="t">
+                    <a:solidFill>
+                      <a:srgbClr val="FFFFFF"/>
+                    </a:solidFill>
+                    <a:lnL w="3600">
+                      <a:solidFill>
+                        <a:srgbClr val="B2B2B2"/>
+                      </a:solidFill>
+                    </a:lnL>
+                    <a:lnR w="3600">
+                      <a:solidFill>
+                        <a:srgbClr val="B2B2B2"/>
+                      </a:solidFill>
+                    </a:lnR>
+                    <a:lnT w="3600">
+                      <a:solidFill>
+                        <a:srgbClr val="B2B2B2"/>
+                      </a:solidFill>
+                    </a:lnT>
+                    <a:lnB w="3600">
+                      <a:solidFill>
+                        <a:srgbClr val="B2B2B2"/>
+                      </a:solidFill>
+                    </a:lnB>
+                  </a:tcPr>
+                </a:tc>
+                <a:tc>
+                  <a:txBody>
+                    <a:bodyPr wrap="square" lIns="13716" rIns="13716" tIns="9144" bIns="5486"/>
+                    <a:lstStyle/>
+                    <a:p>
+                      <a:pPr algn="l">
+                        <a:lnSpc>
+                          <a:spcPct val="88000"/>
+                        </a:lnSpc>
                       </a:pPr>
                       <a:r>
-                        <a:rPr sz="455" b="1">
+                        <a:rPr sz="345" b="0">
                           <a:solidFill>
                             <a:srgbClr val="000000"/>
                           </a:solidFill>
-                          <a:latin typeface="Microsoft YaHei UI"/>
+                          <a:latin typeface="Noto Sans CJK SC"/>
                         </a:rPr>
-                        <a:t>星海图 Galaxea</a:t>
+                        <a:t>本地端侧运行，芯片型号未公开。</a:t>
                       </a:r>
                     </a:p>
                   </a:txBody>
-                  <a:tcPr anchor="ctr" marL="32004" marR="32004" marT="10972" marB="10972">
-                    <a:solidFill>
-                      <a:srgbClr val="F4F7FA"/>
-                    </a:solidFill>
-                    <a:lnL w="2400">
-                      <a:solidFill>
-                        <a:srgbClr val="B4C0CD"/>
-                      </a:solidFill>
-                    </a:lnL>
-                    <a:lnR w="2400">
-                      <a:solidFill>
-                        <a:srgbClr val="B4C0CD"/>
-                      </a:solidFill>
-                    </a:lnR>
-                    <a:lnT w="2400">
-                      <a:solidFill>
-                        <a:srgbClr val="B4C0CD"/>
-                      </a:solidFill>
-                    </a:lnT>
-                    <a:lnB w="2400">
-                      <a:solidFill>
-                        <a:srgbClr val="B4C0CD"/>
-                      </a:solidFill>
-                    </a:lnB>
-                  </a:tcPr>
-                </a:tc>
-                <a:tc>
-                  <a:txBody>
-                    <a:bodyPr wrap="square">
-                      <a:normAutofit/>
-                    </a:bodyPr>
+                  <a:tcPr anchor="t">
+                    <a:solidFill>
+                      <a:srgbClr val="FFFFFF"/>
+                    </a:solidFill>
+                    <a:lnL w="3600">
+                      <a:solidFill>
+                        <a:srgbClr val="B2B2B2"/>
+                      </a:solidFill>
+                    </a:lnL>
+                    <a:lnR w="3600">
+                      <a:solidFill>
+                        <a:srgbClr val="B2B2B2"/>
+                      </a:solidFill>
+                    </a:lnR>
+                    <a:lnT w="3600">
+                      <a:solidFill>
+                        <a:srgbClr val="B2B2B2"/>
+                      </a:solidFill>
+                    </a:lnT>
+                    <a:lnB w="3600">
+                      <a:solidFill>
+                        <a:srgbClr val="B2B2B2"/>
+                      </a:solidFill>
+                    </a:lnB>
+                  </a:tcPr>
+                </a:tc>
+                <a:tc>
+                  <a:txBody>
+                    <a:bodyPr wrap="square" lIns="13716" rIns="13716" tIns="9144" bIns="5486"/>
                     <a:lstStyle/>
                     <a:p>
                       <a:pPr algn="l">
                         <a:lnSpc>
                           <a:spcPct val="88000"/>
                         </a:lnSpc>
-                        <a:spcBef>
-                          <a:spcPts val="0"/>
-                        </a:spcBef>
-                        <a:spcAft>
-                          <a:spcPts val="0"/>
-                        </a:spcAft>
+                      </a:pPr>
+                    </a:p>
+                  </a:txBody>
+                  <a:tcPr anchor="t">
+                    <a:solidFill>
+                      <a:srgbClr val="FFFFFF"/>
+                    </a:solidFill>
+                    <a:lnL w="3600">
+                      <a:solidFill>
+                        <a:srgbClr val="B2B2B2"/>
+                      </a:solidFill>
+                    </a:lnL>
+                    <a:lnR w="3600">
+                      <a:solidFill>
+                        <a:srgbClr val="B2B2B2"/>
+                      </a:solidFill>
+                    </a:lnR>
+                    <a:lnT w="3600">
+                      <a:solidFill>
+                        <a:srgbClr val="B2B2B2"/>
+                      </a:solidFill>
+                    </a:lnT>
+                    <a:lnB w="3600">
+                      <a:solidFill>
+                        <a:srgbClr val="B2B2B2"/>
+                      </a:solidFill>
+                    </a:lnB>
+                  </a:tcPr>
+                </a:tc>
+              </a:tr>
+              <a:tr h="272034">
+                <a:tc vMerge="1">
+                  <a:txBody>
+                    <a:bodyPr/>
+                    <a:lstStyle/>
+                    <a:p/>
+                  </a:txBody>
+                  <a:tcPr>
+                    <a:lnL w="3600">
+                      <a:solidFill>
+                        <a:srgbClr val="B2B2B2"/>
+                      </a:solidFill>
+                    </a:lnL>
+                    <a:lnR w="3600">
+                      <a:solidFill>
+                        <a:srgbClr val="B2B2B2"/>
+                      </a:solidFill>
+                    </a:lnR>
+                    <a:lnT w="3600">
+                      <a:solidFill>
+                        <a:srgbClr val="B2B2B2"/>
+                      </a:solidFill>
+                    </a:lnT>
+                    <a:lnB w="3600">
+                      <a:solidFill>
+                        <a:srgbClr val="B2B2B2"/>
+                      </a:solidFill>
+                    </a:lnB>
+                  </a:tcPr>
+                </a:tc>
+                <a:tc>
+                  <a:txBody>
+                    <a:bodyPr wrap="square" lIns="13716" rIns="13716" tIns="9144" bIns="5486"/>
+                    <a:lstStyle/>
+                    <a:p>
+                      <a:pPr algn="ctr">
+                        <a:lnSpc>
+                          <a:spcPct val="88000"/>
+                        </a:lnSpc>
                       </a:pPr>
                       <a:r>
-                        <a:rPr sz="400" b="0">
+                        <a:rPr sz="365" b="0">
                           <a:solidFill>
                             <a:srgbClr val="000000"/>
                           </a:solidFill>
-                          <a:latin typeface="Microsoft YaHei UI"/>
+                          <a:latin typeface="Noto Sans CJK SC"/>
                         </a:rPr>
-                        <a:t>G0.5 是自回归 VLA，基于 Qwen3.5 2B 初始化；Fast-WAM/GigaWorld-Policy-0.5 是世界动作模型，模型总参数未公开。</a:t>
+                        <a:t>宇树 Unitree</a:t>
                       </a:r>
                     </a:p>
                   </a:txBody>
-                  <a:tcPr anchor="ctr" marL="32004" marR="32004" marT="10972" marB="10972">
-                    <a:solidFill>
-                      <a:srgbClr val="F4F7FA"/>
-                    </a:solidFill>
-                    <a:lnL w="2400">
-                      <a:solidFill>
-                        <a:srgbClr val="B4C0CD"/>
-                      </a:solidFill>
-                    </a:lnL>
-                    <a:lnR w="2400">
-                      <a:solidFill>
-                        <a:srgbClr val="B4C0CD"/>
-                      </a:solidFill>
-                    </a:lnR>
-                    <a:lnT w="2400">
-                      <a:solidFill>
-                        <a:srgbClr val="B4C0CD"/>
-                      </a:solidFill>
-                    </a:lnT>
-                    <a:lnB w="2400">
-                      <a:solidFill>
-                        <a:srgbClr val="B4C0CD"/>
-                      </a:solidFill>
-                    </a:lnB>
-                  </a:tcPr>
-                </a:tc>
-                <a:tc>
-                  <a:txBody>
-                    <a:bodyPr wrap="square">
-                      <a:normAutofit/>
-                    </a:bodyPr>
+                  <a:tcPr anchor="t">
+                    <a:solidFill>
+                      <a:srgbClr val="FFFFFF"/>
+                    </a:solidFill>
+                    <a:lnL w="3600">
+                      <a:solidFill>
+                        <a:srgbClr val="B2B2B2"/>
+                      </a:solidFill>
+                    </a:lnL>
+                    <a:lnR w="3600">
+                      <a:solidFill>
+                        <a:srgbClr val="B2B2B2"/>
+                      </a:solidFill>
+                    </a:lnR>
+                    <a:lnT w="3600">
+                      <a:solidFill>
+                        <a:srgbClr val="B2B2B2"/>
+                      </a:solidFill>
+                    </a:lnT>
+                    <a:lnB w="3600">
+                      <a:solidFill>
+                        <a:srgbClr val="B2B2B2"/>
+                      </a:solidFill>
+                    </a:lnB>
+                  </a:tcPr>
+                </a:tc>
+                <a:tc>
+                  <a:txBody>
+                    <a:bodyPr wrap="square" lIns="13716" rIns="13716" tIns="9144" bIns="5486"/>
                     <a:lstStyle/>
                     <a:p>
                       <a:pPr algn="l">
                         <a:lnSpc>
                           <a:spcPct val="88000"/>
                         </a:lnSpc>
-                        <a:spcBef>
-                          <a:spcPts val="0"/>
-                        </a:spcBef>
-                        <a:spcAft>
-                          <a:spcPts val="0"/>
-                        </a:spcAft>
                       </a:pPr>
                       <a:r>
-                        <a:rPr sz="455" b="0">
+                        <a:rPr sz="345" b="0">
                           <a:solidFill>
                             <a:srgbClr val="000000"/>
                           </a:solidFill>
-                          <a:latin typeface="Microsoft YaHei UI"/>
+                          <a:latin typeface="Noto Sans CJK SC"/>
                         </a:rPr>
-                        <a:t>星海图披露高性能运动小脑和全身控制基础模型，但未公开参数。</a:t>
+                        <a:t>UnifoLM-WMA-0 是开源 WMA 架构，UnifoLM-X1-0 是工业级具身大模型，参数未公开。</a:t>
                       </a:r>
                     </a:p>
                   </a:txBody>
-                  <a:tcPr anchor="ctr" marL="32004" marR="32004" marT="10972" marB="10972">
-                    <a:solidFill>
-                      <a:srgbClr val="F4F7FA"/>
-                    </a:solidFill>
-                    <a:lnL w="2400">
-                      <a:solidFill>
-                        <a:srgbClr val="B4C0CD"/>
-                      </a:solidFill>
-                    </a:lnL>
-                    <a:lnR w="2400">
-                      <a:solidFill>
-                        <a:srgbClr val="B4C0CD"/>
-                      </a:solidFill>
-                    </a:lnR>
-                    <a:lnT w="2400">
-                      <a:solidFill>
-                        <a:srgbClr val="B4C0CD"/>
-                      </a:solidFill>
-                    </a:lnT>
-                    <a:lnB w="2400">
-                      <a:solidFill>
-                        <a:srgbClr val="B4C0CD"/>
-                      </a:solidFill>
-                    </a:lnB>
-                  </a:tcPr>
-                </a:tc>
-                <a:tc>
-                  <a:txBody>
-                    <a:bodyPr wrap="square">
-                      <a:normAutofit/>
-                    </a:bodyPr>
+                  <a:tcPr anchor="t">
+                    <a:solidFill>
+                      <a:srgbClr val="FFFFFF"/>
+                    </a:solidFill>
+                    <a:lnL w="3600">
+                      <a:solidFill>
+                        <a:srgbClr val="B2B2B2"/>
+                      </a:solidFill>
+                    </a:lnL>
+                    <a:lnR w="3600">
+                      <a:solidFill>
+                        <a:srgbClr val="B2B2B2"/>
+                      </a:solidFill>
+                    </a:lnR>
+                    <a:lnT w="3600">
+                      <a:solidFill>
+                        <a:srgbClr val="B2B2B2"/>
+                      </a:solidFill>
+                    </a:lnT>
+                    <a:lnB w="3600">
+                      <a:solidFill>
+                        <a:srgbClr val="B2B2B2"/>
+                      </a:solidFill>
+                    </a:lnB>
+                  </a:tcPr>
+                </a:tc>
+                <a:tc>
+                  <a:txBody>
+                    <a:bodyPr wrap="square" lIns="13716" rIns="13716" tIns="9144" bIns="5486"/>
                     <a:lstStyle/>
                     <a:p>
                       <a:pPr algn="l">
                         <a:lnSpc>
                           <a:spcPct val="88000"/>
                         </a:lnSpc>
-                        <a:spcBef>
-                          <a:spcPts val="0"/>
-                        </a:spcBef>
-                        <a:spcAft>
-                          <a:spcPts val="0"/>
-                        </a:spcAft>
                       </a:pPr>
                       <a:r>
-                        <a:rPr sz="400" b="0">
+                        <a:rPr sz="345" b="0">
                           <a:solidFill>
                             <a:srgbClr val="000000"/>
                           </a:solidFill>
-                          <a:latin typeface="Microsoft YaHei UI"/>
+                          <a:latin typeface="Noto Sans CJK SC"/>
                         </a:rPr>
-                        <a:t>R1 Lite 原生支持端侧模型部署；Nexo 700 TOPS 为 WRC 会场口径，待公开链接。</a:t>
+                        <a:t>未公开具名小脑模型参数。</a:t>
                       </a:r>
                     </a:p>
                   </a:txBody>
-                  <a:tcPr anchor="ctr" marL="32004" marR="32004" marT="10972" marB="10972">
-                    <a:solidFill>
-                      <a:srgbClr val="F4F7FA"/>
-                    </a:solidFill>
-                    <a:lnL w="2400">
-                      <a:solidFill>
-                        <a:srgbClr val="B4C0CD"/>
-                      </a:solidFill>
-                    </a:lnL>
-                    <a:lnR w="2400">
-                      <a:solidFill>
-                        <a:srgbClr val="B4C0CD"/>
-                      </a:solidFill>
-                    </a:lnR>
-                    <a:lnT w="2400">
-                      <a:solidFill>
-                        <a:srgbClr val="B4C0CD"/>
-                      </a:solidFill>
-                    </a:lnT>
-                    <a:lnB w="2400">
-                      <a:solidFill>
-                        <a:srgbClr val="B4C0CD"/>
-                      </a:solidFill>
-                    </a:lnB>
-                  </a:tcPr>
-                </a:tc>
-                <a:tc>
-                  <a:txBody>
-                    <a:bodyPr wrap="square">
-                      <a:normAutofit/>
-                    </a:bodyPr>
+                  <a:tcPr anchor="t">
+                    <a:solidFill>
+                      <a:srgbClr val="FFFFFF"/>
+                    </a:solidFill>
+                    <a:lnL w="3600">
+                      <a:solidFill>
+                        <a:srgbClr val="B2B2B2"/>
+                      </a:solidFill>
+                    </a:lnL>
+                    <a:lnR w="3600">
+                      <a:solidFill>
+                        <a:srgbClr val="B2B2B2"/>
+                      </a:solidFill>
+                    </a:lnR>
+                    <a:lnT w="3600">
+                      <a:solidFill>
+                        <a:srgbClr val="B2B2B2"/>
+                      </a:solidFill>
+                    </a:lnT>
+                    <a:lnB w="3600">
+                      <a:solidFill>
+                        <a:srgbClr val="B2B2B2"/>
+                      </a:solidFill>
+                    </a:lnB>
+                  </a:tcPr>
+                </a:tc>
+                <a:tc>
+                  <a:txBody>
+                    <a:bodyPr wrap="square" lIns="13716" rIns="13716" tIns="9144" bIns="5486"/>
                     <a:lstStyle/>
                     <a:p>
                       <a:pPr algn="l">
                         <a:lnSpc>
                           <a:spcPct val="88000"/>
                         </a:lnSpc>
-                        <a:spcBef>
-                          <a:spcPts val="0"/>
-                        </a:spcBef>
-                        <a:spcAft>
-                          <a:spcPts val="0"/>
-                        </a:spcAft>
                       </a:pPr>
                       <a:r>
-                        <a:rPr sz="400" b="0">
+                        <a:rPr sz="345" b="0">
                           <a:solidFill>
                             <a:srgbClr val="000000"/>
                           </a:solidFill>
-                          <a:latin typeface="Microsoft YaHei UI"/>
+                          <a:latin typeface="Noto Sans CJK SC"/>
                         </a:rPr>
-                        <a:t>Fast-WAM 单步约 190ms；GigaWorld-Policy-0.5 在 A100 为 189ms、RTX 4090 为 110ms、C++ 部署为 85ms。</a:t>
+                        <a:t>G1-D 高算力模组可选 Orin NX 16GB（100 TOPS），基础算力为 8 核 CPU。</a:t>
                       </a:r>
                     </a:p>
                   </a:txBody>
-                  <a:tcPr anchor="ctr" marL="32004" marR="32004" marT="10972" marB="10972">
-                    <a:solidFill>
-                      <a:srgbClr val="F4F7FA"/>
-                    </a:solidFill>
-                    <a:lnL w="2400">
-                      <a:solidFill>
-                        <a:srgbClr val="B4C0CD"/>
-                      </a:solidFill>
-                    </a:lnL>
-                    <a:lnR w="2400">
-                      <a:solidFill>
-                        <a:srgbClr val="B4C0CD"/>
-                      </a:solidFill>
-                    </a:lnR>
-                    <a:lnT w="2400">
-                      <a:solidFill>
-                        <a:srgbClr val="B4C0CD"/>
-                      </a:solidFill>
-                    </a:lnT>
-                    <a:lnB w="2400">
-                      <a:solidFill>
-                        <a:srgbClr val="B4C0CD"/>
-                      </a:solidFill>
-                    </a:lnB>
-                  </a:tcPr>
-                </a:tc>
-              </a:tr>
-              <a:tr h="379827">
-                <a:tc vMerge="1">
-                  <a:txBody>
-                    <a:bodyPr wrap="square">
-                      <a:normAutofit/>
-                    </a:bodyPr>
+                  <a:tcPr anchor="t">
+                    <a:solidFill>
+                      <a:srgbClr val="FFFFFF"/>
+                    </a:solidFill>
+                    <a:lnL w="3600">
+                      <a:solidFill>
+                        <a:srgbClr val="B2B2B2"/>
+                      </a:solidFill>
+                    </a:lnL>
+                    <a:lnR w="3600">
+                      <a:solidFill>
+                        <a:srgbClr val="B2B2B2"/>
+                      </a:solidFill>
+                    </a:lnR>
+                    <a:lnT w="3600">
+                      <a:solidFill>
+                        <a:srgbClr val="B2B2B2"/>
+                      </a:solidFill>
+                    </a:lnT>
+                    <a:lnB w="3600">
+                      <a:solidFill>
+                        <a:srgbClr val="B2B2B2"/>
+                      </a:solidFill>
+                    </a:lnB>
+                  </a:tcPr>
+                </a:tc>
+                <a:tc>
+                  <a:txBody>
+                    <a:bodyPr wrap="square" lIns="13716" rIns="13716" tIns="9144" bIns="5486"/>
                     <a:lstStyle/>
                     <a:p>
                       <a:pPr algn="l">
                         <a:lnSpc>
                           <a:spcPct val="88000"/>
                         </a:lnSpc>
-                        <a:spcBef>
-                          <a:spcPts val="0"/>
-                        </a:spcBef>
-                        <a:spcAft>
-                          <a:spcPts val="0"/>
-                        </a:spcAft>
                       </a:pPr>
                       <a:r>
-                        <a:rPr sz="455" b="0">
+                        <a:rPr sz="365" b="0">
                           <a:solidFill>
                             <a:srgbClr val="000000"/>
                           </a:solidFill>
-                          <a:latin typeface="Microsoft YaHei UI"/>
+                          <a:latin typeface="Noto Sans CJK SC"/>
                         </a:rPr>
-                        <a:t/>
+                        <a:t>G1-D 遥操作延迟低于 100ms，采样率为 60Hz。</a:t>
                       </a:r>
                     </a:p>
                   </a:txBody>
-                  <a:tcPr anchor="ctr" marL="32004" marR="32004" marT="10972" marB="10972">
-                    <a:solidFill>
-                      <a:srgbClr val="FFFFFF"/>
-                    </a:solidFill>
-                    <a:lnL w="2400">
-                      <a:solidFill>
-                        <a:srgbClr val="B4C0CD"/>
-                      </a:solidFill>
-                    </a:lnL>
-                    <a:lnR w="2400">
-                      <a:solidFill>
-                        <a:srgbClr val="B4C0CD"/>
-                      </a:solidFill>
-                    </a:lnR>
-                    <a:lnT w="2400">
-                      <a:solidFill>
-                        <a:srgbClr val="B4C0CD"/>
-                      </a:solidFill>
-                    </a:lnT>
-                    <a:lnB w="2400">
-                      <a:solidFill>
-                        <a:srgbClr val="B4C0CD"/>
-                      </a:solidFill>
-                    </a:lnB>
-                  </a:tcPr>
-                </a:tc>
-                <a:tc>
-                  <a:txBody>
-                    <a:bodyPr wrap="square">
-                      <a:normAutofit/>
-                    </a:bodyPr>
+                  <a:tcPr anchor="t">
+                    <a:solidFill>
+                      <a:srgbClr val="FFFFFF"/>
+                    </a:solidFill>
+                    <a:lnL w="3600">
+                      <a:solidFill>
+                        <a:srgbClr val="B2B2B2"/>
+                      </a:solidFill>
+                    </a:lnL>
+                    <a:lnR w="3600">
+                      <a:solidFill>
+                        <a:srgbClr val="B2B2B2"/>
+                      </a:solidFill>
+                    </a:lnR>
+                    <a:lnT w="3600">
+                      <a:solidFill>
+                        <a:srgbClr val="B2B2B2"/>
+                      </a:solidFill>
+                    </a:lnT>
+                    <a:lnB w="3600">
+                      <a:solidFill>
+                        <a:srgbClr val="B2B2B2"/>
+                      </a:solidFill>
+                    </a:lnB>
+                  </a:tcPr>
+                </a:tc>
+              </a:tr>
+              <a:tr h="272034">
+                <a:tc vMerge="1">
+                  <a:txBody>
+                    <a:bodyPr/>
+                    <a:lstStyle/>
+                    <a:p/>
+                  </a:txBody>
+                  <a:tcPr>
+                    <a:lnL w="3600">
+                      <a:solidFill>
+                        <a:srgbClr val="B2B2B2"/>
+                      </a:solidFill>
+                    </a:lnL>
+                    <a:lnR w="3600">
+                      <a:solidFill>
+                        <a:srgbClr val="B2B2B2"/>
+                      </a:solidFill>
+                    </a:lnR>
+                    <a:lnT w="3600">
+                      <a:solidFill>
+                        <a:srgbClr val="B2B2B2"/>
+                      </a:solidFill>
+                    </a:lnT>
+                    <a:lnB w="3600">
+                      <a:solidFill>
+                        <a:srgbClr val="B2B2B2"/>
+                      </a:solidFill>
+                    </a:lnB>
+                  </a:tcPr>
+                </a:tc>
+                <a:tc>
+                  <a:txBody>
+                    <a:bodyPr wrap="square" lIns="13716" rIns="13716" tIns="9144" bIns="5486"/>
                     <a:lstStyle/>
                     <a:p>
                       <a:pPr algn="ctr">
                         <a:lnSpc>
                           <a:spcPct val="88000"/>
                         </a:lnSpc>
-                        <a:spcBef>
-                          <a:spcPts val="0"/>
-                        </a:spcBef>
-                        <a:spcAft>
-                          <a:spcPts val="0"/>
-                        </a:spcAft>
                       </a:pPr>
                       <a:r>
-                        <a:rPr sz="455" b="1">
+                        <a:rPr sz="365" b="0">
                           <a:solidFill>
                             <a:srgbClr val="000000"/>
                           </a:solidFill>
-                          <a:latin typeface="Microsoft YaHei UI"/>
+                          <a:latin typeface="Noto Sans CJK SC"/>
                         </a:rPr>
-                        <a:t>蔚蓝智能 BabyAlpha</a:t>
+                        <a:t>云深处 Deep Robotics</a:t>
                       </a:r>
                     </a:p>
                   </a:txBody>
-                  <a:tcPr anchor="ctr" marL="32004" marR="32004" marT="10972" marB="10972">
-                    <a:solidFill>
-                      <a:srgbClr val="FFFFFF"/>
-                    </a:solidFill>
-                    <a:lnL w="2400">
-                      <a:solidFill>
-                        <a:srgbClr val="B4C0CD"/>
-                      </a:solidFill>
-                    </a:lnL>
-                    <a:lnR w="2400">
-                      <a:solidFill>
-                        <a:srgbClr val="B4C0CD"/>
-                      </a:solidFill>
-                    </a:lnR>
-                    <a:lnT w="2400">
-                      <a:solidFill>
-                        <a:srgbClr val="B4C0CD"/>
-                      </a:solidFill>
-                    </a:lnT>
-                    <a:lnB w="2400">
-                      <a:solidFill>
-                        <a:srgbClr val="B4C0CD"/>
-                      </a:solidFill>
-                    </a:lnB>
-                  </a:tcPr>
-                </a:tc>
-                <a:tc>
-                  <a:txBody>
-                    <a:bodyPr wrap="square">
-                      <a:normAutofit/>
-                    </a:bodyPr>
+                  <a:tcPr anchor="t">
+                    <a:solidFill>
+                      <a:srgbClr val="FFFFFF"/>
+                    </a:solidFill>
+                    <a:lnL w="3600">
+                      <a:solidFill>
+                        <a:srgbClr val="B2B2B2"/>
+                      </a:solidFill>
+                    </a:lnL>
+                    <a:lnR w="3600">
+                      <a:solidFill>
+                        <a:srgbClr val="B2B2B2"/>
+                      </a:solidFill>
+                    </a:lnR>
+                    <a:lnT w="3600">
+                      <a:solidFill>
+                        <a:srgbClr val="B2B2B2"/>
+                      </a:solidFill>
+                    </a:lnT>
+                    <a:lnB w="3600">
+                      <a:solidFill>
+                        <a:srgbClr val="B2B2B2"/>
+                      </a:solidFill>
+                    </a:lnB>
+                  </a:tcPr>
+                </a:tc>
+                <a:tc>
+                  <a:txBody>
+                    <a:bodyPr wrap="square" lIns="13716" rIns="13716" tIns="9144" bIns="5486"/>
                     <a:lstStyle/>
                     <a:p>
                       <a:pPr algn="l">
                         <a:lnSpc>
                           <a:spcPct val="88000"/>
                         </a:lnSpc>
-                        <a:spcBef>
-                          <a:spcPts val="0"/>
-                        </a:spcBef>
-                        <a:spcAft>
-                          <a:spcPts val="0"/>
-                        </a:spcAft>
                       </a:pPr>
                       <a:r>
-                        <a:rPr sz="430" b="0">
+                        <a:rPr sz="345" b="0">
                           <a:solidFill>
                             <a:srgbClr val="000000"/>
                           </a:solidFill>
-                          <a:latin typeface="Microsoft YaHei UI"/>
+                          <a:latin typeface="Noto Sans CJK SC"/>
                         </a:rPr>
-                        <a:t>BabyAlpha A3 本地运行 7B 交互大模型，用于对话和环境识别。</a:t>
+                        <a:t>未检索到具名大脑模型，绝影 X30 在 WAIC/黑芝麻生态材料中搭载黑芝麻芯片。</a:t>
                       </a:r>
                     </a:p>
                   </a:txBody>
-                  <a:tcPr anchor="ctr" marL="32004" marR="32004" marT="10972" marB="10972">
-                    <a:solidFill>
-                      <a:srgbClr val="FFFFFF"/>
-                    </a:solidFill>
-                    <a:lnL w="2400">
-                      <a:solidFill>
-                        <a:srgbClr val="B4C0CD"/>
-                      </a:solidFill>
-                    </a:lnL>
-                    <a:lnR w="2400">
-                      <a:solidFill>
-                        <a:srgbClr val="B4C0CD"/>
-                      </a:solidFill>
-                    </a:lnR>
-                    <a:lnT w="2400">
-                      <a:solidFill>
-                        <a:srgbClr val="B4C0CD"/>
-                      </a:solidFill>
-                    </a:lnT>
-                    <a:lnB w="2400">
-                      <a:solidFill>
-                        <a:srgbClr val="B4C0CD"/>
-                      </a:solidFill>
-                    </a:lnB>
-                  </a:tcPr>
-                </a:tc>
-                <a:tc>
-                  <a:txBody>
-                    <a:bodyPr wrap="square">
-                      <a:normAutofit/>
-                    </a:bodyPr>
+                  <a:tcPr anchor="t">
+                    <a:solidFill>
+                      <a:srgbClr val="FFFFFF"/>
+                    </a:solidFill>
+                    <a:lnL w="3600">
+                      <a:solidFill>
+                        <a:srgbClr val="B2B2B2"/>
+                      </a:solidFill>
+                    </a:lnL>
+                    <a:lnR w="3600">
+                      <a:solidFill>
+                        <a:srgbClr val="B2B2B2"/>
+                      </a:solidFill>
+                    </a:lnR>
+                    <a:lnT w="3600">
+                      <a:solidFill>
+                        <a:srgbClr val="B2B2B2"/>
+                      </a:solidFill>
+                    </a:lnT>
+                    <a:lnB w="3600">
+                      <a:solidFill>
+                        <a:srgbClr val="B2B2B2"/>
+                      </a:solidFill>
+                    </a:lnB>
+                  </a:tcPr>
+                </a:tc>
+                <a:tc>
+                  <a:txBody>
+                    <a:bodyPr wrap="square" lIns="13716" rIns="13716" tIns="9144" bIns="5486"/>
                     <a:lstStyle/>
                     <a:p>
                       <a:pPr algn="l">
                         <a:lnSpc>
                           <a:spcPct val="88000"/>
                         </a:lnSpc>
-                        <a:spcBef>
-                          <a:spcPts val="0"/>
-                        </a:spcBef>
-                        <a:spcAft>
-                          <a:spcPts val="0"/>
-                        </a:spcAft>
                       </a:pPr>
                       <a:r>
-                        <a:rPr sz="455" b="0">
+                        <a:rPr sz="345" b="0">
                           <a:solidFill>
                             <a:srgbClr val="000000"/>
                           </a:solidFill>
-                          <a:latin typeface="Microsoft YaHei UI"/>
+                          <a:latin typeface="Noto Sans CJK SC"/>
                         </a:rPr>
-                        <a:t/>
+                        <a:t>未公开具名小脑模型。</a:t>
                       </a:r>
                     </a:p>
                   </a:txBody>
-                  <a:tcPr anchor="ctr" marL="32004" marR="32004" marT="10972" marB="10972">
-                    <a:solidFill>
-                      <a:srgbClr val="FFFFFF"/>
-                    </a:solidFill>
-                    <a:lnL w="2400">
-                      <a:solidFill>
-                        <a:srgbClr val="B4C0CD"/>
-                      </a:solidFill>
-                    </a:lnL>
-                    <a:lnR w="2400">
-                      <a:solidFill>
-                        <a:srgbClr val="B4C0CD"/>
-                      </a:solidFill>
-                    </a:lnR>
-                    <a:lnT w="2400">
-                      <a:solidFill>
-                        <a:srgbClr val="B4C0CD"/>
-                      </a:solidFill>
-                    </a:lnT>
-                    <a:lnB w="2400">
-                      <a:solidFill>
-                        <a:srgbClr val="B4C0CD"/>
-                      </a:solidFill>
-                    </a:lnB>
-                  </a:tcPr>
-                </a:tc>
-                <a:tc>
-                  <a:txBody>
-                    <a:bodyPr wrap="square">
-                      <a:normAutofit/>
-                    </a:bodyPr>
+                  <a:tcPr anchor="t">
+                    <a:solidFill>
+                      <a:srgbClr val="FFFFFF"/>
+                    </a:solidFill>
+                    <a:lnL w="3600">
+                      <a:solidFill>
+                        <a:srgbClr val="B2B2B2"/>
+                      </a:solidFill>
+                    </a:lnL>
+                    <a:lnR w="3600">
+                      <a:solidFill>
+                        <a:srgbClr val="B2B2B2"/>
+                      </a:solidFill>
+                    </a:lnR>
+                    <a:lnT w="3600">
+                      <a:solidFill>
+                        <a:srgbClr val="B2B2B2"/>
+                      </a:solidFill>
+                    </a:lnT>
+                    <a:lnB w="3600">
+                      <a:solidFill>
+                        <a:srgbClr val="B2B2B2"/>
+                      </a:solidFill>
+                    </a:lnB>
+                  </a:tcPr>
+                </a:tc>
+                <a:tc>
+                  <a:txBody>
+                    <a:bodyPr wrap="square" lIns="13716" rIns="13716" tIns="9144" bIns="5486"/>
                     <a:lstStyle/>
                     <a:p>
                       <a:pPr algn="l">
                         <a:lnSpc>
                           <a:spcPct val="88000"/>
                         </a:lnSpc>
-                        <a:spcBef>
-                          <a:spcPts val="0"/>
-                        </a:spcBef>
-                        <a:spcAft>
-                          <a:spcPts val="0"/>
-                        </a:spcAft>
                       </a:pPr>
                       <a:r>
-                        <a:rPr sz="430" b="0">
+                        <a:rPr sz="345" b="0">
                           <a:solidFill>
                             <a:srgbClr val="000000"/>
                           </a:solidFill>
-                          <a:latin typeface="Microsoft YaHei UI"/>
+                          <a:latin typeface="Noto Sans CJK SC"/>
                         </a:rPr>
-                        <a:t>BabyAlpha A3 本地端侧运行，芯片型号未公开。</a:t>
+                        <a:t>黑芝麻 Aura 平台为 70 TOPS，并被列为在云深处等伙伴产品中商用。</a:t>
                       </a:r>
                     </a:p>
                   </a:txBody>
-                  <a:tcPr anchor="ctr" marL="32004" marR="32004" marT="10972" marB="10972">
-                    <a:solidFill>
-                      <a:srgbClr val="FFFFFF"/>
-                    </a:solidFill>
-                    <a:lnL w="2400">
-                      <a:solidFill>
-                        <a:srgbClr val="B4C0CD"/>
-                      </a:solidFill>
-                    </a:lnL>
-                    <a:lnR w="2400">
-                      <a:solidFill>
-                        <a:srgbClr val="B4C0CD"/>
-                      </a:solidFill>
-                    </a:lnR>
-                    <a:lnT w="2400">
-                      <a:solidFill>
-                        <a:srgbClr val="B4C0CD"/>
-                      </a:solidFill>
-                    </a:lnT>
-                    <a:lnB w="2400">
-                      <a:solidFill>
-                        <a:srgbClr val="B4C0CD"/>
-                      </a:solidFill>
-                    </a:lnB>
-                  </a:tcPr>
-                </a:tc>
-                <a:tc>
-                  <a:txBody>
-                    <a:bodyPr wrap="square">
-                      <a:normAutofit/>
-                    </a:bodyPr>
+                  <a:tcPr anchor="t">
+                    <a:solidFill>
+                      <a:srgbClr val="FFFFFF"/>
+                    </a:solidFill>
+                    <a:lnL w="3600">
+                      <a:solidFill>
+                        <a:srgbClr val="B2B2B2"/>
+                      </a:solidFill>
+                    </a:lnL>
+                    <a:lnR w="3600">
+                      <a:solidFill>
+                        <a:srgbClr val="B2B2B2"/>
+                      </a:solidFill>
+                    </a:lnR>
+                    <a:lnT w="3600">
+                      <a:solidFill>
+                        <a:srgbClr val="B2B2B2"/>
+                      </a:solidFill>
+                    </a:lnT>
+                    <a:lnB w="3600">
+                      <a:solidFill>
+                        <a:srgbClr val="B2B2B2"/>
+                      </a:solidFill>
+                    </a:lnB>
+                  </a:tcPr>
+                </a:tc>
+                <a:tc>
+                  <a:txBody>
+                    <a:bodyPr wrap="square" lIns="13716" rIns="13716" tIns="9144" bIns="5486"/>
                     <a:lstStyle/>
                     <a:p>
                       <a:pPr algn="l">
                         <a:lnSpc>
                           <a:spcPct val="88000"/>
                         </a:lnSpc>
-                        <a:spcBef>
-                          <a:spcPts val="0"/>
-                        </a:spcBef>
-                        <a:spcAft>
-                          <a:spcPts val="0"/>
-                        </a:spcAft>
+                      </a:pPr>
+                    </a:p>
+                  </a:txBody>
+                  <a:tcPr anchor="t">
+                    <a:solidFill>
+                      <a:srgbClr val="FFFFFF"/>
+                    </a:solidFill>
+                    <a:lnL w="3600">
+                      <a:solidFill>
+                        <a:srgbClr val="B2B2B2"/>
+                      </a:solidFill>
+                    </a:lnL>
+                    <a:lnR w="3600">
+                      <a:solidFill>
+                        <a:srgbClr val="B2B2B2"/>
+                      </a:solidFill>
+                    </a:lnR>
+                    <a:lnT w="3600">
+                      <a:solidFill>
+                        <a:srgbClr val="B2B2B2"/>
+                      </a:solidFill>
+                    </a:lnT>
+                    <a:lnB w="3600">
+                      <a:solidFill>
+                        <a:srgbClr val="B2B2B2"/>
+                      </a:solidFill>
+                    </a:lnB>
+                  </a:tcPr>
+                </a:tc>
+              </a:tr>
+              <a:tr h="272034">
+                <a:tc vMerge="1">
+                  <a:txBody>
+                    <a:bodyPr/>
+                    <a:lstStyle/>
+                    <a:p/>
+                  </a:txBody>
+                  <a:tcPr>
+                    <a:lnL w="3600">
+                      <a:solidFill>
+                        <a:srgbClr val="B2B2B2"/>
+                      </a:solidFill>
+                    </a:lnL>
+                    <a:lnR w="3600">
+                      <a:solidFill>
+                        <a:srgbClr val="B2B2B2"/>
+                      </a:solidFill>
+                    </a:lnR>
+                    <a:lnT w="3600">
+                      <a:solidFill>
+                        <a:srgbClr val="B2B2B2"/>
+                      </a:solidFill>
+                    </a:lnT>
+                    <a:lnB w="3600">
+                      <a:solidFill>
+                        <a:srgbClr val="B2B2B2"/>
+                      </a:solidFill>
+                    </a:lnB>
+                  </a:tcPr>
+                </a:tc>
+                <a:tc>
+                  <a:txBody>
+                    <a:bodyPr wrap="square" lIns="13716" rIns="13716" tIns="9144" bIns="5486"/>
+                    <a:lstStyle/>
+                    <a:p>
+                      <a:pPr algn="ctr">
+                        <a:lnSpc>
+                          <a:spcPct val="88000"/>
+                        </a:lnSpc>
                       </a:pPr>
                       <a:r>
-                        <a:rPr sz="430" b="0">
+                        <a:rPr sz="365" b="0">
                           <a:solidFill>
                             <a:srgbClr val="000000"/>
                           </a:solidFill>
-                          <a:latin typeface="Microsoft YaHei UI"/>
+                          <a:latin typeface="Noto Sans CJK SC"/>
                         </a:rPr>
-                        <a:t/>
+                        <a:t>星尘 Astribot</a:t>
                       </a:r>
                     </a:p>
                   </a:txBody>
-                  <a:tcPr anchor="ctr" marL="32004" marR="32004" marT="10972" marB="10972">
-                    <a:solidFill>
-                      <a:srgbClr val="FFFFFF"/>
-                    </a:solidFill>
-                    <a:lnL w="2400">
-                      <a:solidFill>
-                        <a:srgbClr val="B4C0CD"/>
-                      </a:solidFill>
-                    </a:lnL>
-                    <a:lnR w="2400">
-                      <a:solidFill>
-                        <a:srgbClr val="B4C0CD"/>
-                      </a:solidFill>
-                    </a:lnR>
-                    <a:lnT w="2400">
-                      <a:solidFill>
-                        <a:srgbClr val="B4C0CD"/>
-                      </a:solidFill>
-                    </a:lnT>
-                    <a:lnB w="2400">
-                      <a:solidFill>
-                        <a:srgbClr val="B4C0CD"/>
-                      </a:solidFill>
-                    </a:lnB>
-                  </a:tcPr>
-                </a:tc>
-              </a:tr>
-              <a:tr h="379827">
-                <a:tc rowSpan="5">
-                  <a:txBody>
-                    <a:bodyPr wrap="square">
-                      <a:normAutofit/>
-                    </a:bodyPr>
+                  <a:tcPr anchor="t">
+                    <a:solidFill>
+                      <a:srgbClr val="FFFFFF"/>
+                    </a:solidFill>
+                    <a:lnL w="3600">
+                      <a:solidFill>
+                        <a:srgbClr val="B2B2B2"/>
+                      </a:solidFill>
+                    </a:lnL>
+                    <a:lnR w="3600">
+                      <a:solidFill>
+                        <a:srgbClr val="B2B2B2"/>
+                      </a:solidFill>
+                    </a:lnR>
+                    <a:lnT w="3600">
+                      <a:solidFill>
+                        <a:srgbClr val="B2B2B2"/>
+                      </a:solidFill>
+                    </a:lnT>
+                    <a:lnB w="3600">
+                      <a:solidFill>
+                        <a:srgbClr val="B2B2B2"/>
+                      </a:solidFill>
+                    </a:lnB>
+                  </a:tcPr>
+                </a:tc>
+                <a:tc>
+                  <a:txBody>
+                    <a:bodyPr wrap="square" lIns="13716" rIns="13716" tIns="9144" bIns="5486"/>
                     <a:lstStyle/>
                     <a:p>
                       <a:pPr algn="l">
                         <a:lnSpc>
                           <a:spcPct val="88000"/>
                         </a:lnSpc>
-                        <a:spcBef>
-                          <a:spcPts val="0"/>
-                        </a:spcBef>
-                        <a:spcAft>
-                          <a:spcPts val="0"/>
-                        </a:spcAft>
                       </a:pPr>
                       <a:r>
-                        <a:rPr sz="465" b="0">
+                        <a:rPr sz="345" b="0">
                           <a:solidFill>
                             <a:srgbClr val="000000"/>
                           </a:solidFill>
-                          <a:latin typeface="Microsoft YaHei UI"/>
+                          <a:latin typeface="Noto Sans CJK SC"/>
                         </a:rPr>
-                        <a:t>端云协同/可切换：端侧处理快反应或离线兜底，云侧处理慢推理和调度。优点是兼顾低时延与强模型；缺点是依赖网络和系统编排。扩展样本 6/22，占 27.3%。</a:t>
+                        <a:t>Lumo 是自研基座模型，DuoCore-FS 是快慢异步全身 VLA，支持 3B VLM。</a:t>
                       </a:r>
                     </a:p>
                   </a:txBody>
-                  <a:tcPr anchor="ctr" marL="32004" marR="32004" marT="10972" marB="10972">
-                    <a:solidFill>
-                      <a:srgbClr val="ECF2F7"/>
-                    </a:solidFill>
-                    <a:lnL w="3200">
-                      <a:solidFill>
-                        <a:srgbClr val="AAB8C6"/>
-                      </a:solidFill>
-                    </a:lnL>
-                    <a:lnR w="3200">
-                      <a:solidFill>
-                        <a:srgbClr val="AAB8C6"/>
-                      </a:solidFill>
-                    </a:lnR>
-                    <a:lnT w="3200">
-                      <a:solidFill>
-                        <a:srgbClr val="AAB8C6"/>
-                      </a:solidFill>
-                    </a:lnT>
-                    <a:lnB w="3200">
-                      <a:solidFill>
-                        <a:srgbClr val="AAB8C6"/>
-                      </a:solidFill>
-                    </a:lnB>
-                  </a:tcPr>
-                </a:tc>
-                <a:tc>
-                  <a:txBody>
-                    <a:bodyPr wrap="square">
-                      <a:normAutofit/>
-                    </a:bodyPr>
-                    <a:lstStyle/>
-                    <a:p>
-                      <a:pPr algn="ctr">
-                        <a:lnSpc>
-                          <a:spcPct val="88000"/>
-                        </a:lnSpc>
-                        <a:spcBef>
-                          <a:spcPts val="0"/>
-                        </a:spcBef>
-                        <a:spcAft>
-                          <a:spcPts val="0"/>
-                        </a:spcAft>
+                  <a:tcPr anchor="t">
+                    <a:solidFill>
+                      <a:srgbClr val="FFFFFF"/>
+                    </a:solidFill>
+                    <a:lnL w="3600">
+                      <a:solidFill>
+                        <a:srgbClr val="B2B2B2"/>
+                      </a:solidFill>
+                    </a:lnL>
+                    <a:lnR w="3600">
+                      <a:solidFill>
+                        <a:srgbClr val="B2B2B2"/>
+                      </a:solidFill>
+                    </a:lnR>
+                    <a:lnT w="3600">
+                      <a:solidFill>
+                        <a:srgbClr val="B2B2B2"/>
+                      </a:solidFill>
+                    </a:lnT>
+                    <a:lnB w="3600">
+                      <a:solidFill>
+                        <a:srgbClr val="B2B2B2"/>
+                      </a:solidFill>
+                    </a:lnB>
+                  </a:tcPr>
+                </a:tc>
+                <a:tc>
+                  <a:txBody>
+                    <a:bodyPr wrap="square" lIns="13716" rIns="13716" tIns="9144" bIns="5486"/>
+                    <a:lstStyle/>
+                    <a:p>
+                      <a:pPr algn="l">
+                        <a:lnSpc>
+                          <a:spcPct val="88000"/>
+                        </a:lnSpc>
                       </a:pPr>
                       <a:r>
-                        <a:rPr sz="455" b="1">
+                        <a:rPr sz="345" b="0">
                           <a:solidFill>
                             <a:srgbClr val="000000"/>
                           </a:solidFill>
-                          <a:latin typeface="Microsoft YaHei UI"/>
+                          <a:latin typeface="Noto Sans CJK SC"/>
                         </a:rPr>
-                        <a:t>科大讯飞/灵境智源</a:t>
+                        <a:t>Fast pathway 负责高频动作生成，但未作为独立小脑模型披露参数。</a:t>
                       </a:r>
                     </a:p>
                   </a:txBody>
-                  <a:tcPr anchor="ctr" marL="32004" marR="32004" marT="10972" marB="10972">
-                    <a:solidFill>
-                      <a:srgbClr val="F4F7FA"/>
-                    </a:solidFill>
-                    <a:lnL w="2400">
-                      <a:solidFill>
-                        <a:srgbClr val="B4C0CD"/>
-                      </a:solidFill>
-                    </a:lnL>
-                    <a:lnR w="2400">
-                      <a:solidFill>
-                        <a:srgbClr val="B4C0CD"/>
-                      </a:solidFill>
-                    </a:lnR>
-                    <a:lnT w="2400">
-                      <a:solidFill>
-                        <a:srgbClr val="B4C0CD"/>
-                      </a:solidFill>
-                    </a:lnT>
-                    <a:lnB w="2400">
-                      <a:solidFill>
-                        <a:srgbClr val="B4C0CD"/>
-                      </a:solidFill>
-                    </a:lnB>
-                  </a:tcPr>
-                </a:tc>
-                <a:tc>
-                  <a:txBody>
-                    <a:bodyPr wrap="square">
-                      <a:normAutofit/>
-                    </a:bodyPr>
+                  <a:tcPr anchor="t">
+                    <a:solidFill>
+                      <a:srgbClr val="FFFFFF"/>
+                    </a:solidFill>
+                    <a:lnL w="3600">
+                      <a:solidFill>
+                        <a:srgbClr val="B2B2B2"/>
+                      </a:solidFill>
+                    </a:lnL>
+                    <a:lnR w="3600">
+                      <a:solidFill>
+                        <a:srgbClr val="B2B2B2"/>
+                      </a:solidFill>
+                    </a:lnR>
+                    <a:lnT w="3600">
+                      <a:solidFill>
+                        <a:srgbClr val="B2B2B2"/>
+                      </a:solidFill>
+                    </a:lnT>
+                    <a:lnB w="3600">
+                      <a:solidFill>
+                        <a:srgbClr val="B2B2B2"/>
+                      </a:solidFill>
+                    </a:lnB>
+                  </a:tcPr>
+                </a:tc>
+                <a:tc>
+                  <a:txBody>
+                    <a:bodyPr wrap="square" lIns="13716" rIns="13716" tIns="9144" bIns="5486"/>
                     <a:lstStyle/>
                     <a:p>
                       <a:pPr algn="l">
                         <a:lnSpc>
                           <a:spcPct val="88000"/>
                         </a:lnSpc>
-                        <a:spcBef>
-                          <a:spcPts val="0"/>
-                        </a:spcBef>
-                        <a:spcAft>
-                          <a:spcPts val="0"/>
-                        </a:spcAft>
                       </a:pPr>
                       <a:r>
-                        <a:rPr sz="400" b="0">
+                        <a:rPr sz="345" b="0">
                           <a:solidFill>
                             <a:srgbClr val="000000"/>
                           </a:solidFill>
-                          <a:latin typeface="Microsoft YaHei UI"/>
+                          <a:latin typeface="Noto Sans CJK SC"/>
                         </a:rPr>
-                        <a:t>讯飞机器人大脑采用 MScape N1100/MS-N1100 端侧具身智脑设备，具体大脑模型未公开。</a:t>
+                        <a:t>TurboX IRB10 最高 700 TOPS，星尘 T1 适配 RDK S100（80 TOPS）。</a:t>
                       </a:r>
                     </a:p>
                   </a:txBody>
-                  <a:tcPr anchor="ctr" marL="32004" marR="32004" marT="10972" marB="10972">
-                    <a:solidFill>
-                      <a:srgbClr val="F4F7FA"/>
-                    </a:solidFill>
-                    <a:lnL w="2400">
-                      <a:solidFill>
-                        <a:srgbClr val="B4C0CD"/>
-                      </a:solidFill>
-                    </a:lnL>
-                    <a:lnR w="2400">
-                      <a:solidFill>
-                        <a:srgbClr val="B4C0CD"/>
-                      </a:solidFill>
-                    </a:lnR>
-                    <a:lnT w="2400">
-                      <a:solidFill>
-                        <a:srgbClr val="B4C0CD"/>
-                      </a:solidFill>
-                    </a:lnT>
-                    <a:lnB w="2400">
-                      <a:solidFill>
-                        <a:srgbClr val="B4C0CD"/>
-                      </a:solidFill>
-                    </a:lnB>
-                  </a:tcPr>
-                </a:tc>
-                <a:tc>
-                  <a:txBody>
-                    <a:bodyPr wrap="square">
-                      <a:normAutofit/>
-                    </a:bodyPr>
+                  <a:tcPr anchor="t">
+                    <a:solidFill>
+                      <a:srgbClr val="FFFFFF"/>
+                    </a:solidFill>
+                    <a:lnL w="3600">
+                      <a:solidFill>
+                        <a:srgbClr val="B2B2B2"/>
+                      </a:solidFill>
+                    </a:lnL>
+                    <a:lnR w="3600">
+                      <a:solidFill>
+                        <a:srgbClr val="B2B2B2"/>
+                      </a:solidFill>
+                    </a:lnR>
+                    <a:lnT w="3600">
+                      <a:solidFill>
+                        <a:srgbClr val="B2B2B2"/>
+                      </a:solidFill>
+                    </a:lnT>
+                    <a:lnB w="3600">
+                      <a:solidFill>
+                        <a:srgbClr val="B2B2B2"/>
+                      </a:solidFill>
+                    </a:lnB>
+                  </a:tcPr>
+                </a:tc>
+                <a:tc>
+                  <a:txBody>
+                    <a:bodyPr wrap="square" lIns="13716" rIns="13716" tIns="9144" bIns="5486"/>
                     <a:lstStyle/>
                     <a:p>
                       <a:pPr algn="l">
                         <a:lnSpc>
                           <a:spcPct val="88000"/>
                         </a:lnSpc>
-                        <a:spcBef>
-                          <a:spcPts val="0"/>
-                        </a:spcBef>
-                        <a:spcAft>
-                          <a:spcPts val="0"/>
-                        </a:spcAft>
                       </a:pPr>
                       <a:r>
-                        <a:rPr sz="455" b="0">
+                        <a:rPr sz="365" b="0">
                           <a:solidFill>
                             <a:srgbClr val="000000"/>
                           </a:solidFill>
-                          <a:latin typeface="Microsoft YaHei UI"/>
+                          <a:latin typeface="Noto Sans CJK SC"/>
                         </a:rPr>
-                        <a:t>N1100 以 Xenomai 硬实时和 EtherCAT 接口支撑控制，但未公开独立小脑模型。</a:t>
+                        <a:t>DuoCore-FS 达到 30Hz 全身 action-chunk generation。</a:t>
                       </a:r>
                     </a:p>
                   </a:txBody>
-                  <a:tcPr anchor="ctr" marL="32004" marR="32004" marT="10972" marB="10972">
-                    <a:solidFill>
-                      <a:srgbClr val="F4F7FA"/>
-                    </a:solidFill>
-                    <a:lnL w="2400">
-                      <a:solidFill>
-                        <a:srgbClr val="B4C0CD"/>
-                      </a:solidFill>
-                    </a:lnL>
-                    <a:lnR w="2400">
-                      <a:solidFill>
-                        <a:srgbClr val="B4C0CD"/>
-                      </a:solidFill>
-                    </a:lnR>
-                    <a:lnT w="2400">
-                      <a:solidFill>
-                        <a:srgbClr val="B4C0CD"/>
-                      </a:solidFill>
-                    </a:lnT>
-                    <a:lnB w="2400">
-                      <a:solidFill>
-                        <a:srgbClr val="B4C0CD"/>
-                      </a:solidFill>
-                    </a:lnB>
-                  </a:tcPr>
-                </a:tc>
-                <a:tc>
-                  <a:txBody>
-                    <a:bodyPr wrap="square">
-                      <a:normAutofit/>
-                    </a:bodyPr>
-                    <a:lstStyle/>
-                    <a:p>
-                      <a:pPr algn="l">
-                        <a:lnSpc>
-                          <a:spcPct val="88000"/>
-                        </a:lnSpc>
-                        <a:spcBef>
-                          <a:spcPts val="0"/>
-                        </a:spcBef>
-                        <a:spcAft>
-                          <a:spcPts val="0"/>
-                        </a:spcAft>
+                  <a:tcPr anchor="t">
+                    <a:solidFill>
+                      <a:srgbClr val="FFFFFF"/>
+                    </a:solidFill>
+                    <a:lnL w="3600">
+                      <a:solidFill>
+                        <a:srgbClr val="B2B2B2"/>
+                      </a:solidFill>
+                    </a:lnL>
+                    <a:lnR w="3600">
+                      <a:solidFill>
+                        <a:srgbClr val="B2B2B2"/>
+                      </a:solidFill>
+                    </a:lnR>
+                    <a:lnT w="3600">
+                      <a:solidFill>
+                        <a:srgbClr val="B2B2B2"/>
+                      </a:solidFill>
+                    </a:lnT>
+                    <a:lnB w="3600">
+                      <a:solidFill>
+                        <a:srgbClr val="B2B2B2"/>
+                      </a:solidFill>
+                    </a:lnB>
+                  </a:tcPr>
+                </a:tc>
+              </a:tr>
+              <a:tr h="272034">
+                <a:tc rowSpan="6">
+                  <a:txBody>
+                    <a:bodyPr wrap="square" lIns="13716" rIns="13716" tIns="9144" bIns="5486"/>
+                    <a:lstStyle/>
+                    <a:p>
+                      <a:pPr algn="ctr">
+                        <a:lnSpc>
+                          <a:spcPct val="88000"/>
+                        </a:lnSpc>
                       </a:pPr>
                       <a:r>
-                        <a:rPr sz="400" b="0">
+                        <a:rPr sz="390" b="1">
                           <a:solidFill>
                             <a:srgbClr val="000000"/>
                           </a:solidFill>
-                          <a:latin typeface="Microsoft YaHei UI"/>
+                          <a:latin typeface="Noto Sans CJK SC"/>
                         </a:rPr>
-                        <a:t>N1100 官方披露 1000 TOPS；会场口径为可按网络切换云+端或纯端侧，核心为 Jetson T5000、可选 T4000，其中 T5000 官方规格为 2070 FP4 TFLOPS、128GB、40-130W。</a:t>
+                        <a:t>端云协同/可切换：端侧做快反应和离线兜底，云侧做慢推理和调度；兼顾能力与实时性，但依赖网络编排；6/25，占 24.0%。</a:t>
                       </a:r>
                     </a:p>
                   </a:txBody>
-                  <a:tcPr anchor="ctr" marL="32004" marR="32004" marT="10972" marB="10972">
-                    <a:solidFill>
-                      <a:srgbClr val="F4F7FA"/>
-                    </a:solidFill>
-                    <a:lnL w="2400">
-                      <a:solidFill>
-                        <a:srgbClr val="B4C0CD"/>
-                      </a:solidFill>
-                    </a:lnL>
-                    <a:lnR w="2400">
-                      <a:solidFill>
-                        <a:srgbClr val="B4C0CD"/>
-                      </a:solidFill>
-                    </a:lnR>
-                    <a:lnT w="2400">
-                      <a:solidFill>
-                        <a:srgbClr val="B4C0CD"/>
-                      </a:solidFill>
-                    </a:lnT>
-                    <a:lnB w="2400">
-                      <a:solidFill>
-                        <a:srgbClr val="B4C0CD"/>
-                      </a:solidFill>
-                    </a:lnB>
-                  </a:tcPr>
-                </a:tc>
-                <a:tc>
-                  <a:txBody>
-                    <a:bodyPr wrap="square">
-                      <a:normAutofit/>
-                    </a:bodyPr>
-                    <a:lstStyle/>
-                    <a:p>
-                      <a:pPr algn="l">
-                        <a:lnSpc>
-                          <a:spcPct val="88000"/>
-                        </a:lnSpc>
-                        <a:spcBef>
-                          <a:spcPts val="0"/>
-                        </a:spcBef>
-                        <a:spcAft>
-                          <a:spcPts val="0"/>
-                        </a:spcAft>
+                  <a:tcPr anchor="ctr">
+                    <a:solidFill>
+                      <a:srgbClr val="F2F4F6"/>
+                    </a:solidFill>
+                    <a:lnL w="3600">
+                      <a:solidFill>
+                        <a:srgbClr val="B2B2B2"/>
+                      </a:solidFill>
+                    </a:lnL>
+                    <a:lnR w="3600">
+                      <a:solidFill>
+                        <a:srgbClr val="B2B2B2"/>
+                      </a:solidFill>
+                    </a:lnR>
+                    <a:lnT w="3600">
+                      <a:solidFill>
+                        <a:srgbClr val="B2B2B2"/>
+                      </a:solidFill>
+                    </a:lnT>
+                    <a:lnB w="3600">
+                      <a:solidFill>
+                        <a:srgbClr val="B2B2B2"/>
+                      </a:solidFill>
+                    </a:lnB>
+                  </a:tcPr>
+                </a:tc>
+                <a:tc>
+                  <a:txBody>
+                    <a:bodyPr wrap="square" lIns="13716" rIns="13716" tIns="9144" bIns="5486"/>
+                    <a:lstStyle/>
+                    <a:p>
+                      <a:pPr algn="ctr">
+                        <a:lnSpc>
+                          <a:spcPct val="88000"/>
+                        </a:lnSpc>
                       </a:pPr>
                       <a:r>
-                        <a:rPr sz="400" b="0">
+                        <a:rPr sz="365" b="0">
                           <a:solidFill>
                             <a:srgbClr val="000000"/>
                           </a:solidFill>
-                          <a:latin typeface="Microsoft YaHei UI"/>
+                          <a:latin typeface="Noto Sans CJK SC"/>
                         </a:rPr>
-                        <a:t/>
+                        <a:t>科大讯飞/灵境</a:t>
                       </a:r>
                     </a:p>
                   </a:txBody>
-                  <a:tcPr anchor="ctr" marL="32004" marR="32004" marT="10972" marB="10972">
-                    <a:solidFill>
-                      <a:srgbClr val="F4F7FA"/>
-                    </a:solidFill>
-                    <a:lnL w="2400">
-                      <a:solidFill>
-                        <a:srgbClr val="B4C0CD"/>
-                      </a:solidFill>
-                    </a:lnL>
-                    <a:lnR w="2400">
-                      <a:solidFill>
-                        <a:srgbClr val="B4C0CD"/>
-                      </a:solidFill>
-                    </a:lnR>
-                    <a:lnT w="2400">
-                      <a:solidFill>
-                        <a:srgbClr val="B4C0CD"/>
-                      </a:solidFill>
-                    </a:lnT>
-                    <a:lnB w="2400">
-                      <a:solidFill>
-                        <a:srgbClr val="B4C0CD"/>
-                      </a:solidFill>
-                    </a:lnB>
-                  </a:tcPr>
-                </a:tc>
-              </a:tr>
-              <a:tr h="379827">
-                <a:tc vMerge="1">
-                  <a:txBody>
-                    <a:bodyPr wrap="square">
-                      <a:normAutofit/>
-                    </a:bodyPr>
+                  <a:tcPr anchor="t">
+                    <a:solidFill>
+                      <a:srgbClr val="FFFFFF"/>
+                    </a:solidFill>
+                    <a:lnL w="3600">
+                      <a:solidFill>
+                        <a:srgbClr val="B2B2B2"/>
+                      </a:solidFill>
+                    </a:lnL>
+                    <a:lnR w="3600">
+                      <a:solidFill>
+                        <a:srgbClr val="B2B2B2"/>
+                      </a:solidFill>
+                    </a:lnR>
+                    <a:lnT w="3600">
+                      <a:solidFill>
+                        <a:srgbClr val="B2B2B2"/>
+                      </a:solidFill>
+                    </a:lnT>
+                    <a:lnB w="3600">
+                      <a:solidFill>
+                        <a:srgbClr val="B2B2B2"/>
+                      </a:solidFill>
+                    </a:lnB>
+                  </a:tcPr>
+                </a:tc>
+                <a:tc>
+                  <a:txBody>
+                    <a:bodyPr wrap="square" lIns="13716" rIns="13716" tIns="9144" bIns="5486"/>
                     <a:lstStyle/>
                     <a:p>
                       <a:pPr algn="l">
                         <a:lnSpc>
                           <a:spcPct val="88000"/>
                         </a:lnSpc>
-                        <a:spcBef>
-                          <a:spcPts val="0"/>
-                        </a:spcBef>
-                        <a:spcAft>
-                          <a:spcPts val="0"/>
-                        </a:spcAft>
                       </a:pPr>
                       <a:r>
-                        <a:rPr sz="455" b="0">
+                        <a:rPr sz="345" b="0">
                           <a:solidFill>
                             <a:srgbClr val="000000"/>
                           </a:solidFill>
-                          <a:latin typeface="Microsoft YaHei UI"/>
+                          <a:latin typeface="Noto Sans CJK SC"/>
                         </a:rPr>
-                        <a:t/>
+                        <a:t>MScape N1100/MS-N1100 是端侧具身智脑设备，具体大脑模型未公开。</a:t>
                       </a:r>
                     </a:p>
                   </a:txBody>
-                  <a:tcPr anchor="ctr" marL="32004" marR="32004" marT="10972" marB="10972">
-                    <a:solidFill>
-                      <a:srgbClr val="FFFFFF"/>
-                    </a:solidFill>
-                    <a:lnL w="2400">
-                      <a:solidFill>
-                        <a:srgbClr val="B4C0CD"/>
-                      </a:solidFill>
-                    </a:lnL>
-                    <a:lnR w="2400">
-                      <a:solidFill>
-                        <a:srgbClr val="B4C0CD"/>
-                      </a:solidFill>
-                    </a:lnR>
-                    <a:lnT w="2400">
-                      <a:solidFill>
-                        <a:srgbClr val="B4C0CD"/>
-                      </a:solidFill>
-                    </a:lnT>
-                    <a:lnB w="2400">
-                      <a:solidFill>
-                        <a:srgbClr val="B4C0CD"/>
-                      </a:solidFill>
-                    </a:lnB>
-                  </a:tcPr>
-                </a:tc>
-                <a:tc>
-                  <a:txBody>
-                    <a:bodyPr wrap="square">
-                      <a:normAutofit/>
-                    </a:bodyPr>
-                    <a:lstStyle/>
-                    <a:p>
-                      <a:pPr algn="ctr">
-                        <a:lnSpc>
-                          <a:spcPct val="88000"/>
-                        </a:lnSpc>
-                        <a:spcBef>
-                          <a:spcPts val="0"/>
-                        </a:spcBef>
-                        <a:spcAft>
-                          <a:spcPts val="0"/>
-                        </a:spcAft>
+                  <a:tcPr anchor="t">
+                    <a:solidFill>
+                      <a:srgbClr val="FFFFFF"/>
+                    </a:solidFill>
+                    <a:lnL w="3600">
+                      <a:solidFill>
+                        <a:srgbClr val="B2B2B2"/>
+                      </a:solidFill>
+                    </a:lnL>
+                    <a:lnR w="3600">
+                      <a:solidFill>
+                        <a:srgbClr val="B2B2B2"/>
+                      </a:solidFill>
+                    </a:lnR>
+                    <a:lnT w="3600">
+                      <a:solidFill>
+                        <a:srgbClr val="B2B2B2"/>
+                      </a:solidFill>
+                    </a:lnT>
+                    <a:lnB w="3600">
+                      <a:solidFill>
+                        <a:srgbClr val="B2B2B2"/>
+                      </a:solidFill>
+                    </a:lnB>
+                  </a:tcPr>
+                </a:tc>
+                <a:tc>
+                  <a:txBody>
+                    <a:bodyPr wrap="square" lIns="13716" rIns="13716" tIns="9144" bIns="5486"/>
+                    <a:lstStyle/>
+                    <a:p>
+                      <a:pPr algn="l">
+                        <a:lnSpc>
+                          <a:spcPct val="88000"/>
+                        </a:lnSpc>
                       </a:pPr>
                       <a:r>
-                        <a:rPr sz="455" b="1">
+                        <a:rPr sz="345" b="0">
                           <a:solidFill>
                             <a:srgbClr val="000000"/>
                           </a:solidFill>
-                          <a:latin typeface="Microsoft YaHei UI"/>
+                          <a:latin typeface="Noto Sans CJK SC"/>
                         </a:rPr>
-                        <a:t>中国兵器/杭州智元</a:t>
+                        <a:t>Xenomai 硬实时和 EtherCAT 支撑控制，但未公开小脑模型。</a:t>
                       </a:r>
                     </a:p>
                   </a:txBody>
-                  <a:tcPr anchor="ctr" marL="32004" marR="32004" marT="10972" marB="10972">
-                    <a:solidFill>
-                      <a:srgbClr val="FFFFFF"/>
-                    </a:solidFill>
-                    <a:lnL w="2400">
-                      <a:solidFill>
-                        <a:srgbClr val="B4C0CD"/>
-                      </a:solidFill>
-                    </a:lnL>
-                    <a:lnR w="2400">
-                      <a:solidFill>
-                        <a:srgbClr val="B4C0CD"/>
-                      </a:solidFill>
-                    </a:lnR>
-                    <a:lnT w="2400">
-                      <a:solidFill>
-                        <a:srgbClr val="B4C0CD"/>
-                      </a:solidFill>
-                    </a:lnT>
-                    <a:lnB w="2400">
-                      <a:solidFill>
-                        <a:srgbClr val="B4C0CD"/>
-                      </a:solidFill>
-                    </a:lnB>
-                  </a:tcPr>
-                </a:tc>
-                <a:tc>
-                  <a:txBody>
-                    <a:bodyPr wrap="square">
-                      <a:normAutofit/>
-                    </a:bodyPr>
+                  <a:tcPr anchor="t">
+                    <a:solidFill>
+                      <a:srgbClr val="FFFFFF"/>
+                    </a:solidFill>
+                    <a:lnL w="3600">
+                      <a:solidFill>
+                        <a:srgbClr val="B2B2B2"/>
+                      </a:solidFill>
+                    </a:lnL>
+                    <a:lnR w="3600">
+                      <a:solidFill>
+                        <a:srgbClr val="B2B2B2"/>
+                      </a:solidFill>
+                    </a:lnR>
+                    <a:lnT w="3600">
+                      <a:solidFill>
+                        <a:srgbClr val="B2B2B2"/>
+                      </a:solidFill>
+                    </a:lnT>
+                    <a:lnB w="3600">
+                      <a:solidFill>
+                        <a:srgbClr val="B2B2B2"/>
+                      </a:solidFill>
+                    </a:lnB>
+                  </a:tcPr>
+                </a:tc>
+                <a:tc>
+                  <a:txBody>
+                    <a:bodyPr wrap="square" lIns="13716" rIns="13716" tIns="9144" bIns="5486"/>
                     <a:lstStyle/>
                     <a:p>
                       <a:pPr algn="l">
                         <a:lnSpc>
                           <a:spcPct val="88000"/>
                         </a:lnSpc>
-                        <a:spcBef>
-                          <a:spcPts val="0"/>
-                        </a:spcBef>
-                        <a:spcAft>
-                          <a:spcPts val="0"/>
-                        </a:spcAft>
                       </a:pPr>
                       <a:r>
-                        <a:rPr sz="430" b="0">
+                        <a:rPr sz="345" b="0">
                           <a:solidFill>
                             <a:srgbClr val="000000"/>
                           </a:solidFill>
-                          <a:latin typeface="Microsoft YaHei UI"/>
+                          <a:latin typeface="Noto Sans CJK SC"/>
                         </a:rPr>
-                        <a:t>具身大脑通用套件基于多模态大模型构建“感知-记忆-规划-执行-反思”自主决策闭环，模型参数未公开。</a:t>
+                        <a:t>N1100 为 1000 TOPS，Jetson T5000 为 2070 FP4 TFLOPS，T4000 为 1200 FP4 TFLOPS。</a:t>
                       </a:r>
                     </a:p>
                   </a:txBody>
-                  <a:tcPr anchor="ctr" marL="32004" marR="32004" marT="10972" marB="10972">
-                    <a:solidFill>
-                      <a:srgbClr val="FFFFFF"/>
-                    </a:solidFill>
-                    <a:lnL w="2400">
-                      <a:solidFill>
-                        <a:srgbClr val="B4C0CD"/>
-                      </a:solidFill>
-                    </a:lnL>
-                    <a:lnR w="2400">
-                      <a:solidFill>
-                        <a:srgbClr val="B4C0CD"/>
-                      </a:solidFill>
-                    </a:lnR>
-                    <a:lnT w="2400">
-                      <a:solidFill>
-                        <a:srgbClr val="B4C0CD"/>
-                      </a:solidFill>
-                    </a:lnT>
-                    <a:lnB w="2400">
-                      <a:solidFill>
-                        <a:srgbClr val="B4C0CD"/>
-                      </a:solidFill>
-                    </a:lnB>
-                  </a:tcPr>
-                </a:tc>
-                <a:tc>
-                  <a:txBody>
-                    <a:bodyPr wrap="square">
-                      <a:normAutofit/>
-                    </a:bodyPr>
+                  <a:tcPr anchor="t">
+                    <a:solidFill>
+                      <a:srgbClr val="FFFFFF"/>
+                    </a:solidFill>
+                    <a:lnL w="3600">
+                      <a:solidFill>
+                        <a:srgbClr val="B2B2B2"/>
+                      </a:solidFill>
+                    </a:lnL>
+                    <a:lnR w="3600">
+                      <a:solidFill>
+                        <a:srgbClr val="B2B2B2"/>
+                      </a:solidFill>
+                    </a:lnR>
+                    <a:lnT w="3600">
+                      <a:solidFill>
+                        <a:srgbClr val="B2B2B2"/>
+                      </a:solidFill>
+                    </a:lnT>
+                    <a:lnB w="3600">
+                      <a:solidFill>
+                        <a:srgbClr val="B2B2B2"/>
+                      </a:solidFill>
+                    </a:lnB>
+                  </a:tcPr>
+                </a:tc>
+                <a:tc>
+                  <a:txBody>
+                    <a:bodyPr wrap="square" lIns="13716" rIns="13716" tIns="9144" bIns="5486"/>
                     <a:lstStyle/>
                     <a:p>
                       <a:pPr algn="l">
                         <a:lnSpc>
                           <a:spcPct val="88000"/>
                         </a:lnSpc>
-                        <a:spcBef>
-                          <a:spcPts val="0"/>
-                        </a:spcBef>
-                        <a:spcAft>
-                          <a:spcPts val="0"/>
-                        </a:spcAft>
+                      </a:pPr>
+                    </a:p>
+                  </a:txBody>
+                  <a:tcPr anchor="t">
+                    <a:solidFill>
+                      <a:srgbClr val="FFFFFF"/>
+                    </a:solidFill>
+                    <a:lnL w="3600">
+                      <a:solidFill>
+                        <a:srgbClr val="B2B2B2"/>
+                      </a:solidFill>
+                    </a:lnL>
+                    <a:lnR w="3600">
+                      <a:solidFill>
+                        <a:srgbClr val="B2B2B2"/>
+                      </a:solidFill>
+                    </a:lnR>
+                    <a:lnT w="3600">
+                      <a:solidFill>
+                        <a:srgbClr val="B2B2B2"/>
+                      </a:solidFill>
+                    </a:lnT>
+                    <a:lnB w="3600">
+                      <a:solidFill>
+                        <a:srgbClr val="B2B2B2"/>
+                      </a:solidFill>
+                    </a:lnB>
+                  </a:tcPr>
+                </a:tc>
+              </a:tr>
+              <a:tr h="272034">
+                <a:tc vMerge="1">
+                  <a:txBody>
+                    <a:bodyPr/>
+                    <a:lstStyle/>
+                    <a:p/>
+                  </a:txBody>
+                  <a:tcPr>
+                    <a:lnL w="3600">
+                      <a:solidFill>
+                        <a:srgbClr val="B2B2B2"/>
+                      </a:solidFill>
+                    </a:lnL>
+                    <a:lnR w="3600">
+                      <a:solidFill>
+                        <a:srgbClr val="B2B2B2"/>
+                      </a:solidFill>
+                    </a:lnR>
+                    <a:lnT w="3600">
+                      <a:solidFill>
+                        <a:srgbClr val="B2B2B2"/>
+                      </a:solidFill>
+                    </a:lnT>
+                    <a:lnB w="3600">
+                      <a:solidFill>
+                        <a:srgbClr val="B2B2B2"/>
+                      </a:solidFill>
+                    </a:lnB>
+                  </a:tcPr>
+                </a:tc>
+                <a:tc>
+                  <a:txBody>
+                    <a:bodyPr wrap="square" lIns="13716" rIns="13716" tIns="9144" bIns="5486"/>
+                    <a:lstStyle/>
+                    <a:p>
+                      <a:pPr algn="ctr">
+                        <a:lnSpc>
+                          <a:spcPct val="88000"/>
+                        </a:lnSpc>
                       </a:pPr>
                       <a:r>
-                        <a:rPr sz="455" b="0">
+                        <a:rPr sz="365" b="0">
                           <a:solidFill>
                             <a:srgbClr val="000000"/>
                           </a:solidFill>
-                          <a:latin typeface="Microsoft YaHei UI"/>
+                          <a:latin typeface="Noto Sans CJK SC"/>
                         </a:rPr>
-                        <a:t/>
+                        <a:t>中国兵器/杭智</a:t>
                       </a:r>
                     </a:p>
                   </a:txBody>
-                  <a:tcPr anchor="ctr" marL="32004" marR="32004" marT="10972" marB="10972">
-                    <a:solidFill>
-                      <a:srgbClr val="FFFFFF"/>
-                    </a:solidFill>
-                    <a:lnL w="2400">
-                      <a:solidFill>
-                        <a:srgbClr val="B4C0CD"/>
-                      </a:solidFill>
-                    </a:lnL>
-                    <a:lnR w="2400">
-                      <a:solidFill>
-                        <a:srgbClr val="B4C0CD"/>
-                      </a:solidFill>
-                    </a:lnR>
-                    <a:lnT w="2400">
-                      <a:solidFill>
-                        <a:srgbClr val="B4C0CD"/>
-                      </a:solidFill>
-                    </a:lnT>
-                    <a:lnB w="2400">
-                      <a:solidFill>
-                        <a:srgbClr val="B4C0CD"/>
-                      </a:solidFill>
-                    </a:lnB>
-                  </a:tcPr>
-                </a:tc>
-                <a:tc>
-                  <a:txBody>
-                    <a:bodyPr wrap="square">
-                      <a:normAutofit/>
-                    </a:bodyPr>
+                  <a:tcPr anchor="t">
+                    <a:solidFill>
+                      <a:srgbClr val="FFFFFF"/>
+                    </a:solidFill>
+                    <a:lnL w="3600">
+                      <a:solidFill>
+                        <a:srgbClr val="B2B2B2"/>
+                      </a:solidFill>
+                    </a:lnL>
+                    <a:lnR w="3600">
+                      <a:solidFill>
+                        <a:srgbClr val="B2B2B2"/>
+                      </a:solidFill>
+                    </a:lnR>
+                    <a:lnT w="3600">
+                      <a:solidFill>
+                        <a:srgbClr val="B2B2B2"/>
+                      </a:solidFill>
+                    </a:lnT>
+                    <a:lnB w="3600">
+                      <a:solidFill>
+                        <a:srgbClr val="B2B2B2"/>
+                      </a:solidFill>
+                    </a:lnB>
+                  </a:tcPr>
+                </a:tc>
+                <a:tc>
+                  <a:txBody>
+                    <a:bodyPr wrap="square" lIns="13716" rIns="13716" tIns="9144" bIns="5486"/>
                     <a:lstStyle/>
                     <a:p>
                       <a:pPr algn="l">
                         <a:lnSpc>
                           <a:spcPct val="88000"/>
                         </a:lnSpc>
-                        <a:spcBef>
-                          <a:spcPts val="0"/>
-                        </a:spcBef>
-                        <a:spcAft>
-                          <a:spcPts val="0"/>
-                        </a:spcAft>
                       </a:pPr>
                       <a:r>
-                        <a:rPr sz="430" b="0">
+                        <a:rPr sz="345" b="0">
                           <a:solidFill>
                             <a:srgbClr val="000000"/>
                           </a:solidFill>
-                          <a:latin typeface="Microsoft YaHei UI"/>
+                          <a:latin typeface="Noto Sans CJK SC"/>
                         </a:rPr>
-                        <a:t>公开稿披露具身大脑通用套件和机动抗毁边缘云；会场观察为端侧大脑设备无网可用，但智能弱于云侧大脑。</a:t>
+                        <a:t>具身大脑通用套件基于多模态大模型构建感知、记忆、规划、执行、反思闭环，参数未公开。</a:t>
                       </a:r>
                     </a:p>
                   </a:txBody>
-                  <a:tcPr anchor="ctr" marL="32004" marR="32004" marT="10972" marB="10972">
-                    <a:solidFill>
-                      <a:srgbClr val="FFFFFF"/>
-                    </a:solidFill>
-                    <a:lnL w="2400">
-                      <a:solidFill>
-                        <a:srgbClr val="B4C0CD"/>
-                      </a:solidFill>
-                    </a:lnL>
-                    <a:lnR w="2400">
-                      <a:solidFill>
-                        <a:srgbClr val="B4C0CD"/>
-                      </a:solidFill>
-                    </a:lnR>
-                    <a:lnT w="2400">
-                      <a:solidFill>
-                        <a:srgbClr val="B4C0CD"/>
-                      </a:solidFill>
-                    </a:lnT>
-                    <a:lnB w="2400">
-                      <a:solidFill>
-                        <a:srgbClr val="B4C0CD"/>
-                      </a:solidFill>
-                    </a:lnB>
-                  </a:tcPr>
-                </a:tc>
-                <a:tc>
-                  <a:txBody>
-                    <a:bodyPr wrap="square">
-                      <a:normAutofit/>
-                    </a:bodyPr>
+                  <a:tcPr anchor="t">
+                    <a:solidFill>
+                      <a:srgbClr val="FFFFFF"/>
+                    </a:solidFill>
+                    <a:lnL w="3600">
+                      <a:solidFill>
+                        <a:srgbClr val="B2B2B2"/>
+                      </a:solidFill>
+                    </a:lnL>
+                    <a:lnR w="3600">
+                      <a:solidFill>
+                        <a:srgbClr val="B2B2B2"/>
+                      </a:solidFill>
+                    </a:lnR>
+                    <a:lnT w="3600">
+                      <a:solidFill>
+                        <a:srgbClr val="B2B2B2"/>
+                      </a:solidFill>
+                    </a:lnT>
+                    <a:lnB w="3600">
+                      <a:solidFill>
+                        <a:srgbClr val="B2B2B2"/>
+                      </a:solidFill>
+                    </a:lnB>
+                  </a:tcPr>
+                </a:tc>
+                <a:tc>
+                  <a:txBody>
+                    <a:bodyPr wrap="square" lIns="13716" rIns="13716" tIns="9144" bIns="5486"/>
                     <a:lstStyle/>
                     <a:p>
                       <a:pPr algn="l">
                         <a:lnSpc>
                           <a:spcPct val="88000"/>
                         </a:lnSpc>
-                        <a:spcBef>
-                          <a:spcPts val="0"/>
-                        </a:spcBef>
-                        <a:spcAft>
-                          <a:spcPts val="0"/>
-                        </a:spcAft>
+                      </a:pPr>
+                    </a:p>
+                  </a:txBody>
+                  <a:tcPr anchor="t">
+                    <a:solidFill>
+                      <a:srgbClr val="FFFFFF"/>
+                    </a:solidFill>
+                    <a:lnL w="3600">
+                      <a:solidFill>
+                        <a:srgbClr val="B2B2B2"/>
+                      </a:solidFill>
+                    </a:lnL>
+                    <a:lnR w="3600">
+                      <a:solidFill>
+                        <a:srgbClr val="B2B2B2"/>
+                      </a:solidFill>
+                    </a:lnR>
+                    <a:lnT w="3600">
+                      <a:solidFill>
+                        <a:srgbClr val="B2B2B2"/>
+                      </a:solidFill>
+                    </a:lnT>
+                    <a:lnB w="3600">
+                      <a:solidFill>
+                        <a:srgbClr val="B2B2B2"/>
+                      </a:solidFill>
+                    </a:lnB>
+                  </a:tcPr>
+                </a:tc>
+                <a:tc>
+                  <a:txBody>
+                    <a:bodyPr wrap="square" lIns="13716" rIns="13716" tIns="9144" bIns="5486"/>
+                    <a:lstStyle/>
+                    <a:p>
+                      <a:pPr algn="l">
+                        <a:lnSpc>
+                          <a:spcPct val="88000"/>
+                        </a:lnSpc>
                       </a:pPr>
                       <a:r>
-                        <a:rPr sz="430" b="0">
+                        <a:rPr sz="345" b="0">
                           <a:solidFill>
                             <a:srgbClr val="000000"/>
                           </a:solidFill>
-                          <a:latin typeface="Microsoft YaHei UI"/>
+                          <a:latin typeface="Noto Sans CJK SC"/>
                         </a:rPr>
-                        <a:t/>
+                        <a:t>公开稿披露具身大脑通用套件和机动抗毁边缘云，会场口径为无网可用但弱于云侧。</a:t>
                       </a:r>
                     </a:p>
                   </a:txBody>
-                  <a:tcPr anchor="ctr" marL="32004" marR="32004" marT="10972" marB="10972">
-                    <a:solidFill>
-                      <a:srgbClr val="FFFFFF"/>
-                    </a:solidFill>
-                    <a:lnL w="2400">
-                      <a:solidFill>
-                        <a:srgbClr val="B4C0CD"/>
-                      </a:solidFill>
-                    </a:lnL>
-                    <a:lnR w="2400">
-                      <a:solidFill>
-                        <a:srgbClr val="B4C0CD"/>
-                      </a:solidFill>
-                    </a:lnR>
-                    <a:lnT w="2400">
-                      <a:solidFill>
-                        <a:srgbClr val="B4C0CD"/>
-                      </a:solidFill>
-                    </a:lnT>
-                    <a:lnB w="2400">
-                      <a:solidFill>
-                        <a:srgbClr val="B4C0CD"/>
+                  <a:tcPr anchor="t">
+                    <a:solidFill>
+                      <a:srgbClr val="FFFFFF"/>
+                    </a:solidFill>
+                    <a:lnL w="3600">
+                      <a:solidFill>
+                        <a:srgbClr val="B2B2B2"/>
+                      </a:solidFill>
+                    </a:lnL>
+                    <a:lnR w="3600">
+                      <a:solidFill>
+                        <a:srgbClr val="B2B2B2"/>
+                      </a:solidFill>
+                    </a:lnR>
+                    <a:lnT w="3600">
+                      <a:solidFill>
+                        <a:srgbClr val="B2B2B2"/>
+                      </a:solidFill>
+                    </a:lnT>
+                    <a:lnB w="3600">
+                      <a:solidFill>
+                        <a:srgbClr val="B2B2B2"/>
+                      </a:solidFill>
+                    </a:lnB>
+                  </a:tcPr>
+                </a:tc>
+                <a:tc>
+                  <a:txBody>
+                    <a:bodyPr wrap="square" lIns="13716" rIns="13716" tIns="9144" bIns="5486"/>
+                    <a:lstStyle/>
+                    <a:p>
+                      <a:pPr algn="l">
+                        <a:lnSpc>
+                          <a:spcPct val="88000"/>
+                        </a:lnSpc>
+                      </a:pPr>
+                    </a:p>
+                  </a:txBody>
+                  <a:tcPr anchor="t">
+                    <a:solidFill>
+                      <a:srgbClr val="FFFFFF"/>
+                    </a:solidFill>
+                    <a:lnL w="3600">
+                      <a:solidFill>
+                        <a:srgbClr val="B2B2B2"/>
+                      </a:solidFill>
+                    </a:lnL>
+                    <a:lnR w="3600">
+                      <a:solidFill>
+                        <a:srgbClr val="B2B2B2"/>
+                      </a:solidFill>
+                    </a:lnR>
+                    <a:lnT w="3600">
+                      <a:solidFill>
+                        <a:srgbClr val="B2B2B2"/>
+                      </a:solidFill>
+                    </a:lnT>
+                    <a:lnB w="3600">
+                      <a:solidFill>
+                        <a:srgbClr val="B2B2B2"/>
                       </a:solidFill>
                     </a:lnB>
                   </a:tcPr>
                 </a:tc>
               </a:tr>
-              <a:tr h="379827">
+              <a:tr h="272034">
                 <a:tc vMerge="1">
                   <a:txBody>
-                    <a:bodyPr wrap="square">
-                      <a:normAutofit/>
-                    </a:bodyPr>
-                    <a:lstStyle/>
-                    <a:p>
-                      <a:pPr algn="l">
-                        <a:lnSpc>
-                          <a:spcPct val="88000"/>
-                        </a:lnSpc>
-                        <a:spcBef>
-                          <a:spcPts val="0"/>
-                        </a:spcBef>
-                        <a:spcAft>
-                          <a:spcPts val="0"/>
-                        </a:spcAft>
+                    <a:bodyPr/>
+                    <a:lstStyle/>
+                    <a:p/>
+                  </a:txBody>
+                  <a:tcPr>
+                    <a:lnL w="3600">
+                      <a:solidFill>
+                        <a:srgbClr val="B2B2B2"/>
+                      </a:solidFill>
+                    </a:lnL>
+                    <a:lnR w="3600">
+                      <a:solidFill>
+                        <a:srgbClr val="B2B2B2"/>
+                      </a:solidFill>
+                    </a:lnR>
+                    <a:lnT w="3600">
+                      <a:solidFill>
+                        <a:srgbClr val="B2B2B2"/>
+                      </a:solidFill>
+                    </a:lnT>
+                    <a:lnB w="3600">
+                      <a:solidFill>
+                        <a:srgbClr val="B2B2B2"/>
+                      </a:solidFill>
+                    </a:lnB>
+                  </a:tcPr>
+                </a:tc>
+                <a:tc>
+                  <a:txBody>
+                    <a:bodyPr wrap="square" lIns="13716" rIns="13716" tIns="9144" bIns="5486"/>
+                    <a:lstStyle/>
+                    <a:p>
+                      <a:pPr algn="ctr">
+                        <a:lnSpc>
+                          <a:spcPct val="88000"/>
+                        </a:lnSpc>
                       </a:pPr>
                       <a:r>
-                        <a:rPr sz="455" b="0">
+                        <a:rPr sz="365" b="0">
                           <a:solidFill>
                             <a:srgbClr val="000000"/>
                           </a:solidFill>
-                          <a:latin typeface="Microsoft YaHei UI"/>
+                          <a:latin typeface="Noto Sans CJK SC"/>
                         </a:rPr>
-                        <a:t/>
+                        <a:t>优必选 UBTECH</a:t>
                       </a:r>
                     </a:p>
                   </a:txBody>
-                  <a:tcPr anchor="ctr" marL="32004" marR="32004" marT="10972" marB="10972">
-                    <a:solidFill>
-                      <a:srgbClr val="F4F7FA"/>
-                    </a:solidFill>
-                    <a:lnL w="2400">
-                      <a:solidFill>
-                        <a:srgbClr val="B4C0CD"/>
-                      </a:solidFill>
-                    </a:lnL>
-                    <a:lnR w="2400">
-                      <a:solidFill>
-                        <a:srgbClr val="B4C0CD"/>
-                      </a:solidFill>
-                    </a:lnR>
-                    <a:lnT w="2400">
-                      <a:solidFill>
-                        <a:srgbClr val="B4C0CD"/>
-                      </a:solidFill>
-                    </a:lnT>
-                    <a:lnB w="2400">
-                      <a:solidFill>
-                        <a:srgbClr val="B4C0CD"/>
-                      </a:solidFill>
-                    </a:lnB>
-                  </a:tcPr>
-                </a:tc>
-                <a:tc>
-                  <a:txBody>
-                    <a:bodyPr wrap="square">
-                      <a:normAutofit/>
-                    </a:bodyPr>
-                    <a:lstStyle/>
-                    <a:p>
-                      <a:pPr algn="ctr">
-                        <a:lnSpc>
-                          <a:spcPct val="88000"/>
-                        </a:lnSpc>
-                        <a:spcBef>
-                          <a:spcPts val="0"/>
-                        </a:spcBef>
-                        <a:spcAft>
-                          <a:spcPts val="0"/>
-                        </a:spcAft>
+                  <a:tcPr anchor="t">
+                    <a:solidFill>
+                      <a:srgbClr val="FFFFFF"/>
+                    </a:solidFill>
+                    <a:lnL w="3600">
+                      <a:solidFill>
+                        <a:srgbClr val="B2B2B2"/>
+                      </a:solidFill>
+                    </a:lnL>
+                    <a:lnR w="3600">
+                      <a:solidFill>
+                        <a:srgbClr val="B2B2B2"/>
+                      </a:solidFill>
+                    </a:lnR>
+                    <a:lnT w="3600">
+                      <a:solidFill>
+                        <a:srgbClr val="B2B2B2"/>
+                      </a:solidFill>
+                    </a:lnT>
+                    <a:lnB w="3600">
+                      <a:solidFill>
+                        <a:srgbClr val="B2B2B2"/>
+                      </a:solidFill>
+                    </a:lnB>
+                  </a:tcPr>
+                </a:tc>
+                <a:tc>
+                  <a:txBody>
+                    <a:bodyPr wrap="square" lIns="13716" rIns="13716" tIns="9144" bIns="5486"/>
+                    <a:lstStyle/>
+                    <a:p>
+                      <a:pPr algn="l">
+                        <a:lnSpc>
+                          <a:spcPct val="88000"/>
+                        </a:lnSpc>
                       </a:pPr>
                       <a:r>
-                        <a:rPr sz="455" b="1">
+                        <a:rPr sz="345" b="0">
                           <a:solidFill>
                             <a:srgbClr val="000000"/>
                           </a:solidFill>
-                          <a:latin typeface="Microsoft YaHei UI"/>
+                          <a:latin typeface="Noto Sans CJK SC"/>
                         </a:rPr>
-                        <a:t>优必选 UBTECH</a:t>
+                        <a:t>Thinker 最大 100B，Thinker-VLA 负责动作执行，Thinker-WM 是世界模型。</a:t>
                       </a:r>
                     </a:p>
                   </a:txBody>
-                  <a:tcPr anchor="ctr" marL="32004" marR="32004" marT="10972" marB="10972">
-                    <a:solidFill>
-                      <a:srgbClr val="F4F7FA"/>
-                    </a:solidFill>
-                    <a:lnL w="2400">
-                      <a:solidFill>
-                        <a:srgbClr val="B4C0CD"/>
-                      </a:solidFill>
-                    </a:lnL>
-                    <a:lnR w="2400">
-                      <a:solidFill>
-                        <a:srgbClr val="B4C0CD"/>
-                      </a:solidFill>
-                    </a:lnR>
-                    <a:lnT w="2400">
-                      <a:solidFill>
-                        <a:srgbClr val="B4C0CD"/>
-                      </a:solidFill>
-                    </a:lnT>
-                    <a:lnB w="2400">
-                      <a:solidFill>
-                        <a:srgbClr val="B4C0CD"/>
-                      </a:solidFill>
-                    </a:lnB>
-                  </a:tcPr>
-                </a:tc>
-                <a:tc>
-                  <a:txBody>
-                    <a:bodyPr wrap="square">
-                      <a:normAutofit/>
-                    </a:bodyPr>
+                  <a:tcPr anchor="t">
+                    <a:solidFill>
+                      <a:srgbClr val="FFFFFF"/>
+                    </a:solidFill>
+                    <a:lnL w="3600">
+                      <a:solidFill>
+                        <a:srgbClr val="B2B2B2"/>
+                      </a:solidFill>
+                    </a:lnL>
+                    <a:lnR w="3600">
+                      <a:solidFill>
+                        <a:srgbClr val="B2B2B2"/>
+                      </a:solidFill>
+                    </a:lnR>
+                    <a:lnT w="3600">
+                      <a:solidFill>
+                        <a:srgbClr val="B2B2B2"/>
+                      </a:solidFill>
+                    </a:lnT>
+                    <a:lnB w="3600">
+                      <a:solidFill>
+                        <a:srgbClr val="B2B2B2"/>
+                      </a:solidFill>
+                    </a:lnB>
+                  </a:tcPr>
+                </a:tc>
+                <a:tc>
+                  <a:txBody>
+                    <a:bodyPr wrap="square" lIns="13716" rIns="13716" tIns="9144" bIns="5486"/>
                     <a:lstStyle/>
                     <a:p>
                       <a:pPr algn="l">
                         <a:lnSpc>
                           <a:spcPct val="88000"/>
                         </a:lnSpc>
-                        <a:spcBef>
-                          <a:spcPts val="0"/>
-                        </a:spcBef>
-                        <a:spcAft>
-                          <a:spcPts val="0"/>
-                        </a:spcAft>
+                      </a:pPr>
+                    </a:p>
+                  </a:txBody>
+                  <a:tcPr anchor="t">
+                    <a:solidFill>
+                      <a:srgbClr val="FFFFFF"/>
+                    </a:solidFill>
+                    <a:lnL w="3600">
+                      <a:solidFill>
+                        <a:srgbClr val="B2B2B2"/>
+                      </a:solidFill>
+                    </a:lnL>
+                    <a:lnR w="3600">
+                      <a:solidFill>
+                        <a:srgbClr val="B2B2B2"/>
+                      </a:solidFill>
+                    </a:lnR>
+                    <a:lnT w="3600">
+                      <a:solidFill>
+                        <a:srgbClr val="B2B2B2"/>
+                      </a:solidFill>
+                    </a:lnT>
+                    <a:lnB w="3600">
+                      <a:solidFill>
+                        <a:srgbClr val="B2B2B2"/>
+                      </a:solidFill>
+                    </a:lnB>
+                  </a:tcPr>
+                </a:tc>
+                <a:tc>
+                  <a:txBody>
+                    <a:bodyPr wrap="square" lIns="13716" rIns="13716" tIns="9144" bIns="5486"/>
+                    <a:lstStyle/>
+                    <a:p>
+                      <a:pPr algn="l">
+                        <a:lnSpc>
+                          <a:spcPct val="88000"/>
+                        </a:lnSpc>
                       </a:pPr>
                       <a:r>
-                        <a:rPr sz="430" b="0">
+                        <a:rPr sz="345" b="0">
                           <a:solidFill>
                             <a:srgbClr val="000000"/>
                           </a:solidFill>
-                          <a:latin typeface="Microsoft YaHei UI"/>
+                          <a:latin typeface="Noto Sans CJK SC"/>
                         </a:rPr>
-                        <a:t>Thinker 是最大 100B 的具身基座模型，Thinker-VLA 负责动作执行，Thinker-WM 是世界模型。</a:t>
+                        <a:t>端侧承担高实时能力，云端承担慢推理和多机调度，VLA 显存需求由 64GB 优化至 32GB。</a:t>
                       </a:r>
                     </a:p>
                   </a:txBody>
-                  <a:tcPr anchor="ctr" marL="32004" marR="32004" marT="10972" marB="10972">
-                    <a:solidFill>
-                      <a:srgbClr val="F4F7FA"/>
-                    </a:solidFill>
-                    <a:lnL w="2400">
-                      <a:solidFill>
-                        <a:srgbClr val="B4C0CD"/>
-                      </a:solidFill>
-                    </a:lnL>
-                    <a:lnR w="2400">
-                      <a:solidFill>
-                        <a:srgbClr val="B4C0CD"/>
-                      </a:solidFill>
-                    </a:lnR>
-                    <a:lnT w="2400">
-                      <a:solidFill>
-                        <a:srgbClr val="B4C0CD"/>
-                      </a:solidFill>
-                    </a:lnT>
-                    <a:lnB w="2400">
-                      <a:solidFill>
-                        <a:srgbClr val="B4C0CD"/>
-                      </a:solidFill>
-                    </a:lnB>
-                  </a:tcPr>
-                </a:tc>
-                <a:tc>
-                  <a:txBody>
-                    <a:bodyPr wrap="square">
-                      <a:normAutofit/>
-                    </a:bodyPr>
+                  <a:tcPr anchor="t">
+                    <a:solidFill>
+                      <a:srgbClr val="FFFFFF"/>
+                    </a:solidFill>
+                    <a:lnL w="3600">
+                      <a:solidFill>
+                        <a:srgbClr val="B2B2B2"/>
+                      </a:solidFill>
+                    </a:lnL>
+                    <a:lnR w="3600">
+                      <a:solidFill>
+                        <a:srgbClr val="B2B2B2"/>
+                      </a:solidFill>
+                    </a:lnR>
+                    <a:lnT w="3600">
+                      <a:solidFill>
+                        <a:srgbClr val="B2B2B2"/>
+                      </a:solidFill>
+                    </a:lnT>
+                    <a:lnB w="3600">
+                      <a:solidFill>
+                        <a:srgbClr val="B2B2B2"/>
+                      </a:solidFill>
+                    </a:lnB>
+                  </a:tcPr>
+                </a:tc>
+                <a:tc>
+                  <a:txBody>
+                    <a:bodyPr wrap="square" lIns="13716" rIns="13716" tIns="9144" bIns="5486"/>
                     <a:lstStyle/>
                     <a:p>
                       <a:pPr algn="l">
                         <a:lnSpc>
                           <a:spcPct val="88000"/>
                         </a:lnSpc>
-                        <a:spcBef>
-                          <a:spcPts val="0"/>
-                        </a:spcBef>
-                        <a:spcAft>
-                          <a:spcPts val="0"/>
-                        </a:spcAft>
                       </a:pPr>
                       <a:r>
-                        <a:rPr sz="455" b="0">
+                        <a:rPr sz="365" b="0">
                           <a:solidFill>
                             <a:srgbClr val="000000"/>
                           </a:solidFill>
-                          <a:latin typeface="Microsoft YaHei UI"/>
+                          <a:latin typeface="Noto Sans CJK SC"/>
                         </a:rPr>
-                        <a:t/>
+                        <a:t>VLA 推理效率提升 176%。</a:t>
                       </a:r>
                     </a:p>
                   </a:txBody>
-                  <a:tcPr anchor="ctr" marL="32004" marR="32004" marT="10972" marB="10972">
-                    <a:solidFill>
-                      <a:srgbClr val="F4F7FA"/>
-                    </a:solidFill>
-                    <a:lnL w="2400">
-                      <a:solidFill>
-                        <a:srgbClr val="B4C0CD"/>
-                      </a:solidFill>
-                    </a:lnL>
-                    <a:lnR w="2400">
-                      <a:solidFill>
-                        <a:srgbClr val="B4C0CD"/>
-                      </a:solidFill>
-                    </a:lnR>
-                    <a:lnT w="2400">
-                      <a:solidFill>
-                        <a:srgbClr val="B4C0CD"/>
-                      </a:solidFill>
-                    </a:lnT>
-                    <a:lnB w="2400">
-                      <a:solidFill>
-                        <a:srgbClr val="B4C0CD"/>
-                      </a:solidFill>
-                    </a:lnB>
-                  </a:tcPr>
-                </a:tc>
-                <a:tc>
-                  <a:txBody>
-                    <a:bodyPr wrap="square">
-                      <a:normAutofit/>
-                    </a:bodyPr>
-                    <a:lstStyle/>
-                    <a:p>
-                      <a:pPr algn="l">
-                        <a:lnSpc>
-                          <a:spcPct val="88000"/>
-                        </a:lnSpc>
-                        <a:spcBef>
-                          <a:spcPts val="0"/>
-                        </a:spcBef>
-                        <a:spcAft>
-                          <a:spcPts val="0"/>
-                        </a:spcAft>
+                  <a:tcPr anchor="t">
+                    <a:solidFill>
+                      <a:srgbClr val="FFFFFF"/>
+                    </a:solidFill>
+                    <a:lnL w="3600">
+                      <a:solidFill>
+                        <a:srgbClr val="B2B2B2"/>
+                      </a:solidFill>
+                    </a:lnL>
+                    <a:lnR w="3600">
+                      <a:solidFill>
+                        <a:srgbClr val="B2B2B2"/>
+                      </a:solidFill>
+                    </a:lnR>
+                    <a:lnT w="3600">
+                      <a:solidFill>
+                        <a:srgbClr val="B2B2B2"/>
+                      </a:solidFill>
+                    </a:lnT>
+                    <a:lnB w="3600">
+                      <a:solidFill>
+                        <a:srgbClr val="B2B2B2"/>
+                      </a:solidFill>
+                    </a:lnB>
+                  </a:tcPr>
+                </a:tc>
+              </a:tr>
+              <a:tr h="272034">
+                <a:tc vMerge="1">
+                  <a:txBody>
+                    <a:bodyPr/>
+                    <a:lstStyle/>
+                    <a:p/>
+                  </a:txBody>
+                  <a:tcPr>
+                    <a:lnL w="3600">
+                      <a:solidFill>
+                        <a:srgbClr val="B2B2B2"/>
+                      </a:solidFill>
+                    </a:lnL>
+                    <a:lnR w="3600">
+                      <a:solidFill>
+                        <a:srgbClr val="B2B2B2"/>
+                      </a:solidFill>
+                    </a:lnR>
+                    <a:lnT w="3600">
+                      <a:solidFill>
+                        <a:srgbClr val="B2B2B2"/>
+                      </a:solidFill>
+                    </a:lnT>
+                    <a:lnB w="3600">
+                      <a:solidFill>
+                        <a:srgbClr val="B2B2B2"/>
+                      </a:solidFill>
+                    </a:lnB>
+                  </a:tcPr>
+                </a:tc>
+                <a:tc>
+                  <a:txBody>
+                    <a:bodyPr wrap="square" lIns="13716" rIns="13716" tIns="9144" bIns="5486"/>
+                    <a:lstStyle/>
+                    <a:p>
+                      <a:pPr algn="ctr">
+                        <a:lnSpc>
+                          <a:spcPct val="88000"/>
+                        </a:lnSpc>
                       </a:pPr>
                       <a:r>
-                        <a:rPr sz="430" b="0">
+                        <a:rPr sz="365" b="0">
                           <a:solidFill>
                             <a:srgbClr val="000000"/>
                           </a:solidFill>
-                          <a:latin typeface="Microsoft YaHei UI"/>
+                          <a:latin typeface="Noto Sans CJK SC"/>
                         </a:rPr>
-                        <a:t>优必选将高实时能力放在端侧，云端承担慢推理、多机调度和模型管理；VLA 端侧显存需求从 64GB 优化至 32GB。</a:t>
+                        <a:t>智元 AGIBOT</a:t>
                       </a:r>
                     </a:p>
                   </a:txBody>
-                  <a:tcPr anchor="ctr" marL="32004" marR="32004" marT="10972" marB="10972">
-                    <a:solidFill>
-                      <a:srgbClr val="F4F7FA"/>
-                    </a:solidFill>
-                    <a:lnL w="2400">
-                      <a:solidFill>
-                        <a:srgbClr val="B4C0CD"/>
-                      </a:solidFill>
-                    </a:lnL>
-                    <a:lnR w="2400">
-                      <a:solidFill>
-                        <a:srgbClr val="B4C0CD"/>
-                      </a:solidFill>
-                    </a:lnR>
-                    <a:lnT w="2400">
-                      <a:solidFill>
-                        <a:srgbClr val="B4C0CD"/>
-                      </a:solidFill>
-                    </a:lnT>
-                    <a:lnB w="2400">
-                      <a:solidFill>
-                        <a:srgbClr val="B4C0CD"/>
-                      </a:solidFill>
-                    </a:lnB>
-                  </a:tcPr>
-                </a:tc>
-                <a:tc>
-                  <a:txBody>
-                    <a:bodyPr wrap="square">
-                      <a:normAutofit/>
-                    </a:bodyPr>
+                  <a:tcPr anchor="t">
+                    <a:solidFill>
+                      <a:srgbClr val="FFFFFF"/>
+                    </a:solidFill>
+                    <a:lnL w="3600">
+                      <a:solidFill>
+                        <a:srgbClr val="B2B2B2"/>
+                      </a:solidFill>
+                    </a:lnL>
+                    <a:lnR w="3600">
+                      <a:solidFill>
+                        <a:srgbClr val="B2B2B2"/>
+                      </a:solidFill>
+                    </a:lnR>
+                    <a:lnT w="3600">
+                      <a:solidFill>
+                        <a:srgbClr val="B2B2B2"/>
+                      </a:solidFill>
+                    </a:lnT>
+                    <a:lnB w="3600">
+                      <a:solidFill>
+                        <a:srgbClr val="B2B2B2"/>
+                      </a:solidFill>
+                    </a:lnB>
+                  </a:tcPr>
+                </a:tc>
+                <a:tc>
+                  <a:txBody>
+                    <a:bodyPr wrap="square" lIns="13716" rIns="13716" tIns="9144" bIns="5486"/>
                     <a:lstStyle/>
                     <a:p>
                       <a:pPr algn="l">
                         <a:lnSpc>
                           <a:spcPct val="88000"/>
                         </a:lnSpc>
-                        <a:spcBef>
-                          <a:spcPts val="0"/>
-                        </a:spcBef>
-                        <a:spcAft>
-                          <a:spcPts val="0"/>
-                        </a:spcAft>
                       </a:pPr>
                       <a:r>
-                        <a:rPr sz="430" b="0">
+                        <a:rPr sz="345" b="0">
                           <a:solidFill>
                             <a:srgbClr val="000000"/>
                           </a:solidFill>
-                          <a:latin typeface="Microsoft YaHei UI"/>
+                          <a:latin typeface="Noto Sans CJK SC"/>
                         </a:rPr>
-                        <a:t>VLA 推理效率提升 176%。</a:t>
+                        <a:t>GO-1/GO-2 是具身基座模型，GE-2 是世界模型，Genie Evolver 是闭环真机强化学习系统。</a:t>
                       </a:r>
                     </a:p>
                   </a:txBody>
-                  <a:tcPr anchor="ctr" marL="32004" marR="32004" marT="10972" marB="10972">
-                    <a:solidFill>
-                      <a:srgbClr val="F4F7FA"/>
-                    </a:solidFill>
-                    <a:lnL w="2400">
-                      <a:solidFill>
-                        <a:srgbClr val="B4C0CD"/>
-                      </a:solidFill>
-                    </a:lnL>
-                    <a:lnR w="2400">
-                      <a:solidFill>
-                        <a:srgbClr val="B4C0CD"/>
-                      </a:solidFill>
-                    </a:lnR>
-                    <a:lnT w="2400">
-                      <a:solidFill>
-                        <a:srgbClr val="B4C0CD"/>
-                      </a:solidFill>
-                    </a:lnT>
-                    <a:lnB w="2400">
-                      <a:solidFill>
-                        <a:srgbClr val="B4C0CD"/>
-                      </a:solidFill>
-                    </a:lnB>
-                  </a:tcPr>
-                </a:tc>
-              </a:tr>
-              <a:tr h="379827">
-                <a:tc vMerge="1">
-                  <a:txBody>
-                    <a:bodyPr wrap="square">
-                      <a:normAutofit/>
-                    </a:bodyPr>
+                  <a:tcPr anchor="t">
+                    <a:solidFill>
+                      <a:srgbClr val="FFFFFF"/>
+                    </a:solidFill>
+                    <a:lnL w="3600">
+                      <a:solidFill>
+                        <a:srgbClr val="B2B2B2"/>
+                      </a:solidFill>
+                    </a:lnL>
+                    <a:lnR w="3600">
+                      <a:solidFill>
+                        <a:srgbClr val="B2B2B2"/>
+                      </a:solidFill>
+                    </a:lnR>
+                    <a:lnT w="3600">
+                      <a:solidFill>
+                        <a:srgbClr val="B2B2B2"/>
+                      </a:solidFill>
+                    </a:lnT>
+                    <a:lnB w="3600">
+                      <a:solidFill>
+                        <a:srgbClr val="B2B2B2"/>
+                      </a:solidFill>
+                    </a:lnB>
+                  </a:tcPr>
+                </a:tc>
+                <a:tc>
+                  <a:txBody>
+                    <a:bodyPr wrap="square" lIns="13716" rIns="13716" tIns="9144" bIns="5486"/>
                     <a:lstStyle/>
                     <a:p>
                       <a:pPr algn="l">
                         <a:lnSpc>
                           <a:spcPct val="88000"/>
                         </a:lnSpc>
-                        <a:spcBef>
-                          <a:spcPts val="0"/>
-                        </a:spcBef>
-                        <a:spcAft>
-                          <a:spcPts val="0"/>
-                        </a:spcAft>
                       </a:pPr>
                       <a:r>
-                        <a:rPr sz="455" b="0">
+                        <a:rPr sz="345" b="0">
                           <a:solidFill>
                             <a:srgbClr val="000000"/>
                           </a:solidFill>
-                          <a:latin typeface="Microsoft YaHei UI"/>
+                          <a:latin typeface="Noto Sans CJK SC"/>
                         </a:rPr>
-                        <a:t/>
+                        <a:t>Action Expert 负责精细动作执行，参数未公开。</a:t>
                       </a:r>
                     </a:p>
                   </a:txBody>
-                  <a:tcPr anchor="ctr" marL="32004" marR="32004" marT="10972" marB="10972">
-                    <a:solidFill>
-                      <a:srgbClr val="FFFFFF"/>
-                    </a:solidFill>
-                    <a:lnL w="2400">
-                      <a:solidFill>
-                        <a:srgbClr val="B4C0CD"/>
-                      </a:solidFill>
-                    </a:lnL>
-                    <a:lnR w="2400">
-                      <a:solidFill>
-                        <a:srgbClr val="B4C0CD"/>
-                      </a:solidFill>
-                    </a:lnR>
-                    <a:lnT w="2400">
-                      <a:solidFill>
-                        <a:srgbClr val="B4C0CD"/>
-                      </a:solidFill>
-                    </a:lnT>
-                    <a:lnB w="2400">
-                      <a:solidFill>
-                        <a:srgbClr val="B4C0CD"/>
-                      </a:solidFill>
-                    </a:lnB>
-                  </a:tcPr>
-                </a:tc>
-                <a:tc>
-                  <a:txBody>
-                    <a:bodyPr wrap="square">
-                      <a:normAutofit/>
-                    </a:bodyPr>
-                    <a:lstStyle/>
-                    <a:p>
-                      <a:pPr algn="ctr">
-                        <a:lnSpc>
-                          <a:spcPct val="88000"/>
-                        </a:lnSpc>
-                        <a:spcBef>
-                          <a:spcPts val="0"/>
-                        </a:spcBef>
-                        <a:spcAft>
-                          <a:spcPts val="0"/>
-                        </a:spcAft>
+                  <a:tcPr anchor="t">
+                    <a:solidFill>
+                      <a:srgbClr val="FFFFFF"/>
+                    </a:solidFill>
+                    <a:lnL w="3600">
+                      <a:solidFill>
+                        <a:srgbClr val="B2B2B2"/>
+                      </a:solidFill>
+                    </a:lnL>
+                    <a:lnR w="3600">
+                      <a:solidFill>
+                        <a:srgbClr val="B2B2B2"/>
+                      </a:solidFill>
+                    </a:lnR>
+                    <a:lnT w="3600">
+                      <a:solidFill>
+                        <a:srgbClr val="B2B2B2"/>
+                      </a:solidFill>
+                    </a:lnT>
+                    <a:lnB w="3600">
+                      <a:solidFill>
+                        <a:srgbClr val="B2B2B2"/>
+                      </a:solidFill>
+                    </a:lnB>
+                  </a:tcPr>
+                </a:tc>
+                <a:tc>
+                  <a:txBody>
+                    <a:bodyPr wrap="square" lIns="13716" rIns="13716" tIns="9144" bIns="5486"/>
+                    <a:lstStyle/>
+                    <a:p>
+                      <a:pPr algn="l">
+                        <a:lnSpc>
+                          <a:spcPct val="88000"/>
+                        </a:lnSpc>
                       </a:pPr>
                       <a:r>
-                        <a:rPr sz="455" b="1">
+                        <a:rPr sz="345" b="0">
                           <a:solidFill>
                             <a:srgbClr val="000000"/>
                           </a:solidFill>
-                          <a:latin typeface="Microsoft YaHei UI"/>
+                          <a:latin typeface="Noto Sans CJK SC"/>
                         </a:rPr>
-                        <a:t>智元机器人 AGIBOT</a:t>
+                        <a:t>A3 Ultra 公开披露 700 TOPS 端侧具身处理器。</a:t>
                       </a:r>
                     </a:p>
                   </a:txBody>
-                  <a:tcPr anchor="ctr" marL="32004" marR="32004" marT="10972" marB="10972">
-                    <a:solidFill>
-                      <a:srgbClr val="FFFFFF"/>
-                    </a:solidFill>
-                    <a:lnL w="2400">
-                      <a:solidFill>
-                        <a:srgbClr val="B4C0CD"/>
-                      </a:solidFill>
-                    </a:lnL>
-                    <a:lnR w="2400">
-                      <a:solidFill>
-                        <a:srgbClr val="B4C0CD"/>
-                      </a:solidFill>
-                    </a:lnR>
-                    <a:lnT w="2400">
-                      <a:solidFill>
-                        <a:srgbClr val="B4C0CD"/>
-                      </a:solidFill>
-                    </a:lnT>
-                    <a:lnB w="2400">
-                      <a:solidFill>
-                        <a:srgbClr val="B4C0CD"/>
-                      </a:solidFill>
-                    </a:lnB>
-                  </a:tcPr>
-                </a:tc>
-                <a:tc>
-                  <a:txBody>
-                    <a:bodyPr wrap="square">
-                      <a:normAutofit/>
-                    </a:bodyPr>
+                  <a:tcPr anchor="t">
+                    <a:solidFill>
+                      <a:srgbClr val="FFFFFF"/>
+                    </a:solidFill>
+                    <a:lnL w="3600">
+                      <a:solidFill>
+                        <a:srgbClr val="B2B2B2"/>
+                      </a:solidFill>
+                    </a:lnL>
+                    <a:lnR w="3600">
+                      <a:solidFill>
+                        <a:srgbClr val="B2B2B2"/>
+                      </a:solidFill>
+                    </a:lnR>
+                    <a:lnT w="3600">
+                      <a:solidFill>
+                        <a:srgbClr val="B2B2B2"/>
+                      </a:solidFill>
+                    </a:lnT>
+                    <a:lnB w="3600">
+                      <a:solidFill>
+                        <a:srgbClr val="B2B2B2"/>
+                      </a:solidFill>
+                    </a:lnB>
+                  </a:tcPr>
+                </a:tc>
+                <a:tc>
+                  <a:txBody>
+                    <a:bodyPr wrap="square" lIns="13716" rIns="13716" tIns="9144" bIns="5486"/>
                     <a:lstStyle/>
                     <a:p>
                       <a:pPr algn="l">
                         <a:lnSpc>
                           <a:spcPct val="88000"/>
                         </a:lnSpc>
-                        <a:spcBef>
-                          <a:spcPts val="0"/>
-                        </a:spcBef>
-                        <a:spcAft>
-                          <a:spcPts val="0"/>
-                        </a:spcAft>
                       </a:pPr>
                       <a:r>
-                        <a:rPr sz="430" b="0">
+                        <a:rPr sz="365" b="0">
                           <a:solidFill>
                             <a:srgbClr val="000000"/>
                           </a:solidFill>
-                          <a:latin typeface="Microsoft YaHei UI"/>
+                          <a:latin typeface="Noto Sans CJK SC"/>
                         </a:rPr>
-                        <a:t>GO-1/GO-2 是具身基座模型，GE-2 是世界模型，Genie Evolver 1.0 是闭环真机强化学习系统，参数未公开。</a:t>
+                        <a:t>二手口径称 GO-1/GO-2 可在边缘端 10-20Hz 推理。</a:t>
                       </a:r>
                     </a:p>
                   </a:txBody>
-                  <a:tcPr anchor="ctr" marL="32004" marR="32004" marT="10972" marB="10972">
-                    <a:solidFill>
-                      <a:srgbClr val="FFFFFF"/>
-                    </a:solidFill>
-                    <a:lnL w="2400">
-                      <a:solidFill>
-                        <a:srgbClr val="B4C0CD"/>
-                      </a:solidFill>
-                    </a:lnL>
-                    <a:lnR w="2400">
-                      <a:solidFill>
-                        <a:srgbClr val="B4C0CD"/>
-                      </a:solidFill>
-                    </a:lnR>
-                    <a:lnT w="2400">
-                      <a:solidFill>
-                        <a:srgbClr val="B4C0CD"/>
-                      </a:solidFill>
-                    </a:lnT>
-                    <a:lnB w="2400">
-                      <a:solidFill>
-                        <a:srgbClr val="B4C0CD"/>
-                      </a:solidFill>
-                    </a:lnB>
-                  </a:tcPr>
-                </a:tc>
-                <a:tc>
-                  <a:txBody>
-                    <a:bodyPr wrap="square">
-                      <a:normAutofit/>
-                    </a:bodyPr>
-                    <a:lstStyle/>
-                    <a:p>
-                      <a:pPr algn="l">
-                        <a:lnSpc>
-                          <a:spcPct val="88000"/>
-                        </a:lnSpc>
-                        <a:spcBef>
-                          <a:spcPts val="0"/>
-                        </a:spcBef>
-                        <a:spcAft>
-                          <a:spcPts val="0"/>
-                        </a:spcAft>
+                  <a:tcPr anchor="t">
+                    <a:solidFill>
+                      <a:srgbClr val="FFFFFF"/>
+                    </a:solidFill>
+                    <a:lnL w="3600">
+                      <a:solidFill>
+                        <a:srgbClr val="B2B2B2"/>
+                      </a:solidFill>
+                    </a:lnL>
+                    <a:lnR w="3600">
+                      <a:solidFill>
+                        <a:srgbClr val="B2B2B2"/>
+                      </a:solidFill>
+                    </a:lnR>
+                    <a:lnT w="3600">
+                      <a:solidFill>
+                        <a:srgbClr val="B2B2B2"/>
+                      </a:solidFill>
+                    </a:lnT>
+                    <a:lnB w="3600">
+                      <a:solidFill>
+                        <a:srgbClr val="B2B2B2"/>
+                      </a:solidFill>
+                    </a:lnB>
+                  </a:tcPr>
+                </a:tc>
+              </a:tr>
+              <a:tr h="272034">
+                <a:tc vMerge="1">
+                  <a:txBody>
+                    <a:bodyPr/>
+                    <a:lstStyle/>
+                    <a:p/>
+                  </a:txBody>
+                  <a:tcPr>
+                    <a:lnL w="3600">
+                      <a:solidFill>
+                        <a:srgbClr val="B2B2B2"/>
+                      </a:solidFill>
+                    </a:lnL>
+                    <a:lnR w="3600">
+                      <a:solidFill>
+                        <a:srgbClr val="B2B2B2"/>
+                      </a:solidFill>
+                    </a:lnR>
+                    <a:lnT w="3600">
+                      <a:solidFill>
+                        <a:srgbClr val="B2B2B2"/>
+                      </a:solidFill>
+                    </a:lnT>
+                    <a:lnB w="3600">
+                      <a:solidFill>
+                        <a:srgbClr val="B2B2B2"/>
+                      </a:solidFill>
+                    </a:lnB>
+                  </a:tcPr>
+                </a:tc>
+                <a:tc>
+                  <a:txBody>
+                    <a:bodyPr wrap="square" lIns="13716" rIns="13716" tIns="9144" bIns="5486"/>
+                    <a:lstStyle/>
+                    <a:p>
+                      <a:pPr algn="ctr">
+                        <a:lnSpc>
+                          <a:spcPct val="88000"/>
+                        </a:lnSpc>
                       </a:pPr>
                       <a:r>
-                        <a:rPr sz="455" b="0">
+                        <a:rPr sz="365" b="0">
                           <a:solidFill>
                             <a:srgbClr val="000000"/>
                           </a:solidFill>
-                          <a:latin typeface="Microsoft YaHei UI"/>
+                          <a:latin typeface="Noto Sans CJK SC"/>
                         </a:rPr>
-                        <a:t>Action Expert 负责精细动作执行，参数未公开。</a:t>
+                        <a:t>北京人形/天工</a:t>
                       </a:r>
                     </a:p>
                   </a:txBody>
-                  <a:tcPr anchor="ctr" marL="32004" marR="32004" marT="10972" marB="10972">
-                    <a:solidFill>
-                      <a:srgbClr val="FFFFFF"/>
-                    </a:solidFill>
-                    <a:lnL w="2400">
-                      <a:solidFill>
-                        <a:srgbClr val="B4C0CD"/>
-                      </a:solidFill>
-                    </a:lnL>
-                    <a:lnR w="2400">
-                      <a:solidFill>
-                        <a:srgbClr val="B4C0CD"/>
-                      </a:solidFill>
-                    </a:lnR>
-                    <a:lnT w="2400">
-                      <a:solidFill>
-                        <a:srgbClr val="B4C0CD"/>
-                      </a:solidFill>
-                    </a:lnT>
-                    <a:lnB w="2400">
-                      <a:solidFill>
-                        <a:srgbClr val="B4C0CD"/>
-                      </a:solidFill>
-                    </a:lnB>
-                  </a:tcPr>
-                </a:tc>
-                <a:tc>
-                  <a:txBody>
-                    <a:bodyPr wrap="square">
-                      <a:normAutofit/>
-                    </a:bodyPr>
+                  <a:tcPr anchor="t">
+                    <a:solidFill>
+                      <a:srgbClr val="FFFFFF"/>
+                    </a:solidFill>
+                    <a:lnL w="3600">
+                      <a:solidFill>
+                        <a:srgbClr val="B2B2B2"/>
+                      </a:solidFill>
+                    </a:lnL>
+                    <a:lnR w="3600">
+                      <a:solidFill>
+                        <a:srgbClr val="B2B2B2"/>
+                      </a:solidFill>
+                    </a:lnR>
+                    <a:lnT w="3600">
+                      <a:solidFill>
+                        <a:srgbClr val="B2B2B2"/>
+                      </a:solidFill>
+                    </a:lnT>
+                    <a:lnB w="3600">
+                      <a:solidFill>
+                        <a:srgbClr val="B2B2B2"/>
+                      </a:solidFill>
+                    </a:lnB>
+                  </a:tcPr>
+                </a:tc>
+                <a:tc>
+                  <a:txBody>
+                    <a:bodyPr wrap="square" lIns="13716" rIns="13716" tIns="9144" bIns="5486"/>
                     <a:lstStyle/>
                     <a:p>
                       <a:pPr algn="l">
                         <a:lnSpc>
                           <a:spcPct val="88000"/>
                         </a:lnSpc>
-                        <a:spcBef>
-                          <a:spcPts val="0"/>
-                        </a:spcBef>
-                        <a:spcAft>
-                          <a:spcPts val="0"/>
-                        </a:spcAft>
                       </a:pPr>
                       <a:r>
-                        <a:rPr sz="430" b="0">
+                        <a:rPr sz="345" b="0">
                           <a:solidFill>
                             <a:srgbClr val="000000"/>
                           </a:solidFill>
-                          <a:latin typeface="Microsoft YaHei UI"/>
+                          <a:latin typeface="Noto Sans CJK SC"/>
                         </a:rPr>
-                        <a:t>A3 Ultra 公开披露 700 TOPS 端侧具身处理器。</a:t>
+                        <a:t>Pelican-Unify 集成 VLM、action model 和 WFM，PelicanVLM 是 72B，XR-1 是跨本体 VLA。</a:t>
                       </a:r>
                     </a:p>
                   </a:txBody>
-                  <a:tcPr anchor="ctr" marL="32004" marR="32004" marT="10972" marB="10972">
-                    <a:solidFill>
-                      <a:srgbClr val="FFFFFF"/>
-                    </a:solidFill>
-                    <a:lnL w="2400">
-                      <a:solidFill>
-                        <a:srgbClr val="B4C0CD"/>
-                      </a:solidFill>
-                    </a:lnL>
-                    <a:lnR w="2400">
-                      <a:solidFill>
-                        <a:srgbClr val="B4C0CD"/>
-                      </a:solidFill>
-                    </a:lnR>
-                    <a:lnT w="2400">
-                      <a:solidFill>
-                        <a:srgbClr val="B4C0CD"/>
-                      </a:solidFill>
-                    </a:lnT>
-                    <a:lnB w="2400">
-                      <a:solidFill>
-                        <a:srgbClr val="B4C0CD"/>
-                      </a:solidFill>
-                    </a:lnB>
-                  </a:tcPr>
-                </a:tc>
-                <a:tc>
-                  <a:txBody>
-                    <a:bodyPr wrap="square">
-                      <a:normAutofit/>
-                    </a:bodyPr>
+                  <a:tcPr anchor="t">
+                    <a:solidFill>
+                      <a:srgbClr val="FFFFFF"/>
+                    </a:solidFill>
+                    <a:lnL w="3600">
+                      <a:solidFill>
+                        <a:srgbClr val="B2B2B2"/>
+                      </a:solidFill>
+                    </a:lnL>
+                    <a:lnR w="3600">
+                      <a:solidFill>
+                        <a:srgbClr val="B2B2B2"/>
+                      </a:solidFill>
+                    </a:lnR>
+                    <a:lnT w="3600">
+                      <a:solidFill>
+                        <a:srgbClr val="B2B2B2"/>
+                      </a:solidFill>
+                    </a:lnT>
+                    <a:lnB w="3600">
+                      <a:solidFill>
+                        <a:srgbClr val="B2B2B2"/>
+                      </a:solidFill>
+                    </a:lnB>
+                  </a:tcPr>
+                </a:tc>
+                <a:tc>
+                  <a:txBody>
+                    <a:bodyPr wrap="square" lIns="13716" rIns="13716" tIns="9144" bIns="5486"/>
                     <a:lstStyle/>
                     <a:p>
                       <a:pPr algn="l">
                         <a:lnSpc>
                           <a:spcPct val="88000"/>
                         </a:lnSpc>
-                        <a:spcBef>
-                          <a:spcPts val="0"/>
-                        </a:spcBef>
-                        <a:spcAft>
-                          <a:spcPts val="0"/>
-                        </a:spcAft>
                       </a:pPr>
                       <a:r>
-                        <a:rPr sz="430" b="0">
+                        <a:rPr sz="345" b="0">
                           <a:solidFill>
                             <a:srgbClr val="000000"/>
                           </a:solidFill>
-                          <a:latin typeface="Microsoft YaHei UI"/>
+                          <a:latin typeface="Noto Sans CJK SC"/>
                         </a:rPr>
-                        <a:t>二手口径称 GO-1/GO-2 可在边缘端 10Hz-20Hz 推理，官方 Hz 未公开。</a:t>
+                        <a:t>披露全身控制自主导航系统，但参数未公开。</a:t>
                       </a:r>
                     </a:p>
                   </a:txBody>
-                  <a:tcPr anchor="ctr" marL="32004" marR="32004" marT="10972" marB="10972">
-                    <a:solidFill>
-                      <a:srgbClr val="FFFFFF"/>
-                    </a:solidFill>
-                    <a:lnL w="2400">
-                      <a:solidFill>
-                        <a:srgbClr val="B4C0CD"/>
-                      </a:solidFill>
-                    </a:lnL>
-                    <a:lnR w="2400">
-                      <a:solidFill>
-                        <a:srgbClr val="B4C0CD"/>
-                      </a:solidFill>
-                    </a:lnR>
-                    <a:lnT w="2400">
-                      <a:solidFill>
-                        <a:srgbClr val="B4C0CD"/>
-                      </a:solidFill>
-                    </a:lnT>
-                    <a:lnB w="2400">
-                      <a:solidFill>
-                        <a:srgbClr val="B4C0CD"/>
-                      </a:solidFill>
-                    </a:lnB>
-                  </a:tcPr>
-                </a:tc>
-              </a:tr>
-              <a:tr h="379827">
-                <a:tc vMerge="1">
-                  <a:txBody>
-                    <a:bodyPr wrap="square">
-                      <a:normAutofit/>
-                    </a:bodyPr>
+                  <a:tcPr anchor="t">
+                    <a:solidFill>
+                      <a:srgbClr val="FFFFFF"/>
+                    </a:solidFill>
+                    <a:lnL w="3600">
+                      <a:solidFill>
+                        <a:srgbClr val="B2B2B2"/>
+                      </a:solidFill>
+                    </a:lnL>
+                    <a:lnR w="3600">
+                      <a:solidFill>
+                        <a:srgbClr val="B2B2B2"/>
+                      </a:solidFill>
+                    </a:lnR>
+                    <a:lnT w="3600">
+                      <a:solidFill>
+                        <a:srgbClr val="B2B2B2"/>
+                      </a:solidFill>
+                    </a:lnT>
+                    <a:lnB w="3600">
+                      <a:solidFill>
+                        <a:srgbClr val="B2B2B2"/>
+                      </a:solidFill>
+                    </a:lnB>
+                  </a:tcPr>
+                </a:tc>
+                <a:tc>
+                  <a:txBody>
+                    <a:bodyPr wrap="square" lIns="13716" rIns="13716" tIns="9144" bIns="5486"/>
                     <a:lstStyle/>
                     <a:p>
                       <a:pPr algn="l">
                         <a:lnSpc>
                           <a:spcPct val="88000"/>
                         </a:lnSpc>
-                        <a:spcBef>
-                          <a:spcPts val="0"/>
-                        </a:spcBef>
-                        <a:spcAft>
-                          <a:spcPts val="0"/>
-                        </a:spcAft>
                       </a:pPr>
                       <a:r>
-                        <a:rPr sz="455" b="0">
+                        <a:rPr sz="345" b="0">
                           <a:solidFill>
                             <a:srgbClr val="000000"/>
                           </a:solidFill>
-                          <a:latin typeface="Microsoft YaHei UI"/>
+                          <a:latin typeface="Noto Sans CJK SC"/>
                         </a:rPr>
-                        <a:t/>
+                        <a:t>Pelican-Unify 已在天轶真机跑通，天工 Omni 支持大模型边缘部署。</a:t>
                       </a:r>
                     </a:p>
                   </a:txBody>
-                  <a:tcPr anchor="ctr" marL="32004" marR="32004" marT="10972" marB="10972">
-                    <a:solidFill>
-                      <a:srgbClr val="F4F7FA"/>
-                    </a:solidFill>
-                    <a:lnL w="2400">
-                      <a:solidFill>
-                        <a:srgbClr val="B4C0CD"/>
-                      </a:solidFill>
-                    </a:lnL>
-                    <a:lnR w="2400">
-                      <a:solidFill>
-                        <a:srgbClr val="B4C0CD"/>
-                      </a:solidFill>
-                    </a:lnR>
-                    <a:lnT w="2400">
-                      <a:solidFill>
-                        <a:srgbClr val="B4C0CD"/>
-                      </a:solidFill>
-                    </a:lnT>
-                    <a:lnB w="2400">
-                      <a:solidFill>
-                        <a:srgbClr val="B4C0CD"/>
-                      </a:solidFill>
-                    </a:lnB>
-                  </a:tcPr>
-                </a:tc>
-                <a:tc>
-                  <a:txBody>
-                    <a:bodyPr wrap="square">
-                      <a:normAutofit/>
-                    </a:bodyPr>
+                  <a:tcPr anchor="t">
+                    <a:solidFill>
+                      <a:srgbClr val="FFFFFF"/>
+                    </a:solidFill>
+                    <a:lnL w="3600">
+                      <a:solidFill>
+                        <a:srgbClr val="B2B2B2"/>
+                      </a:solidFill>
+                    </a:lnL>
+                    <a:lnR w="3600">
+                      <a:solidFill>
+                        <a:srgbClr val="B2B2B2"/>
+                      </a:solidFill>
+                    </a:lnR>
+                    <a:lnT w="3600">
+                      <a:solidFill>
+                        <a:srgbClr val="B2B2B2"/>
+                      </a:solidFill>
+                    </a:lnT>
+                    <a:lnB w="3600">
+                      <a:solidFill>
+                        <a:srgbClr val="B2B2B2"/>
+                      </a:solidFill>
+                    </a:lnB>
+                  </a:tcPr>
+                </a:tc>
+                <a:tc>
+                  <a:txBody>
+                    <a:bodyPr wrap="square" lIns="13716" rIns="13716" tIns="9144" bIns="5486"/>
+                    <a:lstStyle/>
+                    <a:p>
+                      <a:pPr algn="l">
+                        <a:lnSpc>
+                          <a:spcPct val="88000"/>
+                        </a:lnSpc>
+                      </a:pPr>
+                    </a:p>
+                  </a:txBody>
+                  <a:tcPr anchor="t">
+                    <a:solidFill>
+                      <a:srgbClr val="FFFFFF"/>
+                    </a:solidFill>
+                    <a:lnL w="3600">
+                      <a:solidFill>
+                        <a:srgbClr val="B2B2B2"/>
+                      </a:solidFill>
+                    </a:lnL>
+                    <a:lnR w="3600">
+                      <a:solidFill>
+                        <a:srgbClr val="B2B2B2"/>
+                      </a:solidFill>
+                    </a:lnR>
+                    <a:lnT w="3600">
+                      <a:solidFill>
+                        <a:srgbClr val="B2B2B2"/>
+                      </a:solidFill>
+                    </a:lnT>
+                    <a:lnB w="3600">
+                      <a:solidFill>
+                        <a:srgbClr val="B2B2B2"/>
+                      </a:solidFill>
+                    </a:lnB>
+                  </a:tcPr>
+                </a:tc>
+              </a:tr>
+              <a:tr h="272034">
+                <a:tc vMerge="1">
+                  <a:txBody>
+                    <a:bodyPr/>
+                    <a:lstStyle/>
+                    <a:p/>
+                  </a:txBody>
+                  <a:tcPr>
+                    <a:lnL w="3600">
+                      <a:solidFill>
+                        <a:srgbClr val="B2B2B2"/>
+                      </a:solidFill>
+                    </a:lnL>
+                    <a:lnR w="3600">
+                      <a:solidFill>
+                        <a:srgbClr val="B2B2B2"/>
+                      </a:solidFill>
+                    </a:lnR>
+                    <a:lnT w="3600">
+                      <a:solidFill>
+                        <a:srgbClr val="B2B2B2"/>
+                      </a:solidFill>
+                    </a:lnT>
+                    <a:lnB w="3600">
+                      <a:solidFill>
+                        <a:srgbClr val="B2B2B2"/>
+                      </a:solidFill>
+                    </a:lnB>
+                  </a:tcPr>
+                </a:tc>
+                <a:tc>
+                  <a:txBody>
+                    <a:bodyPr wrap="square" lIns="13716" rIns="13716" tIns="9144" bIns="5486"/>
                     <a:lstStyle/>
                     <a:p>
                       <a:pPr algn="ctr">
                         <a:lnSpc>
                           <a:spcPct val="88000"/>
                         </a:lnSpc>
-                        <a:spcBef>
-                          <a:spcPts val="0"/>
-                        </a:spcBef>
-                        <a:spcAft>
-                          <a:spcPts val="0"/>
-                        </a:spcAft>
                       </a:pPr>
                       <a:r>
-                        <a:rPr sz="455" b="1">
+                        <a:rPr sz="365" b="0">
                           <a:solidFill>
                             <a:srgbClr val="000000"/>
                           </a:solidFill>
-                          <a:latin typeface="Microsoft YaHei UI"/>
+                          <a:latin typeface="Noto Sans CJK SC"/>
                         </a:rPr>
-                        <a:t>北京人形/天工</a:t>
+                        <a:t>机器科学 RoboScience</a:t>
                       </a:r>
                     </a:p>
                   </a:txBody>
-                  <a:tcPr anchor="ctr" marL="32004" marR="32004" marT="10972" marB="10972">
-                    <a:solidFill>
-                      <a:srgbClr val="F4F7FA"/>
-                    </a:solidFill>
-                    <a:lnL w="2400">
-                      <a:solidFill>
-                        <a:srgbClr val="B4C0CD"/>
-                      </a:solidFill>
-                    </a:lnL>
-                    <a:lnR w="2400">
-                      <a:solidFill>
-                        <a:srgbClr val="B4C0CD"/>
-                      </a:solidFill>
-                    </a:lnR>
-                    <a:lnT w="2400">
-                      <a:solidFill>
-                        <a:srgbClr val="B4C0CD"/>
-                      </a:solidFill>
-                    </a:lnT>
-                    <a:lnB w="2400">
-                      <a:solidFill>
-                        <a:srgbClr val="B4C0CD"/>
-                      </a:solidFill>
-                    </a:lnB>
-                  </a:tcPr>
-                </a:tc>
-                <a:tc>
-                  <a:txBody>
-                    <a:bodyPr wrap="square">
-                      <a:normAutofit/>
-                    </a:bodyPr>
+                  <a:tcPr anchor="t">
+                    <a:solidFill>
+                      <a:srgbClr val="FFFFFF"/>
+                    </a:solidFill>
+                    <a:lnL w="3600">
+                      <a:solidFill>
+                        <a:srgbClr val="B2B2B2"/>
+                      </a:solidFill>
+                    </a:lnL>
+                    <a:lnR w="3600">
+                      <a:solidFill>
+                        <a:srgbClr val="B2B2B2"/>
+                      </a:solidFill>
+                    </a:lnR>
+                    <a:lnT w="3600">
+                      <a:solidFill>
+                        <a:srgbClr val="B2B2B2"/>
+                      </a:solidFill>
+                    </a:lnT>
+                    <a:lnB w="3600">
+                      <a:solidFill>
+                        <a:srgbClr val="B2B2B2"/>
+                      </a:solidFill>
+                    </a:lnB>
+                  </a:tcPr>
+                </a:tc>
+                <a:tc>
+                  <a:txBody>
+                    <a:bodyPr wrap="square" lIns="13716" rIns="13716" tIns="9144" bIns="5486"/>
                     <a:lstStyle/>
                     <a:p>
                       <a:pPr algn="l">
                         <a:lnSpc>
                           <a:spcPct val="88000"/>
                         </a:lnSpc>
-                        <a:spcBef>
-                          <a:spcPts val="0"/>
-                        </a:spcBef>
-                        <a:spcAft>
-                          <a:spcPts val="0"/>
-                        </a:spcAft>
                       </a:pPr>
                       <a:r>
-                        <a:rPr sz="400" b="0">
+                        <a:rPr sz="345" b="0">
                           <a:solidFill>
                             <a:srgbClr val="000000"/>
                           </a:solidFill>
-                          <a:latin typeface="Microsoft YaHei UI"/>
+                          <a:latin typeface="Noto Sans CJK SC"/>
                         </a:rPr>
-                        <a:t>Pelican-Unify 是统一表征具身世界模型，集成 VLM、action model 和 WFM；PelicanVLM 是 72B 视觉语言大模型，XR-1 是跨本体 VLA。</a:t>
+                        <a:t>Visics 采用 VLOA 架构，由具身世界模型和通用操作模型双引擎驱动。</a:t>
                       </a:r>
                     </a:p>
                   </a:txBody>
-                  <a:tcPr anchor="ctr" marL="32004" marR="32004" marT="10972" marB="10972">
-                    <a:solidFill>
-                      <a:srgbClr val="F4F7FA"/>
-                    </a:solidFill>
-                    <a:lnL w="2400">
-                      <a:solidFill>
-                        <a:srgbClr val="B4C0CD"/>
-                      </a:solidFill>
-                    </a:lnL>
-                    <a:lnR w="2400">
-                      <a:solidFill>
-                        <a:srgbClr val="B4C0CD"/>
-                      </a:solidFill>
-                    </a:lnR>
-                    <a:lnT w="2400">
-                      <a:solidFill>
-                        <a:srgbClr val="B4C0CD"/>
-                      </a:solidFill>
-                    </a:lnT>
-                    <a:lnB w="2400">
-                      <a:solidFill>
-                        <a:srgbClr val="B4C0CD"/>
-                      </a:solidFill>
-                    </a:lnB>
-                  </a:tcPr>
-                </a:tc>
-                <a:tc>
-                  <a:txBody>
-                    <a:bodyPr wrap="square">
-                      <a:normAutofit/>
-                    </a:bodyPr>
+                  <a:tcPr anchor="t">
+                    <a:solidFill>
+                      <a:srgbClr val="FFFFFF"/>
+                    </a:solidFill>
+                    <a:lnL w="3600">
+                      <a:solidFill>
+                        <a:srgbClr val="B2B2B2"/>
+                      </a:solidFill>
+                    </a:lnL>
+                    <a:lnR w="3600">
+                      <a:solidFill>
+                        <a:srgbClr val="B2B2B2"/>
+                      </a:solidFill>
+                    </a:lnR>
+                    <a:lnT w="3600">
+                      <a:solidFill>
+                        <a:srgbClr val="B2B2B2"/>
+                      </a:solidFill>
+                    </a:lnT>
+                    <a:lnB w="3600">
+                      <a:solidFill>
+                        <a:srgbClr val="B2B2B2"/>
+                      </a:solidFill>
+                    </a:lnB>
+                  </a:tcPr>
+                </a:tc>
+                <a:tc>
+                  <a:txBody>
+                    <a:bodyPr wrap="square" lIns="13716" rIns="13716" tIns="9144" bIns="5486"/>
                     <a:lstStyle/>
                     <a:p>
                       <a:pPr algn="l">
                         <a:lnSpc>
                           <a:spcPct val="88000"/>
                         </a:lnSpc>
-                        <a:spcBef>
-                          <a:spcPts val="0"/>
-                        </a:spcBef>
-                        <a:spcAft>
-                          <a:spcPts val="0"/>
-                        </a:spcAft>
+                      </a:pPr>
+                    </a:p>
+                  </a:txBody>
+                  <a:tcPr anchor="t">
+                    <a:solidFill>
+                      <a:srgbClr val="FFFFFF"/>
+                    </a:solidFill>
+                    <a:lnL w="3600">
+                      <a:solidFill>
+                        <a:srgbClr val="B2B2B2"/>
+                      </a:solidFill>
+                    </a:lnL>
+                    <a:lnR w="3600">
+                      <a:solidFill>
+                        <a:srgbClr val="B2B2B2"/>
+                      </a:solidFill>
+                    </a:lnR>
+                    <a:lnT w="3600">
+                      <a:solidFill>
+                        <a:srgbClr val="B2B2B2"/>
+                      </a:solidFill>
+                    </a:lnT>
+                    <a:lnB w="3600">
+                      <a:solidFill>
+                        <a:srgbClr val="B2B2B2"/>
+                      </a:solidFill>
+                    </a:lnB>
+                  </a:tcPr>
+                </a:tc>
+                <a:tc>
+                  <a:txBody>
+                    <a:bodyPr wrap="square" lIns="13716" rIns="13716" tIns="9144" bIns="5486"/>
+                    <a:lstStyle/>
+                    <a:p>
+                      <a:pPr algn="l">
+                        <a:lnSpc>
+                          <a:spcPct val="88000"/>
+                        </a:lnSpc>
                       </a:pPr>
                       <a:r>
-                        <a:rPr sz="455" b="0">
+                        <a:rPr sz="345" b="0">
                           <a:solidFill>
                             <a:srgbClr val="000000"/>
                           </a:solidFill>
-                          <a:latin typeface="Microsoft YaHei UI"/>
+                          <a:latin typeface="Noto Sans CJK SC"/>
                         </a:rPr>
-                        <a:t>北京人形披露全身控制自主导航系统，但未公开参数。</a:t>
+                        <a:t>公开报道称展台 API 调用腾讯云模型，另有 REX G1 端侧 2070 TFLOPS 口径。</a:t>
                       </a:r>
                     </a:p>
                   </a:txBody>
-                  <a:tcPr anchor="ctr" marL="32004" marR="32004" marT="10972" marB="10972">
-                    <a:solidFill>
-                      <a:srgbClr val="F4F7FA"/>
-                    </a:solidFill>
-                    <a:lnL w="2400">
-                      <a:solidFill>
-                        <a:srgbClr val="B4C0CD"/>
-                      </a:solidFill>
-                    </a:lnL>
-                    <a:lnR w="2400">
-                      <a:solidFill>
-                        <a:srgbClr val="B4C0CD"/>
-                      </a:solidFill>
-                    </a:lnR>
-                    <a:lnT w="2400">
-                      <a:solidFill>
-                        <a:srgbClr val="B4C0CD"/>
-                      </a:solidFill>
-                    </a:lnT>
-                    <a:lnB w="2400">
-                      <a:solidFill>
-                        <a:srgbClr val="B4C0CD"/>
-                      </a:solidFill>
-                    </a:lnB>
-                  </a:tcPr>
-                </a:tc>
-                <a:tc>
-                  <a:txBody>
-                    <a:bodyPr wrap="square">
-                      <a:normAutofit/>
-                    </a:bodyPr>
+                  <a:tcPr anchor="t">
+                    <a:solidFill>
+                      <a:srgbClr val="FFFFFF"/>
+                    </a:solidFill>
+                    <a:lnL w="3600">
+                      <a:solidFill>
+                        <a:srgbClr val="B2B2B2"/>
+                      </a:solidFill>
+                    </a:lnL>
+                    <a:lnR w="3600">
+                      <a:solidFill>
+                        <a:srgbClr val="B2B2B2"/>
+                      </a:solidFill>
+                    </a:lnR>
+                    <a:lnT w="3600">
+                      <a:solidFill>
+                        <a:srgbClr val="B2B2B2"/>
+                      </a:solidFill>
+                    </a:lnT>
+                    <a:lnB w="3600">
+                      <a:solidFill>
+                        <a:srgbClr val="B2B2B2"/>
+                      </a:solidFill>
+                    </a:lnB>
+                  </a:tcPr>
+                </a:tc>
+                <a:tc>
+                  <a:txBody>
+                    <a:bodyPr wrap="square" lIns="13716" rIns="13716" tIns="9144" bIns="5486"/>
                     <a:lstStyle/>
                     <a:p>
                       <a:pPr algn="l">
                         <a:lnSpc>
                           <a:spcPct val="88000"/>
                         </a:lnSpc>
-                        <a:spcBef>
-                          <a:spcPts val="0"/>
-                        </a:spcBef>
-                        <a:spcAft>
-                          <a:spcPts val="0"/>
-                        </a:spcAft>
+                      </a:pPr>
+                    </a:p>
+                  </a:txBody>
+                  <a:tcPr anchor="t">
+                    <a:solidFill>
+                      <a:srgbClr val="FFFFFF"/>
+                    </a:solidFill>
+                    <a:lnL w="3600">
+                      <a:solidFill>
+                        <a:srgbClr val="B2B2B2"/>
+                      </a:solidFill>
+                    </a:lnL>
+                    <a:lnR w="3600">
+                      <a:solidFill>
+                        <a:srgbClr val="B2B2B2"/>
+                      </a:solidFill>
+                    </a:lnR>
+                    <a:lnT w="3600">
+                      <a:solidFill>
+                        <a:srgbClr val="B2B2B2"/>
+                      </a:solidFill>
+                    </a:lnT>
+                    <a:lnB w="3600">
+                      <a:solidFill>
+                        <a:srgbClr val="B2B2B2"/>
+                      </a:solidFill>
+                    </a:lnB>
+                  </a:tcPr>
+                </a:tc>
+              </a:tr>
+              <a:tr h="272034">
+                <a:tc rowSpan="5">
+                  <a:txBody>
+                    <a:bodyPr wrap="square" lIns="13716" rIns="13716" tIns="9144" bIns="5486"/>
+                    <a:lstStyle/>
+                    <a:p>
+                      <a:pPr algn="ctr">
+                        <a:lnSpc>
+                          <a:spcPct val="88000"/>
+                        </a:lnSpc>
                       </a:pPr>
                       <a:r>
-                        <a:rPr sz="400" b="0">
+                        <a:rPr sz="390" b="1">
                           <a:solidFill>
                             <a:srgbClr val="000000"/>
                           </a:solidFill>
-                          <a:latin typeface="Microsoft YaHei UI"/>
+                          <a:latin typeface="Noto Sans CJK SC"/>
                         </a:rPr>
-                        <a:t>Pelican-Unify 已在天轶真机部署跑通；天工 Omni 采用端侧原生智能架构并支持大模型边缘部署。</a:t>
+                        <a:t>云侧/平台未明：公开资料未说明生产部署或偏平台模型；模型尺度和迭代空间大，但离线和实时性不确定；11/25，占 44.0%。</a:t>
                       </a:r>
                     </a:p>
                   </a:txBody>
-                  <a:tcPr anchor="ctr" marL="32004" marR="32004" marT="10972" marB="10972">
-                    <a:solidFill>
-                      <a:srgbClr val="F4F7FA"/>
-                    </a:solidFill>
-                    <a:lnL w="2400">
-                      <a:solidFill>
-                        <a:srgbClr val="B4C0CD"/>
-                      </a:solidFill>
-                    </a:lnL>
-                    <a:lnR w="2400">
-                      <a:solidFill>
-                        <a:srgbClr val="B4C0CD"/>
-                      </a:solidFill>
-                    </a:lnR>
-                    <a:lnT w="2400">
-                      <a:solidFill>
-                        <a:srgbClr val="B4C0CD"/>
-                      </a:solidFill>
-                    </a:lnT>
-                    <a:lnB w="2400">
-                      <a:solidFill>
-                        <a:srgbClr val="B4C0CD"/>
-                      </a:solidFill>
-                    </a:lnB>
-                  </a:tcPr>
-                </a:tc>
-                <a:tc>
-                  <a:txBody>
-                    <a:bodyPr wrap="square">
-                      <a:normAutofit/>
-                    </a:bodyPr>
-                    <a:lstStyle/>
-                    <a:p>
-                      <a:pPr algn="l">
-                        <a:lnSpc>
-                          <a:spcPct val="88000"/>
-                        </a:lnSpc>
-                        <a:spcBef>
-                          <a:spcPts val="0"/>
-                        </a:spcBef>
-                        <a:spcAft>
-                          <a:spcPts val="0"/>
-                        </a:spcAft>
+                  <a:tcPr anchor="ctr">
+                    <a:solidFill>
+                      <a:srgbClr val="F2F4F6"/>
+                    </a:solidFill>
+                    <a:lnL w="3600">
+                      <a:solidFill>
+                        <a:srgbClr val="B2B2B2"/>
+                      </a:solidFill>
+                    </a:lnL>
+                    <a:lnR w="3600">
+                      <a:solidFill>
+                        <a:srgbClr val="B2B2B2"/>
+                      </a:solidFill>
+                    </a:lnR>
+                    <a:lnT w="3600">
+                      <a:solidFill>
+                        <a:srgbClr val="B2B2B2"/>
+                      </a:solidFill>
+                    </a:lnT>
+                    <a:lnB w="3600">
+                      <a:solidFill>
+                        <a:srgbClr val="B2B2B2"/>
+                      </a:solidFill>
+                    </a:lnB>
+                  </a:tcPr>
+                </a:tc>
+                <a:tc>
+                  <a:txBody>
+                    <a:bodyPr wrap="square" lIns="13716" rIns="13716" tIns="9144" bIns="5486"/>
+                    <a:lstStyle/>
+                    <a:p>
+                      <a:pPr algn="ctr">
+                        <a:lnSpc>
+                          <a:spcPct val="88000"/>
+                        </a:lnSpc>
                       </a:pPr>
                       <a:r>
-                        <a:rPr sz="400" b="0">
+                        <a:rPr sz="365" b="0">
                           <a:solidFill>
                             <a:srgbClr val="000000"/>
                           </a:solidFill>
-                          <a:latin typeface="Microsoft YaHei UI"/>
+                          <a:latin typeface="Noto Sans CJK SC"/>
                         </a:rPr>
-                        <a:t/>
+                        <a:t>银河通用 Galbot</a:t>
                       </a:r>
                     </a:p>
                   </a:txBody>
-                  <a:tcPr anchor="ctr" marL="32004" marR="32004" marT="10972" marB="10972">
-                    <a:solidFill>
-                      <a:srgbClr val="F4F7FA"/>
-                    </a:solidFill>
-                    <a:lnL w="2400">
-                      <a:solidFill>
-                        <a:srgbClr val="B4C0CD"/>
-                      </a:solidFill>
-                    </a:lnL>
-                    <a:lnR w="2400">
-                      <a:solidFill>
-                        <a:srgbClr val="B4C0CD"/>
-                      </a:solidFill>
-                    </a:lnR>
-                    <a:lnT w="2400">
-                      <a:solidFill>
-                        <a:srgbClr val="B4C0CD"/>
-                      </a:solidFill>
-                    </a:lnT>
-                    <a:lnB w="2400">
-                      <a:solidFill>
-                        <a:srgbClr val="B4C0CD"/>
-                      </a:solidFill>
-                    </a:lnB>
-                  </a:tcPr>
-                </a:tc>
-              </a:tr>
-              <a:tr h="379827">
-                <a:tc rowSpan="3">
-                  <a:txBody>
-                    <a:bodyPr wrap="square">
-                      <a:normAutofit/>
-                    </a:bodyPr>
+                  <a:tcPr anchor="t">
+                    <a:solidFill>
+                      <a:srgbClr val="FFFFFF"/>
+                    </a:solidFill>
+                    <a:lnL w="3600">
+                      <a:solidFill>
+                        <a:srgbClr val="B2B2B2"/>
+                      </a:solidFill>
+                    </a:lnL>
+                    <a:lnR w="3600">
+                      <a:solidFill>
+                        <a:srgbClr val="B2B2B2"/>
+                      </a:solidFill>
+                    </a:lnR>
+                    <a:lnT w="3600">
+                      <a:solidFill>
+                        <a:srgbClr val="B2B2B2"/>
+                      </a:solidFill>
+                    </a:lnT>
+                    <a:lnB w="3600">
+                      <a:solidFill>
+                        <a:srgbClr val="B2B2B2"/>
+                      </a:solidFill>
+                    </a:lnB>
+                  </a:tcPr>
+                </a:tc>
+                <a:tc>
+                  <a:txBody>
+                    <a:bodyPr wrap="square" lIns="13716" rIns="13716" tIns="9144" bIns="5486"/>
                     <a:lstStyle/>
                     <a:p>
                       <a:pPr algn="l">
                         <a:lnSpc>
                           <a:spcPct val="88000"/>
                         </a:lnSpc>
-                        <a:spcBef>
-                          <a:spcPts val="0"/>
-                        </a:spcBef>
-                        <a:spcAft>
-                          <a:spcPts val="0"/>
-                        </a:spcAft>
                       </a:pPr>
                       <a:r>
-                        <a:rPr sz="465" b="0">
+                        <a:rPr sz="345" b="0">
                           <a:solidFill>
                             <a:srgbClr val="000000"/>
                           </a:solidFill>
-                          <a:latin typeface="Microsoft YaHei UI"/>
+                          <a:latin typeface="Noto Sans CJK SC"/>
                         </a:rPr>
-                        <a:t>云侧/平台未明：公开资料未说明生产部署方式，或大脑更像平台/研究模型。优点是模型尺度和迭代空间更大；缺点是离线和实时性不确定。扩展样本 11/22，占 50.0%。</a:t>
+                        <a:t>LDA-1B 是 1B 隐式世界-动作模型，AstraBrain WAM 是世界动作模型，另有多种技能 VLA。</a:t>
                       </a:r>
                     </a:p>
                   </a:txBody>
-                  <a:tcPr anchor="ctr" marL="32004" marR="32004" marT="10972" marB="10972">
-                    <a:solidFill>
-                      <a:srgbClr val="ECF2F7"/>
-                    </a:solidFill>
-                    <a:lnL w="3200">
-                      <a:solidFill>
-                        <a:srgbClr val="AAB8C6"/>
-                      </a:solidFill>
-                    </a:lnL>
-                    <a:lnR w="3200">
-                      <a:solidFill>
-                        <a:srgbClr val="AAB8C6"/>
-                      </a:solidFill>
-                    </a:lnR>
-                    <a:lnT w="3200">
-                      <a:solidFill>
-                        <a:srgbClr val="AAB8C6"/>
-                      </a:solidFill>
-                    </a:lnT>
-                    <a:lnB w="3200">
-                      <a:solidFill>
-                        <a:srgbClr val="AAB8C6"/>
-                      </a:solidFill>
-                    </a:lnB>
-                  </a:tcPr>
-                </a:tc>
-                <a:tc>
-                  <a:txBody>
-                    <a:bodyPr wrap="square">
-                      <a:normAutofit/>
-                    </a:bodyPr>
-                    <a:lstStyle/>
-                    <a:p>
-                      <a:pPr algn="ctr">
-                        <a:lnSpc>
-                          <a:spcPct val="88000"/>
-                        </a:lnSpc>
-                        <a:spcBef>
-                          <a:spcPts val="0"/>
-                        </a:spcBef>
-                        <a:spcAft>
-                          <a:spcPts val="0"/>
-                        </a:spcAft>
+                  <a:tcPr anchor="t">
+                    <a:solidFill>
+                      <a:srgbClr val="FFFFFF"/>
+                    </a:solidFill>
+                    <a:lnL w="3600">
+                      <a:solidFill>
+                        <a:srgbClr val="B2B2B2"/>
+                      </a:solidFill>
+                    </a:lnL>
+                    <a:lnR w="3600">
+                      <a:solidFill>
+                        <a:srgbClr val="B2B2B2"/>
+                      </a:solidFill>
+                    </a:lnR>
+                    <a:lnT w="3600">
+                      <a:solidFill>
+                        <a:srgbClr val="B2B2B2"/>
+                      </a:solidFill>
+                    </a:lnT>
+                    <a:lnB w="3600">
+                      <a:solidFill>
+                        <a:srgbClr val="B2B2B2"/>
+                      </a:solidFill>
+                    </a:lnB>
+                  </a:tcPr>
+                </a:tc>
+                <a:tc>
+                  <a:txBody>
+                    <a:bodyPr wrap="square" lIns="13716" rIns="13716" tIns="9144" bIns="5486"/>
+                    <a:lstStyle/>
+                    <a:p>
+                      <a:pPr algn="l">
+                        <a:lnSpc>
+                          <a:spcPct val="88000"/>
+                        </a:lnSpc>
                       </a:pPr>
                       <a:r>
-                        <a:rPr sz="455" b="1">
+                        <a:rPr sz="345" b="0">
                           <a:solidFill>
                             <a:srgbClr val="000000"/>
                           </a:solidFill>
-                          <a:latin typeface="Microsoft YaHei UI"/>
+                          <a:latin typeface="Noto Sans CJK SC"/>
                         </a:rPr>
-                        <a:t>银河通用 Galbot</a:t>
+                        <a:t>AstraBrain-WBC 0.5 是 8040 万参数全身实时运控小脑。</a:t>
                       </a:r>
                     </a:p>
                   </a:txBody>
-                  <a:tcPr anchor="ctr" marL="32004" marR="32004" marT="10972" marB="10972">
-                    <a:solidFill>
-                      <a:srgbClr val="FFFFFF"/>
-                    </a:solidFill>
-                    <a:lnL w="2400">
-                      <a:solidFill>
-                        <a:srgbClr val="B4C0CD"/>
-                      </a:solidFill>
-                    </a:lnL>
-                    <a:lnR w="2400">
-                      <a:solidFill>
-                        <a:srgbClr val="B4C0CD"/>
-                      </a:solidFill>
-                    </a:lnR>
-                    <a:lnT w="2400">
-                      <a:solidFill>
-                        <a:srgbClr val="B4C0CD"/>
-                      </a:solidFill>
-                    </a:lnT>
-                    <a:lnB w="2400">
-                      <a:solidFill>
-                        <a:srgbClr val="B4C0CD"/>
-                      </a:solidFill>
-                    </a:lnB>
-                  </a:tcPr>
-                </a:tc>
-                <a:tc>
-                  <a:txBody>
-                    <a:bodyPr wrap="square">
-                      <a:normAutofit/>
-                    </a:bodyPr>
+                  <a:tcPr anchor="t">
+                    <a:solidFill>
+                      <a:srgbClr val="FFFFFF"/>
+                    </a:solidFill>
+                    <a:lnL w="3600">
+                      <a:solidFill>
+                        <a:srgbClr val="B2B2B2"/>
+                      </a:solidFill>
+                    </a:lnL>
+                    <a:lnR w="3600">
+                      <a:solidFill>
+                        <a:srgbClr val="B2B2B2"/>
+                      </a:solidFill>
+                    </a:lnR>
+                    <a:lnT w="3600">
+                      <a:solidFill>
+                        <a:srgbClr val="B2B2B2"/>
+                      </a:solidFill>
+                    </a:lnT>
+                    <a:lnB w="3600">
+                      <a:solidFill>
+                        <a:srgbClr val="B2B2B2"/>
+                      </a:solidFill>
+                    </a:lnB>
+                  </a:tcPr>
+                </a:tc>
+                <a:tc>
+                  <a:txBody>
+                    <a:bodyPr wrap="square" lIns="13716" rIns="13716" tIns="9144" bIns="5486"/>
                     <a:lstStyle/>
                     <a:p>
                       <a:pPr algn="l">
                         <a:lnSpc>
                           <a:spcPct val="88000"/>
                         </a:lnSpc>
-                        <a:spcBef>
-                          <a:spcPts val="0"/>
-                        </a:spcBef>
-                        <a:spcAft>
-                          <a:spcPts val="0"/>
-                        </a:spcAft>
                       </a:pPr>
                       <a:r>
-                        <a:rPr sz="400" b="0">
+                        <a:rPr sz="345" b="0">
                           <a:solidFill>
                             <a:srgbClr val="000000"/>
                           </a:solidFill>
-                          <a:latin typeface="Microsoft YaHei UI"/>
+                          <a:latin typeface="Noto Sans CJK SC"/>
                         </a:rPr>
-                        <a:t>LDA-1B 是 1B 隐式世界-动作基础模型，AstraBrain WAM 是世界动作模型，GraspVLA/GroceryVLA/TrackVLA 是技能 VLA。</a:t>
+                        <a:t>WBC 测试用 RTX 4090，并支持 Jetson Orin onboard；大脑生产部署算力未公开。</a:t>
                       </a:r>
                     </a:p>
                   </a:txBody>
-                  <a:tcPr anchor="ctr" marL="32004" marR="32004" marT="10972" marB="10972">
-                    <a:solidFill>
-                      <a:srgbClr val="FFFFFF"/>
-                    </a:solidFill>
-                    <a:lnL w="2400">
-                      <a:solidFill>
-                        <a:srgbClr val="B4C0CD"/>
-                      </a:solidFill>
-                    </a:lnL>
-                    <a:lnR w="2400">
-                      <a:solidFill>
-                        <a:srgbClr val="B4C0CD"/>
-                      </a:solidFill>
-                    </a:lnR>
-                    <a:lnT w="2400">
-                      <a:solidFill>
-                        <a:srgbClr val="B4C0CD"/>
-                      </a:solidFill>
-                    </a:lnT>
-                    <a:lnB w="2400">
-                      <a:solidFill>
-                        <a:srgbClr val="B4C0CD"/>
-                      </a:solidFill>
-                    </a:lnB>
-                  </a:tcPr>
-                </a:tc>
-                <a:tc>
-                  <a:txBody>
-                    <a:bodyPr wrap="square">
-                      <a:normAutofit/>
-                    </a:bodyPr>
+                  <a:tcPr anchor="t">
+                    <a:solidFill>
+                      <a:srgbClr val="FFFFFF"/>
+                    </a:solidFill>
+                    <a:lnL w="3600">
+                      <a:solidFill>
+                        <a:srgbClr val="B2B2B2"/>
+                      </a:solidFill>
+                    </a:lnL>
+                    <a:lnR w="3600">
+                      <a:solidFill>
+                        <a:srgbClr val="B2B2B2"/>
+                      </a:solidFill>
+                    </a:lnR>
+                    <a:lnT w="3600">
+                      <a:solidFill>
+                        <a:srgbClr val="B2B2B2"/>
+                      </a:solidFill>
+                    </a:lnT>
+                    <a:lnB w="3600">
+                      <a:solidFill>
+                        <a:srgbClr val="B2B2B2"/>
+                      </a:solidFill>
+                    </a:lnB>
+                  </a:tcPr>
+                </a:tc>
+                <a:tc>
+                  <a:txBody>
+                    <a:bodyPr wrap="square" lIns="13716" rIns="13716" tIns="9144" bIns="5486"/>
                     <a:lstStyle/>
                     <a:p>
                       <a:pPr algn="l">
                         <a:lnSpc>
                           <a:spcPct val="88000"/>
                         </a:lnSpc>
-                        <a:spcBef>
-                          <a:spcPts val="0"/>
-                        </a:spcBef>
-                        <a:spcAft>
-                          <a:spcPts val="0"/>
-                        </a:spcAft>
                       </a:pPr>
                       <a:r>
-                        <a:rPr sz="455" b="0">
+                        <a:rPr sz="365" b="0">
                           <a:solidFill>
                             <a:srgbClr val="000000"/>
                           </a:solidFill>
-                          <a:latin typeface="Microsoft YaHei UI"/>
+                          <a:latin typeface="Noto Sans CJK SC"/>
                         </a:rPr>
-                        <a:t>AstraBrain-WBC 0.5 是 8040 万参数全身实时运控小脑。</a:t>
+                        <a:t>WBC 低于 1.5ms，可满足 50Hz 闭环。</a:t>
                       </a:r>
                     </a:p>
                   </a:txBody>
-                  <a:tcPr anchor="ctr" marL="32004" marR="32004" marT="10972" marB="10972">
-                    <a:solidFill>
-                      <a:srgbClr val="FFFFFF"/>
-                    </a:solidFill>
-                    <a:lnL w="2400">
-                      <a:solidFill>
-                        <a:srgbClr val="B4C0CD"/>
-                      </a:solidFill>
-                    </a:lnL>
-                    <a:lnR w="2400">
-                      <a:solidFill>
-                        <a:srgbClr val="B4C0CD"/>
-                      </a:solidFill>
-                    </a:lnR>
-                    <a:lnT w="2400">
-                      <a:solidFill>
-                        <a:srgbClr val="B4C0CD"/>
-                      </a:solidFill>
-                    </a:lnT>
-                    <a:lnB w="2400">
-                      <a:solidFill>
-                        <a:srgbClr val="B4C0CD"/>
-                      </a:solidFill>
-                    </a:lnB>
-                  </a:tcPr>
-                </a:tc>
-                <a:tc>
-                  <a:txBody>
-                    <a:bodyPr wrap="square">
-                      <a:normAutofit/>
-                    </a:bodyPr>
-                    <a:lstStyle/>
-                    <a:p>
-                      <a:pPr algn="l">
-                        <a:lnSpc>
-                          <a:spcPct val="88000"/>
-                        </a:lnSpc>
-                        <a:spcBef>
-                          <a:spcPts val="0"/>
-                        </a:spcBef>
-                        <a:spcAft>
-                          <a:spcPts val="0"/>
-                        </a:spcAft>
+                  <a:tcPr anchor="t">
+                    <a:solidFill>
+                      <a:srgbClr val="FFFFFF"/>
+                    </a:solidFill>
+                    <a:lnL w="3600">
+                      <a:solidFill>
+                        <a:srgbClr val="B2B2B2"/>
+                      </a:solidFill>
+                    </a:lnL>
+                    <a:lnR w="3600">
+                      <a:solidFill>
+                        <a:srgbClr val="B2B2B2"/>
+                      </a:solidFill>
+                    </a:lnR>
+                    <a:lnT w="3600">
+                      <a:solidFill>
+                        <a:srgbClr val="B2B2B2"/>
+                      </a:solidFill>
+                    </a:lnT>
+                    <a:lnB w="3600">
+                      <a:solidFill>
+                        <a:srgbClr val="B2B2B2"/>
+                      </a:solidFill>
+                    </a:lnB>
+                  </a:tcPr>
+                </a:tc>
+              </a:tr>
+              <a:tr h="272034">
+                <a:tc vMerge="1">
+                  <a:txBody>
+                    <a:bodyPr/>
+                    <a:lstStyle/>
+                    <a:p/>
+                  </a:txBody>
+                  <a:tcPr>
+                    <a:lnL w="3600">
+                      <a:solidFill>
+                        <a:srgbClr val="B2B2B2"/>
+                      </a:solidFill>
+                    </a:lnL>
+                    <a:lnR w="3600">
+                      <a:solidFill>
+                        <a:srgbClr val="B2B2B2"/>
+                      </a:solidFill>
+                    </a:lnR>
+                    <a:lnT w="3600">
+                      <a:solidFill>
+                        <a:srgbClr val="B2B2B2"/>
+                      </a:solidFill>
+                    </a:lnT>
+                    <a:lnB w="3600">
+                      <a:solidFill>
+                        <a:srgbClr val="B2B2B2"/>
+                      </a:solidFill>
+                    </a:lnB>
+                  </a:tcPr>
+                </a:tc>
+                <a:tc>
+                  <a:txBody>
+                    <a:bodyPr wrap="square" lIns="13716" rIns="13716" tIns="9144" bIns="5486"/>
+                    <a:lstStyle/>
+                    <a:p>
+                      <a:pPr algn="ctr">
+                        <a:lnSpc>
+                          <a:spcPct val="88000"/>
+                        </a:lnSpc>
                       </a:pPr>
                       <a:r>
-                        <a:rPr sz="400" b="0">
+                        <a:rPr sz="365" b="0">
                           <a:solidFill>
                             <a:srgbClr val="000000"/>
                           </a:solidFill>
-                          <a:latin typeface="Microsoft YaHei UI"/>
+                          <a:latin typeface="Noto Sans CJK SC"/>
                         </a:rPr>
-                        <a:t>AstraBrain-WBC 0.5 公开测试使用单张 RTX 4090，并支持 Jetson Orin onboard deployment；LDA-1B 生产部署算力未公开。</a:t>
+                        <a:t>智平方 AI2</a:t>
                       </a:r>
                     </a:p>
                   </a:txBody>
-                  <a:tcPr anchor="ctr" marL="32004" marR="32004" marT="10972" marB="10972">
-                    <a:solidFill>
-                      <a:srgbClr val="FFFFFF"/>
-                    </a:solidFill>
-                    <a:lnL w="2400">
-                      <a:solidFill>
-                        <a:srgbClr val="B4C0CD"/>
-                      </a:solidFill>
-                    </a:lnL>
-                    <a:lnR w="2400">
-                      <a:solidFill>
-                        <a:srgbClr val="B4C0CD"/>
-                      </a:solidFill>
-                    </a:lnR>
-                    <a:lnT w="2400">
-                      <a:solidFill>
-                        <a:srgbClr val="B4C0CD"/>
-                      </a:solidFill>
-                    </a:lnT>
-                    <a:lnB w="2400">
-                      <a:solidFill>
-                        <a:srgbClr val="B4C0CD"/>
-                      </a:solidFill>
-                    </a:lnB>
-                  </a:tcPr>
-                </a:tc>
-                <a:tc>
-                  <a:txBody>
-                    <a:bodyPr wrap="square">
-                      <a:normAutofit/>
-                    </a:bodyPr>
+                  <a:tcPr anchor="t">
+                    <a:solidFill>
+                      <a:srgbClr val="FFFFFF"/>
+                    </a:solidFill>
+                    <a:lnL w="3600">
+                      <a:solidFill>
+                        <a:srgbClr val="B2B2B2"/>
+                      </a:solidFill>
+                    </a:lnL>
+                    <a:lnR w="3600">
+                      <a:solidFill>
+                        <a:srgbClr val="B2B2B2"/>
+                      </a:solidFill>
+                    </a:lnR>
+                    <a:lnT w="3600">
+                      <a:solidFill>
+                        <a:srgbClr val="B2B2B2"/>
+                      </a:solidFill>
+                    </a:lnT>
+                    <a:lnB w="3600">
+                      <a:solidFill>
+                        <a:srgbClr val="B2B2B2"/>
+                      </a:solidFill>
+                    </a:lnB>
+                  </a:tcPr>
+                </a:tc>
+                <a:tc>
+                  <a:txBody>
+                    <a:bodyPr wrap="square" lIns="13716" rIns="13716" tIns="9144" bIns="5486"/>
                     <a:lstStyle/>
                     <a:p>
                       <a:pPr algn="l">
                         <a:lnSpc>
                           <a:spcPct val="88000"/>
                         </a:lnSpc>
-                        <a:spcBef>
-                          <a:spcPts val="0"/>
-                        </a:spcBef>
-                        <a:spcAft>
-                          <a:spcPts val="0"/>
-                        </a:spcAft>
                       </a:pPr>
                       <a:r>
-                        <a:rPr sz="400" b="0">
+                        <a:rPr sz="345" b="0">
                           <a:solidFill>
                             <a:srgbClr val="000000"/>
                           </a:solidFill>
-                          <a:latin typeface="Microsoft YaHei UI"/>
+                          <a:latin typeface="Noto Sans CJK SC"/>
                         </a:rPr>
-                        <a:t>AstraBrain-WBC 0.5 在 RTX 4090 上推理低于 1.5ms，可满足 50Hz 闭环。</a:t>
+                        <a:t>AlphaBrain 是具身大模型，GOVLA/FiS-VLA 是异构输入和异步频率的双系统 VLA，参数未公开。</a:t>
                       </a:r>
                     </a:p>
                   </a:txBody>
-                  <a:tcPr anchor="ctr" marL="32004" marR="32004" marT="10972" marB="10972">
-                    <a:solidFill>
-                      <a:srgbClr val="FFFFFF"/>
-                    </a:solidFill>
-                    <a:lnL w="2400">
-                      <a:solidFill>
-                        <a:srgbClr val="B4C0CD"/>
-                      </a:solidFill>
-                    </a:lnL>
-                    <a:lnR w="2400">
-                      <a:solidFill>
-                        <a:srgbClr val="B4C0CD"/>
-                      </a:solidFill>
-                    </a:lnR>
-                    <a:lnT w="2400">
-                      <a:solidFill>
-                        <a:srgbClr val="B4C0CD"/>
-                      </a:solidFill>
-                    </a:lnT>
-                    <a:lnB w="2400">
-                      <a:solidFill>
-                        <a:srgbClr val="B4C0CD"/>
+                  <a:tcPr anchor="t">
+                    <a:solidFill>
+                      <a:srgbClr val="FFFFFF"/>
+                    </a:solidFill>
+                    <a:lnL w="3600">
+                      <a:solidFill>
+                        <a:srgbClr val="B2B2B2"/>
+                      </a:solidFill>
+                    </a:lnL>
+                    <a:lnR w="3600">
+                      <a:solidFill>
+                        <a:srgbClr val="B2B2B2"/>
+                      </a:solidFill>
+                    </a:lnR>
+                    <a:lnT w="3600">
+                      <a:solidFill>
+                        <a:srgbClr val="B2B2B2"/>
+                      </a:solidFill>
+                    </a:lnT>
+                    <a:lnB w="3600">
+                      <a:solidFill>
+                        <a:srgbClr val="B2B2B2"/>
+                      </a:solidFill>
+                    </a:lnB>
+                  </a:tcPr>
+                </a:tc>
+                <a:tc>
+                  <a:txBody>
+                    <a:bodyPr wrap="square" lIns="13716" rIns="13716" tIns="9144" bIns="5486"/>
+                    <a:lstStyle/>
+                    <a:p>
+                      <a:pPr algn="l">
+                        <a:lnSpc>
+                          <a:spcPct val="88000"/>
+                        </a:lnSpc>
+                      </a:pPr>
+                    </a:p>
+                  </a:txBody>
+                  <a:tcPr anchor="t">
+                    <a:solidFill>
+                      <a:srgbClr val="FFFFFF"/>
+                    </a:solidFill>
+                    <a:lnL w="3600">
+                      <a:solidFill>
+                        <a:srgbClr val="B2B2B2"/>
+                      </a:solidFill>
+                    </a:lnL>
+                    <a:lnR w="3600">
+                      <a:solidFill>
+                        <a:srgbClr val="B2B2B2"/>
+                      </a:solidFill>
+                    </a:lnR>
+                    <a:lnT w="3600">
+                      <a:solidFill>
+                        <a:srgbClr val="B2B2B2"/>
+                      </a:solidFill>
+                    </a:lnT>
+                    <a:lnB w="3600">
+                      <a:solidFill>
+                        <a:srgbClr val="B2B2B2"/>
+                      </a:solidFill>
+                    </a:lnB>
+                  </a:tcPr>
+                </a:tc>
+                <a:tc>
+                  <a:txBody>
+                    <a:bodyPr wrap="square" lIns="13716" rIns="13716" tIns="9144" bIns="5486"/>
+                    <a:lstStyle/>
+                    <a:p>
+                      <a:pPr algn="l">
+                        <a:lnSpc>
+                          <a:spcPct val="88000"/>
+                        </a:lnSpc>
+                      </a:pPr>
+                    </a:p>
+                  </a:txBody>
+                  <a:tcPr anchor="t">
+                    <a:solidFill>
+                      <a:srgbClr val="FFFFFF"/>
+                    </a:solidFill>
+                    <a:lnL w="3600">
+                      <a:solidFill>
+                        <a:srgbClr val="B2B2B2"/>
+                      </a:solidFill>
+                    </a:lnL>
+                    <a:lnR w="3600">
+                      <a:solidFill>
+                        <a:srgbClr val="B2B2B2"/>
+                      </a:solidFill>
+                    </a:lnR>
+                    <a:lnT w="3600">
+                      <a:solidFill>
+                        <a:srgbClr val="B2B2B2"/>
+                      </a:solidFill>
+                    </a:lnT>
+                    <a:lnB w="3600">
+                      <a:solidFill>
+                        <a:srgbClr val="B2B2B2"/>
+                      </a:solidFill>
+                    </a:lnB>
+                  </a:tcPr>
+                </a:tc>
+                <a:tc>
+                  <a:txBody>
+                    <a:bodyPr wrap="square" lIns="13716" rIns="13716" tIns="9144" bIns="5486"/>
+                    <a:lstStyle/>
+                    <a:p>
+                      <a:pPr algn="l">
+                        <a:lnSpc>
+                          <a:spcPct val="88000"/>
+                        </a:lnSpc>
+                      </a:pPr>
+                    </a:p>
+                  </a:txBody>
+                  <a:tcPr anchor="t">
+                    <a:solidFill>
+                      <a:srgbClr val="FFFFFF"/>
+                    </a:solidFill>
+                    <a:lnL w="3600">
+                      <a:solidFill>
+                        <a:srgbClr val="B2B2B2"/>
+                      </a:solidFill>
+                    </a:lnL>
+                    <a:lnR w="3600">
+                      <a:solidFill>
+                        <a:srgbClr val="B2B2B2"/>
+                      </a:solidFill>
+                    </a:lnR>
+                    <a:lnT w="3600">
+                      <a:solidFill>
+                        <a:srgbClr val="B2B2B2"/>
+                      </a:solidFill>
+                    </a:lnT>
+                    <a:lnB w="3600">
+                      <a:solidFill>
+                        <a:srgbClr val="B2B2B2"/>
                       </a:solidFill>
                     </a:lnB>
                   </a:tcPr>
                 </a:tc>
               </a:tr>
-              <a:tr h="379827">
+              <a:tr h="272034">
                 <a:tc vMerge="1">
                   <a:txBody>
-                    <a:bodyPr wrap="square">
-                      <a:normAutofit/>
-                    </a:bodyPr>
-                    <a:lstStyle/>
-                    <a:p>
-                      <a:pPr algn="l">
-                        <a:lnSpc>
-                          <a:spcPct val="88000"/>
-                        </a:lnSpc>
-                        <a:spcBef>
-                          <a:spcPts val="0"/>
-                        </a:spcBef>
-                        <a:spcAft>
-                          <a:spcPts val="0"/>
-                        </a:spcAft>
+                    <a:bodyPr/>
+                    <a:lstStyle/>
+                    <a:p/>
+                  </a:txBody>
+                  <a:tcPr>
+                    <a:lnL w="3600">
+                      <a:solidFill>
+                        <a:srgbClr val="B2B2B2"/>
+                      </a:solidFill>
+                    </a:lnL>
+                    <a:lnR w="3600">
+                      <a:solidFill>
+                        <a:srgbClr val="B2B2B2"/>
+                      </a:solidFill>
+                    </a:lnR>
+                    <a:lnT w="3600">
+                      <a:solidFill>
+                        <a:srgbClr val="B2B2B2"/>
+                      </a:solidFill>
+                    </a:lnT>
+                    <a:lnB w="3600">
+                      <a:solidFill>
+                        <a:srgbClr val="B2B2B2"/>
+                      </a:solidFill>
+                    </a:lnB>
+                  </a:tcPr>
+                </a:tc>
+                <a:tc>
+                  <a:txBody>
+                    <a:bodyPr wrap="square" lIns="13716" rIns="13716" tIns="9144" bIns="5486"/>
+                    <a:lstStyle/>
+                    <a:p>
+                      <a:pPr algn="ctr">
+                        <a:lnSpc>
+                          <a:spcPct val="88000"/>
+                        </a:lnSpc>
                       </a:pPr>
                       <a:r>
-                        <a:rPr sz="455" b="0">
+                        <a:rPr sz="365" b="0">
                           <a:solidFill>
                             <a:srgbClr val="000000"/>
                           </a:solidFill>
-                          <a:latin typeface="Microsoft YaHei UI"/>
+                          <a:latin typeface="Noto Sans CJK SC"/>
                         </a:rPr>
-                        <a:t/>
+                        <a:t>自变量 X Square</a:t>
                       </a:r>
                     </a:p>
                   </a:txBody>
-                  <a:tcPr anchor="ctr" marL="32004" marR="32004" marT="10972" marB="10972">
-                    <a:solidFill>
-                      <a:srgbClr val="F4F7FA"/>
-                    </a:solidFill>
-                    <a:lnL w="2400">
-                      <a:solidFill>
-                        <a:srgbClr val="B4C0CD"/>
-                      </a:solidFill>
-                    </a:lnL>
-                    <a:lnR w="2400">
-                      <a:solidFill>
-                        <a:srgbClr val="B4C0CD"/>
-                      </a:solidFill>
-                    </a:lnR>
-                    <a:lnT w="2400">
-                      <a:solidFill>
-                        <a:srgbClr val="B4C0CD"/>
-                      </a:solidFill>
-                    </a:lnT>
-                    <a:lnB w="2400">
-                      <a:solidFill>
-                        <a:srgbClr val="B4C0CD"/>
-                      </a:solidFill>
-                    </a:lnB>
-                  </a:tcPr>
-                </a:tc>
-                <a:tc>
-                  <a:txBody>
-                    <a:bodyPr wrap="square">
-                      <a:normAutofit/>
-                    </a:bodyPr>
-                    <a:lstStyle/>
-                    <a:p>
-                      <a:pPr algn="ctr">
-                        <a:lnSpc>
-                          <a:spcPct val="88000"/>
-                        </a:lnSpc>
-                        <a:spcBef>
-                          <a:spcPts val="0"/>
-                        </a:spcBef>
-                        <a:spcAft>
-                          <a:spcPts val="0"/>
-                        </a:spcAft>
+                  <a:tcPr anchor="t">
+                    <a:solidFill>
+                      <a:srgbClr val="FFFFFF"/>
+                    </a:solidFill>
+                    <a:lnL w="3600">
+                      <a:solidFill>
+                        <a:srgbClr val="B2B2B2"/>
+                      </a:solidFill>
+                    </a:lnL>
+                    <a:lnR w="3600">
+                      <a:solidFill>
+                        <a:srgbClr val="B2B2B2"/>
+                      </a:solidFill>
+                    </a:lnR>
+                    <a:lnT w="3600">
+                      <a:solidFill>
+                        <a:srgbClr val="B2B2B2"/>
+                      </a:solidFill>
+                    </a:lnT>
+                    <a:lnB w="3600">
+                      <a:solidFill>
+                        <a:srgbClr val="B2B2B2"/>
+                      </a:solidFill>
+                    </a:lnB>
+                  </a:tcPr>
+                </a:tc>
+                <a:tc>
+                  <a:txBody>
+                    <a:bodyPr wrap="square" lIns="13716" rIns="13716" tIns="9144" bIns="5486"/>
+                    <a:lstStyle/>
+                    <a:p>
+                      <a:pPr algn="l">
+                        <a:lnSpc>
+                          <a:spcPct val="88000"/>
+                        </a:lnSpc>
                       </a:pPr>
                       <a:r>
-                        <a:rPr sz="455" b="1">
+                        <a:rPr sz="345" b="0">
                           <a:solidFill>
                             <a:srgbClr val="000000"/>
                           </a:solidFill>
-                          <a:latin typeface="Microsoft YaHei UI"/>
+                          <a:latin typeface="Noto Sans CJK SC"/>
                         </a:rPr>
-                        <a:t>智平方 AI2</a:t>
+                        <a:t>WALL-B 是世界统一模型，Wall-OSS-0.5 是端到端预训练模型，参数未公开。</a:t>
                       </a:r>
                     </a:p>
                   </a:txBody>
-                  <a:tcPr anchor="ctr" marL="32004" marR="32004" marT="10972" marB="10972">
-                    <a:solidFill>
-                      <a:srgbClr val="F4F7FA"/>
-                    </a:solidFill>
-                    <a:lnL w="2400">
-                      <a:solidFill>
-                        <a:srgbClr val="B4C0CD"/>
-                      </a:solidFill>
-                    </a:lnL>
-                    <a:lnR w="2400">
-                      <a:solidFill>
-                        <a:srgbClr val="B4C0CD"/>
-                      </a:solidFill>
-                    </a:lnR>
-                    <a:lnT w="2400">
-                      <a:solidFill>
-                        <a:srgbClr val="B4C0CD"/>
-                      </a:solidFill>
-                    </a:lnT>
-                    <a:lnB w="2400">
-                      <a:solidFill>
-                        <a:srgbClr val="B4C0CD"/>
-                      </a:solidFill>
-                    </a:lnB>
-                  </a:tcPr>
-                </a:tc>
-                <a:tc>
-                  <a:txBody>
-                    <a:bodyPr wrap="square">
-                      <a:normAutofit/>
-                    </a:bodyPr>
+                  <a:tcPr anchor="t">
+                    <a:solidFill>
+                      <a:srgbClr val="FFFFFF"/>
+                    </a:solidFill>
+                    <a:lnL w="3600">
+                      <a:solidFill>
+                        <a:srgbClr val="B2B2B2"/>
+                      </a:solidFill>
+                    </a:lnL>
+                    <a:lnR w="3600">
+                      <a:solidFill>
+                        <a:srgbClr val="B2B2B2"/>
+                      </a:solidFill>
+                    </a:lnR>
+                    <a:lnT w="3600">
+                      <a:solidFill>
+                        <a:srgbClr val="B2B2B2"/>
+                      </a:solidFill>
+                    </a:lnT>
+                    <a:lnB w="3600">
+                      <a:solidFill>
+                        <a:srgbClr val="B2B2B2"/>
+                      </a:solidFill>
+                    </a:lnB>
+                  </a:tcPr>
+                </a:tc>
+                <a:tc>
+                  <a:txBody>
+                    <a:bodyPr wrap="square" lIns="13716" rIns="13716" tIns="9144" bIns="5486"/>
                     <a:lstStyle/>
                     <a:p>
                       <a:pPr algn="l">
                         <a:lnSpc>
                           <a:spcPct val="88000"/>
                         </a:lnSpc>
-                        <a:spcBef>
-                          <a:spcPts val="0"/>
-                        </a:spcBef>
-                        <a:spcAft>
-                          <a:spcPts val="0"/>
-                        </a:spcAft>
+                      </a:pPr>
+                    </a:p>
+                  </a:txBody>
+                  <a:tcPr anchor="t">
+                    <a:solidFill>
+                      <a:srgbClr val="FFFFFF"/>
+                    </a:solidFill>
+                    <a:lnL w="3600">
+                      <a:solidFill>
+                        <a:srgbClr val="B2B2B2"/>
+                      </a:solidFill>
+                    </a:lnL>
+                    <a:lnR w="3600">
+                      <a:solidFill>
+                        <a:srgbClr val="B2B2B2"/>
+                      </a:solidFill>
+                    </a:lnR>
+                    <a:lnT w="3600">
+                      <a:solidFill>
+                        <a:srgbClr val="B2B2B2"/>
+                      </a:solidFill>
+                    </a:lnT>
+                    <a:lnB w="3600">
+                      <a:solidFill>
+                        <a:srgbClr val="B2B2B2"/>
+                      </a:solidFill>
+                    </a:lnB>
+                  </a:tcPr>
+                </a:tc>
+                <a:tc>
+                  <a:txBody>
+                    <a:bodyPr wrap="square" lIns="13716" rIns="13716" tIns="9144" bIns="5486"/>
+                    <a:lstStyle/>
+                    <a:p>
+                      <a:pPr algn="l">
+                        <a:lnSpc>
+                          <a:spcPct val="88000"/>
+                        </a:lnSpc>
                       </a:pPr>
                       <a:r>
-                        <a:rPr sz="430" b="0">
+                        <a:rPr sz="345" b="0">
                           <a:solidFill>
                             <a:srgbClr val="000000"/>
                           </a:solidFill>
-                          <a:latin typeface="Microsoft YaHei UI"/>
+                          <a:latin typeface="Noto Sans CJK SC"/>
                         </a:rPr>
-                        <a:t>AlphaBrain 是具身大模型，GOVLA/FiS-VLA 是采用异构输入和异步频率的双系统 VLA，参数未公开。</a:t>
+                        <a:t>模型已上真机，端云分工未公开。</a:t>
                       </a:r>
                     </a:p>
                   </a:txBody>
-                  <a:tcPr anchor="ctr" marL="32004" marR="32004" marT="10972" marB="10972">
-                    <a:solidFill>
-                      <a:srgbClr val="F4F7FA"/>
-                    </a:solidFill>
-                    <a:lnL w="2400">
-                      <a:solidFill>
-                        <a:srgbClr val="B4C0CD"/>
-                      </a:solidFill>
-                    </a:lnL>
-                    <a:lnR w="2400">
-                      <a:solidFill>
-                        <a:srgbClr val="B4C0CD"/>
-                      </a:solidFill>
-                    </a:lnR>
-                    <a:lnT w="2400">
-                      <a:solidFill>
-                        <a:srgbClr val="B4C0CD"/>
-                      </a:solidFill>
-                    </a:lnT>
-                    <a:lnB w="2400">
-                      <a:solidFill>
-                        <a:srgbClr val="B4C0CD"/>
-                      </a:solidFill>
-                    </a:lnB>
-                  </a:tcPr>
-                </a:tc>
-                <a:tc>
-                  <a:txBody>
-                    <a:bodyPr wrap="square">
-                      <a:normAutofit/>
-                    </a:bodyPr>
+                  <a:tcPr anchor="t">
+                    <a:solidFill>
+                      <a:srgbClr val="FFFFFF"/>
+                    </a:solidFill>
+                    <a:lnL w="3600">
+                      <a:solidFill>
+                        <a:srgbClr val="B2B2B2"/>
+                      </a:solidFill>
+                    </a:lnL>
+                    <a:lnR w="3600">
+                      <a:solidFill>
+                        <a:srgbClr val="B2B2B2"/>
+                      </a:solidFill>
+                    </a:lnR>
+                    <a:lnT w="3600">
+                      <a:solidFill>
+                        <a:srgbClr val="B2B2B2"/>
+                      </a:solidFill>
+                    </a:lnT>
+                    <a:lnB w="3600">
+                      <a:solidFill>
+                        <a:srgbClr val="B2B2B2"/>
+                      </a:solidFill>
+                    </a:lnB>
+                  </a:tcPr>
+                </a:tc>
+                <a:tc>
+                  <a:txBody>
+                    <a:bodyPr wrap="square" lIns="13716" rIns="13716" tIns="9144" bIns="5486"/>
                     <a:lstStyle/>
                     <a:p>
                       <a:pPr algn="l">
                         <a:lnSpc>
                           <a:spcPct val="88000"/>
                         </a:lnSpc>
-                        <a:spcBef>
-                          <a:spcPts val="0"/>
-                        </a:spcBef>
-                        <a:spcAft>
-                          <a:spcPts val="0"/>
-                        </a:spcAft>
+                      </a:pPr>
+                    </a:p>
+                  </a:txBody>
+                  <a:tcPr anchor="t">
+                    <a:solidFill>
+                      <a:srgbClr val="FFFFFF"/>
+                    </a:solidFill>
+                    <a:lnL w="3600">
+                      <a:solidFill>
+                        <a:srgbClr val="B2B2B2"/>
+                      </a:solidFill>
+                    </a:lnL>
+                    <a:lnR w="3600">
+                      <a:solidFill>
+                        <a:srgbClr val="B2B2B2"/>
+                      </a:solidFill>
+                    </a:lnR>
+                    <a:lnT w="3600">
+                      <a:solidFill>
+                        <a:srgbClr val="B2B2B2"/>
+                      </a:solidFill>
+                    </a:lnT>
+                    <a:lnB w="3600">
+                      <a:solidFill>
+                        <a:srgbClr val="B2B2B2"/>
+                      </a:solidFill>
+                    </a:lnB>
+                  </a:tcPr>
+                </a:tc>
+              </a:tr>
+              <a:tr h="272034">
+                <a:tc vMerge="1">
+                  <a:txBody>
+                    <a:bodyPr/>
+                    <a:lstStyle/>
+                    <a:p/>
+                  </a:txBody>
+                  <a:tcPr>
+                    <a:lnL w="3600">
+                      <a:solidFill>
+                        <a:srgbClr val="B2B2B2"/>
+                      </a:solidFill>
+                    </a:lnL>
+                    <a:lnR w="3600">
+                      <a:solidFill>
+                        <a:srgbClr val="B2B2B2"/>
+                      </a:solidFill>
+                    </a:lnR>
+                    <a:lnT w="3600">
+                      <a:solidFill>
+                        <a:srgbClr val="B2B2B2"/>
+                      </a:solidFill>
+                    </a:lnT>
+                    <a:lnB w="3600">
+                      <a:solidFill>
+                        <a:srgbClr val="B2B2B2"/>
+                      </a:solidFill>
+                    </a:lnB>
+                  </a:tcPr>
+                </a:tc>
+                <a:tc>
+                  <a:txBody>
+                    <a:bodyPr wrap="square" lIns="13716" rIns="13716" tIns="9144" bIns="5486"/>
+                    <a:lstStyle/>
+                    <a:p>
+                      <a:pPr algn="ctr">
+                        <a:lnSpc>
+                          <a:spcPct val="88000"/>
+                        </a:lnSpc>
                       </a:pPr>
                       <a:r>
-                        <a:rPr sz="455" b="0">
+                        <a:rPr sz="365" b="0">
                           <a:solidFill>
                             <a:srgbClr val="000000"/>
                           </a:solidFill>
-                          <a:latin typeface="Microsoft YaHei UI"/>
+                          <a:latin typeface="Noto Sans CJK SC"/>
                         </a:rPr>
-                        <a:t/>
+                        <a:t>魔法原子 MagicLab</a:t>
                       </a:r>
                     </a:p>
                   </a:txBody>
-                  <a:tcPr anchor="ctr" marL="32004" marR="32004" marT="10972" marB="10972">
-                    <a:solidFill>
-                      <a:srgbClr val="F4F7FA"/>
-                    </a:solidFill>
-                    <a:lnL w="2400">
-                      <a:solidFill>
-                        <a:srgbClr val="B4C0CD"/>
-                      </a:solidFill>
-                    </a:lnL>
-                    <a:lnR w="2400">
-                      <a:solidFill>
-                        <a:srgbClr val="B4C0CD"/>
-                      </a:solidFill>
-                    </a:lnR>
-                    <a:lnT w="2400">
-                      <a:solidFill>
-                        <a:srgbClr val="B4C0CD"/>
-                      </a:solidFill>
-                    </a:lnT>
-                    <a:lnB w="2400">
-                      <a:solidFill>
-                        <a:srgbClr val="B4C0CD"/>
-                      </a:solidFill>
-                    </a:lnB>
-                  </a:tcPr>
-                </a:tc>
-                <a:tc>
-                  <a:txBody>
-                    <a:bodyPr wrap="square">
-                      <a:normAutofit/>
-                    </a:bodyPr>
+                  <a:tcPr anchor="t">
+                    <a:solidFill>
+                      <a:srgbClr val="FFFFFF"/>
+                    </a:solidFill>
+                    <a:lnL w="3600">
+                      <a:solidFill>
+                        <a:srgbClr val="B2B2B2"/>
+                      </a:solidFill>
+                    </a:lnL>
+                    <a:lnR w="3600">
+                      <a:solidFill>
+                        <a:srgbClr val="B2B2B2"/>
+                      </a:solidFill>
+                    </a:lnR>
+                    <a:lnT w="3600">
+                      <a:solidFill>
+                        <a:srgbClr val="B2B2B2"/>
+                      </a:solidFill>
+                    </a:lnT>
+                    <a:lnB w="3600">
+                      <a:solidFill>
+                        <a:srgbClr val="B2B2B2"/>
+                      </a:solidFill>
+                    </a:lnB>
+                  </a:tcPr>
+                </a:tc>
+                <a:tc>
+                  <a:txBody>
+                    <a:bodyPr wrap="square" lIns="13716" rIns="13716" tIns="9144" bIns="5486"/>
                     <a:lstStyle/>
                     <a:p>
                       <a:pPr algn="l">
                         <a:lnSpc>
                           <a:spcPct val="88000"/>
                         </a:lnSpc>
-                        <a:spcBef>
-                          <a:spcPts val="0"/>
-                        </a:spcBef>
-                        <a:spcAft>
-                          <a:spcPts val="0"/>
-                        </a:spcAft>
                       </a:pPr>
                       <a:r>
-                        <a:rPr sz="430" b="0">
+                        <a:rPr sz="345" b="0">
                           <a:solidFill>
                             <a:srgbClr val="000000"/>
                           </a:solidFill>
-                          <a:latin typeface="Microsoft YaHei UI"/>
+                          <a:latin typeface="Noto Sans CJK SC"/>
                         </a:rPr>
-                        <a:t/>
+                        <a:t>Magic-VLA K02 是双系统通用具身大模型，Magic-Mix 是世界模型，含 WAM 和 Creator，参数未公开。</a:t>
                       </a:r>
                     </a:p>
                   </a:txBody>
-                  <a:tcPr anchor="ctr" marL="32004" marR="32004" marT="10972" marB="10972">
-                    <a:solidFill>
-                      <a:srgbClr val="F4F7FA"/>
-                    </a:solidFill>
-                    <a:lnL w="2400">
-                      <a:solidFill>
-                        <a:srgbClr val="B4C0CD"/>
-                      </a:solidFill>
-                    </a:lnL>
-                    <a:lnR w="2400">
-                      <a:solidFill>
-                        <a:srgbClr val="B4C0CD"/>
-                      </a:solidFill>
-                    </a:lnR>
-                    <a:lnT w="2400">
-                      <a:solidFill>
-                        <a:srgbClr val="B4C0CD"/>
-                      </a:solidFill>
-                    </a:lnT>
-                    <a:lnB w="2400">
-                      <a:solidFill>
-                        <a:srgbClr val="B4C0CD"/>
-                      </a:solidFill>
-                    </a:lnB>
-                  </a:tcPr>
-                </a:tc>
-                <a:tc>
-                  <a:txBody>
-                    <a:bodyPr wrap="square">
-                      <a:normAutofit/>
-                    </a:bodyPr>
+                  <a:tcPr anchor="t">
+                    <a:solidFill>
+                      <a:srgbClr val="FFFFFF"/>
+                    </a:solidFill>
+                    <a:lnL w="3600">
+                      <a:solidFill>
+                        <a:srgbClr val="B2B2B2"/>
+                      </a:solidFill>
+                    </a:lnL>
+                    <a:lnR w="3600">
+                      <a:solidFill>
+                        <a:srgbClr val="B2B2B2"/>
+                      </a:solidFill>
+                    </a:lnR>
+                    <a:lnT w="3600">
+                      <a:solidFill>
+                        <a:srgbClr val="B2B2B2"/>
+                      </a:solidFill>
+                    </a:lnT>
+                    <a:lnB w="3600">
+                      <a:solidFill>
+                        <a:srgbClr val="B2B2B2"/>
+                      </a:solidFill>
+                    </a:lnB>
+                  </a:tcPr>
+                </a:tc>
+                <a:tc>
+                  <a:txBody>
+                    <a:bodyPr wrap="square" lIns="13716" rIns="13716" tIns="9144" bIns="5486"/>
                     <a:lstStyle/>
                     <a:p>
                       <a:pPr algn="l">
                         <a:lnSpc>
                           <a:spcPct val="88000"/>
                         </a:lnSpc>
-                        <a:spcBef>
-                          <a:spcPts val="0"/>
-                        </a:spcBef>
-                        <a:spcAft>
-                          <a:spcPts val="0"/>
-                        </a:spcAft>
                       </a:pPr>
                       <a:r>
-                        <a:rPr sz="430" b="0">
+                        <a:rPr sz="345" b="0">
                           <a:solidFill>
                             <a:srgbClr val="000000"/>
                           </a:solidFill>
-                          <a:latin typeface="Microsoft YaHei UI"/>
+                          <a:latin typeface="Noto Sans CJK SC"/>
                         </a:rPr>
-                        <a:t/>
+                        <a:t>官方披露 motion control network、6D visual servoing 和 full-body imitation learning。</a:t>
                       </a:r>
                     </a:p>
                   </a:txBody>
-                  <a:tcPr anchor="ctr" marL="32004" marR="32004" marT="10972" marB="10972">
-                    <a:solidFill>
-                      <a:srgbClr val="F4F7FA"/>
-                    </a:solidFill>
-                    <a:lnL w="2400">
-                      <a:solidFill>
-                        <a:srgbClr val="B4C0CD"/>
-                      </a:solidFill>
-                    </a:lnL>
-                    <a:lnR w="2400">
-                      <a:solidFill>
-                        <a:srgbClr val="B4C0CD"/>
-                      </a:solidFill>
-                    </a:lnR>
-                    <a:lnT w="2400">
-                      <a:solidFill>
-                        <a:srgbClr val="B4C0CD"/>
-                      </a:solidFill>
-                    </a:lnT>
-                    <a:lnB w="2400">
-                      <a:solidFill>
-                        <a:srgbClr val="B4C0CD"/>
-                      </a:solidFill>
-                    </a:lnB>
-                  </a:tcPr>
-                </a:tc>
-              </a:tr>
-              <a:tr h="379827">
-                <a:tc vMerge="1">
-                  <a:txBody>
-                    <a:bodyPr wrap="square">
-                      <a:normAutofit/>
-                    </a:bodyPr>
+                  <a:tcPr anchor="t">
+                    <a:solidFill>
+                      <a:srgbClr val="FFFFFF"/>
+                    </a:solidFill>
+                    <a:lnL w="3600">
+                      <a:solidFill>
+                        <a:srgbClr val="B2B2B2"/>
+                      </a:solidFill>
+                    </a:lnL>
+                    <a:lnR w="3600">
+                      <a:solidFill>
+                        <a:srgbClr val="B2B2B2"/>
+                      </a:solidFill>
+                    </a:lnR>
+                    <a:lnT w="3600">
+                      <a:solidFill>
+                        <a:srgbClr val="B2B2B2"/>
+                      </a:solidFill>
+                    </a:lnT>
+                    <a:lnB w="3600">
+                      <a:solidFill>
+                        <a:srgbClr val="B2B2B2"/>
+                      </a:solidFill>
+                    </a:lnB>
+                  </a:tcPr>
+                </a:tc>
+                <a:tc>
+                  <a:txBody>
+                    <a:bodyPr wrap="square" lIns="13716" rIns="13716" tIns="9144" bIns="5486"/>
                     <a:lstStyle/>
                     <a:p>
                       <a:pPr algn="l">
                         <a:lnSpc>
                           <a:spcPct val="88000"/>
                         </a:lnSpc>
-                        <a:spcBef>
-                          <a:spcPts val="0"/>
-                        </a:spcBef>
-                        <a:spcAft>
-                          <a:spcPts val="0"/>
-                        </a:spcAft>
                       </a:pPr>
                       <a:r>
-                        <a:rPr sz="455" b="0">
+                        <a:rPr sz="345" b="0">
                           <a:solidFill>
                             <a:srgbClr val="000000"/>
                           </a:solidFill>
-                          <a:latin typeface="Microsoft YaHei UI"/>
+                          <a:latin typeface="Noto Sans CJK SC"/>
                         </a:rPr>
-                        <a:t/>
+                        <a:t>MagicBot Gen1 为 8-core CPU + 100 TOPS AI Processor；模型生产部署算力未公开。</a:t>
                       </a:r>
                     </a:p>
                   </a:txBody>
-                  <a:tcPr anchor="ctr" marL="32004" marR="32004" marT="10972" marB="10972">
-                    <a:solidFill>
-                      <a:srgbClr val="FFFFFF"/>
-                    </a:solidFill>
-                    <a:lnL w="2400">
-                      <a:solidFill>
-                        <a:srgbClr val="B4C0CD"/>
-                      </a:solidFill>
-                    </a:lnL>
-                    <a:lnR w="2400">
-                      <a:solidFill>
-                        <a:srgbClr val="B4C0CD"/>
-                      </a:solidFill>
-                    </a:lnR>
-                    <a:lnT w="2400">
-                      <a:solidFill>
-                        <a:srgbClr val="B4C0CD"/>
-                      </a:solidFill>
-                    </a:lnT>
-                    <a:lnB w="2400">
-                      <a:solidFill>
-                        <a:srgbClr val="B4C0CD"/>
-                      </a:solidFill>
-                    </a:lnB>
-                  </a:tcPr>
-                </a:tc>
-                <a:tc>
-                  <a:txBody>
-                    <a:bodyPr wrap="square">
-                      <a:normAutofit/>
-                    </a:bodyPr>
+                  <a:tcPr anchor="t">
+                    <a:solidFill>
+                      <a:srgbClr val="FFFFFF"/>
+                    </a:solidFill>
+                    <a:lnL w="3600">
+                      <a:solidFill>
+                        <a:srgbClr val="B2B2B2"/>
+                      </a:solidFill>
+                    </a:lnL>
+                    <a:lnR w="3600">
+                      <a:solidFill>
+                        <a:srgbClr val="B2B2B2"/>
+                      </a:solidFill>
+                    </a:lnR>
+                    <a:lnT w="3600">
+                      <a:solidFill>
+                        <a:srgbClr val="B2B2B2"/>
+                      </a:solidFill>
+                    </a:lnT>
+                    <a:lnB w="3600">
+                      <a:solidFill>
+                        <a:srgbClr val="B2B2B2"/>
+                      </a:solidFill>
+                    </a:lnB>
+                  </a:tcPr>
+                </a:tc>
+                <a:tc>
+                  <a:txBody>
+                    <a:bodyPr wrap="square" lIns="13716" rIns="13716" tIns="9144" bIns="5486"/>
+                    <a:lstStyle/>
+                    <a:p>
+                      <a:pPr algn="l">
+                        <a:lnSpc>
+                          <a:spcPct val="88000"/>
+                        </a:lnSpc>
+                      </a:pPr>
+                    </a:p>
+                  </a:txBody>
+                  <a:tcPr anchor="t">
+                    <a:solidFill>
+                      <a:srgbClr val="FFFFFF"/>
+                    </a:solidFill>
+                    <a:lnL w="3600">
+                      <a:solidFill>
+                        <a:srgbClr val="B2B2B2"/>
+                      </a:solidFill>
+                    </a:lnL>
+                    <a:lnR w="3600">
+                      <a:solidFill>
+                        <a:srgbClr val="B2B2B2"/>
+                      </a:solidFill>
+                    </a:lnR>
+                    <a:lnT w="3600">
+                      <a:solidFill>
+                        <a:srgbClr val="B2B2B2"/>
+                      </a:solidFill>
+                    </a:lnT>
+                    <a:lnB w="3600">
+                      <a:solidFill>
+                        <a:srgbClr val="B2B2B2"/>
+                      </a:solidFill>
+                    </a:lnB>
+                  </a:tcPr>
+                </a:tc>
+              </a:tr>
+              <a:tr h="272034">
+                <a:tc vMerge="1">
+                  <a:txBody>
+                    <a:bodyPr/>
+                    <a:lstStyle/>
+                    <a:p/>
+                  </a:txBody>
+                  <a:tcPr>
+                    <a:lnL w="3600">
+                      <a:solidFill>
+                        <a:srgbClr val="B2B2B2"/>
+                      </a:solidFill>
+                    </a:lnL>
+                    <a:lnR w="3600">
+                      <a:solidFill>
+                        <a:srgbClr val="B2B2B2"/>
+                      </a:solidFill>
+                    </a:lnR>
+                    <a:lnT w="3600">
+                      <a:solidFill>
+                        <a:srgbClr val="B2B2B2"/>
+                      </a:solidFill>
+                    </a:lnT>
+                    <a:lnB w="3600">
+                      <a:solidFill>
+                        <a:srgbClr val="B2B2B2"/>
+                      </a:solidFill>
+                    </a:lnB>
+                  </a:tcPr>
+                </a:tc>
+                <a:tc>
+                  <a:txBody>
+                    <a:bodyPr wrap="square" lIns="13716" rIns="13716" tIns="9144" bIns="5486"/>
                     <a:lstStyle/>
                     <a:p>
                       <a:pPr algn="ctr">
                         <a:lnSpc>
                           <a:spcPct val="88000"/>
                         </a:lnSpc>
-                        <a:spcBef>
-                          <a:spcPts val="0"/>
-                        </a:spcBef>
-                        <a:spcAft>
-                          <a:spcPts val="0"/>
-                        </a:spcAft>
                       </a:pPr>
                       <a:r>
-                        <a:rPr sz="455" b="1">
+                        <a:rPr sz="365" b="0">
                           <a:solidFill>
                             <a:srgbClr val="000000"/>
                           </a:solidFill>
-                          <a:latin typeface="Microsoft YaHei UI"/>
+                          <a:latin typeface="Noto Sans CJK SC"/>
                         </a:rPr>
-                        <a:t>自变量 X Square</a:t>
+                        <a:t>京东 JoyAI</a:t>
                       </a:r>
                     </a:p>
                   </a:txBody>
-                  <a:tcPr anchor="ctr" marL="32004" marR="32004" marT="10972" marB="10972">
-                    <a:solidFill>
-                      <a:srgbClr val="FFFFFF"/>
-                    </a:solidFill>
-                    <a:lnL w="2400">
-                      <a:solidFill>
-                        <a:srgbClr val="B4C0CD"/>
-                      </a:solidFill>
-                    </a:lnL>
-                    <a:lnR w="2400">
-                      <a:solidFill>
-                        <a:srgbClr val="B4C0CD"/>
-                      </a:solidFill>
-                    </a:lnR>
-                    <a:lnT w="2400">
-                      <a:solidFill>
-                        <a:srgbClr val="B4C0CD"/>
-                      </a:solidFill>
-                    </a:lnT>
-                    <a:lnB w="2400">
-                      <a:solidFill>
-                        <a:srgbClr val="B4C0CD"/>
-                      </a:solidFill>
-                    </a:lnB>
-                  </a:tcPr>
-                </a:tc>
-                <a:tc>
-                  <a:txBody>
-                    <a:bodyPr wrap="square">
-                      <a:normAutofit/>
-                    </a:bodyPr>
+                  <a:tcPr anchor="t">
+                    <a:solidFill>
+                      <a:srgbClr val="FFFFFF"/>
+                    </a:solidFill>
+                    <a:lnL w="3600">
+                      <a:solidFill>
+                        <a:srgbClr val="B2B2B2"/>
+                      </a:solidFill>
+                    </a:lnL>
+                    <a:lnR w="3600">
+                      <a:solidFill>
+                        <a:srgbClr val="B2B2B2"/>
+                      </a:solidFill>
+                    </a:lnR>
+                    <a:lnT w="3600">
+                      <a:solidFill>
+                        <a:srgbClr val="B2B2B2"/>
+                      </a:solidFill>
+                    </a:lnT>
+                    <a:lnB w="3600">
+                      <a:solidFill>
+                        <a:srgbClr val="B2B2B2"/>
+                      </a:solidFill>
+                    </a:lnB>
+                  </a:tcPr>
+                </a:tc>
+                <a:tc>
+                  <a:txBody>
+                    <a:bodyPr wrap="square" lIns="13716" rIns="13716" tIns="9144" bIns="5486"/>
                     <a:lstStyle/>
                     <a:p>
                       <a:pPr algn="l">
                         <a:lnSpc>
                           <a:spcPct val="88000"/>
                         </a:lnSpc>
-                        <a:spcBef>
-                          <a:spcPts val="0"/>
-                        </a:spcBef>
-                        <a:spcAft>
-                          <a:spcPts val="0"/>
-                        </a:spcAft>
                       </a:pPr>
                       <a:r>
-                        <a:rPr sz="430" b="0">
+                        <a:rPr sz="345" b="0">
                           <a:solidFill>
                             <a:srgbClr val="000000"/>
                           </a:solidFill>
-                          <a:latin typeface="Microsoft YaHei UI"/>
+                          <a:latin typeface="Noto Sans CJK SC"/>
                         </a:rPr>
-                        <a:t>WALL-B 是世界统一模型，Wall-OSS-0.5 是端到端预训练模型，参数未公开。</a:t>
+                        <a:t>JoyAI-RA 0.1 是 VLA，JoyAI-RA 0.5 是 VLWA 框架，含 VLM、世界模型和 action expert。</a:t>
                       </a:r>
                     </a:p>
                   </a:txBody>
-                  <a:tcPr anchor="ctr" marL="32004" marR="32004" marT="10972" marB="10972">
-                    <a:solidFill>
-                      <a:srgbClr val="FFFFFF"/>
-                    </a:solidFill>
-                    <a:lnL w="2400">
-                      <a:solidFill>
-                        <a:srgbClr val="B4C0CD"/>
-                      </a:solidFill>
-                    </a:lnL>
-                    <a:lnR w="2400">
-                      <a:solidFill>
-                        <a:srgbClr val="B4C0CD"/>
-                      </a:solidFill>
-                    </a:lnR>
-                    <a:lnT w="2400">
-                      <a:solidFill>
-                        <a:srgbClr val="B4C0CD"/>
-                      </a:solidFill>
-                    </a:lnT>
-                    <a:lnB w="2400">
-                      <a:solidFill>
-                        <a:srgbClr val="B4C0CD"/>
-                      </a:solidFill>
-                    </a:lnB>
-                  </a:tcPr>
-                </a:tc>
-                <a:tc>
-                  <a:txBody>
-                    <a:bodyPr wrap="square">
-                      <a:normAutofit/>
-                    </a:bodyPr>
+                  <a:tcPr anchor="t">
+                    <a:solidFill>
+                      <a:srgbClr val="FFFFFF"/>
+                    </a:solidFill>
+                    <a:lnL w="3600">
+                      <a:solidFill>
+                        <a:srgbClr val="B2B2B2"/>
+                      </a:solidFill>
+                    </a:lnL>
+                    <a:lnR w="3600">
+                      <a:solidFill>
+                        <a:srgbClr val="B2B2B2"/>
+                      </a:solidFill>
+                    </a:lnR>
+                    <a:lnT w="3600">
+                      <a:solidFill>
+                        <a:srgbClr val="B2B2B2"/>
+                      </a:solidFill>
+                    </a:lnT>
+                    <a:lnB w="3600">
+                      <a:solidFill>
+                        <a:srgbClr val="B2B2B2"/>
+                      </a:solidFill>
+                    </a:lnB>
+                  </a:tcPr>
+                </a:tc>
+                <a:tc>
+                  <a:txBody>
+                    <a:bodyPr wrap="square" lIns="13716" rIns="13716" tIns="9144" bIns="5486"/>
                     <a:lstStyle/>
                     <a:p>
                       <a:pPr algn="l">
                         <a:lnSpc>
                           <a:spcPct val="88000"/>
                         </a:lnSpc>
-                        <a:spcBef>
-                          <a:spcPts val="0"/>
-                        </a:spcBef>
-                        <a:spcAft>
-                          <a:spcPts val="0"/>
-                        </a:spcAft>
+                      </a:pPr>
+                    </a:p>
+                  </a:txBody>
+                  <a:tcPr anchor="t">
+                    <a:solidFill>
+                      <a:srgbClr val="FFFFFF"/>
+                    </a:solidFill>
+                    <a:lnL w="3600">
+                      <a:solidFill>
+                        <a:srgbClr val="B2B2B2"/>
+                      </a:solidFill>
+                    </a:lnL>
+                    <a:lnR w="3600">
+                      <a:solidFill>
+                        <a:srgbClr val="B2B2B2"/>
+                      </a:solidFill>
+                    </a:lnR>
+                    <a:lnT w="3600">
+                      <a:solidFill>
+                        <a:srgbClr val="B2B2B2"/>
+                      </a:solidFill>
+                    </a:lnT>
+                    <a:lnB w="3600">
+                      <a:solidFill>
+                        <a:srgbClr val="B2B2B2"/>
+                      </a:solidFill>
+                    </a:lnB>
+                  </a:tcPr>
+                </a:tc>
+                <a:tc>
+                  <a:txBody>
+                    <a:bodyPr wrap="square" lIns="13716" rIns="13716" tIns="9144" bIns="5486"/>
+                    <a:lstStyle/>
+                    <a:p>
+                      <a:pPr algn="l">
+                        <a:lnSpc>
+                          <a:spcPct val="88000"/>
+                        </a:lnSpc>
                       </a:pPr>
                       <a:r>
-                        <a:rPr sz="455" b="0">
+                        <a:rPr sz="345" b="0">
                           <a:solidFill>
                             <a:srgbClr val="000000"/>
                           </a:solidFill>
-                          <a:latin typeface="Microsoft YaHei UI"/>
+                          <a:latin typeface="Noto Sans CJK SC"/>
                         </a:rPr>
-                        <a:t/>
+                        <a:t>京东云/JoyInside 提供生态与云侧能力，机器人本体端侧算力未公开。</a:t>
                       </a:r>
                     </a:p>
                   </a:txBody>
-                  <a:tcPr anchor="ctr" marL="32004" marR="32004" marT="10972" marB="10972">
-                    <a:solidFill>
-                      <a:srgbClr val="FFFFFF"/>
-                    </a:solidFill>
-                    <a:lnL w="2400">
-                      <a:solidFill>
-                        <a:srgbClr val="B4C0CD"/>
-                      </a:solidFill>
-                    </a:lnL>
-                    <a:lnR w="2400">
-                      <a:solidFill>
-                        <a:srgbClr val="B4C0CD"/>
-                      </a:solidFill>
-                    </a:lnR>
-                    <a:lnT w="2400">
-                      <a:solidFill>
-                        <a:srgbClr val="B4C0CD"/>
-                      </a:solidFill>
-                    </a:lnT>
-                    <a:lnB w="2400">
-                      <a:solidFill>
-                        <a:srgbClr val="B4C0CD"/>
-                      </a:solidFill>
-                    </a:lnB>
-                  </a:tcPr>
-                </a:tc>
-                <a:tc>
-                  <a:txBody>
-                    <a:bodyPr wrap="square">
-                      <a:normAutofit/>
-                    </a:bodyPr>
+                  <a:tcPr anchor="t">
+                    <a:solidFill>
+                      <a:srgbClr val="FFFFFF"/>
+                    </a:solidFill>
+                    <a:lnL w="3600">
+                      <a:solidFill>
+                        <a:srgbClr val="B2B2B2"/>
+                      </a:solidFill>
+                    </a:lnL>
+                    <a:lnR w="3600">
+                      <a:solidFill>
+                        <a:srgbClr val="B2B2B2"/>
+                      </a:solidFill>
+                    </a:lnR>
+                    <a:lnT w="3600">
+                      <a:solidFill>
+                        <a:srgbClr val="B2B2B2"/>
+                      </a:solidFill>
+                    </a:lnT>
+                    <a:lnB w="3600">
+                      <a:solidFill>
+                        <a:srgbClr val="B2B2B2"/>
+                      </a:solidFill>
+                    </a:lnB>
+                  </a:tcPr>
+                </a:tc>
+                <a:tc>
+                  <a:txBody>
+                    <a:bodyPr wrap="square" lIns="13716" rIns="13716" tIns="9144" bIns="5486"/>
                     <a:lstStyle/>
                     <a:p>
                       <a:pPr algn="l">
                         <a:lnSpc>
                           <a:spcPct val="88000"/>
                         </a:lnSpc>
-                        <a:spcBef>
-                          <a:spcPts val="0"/>
-                        </a:spcBef>
-                        <a:spcAft>
-                          <a:spcPts val="0"/>
-                        </a:spcAft>
-                      </a:pPr>
-                      <a:r>
-                        <a:rPr sz="430" b="0">
-                          <a:solidFill>
-                            <a:srgbClr val="000000"/>
-                          </a:solidFill>
-                          <a:latin typeface="Microsoft YaHei UI"/>
-                        </a:rPr>
-                        <a:t>模型已上真机，端云分工未公开。</a:t>
-                      </a:r>
-                    </a:p>
-                  </a:txBody>
-                  <a:tcPr anchor="ctr" marL="32004" marR="32004" marT="10972" marB="10972">
-                    <a:solidFill>
-                      <a:srgbClr val="FFFFFF"/>
-                    </a:solidFill>
-                    <a:lnL w="2400">
-                      <a:solidFill>
-                        <a:srgbClr val="B4C0CD"/>
-                      </a:solidFill>
-                    </a:lnL>
-                    <a:lnR w="2400">
-                      <a:solidFill>
-                        <a:srgbClr val="B4C0CD"/>
-                      </a:solidFill>
-                    </a:lnR>
-                    <a:lnT w="2400">
-                      <a:solidFill>
-                        <a:srgbClr val="B4C0CD"/>
-                      </a:solidFill>
-                    </a:lnT>
-                    <a:lnB w="2400">
-                      <a:solidFill>
-                        <a:srgbClr val="B4C0CD"/>
-                      </a:solidFill>
-                    </a:lnB>
-                  </a:tcPr>
-                </a:tc>
-                <a:tc>
-                  <a:txBody>
-                    <a:bodyPr wrap="square">
-                      <a:normAutofit/>
-                    </a:bodyPr>
-                    <a:lstStyle/>
-                    <a:p>
-                      <a:pPr algn="l">
-                        <a:lnSpc>
-                          <a:spcPct val="88000"/>
-                        </a:lnSpc>
-                        <a:spcBef>
-                          <a:spcPts val="0"/>
-                        </a:spcBef>
-                        <a:spcAft>
-                          <a:spcPts val="0"/>
-                        </a:spcAft>
-                      </a:pPr>
-                      <a:r>
-                        <a:rPr sz="430" b="0">
-                          <a:solidFill>
-                            <a:srgbClr val="000000"/>
-                          </a:solidFill>
-                          <a:latin typeface="Microsoft YaHei UI"/>
-                        </a:rPr>
-                        <a:t/>
-                      </a:r>
-                    </a:p>
-                  </a:txBody>
-                  <a:tcPr anchor="ctr" marL="32004" marR="32004" marT="10972" marB="10972">
-                    <a:solidFill>
-                      <a:srgbClr val="FFFFFF"/>
-                    </a:solidFill>
-                    <a:lnL w="2400">
-                      <a:solidFill>
-                        <a:srgbClr val="B4C0CD"/>
-                      </a:solidFill>
-                    </a:lnL>
-                    <a:lnR w="2400">
-                      <a:solidFill>
-                        <a:srgbClr val="B4C0CD"/>
-                      </a:solidFill>
-                    </a:lnR>
-                    <a:lnT w="2400">
-                      <a:solidFill>
-                        <a:srgbClr val="B4C0CD"/>
-                      </a:solidFill>
-                    </a:lnT>
-                    <a:lnB w="2400">
-                      <a:solidFill>
-                        <a:srgbClr val="B4C0CD"/>
+                      </a:pPr>
+                    </a:p>
+                  </a:txBody>
+                  <a:tcPr anchor="t">
+                    <a:solidFill>
+                      <a:srgbClr val="FFFFFF"/>
+                    </a:solidFill>
+                    <a:lnL w="3600">
+                      <a:solidFill>
+                        <a:srgbClr val="B2B2B2"/>
+                      </a:solidFill>
+                    </a:lnL>
+                    <a:lnR w="3600">
+                      <a:solidFill>
+                        <a:srgbClr val="B2B2B2"/>
+                      </a:solidFill>
+                    </a:lnR>
+                    <a:lnT w="3600">
+                      <a:solidFill>
+                        <a:srgbClr val="B2B2B2"/>
+                      </a:solidFill>
+                    </a:lnT>
+                    <a:lnB w="3600">
+                      <a:solidFill>
+                        <a:srgbClr val="B2B2B2"/>
                       </a:solidFill>
                     </a:lnB>
                   </a:tcPr>
@@ -7854,24 +8349,24 @@
       </p:graphicFrame>
       <p:sp>
         <p:nvSpPr>
-          <p:cNvPr id="5" name="Rectangle 4"/>
+          <p:cNvPr id="4" name="Rectangle 3"/>
           <p:cNvSpPr/>
           <p:nvPr/>
         </p:nvSpPr>
         <p:spPr>
           <a:xfrm>
-            <a:off x="164592" y="5998464"/>
-            <a:ext cx="11868912" cy="621792"/>
+            <a:off x="201168" y="5943600"/>
+            <a:ext cx="11795760" cy="667512"/>
           </a:xfrm>
           <a:prstGeom prst="rect">
             <a:avLst/>
           </a:prstGeom>
           <a:solidFill>
-            <a:srgbClr val="E8EDF2"/>
+            <a:srgbClr val="F7F8F9"/>
           </a:solidFill>
-          <a:ln>
+          <a:ln w="6350">
             <a:solidFill>
-              <a:srgbClr val="B4C0CD"/>
+              <a:srgbClr val="B2B2B2"/>
             </a:solidFill>
           </a:ln>
         </p:spPr>
@@ -7899,14 +8394,14 @@
       </p:sp>
       <p:sp>
         <p:nvSpPr>
-          <p:cNvPr id="6" name="TextBox 5"/>
+          <p:cNvPr id="5" name="TextBox 4"/>
           <p:cNvSpPr txBox="1"/>
           <p:nvPr/>
         </p:nvSpPr>
         <p:spPr>
           <a:xfrm>
-            <a:off x="310896" y="6089904"/>
-            <a:ext cx="1417320" cy="164592"/>
+            <a:off x="347472" y="5998464"/>
+            <a:ext cx="11384280" cy="256032"/>
           </a:xfrm>
           <a:prstGeom prst="rect">
             <a:avLst/>
@@ -7914,24 +8409,63 @@
           <a:noFill/>
         </p:spPr>
         <p:txBody>
-          <a:bodyPr wrap="square">
-            <a:noAutofit/>
+          <a:bodyPr wrap="none" lIns="0" rIns="0" tIns="0" bIns="0">
+            <a:spAutoFit/>
           </a:bodyPr>
           <a:lstStyle/>
           <a:p>
             <a:pPr algn="l">
-              <a:spcAft>
-                <a:spcPts val="0"/>
-              </a:spcAft>
+              <a:lnSpc>
+                <a:spcPct val="95000"/>
+              </a:lnSpc>
             </a:pPr>
             <a:r>
-              <a:rPr sz="600" b="1">
+              <a:rPr sz="670">
                 <a:solidFill>
                   <a:srgbClr val="000000"/>
                 </a:solidFill>
-                <a:latin typeface="Microsoft YaHei UI"/>
+                <a:latin typeface="Noto Sans CJK SC"/>
               </a:rPr>
-              <a:t>现状：端侧算力上台阶</a:t>
+              <a:t>1. 端侧算力已分层：70TOPS（云深处/Aura）、80/100TOPS（星尘S100/宇树G1-D/魔法Gen1）、560/700TOPS（S600/智元/星海图/星尘IRB10）、1000TOPS（灵境N1100），NVIDIA Thor/T5000 已到 2070 FP4 TFLOPS。</a:t>
+            </a:r>
+          </a:p>
+        </p:txBody>
+      </p:sp>
+      <p:sp>
+        <p:nvSpPr>
+          <p:cNvPr id="6" name="TextBox 5"/>
+          <p:cNvSpPr txBox="1"/>
+          <p:nvPr/>
+        </p:nvSpPr>
+        <p:spPr>
+          <a:xfrm>
+            <a:off x="347472" y="6281927"/>
+            <a:ext cx="11384280" cy="256032"/>
+          </a:xfrm>
+          <a:prstGeom prst="rect">
+            <a:avLst/>
+          </a:prstGeom>
+          <a:noFill/>
+        </p:spPr>
+        <p:txBody>
+          <a:bodyPr wrap="none" lIns="0" rIns="0" tIns="0" bIns="0">
+            <a:spAutoFit/>
+          </a:bodyPr>
+          <a:lstStyle/>
+          <a:p>
+            <a:pPr algn="l">
+              <a:lnSpc>
+                <a:spcPct val="95000"/>
+              </a:lnSpc>
+            </a:pPr>
+            <a:r>
+              <a:rPr sz="670">
+                <a:solidFill>
+                  <a:srgbClr val="000000"/>
+                </a:solidFill>
+                <a:latin typeface="Noto Sans CJK SC"/>
+              </a:rPr>
+              <a:t>2. 部署前景：1-7B VLA/LLM 与 3B VLM/30Hz 更适合纯端侧；72B/100B 大脑更适合端云协同，端侧承担安全、离线和快反应，云侧承担规划、调度和持续迭代。</a:t>
             </a:r>
           </a:p>
         </p:txBody>
@@ -7944,8 +8478,8 @@
         </p:nvSpPr>
         <p:spPr>
           <a:xfrm>
-            <a:off x="1755648" y="6044184"/>
-            <a:ext cx="4315968" cy="420624"/>
+            <a:off x="201168" y="6629400"/>
+            <a:ext cx="11795760" cy="146304"/>
           </a:xfrm>
           <a:prstGeom prst="rect">
             <a:avLst/>
@@ -7953,141 +8487,20 @@
           <a:noFill/>
         </p:spPr>
         <p:txBody>
-          <a:bodyPr wrap="square">
-            <a:noAutofit/>
+          <a:bodyPr wrap="none">
+            <a:spAutoFit/>
           </a:bodyPr>
           <a:lstStyle/>
           <a:p>
-            <a:pPr algn="l">
-              <a:spcAft>
-                <a:spcPts val="0"/>
-              </a:spcAft>
-            </a:pPr>
+            <a:pPr algn="r"/>
             <a:r>
-              <a:rPr sz="512" b="0">
+              <a:rPr sz="500">
                 <a:solidFill>
                   <a:srgbClr val="000000"/>
                 </a:solidFill>
-                <a:latin typeface="Microsoft YaHei UI"/>
+                <a:latin typeface="Noto Sans CJK SC"/>
               </a:rPr>
-              <a:t>NVIDIA 从 Orin 级走向 Thor 级：T4000 为 1200 FP4 TFLOPS，T5000/AGX Thor 为 2070 FP4 TFLOPS、128GB；整机侧已有 560/700/1000 TOPS 样本。</a:t>
-            </a:r>
-          </a:p>
-        </p:txBody>
-      </p:sp>
-      <p:sp>
-        <p:nvSpPr>
-          <p:cNvPr id="8" name="TextBox 7"/>
-          <p:cNvSpPr txBox="1"/>
-          <p:nvPr/>
-        </p:nvSpPr>
-        <p:spPr>
-          <a:xfrm>
-            <a:off x="6181344" y="6089904"/>
-            <a:ext cx="1417320" cy="164592"/>
-          </a:xfrm>
-          <a:prstGeom prst="rect">
-            <a:avLst/>
-          </a:prstGeom>
-          <a:noFill/>
-        </p:spPr>
-        <p:txBody>
-          <a:bodyPr wrap="square">
-            <a:noAutofit/>
-          </a:bodyPr>
-          <a:lstStyle/>
-          <a:p>
-            <a:pPr algn="l">
-              <a:spcAft>
-                <a:spcPts val="0"/>
-              </a:spcAft>
-            </a:pPr>
-            <a:r>
-              <a:rPr sz="600" b="1">
-                <a:solidFill>
-                  <a:srgbClr val="000000"/>
-                </a:solidFill>
-                <a:latin typeface="Microsoft YaHei UI"/>
-              </a:rPr>
-              <a:t>前景：端云协同仍主流</a:t>
-            </a:r>
-          </a:p>
-        </p:txBody>
-      </p:sp>
-      <p:sp>
-        <p:nvSpPr>
-          <p:cNvPr id="9" name="TextBox 8"/>
-          <p:cNvSpPr txBox="1"/>
-          <p:nvPr/>
-        </p:nvSpPr>
-        <p:spPr>
-          <a:xfrm>
-            <a:off x="7626096" y="6044184"/>
-            <a:ext cx="4315968" cy="420624"/>
-          </a:xfrm>
-          <a:prstGeom prst="rect">
-            <a:avLst/>
-          </a:prstGeom>
-          <a:noFill/>
-        </p:spPr>
-        <p:txBody>
-          <a:bodyPr wrap="square">
-            <a:noAutofit/>
-          </a:bodyPr>
-          <a:lstStyle/>
-          <a:p>
-            <a:pPr algn="l">
-              <a:spcAft>
-                <a:spcPts val="0"/>
-              </a:spcAft>
-            </a:pPr>
-            <a:r>
-              <a:rPr sz="512" b="0">
-                <a:solidFill>
-                  <a:srgbClr val="000000"/>
-                </a:solidFill>
-                <a:latin typeface="Microsoft YaHei UI"/>
-              </a:rPr>
-              <a:t>1-7B VLA/LLM 更易纯端侧，72B/100B 大脑更适合端云协同；端侧跑安全、离线和快反应，云侧跑规划、调度和持续迭代。</a:t>
-            </a:r>
-          </a:p>
-        </p:txBody>
-      </p:sp>
-      <p:sp>
-        <p:nvSpPr>
-          <p:cNvPr id="10" name="TextBox 9"/>
-          <p:cNvSpPr txBox="1"/>
-          <p:nvPr/>
-        </p:nvSpPr>
-        <p:spPr>
-          <a:xfrm>
-            <a:off x="182880" y="6647688"/>
-            <a:ext cx="11521440" cy="109728"/>
-          </a:xfrm>
-          <a:prstGeom prst="rect">
-            <a:avLst/>
-          </a:prstGeom>
-          <a:noFill/>
-        </p:spPr>
-        <p:txBody>
-          <a:bodyPr wrap="square">
-            <a:noAutofit/>
-          </a:bodyPr>
-          <a:lstStyle/>
-          <a:p>
-            <a:pPr algn="l">
-              <a:spcAft>
-                <a:spcPts val="0"/>
-              </a:spcAft>
-            </a:pPr>
-            <a:r>
-              <a:rPr sz="430" b="0">
-                <a:solidFill>
-                  <a:srgbClr val="000000"/>
-                </a:solidFill>
-                <a:latin typeface="Microsoft YaHei UI"/>
-              </a:rPr>
-              <a:t>* 部署占比按报告末尾 22 家/项目扩展样本统计；Nexo 700TOPS、中国兵器无网端侧大脑、讯飞 MS-N1100 云端/纯端切换为会场口径。</a:t>
+              <a:t>来源见同仓库 README；表内空白表示未检索到公开量化信息。</a:t>
             </a:r>
           </a:p>
         </p:txBody>
